--- a/day2-deck/decks/Opcode Benchmarks - House Style.pptx
+++ b/day2-deck/decks/Opcode Benchmarks - House Style.pptx
@@ -5724,7 +5724,7 @@
           <a:p>
             <a:r>
               <a:rPr lang="en-US" dirty="0"/>
-              <a:t>Source: Qlik - Closed Repair Orders. Customer pay, Jan-Sep by close month. Same-store, INEOS excluded (opened 2026). GMC Prescott body shop labor excluded. BRAKE FLUSH % = brake fluid service ROs ÷ customer-pay ROs on the op-code report basis. YTD from YTD totals, not the mean of months.</a:t>
+              <a:t>Source: Qlik - Closed Repair Orders. Customer pay, Jan-Sep by close month. Same-store, INEOS excluded (opened 2026). GMC Prescott body shop labor excluded. BRAKE FLUID % = brake fluid service ROs ÷ customer-pay ROs on the op-code report basis. YTD from YTD totals, not the mean of months.</a:t>
             </a:r>
             <a:endParaRPr lang="en-US" dirty="0"/>
           </a:p>
@@ -19127,7 +19127,7 @@
                 <a:ea typeface="Inter" pitchFamily="34" charset="-122"/>
                 <a:cs typeface="Inter" pitchFamily="34" charset="-120"/>
               </a:rPr>
-              <a:t>BRAKE FLUSH %</a:t>
+              <a:t>BRAKE FLUID %</a:t>
             </a:r>
             <a:endParaRPr lang="en-US" sz="1500" dirty="0"/>
           </a:p>

--- a/day2-deck/decks/Opcode Benchmarks - House Style.pptx
+++ b/day2-deck/decks/Opcode Benchmarks - House Style.pptx
@@ -196,9 +196,9 @@
           </c:marker>
           <c:cat>
             <c:multiLvlStrRef>
-              <c:f>Sheet1!$A$2:$A$10</c:f>
+              <c:f>Sheet1!$A$2:$A$13</c:f>
               <c:multiLvlStrCache>
-                <c:ptCount val="9"/>
+                <c:ptCount val="12"/>
                 <c:lvl>
                   <c:pt idx="0">
                     <c:v>Jan</c:v>
@@ -227,16 +227,25 @@
                   <c:pt idx="8">
                     <c:v>Sep</c:v>
                   </c:pt>
+                  <c:pt idx="9">
+                    <c:v>Oct</c:v>
+                  </c:pt>
+                  <c:pt idx="10">
+                    <c:v>Nov</c:v>
+                  </c:pt>
+                  <c:pt idx="11">
+                    <c:v>Dec</c:v>
+                  </c:pt>
                 </c:lvl>
               </c:multiLvlStrCache>
             </c:multiLvlStrRef>
           </c:cat>
           <c:val>
             <c:numRef>
-              <c:f>Sheet1!$B$2:$B$10</c:f>
+              <c:f>Sheet1!$B$2:$B$13</c:f>
               <c:numCache>
                 <c:formatCode>General</c:formatCode>
-                <c:ptCount val="9"/>
+                <c:ptCount val="12"/>
                 <c:pt idx="0">
                   <c:v>12.2</c:v>
                 </c:pt>
@@ -263,6 +272,15 @@
                 </c:pt>
                 <c:pt idx="8">
                   <c:v>13.1</c:v>
+                </c:pt>
+                <c:pt idx="9">
+                  <c:v/>
+                </c:pt>
+                <c:pt idx="10">
+                  <c:v/>
+                </c:pt>
+                <c:pt idx="11">
+                  <c:v/>
                 </c:pt>
               </c:numCache>
             </c:numRef>
@@ -479,9 +497,9 @@
           </c:marker>
           <c:cat>
             <c:multiLvlStrRef>
-              <c:f>Sheet1!$A$2:$A$10</c:f>
+              <c:f>Sheet1!$A$2:$A$13</c:f>
               <c:multiLvlStrCache>
-                <c:ptCount val="9"/>
+                <c:ptCount val="12"/>
                 <c:lvl>
                   <c:pt idx="0">
                     <c:v>Jan</c:v>
@@ -510,16 +528,25 @@
                   <c:pt idx="8">
                     <c:v>Sep</c:v>
                   </c:pt>
+                  <c:pt idx="9">
+                    <c:v>Oct</c:v>
+                  </c:pt>
+                  <c:pt idx="10">
+                    <c:v>Nov</c:v>
+                  </c:pt>
+                  <c:pt idx="11">
+                    <c:v>Dec</c:v>
+                  </c:pt>
                 </c:lvl>
               </c:multiLvlStrCache>
             </c:multiLvlStrRef>
           </c:cat>
           <c:val>
             <c:numRef>
-              <c:f>Sheet1!$B$2:$B$10</c:f>
+              <c:f>Sheet1!$B$2:$B$13</c:f>
               <c:numCache>
                 <c:formatCode>General</c:formatCode>
-                <c:ptCount val="9"/>
+                <c:ptCount val="12"/>
                 <c:pt idx="0">
                   <c:v>8.5</c:v>
                 </c:pt>
@@ -546,6 +573,15 @@
                 </c:pt>
                 <c:pt idx="8">
                   <c:v>9.3</c:v>
+                </c:pt>
+                <c:pt idx="9">
+                  <c:v/>
+                </c:pt>
+                <c:pt idx="10">
+                  <c:v/>
+                </c:pt>
+                <c:pt idx="11">
+                  <c:v/>
                 </c:pt>
               </c:numCache>
             </c:numRef>
@@ -771,9 +807,9 @@
           </c:marker>
           <c:cat>
             <c:multiLvlStrRef>
-              <c:f>Sheet1!$A$2:$A$10</c:f>
+              <c:f>Sheet1!$A$2:$A$13</c:f>
               <c:multiLvlStrCache>
-                <c:ptCount val="9"/>
+                <c:ptCount val="12"/>
                 <c:lvl>
                   <c:pt idx="0">
                     <c:v>Jan</c:v>
@@ -802,16 +838,25 @@
                   <c:pt idx="8">
                     <c:v>Sep</c:v>
                   </c:pt>
+                  <c:pt idx="9">
+                    <c:v>Oct</c:v>
+                  </c:pt>
+                  <c:pt idx="10">
+                    <c:v>Nov</c:v>
+                  </c:pt>
+                  <c:pt idx="11">
+                    <c:v>Dec</c:v>
+                  </c:pt>
                 </c:lvl>
               </c:multiLvlStrCache>
             </c:multiLvlStrRef>
           </c:cat>
           <c:val>
             <c:numRef>
-              <c:f>Sheet1!$B$2:$B$10</c:f>
+              <c:f>Sheet1!$B$2:$B$13</c:f>
               <c:numCache>
                 <c:formatCode>General</c:formatCode>
-                <c:ptCount val="9"/>
+                <c:ptCount val="12"/>
                 <c:pt idx="0">
                   <c:v>7.4</c:v>
                 </c:pt>
@@ -837,6 +882,15 @@
                   <c:v>8.1</c:v>
                 </c:pt>
                 <c:pt idx="8">
+                  <c:v>7.5</c:v>
+                </c:pt>
+                <c:pt idx="9">
+                  <c:v>7.5</c:v>
+                </c:pt>
+                <c:pt idx="10">
+                  <c:v>7.5</c:v>
+                </c:pt>
+                <c:pt idx="11">
                   <c:v>7.5</c:v>
                 </c:pt>
               </c:numCache>
@@ -1066,9 +1120,9 @@
           </c:marker>
           <c:cat>
             <c:multiLvlStrRef>
-              <c:f>Sheet1!$A$2:$A$10</c:f>
+              <c:f>Sheet1!$A$2:$A$13</c:f>
               <c:multiLvlStrCache>
-                <c:ptCount val="9"/>
+                <c:ptCount val="12"/>
                 <c:lvl>
                   <c:pt idx="0">
                     <c:v>Jan</c:v>
@@ -1097,16 +1151,25 @@
                   <c:pt idx="8">
                     <c:v>Sep</c:v>
                   </c:pt>
+                  <c:pt idx="9">
+                    <c:v>Oct</c:v>
+                  </c:pt>
+                  <c:pt idx="10">
+                    <c:v>Nov</c:v>
+                  </c:pt>
+                  <c:pt idx="11">
+                    <c:v>Dec</c:v>
+                  </c:pt>
                 </c:lvl>
               </c:multiLvlStrCache>
             </c:multiLvlStrRef>
           </c:cat>
           <c:val>
             <c:numRef>
-              <c:f>Sheet1!$B$2:$B$10</c:f>
+              <c:f>Sheet1!$B$2:$B$13</c:f>
               <c:numCache>
                 <c:formatCode>General</c:formatCode>
-                <c:ptCount val="9"/>
+                <c:ptCount val="12"/>
                 <c:pt idx="0">
                   <c:v>7.4</c:v>
                 </c:pt>
@@ -1132,6 +1195,15 @@
                   <c:v>8.1</c:v>
                 </c:pt>
                 <c:pt idx="8">
+                  <c:v>7.5</c:v>
+                </c:pt>
+                <c:pt idx="9">
+                  <c:v>7.5</c:v>
+                </c:pt>
+                <c:pt idx="10">
+                  <c:v>7.5</c:v>
+                </c:pt>
+                <c:pt idx="11">
                   <c:v>7.5</c:v>
                 </c:pt>
               </c:numCache>
@@ -1373,9 +1445,9 @@
           </c:marker>
           <c:cat>
             <c:multiLvlStrRef>
-              <c:f>Sheet1!$A$2:$A$10</c:f>
+              <c:f>Sheet1!$A$2:$A$13</c:f>
               <c:multiLvlStrCache>
-                <c:ptCount val="9"/>
+                <c:ptCount val="12"/>
                 <c:lvl>
                   <c:pt idx="0">
                     <c:v>Jan</c:v>
@@ -1404,16 +1476,25 @@
                   <c:pt idx="8">
                     <c:v>Sep</c:v>
                   </c:pt>
+                  <c:pt idx="9">
+                    <c:v>Oct</c:v>
+                  </c:pt>
+                  <c:pt idx="10">
+                    <c:v>Nov</c:v>
+                  </c:pt>
+                  <c:pt idx="11">
+                    <c:v>Dec</c:v>
+                  </c:pt>
                 </c:lvl>
               </c:multiLvlStrCache>
             </c:multiLvlStrRef>
           </c:cat>
           <c:val>
             <c:numRef>
-              <c:f>Sheet1!$B$2:$B$10</c:f>
+              <c:f>Sheet1!$B$2:$B$13</c:f>
               <c:numCache>
                 <c:formatCode>General</c:formatCode>
-                <c:ptCount val="9"/>
+                <c:ptCount val="12"/>
                 <c:pt idx="0">
                   <c:v>5.4</c:v>
                 </c:pt>
@@ -1440,6 +1521,15 @@
                 </c:pt>
                 <c:pt idx="8">
                   <c:v>5.8</c:v>
+                </c:pt>
+                <c:pt idx="9">
+                  <c:v/>
+                </c:pt>
+                <c:pt idx="10">
+                  <c:v/>
+                </c:pt>
+                <c:pt idx="11">
+                  <c:v/>
                 </c:pt>
               </c:numCache>
             </c:numRef>
@@ -1656,9 +1746,9 @@
           </c:marker>
           <c:cat>
             <c:multiLvlStrRef>
-              <c:f>Sheet1!$A$2:$A$10</c:f>
+              <c:f>Sheet1!$A$2:$A$13</c:f>
               <c:multiLvlStrCache>
-                <c:ptCount val="9"/>
+                <c:ptCount val="12"/>
                 <c:lvl>
                   <c:pt idx="0">
                     <c:v>Jan</c:v>
@@ -1687,16 +1777,25 @@
                   <c:pt idx="8">
                     <c:v>Sep</c:v>
                   </c:pt>
+                  <c:pt idx="9">
+                    <c:v>Oct</c:v>
+                  </c:pt>
+                  <c:pt idx="10">
+                    <c:v>Nov</c:v>
+                  </c:pt>
+                  <c:pt idx="11">
+                    <c:v>Dec</c:v>
+                  </c:pt>
                 </c:lvl>
               </c:multiLvlStrCache>
             </c:multiLvlStrRef>
           </c:cat>
           <c:val>
             <c:numRef>
-              <c:f>Sheet1!$B$2:$B$10</c:f>
+              <c:f>Sheet1!$B$2:$B$13</c:f>
               <c:numCache>
                 <c:formatCode>General</c:formatCode>
-                <c:ptCount val="9"/>
+                <c:ptCount val="12"/>
                 <c:pt idx="0">
                   <c:v>5.4</c:v>
                 </c:pt>
@@ -1723,6 +1822,15 @@
                 </c:pt>
                 <c:pt idx="8">
                   <c:v>5.8</c:v>
+                </c:pt>
+                <c:pt idx="9">
+                  <c:v/>
+                </c:pt>
+                <c:pt idx="10">
+                  <c:v/>
+                </c:pt>
+                <c:pt idx="11">
+                  <c:v/>
                 </c:pt>
               </c:numCache>
             </c:numRef>
@@ -1948,9 +2056,9 @@
           </c:marker>
           <c:cat>
             <c:multiLvlStrRef>
-              <c:f>Sheet1!$A$2:$A$10</c:f>
+              <c:f>Sheet1!$A$2:$A$13</c:f>
               <c:multiLvlStrCache>
-                <c:ptCount val="9"/>
+                <c:ptCount val="12"/>
                 <c:lvl>
                   <c:pt idx="0">
                     <c:v>Jan</c:v>
@@ -1979,16 +2087,25 @@
                   <c:pt idx="8">
                     <c:v>Sep</c:v>
                   </c:pt>
+                  <c:pt idx="9">
+                    <c:v>Oct</c:v>
+                  </c:pt>
+                  <c:pt idx="10">
+                    <c:v>Nov</c:v>
+                  </c:pt>
+                  <c:pt idx="11">
+                    <c:v>Dec</c:v>
+                  </c:pt>
                 </c:lvl>
               </c:multiLvlStrCache>
             </c:multiLvlStrRef>
           </c:cat>
           <c:val>
             <c:numRef>
-              <c:f>Sheet1!$B$2:$B$10</c:f>
+              <c:f>Sheet1!$B$2:$B$13</c:f>
               <c:numCache>
                 <c:formatCode>General</c:formatCode>
-                <c:ptCount val="9"/>
+                <c:ptCount val="12"/>
                 <c:pt idx="0">
                   <c:v>3.9</c:v>
                 </c:pt>
@@ -2015,6 +2132,15 @@
                 </c:pt>
                 <c:pt idx="8">
                   <c:v>4.5</c:v>
+                </c:pt>
+                <c:pt idx="9">
+                  <c:v>4.6</c:v>
+                </c:pt>
+                <c:pt idx="10">
+                  <c:v>4.8</c:v>
+                </c:pt>
+                <c:pt idx="11">
+                  <c:v>4.9</c:v>
                 </c:pt>
               </c:numCache>
             </c:numRef>
@@ -2243,9 +2369,9 @@
           </c:marker>
           <c:cat>
             <c:multiLvlStrRef>
-              <c:f>Sheet1!$A$2:$A$10</c:f>
+              <c:f>Sheet1!$A$2:$A$13</c:f>
               <c:multiLvlStrCache>
-                <c:ptCount val="9"/>
+                <c:ptCount val="12"/>
                 <c:lvl>
                   <c:pt idx="0">
                     <c:v>Jan</c:v>
@@ -2274,16 +2400,25 @@
                   <c:pt idx="8">
                     <c:v>Sep</c:v>
                   </c:pt>
+                  <c:pt idx="9">
+                    <c:v>Oct</c:v>
+                  </c:pt>
+                  <c:pt idx="10">
+                    <c:v>Nov</c:v>
+                  </c:pt>
+                  <c:pt idx="11">
+                    <c:v>Dec</c:v>
+                  </c:pt>
                 </c:lvl>
               </c:multiLvlStrCache>
             </c:multiLvlStrRef>
           </c:cat>
           <c:val>
             <c:numRef>
-              <c:f>Sheet1!$B$2:$B$10</c:f>
+              <c:f>Sheet1!$B$2:$B$13</c:f>
               <c:numCache>
                 <c:formatCode>General</c:formatCode>
-                <c:ptCount val="9"/>
+                <c:ptCount val="12"/>
                 <c:pt idx="0">
                   <c:v>3.9</c:v>
                 </c:pt>
@@ -2310,6 +2445,15 @@
                 </c:pt>
                 <c:pt idx="8">
                   <c:v>4.5</c:v>
+                </c:pt>
+                <c:pt idx="9">
+                  <c:v>4.6</c:v>
+                </c:pt>
+                <c:pt idx="10">
+                  <c:v>4.8</c:v>
+                </c:pt>
+                <c:pt idx="11">
+                  <c:v>4.9</c:v>
                 </c:pt>
               </c:numCache>
             </c:numRef>
@@ -2547,9 +2691,9 @@
           </c:marker>
           <c:cat>
             <c:multiLvlStrRef>
-              <c:f>Sheet1!$A$2:$A$10</c:f>
+              <c:f>Sheet1!$A$2:$A$13</c:f>
               <c:multiLvlStrCache>
-                <c:ptCount val="9"/>
+                <c:ptCount val="12"/>
                 <c:lvl>
                   <c:pt idx="0">
                     <c:v>Jan</c:v>
@@ -2578,16 +2722,25 @@
                   <c:pt idx="8">
                     <c:v>Sep</c:v>
                   </c:pt>
+                  <c:pt idx="9">
+                    <c:v>Oct</c:v>
+                  </c:pt>
+                  <c:pt idx="10">
+                    <c:v>Nov</c:v>
+                  </c:pt>
+                  <c:pt idx="11">
+                    <c:v>Dec</c:v>
+                  </c:pt>
                 </c:lvl>
               </c:multiLvlStrCache>
             </c:multiLvlStrRef>
           </c:cat>
           <c:val>
             <c:numRef>
-              <c:f>Sheet1!$B$2:$B$10</c:f>
+              <c:f>Sheet1!$B$2:$B$13</c:f>
               <c:numCache>
                 <c:formatCode>General</c:formatCode>
-                <c:ptCount val="9"/>
+                <c:ptCount val="12"/>
                 <c:pt idx="0">
                   <c:v>12.2</c:v>
                 </c:pt>
@@ -2614,6 +2767,15 @@
                 </c:pt>
                 <c:pt idx="8">
                   <c:v>13.1</c:v>
+                </c:pt>
+                <c:pt idx="9">
+                  <c:v/>
+                </c:pt>
+                <c:pt idx="10">
+                  <c:v/>
+                </c:pt>
+                <c:pt idx="11">
+                  <c:v/>
                 </c:pt>
               </c:numCache>
             </c:numRef>
@@ -2839,9 +3001,9 @@
           </c:marker>
           <c:cat>
             <c:multiLvlStrRef>
-              <c:f>Sheet1!$A$2:$A$10</c:f>
+              <c:f>Sheet1!$A$2:$A$13</c:f>
               <c:multiLvlStrCache>
-                <c:ptCount val="9"/>
+                <c:ptCount val="12"/>
                 <c:lvl>
                   <c:pt idx="0">
                     <c:v>Jan</c:v>
@@ -2870,16 +3032,25 @@
                   <c:pt idx="8">
                     <c:v>Sep</c:v>
                   </c:pt>
+                  <c:pt idx="9">
+                    <c:v>Oct</c:v>
+                  </c:pt>
+                  <c:pt idx="10">
+                    <c:v>Nov</c:v>
+                  </c:pt>
+                  <c:pt idx="11">
+                    <c:v>Dec</c:v>
+                  </c:pt>
                 </c:lvl>
               </c:multiLvlStrCache>
             </c:multiLvlStrRef>
           </c:cat>
           <c:val>
             <c:numRef>
-              <c:f>Sheet1!$B$2:$B$10</c:f>
+              <c:f>Sheet1!$B$2:$B$13</c:f>
               <c:numCache>
                 <c:formatCode>General</c:formatCode>
-                <c:ptCount val="9"/>
+                <c:ptCount val="12"/>
                 <c:pt idx="0">
                   <c:v>11.2</c:v>
                 </c:pt>
@@ -2906,6 +3077,15 @@
                 </c:pt>
                 <c:pt idx="8">
                   <c:v>11.5</c:v>
+                </c:pt>
+                <c:pt idx="9">
+                  <c:v>12.1</c:v>
+                </c:pt>
+                <c:pt idx="10">
+                  <c:v>12.3</c:v>
+                </c:pt>
+                <c:pt idx="11">
+                  <c:v>11.8</c:v>
                 </c:pt>
               </c:numCache>
             </c:numRef>
@@ -3134,9 +3314,9 @@
           </c:marker>
           <c:cat>
             <c:multiLvlStrRef>
-              <c:f>Sheet1!$A$2:$A$10</c:f>
+              <c:f>Sheet1!$A$2:$A$13</c:f>
               <c:multiLvlStrCache>
-                <c:ptCount val="9"/>
+                <c:ptCount val="12"/>
                 <c:lvl>
                   <c:pt idx="0">
                     <c:v>Jan</c:v>
@@ -3165,16 +3345,25 @@
                   <c:pt idx="8">
                     <c:v>Sep</c:v>
                   </c:pt>
+                  <c:pt idx="9">
+                    <c:v>Oct</c:v>
+                  </c:pt>
+                  <c:pt idx="10">
+                    <c:v>Nov</c:v>
+                  </c:pt>
+                  <c:pt idx="11">
+                    <c:v>Dec</c:v>
+                  </c:pt>
                 </c:lvl>
               </c:multiLvlStrCache>
             </c:multiLvlStrRef>
           </c:cat>
           <c:val>
             <c:numRef>
-              <c:f>Sheet1!$B$2:$B$10</c:f>
+              <c:f>Sheet1!$B$2:$B$13</c:f>
               <c:numCache>
                 <c:formatCode>General</c:formatCode>
-                <c:ptCount val="9"/>
+                <c:ptCount val="12"/>
                 <c:pt idx="0">
                   <c:v>11.2</c:v>
                 </c:pt>
@@ -3201,6 +3390,15 @@
                 </c:pt>
                 <c:pt idx="8">
                   <c:v>11.5</c:v>
+                </c:pt>
+                <c:pt idx="9">
+                  <c:v>12.1</c:v>
+                </c:pt>
+                <c:pt idx="10">
+                  <c:v>12.3</c:v>
+                </c:pt>
+                <c:pt idx="11">
+                  <c:v>11.8</c:v>
                 </c:pt>
               </c:numCache>
             </c:numRef>
@@ -3441,9 +3639,9 @@
           </c:marker>
           <c:cat>
             <c:multiLvlStrRef>
-              <c:f>Sheet1!$A$2:$A$10</c:f>
+              <c:f>Sheet1!$A$2:$A$13</c:f>
               <c:multiLvlStrCache>
-                <c:ptCount val="9"/>
+                <c:ptCount val="12"/>
                 <c:lvl>
                   <c:pt idx="0">
                     <c:v>Jan</c:v>
@@ -3472,16 +3670,25 @@
                   <c:pt idx="8">
                     <c:v>Sep</c:v>
                   </c:pt>
+                  <c:pt idx="9">
+                    <c:v>Oct</c:v>
+                  </c:pt>
+                  <c:pt idx="10">
+                    <c:v>Nov</c:v>
+                  </c:pt>
+                  <c:pt idx="11">
+                    <c:v>Dec</c:v>
+                  </c:pt>
                 </c:lvl>
               </c:multiLvlStrCache>
             </c:multiLvlStrRef>
           </c:cat>
           <c:val>
             <c:numRef>
-              <c:f>Sheet1!$B$2:$B$10</c:f>
+              <c:f>Sheet1!$B$2:$B$13</c:f>
               <c:numCache>
                 <c:formatCode>General</c:formatCode>
-                <c:ptCount val="9"/>
+                <c:ptCount val="12"/>
                 <c:pt idx="0">
                   <c:v>7.6</c:v>
                 </c:pt>
@@ -3508,6 +3715,15 @@
                 </c:pt>
                 <c:pt idx="8">
                   <c:v>8.1</c:v>
+                </c:pt>
+                <c:pt idx="9">
+                  <c:v/>
+                </c:pt>
+                <c:pt idx="10">
+                  <c:v/>
+                </c:pt>
+                <c:pt idx="11">
+                  <c:v/>
                 </c:pt>
               </c:numCache>
             </c:numRef>
@@ -3724,9 +3940,9 @@
           </c:marker>
           <c:cat>
             <c:multiLvlStrRef>
-              <c:f>Sheet1!$A$2:$A$10</c:f>
+              <c:f>Sheet1!$A$2:$A$13</c:f>
               <c:multiLvlStrCache>
-                <c:ptCount val="9"/>
+                <c:ptCount val="12"/>
                 <c:lvl>
                   <c:pt idx="0">
                     <c:v>Jan</c:v>
@@ -3755,16 +3971,25 @@
                   <c:pt idx="8">
                     <c:v>Sep</c:v>
                   </c:pt>
+                  <c:pt idx="9">
+                    <c:v>Oct</c:v>
+                  </c:pt>
+                  <c:pt idx="10">
+                    <c:v>Nov</c:v>
+                  </c:pt>
+                  <c:pt idx="11">
+                    <c:v>Dec</c:v>
+                  </c:pt>
                 </c:lvl>
               </c:multiLvlStrCache>
             </c:multiLvlStrRef>
           </c:cat>
           <c:val>
             <c:numRef>
-              <c:f>Sheet1!$B$2:$B$10</c:f>
+              <c:f>Sheet1!$B$2:$B$13</c:f>
               <c:numCache>
                 <c:formatCode>General</c:formatCode>
-                <c:ptCount val="9"/>
+                <c:ptCount val="12"/>
                 <c:pt idx="0">
                   <c:v>7.6</c:v>
                 </c:pt>
@@ -3791,6 +4016,15 @@
                 </c:pt>
                 <c:pt idx="8">
                   <c:v>8.1</c:v>
+                </c:pt>
+                <c:pt idx="9">
+                  <c:v/>
+                </c:pt>
+                <c:pt idx="10">
+                  <c:v/>
+                </c:pt>
+                <c:pt idx="11">
+                  <c:v/>
                 </c:pt>
               </c:numCache>
             </c:numRef>
@@ -4016,9 +4250,9 @@
           </c:marker>
           <c:cat>
             <c:multiLvlStrRef>
-              <c:f>Sheet1!$A$2:$A$10</c:f>
+              <c:f>Sheet1!$A$2:$A$13</c:f>
               <c:multiLvlStrCache>
-                <c:ptCount val="9"/>
+                <c:ptCount val="12"/>
                 <c:lvl>
                   <c:pt idx="0">
                     <c:v>Jan</c:v>
@@ -4047,16 +4281,25 @@
                   <c:pt idx="8">
                     <c:v>Sep</c:v>
                   </c:pt>
+                  <c:pt idx="9">
+                    <c:v>Oct</c:v>
+                  </c:pt>
+                  <c:pt idx="10">
+                    <c:v>Nov</c:v>
+                  </c:pt>
+                  <c:pt idx="11">
+                    <c:v>Dec</c:v>
+                  </c:pt>
                 </c:lvl>
               </c:multiLvlStrCache>
             </c:multiLvlStrRef>
           </c:cat>
           <c:val>
             <c:numRef>
-              <c:f>Sheet1!$B$2:$B$10</c:f>
+              <c:f>Sheet1!$B$2:$B$13</c:f>
               <c:numCache>
                 <c:formatCode>General</c:formatCode>
-                <c:ptCount val="9"/>
+                <c:ptCount val="12"/>
                 <c:pt idx="0">
                   <c:v>6.3</c:v>
                 </c:pt>
@@ -4083,6 +4326,15 @@
                 </c:pt>
                 <c:pt idx="8">
                   <c:v>6.7</c:v>
+                </c:pt>
+                <c:pt idx="9">
+                  <c:v>6.6</c:v>
+                </c:pt>
+                <c:pt idx="10">
+                  <c:v>6.8</c:v>
+                </c:pt>
+                <c:pt idx="11">
+                  <c:v>6.8</c:v>
                 </c:pt>
               </c:numCache>
             </c:numRef>
@@ -4311,9 +4563,9 @@
           </c:marker>
           <c:cat>
             <c:multiLvlStrRef>
-              <c:f>Sheet1!$A$2:$A$10</c:f>
+              <c:f>Sheet1!$A$2:$A$13</c:f>
               <c:multiLvlStrCache>
-                <c:ptCount val="9"/>
+                <c:ptCount val="12"/>
                 <c:lvl>
                   <c:pt idx="0">
                     <c:v>Jan</c:v>
@@ -4342,16 +4594,25 @@
                   <c:pt idx="8">
                     <c:v>Sep</c:v>
                   </c:pt>
+                  <c:pt idx="9">
+                    <c:v>Oct</c:v>
+                  </c:pt>
+                  <c:pt idx="10">
+                    <c:v>Nov</c:v>
+                  </c:pt>
+                  <c:pt idx="11">
+                    <c:v>Dec</c:v>
+                  </c:pt>
                 </c:lvl>
               </c:multiLvlStrCache>
             </c:multiLvlStrRef>
           </c:cat>
           <c:val>
             <c:numRef>
-              <c:f>Sheet1!$B$2:$B$10</c:f>
+              <c:f>Sheet1!$B$2:$B$13</c:f>
               <c:numCache>
                 <c:formatCode>General</c:formatCode>
-                <c:ptCount val="9"/>
+                <c:ptCount val="12"/>
                 <c:pt idx="0">
                   <c:v>6.3</c:v>
                 </c:pt>
@@ -4378,6 +4639,15 @@
                 </c:pt>
                 <c:pt idx="8">
                   <c:v>6.7</c:v>
+                </c:pt>
+                <c:pt idx="9">
+                  <c:v>6.6</c:v>
+                </c:pt>
+                <c:pt idx="10">
+                  <c:v>6.8</c:v>
+                </c:pt>
+                <c:pt idx="11">
+                  <c:v>6.8</c:v>
                 </c:pt>
               </c:numCache>
             </c:numRef>
@@ -4618,9 +4888,9 @@
           </c:marker>
           <c:cat>
             <c:multiLvlStrRef>
-              <c:f>Sheet1!$A$2:$A$10</c:f>
+              <c:f>Sheet1!$A$2:$A$13</c:f>
               <c:multiLvlStrCache>
-                <c:ptCount val="9"/>
+                <c:ptCount val="12"/>
                 <c:lvl>
                   <c:pt idx="0">
                     <c:v>Jan</c:v>
@@ -4649,16 +4919,25 @@
                   <c:pt idx="8">
                     <c:v>Sep</c:v>
                   </c:pt>
+                  <c:pt idx="9">
+                    <c:v>Oct</c:v>
+                  </c:pt>
+                  <c:pt idx="10">
+                    <c:v>Nov</c:v>
+                  </c:pt>
+                  <c:pt idx="11">
+                    <c:v>Dec</c:v>
+                  </c:pt>
                 </c:lvl>
               </c:multiLvlStrCache>
             </c:multiLvlStrRef>
           </c:cat>
           <c:val>
             <c:numRef>
-              <c:f>Sheet1!$B$2:$B$10</c:f>
+              <c:f>Sheet1!$B$2:$B$13</c:f>
               <c:numCache>
                 <c:formatCode>General</c:formatCode>
-                <c:ptCount val="9"/>
+                <c:ptCount val="12"/>
                 <c:pt idx="0">
                   <c:v>8.5</c:v>
                 </c:pt>
@@ -4685,6 +4964,15 @@
                 </c:pt>
                 <c:pt idx="8">
                   <c:v>9.3</c:v>
+                </c:pt>
+                <c:pt idx="9">
+                  <c:v/>
+                </c:pt>
+                <c:pt idx="10">
+                  <c:v/>
+                </c:pt>
+                <c:pt idx="11">
+                  <c:v/>
                 </c:pt>
               </c:numCache>
             </c:numRef>

--- a/day2-deck/decks/Opcode Benchmarks - House Style.pptx
+++ b/day2-deck/decks/Opcode Benchmarks - House Style.pptx
@@ -363,11 +363,22 @@
         <c:axId val="2094734552"/>
         <c:scaling>
           <c:orientation val="minMax"/>
-          <c:max val="16"/>
-          <c:min val="10"/>
+          <c:max val="18"/>
+          <c:min val="8"/>
         </c:scaling>
         <c:delete val="0"/>
         <c:axPos val="l"/>
+        <c:majorGridlines>
+          <c:spPr>
+            <a:ln w="9525" cap="flat">
+              <a:solidFill>
+                <a:srgbClr val="D9D9D9"/>
+              </a:solidFill>
+              <a:prstDash val="solid"/>
+              <a:round/>
+            </a:ln>
+          </c:spPr>
+        </c:majorGridlines>
         <c:numFmt formatCode="0&quot;%&quot;" sourceLinked="0"/>
         <c:majorTickMark val="out"/>
         <c:minorTickMark val="none"/>
@@ -424,6 +435,1257 @@
 </file>
 
 <file path=ppt/charts/chart10.xml><?xml version="1.0" encoding="utf-8"?>
+<c:chartSpace xmlns:c="http://schemas.openxmlformats.org/drawingml/2006/chart" xmlns:a="http://schemas.openxmlformats.org/drawingml/2006/main" xmlns:r="http://schemas.openxmlformats.org/officeDocument/2006/relationships">
+  <c:date1904 val="0"/>
+  <c:roundedCorners val="1"/>
+  <c:chart>
+    <c:autoTitleDeleted val="1"/>
+    <c:plotArea>
+      <c:layout/>
+      <c:lineChart>
+        <c:varyColors val="0"/>
+        <c:ser>
+          <c:idx val="0"/>
+          <c:order val="0"/>
+          <c:tx>
+            <c:strRef>
+              <c:f>Sheet1!$B$1</c:f>
+              <c:strCache>
+                <c:ptCount val="1"/>
+                <c:pt idx="0">
+                  <c:v>2025</c:v>
+                </c:pt>
+              </c:strCache>
+            </c:strRef>
+          </c:tx>
+          <c:spPr>
+            <a:solidFill>
+              <a:srgbClr val="9AA3AD"/>
+            </a:solidFill>
+            <a:ln>
+              <a:noFill/>
+            </a:ln>
+            <a:effectLst/>
+          </c:spPr>
+          <c:invertIfNegative val="0"/>
+          <c:dLbls>
+            <c:numFmt formatCode="0.0&quot;%&quot;" sourceLinked="0"/>
+            <c:txPr>
+              <a:bodyPr/>
+              <a:lstStyle/>
+              <a:p>
+                <a:pPr>
+                  <a:defRPr b="0" i="0" strike="noStrike" sz="1400" u="none">
+                    <a:solidFill>
+                      <a:srgbClr val="1A1A1A"/>
+                    </a:solidFill>
+                    <a:latin typeface="+mn-lt"/>
+                  </a:defRPr>
+                </a:pPr>
+              </a:p>
+            </c:txPr>
+            <c:dLblPos val="b"/>
+            <c:showLegendKey val="0"/>
+            <c:showVal val="1"/>
+            <c:showCatName val="0"/>
+            <c:showSerName val="0"/>
+            <c:showPercent val="0"/>
+            <c:showBubbleSize val="0"/>
+            <c:showLeaderLines val="0"/>
+          </c:dLbls>
+          <c:marker>
+            <c:symbol val="none"/>
+            <c:size val="8"/>
+            <c:spPr>
+              <a:solidFill>
+                <a:srgbClr val="9AA3AD"/>
+              </a:solidFill>
+              <a:ln w="9525" cap="flat">
+                <a:solidFill>
+                  <a:srgbClr val="9AA3AD"/>
+                </a:solidFill>
+                <a:prstDash val="solid"/>
+                <a:round/>
+              </a:ln>
+              <a:effectLst/>
+            </c:spPr>
+          </c:marker>
+          <c:cat>
+            <c:multiLvlStrRef>
+              <c:f>Sheet1!$A$2:$A$13</c:f>
+              <c:multiLvlStrCache>
+                <c:ptCount val="12"/>
+                <c:lvl>
+                  <c:pt idx="0">
+                    <c:v>Jan</c:v>
+                  </c:pt>
+                  <c:pt idx="1">
+                    <c:v>Feb</c:v>
+                  </c:pt>
+                  <c:pt idx="2">
+                    <c:v>Mar</c:v>
+                  </c:pt>
+                  <c:pt idx="3">
+                    <c:v>Apr</c:v>
+                  </c:pt>
+                  <c:pt idx="4">
+                    <c:v>May</c:v>
+                  </c:pt>
+                  <c:pt idx="5">
+                    <c:v>Jun</c:v>
+                  </c:pt>
+                  <c:pt idx="6">
+                    <c:v>Jul</c:v>
+                  </c:pt>
+                  <c:pt idx="7">
+                    <c:v>Aug</c:v>
+                  </c:pt>
+                  <c:pt idx="8">
+                    <c:v>Sep</c:v>
+                  </c:pt>
+                  <c:pt idx="9">
+                    <c:v>Oct</c:v>
+                  </c:pt>
+                  <c:pt idx="10">
+                    <c:v>Nov</c:v>
+                  </c:pt>
+                  <c:pt idx="11">
+                    <c:v>Dec</c:v>
+                  </c:pt>
+                </c:lvl>
+              </c:multiLvlStrCache>
+            </c:multiLvlStrRef>
+          </c:cat>
+          <c:val>
+            <c:numRef>
+              <c:f>Sheet1!$B$2:$B$13</c:f>
+              <c:numCache>
+                <c:formatCode>General</c:formatCode>
+                <c:ptCount val="12"/>
+                <c:pt idx="0">
+                  <c:v>6.3</c:v>
+                </c:pt>
+                <c:pt idx="1">
+                  <c:v>7.1</c:v>
+                </c:pt>
+                <c:pt idx="2">
+                  <c:v>7.6</c:v>
+                </c:pt>
+                <c:pt idx="3">
+                  <c:v>6.9</c:v>
+                </c:pt>
+                <c:pt idx="4">
+                  <c:v>7.1</c:v>
+                </c:pt>
+                <c:pt idx="5">
+                  <c:v>7</c:v>
+                </c:pt>
+                <c:pt idx="6">
+                  <c:v>6.9</c:v>
+                </c:pt>
+                <c:pt idx="7">
+                  <c:v>7</c:v>
+                </c:pt>
+                <c:pt idx="8">
+                  <c:v>6.7</c:v>
+                </c:pt>
+                <c:pt idx="9">
+                  <c:v>6.6</c:v>
+                </c:pt>
+                <c:pt idx="10">
+                  <c:v/>
+                </c:pt>
+                <c:pt idx="11">
+                  <c:v/>
+                </c:pt>
+              </c:numCache>
+            </c:numRef>
+          </c:val>
+          <c:smooth val="0"/>
+        </c:ser>
+        <c:dLbls>
+          <c:numFmt formatCode="0.0&quot;%&quot;" sourceLinked="0"/>
+          <c:txPr>
+            <a:bodyPr/>
+            <a:lstStyle/>
+            <a:p>
+              <a:pPr>
+                <a:defRPr b="0" i="0" strike="noStrike" sz="1400" u="none">
+                  <a:solidFill>
+                    <a:srgbClr val="1A1A1A"/>
+                  </a:solidFill>
+                  <a:latin typeface="+mn-lt"/>
+                </a:defRPr>
+              </a:pPr>
+            </a:p>
+          </c:txPr>
+          <c:dLblPos val="b"/>
+          <c:showLegendKey val="0"/>
+          <c:showVal val="1"/>
+          <c:showCatName val="0"/>
+          <c:showSerName val="0"/>
+          <c:showPercent val="0"/>
+          <c:showBubbleSize val="0"/>
+          <c:showLeaderLines val="0"/>
+        </c:dLbls>
+        <c:marker val="1"/>
+        <c:axId val="2094734554"/>
+        <c:axId val="2094734552"/>
+        <c:axId val="2094734556"/>
+      </c:lineChart>
+      <c:catAx>
+        <c:axId val="2094734554"/>
+        <c:scaling>
+          <c:orientation val="minMax"/>
+        </c:scaling>
+        <c:delete val="0"/>
+        <c:axPos val="b"/>
+        <c:numFmt formatCode="General" sourceLinked="1"/>
+        <c:majorTickMark val="out"/>
+        <c:minorTickMark val="none"/>
+        <c:tickLblPos val="low"/>
+        <c:spPr>
+          <a:ln w="12700" cap="flat">
+            <a:noFill/>
+            <a:prstDash val="solid"/>
+            <a:round/>
+          </a:ln>
+        </c:spPr>
+        <c:txPr>
+          <a:bodyPr/>
+          <a:lstStyle/>
+          <a:p>
+            <a:pPr>
+              <a:defRPr sz="1400" b="0" i="0" u="none" strike="noStrike">
+                <a:solidFill>
+                  <a:srgbClr val="FFFFFF"/>
+                </a:solidFill>
+                <a:latin typeface="+mn-lt"/>
+              </a:defRPr>
+            </a:pPr>
+            <a:endParaRPr lang="en-US"/>
+          </a:p>
+        </c:txPr>
+        <c:crossAx val="2094734552"/>
+        <c:crosses val="min"/>
+        <c:auto val="1"/>
+        <c:lblAlgn val="ctr"/>
+        <c:noMultiLvlLbl val="1"/>
+      </c:catAx>
+      <c:valAx>
+        <c:axId val="2094734552"/>
+        <c:scaling>
+          <c:orientation val="minMax"/>
+          <c:max val="20"/>
+          <c:min val="0"/>
+        </c:scaling>
+        <c:delete val="0"/>
+        <c:axPos val="l"/>
+        <c:numFmt formatCode="0&quot;%&quot;" sourceLinked="0"/>
+        <c:majorTickMark val="out"/>
+        <c:minorTickMark val="none"/>
+        <c:tickLblPos val="nextTo"/>
+        <c:spPr>
+          <a:ln w="12700" cap="flat">
+            <a:noFill/>
+            <a:prstDash val="solid"/>
+            <a:round/>
+          </a:ln>
+        </c:spPr>
+        <c:txPr>
+          <a:bodyPr/>
+          <a:lstStyle/>
+          <a:p>
+            <a:pPr>
+              <a:defRPr sz="1400" b="0" i="0" u="none" strike="noStrike">
+                <a:solidFill>
+                  <a:srgbClr val="FFFFFF"/>
+                </a:solidFill>
+                <a:latin typeface="+mn-lt"/>
+              </a:defRPr>
+            </a:pPr>
+            <a:endParaRPr lang="en-US"/>
+          </a:p>
+        </c:txPr>
+        <c:crossAx val="2094734554"/>
+        <c:crosses val="autoZero"/>
+        <c:crossBetween val="between"/>
+        <c:majorUnit val="5"/>
+      </c:valAx>
+      <c:spPr>
+        <a:solidFill>
+          <a:srgbClr val="FFFFFF">
+            <a:alpha val="0"/>
+          </a:srgbClr>
+        </a:solidFill>
+        <a:ln>
+          <a:noFill/>
+        </a:ln>
+        <a:effectLst/>
+      </c:spPr>
+    </c:plotArea>
+    <c:plotVisOnly val="1"/>
+    <c:dispBlanksAs val="span"/>
+  </c:chart>
+  <c:spPr>
+    <a:solidFill>
+      <a:srgbClr val="FFFFFF">
+        <a:alpha val="0"/>
+      </a:srgbClr>
+    </a:solidFill>
+    <a:ln>
+      <a:noFill/>
+    </a:ln>
+    <a:effectLst/>
+  </c:spPr>
+  <c:externalData r:id="rId1">
+    <c:autoUpdate val="0"/>
+  </c:externalData>
+</c:chartSpace>
+</file>
+
+<file path=ppt/charts/chart11.xml><?xml version="1.0" encoding="utf-8"?>
+<c:chartSpace xmlns:c="http://schemas.openxmlformats.org/drawingml/2006/chart" xmlns:a="http://schemas.openxmlformats.org/drawingml/2006/main" xmlns:r="http://schemas.openxmlformats.org/officeDocument/2006/relationships">
+  <c:date1904 val="0"/>
+  <c:roundedCorners val="1"/>
+  <c:chart>
+    <c:autoTitleDeleted val="1"/>
+    <c:plotArea>
+      <c:layout/>
+      <c:lineChart>
+        <c:varyColors val="0"/>
+        <c:ser>
+          <c:idx val="0"/>
+          <c:order val="0"/>
+          <c:tx>
+            <c:strRef>
+              <c:f>Sheet1!$B$1</c:f>
+              <c:strCache>
+                <c:ptCount val="1"/>
+                <c:pt idx="0">
+                  <c:v>bench0</c:v>
+                </c:pt>
+              </c:strCache>
+            </c:strRef>
+          </c:tx>
+          <c:spPr>
+            <a:solidFill>
+              <a:srgbClr val="595959"/>
+            </a:solidFill>
+            <a:ln w="25400" cap="flat">
+              <a:solidFill>
+                <a:srgbClr val="595959"/>
+              </a:solidFill>
+              <a:prstDash val="dash"/>
+              <a:round/>
+            </a:ln>
+            <a:effectLst/>
+          </c:spPr>
+          <c:invertIfNegative val="0"/>
+          <c:dLbls>
+            <c:numFmt formatCode="0.0&quot;%&quot;" sourceLinked="0"/>
+            <c:txPr>
+              <a:bodyPr/>
+              <a:lstStyle/>
+              <a:p>
+                <a:pPr>
+                  <a:defRPr b="0" i="0" strike="noStrike" sz="1400" u="none">
+                    <a:solidFill>
+                      <a:srgbClr val="1A1A1A"/>
+                    </a:solidFill>
+                    <a:latin typeface="+mn-lt"/>
+                  </a:defRPr>
+                </a:pPr>
+              </a:p>
+            </c:txPr>
+            <c:showLegendKey val="0"/>
+            <c:showVal val="0"/>
+            <c:showCatName val="0"/>
+            <c:showSerName val="0"/>
+            <c:showPercent val="0"/>
+            <c:showBubbleSize val="0"/>
+            <c:showLeaderLines val="0"/>
+          </c:dLbls>
+          <c:marker>
+            <c:symbol val="none"/>
+            <c:size val="8"/>
+            <c:spPr>
+              <a:solidFill>
+                <a:srgbClr val="595959"/>
+              </a:solidFill>
+              <a:ln w="9525" cap="flat">
+                <a:solidFill>
+                  <a:srgbClr val="595959"/>
+                </a:solidFill>
+                <a:prstDash val="solid"/>
+                <a:round/>
+              </a:ln>
+              <a:effectLst/>
+            </c:spPr>
+          </c:marker>
+          <c:cat>
+            <c:multiLvlStrRef>
+              <c:f>Sheet1!$A$2:$A$13</c:f>
+              <c:multiLvlStrCache>
+                <c:ptCount val="12"/>
+                <c:lvl>
+                  <c:pt idx="0">
+                    <c:v>Jan</c:v>
+                  </c:pt>
+                  <c:pt idx="1">
+                    <c:v>Feb</c:v>
+                  </c:pt>
+                  <c:pt idx="2">
+                    <c:v>Mar</c:v>
+                  </c:pt>
+                  <c:pt idx="3">
+                    <c:v>Apr</c:v>
+                  </c:pt>
+                  <c:pt idx="4">
+                    <c:v>May</c:v>
+                  </c:pt>
+                  <c:pt idx="5">
+                    <c:v>Jun</c:v>
+                  </c:pt>
+                  <c:pt idx="6">
+                    <c:v>Jul</c:v>
+                  </c:pt>
+                  <c:pt idx="7">
+                    <c:v>Aug</c:v>
+                  </c:pt>
+                  <c:pt idx="8">
+                    <c:v>Sep</c:v>
+                  </c:pt>
+                  <c:pt idx="9">
+                    <c:v>Oct</c:v>
+                  </c:pt>
+                  <c:pt idx="10">
+                    <c:v>Nov</c:v>
+                  </c:pt>
+                  <c:pt idx="11">
+                    <c:v>Dec</c:v>
+                  </c:pt>
+                </c:lvl>
+              </c:multiLvlStrCache>
+            </c:multiLvlStrRef>
+          </c:cat>
+          <c:val>
+            <c:numRef>
+              <c:f>Sheet1!$B$2:$B$13</c:f>
+              <c:numCache>
+                <c:formatCode>General</c:formatCode>
+                <c:ptCount val="12"/>
+                <c:pt idx="0">
+                  <c:v>15</c:v>
+                </c:pt>
+                <c:pt idx="1">
+                  <c:v>15</c:v>
+                </c:pt>
+                <c:pt idx="2">
+                  <c:v>15</c:v>
+                </c:pt>
+                <c:pt idx="3">
+                  <c:v>15</c:v>
+                </c:pt>
+                <c:pt idx="4">
+                  <c:v>15</c:v>
+                </c:pt>
+                <c:pt idx="5">
+                  <c:v>15</c:v>
+                </c:pt>
+                <c:pt idx="6">
+                  <c:v>15</c:v>
+                </c:pt>
+                <c:pt idx="7">
+                  <c:v>15</c:v>
+                </c:pt>
+                <c:pt idx="8">
+                  <c:v>15</c:v>
+                </c:pt>
+                <c:pt idx="9">
+                  <c:v>15</c:v>
+                </c:pt>
+                <c:pt idx="10">
+                  <c:v>15</c:v>
+                </c:pt>
+                <c:pt idx="11">
+                  <c:v>15</c:v>
+                </c:pt>
+              </c:numCache>
+            </c:numRef>
+          </c:val>
+          <c:smooth val="0"/>
+        </c:ser>
+        <c:dLbls>
+          <c:numFmt formatCode="0.0&quot;%&quot;" sourceLinked="0"/>
+          <c:txPr>
+            <a:bodyPr/>
+            <a:lstStyle/>
+            <a:p>
+              <a:pPr>
+                <a:defRPr b="0" i="0" strike="noStrike" sz="1400" u="none">
+                  <a:solidFill>
+                    <a:srgbClr val="1A1A1A"/>
+                  </a:solidFill>
+                  <a:latin typeface="+mn-lt"/>
+                </a:defRPr>
+              </a:pPr>
+            </a:p>
+          </c:txPr>
+          <c:showLegendKey val="0"/>
+          <c:showVal val="0"/>
+          <c:showCatName val="0"/>
+          <c:showSerName val="0"/>
+          <c:showPercent val="0"/>
+          <c:showBubbleSize val="0"/>
+          <c:showLeaderLines val="0"/>
+        </c:dLbls>
+        <c:marker val="1"/>
+        <c:axId val="2094734554"/>
+        <c:axId val="2094734552"/>
+        <c:axId val="2094734556"/>
+      </c:lineChart>
+      <c:catAx>
+        <c:axId val="2094734554"/>
+        <c:scaling>
+          <c:orientation val="minMax"/>
+        </c:scaling>
+        <c:delete val="0"/>
+        <c:axPos val="b"/>
+        <c:numFmt formatCode="General" sourceLinked="1"/>
+        <c:majorTickMark val="out"/>
+        <c:minorTickMark val="none"/>
+        <c:tickLblPos val="low"/>
+        <c:spPr>
+          <a:ln w="12700" cap="flat">
+            <a:noFill/>
+            <a:prstDash val="solid"/>
+            <a:round/>
+          </a:ln>
+        </c:spPr>
+        <c:txPr>
+          <a:bodyPr/>
+          <a:lstStyle/>
+          <a:p>
+            <a:pPr>
+              <a:defRPr sz="1400" b="0" i="0" u="none" strike="noStrike">
+                <a:solidFill>
+                  <a:srgbClr val="FFFFFF"/>
+                </a:solidFill>
+                <a:latin typeface="+mn-lt"/>
+              </a:defRPr>
+            </a:pPr>
+            <a:endParaRPr lang="en-US"/>
+          </a:p>
+        </c:txPr>
+        <c:crossAx val="2094734552"/>
+        <c:crosses val="min"/>
+        <c:auto val="1"/>
+        <c:lblAlgn val="ctr"/>
+        <c:noMultiLvlLbl val="1"/>
+      </c:catAx>
+      <c:valAx>
+        <c:axId val="2094734552"/>
+        <c:scaling>
+          <c:orientation val="minMax"/>
+          <c:max val="20"/>
+          <c:min val="0"/>
+        </c:scaling>
+        <c:delete val="0"/>
+        <c:axPos val="l"/>
+        <c:numFmt formatCode="0&quot;%&quot;" sourceLinked="0"/>
+        <c:majorTickMark val="out"/>
+        <c:minorTickMark val="none"/>
+        <c:tickLblPos val="nextTo"/>
+        <c:spPr>
+          <a:ln w="12700" cap="flat">
+            <a:noFill/>
+            <a:prstDash val="solid"/>
+            <a:round/>
+          </a:ln>
+        </c:spPr>
+        <c:txPr>
+          <a:bodyPr/>
+          <a:lstStyle/>
+          <a:p>
+            <a:pPr>
+              <a:defRPr sz="1400" b="0" i="0" u="none" strike="noStrike">
+                <a:solidFill>
+                  <a:srgbClr val="FFFFFF"/>
+                </a:solidFill>
+                <a:latin typeface="+mn-lt"/>
+              </a:defRPr>
+            </a:pPr>
+            <a:endParaRPr lang="en-US"/>
+          </a:p>
+        </c:txPr>
+        <c:crossAx val="2094734554"/>
+        <c:crosses val="autoZero"/>
+        <c:crossBetween val="between"/>
+        <c:majorUnit val="5"/>
+      </c:valAx>
+      <c:spPr>
+        <a:solidFill>
+          <a:srgbClr val="FFFFFF">
+            <a:alpha val="0"/>
+          </a:srgbClr>
+        </a:solidFill>
+        <a:ln>
+          <a:noFill/>
+        </a:ln>
+        <a:effectLst/>
+      </c:spPr>
+    </c:plotArea>
+    <c:plotVisOnly val="1"/>
+    <c:dispBlanksAs val="span"/>
+  </c:chart>
+  <c:spPr>
+    <a:solidFill>
+      <a:srgbClr val="FFFFFF">
+        <a:alpha val="0"/>
+      </a:srgbClr>
+    </a:solidFill>
+    <a:ln>
+      <a:noFill/>
+    </a:ln>
+    <a:effectLst/>
+  </c:spPr>
+  <c:externalData r:id="rId1">
+    <c:autoUpdate val="0"/>
+  </c:externalData>
+</c:chartSpace>
+</file>
+
+<file path=ppt/charts/chart12.xml><?xml version="1.0" encoding="utf-8"?>
+<c:chartSpace xmlns:c="http://schemas.openxmlformats.org/drawingml/2006/chart" xmlns:a="http://schemas.openxmlformats.org/drawingml/2006/main" xmlns:r="http://schemas.openxmlformats.org/officeDocument/2006/relationships">
+  <c:date1904 val="0"/>
+  <c:roundedCorners val="1"/>
+  <c:chart>
+    <c:autoTitleDeleted val="1"/>
+    <c:plotArea>
+      <c:layout/>
+      <c:lineChart>
+        <c:varyColors val="0"/>
+        <c:ser>
+          <c:idx val="0"/>
+          <c:order val="0"/>
+          <c:tx>
+            <c:strRef>
+              <c:f>Sheet1!$B$1</c:f>
+              <c:strCache>
+                <c:ptCount val="1"/>
+                <c:pt idx="0">
+                  <c:v>2025</c:v>
+                </c:pt>
+              </c:strCache>
+            </c:strRef>
+          </c:tx>
+          <c:spPr>
+            <a:solidFill>
+              <a:srgbClr val="9AA3AD"/>
+            </a:solidFill>
+            <a:ln w="38100" cap="flat">
+              <a:solidFill>
+                <a:srgbClr val="9AA3AD"/>
+              </a:solidFill>
+              <a:prstDash val="solid"/>
+              <a:round/>
+            </a:ln>
+            <a:effectLst/>
+          </c:spPr>
+          <c:invertIfNegative val="0"/>
+          <c:dLbls>
+            <c:numFmt formatCode="0.0&quot;%&quot;" sourceLinked="0"/>
+            <c:txPr>
+              <a:bodyPr/>
+              <a:lstStyle/>
+              <a:p>
+                <a:pPr>
+                  <a:defRPr b="0" i="0" strike="noStrike" sz="1400" u="none">
+                    <a:solidFill>
+                      <a:srgbClr val="1A1A1A"/>
+                    </a:solidFill>
+                    <a:latin typeface="+mn-lt"/>
+                  </a:defRPr>
+                </a:pPr>
+              </a:p>
+            </c:txPr>
+            <c:showLegendKey val="0"/>
+            <c:showVal val="0"/>
+            <c:showCatName val="0"/>
+            <c:showSerName val="0"/>
+            <c:showPercent val="0"/>
+            <c:showBubbleSize val="0"/>
+            <c:showLeaderLines val="0"/>
+          </c:dLbls>
+          <c:marker>
+            <c:symbol val="circle"/>
+            <c:size val="8"/>
+            <c:spPr>
+              <a:solidFill>
+                <a:srgbClr val="9AA3AD"/>
+              </a:solidFill>
+              <a:ln w="9525" cap="flat">
+                <a:solidFill>
+                  <a:srgbClr val="9AA3AD"/>
+                </a:solidFill>
+                <a:prstDash val="solid"/>
+                <a:round/>
+              </a:ln>
+              <a:effectLst/>
+            </c:spPr>
+          </c:marker>
+          <c:cat>
+            <c:multiLvlStrRef>
+              <c:f>Sheet1!$A$2:$A$13</c:f>
+              <c:multiLvlStrCache>
+                <c:ptCount val="12"/>
+                <c:lvl>
+                  <c:pt idx="0">
+                    <c:v>Jan</c:v>
+                  </c:pt>
+                  <c:pt idx="1">
+                    <c:v>Feb</c:v>
+                  </c:pt>
+                  <c:pt idx="2">
+                    <c:v>Mar</c:v>
+                  </c:pt>
+                  <c:pt idx="3">
+                    <c:v>Apr</c:v>
+                  </c:pt>
+                  <c:pt idx="4">
+                    <c:v>May</c:v>
+                  </c:pt>
+                  <c:pt idx="5">
+                    <c:v>Jun</c:v>
+                  </c:pt>
+                  <c:pt idx="6">
+                    <c:v>Jul</c:v>
+                  </c:pt>
+                  <c:pt idx="7">
+                    <c:v>Aug</c:v>
+                  </c:pt>
+                  <c:pt idx="8">
+                    <c:v>Sep</c:v>
+                  </c:pt>
+                  <c:pt idx="9">
+                    <c:v>Oct</c:v>
+                  </c:pt>
+                  <c:pt idx="10">
+                    <c:v>Nov</c:v>
+                  </c:pt>
+                  <c:pt idx="11">
+                    <c:v>Dec</c:v>
+                  </c:pt>
+                </c:lvl>
+              </c:multiLvlStrCache>
+            </c:multiLvlStrRef>
+          </c:cat>
+          <c:val>
+            <c:numRef>
+              <c:f>Sheet1!$B$2:$B$13</c:f>
+              <c:numCache>
+                <c:formatCode>General</c:formatCode>
+                <c:ptCount val="12"/>
+                <c:pt idx="0">
+                  <c:v>6.3</c:v>
+                </c:pt>
+                <c:pt idx="1">
+                  <c:v>7.1</c:v>
+                </c:pt>
+                <c:pt idx="2">
+                  <c:v>7.6</c:v>
+                </c:pt>
+                <c:pt idx="3">
+                  <c:v>6.9</c:v>
+                </c:pt>
+                <c:pt idx="4">
+                  <c:v>7.1</c:v>
+                </c:pt>
+                <c:pt idx="5">
+                  <c:v>7</c:v>
+                </c:pt>
+                <c:pt idx="6">
+                  <c:v>6.9</c:v>
+                </c:pt>
+                <c:pt idx="7">
+                  <c:v>7</c:v>
+                </c:pt>
+                <c:pt idx="8">
+                  <c:v>6.7</c:v>
+                </c:pt>
+                <c:pt idx="9">
+                  <c:v>6.6</c:v>
+                </c:pt>
+                <c:pt idx="10">
+                  <c:v>6.8</c:v>
+                </c:pt>
+                <c:pt idx="11">
+                  <c:v>6.8</c:v>
+                </c:pt>
+              </c:numCache>
+            </c:numRef>
+          </c:val>
+          <c:smooth val="0"/>
+        </c:ser>
+        <c:dLbls>
+          <c:numFmt formatCode="0.0&quot;%&quot;" sourceLinked="0"/>
+          <c:txPr>
+            <a:bodyPr/>
+            <a:lstStyle/>
+            <a:p>
+              <a:pPr>
+                <a:defRPr b="0" i="0" strike="noStrike" sz="1400" u="none">
+                  <a:solidFill>
+                    <a:srgbClr val="1A1A1A"/>
+                  </a:solidFill>
+                  <a:latin typeface="+mn-lt"/>
+                </a:defRPr>
+              </a:pPr>
+            </a:p>
+          </c:txPr>
+          <c:showLegendKey val="0"/>
+          <c:showVal val="0"/>
+          <c:showCatName val="0"/>
+          <c:showSerName val="0"/>
+          <c:showPercent val="0"/>
+          <c:showBubbleSize val="0"/>
+          <c:showLeaderLines val="0"/>
+        </c:dLbls>
+        <c:marker val="1"/>
+        <c:axId val="2094734554"/>
+        <c:axId val="2094734552"/>
+        <c:axId val="2094734556"/>
+      </c:lineChart>
+      <c:catAx>
+        <c:axId val="2094734554"/>
+        <c:scaling>
+          <c:orientation val="minMax"/>
+        </c:scaling>
+        <c:delete val="0"/>
+        <c:axPos val="b"/>
+        <c:numFmt formatCode="General" sourceLinked="1"/>
+        <c:majorTickMark val="out"/>
+        <c:minorTickMark val="none"/>
+        <c:tickLblPos val="low"/>
+        <c:spPr>
+          <a:ln w="12700" cap="flat">
+            <a:solidFill>
+              <a:srgbClr val="888888"/>
+            </a:solidFill>
+            <a:prstDash val="solid"/>
+            <a:round/>
+          </a:ln>
+        </c:spPr>
+        <c:txPr>
+          <a:bodyPr/>
+          <a:lstStyle/>
+          <a:p>
+            <a:pPr>
+              <a:defRPr sz="1400" b="0" i="0" u="none" strike="noStrike">
+                <a:solidFill>
+                  <a:srgbClr val="1A1A1A"/>
+                </a:solidFill>
+                <a:latin typeface="+mn-lt"/>
+              </a:defRPr>
+            </a:pPr>
+            <a:endParaRPr lang="en-US"/>
+          </a:p>
+        </c:txPr>
+        <c:crossAx val="2094734552"/>
+        <c:crosses val="min"/>
+        <c:auto val="1"/>
+        <c:lblAlgn val="ctr"/>
+        <c:noMultiLvlLbl val="1"/>
+      </c:catAx>
+      <c:valAx>
+        <c:axId val="2094734552"/>
+        <c:scaling>
+          <c:orientation val="minMax"/>
+          <c:max val="20"/>
+          <c:min val="0"/>
+        </c:scaling>
+        <c:delete val="0"/>
+        <c:axPos val="l"/>
+        <c:numFmt formatCode="0&quot;%&quot;" sourceLinked="0"/>
+        <c:majorTickMark val="out"/>
+        <c:minorTickMark val="none"/>
+        <c:tickLblPos val="nextTo"/>
+        <c:spPr>
+          <a:ln w="12700" cap="flat">
+            <a:noFill/>
+            <a:prstDash val="solid"/>
+            <a:round/>
+          </a:ln>
+        </c:spPr>
+        <c:txPr>
+          <a:bodyPr/>
+          <a:lstStyle/>
+          <a:p>
+            <a:pPr>
+              <a:defRPr sz="1400" b="0" i="0" u="none" strike="noStrike">
+                <a:solidFill>
+                  <a:srgbClr val="595959"/>
+                </a:solidFill>
+                <a:latin typeface="+mn-lt"/>
+              </a:defRPr>
+            </a:pPr>
+            <a:endParaRPr lang="en-US"/>
+          </a:p>
+        </c:txPr>
+        <c:crossAx val="2094734554"/>
+        <c:crosses val="autoZero"/>
+        <c:crossBetween val="between"/>
+        <c:majorUnit val="5"/>
+      </c:valAx>
+      <c:spPr>
+        <a:solidFill>
+          <a:srgbClr val="FFFFFF">
+            <a:alpha val="0"/>
+          </a:srgbClr>
+        </a:solidFill>
+        <a:ln>
+          <a:noFill/>
+        </a:ln>
+        <a:effectLst/>
+      </c:spPr>
+    </c:plotArea>
+    <c:plotVisOnly val="1"/>
+    <c:dispBlanksAs val="span"/>
+  </c:chart>
+  <c:spPr>
+    <a:solidFill>
+      <a:srgbClr val="FFFFFF">
+        <a:alpha val="0"/>
+      </a:srgbClr>
+    </a:solidFill>
+    <a:ln>
+      <a:noFill/>
+    </a:ln>
+    <a:effectLst/>
+  </c:spPr>
+  <c:externalData r:id="rId1">
+    <c:autoUpdate val="0"/>
+  </c:externalData>
+</c:chartSpace>
+</file>
+
+<file path=ppt/charts/chart13.xml><?xml version="1.0" encoding="utf-8"?>
+<c:chartSpace xmlns:c="http://schemas.openxmlformats.org/drawingml/2006/chart" xmlns:a="http://schemas.openxmlformats.org/drawingml/2006/main" xmlns:r="http://schemas.openxmlformats.org/officeDocument/2006/relationships">
+  <c:date1904 val="0"/>
+  <c:roundedCorners val="1"/>
+  <c:chart>
+    <c:autoTitleDeleted val="1"/>
+    <c:plotArea>
+      <c:layout/>
+      <c:lineChart>
+        <c:varyColors val="0"/>
+        <c:ser>
+          <c:idx val="0"/>
+          <c:order val="0"/>
+          <c:tx>
+            <c:strRef>
+              <c:f>Sheet1!$B$1</c:f>
+              <c:strCache>
+                <c:ptCount val="1"/>
+                <c:pt idx="0">
+                  <c:v>2026</c:v>
+                </c:pt>
+              </c:strCache>
+            </c:strRef>
+          </c:tx>
+          <c:spPr>
+            <a:solidFill>
+              <a:srgbClr val="2587C5"/>
+            </a:solidFill>
+            <a:ln w="38100" cap="flat">
+              <a:solidFill>
+                <a:srgbClr val="2587C5"/>
+              </a:solidFill>
+              <a:prstDash val="solid"/>
+              <a:round/>
+            </a:ln>
+            <a:effectLst/>
+          </c:spPr>
+          <c:invertIfNegative val="0"/>
+          <c:dLbls>
+            <c:numFmt formatCode="0.0&quot;%&quot;" sourceLinked="0"/>
+            <c:txPr>
+              <a:bodyPr/>
+              <a:lstStyle/>
+              <a:p>
+                <a:pPr>
+                  <a:defRPr b="0" i="0" strike="noStrike" sz="1400" u="none">
+                    <a:solidFill>
+                      <a:srgbClr val="1A1A1A"/>
+                    </a:solidFill>
+                    <a:latin typeface="+mn-lt"/>
+                  </a:defRPr>
+                </a:pPr>
+              </a:p>
+            </c:txPr>
+            <c:showLegendKey val="0"/>
+            <c:showVal val="0"/>
+            <c:showCatName val="0"/>
+            <c:showSerName val="0"/>
+            <c:showPercent val="0"/>
+            <c:showBubbleSize val="0"/>
+            <c:showLeaderLines val="0"/>
+          </c:dLbls>
+          <c:marker>
+            <c:symbol val="circle"/>
+            <c:size val="8"/>
+            <c:spPr>
+              <a:solidFill>
+                <a:srgbClr val="2587C5"/>
+              </a:solidFill>
+              <a:ln w="9525" cap="flat">
+                <a:solidFill>
+                  <a:srgbClr val="2587C5"/>
+                </a:solidFill>
+                <a:prstDash val="solid"/>
+                <a:round/>
+              </a:ln>
+              <a:effectLst/>
+            </c:spPr>
+          </c:marker>
+          <c:cat>
+            <c:multiLvlStrRef>
+              <c:f>Sheet1!$A$2:$A$13</c:f>
+              <c:multiLvlStrCache>
+                <c:ptCount val="12"/>
+                <c:lvl>
+                  <c:pt idx="0">
+                    <c:v>Jan</c:v>
+                  </c:pt>
+                  <c:pt idx="1">
+                    <c:v>Feb</c:v>
+                  </c:pt>
+                  <c:pt idx="2">
+                    <c:v>Mar</c:v>
+                  </c:pt>
+                  <c:pt idx="3">
+                    <c:v>Apr</c:v>
+                  </c:pt>
+                  <c:pt idx="4">
+                    <c:v>May</c:v>
+                  </c:pt>
+                  <c:pt idx="5">
+                    <c:v>Jun</c:v>
+                  </c:pt>
+                  <c:pt idx="6">
+                    <c:v>Jul</c:v>
+                  </c:pt>
+                  <c:pt idx="7">
+                    <c:v>Aug</c:v>
+                  </c:pt>
+                  <c:pt idx="8">
+                    <c:v>Sep</c:v>
+                  </c:pt>
+                  <c:pt idx="9">
+                    <c:v>Oct</c:v>
+                  </c:pt>
+                  <c:pt idx="10">
+                    <c:v>Nov</c:v>
+                  </c:pt>
+                  <c:pt idx="11">
+                    <c:v>Dec</c:v>
+                  </c:pt>
+                </c:lvl>
+              </c:multiLvlStrCache>
+            </c:multiLvlStrRef>
+          </c:cat>
+          <c:val>
+            <c:numRef>
+              <c:f>Sheet1!$B$2:$B$13</c:f>
+              <c:numCache>
+                <c:formatCode>General</c:formatCode>
+                <c:ptCount val="12"/>
+                <c:pt idx="0">
+                  <c:v>8.5</c:v>
+                </c:pt>
+                <c:pt idx="1">
+                  <c:v>9</c:v>
+                </c:pt>
+                <c:pt idx="2">
+                  <c:v>9.8</c:v>
+                </c:pt>
+                <c:pt idx="3">
+                  <c:v>9.9</c:v>
+                </c:pt>
+                <c:pt idx="4">
+                  <c:v>9.8</c:v>
+                </c:pt>
+                <c:pt idx="5">
+                  <c:v>9.4</c:v>
+                </c:pt>
+                <c:pt idx="6">
+                  <c:v>9</c:v>
+                </c:pt>
+                <c:pt idx="7">
+                  <c:v>8.9</c:v>
+                </c:pt>
+                <c:pt idx="8">
+                  <c:v>9.3</c:v>
+                </c:pt>
+                <c:pt idx="9">
+                  <c:v/>
+                </c:pt>
+                <c:pt idx="10">
+                  <c:v/>
+                </c:pt>
+                <c:pt idx="11">
+                  <c:v/>
+                </c:pt>
+              </c:numCache>
+            </c:numRef>
+          </c:val>
+          <c:smooth val="0"/>
+        </c:ser>
+        <c:dLbls>
+          <c:numFmt formatCode="0.0&quot;%&quot;" sourceLinked="0"/>
+          <c:txPr>
+            <a:bodyPr/>
+            <a:lstStyle/>
+            <a:p>
+              <a:pPr>
+                <a:defRPr b="0" i="0" strike="noStrike" sz="1400" u="none">
+                  <a:solidFill>
+                    <a:srgbClr val="1A1A1A"/>
+                  </a:solidFill>
+                  <a:latin typeface="+mn-lt"/>
+                </a:defRPr>
+              </a:pPr>
+            </a:p>
+          </c:txPr>
+          <c:showLegendKey val="0"/>
+          <c:showVal val="0"/>
+          <c:showCatName val="0"/>
+          <c:showSerName val="0"/>
+          <c:showPercent val="0"/>
+          <c:showBubbleSize val="0"/>
+          <c:showLeaderLines val="0"/>
+        </c:dLbls>
+        <c:marker val="1"/>
+        <c:axId val="2094734554"/>
+        <c:axId val="2094734552"/>
+        <c:axId val="2094734556"/>
+      </c:lineChart>
+      <c:catAx>
+        <c:axId val="2094734554"/>
+        <c:scaling>
+          <c:orientation val="minMax"/>
+        </c:scaling>
+        <c:delete val="0"/>
+        <c:axPos val="b"/>
+        <c:numFmt formatCode="General" sourceLinked="1"/>
+        <c:majorTickMark val="out"/>
+        <c:minorTickMark val="none"/>
+        <c:tickLblPos val="low"/>
+        <c:spPr>
+          <a:ln w="12700" cap="flat">
+            <a:noFill/>
+            <a:prstDash val="solid"/>
+            <a:round/>
+          </a:ln>
+        </c:spPr>
+        <c:txPr>
+          <a:bodyPr/>
+          <a:lstStyle/>
+          <a:p>
+            <a:pPr>
+              <a:defRPr sz="1400" b="0" i="0" u="none" strike="noStrike">
+                <a:solidFill>
+                  <a:srgbClr val="FFFFFF"/>
+                </a:solidFill>
+                <a:latin typeface="+mn-lt"/>
+              </a:defRPr>
+            </a:pPr>
+            <a:endParaRPr lang="en-US"/>
+          </a:p>
+        </c:txPr>
+        <c:crossAx val="2094734552"/>
+        <c:crosses val="min"/>
+        <c:auto val="1"/>
+        <c:lblAlgn val="ctr"/>
+        <c:noMultiLvlLbl val="1"/>
+      </c:catAx>
+      <c:valAx>
+        <c:axId val="2094734552"/>
+        <c:scaling>
+          <c:orientation val="minMax"/>
+          <c:max val="11"/>
+          <c:min val="6"/>
+        </c:scaling>
+        <c:delete val="0"/>
+        <c:axPos val="l"/>
+        <c:majorGridlines>
+          <c:spPr>
+            <a:ln w="9525" cap="flat">
+              <a:solidFill>
+                <a:srgbClr val="D9D9D9"/>
+              </a:solidFill>
+              <a:prstDash val="solid"/>
+              <a:round/>
+            </a:ln>
+          </c:spPr>
+        </c:majorGridlines>
+        <c:numFmt formatCode="0&quot;%&quot;" sourceLinked="0"/>
+        <c:majorTickMark val="out"/>
+        <c:minorTickMark val="none"/>
+        <c:tickLblPos val="nextTo"/>
+        <c:spPr>
+          <a:ln w="12700" cap="flat">
+            <a:noFill/>
+            <a:prstDash val="solid"/>
+            <a:round/>
+          </a:ln>
+        </c:spPr>
+        <c:txPr>
+          <a:bodyPr/>
+          <a:lstStyle/>
+          <a:p>
+            <a:pPr>
+              <a:defRPr sz="1400" b="0" i="0" u="none" strike="noStrike">
+                <a:solidFill>
+                  <a:srgbClr val="FFFFFF"/>
+                </a:solidFill>
+                <a:latin typeface="+mn-lt"/>
+              </a:defRPr>
+            </a:pPr>
+            <a:endParaRPr lang="en-US"/>
+          </a:p>
+        </c:txPr>
+        <c:crossAx val="2094734554"/>
+        <c:crosses val="autoZero"/>
+        <c:crossBetween val="between"/>
+        <c:majorUnit val="1"/>
+      </c:valAx>
+      <c:spPr>
+        <a:noFill/>
+        <a:ln>
+          <a:noFill/>
+        </a:ln>
+        <a:effectLst/>
+      </c:spPr>
+    </c:plotArea>
+    <c:plotVisOnly val="1"/>
+    <c:dispBlanksAs val="span"/>
+  </c:chart>
+  <c:spPr>
+    <a:noFill/>
+    <a:ln>
+      <a:noFill/>
+    </a:ln>
+    <a:effectLst/>
+  </c:spPr>
+  <c:externalData r:id="rId1">
+    <c:autoUpdate val="0"/>
+  </c:externalData>
+</c:chartSpace>
+</file>
+
+<file path=ppt/charts/chart14.xml><?xml version="1.0" encoding="utf-8"?>
 <c:chartSpace xmlns:c="http://schemas.openxmlformats.org/drawingml/2006/chart" xmlns:a="http://schemas.openxmlformats.org/drawingml/2006/main" xmlns:r="http://schemas.openxmlformats.org/officeDocument/2006/relationships">
   <c:date1904 val="0"/>
   <c:roundedCorners val="1"/>
@@ -733,7 +1995,317 @@
 </c:chartSpace>
 </file>
 
-<file path=ppt/charts/chart11.xml><?xml version="1.0" encoding="utf-8"?>
+<file path=ppt/charts/chart15.xml><?xml version="1.0" encoding="utf-8"?>
+<c:chartSpace xmlns:c="http://schemas.openxmlformats.org/drawingml/2006/chart" xmlns:a="http://schemas.openxmlformats.org/drawingml/2006/main" xmlns:r="http://schemas.openxmlformats.org/officeDocument/2006/relationships">
+  <c:date1904 val="0"/>
+  <c:roundedCorners val="1"/>
+  <c:chart>
+    <c:autoTitleDeleted val="1"/>
+    <c:plotArea>
+      <c:layout/>
+      <c:lineChart>
+        <c:varyColors val="0"/>
+        <c:ser>
+          <c:idx val="0"/>
+          <c:order val="0"/>
+          <c:tx>
+            <c:strRef>
+              <c:f>Sheet1!$B$1</c:f>
+              <c:strCache>
+                <c:ptCount val="1"/>
+                <c:pt idx="0">
+                  <c:v>2025</c:v>
+                </c:pt>
+              </c:strCache>
+            </c:strRef>
+          </c:tx>
+          <c:spPr>
+            <a:solidFill>
+              <a:srgbClr val="9AA3AD"/>
+            </a:solidFill>
+            <a:ln>
+              <a:noFill/>
+            </a:ln>
+            <a:effectLst/>
+          </c:spPr>
+          <c:invertIfNegative val="0"/>
+          <c:dLbls>
+            <c:numFmt formatCode="0.0&quot;%&quot;" sourceLinked="0"/>
+            <c:txPr>
+              <a:bodyPr/>
+              <a:lstStyle/>
+              <a:p>
+                <a:pPr>
+                  <a:defRPr b="0" i="0" strike="noStrike" sz="1400" u="none">
+                    <a:solidFill>
+                      <a:srgbClr val="1A1A1A"/>
+                    </a:solidFill>
+                    <a:latin typeface="+mn-lt"/>
+                  </a:defRPr>
+                </a:pPr>
+              </a:p>
+            </c:txPr>
+            <c:dLblPos val="t"/>
+            <c:showLegendKey val="0"/>
+            <c:showVal val="1"/>
+            <c:showCatName val="0"/>
+            <c:showSerName val="0"/>
+            <c:showPercent val="0"/>
+            <c:showBubbleSize val="0"/>
+            <c:showLeaderLines val="0"/>
+          </c:dLbls>
+          <c:marker>
+            <c:symbol val="none"/>
+            <c:size val="8"/>
+            <c:spPr>
+              <a:solidFill>
+                <a:srgbClr val="9AA3AD"/>
+              </a:solidFill>
+              <a:ln w="9525" cap="flat">
+                <a:solidFill>
+                  <a:srgbClr val="9AA3AD"/>
+                </a:solidFill>
+                <a:prstDash val="solid"/>
+                <a:round/>
+              </a:ln>
+              <a:effectLst/>
+            </c:spPr>
+          </c:marker>
+          <c:cat>
+            <c:multiLvlStrRef>
+              <c:f>Sheet1!$A$2:$A$13</c:f>
+              <c:multiLvlStrCache>
+                <c:ptCount val="12"/>
+                <c:lvl>
+                  <c:pt idx="0">
+                    <c:v>Jan</c:v>
+                  </c:pt>
+                  <c:pt idx="1">
+                    <c:v>Feb</c:v>
+                  </c:pt>
+                  <c:pt idx="2">
+                    <c:v>Mar</c:v>
+                  </c:pt>
+                  <c:pt idx="3">
+                    <c:v>Apr</c:v>
+                  </c:pt>
+                  <c:pt idx="4">
+                    <c:v>May</c:v>
+                  </c:pt>
+                  <c:pt idx="5">
+                    <c:v>Jun</c:v>
+                  </c:pt>
+                  <c:pt idx="6">
+                    <c:v>Jul</c:v>
+                  </c:pt>
+                  <c:pt idx="7">
+                    <c:v>Aug</c:v>
+                  </c:pt>
+                  <c:pt idx="8">
+                    <c:v>Sep</c:v>
+                  </c:pt>
+                  <c:pt idx="9">
+                    <c:v>Oct</c:v>
+                  </c:pt>
+                  <c:pt idx="10">
+                    <c:v>Nov</c:v>
+                  </c:pt>
+                  <c:pt idx="11">
+                    <c:v>Dec</c:v>
+                  </c:pt>
+                </c:lvl>
+              </c:multiLvlStrCache>
+            </c:multiLvlStrRef>
+          </c:cat>
+          <c:val>
+            <c:numRef>
+              <c:f>Sheet1!$B$2:$B$13</c:f>
+              <c:numCache>
+                <c:formatCode>General</c:formatCode>
+                <c:ptCount val="12"/>
+                <c:pt idx="0">
+                  <c:v/>
+                </c:pt>
+                <c:pt idx="1">
+                  <c:v/>
+                </c:pt>
+                <c:pt idx="2">
+                  <c:v/>
+                </c:pt>
+                <c:pt idx="3">
+                  <c:v/>
+                </c:pt>
+                <c:pt idx="4">
+                  <c:v/>
+                </c:pt>
+                <c:pt idx="5">
+                  <c:v/>
+                </c:pt>
+                <c:pt idx="6">
+                  <c:v/>
+                </c:pt>
+                <c:pt idx="7">
+                  <c:v/>
+                </c:pt>
+                <c:pt idx="8">
+                  <c:v/>
+                </c:pt>
+                <c:pt idx="9">
+                  <c:v>7.5</c:v>
+                </c:pt>
+                <c:pt idx="10">
+                  <c:v>7.5</c:v>
+                </c:pt>
+                <c:pt idx="11">
+                  <c:v>7.5</c:v>
+                </c:pt>
+              </c:numCache>
+            </c:numRef>
+          </c:val>
+          <c:smooth val="0"/>
+        </c:ser>
+        <c:dLbls>
+          <c:numFmt formatCode="0.0&quot;%&quot;" sourceLinked="0"/>
+          <c:txPr>
+            <a:bodyPr/>
+            <a:lstStyle/>
+            <a:p>
+              <a:pPr>
+                <a:defRPr b="0" i="0" strike="noStrike" sz="1400" u="none">
+                  <a:solidFill>
+                    <a:srgbClr val="1A1A1A"/>
+                  </a:solidFill>
+                  <a:latin typeface="+mn-lt"/>
+                </a:defRPr>
+              </a:pPr>
+            </a:p>
+          </c:txPr>
+          <c:dLblPos val="t"/>
+          <c:showLegendKey val="0"/>
+          <c:showVal val="1"/>
+          <c:showCatName val="0"/>
+          <c:showSerName val="0"/>
+          <c:showPercent val="0"/>
+          <c:showBubbleSize val="0"/>
+          <c:showLeaderLines val="0"/>
+        </c:dLbls>
+        <c:marker val="1"/>
+        <c:axId val="2094734554"/>
+        <c:axId val="2094734552"/>
+        <c:axId val="2094734556"/>
+      </c:lineChart>
+      <c:catAx>
+        <c:axId val="2094734554"/>
+        <c:scaling>
+          <c:orientation val="minMax"/>
+        </c:scaling>
+        <c:delete val="0"/>
+        <c:axPos val="b"/>
+        <c:numFmt formatCode="General" sourceLinked="1"/>
+        <c:majorTickMark val="out"/>
+        <c:minorTickMark val="none"/>
+        <c:tickLblPos val="low"/>
+        <c:spPr>
+          <a:ln w="12700" cap="flat">
+            <a:noFill/>
+            <a:prstDash val="solid"/>
+            <a:round/>
+          </a:ln>
+        </c:spPr>
+        <c:txPr>
+          <a:bodyPr/>
+          <a:lstStyle/>
+          <a:p>
+            <a:pPr>
+              <a:defRPr sz="1400" b="0" i="0" u="none" strike="noStrike">
+                <a:solidFill>
+                  <a:srgbClr val="FFFFFF"/>
+                </a:solidFill>
+                <a:latin typeface="+mn-lt"/>
+              </a:defRPr>
+            </a:pPr>
+            <a:endParaRPr lang="en-US"/>
+          </a:p>
+        </c:txPr>
+        <c:crossAx val="2094734552"/>
+        <c:crosses val="min"/>
+        <c:auto val="1"/>
+        <c:lblAlgn val="ctr"/>
+        <c:noMultiLvlLbl val="1"/>
+      </c:catAx>
+      <c:valAx>
+        <c:axId val="2094734552"/>
+        <c:scaling>
+          <c:orientation val="minMax"/>
+          <c:max val="11"/>
+          <c:min val="6"/>
+        </c:scaling>
+        <c:delete val="0"/>
+        <c:axPos val="l"/>
+        <c:numFmt formatCode="0&quot;%&quot;" sourceLinked="0"/>
+        <c:majorTickMark val="out"/>
+        <c:minorTickMark val="none"/>
+        <c:tickLblPos val="nextTo"/>
+        <c:spPr>
+          <a:ln w="12700" cap="flat">
+            <a:noFill/>
+            <a:prstDash val="solid"/>
+            <a:round/>
+          </a:ln>
+        </c:spPr>
+        <c:txPr>
+          <a:bodyPr/>
+          <a:lstStyle/>
+          <a:p>
+            <a:pPr>
+              <a:defRPr sz="1400" b="0" i="0" u="none" strike="noStrike">
+                <a:solidFill>
+                  <a:srgbClr val="FFFFFF"/>
+                </a:solidFill>
+                <a:latin typeface="+mn-lt"/>
+              </a:defRPr>
+            </a:pPr>
+            <a:endParaRPr lang="en-US"/>
+          </a:p>
+        </c:txPr>
+        <c:crossAx val="2094734554"/>
+        <c:crosses val="autoZero"/>
+        <c:crossBetween val="between"/>
+        <c:majorUnit val="1"/>
+      </c:valAx>
+      <c:spPr>
+        <a:solidFill>
+          <a:srgbClr val="FFFFFF">
+            <a:alpha val="0"/>
+          </a:srgbClr>
+        </a:solidFill>
+        <a:ln>
+          <a:noFill/>
+        </a:ln>
+        <a:effectLst/>
+      </c:spPr>
+    </c:plotArea>
+    <c:plotVisOnly val="1"/>
+    <c:dispBlanksAs val="span"/>
+  </c:chart>
+  <c:spPr>
+    <a:solidFill>
+      <a:srgbClr val="FFFFFF">
+        <a:alpha val="0"/>
+      </a:srgbClr>
+    </a:solidFill>
+    <a:ln>
+      <a:noFill/>
+    </a:ln>
+    <a:effectLst/>
+  </c:spPr>
+  <c:externalData r:id="rId1">
+    <c:autoUpdate val="0"/>
+  </c:externalData>
+</c:chartSpace>
+</file>
+
+<file path=ppt/charts/chart16.xml><?xml version="1.0" encoding="utf-8"?>
 <c:chartSpace xmlns:c="http://schemas.openxmlformats.org/drawingml/2006/chart" xmlns:a="http://schemas.openxmlformats.org/drawingml/2006/main" xmlns:r="http://schemas.openxmlformats.org/officeDocument/2006/relationships">
   <c:date1904 val="0"/>
   <c:roundedCorners val="1"/>
@@ -889,13 +2461,13 @@
                   <c:v>7.5</c:v>
                 </c:pt>
                 <c:pt idx="9">
-                  <c:v>7.5</c:v>
+                  <c:v/>
                 </c:pt>
                 <c:pt idx="10">
-                  <c:v>7.5</c:v>
+                  <c:v/>
                 </c:pt>
                 <c:pt idx="11">
-                  <c:v>7.5</c:v>
+                  <c:v/>
                 </c:pt>
               </c:numCache>
             </c:numRef>
@@ -1043,7 +2615,319 @@
 </c:chartSpace>
 </file>
 
-<file path=ppt/charts/chart12.xml><?xml version="1.0" encoding="utf-8"?>
+<file path=ppt/charts/chart17.xml><?xml version="1.0" encoding="utf-8"?>
+<c:chartSpace xmlns:c="http://schemas.openxmlformats.org/drawingml/2006/chart" xmlns:a="http://schemas.openxmlformats.org/drawingml/2006/main" xmlns:r="http://schemas.openxmlformats.org/officeDocument/2006/relationships">
+  <c:date1904 val="0"/>
+  <c:roundedCorners val="1"/>
+  <c:chart>
+    <c:autoTitleDeleted val="1"/>
+    <c:plotArea>
+      <c:layout/>
+      <c:lineChart>
+        <c:varyColors val="0"/>
+        <c:ser>
+          <c:idx val="0"/>
+          <c:order val="0"/>
+          <c:tx>
+            <c:strRef>
+              <c:f>Sheet1!$B$1</c:f>
+              <c:strCache>
+                <c:ptCount val="1"/>
+                <c:pt idx="0">
+                  <c:v>bench0</c:v>
+                </c:pt>
+              </c:strCache>
+            </c:strRef>
+          </c:tx>
+          <c:spPr>
+            <a:solidFill>
+              <a:srgbClr val="595959"/>
+            </a:solidFill>
+            <a:ln w="25400" cap="flat">
+              <a:solidFill>
+                <a:srgbClr val="595959"/>
+              </a:solidFill>
+              <a:prstDash val="dash"/>
+              <a:round/>
+            </a:ln>
+            <a:effectLst/>
+          </c:spPr>
+          <c:invertIfNegative val="0"/>
+          <c:dLbls>
+            <c:numFmt formatCode="0.0&quot;%&quot;" sourceLinked="0"/>
+            <c:txPr>
+              <a:bodyPr/>
+              <a:lstStyle/>
+              <a:p>
+                <a:pPr>
+                  <a:defRPr b="0" i="0" strike="noStrike" sz="1400" u="none">
+                    <a:solidFill>
+                      <a:srgbClr val="1A1A1A"/>
+                    </a:solidFill>
+                    <a:latin typeface="+mn-lt"/>
+                  </a:defRPr>
+                </a:pPr>
+              </a:p>
+            </c:txPr>
+            <c:showLegendKey val="0"/>
+            <c:showVal val="0"/>
+            <c:showCatName val="0"/>
+            <c:showSerName val="0"/>
+            <c:showPercent val="0"/>
+            <c:showBubbleSize val="0"/>
+            <c:showLeaderLines val="0"/>
+          </c:dLbls>
+          <c:marker>
+            <c:symbol val="none"/>
+            <c:size val="8"/>
+            <c:spPr>
+              <a:solidFill>
+                <a:srgbClr val="595959"/>
+              </a:solidFill>
+              <a:ln w="9525" cap="flat">
+                <a:solidFill>
+                  <a:srgbClr val="595959"/>
+                </a:solidFill>
+                <a:prstDash val="solid"/>
+                <a:round/>
+              </a:ln>
+              <a:effectLst/>
+            </c:spPr>
+          </c:marker>
+          <c:cat>
+            <c:multiLvlStrRef>
+              <c:f>Sheet1!$A$2:$A$13</c:f>
+              <c:multiLvlStrCache>
+                <c:ptCount val="12"/>
+                <c:lvl>
+                  <c:pt idx="0">
+                    <c:v>Jan</c:v>
+                  </c:pt>
+                  <c:pt idx="1">
+                    <c:v>Feb</c:v>
+                  </c:pt>
+                  <c:pt idx="2">
+                    <c:v>Mar</c:v>
+                  </c:pt>
+                  <c:pt idx="3">
+                    <c:v>Apr</c:v>
+                  </c:pt>
+                  <c:pt idx="4">
+                    <c:v>May</c:v>
+                  </c:pt>
+                  <c:pt idx="5">
+                    <c:v>Jun</c:v>
+                  </c:pt>
+                  <c:pt idx="6">
+                    <c:v>Jul</c:v>
+                  </c:pt>
+                  <c:pt idx="7">
+                    <c:v>Aug</c:v>
+                  </c:pt>
+                  <c:pt idx="8">
+                    <c:v>Sep</c:v>
+                  </c:pt>
+                  <c:pt idx="9">
+                    <c:v>Oct</c:v>
+                  </c:pt>
+                  <c:pt idx="10">
+                    <c:v>Nov</c:v>
+                  </c:pt>
+                  <c:pt idx="11">
+                    <c:v>Dec</c:v>
+                  </c:pt>
+                </c:lvl>
+              </c:multiLvlStrCache>
+            </c:multiLvlStrRef>
+          </c:cat>
+          <c:val>
+            <c:numRef>
+              <c:f>Sheet1!$B$2:$B$13</c:f>
+              <c:numCache>
+                <c:formatCode>General</c:formatCode>
+                <c:ptCount val="12"/>
+                <c:pt idx="0">
+                  <c:v>10</c:v>
+                </c:pt>
+                <c:pt idx="1">
+                  <c:v>10</c:v>
+                </c:pt>
+                <c:pt idx="2">
+                  <c:v>10</c:v>
+                </c:pt>
+                <c:pt idx="3">
+                  <c:v>10</c:v>
+                </c:pt>
+                <c:pt idx="4">
+                  <c:v>10</c:v>
+                </c:pt>
+                <c:pt idx="5">
+                  <c:v>10</c:v>
+                </c:pt>
+                <c:pt idx="6">
+                  <c:v>10</c:v>
+                </c:pt>
+                <c:pt idx="7">
+                  <c:v>10</c:v>
+                </c:pt>
+                <c:pt idx="8">
+                  <c:v>10</c:v>
+                </c:pt>
+                <c:pt idx="9">
+                  <c:v>10</c:v>
+                </c:pt>
+                <c:pt idx="10">
+                  <c:v>10</c:v>
+                </c:pt>
+                <c:pt idx="11">
+                  <c:v>10</c:v>
+                </c:pt>
+              </c:numCache>
+            </c:numRef>
+          </c:val>
+          <c:smooth val="0"/>
+        </c:ser>
+        <c:dLbls>
+          <c:numFmt formatCode="0.0&quot;%&quot;" sourceLinked="0"/>
+          <c:txPr>
+            <a:bodyPr/>
+            <a:lstStyle/>
+            <a:p>
+              <a:pPr>
+                <a:defRPr b="0" i="0" strike="noStrike" sz="1400" u="none">
+                  <a:solidFill>
+                    <a:srgbClr val="1A1A1A"/>
+                  </a:solidFill>
+                  <a:latin typeface="+mn-lt"/>
+                </a:defRPr>
+              </a:pPr>
+            </a:p>
+          </c:txPr>
+          <c:showLegendKey val="0"/>
+          <c:showVal val="0"/>
+          <c:showCatName val="0"/>
+          <c:showSerName val="0"/>
+          <c:showPercent val="0"/>
+          <c:showBubbleSize val="0"/>
+          <c:showLeaderLines val="0"/>
+        </c:dLbls>
+        <c:marker val="1"/>
+        <c:axId val="2094734554"/>
+        <c:axId val="2094734552"/>
+        <c:axId val="2094734556"/>
+      </c:lineChart>
+      <c:catAx>
+        <c:axId val="2094734554"/>
+        <c:scaling>
+          <c:orientation val="minMax"/>
+        </c:scaling>
+        <c:delete val="0"/>
+        <c:axPos val="b"/>
+        <c:numFmt formatCode="General" sourceLinked="1"/>
+        <c:majorTickMark val="out"/>
+        <c:minorTickMark val="none"/>
+        <c:tickLblPos val="low"/>
+        <c:spPr>
+          <a:ln w="12700" cap="flat">
+            <a:noFill/>
+            <a:prstDash val="solid"/>
+            <a:round/>
+          </a:ln>
+        </c:spPr>
+        <c:txPr>
+          <a:bodyPr/>
+          <a:lstStyle/>
+          <a:p>
+            <a:pPr>
+              <a:defRPr sz="1400" b="0" i="0" u="none" strike="noStrike">
+                <a:solidFill>
+                  <a:srgbClr val="FFFFFF"/>
+                </a:solidFill>
+                <a:latin typeface="+mn-lt"/>
+              </a:defRPr>
+            </a:pPr>
+            <a:endParaRPr lang="en-US"/>
+          </a:p>
+        </c:txPr>
+        <c:crossAx val="2094734552"/>
+        <c:crosses val="min"/>
+        <c:auto val="1"/>
+        <c:lblAlgn val="ctr"/>
+        <c:noMultiLvlLbl val="1"/>
+      </c:catAx>
+      <c:valAx>
+        <c:axId val="2094734552"/>
+        <c:scaling>
+          <c:orientation val="minMax"/>
+          <c:max val="11"/>
+          <c:min val="6"/>
+        </c:scaling>
+        <c:delete val="0"/>
+        <c:axPos val="l"/>
+        <c:numFmt formatCode="0&quot;%&quot;" sourceLinked="0"/>
+        <c:majorTickMark val="out"/>
+        <c:minorTickMark val="none"/>
+        <c:tickLblPos val="nextTo"/>
+        <c:spPr>
+          <a:ln w="12700" cap="flat">
+            <a:noFill/>
+            <a:prstDash val="solid"/>
+            <a:round/>
+          </a:ln>
+        </c:spPr>
+        <c:txPr>
+          <a:bodyPr/>
+          <a:lstStyle/>
+          <a:p>
+            <a:pPr>
+              <a:defRPr sz="1400" b="0" i="0" u="none" strike="noStrike">
+                <a:solidFill>
+                  <a:srgbClr val="FFFFFF"/>
+                </a:solidFill>
+                <a:latin typeface="+mn-lt"/>
+              </a:defRPr>
+            </a:pPr>
+            <a:endParaRPr lang="en-US"/>
+          </a:p>
+        </c:txPr>
+        <c:crossAx val="2094734554"/>
+        <c:crosses val="autoZero"/>
+        <c:crossBetween val="between"/>
+        <c:majorUnit val="1"/>
+      </c:valAx>
+      <c:spPr>
+        <a:solidFill>
+          <a:srgbClr val="FFFFFF">
+            <a:alpha val="0"/>
+          </a:srgbClr>
+        </a:solidFill>
+        <a:ln>
+          <a:noFill/>
+        </a:ln>
+        <a:effectLst/>
+      </c:spPr>
+    </c:plotArea>
+    <c:plotVisOnly val="1"/>
+    <c:dispBlanksAs val="span"/>
+  </c:chart>
+  <c:spPr>
+    <a:solidFill>
+      <a:srgbClr val="FFFFFF">
+        <a:alpha val="0"/>
+      </a:srgbClr>
+    </a:solidFill>
+    <a:ln>
+      <a:noFill/>
+    </a:ln>
+    <a:effectLst/>
+  </c:spPr>
+  <c:externalData r:id="rId1">
+    <c:autoUpdate val="0"/>
+  </c:externalData>
+</c:chartSpace>
+</file>
+
+<file path=ppt/charts/chart18.xml><?xml version="1.0" encoding="utf-8"?>
 <c:chartSpace xmlns:c="http://schemas.openxmlformats.org/drawingml/2006/chart" xmlns:a="http://schemas.openxmlformats.org/drawingml/2006/main" xmlns:r="http://schemas.openxmlformats.org/officeDocument/2006/relationships">
   <c:date1904 val="0"/>
   <c:roundedCorners val="1"/>
@@ -1294,17 +3178,6 @@
         </c:scaling>
         <c:delete val="0"/>
         <c:axPos val="l"/>
-        <c:majorGridlines>
-          <c:spPr>
-            <a:ln w="9525" cap="flat">
-              <a:solidFill>
-                <a:srgbClr val="D9D9D9"/>
-              </a:solidFill>
-              <a:prstDash val="solid"/>
-              <a:round/>
-            </a:ln>
-          </c:spPr>
-        </c:majorGridlines>
         <c:numFmt formatCode="0&quot;%&quot;" sourceLinked="0"/>
         <c:majorTickMark val="out"/>
         <c:minorTickMark val="none"/>
@@ -1368,7 +3241,7 @@
 </c:chartSpace>
 </file>
 
-<file path=ppt/charts/chart13.xml><?xml version="1.0" encoding="utf-8"?>
+<file path=ppt/charts/chart19.xml><?xml version="1.0" encoding="utf-8"?>
 <c:chartSpace xmlns:c="http://schemas.openxmlformats.org/drawingml/2006/chart" xmlns:a="http://schemas.openxmlformats.org/drawingml/2006/main" xmlns:r="http://schemas.openxmlformats.org/officeDocument/2006/relationships">
   <c:date1904 val="0"/>
   <c:roundedCorners val="1"/>
@@ -1612,11 +3485,22 @@
         <c:axId val="2094734552"/>
         <c:scaling>
           <c:orientation val="minMax"/>
-          <c:max val="8"/>
-          <c:min val="3"/>
+          <c:max val="10"/>
+          <c:min val="2"/>
         </c:scaling>
         <c:delete val="0"/>
         <c:axPos val="l"/>
+        <c:majorGridlines>
+          <c:spPr>
+            <a:ln w="9525" cap="flat">
+              <a:solidFill>
+                <a:srgbClr val="D9D9D9"/>
+              </a:solidFill>
+              <a:prstDash val="solid"/>
+              <a:round/>
+            </a:ln>
+          </c:spPr>
+        </c:majorGridlines>
         <c:numFmt formatCode="0&quot;%&quot;" sourceLinked="0"/>
         <c:majorTickMark val="out"/>
         <c:minorTickMark val="none"/>
@@ -1646,7 +3530,7 @@
         <c:crossAx val="2094734554"/>
         <c:crosses val="autoZero"/>
         <c:crossBetween val="between"/>
-        <c:majorUnit val="1"/>
+        <c:majorUnit val="2"/>
       </c:valAx>
       <c:spPr>
         <a:noFill/>
@@ -1672,7 +3556,317 @@
 </c:chartSpace>
 </file>
 
-<file path=ppt/charts/chart14.xml><?xml version="1.0" encoding="utf-8"?>
+<file path=ppt/charts/chart2.xml><?xml version="1.0" encoding="utf-8"?>
+<c:chartSpace xmlns:c="http://schemas.openxmlformats.org/drawingml/2006/chart" xmlns:a="http://schemas.openxmlformats.org/drawingml/2006/main" xmlns:r="http://schemas.openxmlformats.org/officeDocument/2006/relationships">
+  <c:date1904 val="0"/>
+  <c:roundedCorners val="1"/>
+  <c:chart>
+    <c:autoTitleDeleted val="1"/>
+    <c:plotArea>
+      <c:layout/>
+      <c:lineChart>
+        <c:varyColors val="0"/>
+        <c:ser>
+          <c:idx val="0"/>
+          <c:order val="0"/>
+          <c:tx>
+            <c:strRef>
+              <c:f>Sheet1!$B$1</c:f>
+              <c:strCache>
+                <c:ptCount val="1"/>
+                <c:pt idx="0">
+                  <c:v>2026</c:v>
+                </c:pt>
+              </c:strCache>
+            </c:strRef>
+          </c:tx>
+          <c:spPr>
+            <a:solidFill>
+              <a:srgbClr val="2587C5"/>
+            </a:solidFill>
+            <a:ln>
+              <a:noFill/>
+            </a:ln>
+            <a:effectLst/>
+          </c:spPr>
+          <c:invertIfNegative val="0"/>
+          <c:dLbls>
+            <c:numFmt formatCode="0.0&quot;%&quot;" sourceLinked="0"/>
+            <c:txPr>
+              <a:bodyPr/>
+              <a:lstStyle/>
+              <a:p>
+                <a:pPr>
+                  <a:defRPr b="0" i="0" strike="noStrike" sz="1400" u="none">
+                    <a:solidFill>
+                      <a:srgbClr val="1A1A1A"/>
+                    </a:solidFill>
+                    <a:latin typeface="+mn-lt"/>
+                  </a:defRPr>
+                </a:pPr>
+              </a:p>
+            </c:txPr>
+            <c:dLblPos val="t"/>
+            <c:showLegendKey val="0"/>
+            <c:showVal val="1"/>
+            <c:showCatName val="0"/>
+            <c:showSerName val="0"/>
+            <c:showPercent val="0"/>
+            <c:showBubbleSize val="0"/>
+            <c:showLeaderLines val="0"/>
+          </c:dLbls>
+          <c:marker>
+            <c:symbol val="none"/>
+            <c:size val="8"/>
+            <c:spPr>
+              <a:solidFill>
+                <a:srgbClr val="2587C5"/>
+              </a:solidFill>
+              <a:ln w="9525" cap="flat">
+                <a:solidFill>
+                  <a:srgbClr val="2587C5"/>
+                </a:solidFill>
+                <a:prstDash val="solid"/>
+                <a:round/>
+              </a:ln>
+              <a:effectLst/>
+            </c:spPr>
+          </c:marker>
+          <c:cat>
+            <c:multiLvlStrRef>
+              <c:f>Sheet1!$A$2:$A$13</c:f>
+              <c:multiLvlStrCache>
+                <c:ptCount val="12"/>
+                <c:lvl>
+                  <c:pt idx="0">
+                    <c:v>Jan</c:v>
+                  </c:pt>
+                  <c:pt idx="1">
+                    <c:v>Feb</c:v>
+                  </c:pt>
+                  <c:pt idx="2">
+                    <c:v>Mar</c:v>
+                  </c:pt>
+                  <c:pt idx="3">
+                    <c:v>Apr</c:v>
+                  </c:pt>
+                  <c:pt idx="4">
+                    <c:v>May</c:v>
+                  </c:pt>
+                  <c:pt idx="5">
+                    <c:v>Jun</c:v>
+                  </c:pt>
+                  <c:pt idx="6">
+                    <c:v>Jul</c:v>
+                  </c:pt>
+                  <c:pt idx="7">
+                    <c:v>Aug</c:v>
+                  </c:pt>
+                  <c:pt idx="8">
+                    <c:v>Sep</c:v>
+                  </c:pt>
+                  <c:pt idx="9">
+                    <c:v>Oct</c:v>
+                  </c:pt>
+                  <c:pt idx="10">
+                    <c:v>Nov</c:v>
+                  </c:pt>
+                  <c:pt idx="11">
+                    <c:v>Dec</c:v>
+                  </c:pt>
+                </c:lvl>
+              </c:multiLvlStrCache>
+            </c:multiLvlStrRef>
+          </c:cat>
+          <c:val>
+            <c:numRef>
+              <c:f>Sheet1!$B$2:$B$13</c:f>
+              <c:numCache>
+                <c:formatCode>General</c:formatCode>
+                <c:ptCount val="12"/>
+                <c:pt idx="0">
+                  <c:v>12.2</c:v>
+                </c:pt>
+                <c:pt idx="1">
+                  <c:v>13.3</c:v>
+                </c:pt>
+                <c:pt idx="2">
+                  <c:v>13.4</c:v>
+                </c:pt>
+                <c:pt idx="3">
+                  <c:v>14.2</c:v>
+                </c:pt>
+                <c:pt idx="4">
+                  <c:v>13.6</c:v>
+                </c:pt>
+                <c:pt idx="5">
+                  <c:v>13.5</c:v>
+                </c:pt>
+                <c:pt idx="6">
+                  <c:v>13.3</c:v>
+                </c:pt>
+                <c:pt idx="7">
+                  <c:v>13</c:v>
+                </c:pt>
+                <c:pt idx="8">
+                  <c:v>13.1</c:v>
+                </c:pt>
+                <c:pt idx="9">
+                  <c:v/>
+                </c:pt>
+                <c:pt idx="10">
+                  <c:v/>
+                </c:pt>
+                <c:pt idx="11">
+                  <c:v/>
+                </c:pt>
+              </c:numCache>
+            </c:numRef>
+          </c:val>
+          <c:smooth val="0"/>
+        </c:ser>
+        <c:dLbls>
+          <c:numFmt formatCode="0.0&quot;%&quot;" sourceLinked="0"/>
+          <c:txPr>
+            <a:bodyPr/>
+            <a:lstStyle/>
+            <a:p>
+              <a:pPr>
+                <a:defRPr b="0" i="0" strike="noStrike" sz="1400" u="none">
+                  <a:solidFill>
+                    <a:srgbClr val="1A1A1A"/>
+                  </a:solidFill>
+                  <a:latin typeface="+mn-lt"/>
+                </a:defRPr>
+              </a:pPr>
+            </a:p>
+          </c:txPr>
+          <c:dLblPos val="t"/>
+          <c:showLegendKey val="0"/>
+          <c:showVal val="1"/>
+          <c:showCatName val="0"/>
+          <c:showSerName val="0"/>
+          <c:showPercent val="0"/>
+          <c:showBubbleSize val="0"/>
+          <c:showLeaderLines val="0"/>
+        </c:dLbls>
+        <c:marker val="1"/>
+        <c:axId val="2094734554"/>
+        <c:axId val="2094734552"/>
+        <c:axId val="2094734556"/>
+      </c:lineChart>
+      <c:catAx>
+        <c:axId val="2094734554"/>
+        <c:scaling>
+          <c:orientation val="minMax"/>
+        </c:scaling>
+        <c:delete val="0"/>
+        <c:axPos val="b"/>
+        <c:numFmt formatCode="General" sourceLinked="1"/>
+        <c:majorTickMark val="out"/>
+        <c:minorTickMark val="none"/>
+        <c:tickLblPos val="low"/>
+        <c:spPr>
+          <a:ln w="12700" cap="flat">
+            <a:noFill/>
+            <a:prstDash val="solid"/>
+            <a:round/>
+          </a:ln>
+        </c:spPr>
+        <c:txPr>
+          <a:bodyPr/>
+          <a:lstStyle/>
+          <a:p>
+            <a:pPr>
+              <a:defRPr sz="1400" b="0" i="0" u="none" strike="noStrike">
+                <a:solidFill>
+                  <a:srgbClr val="FFFFFF"/>
+                </a:solidFill>
+                <a:latin typeface="+mn-lt"/>
+              </a:defRPr>
+            </a:pPr>
+            <a:endParaRPr lang="en-US"/>
+          </a:p>
+        </c:txPr>
+        <c:crossAx val="2094734552"/>
+        <c:crosses val="min"/>
+        <c:auto val="1"/>
+        <c:lblAlgn val="ctr"/>
+        <c:noMultiLvlLbl val="1"/>
+      </c:catAx>
+      <c:valAx>
+        <c:axId val="2094734552"/>
+        <c:scaling>
+          <c:orientation val="minMax"/>
+          <c:max val="18"/>
+          <c:min val="8"/>
+        </c:scaling>
+        <c:delete val="0"/>
+        <c:axPos val="l"/>
+        <c:numFmt formatCode="0&quot;%&quot;" sourceLinked="0"/>
+        <c:majorTickMark val="out"/>
+        <c:minorTickMark val="none"/>
+        <c:tickLblPos val="nextTo"/>
+        <c:spPr>
+          <a:ln w="12700" cap="flat">
+            <a:noFill/>
+            <a:prstDash val="solid"/>
+            <a:round/>
+          </a:ln>
+        </c:spPr>
+        <c:txPr>
+          <a:bodyPr/>
+          <a:lstStyle/>
+          <a:p>
+            <a:pPr>
+              <a:defRPr sz="1400" b="0" i="0" u="none" strike="noStrike">
+                <a:solidFill>
+                  <a:srgbClr val="FFFFFF"/>
+                </a:solidFill>
+                <a:latin typeface="+mn-lt"/>
+              </a:defRPr>
+            </a:pPr>
+            <a:endParaRPr lang="en-US"/>
+          </a:p>
+        </c:txPr>
+        <c:crossAx val="2094734554"/>
+        <c:crosses val="autoZero"/>
+        <c:crossBetween val="between"/>
+        <c:majorUnit val="2"/>
+      </c:valAx>
+      <c:spPr>
+        <a:solidFill>
+          <a:srgbClr val="FFFFFF">
+            <a:alpha val="0"/>
+          </a:srgbClr>
+        </a:solidFill>
+        <a:ln>
+          <a:noFill/>
+        </a:ln>
+        <a:effectLst/>
+      </c:spPr>
+    </c:plotArea>
+    <c:plotVisOnly val="1"/>
+    <c:dispBlanksAs val="span"/>
+  </c:chart>
+  <c:spPr>
+    <a:solidFill>
+      <a:srgbClr val="FFFFFF">
+        <a:alpha val="0"/>
+      </a:srgbClr>
+    </a:solidFill>
+    <a:ln>
+      <a:noFill/>
+    </a:ln>
+    <a:effectLst/>
+  </c:spPr>
+  <c:externalData r:id="rId1">
+    <c:autoUpdate val="0"/>
+  </c:externalData>
+</c:chartSpace>
+</file>
+
+<file path=ppt/charts/chart20.xml><?xml version="1.0" encoding="utf-8"?>
 <c:chartSpace xmlns:c="http://schemas.openxmlformats.org/drawingml/2006/chart" xmlns:a="http://schemas.openxmlformats.org/drawingml/2006/main" xmlns:r="http://schemas.openxmlformats.org/officeDocument/2006/relationships">
   <c:date1904 val="0"/>
   <c:roundedCorners val="1"/>
@@ -1914,8 +4108,8 @@
         <c:axId val="2094734552"/>
         <c:scaling>
           <c:orientation val="minMax"/>
-          <c:max val="8"/>
-          <c:min val="3"/>
+          <c:max val="10"/>
+          <c:min val="2"/>
         </c:scaling>
         <c:delete val="0"/>
         <c:axPos val="l"/>
@@ -1948,7 +4142,7 @@
         <c:crossAx val="2094734554"/>
         <c:crosses val="autoZero"/>
         <c:crossBetween val="between"/>
-        <c:majorUnit val="1"/>
+        <c:majorUnit val="2"/>
       </c:valAx>
       <c:spPr>
         <a:solidFill>
@@ -1982,7 +4176,317 @@
 </c:chartSpace>
 </file>
 
-<file path=ppt/charts/chart15.xml><?xml version="1.0" encoding="utf-8"?>
+<file path=ppt/charts/chart21.xml><?xml version="1.0" encoding="utf-8"?>
+<c:chartSpace xmlns:c="http://schemas.openxmlformats.org/drawingml/2006/chart" xmlns:a="http://schemas.openxmlformats.org/drawingml/2006/main" xmlns:r="http://schemas.openxmlformats.org/officeDocument/2006/relationships">
+  <c:date1904 val="0"/>
+  <c:roundedCorners val="1"/>
+  <c:chart>
+    <c:autoTitleDeleted val="1"/>
+    <c:plotArea>
+      <c:layout/>
+      <c:lineChart>
+        <c:varyColors val="0"/>
+        <c:ser>
+          <c:idx val="0"/>
+          <c:order val="0"/>
+          <c:tx>
+            <c:strRef>
+              <c:f>Sheet1!$B$1</c:f>
+              <c:strCache>
+                <c:ptCount val="1"/>
+                <c:pt idx="0">
+                  <c:v>2025</c:v>
+                </c:pt>
+              </c:strCache>
+            </c:strRef>
+          </c:tx>
+          <c:spPr>
+            <a:solidFill>
+              <a:srgbClr val="9AA3AD"/>
+            </a:solidFill>
+            <a:ln>
+              <a:noFill/>
+            </a:ln>
+            <a:effectLst/>
+          </c:spPr>
+          <c:invertIfNegative val="0"/>
+          <c:dLbls>
+            <c:numFmt formatCode="0.0&quot;%&quot;" sourceLinked="0"/>
+            <c:txPr>
+              <a:bodyPr/>
+              <a:lstStyle/>
+              <a:p>
+                <a:pPr>
+                  <a:defRPr b="0" i="0" strike="noStrike" sz="1400" u="none">
+                    <a:solidFill>
+                      <a:srgbClr val="1A1A1A"/>
+                    </a:solidFill>
+                    <a:latin typeface="+mn-lt"/>
+                  </a:defRPr>
+                </a:pPr>
+              </a:p>
+            </c:txPr>
+            <c:dLblPos val="t"/>
+            <c:showLegendKey val="0"/>
+            <c:showVal val="1"/>
+            <c:showCatName val="0"/>
+            <c:showSerName val="0"/>
+            <c:showPercent val="0"/>
+            <c:showBubbleSize val="0"/>
+            <c:showLeaderLines val="0"/>
+          </c:dLbls>
+          <c:marker>
+            <c:symbol val="none"/>
+            <c:size val="8"/>
+            <c:spPr>
+              <a:solidFill>
+                <a:srgbClr val="9AA3AD"/>
+              </a:solidFill>
+              <a:ln w="9525" cap="flat">
+                <a:solidFill>
+                  <a:srgbClr val="9AA3AD"/>
+                </a:solidFill>
+                <a:prstDash val="solid"/>
+                <a:round/>
+              </a:ln>
+              <a:effectLst/>
+            </c:spPr>
+          </c:marker>
+          <c:cat>
+            <c:multiLvlStrRef>
+              <c:f>Sheet1!$A$2:$A$13</c:f>
+              <c:multiLvlStrCache>
+                <c:ptCount val="12"/>
+                <c:lvl>
+                  <c:pt idx="0">
+                    <c:v>Jan</c:v>
+                  </c:pt>
+                  <c:pt idx="1">
+                    <c:v>Feb</c:v>
+                  </c:pt>
+                  <c:pt idx="2">
+                    <c:v>Mar</c:v>
+                  </c:pt>
+                  <c:pt idx="3">
+                    <c:v>Apr</c:v>
+                  </c:pt>
+                  <c:pt idx="4">
+                    <c:v>May</c:v>
+                  </c:pt>
+                  <c:pt idx="5">
+                    <c:v>Jun</c:v>
+                  </c:pt>
+                  <c:pt idx="6">
+                    <c:v>Jul</c:v>
+                  </c:pt>
+                  <c:pt idx="7">
+                    <c:v>Aug</c:v>
+                  </c:pt>
+                  <c:pt idx="8">
+                    <c:v>Sep</c:v>
+                  </c:pt>
+                  <c:pt idx="9">
+                    <c:v>Oct</c:v>
+                  </c:pt>
+                  <c:pt idx="10">
+                    <c:v>Nov</c:v>
+                  </c:pt>
+                  <c:pt idx="11">
+                    <c:v>Dec</c:v>
+                  </c:pt>
+                </c:lvl>
+              </c:multiLvlStrCache>
+            </c:multiLvlStrRef>
+          </c:cat>
+          <c:val>
+            <c:numRef>
+              <c:f>Sheet1!$B$2:$B$13</c:f>
+              <c:numCache>
+                <c:formatCode>General</c:formatCode>
+                <c:ptCount val="12"/>
+                <c:pt idx="0">
+                  <c:v/>
+                </c:pt>
+                <c:pt idx="1">
+                  <c:v/>
+                </c:pt>
+                <c:pt idx="2">
+                  <c:v/>
+                </c:pt>
+                <c:pt idx="3">
+                  <c:v/>
+                </c:pt>
+                <c:pt idx="4">
+                  <c:v/>
+                </c:pt>
+                <c:pt idx="5">
+                  <c:v/>
+                </c:pt>
+                <c:pt idx="6">
+                  <c:v/>
+                </c:pt>
+                <c:pt idx="7">
+                  <c:v/>
+                </c:pt>
+                <c:pt idx="8">
+                  <c:v/>
+                </c:pt>
+                <c:pt idx="9">
+                  <c:v/>
+                </c:pt>
+                <c:pt idx="10">
+                  <c:v>4.8</c:v>
+                </c:pt>
+                <c:pt idx="11">
+                  <c:v>4.9</c:v>
+                </c:pt>
+              </c:numCache>
+            </c:numRef>
+          </c:val>
+          <c:smooth val="0"/>
+        </c:ser>
+        <c:dLbls>
+          <c:numFmt formatCode="0.0&quot;%&quot;" sourceLinked="0"/>
+          <c:txPr>
+            <a:bodyPr/>
+            <a:lstStyle/>
+            <a:p>
+              <a:pPr>
+                <a:defRPr b="0" i="0" strike="noStrike" sz="1400" u="none">
+                  <a:solidFill>
+                    <a:srgbClr val="1A1A1A"/>
+                  </a:solidFill>
+                  <a:latin typeface="+mn-lt"/>
+                </a:defRPr>
+              </a:pPr>
+            </a:p>
+          </c:txPr>
+          <c:dLblPos val="t"/>
+          <c:showLegendKey val="0"/>
+          <c:showVal val="1"/>
+          <c:showCatName val="0"/>
+          <c:showSerName val="0"/>
+          <c:showPercent val="0"/>
+          <c:showBubbleSize val="0"/>
+          <c:showLeaderLines val="0"/>
+        </c:dLbls>
+        <c:marker val="1"/>
+        <c:axId val="2094734554"/>
+        <c:axId val="2094734552"/>
+        <c:axId val="2094734556"/>
+      </c:lineChart>
+      <c:catAx>
+        <c:axId val="2094734554"/>
+        <c:scaling>
+          <c:orientation val="minMax"/>
+        </c:scaling>
+        <c:delete val="0"/>
+        <c:axPos val="b"/>
+        <c:numFmt formatCode="General" sourceLinked="1"/>
+        <c:majorTickMark val="out"/>
+        <c:minorTickMark val="none"/>
+        <c:tickLblPos val="low"/>
+        <c:spPr>
+          <a:ln w="12700" cap="flat">
+            <a:noFill/>
+            <a:prstDash val="solid"/>
+            <a:round/>
+          </a:ln>
+        </c:spPr>
+        <c:txPr>
+          <a:bodyPr/>
+          <a:lstStyle/>
+          <a:p>
+            <a:pPr>
+              <a:defRPr sz="1400" b="0" i="0" u="none" strike="noStrike">
+                <a:solidFill>
+                  <a:srgbClr val="FFFFFF"/>
+                </a:solidFill>
+                <a:latin typeface="+mn-lt"/>
+              </a:defRPr>
+            </a:pPr>
+            <a:endParaRPr lang="en-US"/>
+          </a:p>
+        </c:txPr>
+        <c:crossAx val="2094734552"/>
+        <c:crosses val="min"/>
+        <c:auto val="1"/>
+        <c:lblAlgn val="ctr"/>
+        <c:noMultiLvlLbl val="1"/>
+      </c:catAx>
+      <c:valAx>
+        <c:axId val="2094734552"/>
+        <c:scaling>
+          <c:orientation val="minMax"/>
+          <c:max val="10"/>
+          <c:min val="2"/>
+        </c:scaling>
+        <c:delete val="0"/>
+        <c:axPos val="l"/>
+        <c:numFmt formatCode="0&quot;%&quot;" sourceLinked="0"/>
+        <c:majorTickMark val="out"/>
+        <c:minorTickMark val="none"/>
+        <c:tickLblPos val="nextTo"/>
+        <c:spPr>
+          <a:ln w="12700" cap="flat">
+            <a:noFill/>
+            <a:prstDash val="solid"/>
+            <a:round/>
+          </a:ln>
+        </c:spPr>
+        <c:txPr>
+          <a:bodyPr/>
+          <a:lstStyle/>
+          <a:p>
+            <a:pPr>
+              <a:defRPr sz="1400" b="0" i="0" u="none" strike="noStrike">
+                <a:solidFill>
+                  <a:srgbClr val="FFFFFF"/>
+                </a:solidFill>
+                <a:latin typeface="+mn-lt"/>
+              </a:defRPr>
+            </a:pPr>
+            <a:endParaRPr lang="en-US"/>
+          </a:p>
+        </c:txPr>
+        <c:crossAx val="2094734554"/>
+        <c:crosses val="autoZero"/>
+        <c:crossBetween val="between"/>
+        <c:majorUnit val="2"/>
+      </c:valAx>
+      <c:spPr>
+        <a:solidFill>
+          <a:srgbClr val="FFFFFF">
+            <a:alpha val="0"/>
+          </a:srgbClr>
+        </a:solidFill>
+        <a:ln>
+          <a:noFill/>
+        </a:ln>
+        <a:effectLst/>
+      </c:spPr>
+    </c:plotArea>
+    <c:plotVisOnly val="1"/>
+    <c:dispBlanksAs val="span"/>
+  </c:chart>
+  <c:spPr>
+    <a:solidFill>
+      <a:srgbClr val="FFFFFF">
+        <a:alpha val="0"/>
+      </a:srgbClr>
+    </a:solidFill>
+    <a:ln>
+      <a:noFill/>
+    </a:ln>
+    <a:effectLst/>
+  </c:spPr>
+  <c:externalData r:id="rId1">
+    <c:autoUpdate val="0"/>
+  </c:externalData>
+</c:chartSpace>
+</file>
+
+<file path=ppt/charts/chart22.xml><?xml version="1.0" encoding="utf-8"?>
 <c:chartSpace xmlns:c="http://schemas.openxmlformats.org/drawingml/2006/chart" xmlns:a="http://schemas.openxmlformats.org/drawingml/2006/main" xmlns:r="http://schemas.openxmlformats.org/officeDocument/2006/relationships">
   <c:date1904 val="0"/>
   <c:roundedCorners val="1"/>
@@ -2141,10 +4645,10 @@
                   <c:v>4.6</c:v>
                 </c:pt>
                 <c:pt idx="10">
-                  <c:v>4.8</c:v>
+                  <c:v/>
                 </c:pt>
                 <c:pt idx="11">
-                  <c:v>4.9</c:v>
+                  <c:v/>
                 </c:pt>
               </c:numCache>
             </c:numRef>
@@ -2224,8 +4728,8 @@
         <c:axId val="2094734552"/>
         <c:scaling>
           <c:orientation val="minMax"/>
-          <c:max val="8"/>
-          <c:min val="3"/>
+          <c:max val="10"/>
+          <c:min val="2"/>
         </c:scaling>
         <c:delete val="0"/>
         <c:axPos val="l"/>
@@ -2258,7 +4762,7 @@
         <c:crossAx val="2094734554"/>
         <c:crosses val="autoZero"/>
         <c:crossBetween val="between"/>
-        <c:majorUnit val="1"/>
+        <c:majorUnit val="2"/>
       </c:valAx>
       <c:spPr>
         <a:solidFill>
@@ -2292,7 +4796,319 @@
 </c:chartSpace>
 </file>
 
-<file path=ppt/charts/chart16.xml><?xml version="1.0" encoding="utf-8"?>
+<file path=ppt/charts/chart23.xml><?xml version="1.0" encoding="utf-8"?>
+<c:chartSpace xmlns:c="http://schemas.openxmlformats.org/drawingml/2006/chart" xmlns:a="http://schemas.openxmlformats.org/drawingml/2006/main" xmlns:r="http://schemas.openxmlformats.org/officeDocument/2006/relationships">
+  <c:date1904 val="0"/>
+  <c:roundedCorners val="1"/>
+  <c:chart>
+    <c:autoTitleDeleted val="1"/>
+    <c:plotArea>
+      <c:layout/>
+      <c:lineChart>
+        <c:varyColors val="0"/>
+        <c:ser>
+          <c:idx val="0"/>
+          <c:order val="0"/>
+          <c:tx>
+            <c:strRef>
+              <c:f>Sheet1!$B$1</c:f>
+              <c:strCache>
+                <c:ptCount val="1"/>
+                <c:pt idx="0">
+                  <c:v>bench0</c:v>
+                </c:pt>
+              </c:strCache>
+            </c:strRef>
+          </c:tx>
+          <c:spPr>
+            <a:solidFill>
+              <a:srgbClr val="595959"/>
+            </a:solidFill>
+            <a:ln w="25400" cap="flat">
+              <a:solidFill>
+                <a:srgbClr val="595959"/>
+              </a:solidFill>
+              <a:prstDash val="dash"/>
+              <a:round/>
+            </a:ln>
+            <a:effectLst/>
+          </c:spPr>
+          <c:invertIfNegative val="0"/>
+          <c:dLbls>
+            <c:numFmt formatCode="0.0&quot;%&quot;" sourceLinked="0"/>
+            <c:txPr>
+              <a:bodyPr/>
+              <a:lstStyle/>
+              <a:p>
+                <a:pPr>
+                  <a:defRPr b="0" i="0" strike="noStrike" sz="1400" u="none">
+                    <a:solidFill>
+                      <a:srgbClr val="1A1A1A"/>
+                    </a:solidFill>
+                    <a:latin typeface="+mn-lt"/>
+                  </a:defRPr>
+                </a:pPr>
+              </a:p>
+            </c:txPr>
+            <c:showLegendKey val="0"/>
+            <c:showVal val="0"/>
+            <c:showCatName val="0"/>
+            <c:showSerName val="0"/>
+            <c:showPercent val="0"/>
+            <c:showBubbleSize val="0"/>
+            <c:showLeaderLines val="0"/>
+          </c:dLbls>
+          <c:marker>
+            <c:symbol val="none"/>
+            <c:size val="8"/>
+            <c:spPr>
+              <a:solidFill>
+                <a:srgbClr val="595959"/>
+              </a:solidFill>
+              <a:ln w="9525" cap="flat">
+                <a:solidFill>
+                  <a:srgbClr val="595959"/>
+                </a:solidFill>
+                <a:prstDash val="solid"/>
+                <a:round/>
+              </a:ln>
+              <a:effectLst/>
+            </c:spPr>
+          </c:marker>
+          <c:cat>
+            <c:multiLvlStrRef>
+              <c:f>Sheet1!$A$2:$A$13</c:f>
+              <c:multiLvlStrCache>
+                <c:ptCount val="12"/>
+                <c:lvl>
+                  <c:pt idx="0">
+                    <c:v>Jan</c:v>
+                  </c:pt>
+                  <c:pt idx="1">
+                    <c:v>Feb</c:v>
+                  </c:pt>
+                  <c:pt idx="2">
+                    <c:v>Mar</c:v>
+                  </c:pt>
+                  <c:pt idx="3">
+                    <c:v>Apr</c:v>
+                  </c:pt>
+                  <c:pt idx="4">
+                    <c:v>May</c:v>
+                  </c:pt>
+                  <c:pt idx="5">
+                    <c:v>Jun</c:v>
+                  </c:pt>
+                  <c:pt idx="6">
+                    <c:v>Jul</c:v>
+                  </c:pt>
+                  <c:pt idx="7">
+                    <c:v>Aug</c:v>
+                  </c:pt>
+                  <c:pt idx="8">
+                    <c:v>Sep</c:v>
+                  </c:pt>
+                  <c:pt idx="9">
+                    <c:v>Oct</c:v>
+                  </c:pt>
+                  <c:pt idx="10">
+                    <c:v>Nov</c:v>
+                  </c:pt>
+                  <c:pt idx="11">
+                    <c:v>Dec</c:v>
+                  </c:pt>
+                </c:lvl>
+              </c:multiLvlStrCache>
+            </c:multiLvlStrRef>
+          </c:cat>
+          <c:val>
+            <c:numRef>
+              <c:f>Sheet1!$B$2:$B$13</c:f>
+              <c:numCache>
+                <c:formatCode>General</c:formatCode>
+                <c:ptCount val="12"/>
+                <c:pt idx="0">
+                  <c:v>7.5</c:v>
+                </c:pt>
+                <c:pt idx="1">
+                  <c:v>7.5</c:v>
+                </c:pt>
+                <c:pt idx="2">
+                  <c:v>7.5</c:v>
+                </c:pt>
+                <c:pt idx="3">
+                  <c:v>7.5</c:v>
+                </c:pt>
+                <c:pt idx="4">
+                  <c:v>7.5</c:v>
+                </c:pt>
+                <c:pt idx="5">
+                  <c:v>7.5</c:v>
+                </c:pt>
+                <c:pt idx="6">
+                  <c:v>7.5</c:v>
+                </c:pt>
+                <c:pt idx="7">
+                  <c:v>7.5</c:v>
+                </c:pt>
+                <c:pt idx="8">
+                  <c:v>7.5</c:v>
+                </c:pt>
+                <c:pt idx="9">
+                  <c:v>7.5</c:v>
+                </c:pt>
+                <c:pt idx="10">
+                  <c:v>7.5</c:v>
+                </c:pt>
+                <c:pt idx="11">
+                  <c:v>7.5</c:v>
+                </c:pt>
+              </c:numCache>
+            </c:numRef>
+          </c:val>
+          <c:smooth val="0"/>
+        </c:ser>
+        <c:dLbls>
+          <c:numFmt formatCode="0.0&quot;%&quot;" sourceLinked="0"/>
+          <c:txPr>
+            <a:bodyPr/>
+            <a:lstStyle/>
+            <a:p>
+              <a:pPr>
+                <a:defRPr b="0" i="0" strike="noStrike" sz="1400" u="none">
+                  <a:solidFill>
+                    <a:srgbClr val="1A1A1A"/>
+                  </a:solidFill>
+                  <a:latin typeface="+mn-lt"/>
+                </a:defRPr>
+              </a:pPr>
+            </a:p>
+          </c:txPr>
+          <c:showLegendKey val="0"/>
+          <c:showVal val="0"/>
+          <c:showCatName val="0"/>
+          <c:showSerName val="0"/>
+          <c:showPercent val="0"/>
+          <c:showBubbleSize val="0"/>
+          <c:showLeaderLines val="0"/>
+        </c:dLbls>
+        <c:marker val="1"/>
+        <c:axId val="2094734554"/>
+        <c:axId val="2094734552"/>
+        <c:axId val="2094734556"/>
+      </c:lineChart>
+      <c:catAx>
+        <c:axId val="2094734554"/>
+        <c:scaling>
+          <c:orientation val="minMax"/>
+        </c:scaling>
+        <c:delete val="0"/>
+        <c:axPos val="b"/>
+        <c:numFmt formatCode="General" sourceLinked="1"/>
+        <c:majorTickMark val="out"/>
+        <c:minorTickMark val="none"/>
+        <c:tickLblPos val="low"/>
+        <c:spPr>
+          <a:ln w="12700" cap="flat">
+            <a:noFill/>
+            <a:prstDash val="solid"/>
+            <a:round/>
+          </a:ln>
+        </c:spPr>
+        <c:txPr>
+          <a:bodyPr/>
+          <a:lstStyle/>
+          <a:p>
+            <a:pPr>
+              <a:defRPr sz="1400" b="0" i="0" u="none" strike="noStrike">
+                <a:solidFill>
+                  <a:srgbClr val="FFFFFF"/>
+                </a:solidFill>
+                <a:latin typeface="+mn-lt"/>
+              </a:defRPr>
+            </a:pPr>
+            <a:endParaRPr lang="en-US"/>
+          </a:p>
+        </c:txPr>
+        <c:crossAx val="2094734552"/>
+        <c:crosses val="min"/>
+        <c:auto val="1"/>
+        <c:lblAlgn val="ctr"/>
+        <c:noMultiLvlLbl val="1"/>
+      </c:catAx>
+      <c:valAx>
+        <c:axId val="2094734552"/>
+        <c:scaling>
+          <c:orientation val="minMax"/>
+          <c:max val="10"/>
+          <c:min val="2"/>
+        </c:scaling>
+        <c:delete val="0"/>
+        <c:axPos val="l"/>
+        <c:numFmt formatCode="0&quot;%&quot;" sourceLinked="0"/>
+        <c:majorTickMark val="out"/>
+        <c:minorTickMark val="none"/>
+        <c:tickLblPos val="nextTo"/>
+        <c:spPr>
+          <a:ln w="12700" cap="flat">
+            <a:noFill/>
+            <a:prstDash val="solid"/>
+            <a:round/>
+          </a:ln>
+        </c:spPr>
+        <c:txPr>
+          <a:bodyPr/>
+          <a:lstStyle/>
+          <a:p>
+            <a:pPr>
+              <a:defRPr sz="1400" b="0" i="0" u="none" strike="noStrike">
+                <a:solidFill>
+                  <a:srgbClr val="FFFFFF"/>
+                </a:solidFill>
+                <a:latin typeface="+mn-lt"/>
+              </a:defRPr>
+            </a:pPr>
+            <a:endParaRPr lang="en-US"/>
+          </a:p>
+        </c:txPr>
+        <c:crossAx val="2094734554"/>
+        <c:crosses val="autoZero"/>
+        <c:crossBetween val="between"/>
+        <c:majorUnit val="2"/>
+      </c:valAx>
+      <c:spPr>
+        <a:solidFill>
+          <a:srgbClr val="FFFFFF">
+            <a:alpha val="0"/>
+          </a:srgbClr>
+        </a:solidFill>
+        <a:ln>
+          <a:noFill/>
+        </a:ln>
+        <a:effectLst/>
+      </c:spPr>
+    </c:plotArea>
+    <c:plotVisOnly val="1"/>
+    <c:dispBlanksAs val="span"/>
+  </c:chart>
+  <c:spPr>
+    <a:solidFill>
+      <a:srgbClr val="FFFFFF">
+        <a:alpha val="0"/>
+      </a:srgbClr>
+    </a:solidFill>
+    <a:ln>
+      <a:noFill/>
+    </a:ln>
+    <a:effectLst/>
+  </c:spPr>
+  <c:externalData r:id="rId1">
+    <c:autoUpdate val="0"/>
+  </c:externalData>
+</c:chartSpace>
+</file>
+
+<file path=ppt/charts/chart24.xml><?xml version="1.0" encoding="utf-8"?>
 <c:chartSpace xmlns:c="http://schemas.openxmlformats.org/drawingml/2006/chart" xmlns:a="http://schemas.openxmlformats.org/drawingml/2006/main" xmlns:r="http://schemas.openxmlformats.org/officeDocument/2006/relationships">
   <c:date1904 val="0"/>
   <c:roundedCorners val="1"/>
@@ -2538,22 +5354,11 @@
         <c:axId val="2094734552"/>
         <c:scaling>
           <c:orientation val="minMax"/>
-          <c:max val="8"/>
-          <c:min val="3"/>
+          <c:max val="10"/>
+          <c:min val="2"/>
         </c:scaling>
         <c:delete val="0"/>
         <c:axPos val="l"/>
-        <c:majorGridlines>
-          <c:spPr>
-            <a:ln w="9525" cap="flat">
-              <a:solidFill>
-                <a:srgbClr val="D9D9D9"/>
-              </a:solidFill>
-              <a:prstDash val="solid"/>
-              <a:round/>
-            </a:ln>
-          </c:spPr>
-        </c:majorGridlines>
         <c:numFmt formatCode="0&quot;%&quot;" sourceLinked="0"/>
         <c:majorTickMark val="out"/>
         <c:minorTickMark val="none"/>
@@ -2583,7 +5388,7 @@
         <c:crossAx val="2094734554"/>
         <c:crosses val="autoZero"/>
         <c:crossBetween val="between"/>
-        <c:majorUnit val="1"/>
+        <c:majorUnit val="2"/>
       </c:valAx>
       <c:spPr>
         <a:solidFill>
@@ -2617,7 +5422,7 @@
 </c:chartSpace>
 </file>
 
-<file path=ppt/charts/chart2.xml><?xml version="1.0" encoding="utf-8"?>
+<file path=ppt/charts/chart3.xml><?xml version="1.0" encoding="utf-8"?>
 <c:chartSpace xmlns:c="http://schemas.openxmlformats.org/drawingml/2006/chart" xmlns:a="http://schemas.openxmlformats.org/drawingml/2006/main" xmlns:r="http://schemas.openxmlformats.org/officeDocument/2006/relationships">
   <c:date1904 val="0"/>
   <c:roundedCorners val="1"/>
@@ -2636,14 +5441,14 @@
               <c:strCache>
                 <c:ptCount val="1"/>
                 <c:pt idx="0">
-                  <c:v>2026</c:v>
+                  <c:v>2025</c:v>
                 </c:pt>
               </c:strCache>
             </c:strRef>
           </c:tx>
           <c:spPr>
             <a:solidFill>
-              <a:srgbClr val="2587C5"/>
+              <a:srgbClr val="9AA3AD"/>
             </a:solidFill>
             <a:ln>
               <a:noFill/>
@@ -2681,11 +5486,11 @@
             <c:size val="8"/>
             <c:spPr>
               <a:solidFill>
-                <a:srgbClr val="2587C5"/>
+                <a:srgbClr val="9AA3AD"/>
               </a:solidFill>
               <a:ln w="9525" cap="flat">
                 <a:solidFill>
-                  <a:srgbClr val="2587C5"/>
+                  <a:srgbClr val="9AA3AD"/>
                 </a:solidFill>
                 <a:prstDash val="solid"/>
                 <a:round/>
@@ -2746,37 +5551,37 @@
                 <c:formatCode>General</c:formatCode>
                 <c:ptCount val="12"/>
                 <c:pt idx="0">
-                  <c:v>12.2</c:v>
+                  <c:v/>
                 </c:pt>
                 <c:pt idx="1">
-                  <c:v>13.3</c:v>
+                  <c:v/>
                 </c:pt>
                 <c:pt idx="2">
-                  <c:v>13.4</c:v>
+                  <c:v/>
                 </c:pt>
                 <c:pt idx="3">
-                  <c:v>14.2</c:v>
+                  <c:v/>
                 </c:pt>
                 <c:pt idx="4">
-                  <c:v>13.6</c:v>
+                  <c:v/>
                 </c:pt>
                 <c:pt idx="5">
-                  <c:v>13.5</c:v>
+                  <c:v/>
                 </c:pt>
                 <c:pt idx="6">
-                  <c:v>13.3</c:v>
+                  <c:v/>
                 </c:pt>
                 <c:pt idx="7">
-                  <c:v>13</c:v>
+                  <c:v/>
                 </c:pt>
                 <c:pt idx="8">
-                  <c:v>13.1</c:v>
+                  <c:v/>
                 </c:pt>
                 <c:pt idx="9">
-                  <c:v/>
+                  <c:v>12.1</c:v>
                 </c:pt>
                 <c:pt idx="10">
-                  <c:v/>
+                  <c:v>12.3</c:v>
                 </c:pt>
                 <c:pt idx="11">
                   <c:v/>
@@ -2859,8 +5664,8 @@
         <c:axId val="2094734552"/>
         <c:scaling>
           <c:orientation val="minMax"/>
-          <c:max val="16"/>
-          <c:min val="10"/>
+          <c:max val="18"/>
+          <c:min val="8"/>
         </c:scaling>
         <c:delete val="0"/>
         <c:axPos val="l"/>
@@ -2927,7 +5732,7 @@
 </c:chartSpace>
 </file>
 
-<file path=ppt/charts/chart3.xml><?xml version="1.0" encoding="utf-8"?>
+<file path=ppt/charts/chart4.xml><?xml version="1.0" encoding="utf-8"?>
 <c:chartSpace xmlns:c="http://schemas.openxmlformats.org/drawingml/2006/chart" xmlns:a="http://schemas.openxmlformats.org/drawingml/2006/main" xmlns:r="http://schemas.openxmlformats.org/officeDocument/2006/relationships">
   <c:date1904 val="0"/>
   <c:roundedCorners val="1"/>
@@ -3083,10 +5888,10 @@
                   <c:v>11.5</c:v>
                 </c:pt>
                 <c:pt idx="9">
-                  <c:v>12.1</c:v>
+                  <c:v/>
                 </c:pt>
                 <c:pt idx="10">
-                  <c:v>12.3</c:v>
+                  <c:v/>
                 </c:pt>
                 <c:pt idx="11">
                   <c:v>11.8</c:v>
@@ -3169,8 +5974,8 @@
         <c:axId val="2094734552"/>
         <c:scaling>
           <c:orientation val="minMax"/>
-          <c:max val="16"/>
-          <c:min val="10"/>
+          <c:max val="18"/>
+          <c:min val="8"/>
         </c:scaling>
         <c:delete val="0"/>
         <c:axPos val="l"/>
@@ -3237,7 +6042,319 @@
 </c:chartSpace>
 </file>
 
-<file path=ppt/charts/chart4.xml><?xml version="1.0" encoding="utf-8"?>
+<file path=ppt/charts/chart5.xml><?xml version="1.0" encoding="utf-8"?>
+<c:chartSpace xmlns:c="http://schemas.openxmlformats.org/drawingml/2006/chart" xmlns:a="http://schemas.openxmlformats.org/drawingml/2006/main" xmlns:r="http://schemas.openxmlformats.org/officeDocument/2006/relationships">
+  <c:date1904 val="0"/>
+  <c:roundedCorners val="1"/>
+  <c:chart>
+    <c:autoTitleDeleted val="1"/>
+    <c:plotArea>
+      <c:layout/>
+      <c:lineChart>
+        <c:varyColors val="0"/>
+        <c:ser>
+          <c:idx val="0"/>
+          <c:order val="0"/>
+          <c:tx>
+            <c:strRef>
+              <c:f>Sheet1!$B$1</c:f>
+              <c:strCache>
+                <c:ptCount val="1"/>
+                <c:pt idx="0">
+                  <c:v>bench0</c:v>
+                </c:pt>
+              </c:strCache>
+            </c:strRef>
+          </c:tx>
+          <c:spPr>
+            <a:solidFill>
+              <a:srgbClr val="595959"/>
+            </a:solidFill>
+            <a:ln w="25400" cap="flat">
+              <a:solidFill>
+                <a:srgbClr val="595959"/>
+              </a:solidFill>
+              <a:prstDash val="dash"/>
+              <a:round/>
+            </a:ln>
+            <a:effectLst/>
+          </c:spPr>
+          <c:invertIfNegative val="0"/>
+          <c:dLbls>
+            <c:numFmt formatCode="0.0&quot;%&quot;" sourceLinked="0"/>
+            <c:txPr>
+              <a:bodyPr/>
+              <a:lstStyle/>
+              <a:p>
+                <a:pPr>
+                  <a:defRPr b="0" i="0" strike="noStrike" sz="1400" u="none">
+                    <a:solidFill>
+                      <a:srgbClr val="1A1A1A"/>
+                    </a:solidFill>
+                    <a:latin typeface="+mn-lt"/>
+                  </a:defRPr>
+                </a:pPr>
+              </a:p>
+            </c:txPr>
+            <c:showLegendKey val="0"/>
+            <c:showVal val="0"/>
+            <c:showCatName val="0"/>
+            <c:showSerName val="0"/>
+            <c:showPercent val="0"/>
+            <c:showBubbleSize val="0"/>
+            <c:showLeaderLines val="0"/>
+          </c:dLbls>
+          <c:marker>
+            <c:symbol val="none"/>
+            <c:size val="8"/>
+            <c:spPr>
+              <a:solidFill>
+                <a:srgbClr val="595959"/>
+              </a:solidFill>
+              <a:ln w="9525" cap="flat">
+                <a:solidFill>
+                  <a:srgbClr val="595959"/>
+                </a:solidFill>
+                <a:prstDash val="solid"/>
+                <a:round/>
+              </a:ln>
+              <a:effectLst/>
+            </c:spPr>
+          </c:marker>
+          <c:cat>
+            <c:multiLvlStrRef>
+              <c:f>Sheet1!$A$2:$A$13</c:f>
+              <c:multiLvlStrCache>
+                <c:ptCount val="12"/>
+                <c:lvl>
+                  <c:pt idx="0">
+                    <c:v>Jan</c:v>
+                  </c:pt>
+                  <c:pt idx="1">
+                    <c:v>Feb</c:v>
+                  </c:pt>
+                  <c:pt idx="2">
+                    <c:v>Mar</c:v>
+                  </c:pt>
+                  <c:pt idx="3">
+                    <c:v>Apr</c:v>
+                  </c:pt>
+                  <c:pt idx="4">
+                    <c:v>May</c:v>
+                  </c:pt>
+                  <c:pt idx="5">
+                    <c:v>Jun</c:v>
+                  </c:pt>
+                  <c:pt idx="6">
+                    <c:v>Jul</c:v>
+                  </c:pt>
+                  <c:pt idx="7">
+                    <c:v>Aug</c:v>
+                  </c:pt>
+                  <c:pt idx="8">
+                    <c:v>Sep</c:v>
+                  </c:pt>
+                  <c:pt idx="9">
+                    <c:v>Oct</c:v>
+                  </c:pt>
+                  <c:pt idx="10">
+                    <c:v>Nov</c:v>
+                  </c:pt>
+                  <c:pt idx="11">
+                    <c:v>Dec</c:v>
+                  </c:pt>
+                </c:lvl>
+              </c:multiLvlStrCache>
+            </c:multiLvlStrRef>
+          </c:cat>
+          <c:val>
+            <c:numRef>
+              <c:f>Sheet1!$B$2:$B$13</c:f>
+              <c:numCache>
+                <c:formatCode>General</c:formatCode>
+                <c:ptCount val="12"/>
+                <c:pt idx="0">
+                  <c:v>15</c:v>
+                </c:pt>
+                <c:pt idx="1">
+                  <c:v>15</c:v>
+                </c:pt>
+                <c:pt idx="2">
+                  <c:v>15</c:v>
+                </c:pt>
+                <c:pt idx="3">
+                  <c:v>15</c:v>
+                </c:pt>
+                <c:pt idx="4">
+                  <c:v>15</c:v>
+                </c:pt>
+                <c:pt idx="5">
+                  <c:v>15</c:v>
+                </c:pt>
+                <c:pt idx="6">
+                  <c:v>15</c:v>
+                </c:pt>
+                <c:pt idx="7">
+                  <c:v>15</c:v>
+                </c:pt>
+                <c:pt idx="8">
+                  <c:v>15</c:v>
+                </c:pt>
+                <c:pt idx="9">
+                  <c:v>15</c:v>
+                </c:pt>
+                <c:pt idx="10">
+                  <c:v>15</c:v>
+                </c:pt>
+                <c:pt idx="11">
+                  <c:v>15</c:v>
+                </c:pt>
+              </c:numCache>
+            </c:numRef>
+          </c:val>
+          <c:smooth val="0"/>
+        </c:ser>
+        <c:dLbls>
+          <c:numFmt formatCode="0.0&quot;%&quot;" sourceLinked="0"/>
+          <c:txPr>
+            <a:bodyPr/>
+            <a:lstStyle/>
+            <a:p>
+              <a:pPr>
+                <a:defRPr b="0" i="0" strike="noStrike" sz="1400" u="none">
+                  <a:solidFill>
+                    <a:srgbClr val="1A1A1A"/>
+                  </a:solidFill>
+                  <a:latin typeface="+mn-lt"/>
+                </a:defRPr>
+              </a:pPr>
+            </a:p>
+          </c:txPr>
+          <c:showLegendKey val="0"/>
+          <c:showVal val="0"/>
+          <c:showCatName val="0"/>
+          <c:showSerName val="0"/>
+          <c:showPercent val="0"/>
+          <c:showBubbleSize val="0"/>
+          <c:showLeaderLines val="0"/>
+        </c:dLbls>
+        <c:marker val="1"/>
+        <c:axId val="2094734554"/>
+        <c:axId val="2094734552"/>
+        <c:axId val="2094734556"/>
+      </c:lineChart>
+      <c:catAx>
+        <c:axId val="2094734554"/>
+        <c:scaling>
+          <c:orientation val="minMax"/>
+        </c:scaling>
+        <c:delete val="0"/>
+        <c:axPos val="b"/>
+        <c:numFmt formatCode="General" sourceLinked="1"/>
+        <c:majorTickMark val="out"/>
+        <c:minorTickMark val="none"/>
+        <c:tickLblPos val="low"/>
+        <c:spPr>
+          <a:ln w="12700" cap="flat">
+            <a:noFill/>
+            <a:prstDash val="solid"/>
+            <a:round/>
+          </a:ln>
+        </c:spPr>
+        <c:txPr>
+          <a:bodyPr/>
+          <a:lstStyle/>
+          <a:p>
+            <a:pPr>
+              <a:defRPr sz="1400" b="0" i="0" u="none" strike="noStrike">
+                <a:solidFill>
+                  <a:srgbClr val="FFFFFF"/>
+                </a:solidFill>
+                <a:latin typeface="+mn-lt"/>
+              </a:defRPr>
+            </a:pPr>
+            <a:endParaRPr lang="en-US"/>
+          </a:p>
+        </c:txPr>
+        <c:crossAx val="2094734552"/>
+        <c:crosses val="min"/>
+        <c:auto val="1"/>
+        <c:lblAlgn val="ctr"/>
+        <c:noMultiLvlLbl val="1"/>
+      </c:catAx>
+      <c:valAx>
+        <c:axId val="2094734552"/>
+        <c:scaling>
+          <c:orientation val="minMax"/>
+          <c:max val="18"/>
+          <c:min val="8"/>
+        </c:scaling>
+        <c:delete val="0"/>
+        <c:axPos val="l"/>
+        <c:numFmt formatCode="0&quot;%&quot;" sourceLinked="0"/>
+        <c:majorTickMark val="out"/>
+        <c:minorTickMark val="none"/>
+        <c:tickLblPos val="nextTo"/>
+        <c:spPr>
+          <a:ln w="12700" cap="flat">
+            <a:noFill/>
+            <a:prstDash val="solid"/>
+            <a:round/>
+          </a:ln>
+        </c:spPr>
+        <c:txPr>
+          <a:bodyPr/>
+          <a:lstStyle/>
+          <a:p>
+            <a:pPr>
+              <a:defRPr sz="1400" b="0" i="0" u="none" strike="noStrike">
+                <a:solidFill>
+                  <a:srgbClr val="FFFFFF"/>
+                </a:solidFill>
+                <a:latin typeface="+mn-lt"/>
+              </a:defRPr>
+            </a:pPr>
+            <a:endParaRPr lang="en-US"/>
+          </a:p>
+        </c:txPr>
+        <c:crossAx val="2094734554"/>
+        <c:crosses val="autoZero"/>
+        <c:crossBetween val="between"/>
+        <c:majorUnit val="2"/>
+      </c:valAx>
+      <c:spPr>
+        <a:solidFill>
+          <a:srgbClr val="FFFFFF">
+            <a:alpha val="0"/>
+          </a:srgbClr>
+        </a:solidFill>
+        <a:ln>
+          <a:noFill/>
+        </a:ln>
+        <a:effectLst/>
+      </c:spPr>
+    </c:plotArea>
+    <c:plotVisOnly val="1"/>
+    <c:dispBlanksAs val="span"/>
+  </c:chart>
+  <c:spPr>
+    <a:solidFill>
+      <a:srgbClr val="FFFFFF">
+        <a:alpha val="0"/>
+      </a:srgbClr>
+    </a:solidFill>
+    <a:ln>
+      <a:noFill/>
+    </a:ln>
+    <a:effectLst/>
+  </c:spPr>
+  <c:externalData r:id="rId1">
+    <c:autoUpdate val="0"/>
+  </c:externalData>
+</c:chartSpace>
+</file>
+
+<file path=ppt/charts/chart6.xml><?xml version="1.0" encoding="utf-8"?>
 <c:chartSpace xmlns:c="http://schemas.openxmlformats.org/drawingml/2006/chart" xmlns:a="http://schemas.openxmlformats.org/drawingml/2006/main" xmlns:r="http://schemas.openxmlformats.org/officeDocument/2006/relationships">
   <c:date1904 val="0"/>
   <c:roundedCorners val="1"/>
@@ -3483,22 +6600,11 @@
         <c:axId val="2094734552"/>
         <c:scaling>
           <c:orientation val="minMax"/>
-          <c:max val="16"/>
-          <c:min val="10"/>
+          <c:max val="18"/>
+          <c:min val="8"/>
         </c:scaling>
         <c:delete val="0"/>
         <c:axPos val="l"/>
-        <c:majorGridlines>
-          <c:spPr>
-            <a:ln w="9525" cap="flat">
-              <a:solidFill>
-                <a:srgbClr val="D9D9D9"/>
-              </a:solidFill>
-              <a:prstDash val="solid"/>
-              <a:round/>
-            </a:ln>
-          </c:spPr>
-        </c:majorGridlines>
         <c:numFmt formatCode="0&quot;%&quot;" sourceLinked="0"/>
         <c:majorTickMark val="out"/>
         <c:minorTickMark val="none"/>
@@ -3562,7 +6668,7 @@
 </c:chartSpace>
 </file>
 
-<file path=ppt/charts/chart5.xml><?xml version="1.0" encoding="utf-8"?>
+<file path=ppt/charts/chart7.xml><?xml version="1.0" encoding="utf-8"?>
 <c:chartSpace xmlns:c="http://schemas.openxmlformats.org/drawingml/2006/chart" xmlns:a="http://schemas.openxmlformats.org/drawingml/2006/main" xmlns:r="http://schemas.openxmlformats.org/officeDocument/2006/relationships">
   <c:date1904 val="0"/>
   <c:roundedCorners val="1"/>
@@ -3806,11 +6912,22 @@
         <c:axId val="2094734552"/>
         <c:scaling>
           <c:orientation val="minMax"/>
-          <c:max val="10"/>
-          <c:min val="5"/>
+          <c:max val="20"/>
+          <c:min val="0"/>
         </c:scaling>
         <c:delete val="0"/>
         <c:axPos val="l"/>
+        <c:majorGridlines>
+          <c:spPr>
+            <a:ln w="9525" cap="flat">
+              <a:solidFill>
+                <a:srgbClr val="D9D9D9"/>
+              </a:solidFill>
+              <a:prstDash val="solid"/>
+              <a:round/>
+            </a:ln>
+          </c:spPr>
+        </c:majorGridlines>
         <c:numFmt formatCode="0&quot;%&quot;" sourceLinked="0"/>
         <c:majorTickMark val="out"/>
         <c:minorTickMark val="none"/>
@@ -3840,7 +6957,7 @@
         <c:crossAx val="2094734554"/>
         <c:crosses val="autoZero"/>
         <c:crossBetween val="between"/>
-        <c:majorUnit val="1"/>
+        <c:majorUnit val="5"/>
       </c:valAx>
       <c:spPr>
         <a:noFill/>
@@ -3866,7 +6983,7 @@
 </c:chartSpace>
 </file>
 
-<file path=ppt/charts/chart6.xml><?xml version="1.0" encoding="utf-8"?>
+<file path=ppt/charts/chart8.xml><?xml version="1.0" encoding="utf-8"?>
 <c:chartSpace xmlns:c="http://schemas.openxmlformats.org/drawingml/2006/chart" xmlns:a="http://schemas.openxmlformats.org/drawingml/2006/main" xmlns:r="http://schemas.openxmlformats.org/officeDocument/2006/relationships">
   <c:date1904 val="0"/>
   <c:roundedCorners val="1"/>
@@ -4108,8 +7225,8 @@
         <c:axId val="2094734552"/>
         <c:scaling>
           <c:orientation val="minMax"/>
-          <c:max val="10"/>
-          <c:min val="5"/>
+          <c:max val="20"/>
+          <c:min val="0"/>
         </c:scaling>
         <c:delete val="0"/>
         <c:axPos val="l"/>
@@ -4142,7 +7259,7 @@
         <c:crossAx val="2094734554"/>
         <c:crosses val="autoZero"/>
         <c:crossBetween val="between"/>
-        <c:majorUnit val="1"/>
+        <c:majorUnit val="5"/>
       </c:valAx>
       <c:spPr>
         <a:solidFill>
@@ -4176,7 +7293,7 @@
 </c:chartSpace>
 </file>
 
-<file path=ppt/charts/chart7.xml><?xml version="1.0" encoding="utf-8"?>
+<file path=ppt/charts/chart9.xml><?xml version="1.0" encoding="utf-8"?>
 <c:chartSpace xmlns:c="http://schemas.openxmlformats.org/drawingml/2006/chart" xmlns:a="http://schemas.openxmlformats.org/drawingml/2006/main" xmlns:r="http://schemas.openxmlformats.org/officeDocument/2006/relationships">
   <c:date1904 val="0"/>
   <c:roundedCorners val="1"/>
@@ -4226,7 +7343,7 @@
                 </a:pPr>
               </a:p>
             </c:txPr>
-            <c:dLblPos val="b"/>
+            <c:dLblPos val="t"/>
             <c:showLegendKey val="0"/>
             <c:showVal val="1"/>
             <c:showCatName val="0"/>
@@ -4305,34 +7422,34 @@
                 <c:formatCode>General</c:formatCode>
                 <c:ptCount val="12"/>
                 <c:pt idx="0">
-                  <c:v>6.3</c:v>
+                  <c:v/>
                 </c:pt>
                 <c:pt idx="1">
-                  <c:v>7.1</c:v>
+                  <c:v/>
                 </c:pt>
                 <c:pt idx="2">
-                  <c:v>7.6</c:v>
+                  <c:v/>
                 </c:pt>
                 <c:pt idx="3">
-                  <c:v>6.9</c:v>
+                  <c:v/>
                 </c:pt>
                 <c:pt idx="4">
-                  <c:v>7.1</c:v>
+                  <c:v/>
                 </c:pt>
                 <c:pt idx="5">
-                  <c:v>7</c:v>
+                  <c:v/>
                 </c:pt>
                 <c:pt idx="6">
-                  <c:v>6.9</c:v>
+                  <c:v/>
                 </c:pt>
                 <c:pt idx="7">
-                  <c:v>7</c:v>
+                  <c:v/>
                 </c:pt>
                 <c:pt idx="8">
-                  <c:v>6.7</c:v>
+                  <c:v/>
                 </c:pt>
                 <c:pt idx="9">
-                  <c:v>6.6</c:v>
+                  <c:v/>
                 </c:pt>
                 <c:pt idx="10">
                   <c:v>6.8</c:v>
@@ -4361,7 +7478,7 @@
               </a:pPr>
             </a:p>
           </c:txPr>
-          <c:dLblPos val="b"/>
+          <c:dLblPos val="t"/>
           <c:showLegendKey val="0"/>
           <c:showVal val="1"/>
           <c:showCatName val="0"/>
@@ -4418,8 +7535,8 @@
         <c:axId val="2094734552"/>
         <c:scaling>
           <c:orientation val="minMax"/>
-          <c:max val="10"/>
-          <c:min val="5"/>
+          <c:max val="20"/>
+          <c:min val="0"/>
         </c:scaling>
         <c:delete val="0"/>
         <c:axPos val="l"/>
@@ -4452,7 +7569,7 @@
         <c:crossAx val="2094734554"/>
         <c:crosses val="autoZero"/>
         <c:crossBetween val="between"/>
-        <c:majorUnit val="1"/>
+        <c:majorUnit val="5"/>
       </c:valAx>
       <c:spPr>
         <a:solidFill>
@@ -4475,635 +7592,6 @@
         <a:alpha val="0"/>
       </a:srgbClr>
     </a:solidFill>
-    <a:ln>
-      <a:noFill/>
-    </a:ln>
-    <a:effectLst/>
-  </c:spPr>
-  <c:externalData r:id="rId1">
-    <c:autoUpdate val="0"/>
-  </c:externalData>
-</c:chartSpace>
-</file>
-
-<file path=ppt/charts/chart8.xml><?xml version="1.0" encoding="utf-8"?>
-<c:chartSpace xmlns:c="http://schemas.openxmlformats.org/drawingml/2006/chart" xmlns:a="http://schemas.openxmlformats.org/drawingml/2006/main" xmlns:r="http://schemas.openxmlformats.org/officeDocument/2006/relationships">
-  <c:date1904 val="0"/>
-  <c:roundedCorners val="1"/>
-  <c:chart>
-    <c:autoTitleDeleted val="1"/>
-    <c:plotArea>
-      <c:layout/>
-      <c:lineChart>
-        <c:varyColors val="0"/>
-        <c:ser>
-          <c:idx val="0"/>
-          <c:order val="0"/>
-          <c:tx>
-            <c:strRef>
-              <c:f>Sheet1!$B$1</c:f>
-              <c:strCache>
-                <c:ptCount val="1"/>
-                <c:pt idx="0">
-                  <c:v>2025</c:v>
-                </c:pt>
-              </c:strCache>
-            </c:strRef>
-          </c:tx>
-          <c:spPr>
-            <a:solidFill>
-              <a:srgbClr val="9AA3AD"/>
-            </a:solidFill>
-            <a:ln w="38100" cap="flat">
-              <a:solidFill>
-                <a:srgbClr val="9AA3AD"/>
-              </a:solidFill>
-              <a:prstDash val="solid"/>
-              <a:round/>
-            </a:ln>
-            <a:effectLst/>
-          </c:spPr>
-          <c:invertIfNegative val="0"/>
-          <c:dLbls>
-            <c:numFmt formatCode="0.0&quot;%&quot;" sourceLinked="0"/>
-            <c:txPr>
-              <a:bodyPr/>
-              <a:lstStyle/>
-              <a:p>
-                <a:pPr>
-                  <a:defRPr b="0" i="0" strike="noStrike" sz="1400" u="none">
-                    <a:solidFill>
-                      <a:srgbClr val="1A1A1A"/>
-                    </a:solidFill>
-                    <a:latin typeface="+mn-lt"/>
-                  </a:defRPr>
-                </a:pPr>
-              </a:p>
-            </c:txPr>
-            <c:showLegendKey val="0"/>
-            <c:showVal val="0"/>
-            <c:showCatName val="0"/>
-            <c:showSerName val="0"/>
-            <c:showPercent val="0"/>
-            <c:showBubbleSize val="0"/>
-            <c:showLeaderLines val="0"/>
-          </c:dLbls>
-          <c:marker>
-            <c:symbol val="circle"/>
-            <c:size val="8"/>
-            <c:spPr>
-              <a:solidFill>
-                <a:srgbClr val="9AA3AD"/>
-              </a:solidFill>
-              <a:ln w="9525" cap="flat">
-                <a:solidFill>
-                  <a:srgbClr val="9AA3AD"/>
-                </a:solidFill>
-                <a:prstDash val="solid"/>
-                <a:round/>
-              </a:ln>
-              <a:effectLst/>
-            </c:spPr>
-          </c:marker>
-          <c:cat>
-            <c:multiLvlStrRef>
-              <c:f>Sheet1!$A$2:$A$13</c:f>
-              <c:multiLvlStrCache>
-                <c:ptCount val="12"/>
-                <c:lvl>
-                  <c:pt idx="0">
-                    <c:v>Jan</c:v>
-                  </c:pt>
-                  <c:pt idx="1">
-                    <c:v>Feb</c:v>
-                  </c:pt>
-                  <c:pt idx="2">
-                    <c:v>Mar</c:v>
-                  </c:pt>
-                  <c:pt idx="3">
-                    <c:v>Apr</c:v>
-                  </c:pt>
-                  <c:pt idx="4">
-                    <c:v>May</c:v>
-                  </c:pt>
-                  <c:pt idx="5">
-                    <c:v>Jun</c:v>
-                  </c:pt>
-                  <c:pt idx="6">
-                    <c:v>Jul</c:v>
-                  </c:pt>
-                  <c:pt idx="7">
-                    <c:v>Aug</c:v>
-                  </c:pt>
-                  <c:pt idx="8">
-                    <c:v>Sep</c:v>
-                  </c:pt>
-                  <c:pt idx="9">
-                    <c:v>Oct</c:v>
-                  </c:pt>
-                  <c:pt idx="10">
-                    <c:v>Nov</c:v>
-                  </c:pt>
-                  <c:pt idx="11">
-                    <c:v>Dec</c:v>
-                  </c:pt>
-                </c:lvl>
-              </c:multiLvlStrCache>
-            </c:multiLvlStrRef>
-          </c:cat>
-          <c:val>
-            <c:numRef>
-              <c:f>Sheet1!$B$2:$B$13</c:f>
-              <c:numCache>
-                <c:formatCode>General</c:formatCode>
-                <c:ptCount val="12"/>
-                <c:pt idx="0">
-                  <c:v>6.3</c:v>
-                </c:pt>
-                <c:pt idx="1">
-                  <c:v>7.1</c:v>
-                </c:pt>
-                <c:pt idx="2">
-                  <c:v>7.6</c:v>
-                </c:pt>
-                <c:pt idx="3">
-                  <c:v>6.9</c:v>
-                </c:pt>
-                <c:pt idx="4">
-                  <c:v>7.1</c:v>
-                </c:pt>
-                <c:pt idx="5">
-                  <c:v>7</c:v>
-                </c:pt>
-                <c:pt idx="6">
-                  <c:v>6.9</c:v>
-                </c:pt>
-                <c:pt idx="7">
-                  <c:v>7</c:v>
-                </c:pt>
-                <c:pt idx="8">
-                  <c:v>6.7</c:v>
-                </c:pt>
-                <c:pt idx="9">
-                  <c:v>6.6</c:v>
-                </c:pt>
-                <c:pt idx="10">
-                  <c:v>6.8</c:v>
-                </c:pt>
-                <c:pt idx="11">
-                  <c:v>6.8</c:v>
-                </c:pt>
-              </c:numCache>
-            </c:numRef>
-          </c:val>
-          <c:smooth val="0"/>
-        </c:ser>
-        <c:dLbls>
-          <c:numFmt formatCode="0.0&quot;%&quot;" sourceLinked="0"/>
-          <c:txPr>
-            <a:bodyPr/>
-            <a:lstStyle/>
-            <a:p>
-              <a:pPr>
-                <a:defRPr b="0" i="0" strike="noStrike" sz="1400" u="none">
-                  <a:solidFill>
-                    <a:srgbClr val="1A1A1A"/>
-                  </a:solidFill>
-                  <a:latin typeface="+mn-lt"/>
-                </a:defRPr>
-              </a:pPr>
-            </a:p>
-          </c:txPr>
-          <c:showLegendKey val="0"/>
-          <c:showVal val="0"/>
-          <c:showCatName val="0"/>
-          <c:showSerName val="0"/>
-          <c:showPercent val="0"/>
-          <c:showBubbleSize val="0"/>
-          <c:showLeaderLines val="0"/>
-        </c:dLbls>
-        <c:marker val="1"/>
-        <c:axId val="2094734554"/>
-        <c:axId val="2094734552"/>
-        <c:axId val="2094734556"/>
-      </c:lineChart>
-      <c:catAx>
-        <c:axId val="2094734554"/>
-        <c:scaling>
-          <c:orientation val="minMax"/>
-        </c:scaling>
-        <c:delete val="0"/>
-        <c:axPos val="b"/>
-        <c:numFmt formatCode="General" sourceLinked="1"/>
-        <c:majorTickMark val="out"/>
-        <c:minorTickMark val="none"/>
-        <c:tickLblPos val="low"/>
-        <c:spPr>
-          <a:ln w="12700" cap="flat">
-            <a:solidFill>
-              <a:srgbClr val="888888"/>
-            </a:solidFill>
-            <a:prstDash val="solid"/>
-            <a:round/>
-          </a:ln>
-        </c:spPr>
-        <c:txPr>
-          <a:bodyPr/>
-          <a:lstStyle/>
-          <a:p>
-            <a:pPr>
-              <a:defRPr sz="1400" b="0" i="0" u="none" strike="noStrike">
-                <a:solidFill>
-                  <a:srgbClr val="1A1A1A"/>
-                </a:solidFill>
-                <a:latin typeface="+mn-lt"/>
-              </a:defRPr>
-            </a:pPr>
-            <a:endParaRPr lang="en-US"/>
-          </a:p>
-        </c:txPr>
-        <c:crossAx val="2094734552"/>
-        <c:crosses val="min"/>
-        <c:auto val="1"/>
-        <c:lblAlgn val="ctr"/>
-        <c:noMultiLvlLbl val="1"/>
-      </c:catAx>
-      <c:valAx>
-        <c:axId val="2094734552"/>
-        <c:scaling>
-          <c:orientation val="minMax"/>
-          <c:max val="10"/>
-          <c:min val="5"/>
-        </c:scaling>
-        <c:delete val="0"/>
-        <c:axPos val="l"/>
-        <c:majorGridlines>
-          <c:spPr>
-            <a:ln w="9525" cap="flat">
-              <a:solidFill>
-                <a:srgbClr val="D9D9D9"/>
-              </a:solidFill>
-              <a:prstDash val="solid"/>
-              <a:round/>
-            </a:ln>
-          </c:spPr>
-        </c:majorGridlines>
-        <c:numFmt formatCode="0&quot;%&quot;" sourceLinked="0"/>
-        <c:majorTickMark val="out"/>
-        <c:minorTickMark val="none"/>
-        <c:tickLblPos val="nextTo"/>
-        <c:spPr>
-          <a:ln w="12700" cap="flat">
-            <a:noFill/>
-            <a:prstDash val="solid"/>
-            <a:round/>
-          </a:ln>
-        </c:spPr>
-        <c:txPr>
-          <a:bodyPr/>
-          <a:lstStyle/>
-          <a:p>
-            <a:pPr>
-              <a:defRPr sz="1400" b="0" i="0" u="none" strike="noStrike">
-                <a:solidFill>
-                  <a:srgbClr val="595959"/>
-                </a:solidFill>
-                <a:latin typeface="+mn-lt"/>
-              </a:defRPr>
-            </a:pPr>
-            <a:endParaRPr lang="en-US"/>
-          </a:p>
-        </c:txPr>
-        <c:crossAx val="2094734554"/>
-        <c:crosses val="autoZero"/>
-        <c:crossBetween val="between"/>
-        <c:majorUnit val="1"/>
-      </c:valAx>
-      <c:spPr>
-        <a:solidFill>
-          <a:srgbClr val="FFFFFF">
-            <a:alpha val="0"/>
-          </a:srgbClr>
-        </a:solidFill>
-        <a:ln>
-          <a:noFill/>
-        </a:ln>
-        <a:effectLst/>
-      </c:spPr>
-    </c:plotArea>
-    <c:plotVisOnly val="1"/>
-    <c:dispBlanksAs val="span"/>
-  </c:chart>
-  <c:spPr>
-    <a:solidFill>
-      <a:srgbClr val="FFFFFF">
-        <a:alpha val="0"/>
-      </a:srgbClr>
-    </a:solidFill>
-    <a:ln>
-      <a:noFill/>
-    </a:ln>
-    <a:effectLst/>
-  </c:spPr>
-  <c:externalData r:id="rId1">
-    <c:autoUpdate val="0"/>
-  </c:externalData>
-</c:chartSpace>
-</file>
-
-<file path=ppt/charts/chart9.xml><?xml version="1.0" encoding="utf-8"?>
-<c:chartSpace xmlns:c="http://schemas.openxmlformats.org/drawingml/2006/chart" xmlns:a="http://schemas.openxmlformats.org/drawingml/2006/main" xmlns:r="http://schemas.openxmlformats.org/officeDocument/2006/relationships">
-  <c:date1904 val="0"/>
-  <c:roundedCorners val="1"/>
-  <c:chart>
-    <c:autoTitleDeleted val="1"/>
-    <c:plotArea>
-      <c:layout/>
-      <c:lineChart>
-        <c:varyColors val="0"/>
-        <c:ser>
-          <c:idx val="0"/>
-          <c:order val="0"/>
-          <c:tx>
-            <c:strRef>
-              <c:f>Sheet1!$B$1</c:f>
-              <c:strCache>
-                <c:ptCount val="1"/>
-                <c:pt idx="0">
-                  <c:v>2026</c:v>
-                </c:pt>
-              </c:strCache>
-            </c:strRef>
-          </c:tx>
-          <c:spPr>
-            <a:solidFill>
-              <a:srgbClr val="2587C5"/>
-            </a:solidFill>
-            <a:ln w="38100" cap="flat">
-              <a:solidFill>
-                <a:srgbClr val="2587C5"/>
-              </a:solidFill>
-              <a:prstDash val="solid"/>
-              <a:round/>
-            </a:ln>
-            <a:effectLst/>
-          </c:spPr>
-          <c:invertIfNegative val="0"/>
-          <c:dLbls>
-            <c:numFmt formatCode="0.0&quot;%&quot;" sourceLinked="0"/>
-            <c:txPr>
-              <a:bodyPr/>
-              <a:lstStyle/>
-              <a:p>
-                <a:pPr>
-                  <a:defRPr b="0" i="0" strike="noStrike" sz="1400" u="none">
-                    <a:solidFill>
-                      <a:srgbClr val="1A1A1A"/>
-                    </a:solidFill>
-                    <a:latin typeface="+mn-lt"/>
-                  </a:defRPr>
-                </a:pPr>
-              </a:p>
-            </c:txPr>
-            <c:showLegendKey val="0"/>
-            <c:showVal val="0"/>
-            <c:showCatName val="0"/>
-            <c:showSerName val="0"/>
-            <c:showPercent val="0"/>
-            <c:showBubbleSize val="0"/>
-            <c:showLeaderLines val="0"/>
-          </c:dLbls>
-          <c:marker>
-            <c:symbol val="circle"/>
-            <c:size val="8"/>
-            <c:spPr>
-              <a:solidFill>
-                <a:srgbClr val="2587C5"/>
-              </a:solidFill>
-              <a:ln w="9525" cap="flat">
-                <a:solidFill>
-                  <a:srgbClr val="2587C5"/>
-                </a:solidFill>
-                <a:prstDash val="solid"/>
-                <a:round/>
-              </a:ln>
-              <a:effectLst/>
-            </c:spPr>
-          </c:marker>
-          <c:cat>
-            <c:multiLvlStrRef>
-              <c:f>Sheet1!$A$2:$A$13</c:f>
-              <c:multiLvlStrCache>
-                <c:ptCount val="12"/>
-                <c:lvl>
-                  <c:pt idx="0">
-                    <c:v>Jan</c:v>
-                  </c:pt>
-                  <c:pt idx="1">
-                    <c:v>Feb</c:v>
-                  </c:pt>
-                  <c:pt idx="2">
-                    <c:v>Mar</c:v>
-                  </c:pt>
-                  <c:pt idx="3">
-                    <c:v>Apr</c:v>
-                  </c:pt>
-                  <c:pt idx="4">
-                    <c:v>May</c:v>
-                  </c:pt>
-                  <c:pt idx="5">
-                    <c:v>Jun</c:v>
-                  </c:pt>
-                  <c:pt idx="6">
-                    <c:v>Jul</c:v>
-                  </c:pt>
-                  <c:pt idx="7">
-                    <c:v>Aug</c:v>
-                  </c:pt>
-                  <c:pt idx="8">
-                    <c:v>Sep</c:v>
-                  </c:pt>
-                  <c:pt idx="9">
-                    <c:v>Oct</c:v>
-                  </c:pt>
-                  <c:pt idx="10">
-                    <c:v>Nov</c:v>
-                  </c:pt>
-                  <c:pt idx="11">
-                    <c:v>Dec</c:v>
-                  </c:pt>
-                </c:lvl>
-              </c:multiLvlStrCache>
-            </c:multiLvlStrRef>
-          </c:cat>
-          <c:val>
-            <c:numRef>
-              <c:f>Sheet1!$B$2:$B$13</c:f>
-              <c:numCache>
-                <c:formatCode>General</c:formatCode>
-                <c:ptCount val="12"/>
-                <c:pt idx="0">
-                  <c:v>8.5</c:v>
-                </c:pt>
-                <c:pt idx="1">
-                  <c:v>9</c:v>
-                </c:pt>
-                <c:pt idx="2">
-                  <c:v>9.8</c:v>
-                </c:pt>
-                <c:pt idx="3">
-                  <c:v>9.9</c:v>
-                </c:pt>
-                <c:pt idx="4">
-                  <c:v>9.8</c:v>
-                </c:pt>
-                <c:pt idx="5">
-                  <c:v>9.4</c:v>
-                </c:pt>
-                <c:pt idx="6">
-                  <c:v>9</c:v>
-                </c:pt>
-                <c:pt idx="7">
-                  <c:v>8.9</c:v>
-                </c:pt>
-                <c:pt idx="8">
-                  <c:v>9.3</c:v>
-                </c:pt>
-                <c:pt idx="9">
-                  <c:v/>
-                </c:pt>
-                <c:pt idx="10">
-                  <c:v/>
-                </c:pt>
-                <c:pt idx="11">
-                  <c:v/>
-                </c:pt>
-              </c:numCache>
-            </c:numRef>
-          </c:val>
-          <c:smooth val="0"/>
-        </c:ser>
-        <c:dLbls>
-          <c:numFmt formatCode="0.0&quot;%&quot;" sourceLinked="0"/>
-          <c:txPr>
-            <a:bodyPr/>
-            <a:lstStyle/>
-            <a:p>
-              <a:pPr>
-                <a:defRPr b="0" i="0" strike="noStrike" sz="1400" u="none">
-                  <a:solidFill>
-                    <a:srgbClr val="1A1A1A"/>
-                  </a:solidFill>
-                  <a:latin typeface="+mn-lt"/>
-                </a:defRPr>
-              </a:pPr>
-            </a:p>
-          </c:txPr>
-          <c:showLegendKey val="0"/>
-          <c:showVal val="0"/>
-          <c:showCatName val="0"/>
-          <c:showSerName val="0"/>
-          <c:showPercent val="0"/>
-          <c:showBubbleSize val="0"/>
-          <c:showLeaderLines val="0"/>
-        </c:dLbls>
-        <c:marker val="1"/>
-        <c:axId val="2094734554"/>
-        <c:axId val="2094734552"/>
-        <c:axId val="2094734556"/>
-      </c:lineChart>
-      <c:catAx>
-        <c:axId val="2094734554"/>
-        <c:scaling>
-          <c:orientation val="minMax"/>
-        </c:scaling>
-        <c:delete val="0"/>
-        <c:axPos val="b"/>
-        <c:numFmt formatCode="General" sourceLinked="1"/>
-        <c:majorTickMark val="out"/>
-        <c:minorTickMark val="none"/>
-        <c:tickLblPos val="low"/>
-        <c:spPr>
-          <a:ln w="12700" cap="flat">
-            <a:noFill/>
-            <a:prstDash val="solid"/>
-            <a:round/>
-          </a:ln>
-        </c:spPr>
-        <c:txPr>
-          <a:bodyPr/>
-          <a:lstStyle/>
-          <a:p>
-            <a:pPr>
-              <a:defRPr sz="1400" b="0" i="0" u="none" strike="noStrike">
-                <a:solidFill>
-                  <a:srgbClr val="FFFFFF"/>
-                </a:solidFill>
-                <a:latin typeface="+mn-lt"/>
-              </a:defRPr>
-            </a:pPr>
-            <a:endParaRPr lang="en-US"/>
-          </a:p>
-        </c:txPr>
-        <c:crossAx val="2094734552"/>
-        <c:crosses val="min"/>
-        <c:auto val="1"/>
-        <c:lblAlgn val="ctr"/>
-        <c:noMultiLvlLbl val="1"/>
-      </c:catAx>
-      <c:valAx>
-        <c:axId val="2094734552"/>
-        <c:scaling>
-          <c:orientation val="minMax"/>
-          <c:max val="11"/>
-          <c:min val="6"/>
-        </c:scaling>
-        <c:delete val="0"/>
-        <c:axPos val="l"/>
-        <c:numFmt formatCode="0&quot;%&quot;" sourceLinked="0"/>
-        <c:majorTickMark val="out"/>
-        <c:minorTickMark val="none"/>
-        <c:tickLblPos val="nextTo"/>
-        <c:spPr>
-          <a:ln w="12700" cap="flat">
-            <a:noFill/>
-            <a:prstDash val="solid"/>
-            <a:round/>
-          </a:ln>
-        </c:spPr>
-        <c:txPr>
-          <a:bodyPr/>
-          <a:lstStyle/>
-          <a:p>
-            <a:pPr>
-              <a:defRPr sz="1400" b="0" i="0" u="none" strike="noStrike">
-                <a:solidFill>
-                  <a:srgbClr val="FFFFFF"/>
-                </a:solidFill>
-                <a:latin typeface="+mn-lt"/>
-              </a:defRPr>
-            </a:pPr>
-            <a:endParaRPr lang="en-US"/>
-          </a:p>
-        </c:txPr>
-        <c:crossAx val="2094734554"/>
-        <c:crosses val="autoZero"/>
-        <c:crossBetween val="between"/>
-        <c:majorUnit val="1"/>
-      </c:valAx>
-      <c:spPr>
-        <a:noFill/>
-        <a:ln>
-          <a:noFill/>
-        </a:ln>
-        <a:effectLst/>
-      </c:spPr>
-    </c:plotArea>
-    <c:plotVisOnly val="1"/>
-    <c:dispBlanksAs val="span"/>
-  </c:chart>
-  <c:spPr>
-    <a:noFill/>
     <a:ln>
       <a:noFill/>
     </a:ln>
@@ -10831,15 +13319,47 @@
           </a:graphicData>
         </a:graphic>
       </p:graphicFrame>
-      <p:sp>
-        <p:nvSpPr>
-          <p:cNvPr id="21" name="Shape 15"/>
+      <p:graphicFrame>
+        <p:nvGraphicFramePr>
+          <p:cNvPr id="21" name="Chart 4" descr=""/>
+          <p:cNvGraphicFramePr/>
+          <p:nvPr/>
+        </p:nvGraphicFramePr>
+        <p:xfrm>
+          <a:off x="621792" y="3218688"/>
+          <a:ext cx="10945368" cy="2679192"/>
+        </p:xfrm>
+        <a:graphic xmlns:a="http://schemas.openxmlformats.org/drawingml/2006/main">
+          <a:graphicData uri="http://schemas.openxmlformats.org/drawingml/2006/chart">
+            <c:chart xmlns:c="http://schemas.openxmlformats.org/drawingml/2006/chart" r:id="rId5"/>
+          </a:graphicData>
+        </a:graphic>
+      </p:graphicFrame>
+      <p:graphicFrame>
+        <p:nvGraphicFramePr>
+          <p:cNvPr id="22" name="Chart 5" descr=""/>
+          <p:cNvGraphicFramePr/>
+          <p:nvPr/>
+        </p:nvGraphicFramePr>
+        <p:xfrm>
+          <a:off x="621792" y="3218688"/>
+          <a:ext cx="10945368" cy="2679192"/>
+        </p:xfrm>
+        <a:graphic xmlns:a="http://schemas.openxmlformats.org/drawingml/2006/main">
+          <a:graphicData uri="http://schemas.openxmlformats.org/drawingml/2006/chart">
+            <c:chart xmlns:c="http://schemas.openxmlformats.org/drawingml/2006/chart" r:id="rId6"/>
+          </a:graphicData>
+        </a:graphic>
+      </p:graphicFrame>
+      <p:sp>
+        <p:nvSpPr>
+          <p:cNvPr id="23" name="Shape 15"/>
           <p:cNvSpPr/>
           <p:nvPr/>
         </p:nvSpPr>
         <p:spPr>
           <a:xfrm>
-            <a:off x="4951476" y="3049524"/>
+            <a:off x="3762756" y="3049524"/>
             <a:ext cx="310896" cy="45720"/>
           </a:xfrm>
           <a:prstGeom prst="rect">
@@ -10853,13 +13373,13 @@
       </p:sp>
       <p:sp>
         <p:nvSpPr>
-          <p:cNvPr id="22" name="Shape 16"/>
+          <p:cNvPr id="24" name="Shape 16"/>
           <p:cNvSpPr/>
           <p:nvPr/>
         </p:nvSpPr>
         <p:spPr>
           <a:xfrm>
-            <a:off x="5052060" y="3017520"/>
+            <a:off x="3863340" y="3017520"/>
             <a:ext cx="109728" cy="109728"/>
           </a:xfrm>
           <a:prstGeom prst="ellipse">
@@ -10873,13 +13393,13 @@
       </p:sp>
       <p:sp>
         <p:nvSpPr>
-          <p:cNvPr id="23" name="Text 17"/>
-          <p:cNvSpPr txBox="1"/>
-          <p:nvPr/>
-        </p:nvSpPr>
-        <p:spPr>
-          <a:xfrm>
-            <a:off x="5335524" y="2926080"/>
+          <p:cNvPr id="25" name="Text 17"/>
+          <p:cNvSpPr txBox="1"/>
+          <p:nvPr/>
+        </p:nvSpPr>
+        <p:spPr>
+          <a:xfrm>
+            <a:off x="4146804" y="2926080"/>
             <a:ext cx="777240" cy="292608"/>
           </a:xfrm>
           <a:prstGeom prst="rect">
@@ -10912,13 +13432,13 @@
       </p:sp>
       <p:sp>
         <p:nvSpPr>
-          <p:cNvPr id="24" name="Shape 18"/>
+          <p:cNvPr id="26" name="Shape 18"/>
           <p:cNvSpPr/>
           <p:nvPr/>
         </p:nvSpPr>
         <p:spPr>
           <a:xfrm>
-            <a:off x="6185916" y="3049524"/>
+            <a:off x="4997196" y="3049524"/>
             <a:ext cx="310896" cy="45720"/>
           </a:xfrm>
           <a:prstGeom prst="rect">
@@ -10932,13 +13452,13 @@
       </p:sp>
       <p:sp>
         <p:nvSpPr>
-          <p:cNvPr id="25" name="Shape 19"/>
+          <p:cNvPr id="27" name="Shape 19"/>
           <p:cNvSpPr/>
           <p:nvPr/>
         </p:nvSpPr>
         <p:spPr>
           <a:xfrm>
-            <a:off x="6286500" y="3017520"/>
+            <a:off x="5097780" y="3017520"/>
             <a:ext cx="109728" cy="109728"/>
           </a:xfrm>
           <a:prstGeom prst="ellipse">
@@ -10952,13 +13472,13 @@
       </p:sp>
       <p:sp>
         <p:nvSpPr>
-          <p:cNvPr id="26" name="Text 20"/>
-          <p:cNvSpPr txBox="1"/>
-          <p:nvPr/>
-        </p:nvSpPr>
-        <p:spPr>
-          <a:xfrm>
-            <a:off x="6569964" y="2926080"/>
+          <p:cNvPr id="28" name="Text 20"/>
+          <p:cNvSpPr txBox="1"/>
+          <p:nvPr/>
+        </p:nvSpPr>
+        <p:spPr>
+          <a:xfrm>
+            <a:off x="5381244" y="2926080"/>
             <a:ext cx="777240" cy="292608"/>
           </a:xfrm>
           <a:prstGeom prst="rect">
@@ -10991,7 +13511,106 @@
       </p:sp>
       <p:sp>
         <p:nvSpPr>
-          <p:cNvPr id="27" name="Shape 21"/>
+          <p:cNvPr id="29" name="Shape 21"/>
+          <p:cNvSpPr/>
+          <p:nvPr/>
+        </p:nvSpPr>
+        <p:spPr>
+          <a:xfrm>
+            <a:off x="6231636" y="3049524"/>
+            <a:ext cx="73152" cy="36576"/>
+          </a:xfrm>
+          <a:prstGeom prst="rect">
+            <a:avLst/>
+          </a:prstGeom>
+          <a:solidFill>
+            <a:srgbClr val="595959"/>
+          </a:solidFill>
+          <a:ln/>
+        </p:spPr>
+      </p:sp>
+      <p:sp>
+        <p:nvSpPr>
+          <p:cNvPr id="30" name="Shape 22"/>
+          <p:cNvSpPr/>
+          <p:nvPr/>
+        </p:nvSpPr>
+        <p:spPr>
+          <a:xfrm>
+            <a:off x="6350508" y="3049524"/>
+            <a:ext cx="73152" cy="36576"/>
+          </a:xfrm>
+          <a:prstGeom prst="rect">
+            <a:avLst/>
+          </a:prstGeom>
+          <a:solidFill>
+            <a:srgbClr val="595959"/>
+          </a:solidFill>
+          <a:ln/>
+        </p:spPr>
+      </p:sp>
+      <p:sp>
+        <p:nvSpPr>
+          <p:cNvPr id="31" name="Shape 23"/>
+          <p:cNvSpPr/>
+          <p:nvPr/>
+        </p:nvSpPr>
+        <p:spPr>
+          <a:xfrm>
+            <a:off x="6469380" y="3049524"/>
+            <a:ext cx="73152" cy="36576"/>
+          </a:xfrm>
+          <a:prstGeom prst="rect">
+            <a:avLst/>
+          </a:prstGeom>
+          <a:solidFill>
+            <a:srgbClr val="595959"/>
+          </a:solidFill>
+          <a:ln/>
+        </p:spPr>
+      </p:sp>
+      <p:sp>
+        <p:nvSpPr>
+          <p:cNvPr id="32" name="Text 24"/>
+          <p:cNvSpPr txBox="1"/>
+          <p:nvPr/>
+        </p:nvSpPr>
+        <p:spPr>
+          <a:xfrm>
+            <a:off x="6615684" y="2926080"/>
+            <a:ext cx="2377440" cy="292608"/>
+          </a:xfrm>
+          <a:prstGeom prst="rect">
+            <a:avLst/>
+          </a:prstGeom>
+          <a:noFill/>
+          <a:ln/>
+        </p:spPr>
+        <p:txBody>
+          <a:bodyPr wrap="square" lIns="0" tIns="0" rIns="0" bIns="0" rtlCol="0" anchor="ctr"/>
+          <a:lstStyle/>
+          <a:p>
+            <a:pPr indent="0" marL="0">
+              <a:buNone/>
+            </a:pPr>
+            <a:r>
+              <a:rPr lang="en-US" sz="1400" dirty="0">
+                <a:solidFill>
+                  <a:srgbClr val="1A1A1A"/>
+                </a:solidFill>
+                <a:latin typeface="Inter" pitchFamily="34" charset="0"/>
+                <a:ea typeface="Inter" pitchFamily="34" charset="-122"/>
+                <a:cs typeface="Inter" pitchFamily="34" charset="-120"/>
+              </a:rPr>
+              <a:t>Benchmark 7.5%</a:t>
+            </a:r>
+            <a:endParaRPr lang="en-US" sz="1400" dirty="0"/>
+          </a:p>
+        </p:txBody>
+      </p:sp>
+      <p:sp>
+        <p:nvSpPr>
+          <p:cNvPr id="33" name="Shape 25"/>
           <p:cNvSpPr/>
           <p:nvPr/>
         </p:nvSpPr>
@@ -11011,7 +13630,7 @@
       </p:sp>
       <p:sp>
         <p:nvSpPr>
-          <p:cNvPr id="28" name="Text 22"/>
+          <p:cNvPr id="34" name="Text 26"/>
           <p:cNvSpPr txBox="1"/>
           <p:nvPr/>
         </p:nvSpPr>
@@ -19638,15 +22257,47 @@
           </a:graphicData>
         </a:graphic>
       </p:graphicFrame>
-      <p:sp>
-        <p:nvSpPr>
-          <p:cNvPr id="21" name="Shape 15"/>
+      <p:graphicFrame>
+        <p:nvGraphicFramePr>
+          <p:cNvPr id="21" name="Chart 4" descr=""/>
+          <p:cNvGraphicFramePr/>
+          <p:nvPr/>
+        </p:nvGraphicFramePr>
+        <p:xfrm>
+          <a:off x="621792" y="3218688"/>
+          <a:ext cx="10945368" cy="2679192"/>
+        </p:xfrm>
+        <a:graphic xmlns:a="http://schemas.openxmlformats.org/drawingml/2006/main">
+          <a:graphicData uri="http://schemas.openxmlformats.org/drawingml/2006/chart">
+            <c:chart xmlns:c="http://schemas.openxmlformats.org/drawingml/2006/chart" r:id="rId5"/>
+          </a:graphicData>
+        </a:graphic>
+      </p:graphicFrame>
+      <p:graphicFrame>
+        <p:nvGraphicFramePr>
+          <p:cNvPr id="22" name="Chart 5" descr=""/>
+          <p:cNvGraphicFramePr/>
+          <p:nvPr/>
+        </p:nvGraphicFramePr>
+        <p:xfrm>
+          <a:off x="621792" y="3218688"/>
+          <a:ext cx="10945368" cy="2679192"/>
+        </p:xfrm>
+        <a:graphic xmlns:a="http://schemas.openxmlformats.org/drawingml/2006/main">
+          <a:graphicData uri="http://schemas.openxmlformats.org/drawingml/2006/chart">
+            <c:chart xmlns:c="http://schemas.openxmlformats.org/drawingml/2006/chart" r:id="rId6"/>
+          </a:graphicData>
+        </a:graphic>
+      </p:graphicFrame>
+      <p:sp>
+        <p:nvSpPr>
+          <p:cNvPr id="23" name="Shape 15"/>
           <p:cNvSpPr/>
           <p:nvPr/>
         </p:nvSpPr>
         <p:spPr>
           <a:xfrm>
-            <a:off x="4951476" y="3049524"/>
+            <a:off x="3762756" y="3049524"/>
             <a:ext cx="310896" cy="45720"/>
           </a:xfrm>
           <a:prstGeom prst="rect">
@@ -19660,13 +22311,13 @@
       </p:sp>
       <p:sp>
         <p:nvSpPr>
-          <p:cNvPr id="22" name="Shape 16"/>
+          <p:cNvPr id="24" name="Shape 16"/>
           <p:cNvSpPr/>
           <p:nvPr/>
         </p:nvSpPr>
         <p:spPr>
           <a:xfrm>
-            <a:off x="5052060" y="3017520"/>
+            <a:off x="3863340" y="3017520"/>
             <a:ext cx="109728" cy="109728"/>
           </a:xfrm>
           <a:prstGeom prst="ellipse">
@@ -19680,13 +22331,13 @@
       </p:sp>
       <p:sp>
         <p:nvSpPr>
-          <p:cNvPr id="23" name="Text 17"/>
-          <p:cNvSpPr txBox="1"/>
-          <p:nvPr/>
-        </p:nvSpPr>
-        <p:spPr>
-          <a:xfrm>
-            <a:off x="5335524" y="2926080"/>
+          <p:cNvPr id="25" name="Text 17"/>
+          <p:cNvSpPr txBox="1"/>
+          <p:nvPr/>
+        </p:nvSpPr>
+        <p:spPr>
+          <a:xfrm>
+            <a:off x="4146804" y="2926080"/>
             <a:ext cx="777240" cy="292608"/>
           </a:xfrm>
           <a:prstGeom prst="rect">
@@ -19719,13 +22370,13 @@
       </p:sp>
       <p:sp>
         <p:nvSpPr>
-          <p:cNvPr id="24" name="Shape 18"/>
+          <p:cNvPr id="26" name="Shape 18"/>
           <p:cNvSpPr/>
           <p:nvPr/>
         </p:nvSpPr>
         <p:spPr>
           <a:xfrm>
-            <a:off x="6185916" y="3049524"/>
+            <a:off x="4997196" y="3049524"/>
             <a:ext cx="310896" cy="45720"/>
           </a:xfrm>
           <a:prstGeom prst="rect">
@@ -19739,13 +22390,13 @@
       </p:sp>
       <p:sp>
         <p:nvSpPr>
-          <p:cNvPr id="25" name="Shape 19"/>
+          <p:cNvPr id="27" name="Shape 19"/>
           <p:cNvSpPr/>
           <p:nvPr/>
         </p:nvSpPr>
         <p:spPr>
           <a:xfrm>
-            <a:off x="6286500" y="3017520"/>
+            <a:off x="5097780" y="3017520"/>
             <a:ext cx="109728" cy="109728"/>
           </a:xfrm>
           <a:prstGeom prst="ellipse">
@@ -19759,13 +22410,13 @@
       </p:sp>
       <p:sp>
         <p:nvSpPr>
-          <p:cNvPr id="26" name="Text 20"/>
-          <p:cNvSpPr txBox="1"/>
-          <p:nvPr/>
-        </p:nvSpPr>
-        <p:spPr>
-          <a:xfrm>
-            <a:off x="6569964" y="2926080"/>
+          <p:cNvPr id="28" name="Text 20"/>
+          <p:cNvSpPr txBox="1"/>
+          <p:nvPr/>
+        </p:nvSpPr>
+        <p:spPr>
+          <a:xfrm>
+            <a:off x="5381244" y="2926080"/>
             <a:ext cx="777240" cy="292608"/>
           </a:xfrm>
           <a:prstGeom prst="rect">
@@ -19798,7 +22449,106 @@
       </p:sp>
       <p:sp>
         <p:nvSpPr>
-          <p:cNvPr id="27" name="Shape 21"/>
+          <p:cNvPr id="29" name="Shape 21"/>
+          <p:cNvSpPr/>
+          <p:nvPr/>
+        </p:nvSpPr>
+        <p:spPr>
+          <a:xfrm>
+            <a:off x="6231636" y="3049524"/>
+            <a:ext cx="73152" cy="36576"/>
+          </a:xfrm>
+          <a:prstGeom prst="rect">
+            <a:avLst/>
+          </a:prstGeom>
+          <a:solidFill>
+            <a:srgbClr val="595959"/>
+          </a:solidFill>
+          <a:ln/>
+        </p:spPr>
+      </p:sp>
+      <p:sp>
+        <p:nvSpPr>
+          <p:cNvPr id="30" name="Shape 22"/>
+          <p:cNvSpPr/>
+          <p:nvPr/>
+        </p:nvSpPr>
+        <p:spPr>
+          <a:xfrm>
+            <a:off x="6350508" y="3049524"/>
+            <a:ext cx="73152" cy="36576"/>
+          </a:xfrm>
+          <a:prstGeom prst="rect">
+            <a:avLst/>
+          </a:prstGeom>
+          <a:solidFill>
+            <a:srgbClr val="595959"/>
+          </a:solidFill>
+          <a:ln/>
+        </p:spPr>
+      </p:sp>
+      <p:sp>
+        <p:nvSpPr>
+          <p:cNvPr id="31" name="Shape 23"/>
+          <p:cNvSpPr/>
+          <p:nvPr/>
+        </p:nvSpPr>
+        <p:spPr>
+          <a:xfrm>
+            <a:off x="6469380" y="3049524"/>
+            <a:ext cx="73152" cy="36576"/>
+          </a:xfrm>
+          <a:prstGeom prst="rect">
+            <a:avLst/>
+          </a:prstGeom>
+          <a:solidFill>
+            <a:srgbClr val="595959"/>
+          </a:solidFill>
+          <a:ln/>
+        </p:spPr>
+      </p:sp>
+      <p:sp>
+        <p:nvSpPr>
+          <p:cNvPr id="32" name="Text 24"/>
+          <p:cNvSpPr txBox="1"/>
+          <p:nvPr/>
+        </p:nvSpPr>
+        <p:spPr>
+          <a:xfrm>
+            <a:off x="6615684" y="2926080"/>
+            <a:ext cx="2377440" cy="292608"/>
+          </a:xfrm>
+          <a:prstGeom prst="rect">
+            <a:avLst/>
+          </a:prstGeom>
+          <a:noFill/>
+          <a:ln/>
+        </p:spPr>
+        <p:txBody>
+          <a:bodyPr wrap="square" lIns="0" tIns="0" rIns="0" bIns="0" rtlCol="0" anchor="ctr"/>
+          <a:lstStyle/>
+          <a:p>
+            <a:pPr indent="0" marL="0">
+              <a:buNone/>
+            </a:pPr>
+            <a:r>
+              <a:rPr lang="en-US" sz="1400" dirty="0">
+                <a:solidFill>
+                  <a:srgbClr val="1A1A1A"/>
+                </a:solidFill>
+                <a:latin typeface="Inter" pitchFamily="34" charset="0"/>
+                <a:ea typeface="Inter" pitchFamily="34" charset="-122"/>
+                <a:cs typeface="Inter" pitchFamily="34" charset="-120"/>
+              </a:rPr>
+              <a:t>Benchmark 15%</a:t>
+            </a:r>
+            <a:endParaRPr lang="en-US" sz="1400" dirty="0"/>
+          </a:p>
+        </p:txBody>
+      </p:sp>
+      <p:sp>
+        <p:nvSpPr>
+          <p:cNvPr id="33" name="Shape 25"/>
           <p:cNvSpPr/>
           <p:nvPr/>
         </p:nvSpPr>
@@ -19818,7 +22568,7 @@
       </p:sp>
       <p:sp>
         <p:nvSpPr>
-          <p:cNvPr id="28" name="Text 22"/>
+          <p:cNvPr id="34" name="Text 26"/>
           <p:cNvSpPr txBox="1"/>
           <p:nvPr/>
         </p:nvSpPr>
@@ -28445,15 +31195,47 @@
           </a:graphicData>
         </a:graphic>
       </p:graphicFrame>
-      <p:sp>
-        <p:nvSpPr>
-          <p:cNvPr id="21" name="Shape 15"/>
+      <p:graphicFrame>
+        <p:nvGraphicFramePr>
+          <p:cNvPr id="21" name="Chart 4" descr=""/>
+          <p:cNvGraphicFramePr/>
+          <p:nvPr/>
+        </p:nvGraphicFramePr>
+        <p:xfrm>
+          <a:off x="621792" y="3218688"/>
+          <a:ext cx="10945368" cy="2679192"/>
+        </p:xfrm>
+        <a:graphic xmlns:a="http://schemas.openxmlformats.org/drawingml/2006/main">
+          <a:graphicData uri="http://schemas.openxmlformats.org/drawingml/2006/chart">
+            <c:chart xmlns:c="http://schemas.openxmlformats.org/drawingml/2006/chart" r:id="rId5"/>
+          </a:graphicData>
+        </a:graphic>
+      </p:graphicFrame>
+      <p:graphicFrame>
+        <p:nvGraphicFramePr>
+          <p:cNvPr id="22" name="Chart 5" descr=""/>
+          <p:cNvGraphicFramePr/>
+          <p:nvPr/>
+        </p:nvGraphicFramePr>
+        <p:xfrm>
+          <a:off x="621792" y="3218688"/>
+          <a:ext cx="10945368" cy="2679192"/>
+        </p:xfrm>
+        <a:graphic xmlns:a="http://schemas.openxmlformats.org/drawingml/2006/main">
+          <a:graphicData uri="http://schemas.openxmlformats.org/drawingml/2006/chart">
+            <c:chart xmlns:c="http://schemas.openxmlformats.org/drawingml/2006/chart" r:id="rId6"/>
+          </a:graphicData>
+        </a:graphic>
+      </p:graphicFrame>
+      <p:sp>
+        <p:nvSpPr>
+          <p:cNvPr id="23" name="Shape 15"/>
           <p:cNvSpPr/>
           <p:nvPr/>
         </p:nvSpPr>
         <p:spPr>
           <a:xfrm>
-            <a:off x="4951476" y="3049524"/>
+            <a:off x="3762756" y="3049524"/>
             <a:ext cx="310896" cy="45720"/>
           </a:xfrm>
           <a:prstGeom prst="rect">
@@ -28467,13 +31249,13 @@
       </p:sp>
       <p:sp>
         <p:nvSpPr>
-          <p:cNvPr id="22" name="Shape 16"/>
+          <p:cNvPr id="24" name="Shape 16"/>
           <p:cNvSpPr/>
           <p:nvPr/>
         </p:nvSpPr>
         <p:spPr>
           <a:xfrm>
-            <a:off x="5052060" y="3017520"/>
+            <a:off x="3863340" y="3017520"/>
             <a:ext cx="109728" cy="109728"/>
           </a:xfrm>
           <a:prstGeom prst="ellipse">
@@ -28487,13 +31269,13 @@
       </p:sp>
       <p:sp>
         <p:nvSpPr>
-          <p:cNvPr id="23" name="Text 17"/>
-          <p:cNvSpPr txBox="1"/>
-          <p:nvPr/>
-        </p:nvSpPr>
-        <p:spPr>
-          <a:xfrm>
-            <a:off x="5335524" y="2926080"/>
+          <p:cNvPr id="25" name="Text 17"/>
+          <p:cNvSpPr txBox="1"/>
+          <p:nvPr/>
+        </p:nvSpPr>
+        <p:spPr>
+          <a:xfrm>
+            <a:off x="4146804" y="2926080"/>
             <a:ext cx="777240" cy="292608"/>
           </a:xfrm>
           <a:prstGeom prst="rect">
@@ -28526,13 +31308,13 @@
       </p:sp>
       <p:sp>
         <p:nvSpPr>
-          <p:cNvPr id="24" name="Shape 18"/>
+          <p:cNvPr id="26" name="Shape 18"/>
           <p:cNvSpPr/>
           <p:nvPr/>
         </p:nvSpPr>
         <p:spPr>
           <a:xfrm>
-            <a:off x="6185916" y="3049524"/>
+            <a:off x="4997196" y="3049524"/>
             <a:ext cx="310896" cy="45720"/>
           </a:xfrm>
           <a:prstGeom prst="rect">
@@ -28546,13 +31328,13 @@
       </p:sp>
       <p:sp>
         <p:nvSpPr>
-          <p:cNvPr id="25" name="Shape 19"/>
+          <p:cNvPr id="27" name="Shape 19"/>
           <p:cNvSpPr/>
           <p:nvPr/>
         </p:nvSpPr>
         <p:spPr>
           <a:xfrm>
-            <a:off x="6286500" y="3017520"/>
+            <a:off x="5097780" y="3017520"/>
             <a:ext cx="109728" cy="109728"/>
           </a:xfrm>
           <a:prstGeom prst="ellipse">
@@ -28566,13 +31348,13 @@
       </p:sp>
       <p:sp>
         <p:nvSpPr>
-          <p:cNvPr id="26" name="Text 20"/>
-          <p:cNvSpPr txBox="1"/>
-          <p:nvPr/>
-        </p:nvSpPr>
-        <p:spPr>
-          <a:xfrm>
-            <a:off x="6569964" y="2926080"/>
+          <p:cNvPr id="28" name="Text 20"/>
+          <p:cNvSpPr txBox="1"/>
+          <p:nvPr/>
+        </p:nvSpPr>
+        <p:spPr>
+          <a:xfrm>
+            <a:off x="5381244" y="2926080"/>
             <a:ext cx="777240" cy="292608"/>
           </a:xfrm>
           <a:prstGeom prst="rect">
@@ -28605,7 +31387,106 @@
       </p:sp>
       <p:sp>
         <p:nvSpPr>
-          <p:cNvPr id="27" name="Shape 21"/>
+          <p:cNvPr id="29" name="Shape 21"/>
+          <p:cNvSpPr/>
+          <p:nvPr/>
+        </p:nvSpPr>
+        <p:spPr>
+          <a:xfrm>
+            <a:off x="6231636" y="3049524"/>
+            <a:ext cx="73152" cy="36576"/>
+          </a:xfrm>
+          <a:prstGeom prst="rect">
+            <a:avLst/>
+          </a:prstGeom>
+          <a:solidFill>
+            <a:srgbClr val="595959"/>
+          </a:solidFill>
+          <a:ln/>
+        </p:spPr>
+      </p:sp>
+      <p:sp>
+        <p:nvSpPr>
+          <p:cNvPr id="30" name="Shape 22"/>
+          <p:cNvSpPr/>
+          <p:nvPr/>
+        </p:nvSpPr>
+        <p:spPr>
+          <a:xfrm>
+            <a:off x="6350508" y="3049524"/>
+            <a:ext cx="73152" cy="36576"/>
+          </a:xfrm>
+          <a:prstGeom prst="rect">
+            <a:avLst/>
+          </a:prstGeom>
+          <a:solidFill>
+            <a:srgbClr val="595959"/>
+          </a:solidFill>
+          <a:ln/>
+        </p:spPr>
+      </p:sp>
+      <p:sp>
+        <p:nvSpPr>
+          <p:cNvPr id="31" name="Shape 23"/>
+          <p:cNvSpPr/>
+          <p:nvPr/>
+        </p:nvSpPr>
+        <p:spPr>
+          <a:xfrm>
+            <a:off x="6469380" y="3049524"/>
+            <a:ext cx="73152" cy="36576"/>
+          </a:xfrm>
+          <a:prstGeom prst="rect">
+            <a:avLst/>
+          </a:prstGeom>
+          <a:solidFill>
+            <a:srgbClr val="595959"/>
+          </a:solidFill>
+          <a:ln/>
+        </p:spPr>
+      </p:sp>
+      <p:sp>
+        <p:nvSpPr>
+          <p:cNvPr id="32" name="Text 24"/>
+          <p:cNvSpPr txBox="1"/>
+          <p:nvPr/>
+        </p:nvSpPr>
+        <p:spPr>
+          <a:xfrm>
+            <a:off x="6615684" y="2926080"/>
+            <a:ext cx="2377440" cy="292608"/>
+          </a:xfrm>
+          <a:prstGeom prst="rect">
+            <a:avLst/>
+          </a:prstGeom>
+          <a:noFill/>
+          <a:ln/>
+        </p:spPr>
+        <p:txBody>
+          <a:bodyPr wrap="square" lIns="0" tIns="0" rIns="0" bIns="0" rtlCol="0" anchor="ctr"/>
+          <a:lstStyle/>
+          <a:p>
+            <a:pPr indent="0" marL="0">
+              <a:buNone/>
+            </a:pPr>
+            <a:r>
+              <a:rPr lang="en-US" sz="1400" dirty="0">
+                <a:solidFill>
+                  <a:srgbClr val="1A1A1A"/>
+                </a:solidFill>
+                <a:latin typeface="Inter" pitchFamily="34" charset="0"/>
+                <a:ea typeface="Inter" pitchFamily="34" charset="-122"/>
+                <a:cs typeface="Inter" pitchFamily="34" charset="-120"/>
+              </a:rPr>
+              <a:t>Benchmark 15%</a:t>
+            </a:r>
+            <a:endParaRPr lang="en-US" sz="1400" dirty="0"/>
+          </a:p>
+        </p:txBody>
+      </p:sp>
+      <p:sp>
+        <p:nvSpPr>
+          <p:cNvPr id="33" name="Shape 25"/>
           <p:cNvSpPr/>
           <p:nvPr/>
         </p:nvSpPr>
@@ -28625,7 +31506,7 @@
       </p:sp>
       <p:sp>
         <p:nvSpPr>
-          <p:cNvPr id="28" name="Text 22"/>
+          <p:cNvPr id="34" name="Text 26"/>
           <p:cNvSpPr txBox="1"/>
           <p:nvPr/>
         </p:nvSpPr>
@@ -37252,15 +40133,47 @@
           </a:graphicData>
         </a:graphic>
       </p:graphicFrame>
-      <p:sp>
-        <p:nvSpPr>
-          <p:cNvPr id="21" name="Shape 15"/>
+      <p:graphicFrame>
+        <p:nvGraphicFramePr>
+          <p:cNvPr id="21" name="Chart 4" descr=""/>
+          <p:cNvGraphicFramePr/>
+          <p:nvPr/>
+        </p:nvGraphicFramePr>
+        <p:xfrm>
+          <a:off x="621792" y="3218688"/>
+          <a:ext cx="10945368" cy="2679192"/>
+        </p:xfrm>
+        <a:graphic xmlns:a="http://schemas.openxmlformats.org/drawingml/2006/main">
+          <a:graphicData uri="http://schemas.openxmlformats.org/drawingml/2006/chart">
+            <c:chart xmlns:c="http://schemas.openxmlformats.org/drawingml/2006/chart" r:id="rId5"/>
+          </a:graphicData>
+        </a:graphic>
+      </p:graphicFrame>
+      <p:graphicFrame>
+        <p:nvGraphicFramePr>
+          <p:cNvPr id="22" name="Chart 5" descr=""/>
+          <p:cNvGraphicFramePr/>
+          <p:nvPr/>
+        </p:nvGraphicFramePr>
+        <p:xfrm>
+          <a:off x="621792" y="3218688"/>
+          <a:ext cx="10945368" cy="2679192"/>
+        </p:xfrm>
+        <a:graphic xmlns:a="http://schemas.openxmlformats.org/drawingml/2006/main">
+          <a:graphicData uri="http://schemas.openxmlformats.org/drawingml/2006/chart">
+            <c:chart xmlns:c="http://schemas.openxmlformats.org/drawingml/2006/chart" r:id="rId6"/>
+          </a:graphicData>
+        </a:graphic>
+      </p:graphicFrame>
+      <p:sp>
+        <p:nvSpPr>
+          <p:cNvPr id="23" name="Shape 15"/>
           <p:cNvSpPr/>
           <p:nvPr/>
         </p:nvSpPr>
         <p:spPr>
           <a:xfrm>
-            <a:off x="4951476" y="3049524"/>
+            <a:off x="3762756" y="3049524"/>
             <a:ext cx="310896" cy="45720"/>
           </a:xfrm>
           <a:prstGeom prst="rect">
@@ -37274,13 +40187,13 @@
       </p:sp>
       <p:sp>
         <p:nvSpPr>
-          <p:cNvPr id="22" name="Shape 16"/>
+          <p:cNvPr id="24" name="Shape 16"/>
           <p:cNvSpPr/>
           <p:nvPr/>
         </p:nvSpPr>
         <p:spPr>
           <a:xfrm>
-            <a:off x="5052060" y="3017520"/>
+            <a:off x="3863340" y="3017520"/>
             <a:ext cx="109728" cy="109728"/>
           </a:xfrm>
           <a:prstGeom prst="ellipse">
@@ -37294,13 +40207,13 @@
       </p:sp>
       <p:sp>
         <p:nvSpPr>
-          <p:cNvPr id="23" name="Text 17"/>
-          <p:cNvSpPr txBox="1"/>
-          <p:nvPr/>
-        </p:nvSpPr>
-        <p:spPr>
-          <a:xfrm>
-            <a:off x="5335524" y="2926080"/>
+          <p:cNvPr id="25" name="Text 17"/>
+          <p:cNvSpPr txBox="1"/>
+          <p:nvPr/>
+        </p:nvSpPr>
+        <p:spPr>
+          <a:xfrm>
+            <a:off x="4146804" y="2926080"/>
             <a:ext cx="777240" cy="292608"/>
           </a:xfrm>
           <a:prstGeom prst="rect">
@@ -37333,13 +40246,13 @@
       </p:sp>
       <p:sp>
         <p:nvSpPr>
-          <p:cNvPr id="24" name="Shape 18"/>
+          <p:cNvPr id="26" name="Shape 18"/>
           <p:cNvSpPr/>
           <p:nvPr/>
         </p:nvSpPr>
         <p:spPr>
           <a:xfrm>
-            <a:off x="6185916" y="3049524"/>
+            <a:off x="4997196" y="3049524"/>
             <a:ext cx="310896" cy="45720"/>
           </a:xfrm>
           <a:prstGeom prst="rect">
@@ -37353,13 +40266,13 @@
       </p:sp>
       <p:sp>
         <p:nvSpPr>
-          <p:cNvPr id="25" name="Shape 19"/>
+          <p:cNvPr id="27" name="Shape 19"/>
           <p:cNvSpPr/>
           <p:nvPr/>
         </p:nvSpPr>
         <p:spPr>
           <a:xfrm>
-            <a:off x="6286500" y="3017520"/>
+            <a:off x="5097780" y="3017520"/>
             <a:ext cx="109728" cy="109728"/>
           </a:xfrm>
           <a:prstGeom prst="ellipse">
@@ -37373,13 +40286,13 @@
       </p:sp>
       <p:sp>
         <p:nvSpPr>
-          <p:cNvPr id="26" name="Text 20"/>
-          <p:cNvSpPr txBox="1"/>
-          <p:nvPr/>
-        </p:nvSpPr>
-        <p:spPr>
-          <a:xfrm>
-            <a:off x="6569964" y="2926080"/>
+          <p:cNvPr id="28" name="Text 20"/>
+          <p:cNvSpPr txBox="1"/>
+          <p:nvPr/>
+        </p:nvSpPr>
+        <p:spPr>
+          <a:xfrm>
+            <a:off x="5381244" y="2926080"/>
             <a:ext cx="777240" cy="292608"/>
           </a:xfrm>
           <a:prstGeom prst="rect">
@@ -37412,7 +40325,106 @@
       </p:sp>
       <p:sp>
         <p:nvSpPr>
-          <p:cNvPr id="27" name="Shape 21"/>
+          <p:cNvPr id="29" name="Shape 21"/>
+          <p:cNvSpPr/>
+          <p:nvPr/>
+        </p:nvSpPr>
+        <p:spPr>
+          <a:xfrm>
+            <a:off x="6231636" y="3049524"/>
+            <a:ext cx="73152" cy="36576"/>
+          </a:xfrm>
+          <a:prstGeom prst="rect">
+            <a:avLst/>
+          </a:prstGeom>
+          <a:solidFill>
+            <a:srgbClr val="595959"/>
+          </a:solidFill>
+          <a:ln/>
+        </p:spPr>
+      </p:sp>
+      <p:sp>
+        <p:nvSpPr>
+          <p:cNvPr id="30" name="Shape 22"/>
+          <p:cNvSpPr/>
+          <p:nvPr/>
+        </p:nvSpPr>
+        <p:spPr>
+          <a:xfrm>
+            <a:off x="6350508" y="3049524"/>
+            <a:ext cx="73152" cy="36576"/>
+          </a:xfrm>
+          <a:prstGeom prst="rect">
+            <a:avLst/>
+          </a:prstGeom>
+          <a:solidFill>
+            <a:srgbClr val="595959"/>
+          </a:solidFill>
+          <a:ln/>
+        </p:spPr>
+      </p:sp>
+      <p:sp>
+        <p:nvSpPr>
+          <p:cNvPr id="31" name="Shape 23"/>
+          <p:cNvSpPr/>
+          <p:nvPr/>
+        </p:nvSpPr>
+        <p:spPr>
+          <a:xfrm>
+            <a:off x="6469380" y="3049524"/>
+            <a:ext cx="73152" cy="36576"/>
+          </a:xfrm>
+          <a:prstGeom prst="rect">
+            <a:avLst/>
+          </a:prstGeom>
+          <a:solidFill>
+            <a:srgbClr val="595959"/>
+          </a:solidFill>
+          <a:ln/>
+        </p:spPr>
+      </p:sp>
+      <p:sp>
+        <p:nvSpPr>
+          <p:cNvPr id="32" name="Text 24"/>
+          <p:cNvSpPr txBox="1"/>
+          <p:nvPr/>
+        </p:nvSpPr>
+        <p:spPr>
+          <a:xfrm>
+            <a:off x="6615684" y="2926080"/>
+            <a:ext cx="2377440" cy="292608"/>
+          </a:xfrm>
+          <a:prstGeom prst="rect">
+            <a:avLst/>
+          </a:prstGeom>
+          <a:noFill/>
+          <a:ln/>
+        </p:spPr>
+        <p:txBody>
+          <a:bodyPr wrap="square" lIns="0" tIns="0" rIns="0" bIns="0" rtlCol="0" anchor="ctr"/>
+          <a:lstStyle/>
+          <a:p>
+            <a:pPr indent="0" marL="0">
+              <a:buNone/>
+            </a:pPr>
+            <a:r>
+              <a:rPr lang="en-US" sz="1400" dirty="0">
+                <a:solidFill>
+                  <a:srgbClr val="1A1A1A"/>
+                </a:solidFill>
+                <a:latin typeface="Inter" pitchFamily="34" charset="0"/>
+                <a:ea typeface="Inter" pitchFamily="34" charset="-122"/>
+                <a:cs typeface="Inter" pitchFamily="34" charset="-120"/>
+              </a:rPr>
+              <a:t>Benchmark 10%</a:t>
+            </a:r>
+            <a:endParaRPr lang="en-US" sz="1400" dirty="0"/>
+          </a:p>
+        </p:txBody>
+      </p:sp>
+      <p:sp>
+        <p:nvSpPr>
+          <p:cNvPr id="33" name="Shape 25"/>
           <p:cNvSpPr/>
           <p:nvPr/>
         </p:nvSpPr>
@@ -37432,7 +40444,7 @@
       </p:sp>
       <p:sp>
         <p:nvSpPr>
-          <p:cNvPr id="28" name="Text 22"/>
+          <p:cNvPr id="34" name="Text 26"/>
           <p:cNvSpPr txBox="1"/>
           <p:nvPr/>
         </p:nvSpPr>

--- a/day2-deck/decks/Opcode Benchmarks - House Style.pptx
+++ b/day2-deck/decks/Opcode Benchmarks - House Style.pptx
@@ -8086,7 +8086,7 @@
           <a:p>
             <a:r>
               <a:rPr lang="en-US" dirty="0"/>
-              <a:t>Source: Qlik - Closed Repair Orders. Customer pay, Jan-Sep by close month. Same-store, INEOS excluded (opened 2026). GMC Prescott body shop labor excluded. Top and bottom five stores by change in Brake Fluid %, Jan-Sep 2026 vs 2025, in points. Moving now: Jul-Sep 2026 vs Jan-Mar 2026, each store against itself; the group moved +0.0 pts on the same basis, so part of every store's change is seasonal.Conversation starter: each top store says one thing they started doing; each bottom store says what got in the way and what they would try. The room trades ideas. Moving now: ask the top three what they started this year.</a:t>
+              <a:t>Source: Qlik - Closed Repair Orders. Customer pay, Jan-Sep by close month. Same-store, INEOS excluded (opened 2026). GMC Prescott body shop labor excluded. Top and bottom five stores by change in Brake Fluid %, Jan-Sep 2026 vs 2025, in points. Moving now: Jul-Sep 2026 vs Jan-Mar 2026, each store against itself; the group moved +0.0 pts on the same basis, so part of every store's change is seasonal. Green bar at the right of a row: the store is on both the top five vs last year and the top five moving now.Conversation starter: each top store says one thing they started doing; each bottom store says what got in the way and what they would try. The room trades ideas. Moving now: ask the top three what they started this year.</a:t>
             </a:r>
             <a:endParaRPr lang="en-US" dirty="0"/>
           </a:p>
@@ -8383,7 +8383,7 @@
           <a:p>
             <a:r>
               <a:rPr lang="en-US" dirty="0"/>
-              <a:t>Source: Qlik - Closed Repair Orders. Customer pay, Jan-Sep by close month. Same-store, INEOS excluded (opened 2026). GMC Prescott body shop labor excluded. Top and bottom five stores by change in Fuel Service %, Jan-Sep 2026 vs 2025, in points. Moving now: Jul-Sep 2026 vs Jan-Mar 2026, each store against itself; the group moved −0.3 pts on the same basis, so part of every store's change is seasonal.Conversation starter: each top store says one thing they started doing; each bottom store says what got in the way and what they would try. The room trades ideas. Moving now: ask the top three what they started this year.</a:t>
+              <a:t>Source: Qlik - Closed Repair Orders. Customer pay, Jan-Sep by close month. Same-store, INEOS excluded (opened 2026). GMC Prescott body shop labor excluded. Top and bottom five stores by change in Fuel Service %, Jan-Sep 2026 vs 2025, in points. Moving now: Jul-Sep 2026 vs Jan-Mar 2026, each store against itself; the group moved −0.3 pts on the same basis, so part of every store's change is seasonal. Green bar at the right of a row: the store is on both the top five vs last year and the top five moving now.Conversation starter: each top store says one thing they started doing; each bottom store says what got in the way and what they would try. The room trades ideas. Moving now: ask the top three what they started this year.</a:t>
             </a:r>
             <a:endParaRPr lang="en-US" dirty="0"/>
           </a:p>
@@ -8680,7 +8680,7 @@
           <a:p>
             <a:r>
               <a:rPr lang="en-US" dirty="0"/>
-              <a:t>Source: Qlik - Closed Repair Orders. Customer pay, Jan-Sep by close month. Same-store, INEOS excluded (opened 2026). GMC Prescott body shop labor excluded. Top and bottom five stores by change in Alignment %, Jan-Sep 2026 vs 2025, in points. Moving now: Jul-Sep 2026 vs Jan-Mar 2026, each store against itself; the group moved +0.2 pts on the same basis, so part of every store's change is seasonal.Conversation starter: each top store says one thing they started doing; each bottom store says what got in the way and what they would try. The room trades ideas. Moving now: ask the top three what they started this year.</a:t>
+              <a:t>Source: Qlik - Closed Repair Orders. Customer pay, Jan-Sep by close month. Same-store, INEOS excluded (opened 2026). GMC Prescott body shop labor excluded. Top and bottom five stores by change in Alignment %, Jan-Sep 2026 vs 2025, in points. Moving now: Jul-Sep 2026 vs Jan-Mar 2026, each store against itself; the group moved +0.2 pts on the same basis, so part of every store's change is seasonal. Green bar at the right of a row: the store is on both the top five vs last year and the top five moving now.Conversation starter: each top store says one thing they started doing; each bottom store says what got in the way and what they would try. The room trades ideas. Moving now: ask the top three what they started this year.</a:t>
             </a:r>
             <a:endParaRPr lang="en-US" dirty="0"/>
           </a:p>
@@ -8977,7 +8977,7 @@
           <a:p>
             <a:r>
               <a:rPr lang="en-US" dirty="0"/>
-              <a:t>Source: Qlik - Closed Repair Orders. Customer pay, Jan-Sep by close month. Same-store, INEOS excluded (opened 2026). GMC Prescott body shop labor excluded. Top and bottom five stores by change in Balance %, Jan-Sep 2026 vs 2025, in points. Moving now: Jul-Sep 2026 vs Jan-Mar 2026, each store against itself; the group moved +0.1 pts on the same basis, so part of every store's change is seasonal.Conversation starter: each top store says one thing they started doing; each bottom store says what got in the way and what they would try. The room trades ideas. Moving now: ask the top three what they started this year.</a:t>
+              <a:t>Source: Qlik - Closed Repair Orders. Customer pay, Jan-Sep by close month. Same-store, INEOS excluded (opened 2026). GMC Prescott body shop labor excluded. Top and bottom five stores by change in Balance %, Jan-Sep 2026 vs 2025, in points. Moving now: Jul-Sep 2026 vs Jan-Mar 2026, each store against itself; the group moved +0.1 pts on the same basis, so part of every store's change is seasonal. Green bar at the right of a row: the store is on both the top five vs last year and the top five moving now.Conversation starter: each top store says one thing they started doing; each bottom store says what got in the way and what they would try. The room trades ideas. Moving now: ask the top three what they started this year.</a:t>
             </a:r>
             <a:endParaRPr lang="en-US" dirty="0"/>
           </a:p>
@@ -19041,7 +19041,27 @@
       </p:sp>
       <p:sp>
         <p:nvSpPr>
-          <p:cNvPr id="13" name="Text 11"/>
+          <p:cNvPr id="13" name="Shape 11"/>
+          <p:cNvSpPr/>
+          <p:nvPr/>
+        </p:nvSpPr>
+        <p:spPr>
+          <a:xfrm>
+            <a:off x="4084320" y="2894990"/>
+            <a:ext cx="64008" cy="682142"/>
+          </a:xfrm>
+          <a:prstGeom prst="rect">
+            <a:avLst/>
+          </a:prstGeom>
+          <a:solidFill>
+            <a:srgbClr val="12A566"/>
+          </a:solidFill>
+          <a:ln/>
+        </p:spPr>
+      </p:sp>
+      <p:sp>
+        <p:nvSpPr>
+          <p:cNvPr id="14" name="Text 12"/>
           <p:cNvSpPr txBox="1"/>
           <p:nvPr/>
         </p:nvSpPr>
@@ -19080,7 +19100,7 @@
       </p:sp>
       <p:sp>
         <p:nvSpPr>
-          <p:cNvPr id="14" name="Text 12"/>
+          <p:cNvPr id="15" name="Text 13"/>
           <p:cNvSpPr txBox="1"/>
           <p:nvPr/>
         </p:nvSpPr>
@@ -19159,7 +19179,7 @@
       </p:sp>
       <p:sp>
         <p:nvSpPr>
-          <p:cNvPr id="15" name="Text 13"/>
+          <p:cNvPr id="16" name="Text 14"/>
           <p:cNvSpPr txBox="1"/>
           <p:nvPr/>
         </p:nvSpPr>
@@ -19198,7 +19218,7 @@
       </p:sp>
       <p:sp>
         <p:nvSpPr>
-          <p:cNvPr id="16" name="Shape 14"/>
+          <p:cNvPr id="17" name="Shape 15"/>
           <p:cNvSpPr/>
           <p:nvPr/>
         </p:nvSpPr>
@@ -19218,7 +19238,7 @@
       </p:sp>
       <p:sp>
         <p:nvSpPr>
-          <p:cNvPr id="17" name="Text 15"/>
+          <p:cNvPr id="18" name="Text 16"/>
           <p:cNvSpPr txBox="1"/>
           <p:nvPr/>
         </p:nvSpPr>
@@ -19257,7 +19277,7 @@
       </p:sp>
       <p:sp>
         <p:nvSpPr>
-          <p:cNvPr id="18" name="Text 16"/>
+          <p:cNvPr id="19" name="Text 17"/>
           <p:cNvSpPr txBox="1"/>
           <p:nvPr/>
         </p:nvSpPr>
@@ -19336,7 +19356,7 @@
       </p:sp>
       <p:sp>
         <p:nvSpPr>
-          <p:cNvPr id="19" name="Text 17"/>
+          <p:cNvPr id="20" name="Text 18"/>
           <p:cNvSpPr txBox="1"/>
           <p:nvPr/>
         </p:nvSpPr>
@@ -19375,7 +19395,7 @@
       </p:sp>
       <p:sp>
         <p:nvSpPr>
-          <p:cNvPr id="20" name="Text 18"/>
+          <p:cNvPr id="21" name="Text 19"/>
           <p:cNvSpPr txBox="1"/>
           <p:nvPr/>
         </p:nvSpPr>
@@ -19414,7 +19434,7 @@
       </p:sp>
       <p:sp>
         <p:nvSpPr>
-          <p:cNvPr id="21" name="Text 19"/>
+          <p:cNvPr id="22" name="Text 20"/>
           <p:cNvSpPr txBox="1"/>
           <p:nvPr/>
         </p:nvSpPr>
@@ -19493,7 +19513,7 @@
       </p:sp>
       <p:sp>
         <p:nvSpPr>
-          <p:cNvPr id="22" name="Text 20"/>
+          <p:cNvPr id="23" name="Text 21"/>
           <p:cNvSpPr txBox="1"/>
           <p:nvPr/>
         </p:nvSpPr>
@@ -19532,7 +19552,7 @@
       </p:sp>
       <p:sp>
         <p:nvSpPr>
-          <p:cNvPr id="23" name="Shape 21"/>
+          <p:cNvPr id="24" name="Shape 22"/>
           <p:cNvSpPr/>
           <p:nvPr/>
         </p:nvSpPr>
@@ -19552,7 +19572,7 @@
       </p:sp>
       <p:sp>
         <p:nvSpPr>
-          <p:cNvPr id="24" name="Text 22"/>
+          <p:cNvPr id="25" name="Text 23"/>
           <p:cNvSpPr txBox="1"/>
           <p:nvPr/>
         </p:nvSpPr>
@@ -19591,7 +19611,7 @@
       </p:sp>
       <p:sp>
         <p:nvSpPr>
-          <p:cNvPr id="25" name="Text 23"/>
+          <p:cNvPr id="26" name="Text 24"/>
           <p:cNvSpPr txBox="1"/>
           <p:nvPr/>
         </p:nvSpPr>
@@ -19670,7 +19690,7 @@
       </p:sp>
       <p:sp>
         <p:nvSpPr>
-          <p:cNvPr id="26" name="Text 24"/>
+          <p:cNvPr id="27" name="Text 25"/>
           <p:cNvSpPr txBox="1"/>
           <p:nvPr/>
         </p:nvSpPr>
@@ -19709,7 +19729,7 @@
       </p:sp>
       <p:sp>
         <p:nvSpPr>
-          <p:cNvPr id="27" name="Shape 25"/>
+          <p:cNvPr id="28" name="Shape 26"/>
           <p:cNvSpPr/>
           <p:nvPr/>
         </p:nvSpPr>
@@ -19729,7 +19749,7 @@
       </p:sp>
       <p:sp>
         <p:nvSpPr>
-          <p:cNvPr id="28" name="Text 26"/>
+          <p:cNvPr id="29" name="Text 27"/>
           <p:cNvSpPr txBox="1"/>
           <p:nvPr/>
         </p:nvSpPr>
@@ -19768,7 +19788,7 @@
       </p:sp>
       <p:sp>
         <p:nvSpPr>
-          <p:cNvPr id="29" name="Text 27"/>
+          <p:cNvPr id="30" name="Text 28"/>
           <p:cNvSpPr txBox="1"/>
           <p:nvPr/>
         </p:nvSpPr>
@@ -19807,7 +19827,7 @@
       </p:sp>
       <p:sp>
         <p:nvSpPr>
-          <p:cNvPr id="30" name="Shape 28"/>
+          <p:cNvPr id="31" name="Shape 29"/>
           <p:cNvSpPr/>
           <p:nvPr/>
         </p:nvSpPr>
@@ -19827,7 +19847,7 @@
       </p:sp>
       <p:sp>
         <p:nvSpPr>
-          <p:cNvPr id="31" name="Text 29"/>
+          <p:cNvPr id="32" name="Text 30"/>
           <p:cNvSpPr txBox="1"/>
           <p:nvPr/>
         </p:nvSpPr>
@@ -19866,7 +19886,7 @@
       </p:sp>
       <p:sp>
         <p:nvSpPr>
-          <p:cNvPr id="32" name="Text 30"/>
+          <p:cNvPr id="33" name="Text 31"/>
           <p:cNvSpPr txBox="1"/>
           <p:nvPr/>
         </p:nvSpPr>
@@ -19945,7 +19965,7 @@
       </p:sp>
       <p:sp>
         <p:nvSpPr>
-          <p:cNvPr id="33" name="Text 31"/>
+          <p:cNvPr id="34" name="Text 32"/>
           <p:cNvSpPr txBox="1"/>
           <p:nvPr/>
         </p:nvSpPr>
@@ -19984,7 +20004,7 @@
       </p:sp>
       <p:sp>
         <p:nvSpPr>
-          <p:cNvPr id="34" name="Text 32"/>
+          <p:cNvPr id="35" name="Text 33"/>
           <p:cNvSpPr txBox="1"/>
           <p:nvPr/>
         </p:nvSpPr>
@@ -20023,7 +20043,7 @@
       </p:sp>
       <p:sp>
         <p:nvSpPr>
-          <p:cNvPr id="35" name="Text 33"/>
+          <p:cNvPr id="36" name="Text 34"/>
           <p:cNvSpPr txBox="1"/>
           <p:nvPr/>
         </p:nvSpPr>
@@ -20102,7 +20122,7 @@
       </p:sp>
       <p:sp>
         <p:nvSpPr>
-          <p:cNvPr id="36" name="Text 34"/>
+          <p:cNvPr id="37" name="Text 35"/>
           <p:cNvSpPr txBox="1"/>
           <p:nvPr/>
         </p:nvSpPr>
@@ -20141,7 +20161,7 @@
       </p:sp>
       <p:sp>
         <p:nvSpPr>
-          <p:cNvPr id="37" name="Shape 35"/>
+          <p:cNvPr id="38" name="Shape 36"/>
           <p:cNvSpPr/>
           <p:nvPr/>
         </p:nvSpPr>
@@ -20161,7 +20181,7 @@
       </p:sp>
       <p:sp>
         <p:nvSpPr>
-          <p:cNvPr id="38" name="Text 36"/>
+          <p:cNvPr id="39" name="Text 37"/>
           <p:cNvSpPr txBox="1"/>
           <p:nvPr/>
         </p:nvSpPr>
@@ -20200,7 +20220,7 @@
       </p:sp>
       <p:sp>
         <p:nvSpPr>
-          <p:cNvPr id="39" name="Text 37"/>
+          <p:cNvPr id="40" name="Text 38"/>
           <p:cNvSpPr txBox="1"/>
           <p:nvPr/>
         </p:nvSpPr>
@@ -20279,7 +20299,7 @@
       </p:sp>
       <p:sp>
         <p:nvSpPr>
-          <p:cNvPr id="40" name="Text 38"/>
+          <p:cNvPr id="41" name="Text 39"/>
           <p:cNvSpPr txBox="1"/>
           <p:nvPr/>
         </p:nvSpPr>
@@ -20318,7 +20338,7 @@
       </p:sp>
       <p:sp>
         <p:nvSpPr>
-          <p:cNvPr id="41" name="Text 39"/>
+          <p:cNvPr id="42" name="Text 40"/>
           <p:cNvSpPr txBox="1"/>
           <p:nvPr/>
         </p:nvSpPr>
@@ -20357,7 +20377,7 @@
       </p:sp>
       <p:sp>
         <p:nvSpPr>
-          <p:cNvPr id="42" name="Text 40"/>
+          <p:cNvPr id="43" name="Text 41"/>
           <p:cNvSpPr txBox="1"/>
           <p:nvPr/>
         </p:nvSpPr>
@@ -20436,7 +20456,7 @@
       </p:sp>
       <p:sp>
         <p:nvSpPr>
-          <p:cNvPr id="43" name="Text 41"/>
+          <p:cNvPr id="44" name="Text 42"/>
           <p:cNvSpPr txBox="1"/>
           <p:nvPr/>
         </p:nvSpPr>
@@ -20475,7 +20495,7 @@
       </p:sp>
       <p:sp>
         <p:nvSpPr>
-          <p:cNvPr id="44" name="Shape 42"/>
+          <p:cNvPr id="45" name="Shape 43"/>
           <p:cNvSpPr/>
           <p:nvPr/>
         </p:nvSpPr>
@@ -20495,7 +20515,7 @@
       </p:sp>
       <p:sp>
         <p:nvSpPr>
-          <p:cNvPr id="45" name="Text 43"/>
+          <p:cNvPr id="46" name="Text 44"/>
           <p:cNvSpPr txBox="1"/>
           <p:nvPr/>
         </p:nvSpPr>
@@ -20534,7 +20554,7 @@
       </p:sp>
       <p:sp>
         <p:nvSpPr>
-          <p:cNvPr id="46" name="Text 44"/>
+          <p:cNvPr id="47" name="Text 45"/>
           <p:cNvSpPr txBox="1"/>
           <p:nvPr/>
         </p:nvSpPr>
@@ -20613,7 +20633,7 @@
       </p:sp>
       <p:sp>
         <p:nvSpPr>
-          <p:cNvPr id="47" name="Text 45"/>
+          <p:cNvPr id="48" name="Text 46"/>
           <p:cNvSpPr txBox="1"/>
           <p:nvPr/>
         </p:nvSpPr>
@@ -20652,7 +20672,7 @@
       </p:sp>
       <p:sp>
         <p:nvSpPr>
-          <p:cNvPr id="48" name="Shape 46"/>
+          <p:cNvPr id="49" name="Shape 47"/>
           <p:cNvSpPr/>
           <p:nvPr/>
         </p:nvSpPr>
@@ -20672,7 +20692,7 @@
       </p:sp>
       <p:sp>
         <p:nvSpPr>
-          <p:cNvPr id="49" name="Text 47"/>
+          <p:cNvPr id="50" name="Text 48"/>
           <p:cNvSpPr txBox="1"/>
           <p:nvPr/>
         </p:nvSpPr>
@@ -20711,7 +20731,7 @@
       </p:sp>
       <p:sp>
         <p:nvSpPr>
-          <p:cNvPr id="50" name="Text 48"/>
+          <p:cNvPr id="51" name="Text 49"/>
           <p:cNvSpPr txBox="1"/>
           <p:nvPr/>
         </p:nvSpPr>
@@ -20750,7 +20770,7 @@
       </p:sp>
       <p:sp>
         <p:nvSpPr>
-          <p:cNvPr id="51" name="Shape 49"/>
+          <p:cNvPr id="52" name="Shape 50"/>
           <p:cNvSpPr/>
           <p:nvPr/>
         </p:nvSpPr>
@@ -20770,7 +20790,7 @@
       </p:sp>
       <p:sp>
         <p:nvSpPr>
-          <p:cNvPr id="52" name="Text 50"/>
+          <p:cNvPr id="53" name="Text 51"/>
           <p:cNvSpPr txBox="1"/>
           <p:nvPr/>
         </p:nvSpPr>
@@ -20809,7 +20829,7 @@
       </p:sp>
       <p:sp>
         <p:nvSpPr>
-          <p:cNvPr id="53" name="Text 51"/>
+          <p:cNvPr id="54" name="Text 52"/>
           <p:cNvSpPr txBox="1"/>
           <p:nvPr/>
         </p:nvSpPr>
@@ -20888,7 +20908,7 @@
       </p:sp>
       <p:sp>
         <p:nvSpPr>
-          <p:cNvPr id="54" name="Text 52"/>
+          <p:cNvPr id="55" name="Text 53"/>
           <p:cNvSpPr txBox="1"/>
           <p:nvPr/>
         </p:nvSpPr>
@@ -20927,7 +20947,7 @@
       </p:sp>
       <p:sp>
         <p:nvSpPr>
-          <p:cNvPr id="55" name="Text 53"/>
+          <p:cNvPr id="56" name="Text 54"/>
           <p:cNvSpPr txBox="1"/>
           <p:nvPr/>
         </p:nvSpPr>
@@ -20966,7 +20986,7 @@
       </p:sp>
       <p:sp>
         <p:nvSpPr>
-          <p:cNvPr id="56" name="Text 54"/>
+          <p:cNvPr id="57" name="Text 55"/>
           <p:cNvSpPr txBox="1"/>
           <p:nvPr/>
         </p:nvSpPr>
@@ -21045,7 +21065,7 @@
       </p:sp>
       <p:sp>
         <p:nvSpPr>
-          <p:cNvPr id="57" name="Text 55"/>
+          <p:cNvPr id="58" name="Text 56"/>
           <p:cNvSpPr txBox="1"/>
           <p:nvPr/>
         </p:nvSpPr>
@@ -21084,7 +21104,7 @@
       </p:sp>
       <p:sp>
         <p:nvSpPr>
-          <p:cNvPr id="58" name="Shape 56"/>
+          <p:cNvPr id="59" name="Shape 57"/>
           <p:cNvSpPr/>
           <p:nvPr/>
         </p:nvSpPr>
@@ -21104,7 +21124,7 @@
       </p:sp>
       <p:sp>
         <p:nvSpPr>
-          <p:cNvPr id="59" name="Text 57"/>
+          <p:cNvPr id="60" name="Text 58"/>
           <p:cNvSpPr txBox="1"/>
           <p:nvPr/>
         </p:nvSpPr>
@@ -21143,7 +21163,7 @@
       </p:sp>
       <p:sp>
         <p:nvSpPr>
-          <p:cNvPr id="60" name="Text 58"/>
+          <p:cNvPr id="61" name="Text 59"/>
           <p:cNvSpPr txBox="1"/>
           <p:nvPr/>
         </p:nvSpPr>
@@ -21222,7 +21242,7 @@
       </p:sp>
       <p:sp>
         <p:nvSpPr>
-          <p:cNvPr id="61" name="Text 59"/>
+          <p:cNvPr id="62" name="Text 60"/>
           <p:cNvSpPr txBox="1"/>
           <p:nvPr/>
         </p:nvSpPr>
@@ -21261,7 +21281,27 @@
       </p:sp>
       <p:sp>
         <p:nvSpPr>
-          <p:cNvPr id="62" name="Text 60"/>
+          <p:cNvPr id="63" name="Shape 61"/>
+          <p:cNvSpPr/>
+          <p:nvPr/>
+        </p:nvSpPr>
+        <p:spPr>
+          <a:xfrm>
+            <a:off x="11466576" y="4405579"/>
+            <a:ext cx="64008" cy="682142"/>
+          </a:xfrm>
+          <a:prstGeom prst="rect">
+            <a:avLst/>
+          </a:prstGeom>
+          <a:solidFill>
+            <a:srgbClr val="12A566"/>
+          </a:solidFill>
+          <a:ln/>
+        </p:spPr>
+      </p:sp>
+      <p:sp>
+        <p:nvSpPr>
+          <p:cNvPr id="64" name="Text 62"/>
           <p:cNvSpPr txBox="1"/>
           <p:nvPr/>
         </p:nvSpPr>
@@ -21300,7 +21340,7 @@
       </p:sp>
       <p:sp>
         <p:nvSpPr>
-          <p:cNvPr id="63" name="Text 61"/>
+          <p:cNvPr id="65" name="Text 63"/>
           <p:cNvSpPr txBox="1"/>
           <p:nvPr/>
         </p:nvSpPr>
@@ -21379,7 +21419,7 @@
       </p:sp>
       <p:sp>
         <p:nvSpPr>
-          <p:cNvPr id="64" name="Text 62"/>
+          <p:cNvPr id="66" name="Text 64"/>
           <p:cNvSpPr txBox="1"/>
           <p:nvPr/>
         </p:nvSpPr>
@@ -21418,7 +21458,7 @@
       </p:sp>
       <p:sp>
         <p:nvSpPr>
-          <p:cNvPr id="65" name="Shape 63"/>
+          <p:cNvPr id="67" name="Shape 65"/>
           <p:cNvSpPr/>
           <p:nvPr/>
         </p:nvSpPr>
@@ -21438,7 +21478,7 @@
       </p:sp>
       <p:sp>
         <p:nvSpPr>
-          <p:cNvPr id="66" name="Text 64"/>
+          <p:cNvPr id="68" name="Text 66"/>
           <p:cNvSpPr txBox="1"/>
           <p:nvPr/>
         </p:nvSpPr>
@@ -21477,7 +21517,7 @@
       </p:sp>
       <p:sp>
         <p:nvSpPr>
-          <p:cNvPr id="67" name="Text 65"/>
+          <p:cNvPr id="69" name="Text 67"/>
           <p:cNvSpPr txBox="1"/>
           <p:nvPr/>
         </p:nvSpPr>
@@ -21556,7 +21596,7 @@
       </p:sp>
       <p:sp>
         <p:nvSpPr>
-          <p:cNvPr id="68" name="Text 66"/>
+          <p:cNvPr id="70" name="Text 68"/>
           <p:cNvSpPr txBox="1"/>
           <p:nvPr/>
         </p:nvSpPr>
@@ -21595,7 +21635,7 @@
       </p:sp>
       <p:sp>
         <p:nvSpPr>
-          <p:cNvPr id="69" name="Shape 67"/>
+          <p:cNvPr id="71" name="Shape 69"/>
           <p:cNvSpPr/>
           <p:nvPr/>
         </p:nvSpPr>
@@ -21615,7 +21655,7 @@
       </p:sp>
       <p:sp>
         <p:nvSpPr>
-          <p:cNvPr id="70" name="Text 68"/>
+          <p:cNvPr id="72" name="Text 70"/>
           <p:cNvSpPr txBox="1"/>
           <p:nvPr/>
         </p:nvSpPr>
@@ -27822,7 +27862,27 @@
       </p:sp>
       <p:sp>
         <p:nvSpPr>
-          <p:cNvPr id="10" name="Text 8"/>
+          <p:cNvPr id="10" name="Shape 8"/>
+          <p:cNvSpPr/>
+          <p:nvPr/>
+        </p:nvSpPr>
+        <p:spPr>
+          <a:xfrm>
+            <a:off x="4084320" y="2139696"/>
+            <a:ext cx="64008" cy="682142"/>
+          </a:xfrm>
+          <a:prstGeom prst="rect">
+            <a:avLst/>
+          </a:prstGeom>
+          <a:solidFill>
+            <a:srgbClr val="12A566"/>
+          </a:solidFill>
+          <a:ln/>
+        </p:spPr>
+      </p:sp>
+      <p:sp>
+        <p:nvSpPr>
+          <p:cNvPr id="11" name="Text 9"/>
           <p:cNvSpPr txBox="1"/>
           <p:nvPr/>
         </p:nvSpPr>
@@ -27861,7 +27921,7 @@
       </p:sp>
       <p:sp>
         <p:nvSpPr>
-          <p:cNvPr id="11" name="Text 9"/>
+          <p:cNvPr id="12" name="Text 10"/>
           <p:cNvSpPr txBox="1"/>
           <p:nvPr/>
         </p:nvSpPr>
@@ -27940,7 +28000,7 @@
       </p:sp>
       <p:sp>
         <p:nvSpPr>
-          <p:cNvPr id="12" name="Text 10"/>
+          <p:cNvPr id="13" name="Text 11"/>
           <p:cNvSpPr txBox="1"/>
           <p:nvPr/>
         </p:nvSpPr>
@@ -27979,7 +28039,27 @@
       </p:sp>
       <p:sp>
         <p:nvSpPr>
-          <p:cNvPr id="13" name="Text 11"/>
+          <p:cNvPr id="14" name="Shape 12"/>
+          <p:cNvSpPr/>
+          <p:nvPr/>
+        </p:nvSpPr>
+        <p:spPr>
+          <a:xfrm>
+            <a:off x="4084320" y="2894990"/>
+            <a:ext cx="64008" cy="682142"/>
+          </a:xfrm>
+          <a:prstGeom prst="rect">
+            <a:avLst/>
+          </a:prstGeom>
+          <a:solidFill>
+            <a:srgbClr val="12A566"/>
+          </a:solidFill>
+          <a:ln/>
+        </p:spPr>
+      </p:sp>
+      <p:sp>
+        <p:nvSpPr>
+          <p:cNvPr id="15" name="Text 13"/>
           <p:cNvSpPr txBox="1"/>
           <p:nvPr/>
         </p:nvSpPr>
@@ -28018,7 +28098,7 @@
       </p:sp>
       <p:sp>
         <p:nvSpPr>
-          <p:cNvPr id="14" name="Text 12"/>
+          <p:cNvPr id="16" name="Text 14"/>
           <p:cNvSpPr txBox="1"/>
           <p:nvPr/>
         </p:nvSpPr>
@@ -28097,7 +28177,7 @@
       </p:sp>
       <p:sp>
         <p:nvSpPr>
-          <p:cNvPr id="15" name="Text 13"/>
+          <p:cNvPr id="17" name="Text 15"/>
           <p:cNvSpPr txBox="1"/>
           <p:nvPr/>
         </p:nvSpPr>
@@ -28136,7 +28216,7 @@
       </p:sp>
       <p:sp>
         <p:nvSpPr>
-          <p:cNvPr id="16" name="Shape 14"/>
+          <p:cNvPr id="18" name="Shape 16"/>
           <p:cNvSpPr/>
           <p:nvPr/>
         </p:nvSpPr>
@@ -28156,7 +28236,7 @@
       </p:sp>
       <p:sp>
         <p:nvSpPr>
-          <p:cNvPr id="17" name="Text 15"/>
+          <p:cNvPr id="19" name="Text 17"/>
           <p:cNvSpPr txBox="1"/>
           <p:nvPr/>
         </p:nvSpPr>
@@ -28195,7 +28275,7 @@
       </p:sp>
       <p:sp>
         <p:nvSpPr>
-          <p:cNvPr id="18" name="Text 16"/>
+          <p:cNvPr id="20" name="Text 18"/>
           <p:cNvSpPr txBox="1"/>
           <p:nvPr/>
         </p:nvSpPr>
@@ -28274,7 +28354,7 @@
       </p:sp>
       <p:sp>
         <p:nvSpPr>
-          <p:cNvPr id="19" name="Text 17"/>
+          <p:cNvPr id="21" name="Text 19"/>
           <p:cNvSpPr txBox="1"/>
           <p:nvPr/>
         </p:nvSpPr>
@@ -28313,7 +28393,27 @@
       </p:sp>
       <p:sp>
         <p:nvSpPr>
-          <p:cNvPr id="20" name="Text 18"/>
+          <p:cNvPr id="22" name="Shape 20"/>
+          <p:cNvSpPr/>
+          <p:nvPr/>
+        </p:nvSpPr>
+        <p:spPr>
+          <a:xfrm>
+            <a:off x="4084320" y="4405579"/>
+            <a:ext cx="64008" cy="682142"/>
+          </a:xfrm>
+          <a:prstGeom prst="rect">
+            <a:avLst/>
+          </a:prstGeom>
+          <a:solidFill>
+            <a:srgbClr val="12A566"/>
+          </a:solidFill>
+          <a:ln/>
+        </p:spPr>
+      </p:sp>
+      <p:sp>
+        <p:nvSpPr>
+          <p:cNvPr id="23" name="Text 21"/>
           <p:cNvSpPr txBox="1"/>
           <p:nvPr/>
         </p:nvSpPr>
@@ -28352,7 +28452,7 @@
       </p:sp>
       <p:sp>
         <p:nvSpPr>
-          <p:cNvPr id="21" name="Text 19"/>
+          <p:cNvPr id="24" name="Text 22"/>
           <p:cNvSpPr txBox="1"/>
           <p:nvPr/>
         </p:nvSpPr>
@@ -28431,7 +28531,7 @@
       </p:sp>
       <p:sp>
         <p:nvSpPr>
-          <p:cNvPr id="22" name="Text 20"/>
+          <p:cNvPr id="25" name="Text 23"/>
           <p:cNvSpPr txBox="1"/>
           <p:nvPr/>
         </p:nvSpPr>
@@ -28470,7 +28570,7 @@
       </p:sp>
       <p:sp>
         <p:nvSpPr>
-          <p:cNvPr id="23" name="Shape 21"/>
+          <p:cNvPr id="26" name="Shape 24"/>
           <p:cNvSpPr/>
           <p:nvPr/>
         </p:nvSpPr>
@@ -28490,7 +28590,7 @@
       </p:sp>
       <p:sp>
         <p:nvSpPr>
-          <p:cNvPr id="24" name="Text 22"/>
+          <p:cNvPr id="27" name="Text 25"/>
           <p:cNvSpPr txBox="1"/>
           <p:nvPr/>
         </p:nvSpPr>
@@ -28529,7 +28629,7 @@
       </p:sp>
       <p:sp>
         <p:nvSpPr>
-          <p:cNvPr id="25" name="Text 23"/>
+          <p:cNvPr id="28" name="Text 26"/>
           <p:cNvSpPr txBox="1"/>
           <p:nvPr/>
         </p:nvSpPr>
@@ -28608,7 +28708,7 @@
       </p:sp>
       <p:sp>
         <p:nvSpPr>
-          <p:cNvPr id="26" name="Text 24"/>
+          <p:cNvPr id="29" name="Text 27"/>
           <p:cNvSpPr txBox="1"/>
           <p:nvPr/>
         </p:nvSpPr>
@@ -28647,7 +28747,7 @@
       </p:sp>
       <p:sp>
         <p:nvSpPr>
-          <p:cNvPr id="27" name="Shape 25"/>
+          <p:cNvPr id="30" name="Shape 28"/>
           <p:cNvSpPr/>
           <p:nvPr/>
         </p:nvSpPr>
@@ -28667,7 +28767,7 @@
       </p:sp>
       <p:sp>
         <p:nvSpPr>
-          <p:cNvPr id="28" name="Text 26"/>
+          <p:cNvPr id="31" name="Text 29"/>
           <p:cNvSpPr txBox="1"/>
           <p:nvPr/>
         </p:nvSpPr>
@@ -28706,7 +28806,7 @@
       </p:sp>
       <p:sp>
         <p:nvSpPr>
-          <p:cNvPr id="29" name="Text 27"/>
+          <p:cNvPr id="32" name="Text 30"/>
           <p:cNvSpPr txBox="1"/>
           <p:nvPr/>
         </p:nvSpPr>
@@ -28745,7 +28845,7 @@
       </p:sp>
       <p:sp>
         <p:nvSpPr>
-          <p:cNvPr id="30" name="Shape 28"/>
+          <p:cNvPr id="33" name="Shape 31"/>
           <p:cNvSpPr/>
           <p:nvPr/>
         </p:nvSpPr>
@@ -28765,7 +28865,7 @@
       </p:sp>
       <p:sp>
         <p:nvSpPr>
-          <p:cNvPr id="31" name="Text 29"/>
+          <p:cNvPr id="34" name="Text 32"/>
           <p:cNvSpPr txBox="1"/>
           <p:nvPr/>
         </p:nvSpPr>
@@ -28804,7 +28904,7 @@
       </p:sp>
       <p:sp>
         <p:nvSpPr>
-          <p:cNvPr id="32" name="Text 30"/>
+          <p:cNvPr id="35" name="Text 33"/>
           <p:cNvSpPr txBox="1"/>
           <p:nvPr/>
         </p:nvSpPr>
@@ -28883,7 +28983,7 @@
       </p:sp>
       <p:sp>
         <p:nvSpPr>
-          <p:cNvPr id="33" name="Text 31"/>
+          <p:cNvPr id="36" name="Text 34"/>
           <p:cNvSpPr txBox="1"/>
           <p:nvPr/>
         </p:nvSpPr>
@@ -28922,7 +29022,7 @@
       </p:sp>
       <p:sp>
         <p:nvSpPr>
-          <p:cNvPr id="34" name="Text 32"/>
+          <p:cNvPr id="37" name="Text 35"/>
           <p:cNvSpPr txBox="1"/>
           <p:nvPr/>
         </p:nvSpPr>
@@ -28961,7 +29061,7 @@
       </p:sp>
       <p:sp>
         <p:nvSpPr>
-          <p:cNvPr id="35" name="Text 33"/>
+          <p:cNvPr id="38" name="Text 36"/>
           <p:cNvSpPr txBox="1"/>
           <p:nvPr/>
         </p:nvSpPr>
@@ -29040,7 +29140,7 @@
       </p:sp>
       <p:sp>
         <p:nvSpPr>
-          <p:cNvPr id="36" name="Text 34"/>
+          <p:cNvPr id="39" name="Text 37"/>
           <p:cNvSpPr txBox="1"/>
           <p:nvPr/>
         </p:nvSpPr>
@@ -29079,7 +29179,7 @@
       </p:sp>
       <p:sp>
         <p:nvSpPr>
-          <p:cNvPr id="37" name="Shape 35"/>
+          <p:cNvPr id="40" name="Shape 38"/>
           <p:cNvSpPr/>
           <p:nvPr/>
         </p:nvSpPr>
@@ -29099,7 +29199,7 @@
       </p:sp>
       <p:sp>
         <p:nvSpPr>
-          <p:cNvPr id="38" name="Text 36"/>
+          <p:cNvPr id="41" name="Text 39"/>
           <p:cNvSpPr txBox="1"/>
           <p:nvPr/>
         </p:nvSpPr>
@@ -29138,7 +29238,7 @@
       </p:sp>
       <p:sp>
         <p:nvSpPr>
-          <p:cNvPr id="39" name="Text 37"/>
+          <p:cNvPr id="42" name="Text 40"/>
           <p:cNvSpPr txBox="1"/>
           <p:nvPr/>
         </p:nvSpPr>
@@ -29217,7 +29317,7 @@
       </p:sp>
       <p:sp>
         <p:nvSpPr>
-          <p:cNvPr id="40" name="Text 38"/>
+          <p:cNvPr id="43" name="Text 41"/>
           <p:cNvSpPr txBox="1"/>
           <p:nvPr/>
         </p:nvSpPr>
@@ -29256,7 +29356,7 @@
       </p:sp>
       <p:sp>
         <p:nvSpPr>
-          <p:cNvPr id="41" name="Text 39"/>
+          <p:cNvPr id="44" name="Text 42"/>
           <p:cNvSpPr txBox="1"/>
           <p:nvPr/>
         </p:nvSpPr>
@@ -29295,7 +29395,7 @@
       </p:sp>
       <p:sp>
         <p:nvSpPr>
-          <p:cNvPr id="42" name="Text 40"/>
+          <p:cNvPr id="45" name="Text 43"/>
           <p:cNvSpPr txBox="1"/>
           <p:nvPr/>
         </p:nvSpPr>
@@ -29374,7 +29474,7 @@
       </p:sp>
       <p:sp>
         <p:nvSpPr>
-          <p:cNvPr id="43" name="Text 41"/>
+          <p:cNvPr id="46" name="Text 44"/>
           <p:cNvSpPr txBox="1"/>
           <p:nvPr/>
         </p:nvSpPr>
@@ -29413,7 +29513,7 @@
       </p:sp>
       <p:sp>
         <p:nvSpPr>
-          <p:cNvPr id="44" name="Shape 42"/>
+          <p:cNvPr id="47" name="Shape 45"/>
           <p:cNvSpPr/>
           <p:nvPr/>
         </p:nvSpPr>
@@ -29433,7 +29533,7 @@
       </p:sp>
       <p:sp>
         <p:nvSpPr>
-          <p:cNvPr id="45" name="Text 43"/>
+          <p:cNvPr id="48" name="Text 46"/>
           <p:cNvSpPr txBox="1"/>
           <p:nvPr/>
         </p:nvSpPr>
@@ -29472,7 +29572,7 @@
       </p:sp>
       <p:sp>
         <p:nvSpPr>
-          <p:cNvPr id="46" name="Text 44"/>
+          <p:cNvPr id="49" name="Text 47"/>
           <p:cNvSpPr txBox="1"/>
           <p:nvPr/>
         </p:nvSpPr>
@@ -29551,7 +29651,7 @@
       </p:sp>
       <p:sp>
         <p:nvSpPr>
-          <p:cNvPr id="47" name="Text 45"/>
+          <p:cNvPr id="50" name="Text 48"/>
           <p:cNvSpPr txBox="1"/>
           <p:nvPr/>
         </p:nvSpPr>
@@ -29590,7 +29690,7 @@
       </p:sp>
       <p:sp>
         <p:nvSpPr>
-          <p:cNvPr id="48" name="Shape 46"/>
+          <p:cNvPr id="51" name="Shape 49"/>
           <p:cNvSpPr/>
           <p:nvPr/>
         </p:nvSpPr>
@@ -29610,7 +29710,7 @@
       </p:sp>
       <p:sp>
         <p:nvSpPr>
-          <p:cNvPr id="49" name="Text 47"/>
+          <p:cNvPr id="52" name="Text 50"/>
           <p:cNvSpPr txBox="1"/>
           <p:nvPr/>
         </p:nvSpPr>
@@ -29649,7 +29749,7 @@
       </p:sp>
       <p:sp>
         <p:nvSpPr>
-          <p:cNvPr id="50" name="Text 48"/>
+          <p:cNvPr id="53" name="Text 51"/>
           <p:cNvSpPr txBox="1"/>
           <p:nvPr/>
         </p:nvSpPr>
@@ -29688,7 +29788,7 @@
       </p:sp>
       <p:sp>
         <p:nvSpPr>
-          <p:cNvPr id="51" name="Shape 49"/>
+          <p:cNvPr id="54" name="Shape 52"/>
           <p:cNvSpPr/>
           <p:nvPr/>
         </p:nvSpPr>
@@ -29708,7 +29808,7 @@
       </p:sp>
       <p:sp>
         <p:nvSpPr>
-          <p:cNvPr id="52" name="Text 50"/>
+          <p:cNvPr id="55" name="Text 53"/>
           <p:cNvSpPr txBox="1"/>
           <p:nvPr/>
         </p:nvSpPr>
@@ -29747,7 +29847,7 @@
       </p:sp>
       <p:sp>
         <p:nvSpPr>
-          <p:cNvPr id="53" name="Text 51"/>
+          <p:cNvPr id="56" name="Text 54"/>
           <p:cNvSpPr txBox="1"/>
           <p:nvPr/>
         </p:nvSpPr>
@@ -29826,7 +29926,7 @@
       </p:sp>
       <p:sp>
         <p:nvSpPr>
-          <p:cNvPr id="54" name="Text 52"/>
+          <p:cNvPr id="57" name="Text 55"/>
           <p:cNvSpPr txBox="1"/>
           <p:nvPr/>
         </p:nvSpPr>
@@ -29865,7 +29965,27 @@
       </p:sp>
       <p:sp>
         <p:nvSpPr>
-          <p:cNvPr id="55" name="Text 53"/>
+          <p:cNvPr id="58" name="Shape 56"/>
+          <p:cNvSpPr/>
+          <p:nvPr/>
+        </p:nvSpPr>
+        <p:spPr>
+          <a:xfrm>
+            <a:off x="11466576" y="2894990"/>
+            <a:ext cx="64008" cy="682142"/>
+          </a:xfrm>
+          <a:prstGeom prst="rect">
+            <a:avLst/>
+          </a:prstGeom>
+          <a:solidFill>
+            <a:srgbClr val="12A566"/>
+          </a:solidFill>
+          <a:ln/>
+        </p:spPr>
+      </p:sp>
+      <p:sp>
+        <p:nvSpPr>
+          <p:cNvPr id="59" name="Text 57"/>
           <p:cNvSpPr txBox="1"/>
           <p:nvPr/>
         </p:nvSpPr>
@@ -29904,7 +30024,7 @@
       </p:sp>
       <p:sp>
         <p:nvSpPr>
-          <p:cNvPr id="56" name="Text 54"/>
+          <p:cNvPr id="60" name="Text 58"/>
           <p:cNvSpPr txBox="1"/>
           <p:nvPr/>
         </p:nvSpPr>
@@ -29983,7 +30103,7 @@
       </p:sp>
       <p:sp>
         <p:nvSpPr>
-          <p:cNvPr id="57" name="Text 55"/>
+          <p:cNvPr id="61" name="Text 59"/>
           <p:cNvSpPr txBox="1"/>
           <p:nvPr/>
         </p:nvSpPr>
@@ -30022,7 +30142,7 @@
       </p:sp>
       <p:sp>
         <p:nvSpPr>
-          <p:cNvPr id="58" name="Shape 56"/>
+          <p:cNvPr id="62" name="Shape 60"/>
           <p:cNvSpPr/>
           <p:nvPr/>
         </p:nvSpPr>
@@ -30042,7 +30162,7 @@
       </p:sp>
       <p:sp>
         <p:nvSpPr>
-          <p:cNvPr id="59" name="Text 57"/>
+          <p:cNvPr id="63" name="Text 61"/>
           <p:cNvSpPr txBox="1"/>
           <p:nvPr/>
         </p:nvSpPr>
@@ -30081,7 +30201,7 @@
       </p:sp>
       <p:sp>
         <p:nvSpPr>
-          <p:cNvPr id="60" name="Text 58"/>
+          <p:cNvPr id="64" name="Text 62"/>
           <p:cNvSpPr txBox="1"/>
           <p:nvPr/>
         </p:nvSpPr>
@@ -30160,7 +30280,7 @@
       </p:sp>
       <p:sp>
         <p:nvSpPr>
-          <p:cNvPr id="61" name="Text 59"/>
+          <p:cNvPr id="65" name="Text 63"/>
           <p:cNvSpPr txBox="1"/>
           <p:nvPr/>
         </p:nvSpPr>
@@ -30199,7 +30319,27 @@
       </p:sp>
       <p:sp>
         <p:nvSpPr>
-          <p:cNvPr id="62" name="Text 60"/>
+          <p:cNvPr id="66" name="Shape 64"/>
+          <p:cNvSpPr/>
+          <p:nvPr/>
+        </p:nvSpPr>
+        <p:spPr>
+          <a:xfrm>
+            <a:off x="11466576" y="4405579"/>
+            <a:ext cx="64008" cy="682142"/>
+          </a:xfrm>
+          <a:prstGeom prst="rect">
+            <a:avLst/>
+          </a:prstGeom>
+          <a:solidFill>
+            <a:srgbClr val="12A566"/>
+          </a:solidFill>
+          <a:ln/>
+        </p:spPr>
+      </p:sp>
+      <p:sp>
+        <p:nvSpPr>
+          <p:cNvPr id="67" name="Text 65"/>
           <p:cNvSpPr txBox="1"/>
           <p:nvPr/>
         </p:nvSpPr>
@@ -30238,7 +30378,7 @@
       </p:sp>
       <p:sp>
         <p:nvSpPr>
-          <p:cNvPr id="63" name="Text 61"/>
+          <p:cNvPr id="68" name="Text 66"/>
           <p:cNvSpPr txBox="1"/>
           <p:nvPr/>
         </p:nvSpPr>
@@ -30317,7 +30457,7 @@
       </p:sp>
       <p:sp>
         <p:nvSpPr>
-          <p:cNvPr id="64" name="Text 62"/>
+          <p:cNvPr id="69" name="Text 67"/>
           <p:cNvSpPr txBox="1"/>
           <p:nvPr/>
         </p:nvSpPr>
@@ -30356,7 +30496,7 @@
       </p:sp>
       <p:sp>
         <p:nvSpPr>
-          <p:cNvPr id="65" name="Shape 63"/>
+          <p:cNvPr id="70" name="Shape 68"/>
           <p:cNvSpPr/>
           <p:nvPr/>
         </p:nvSpPr>
@@ -30376,7 +30516,27 @@
       </p:sp>
       <p:sp>
         <p:nvSpPr>
-          <p:cNvPr id="66" name="Text 64"/>
+          <p:cNvPr id="71" name="Shape 69"/>
+          <p:cNvSpPr/>
+          <p:nvPr/>
+        </p:nvSpPr>
+        <p:spPr>
+          <a:xfrm>
+            <a:off x="11466576" y="5160874"/>
+            <a:ext cx="64008" cy="682142"/>
+          </a:xfrm>
+          <a:prstGeom prst="rect">
+            <a:avLst/>
+          </a:prstGeom>
+          <a:solidFill>
+            <a:srgbClr val="12A566"/>
+          </a:solidFill>
+          <a:ln/>
+        </p:spPr>
+      </p:sp>
+      <p:sp>
+        <p:nvSpPr>
+          <p:cNvPr id="72" name="Text 70"/>
           <p:cNvSpPr txBox="1"/>
           <p:nvPr/>
         </p:nvSpPr>
@@ -30415,7 +30575,7 @@
       </p:sp>
       <p:sp>
         <p:nvSpPr>
-          <p:cNvPr id="67" name="Text 65"/>
+          <p:cNvPr id="73" name="Text 71"/>
           <p:cNvSpPr txBox="1"/>
           <p:nvPr/>
         </p:nvSpPr>
@@ -30494,7 +30654,7 @@
       </p:sp>
       <p:sp>
         <p:nvSpPr>
-          <p:cNvPr id="68" name="Text 66"/>
+          <p:cNvPr id="74" name="Text 72"/>
           <p:cNvSpPr txBox="1"/>
           <p:nvPr/>
         </p:nvSpPr>
@@ -30533,7 +30693,7 @@
       </p:sp>
       <p:sp>
         <p:nvSpPr>
-          <p:cNvPr id="69" name="Shape 67"/>
+          <p:cNvPr id="75" name="Shape 73"/>
           <p:cNvSpPr/>
           <p:nvPr/>
         </p:nvSpPr>
@@ -30553,7 +30713,7 @@
       </p:sp>
       <p:sp>
         <p:nvSpPr>
-          <p:cNvPr id="70" name="Text 68"/>
+          <p:cNvPr id="76" name="Text 74"/>
           <p:cNvSpPr txBox="1"/>
           <p:nvPr/>
         </p:nvSpPr>
@@ -37094,7 +37254,27 @@
       </p:sp>
       <p:sp>
         <p:nvSpPr>
-          <p:cNvPr id="17" name="Text 15"/>
+          <p:cNvPr id="17" name="Shape 15"/>
+          <p:cNvSpPr/>
+          <p:nvPr/>
+        </p:nvSpPr>
+        <p:spPr>
+          <a:xfrm>
+            <a:off x="4084320" y="3650285"/>
+            <a:ext cx="64008" cy="682142"/>
+          </a:xfrm>
+          <a:prstGeom prst="rect">
+            <a:avLst/>
+          </a:prstGeom>
+          <a:solidFill>
+            <a:srgbClr val="12A566"/>
+          </a:solidFill>
+          <a:ln/>
+        </p:spPr>
+      </p:sp>
+      <p:sp>
+        <p:nvSpPr>
+          <p:cNvPr id="18" name="Text 16"/>
           <p:cNvSpPr txBox="1"/>
           <p:nvPr/>
         </p:nvSpPr>
@@ -37133,7 +37313,7 @@
       </p:sp>
       <p:sp>
         <p:nvSpPr>
-          <p:cNvPr id="18" name="Text 16"/>
+          <p:cNvPr id="19" name="Text 17"/>
           <p:cNvSpPr txBox="1"/>
           <p:nvPr/>
         </p:nvSpPr>
@@ -37212,7 +37392,7 @@
       </p:sp>
       <p:sp>
         <p:nvSpPr>
-          <p:cNvPr id="19" name="Text 17"/>
+          <p:cNvPr id="20" name="Text 18"/>
           <p:cNvSpPr txBox="1"/>
           <p:nvPr/>
         </p:nvSpPr>
@@ -37251,7 +37431,27 @@
       </p:sp>
       <p:sp>
         <p:nvSpPr>
-          <p:cNvPr id="20" name="Text 18"/>
+          <p:cNvPr id="21" name="Shape 19"/>
+          <p:cNvSpPr/>
+          <p:nvPr/>
+        </p:nvSpPr>
+        <p:spPr>
+          <a:xfrm>
+            <a:off x="4084320" y="4405579"/>
+            <a:ext cx="64008" cy="682142"/>
+          </a:xfrm>
+          <a:prstGeom prst="rect">
+            <a:avLst/>
+          </a:prstGeom>
+          <a:solidFill>
+            <a:srgbClr val="12A566"/>
+          </a:solidFill>
+          <a:ln/>
+        </p:spPr>
+      </p:sp>
+      <p:sp>
+        <p:nvSpPr>
+          <p:cNvPr id="22" name="Text 20"/>
           <p:cNvSpPr txBox="1"/>
           <p:nvPr/>
         </p:nvSpPr>
@@ -37290,7 +37490,7 @@
       </p:sp>
       <p:sp>
         <p:nvSpPr>
-          <p:cNvPr id="21" name="Text 19"/>
+          <p:cNvPr id="23" name="Text 21"/>
           <p:cNvSpPr txBox="1"/>
           <p:nvPr/>
         </p:nvSpPr>
@@ -37369,7 +37569,7 @@
       </p:sp>
       <p:sp>
         <p:nvSpPr>
-          <p:cNvPr id="22" name="Text 20"/>
+          <p:cNvPr id="24" name="Text 22"/>
           <p:cNvSpPr txBox="1"/>
           <p:nvPr/>
         </p:nvSpPr>
@@ -37408,7 +37608,7 @@
       </p:sp>
       <p:sp>
         <p:nvSpPr>
-          <p:cNvPr id="23" name="Shape 21"/>
+          <p:cNvPr id="25" name="Shape 23"/>
           <p:cNvSpPr/>
           <p:nvPr/>
         </p:nvSpPr>
@@ -37428,7 +37628,7 @@
       </p:sp>
       <p:sp>
         <p:nvSpPr>
-          <p:cNvPr id="24" name="Text 22"/>
+          <p:cNvPr id="26" name="Text 24"/>
           <p:cNvSpPr txBox="1"/>
           <p:nvPr/>
         </p:nvSpPr>
@@ -37467,7 +37667,7 @@
       </p:sp>
       <p:sp>
         <p:nvSpPr>
-          <p:cNvPr id="25" name="Text 23"/>
+          <p:cNvPr id="27" name="Text 25"/>
           <p:cNvSpPr txBox="1"/>
           <p:nvPr/>
         </p:nvSpPr>
@@ -37546,7 +37746,7 @@
       </p:sp>
       <p:sp>
         <p:nvSpPr>
-          <p:cNvPr id="26" name="Text 24"/>
+          <p:cNvPr id="28" name="Text 26"/>
           <p:cNvSpPr txBox="1"/>
           <p:nvPr/>
         </p:nvSpPr>
@@ -37585,7 +37785,7 @@
       </p:sp>
       <p:sp>
         <p:nvSpPr>
-          <p:cNvPr id="27" name="Shape 25"/>
+          <p:cNvPr id="29" name="Shape 27"/>
           <p:cNvSpPr/>
           <p:nvPr/>
         </p:nvSpPr>
@@ -37605,7 +37805,7 @@
       </p:sp>
       <p:sp>
         <p:nvSpPr>
-          <p:cNvPr id="28" name="Text 26"/>
+          <p:cNvPr id="30" name="Text 28"/>
           <p:cNvSpPr txBox="1"/>
           <p:nvPr/>
         </p:nvSpPr>
@@ -37644,7 +37844,7 @@
       </p:sp>
       <p:sp>
         <p:nvSpPr>
-          <p:cNvPr id="29" name="Text 27"/>
+          <p:cNvPr id="31" name="Text 29"/>
           <p:cNvSpPr txBox="1"/>
           <p:nvPr/>
         </p:nvSpPr>
@@ -37683,7 +37883,7 @@
       </p:sp>
       <p:sp>
         <p:nvSpPr>
-          <p:cNvPr id="30" name="Shape 28"/>
+          <p:cNvPr id="32" name="Shape 30"/>
           <p:cNvSpPr/>
           <p:nvPr/>
         </p:nvSpPr>
@@ -37703,7 +37903,7 @@
       </p:sp>
       <p:sp>
         <p:nvSpPr>
-          <p:cNvPr id="31" name="Text 29"/>
+          <p:cNvPr id="33" name="Text 31"/>
           <p:cNvSpPr txBox="1"/>
           <p:nvPr/>
         </p:nvSpPr>
@@ -37742,7 +37942,7 @@
       </p:sp>
       <p:sp>
         <p:nvSpPr>
-          <p:cNvPr id="32" name="Text 30"/>
+          <p:cNvPr id="34" name="Text 32"/>
           <p:cNvSpPr txBox="1"/>
           <p:nvPr/>
         </p:nvSpPr>
@@ -37821,7 +38021,7 @@
       </p:sp>
       <p:sp>
         <p:nvSpPr>
-          <p:cNvPr id="33" name="Text 31"/>
+          <p:cNvPr id="35" name="Text 33"/>
           <p:cNvSpPr txBox="1"/>
           <p:nvPr/>
         </p:nvSpPr>
@@ -37860,7 +38060,7 @@
       </p:sp>
       <p:sp>
         <p:nvSpPr>
-          <p:cNvPr id="34" name="Text 32"/>
+          <p:cNvPr id="36" name="Text 34"/>
           <p:cNvSpPr txBox="1"/>
           <p:nvPr/>
         </p:nvSpPr>
@@ -37899,7 +38099,7 @@
       </p:sp>
       <p:sp>
         <p:nvSpPr>
-          <p:cNvPr id="35" name="Text 33"/>
+          <p:cNvPr id="37" name="Text 35"/>
           <p:cNvSpPr txBox="1"/>
           <p:nvPr/>
         </p:nvSpPr>
@@ -37978,7 +38178,7 @@
       </p:sp>
       <p:sp>
         <p:nvSpPr>
-          <p:cNvPr id="36" name="Text 34"/>
+          <p:cNvPr id="38" name="Text 36"/>
           <p:cNvSpPr txBox="1"/>
           <p:nvPr/>
         </p:nvSpPr>
@@ -38017,7 +38217,7 @@
       </p:sp>
       <p:sp>
         <p:nvSpPr>
-          <p:cNvPr id="37" name="Shape 35"/>
+          <p:cNvPr id="39" name="Shape 37"/>
           <p:cNvSpPr/>
           <p:nvPr/>
         </p:nvSpPr>
@@ -38037,7 +38237,7 @@
       </p:sp>
       <p:sp>
         <p:nvSpPr>
-          <p:cNvPr id="38" name="Text 36"/>
+          <p:cNvPr id="40" name="Text 38"/>
           <p:cNvSpPr txBox="1"/>
           <p:nvPr/>
         </p:nvSpPr>
@@ -38076,7 +38276,7 @@
       </p:sp>
       <p:sp>
         <p:nvSpPr>
-          <p:cNvPr id="39" name="Text 37"/>
+          <p:cNvPr id="41" name="Text 39"/>
           <p:cNvSpPr txBox="1"/>
           <p:nvPr/>
         </p:nvSpPr>
@@ -38155,7 +38355,7 @@
       </p:sp>
       <p:sp>
         <p:nvSpPr>
-          <p:cNvPr id="40" name="Text 38"/>
+          <p:cNvPr id="42" name="Text 40"/>
           <p:cNvSpPr txBox="1"/>
           <p:nvPr/>
         </p:nvSpPr>
@@ -38194,7 +38394,7 @@
       </p:sp>
       <p:sp>
         <p:nvSpPr>
-          <p:cNvPr id="41" name="Text 39"/>
+          <p:cNvPr id="43" name="Text 41"/>
           <p:cNvSpPr txBox="1"/>
           <p:nvPr/>
         </p:nvSpPr>
@@ -38233,7 +38433,7 @@
       </p:sp>
       <p:sp>
         <p:nvSpPr>
-          <p:cNvPr id="42" name="Text 40"/>
+          <p:cNvPr id="44" name="Text 42"/>
           <p:cNvSpPr txBox="1"/>
           <p:nvPr/>
         </p:nvSpPr>
@@ -38312,7 +38512,7 @@
       </p:sp>
       <p:sp>
         <p:nvSpPr>
-          <p:cNvPr id="43" name="Text 41"/>
+          <p:cNvPr id="45" name="Text 43"/>
           <p:cNvSpPr txBox="1"/>
           <p:nvPr/>
         </p:nvSpPr>
@@ -38351,7 +38551,7 @@
       </p:sp>
       <p:sp>
         <p:nvSpPr>
-          <p:cNvPr id="44" name="Shape 42"/>
+          <p:cNvPr id="46" name="Shape 44"/>
           <p:cNvSpPr/>
           <p:nvPr/>
         </p:nvSpPr>
@@ -38371,7 +38571,7 @@
       </p:sp>
       <p:sp>
         <p:nvSpPr>
-          <p:cNvPr id="45" name="Text 43"/>
+          <p:cNvPr id="47" name="Text 45"/>
           <p:cNvSpPr txBox="1"/>
           <p:nvPr/>
         </p:nvSpPr>
@@ -38410,7 +38610,7 @@
       </p:sp>
       <p:sp>
         <p:nvSpPr>
-          <p:cNvPr id="46" name="Text 44"/>
+          <p:cNvPr id="48" name="Text 46"/>
           <p:cNvSpPr txBox="1"/>
           <p:nvPr/>
         </p:nvSpPr>
@@ -38489,7 +38689,7 @@
       </p:sp>
       <p:sp>
         <p:nvSpPr>
-          <p:cNvPr id="47" name="Text 45"/>
+          <p:cNvPr id="49" name="Text 47"/>
           <p:cNvSpPr txBox="1"/>
           <p:nvPr/>
         </p:nvSpPr>
@@ -38528,7 +38728,7 @@
       </p:sp>
       <p:sp>
         <p:nvSpPr>
-          <p:cNvPr id="48" name="Shape 46"/>
+          <p:cNvPr id="50" name="Shape 48"/>
           <p:cNvSpPr/>
           <p:nvPr/>
         </p:nvSpPr>
@@ -38548,7 +38748,7 @@
       </p:sp>
       <p:sp>
         <p:nvSpPr>
-          <p:cNvPr id="49" name="Text 47"/>
+          <p:cNvPr id="51" name="Text 49"/>
           <p:cNvSpPr txBox="1"/>
           <p:nvPr/>
         </p:nvSpPr>
@@ -38587,7 +38787,7 @@
       </p:sp>
       <p:sp>
         <p:nvSpPr>
-          <p:cNvPr id="50" name="Text 48"/>
+          <p:cNvPr id="52" name="Text 50"/>
           <p:cNvSpPr txBox="1"/>
           <p:nvPr/>
         </p:nvSpPr>
@@ -38626,7 +38826,7 @@
       </p:sp>
       <p:sp>
         <p:nvSpPr>
-          <p:cNvPr id="51" name="Shape 49"/>
+          <p:cNvPr id="53" name="Shape 51"/>
           <p:cNvSpPr/>
           <p:nvPr/>
         </p:nvSpPr>
@@ -38646,7 +38846,27 @@
       </p:sp>
       <p:sp>
         <p:nvSpPr>
-          <p:cNvPr id="52" name="Text 50"/>
+          <p:cNvPr id="54" name="Shape 52"/>
+          <p:cNvSpPr/>
+          <p:nvPr/>
+        </p:nvSpPr>
+        <p:spPr>
+          <a:xfrm>
+            <a:off x="11466576" y="2139696"/>
+            <a:ext cx="64008" cy="682142"/>
+          </a:xfrm>
+          <a:prstGeom prst="rect">
+            <a:avLst/>
+          </a:prstGeom>
+          <a:solidFill>
+            <a:srgbClr val="12A566"/>
+          </a:solidFill>
+          <a:ln/>
+        </p:spPr>
+      </p:sp>
+      <p:sp>
+        <p:nvSpPr>
+          <p:cNvPr id="55" name="Text 53"/>
           <p:cNvSpPr txBox="1"/>
           <p:nvPr/>
         </p:nvSpPr>
@@ -38685,7 +38905,7 @@
       </p:sp>
       <p:sp>
         <p:nvSpPr>
-          <p:cNvPr id="53" name="Text 51"/>
+          <p:cNvPr id="56" name="Text 54"/>
           <p:cNvSpPr txBox="1"/>
           <p:nvPr/>
         </p:nvSpPr>
@@ -38764,7 +38984,7 @@
       </p:sp>
       <p:sp>
         <p:nvSpPr>
-          <p:cNvPr id="54" name="Text 52"/>
+          <p:cNvPr id="57" name="Text 55"/>
           <p:cNvSpPr txBox="1"/>
           <p:nvPr/>
         </p:nvSpPr>
@@ -38803,7 +39023,7 @@
       </p:sp>
       <p:sp>
         <p:nvSpPr>
-          <p:cNvPr id="55" name="Text 53"/>
+          <p:cNvPr id="58" name="Text 56"/>
           <p:cNvSpPr txBox="1"/>
           <p:nvPr/>
         </p:nvSpPr>
@@ -38842,7 +39062,7 @@
       </p:sp>
       <p:sp>
         <p:nvSpPr>
-          <p:cNvPr id="56" name="Text 54"/>
+          <p:cNvPr id="59" name="Text 57"/>
           <p:cNvSpPr txBox="1"/>
           <p:nvPr/>
         </p:nvSpPr>
@@ -38921,7 +39141,7 @@
       </p:sp>
       <p:sp>
         <p:nvSpPr>
-          <p:cNvPr id="57" name="Text 55"/>
+          <p:cNvPr id="60" name="Text 58"/>
           <p:cNvSpPr txBox="1"/>
           <p:nvPr/>
         </p:nvSpPr>
@@ -38960,7 +39180,7 @@
       </p:sp>
       <p:sp>
         <p:nvSpPr>
-          <p:cNvPr id="58" name="Shape 56"/>
+          <p:cNvPr id="61" name="Shape 59"/>
           <p:cNvSpPr/>
           <p:nvPr/>
         </p:nvSpPr>
@@ -38980,7 +39200,7 @@
       </p:sp>
       <p:sp>
         <p:nvSpPr>
-          <p:cNvPr id="59" name="Text 57"/>
+          <p:cNvPr id="62" name="Text 60"/>
           <p:cNvSpPr txBox="1"/>
           <p:nvPr/>
         </p:nvSpPr>
@@ -39019,7 +39239,7 @@
       </p:sp>
       <p:sp>
         <p:nvSpPr>
-          <p:cNvPr id="60" name="Text 58"/>
+          <p:cNvPr id="63" name="Text 61"/>
           <p:cNvSpPr txBox="1"/>
           <p:nvPr/>
         </p:nvSpPr>
@@ -39098,7 +39318,7 @@
       </p:sp>
       <p:sp>
         <p:nvSpPr>
-          <p:cNvPr id="61" name="Text 59"/>
+          <p:cNvPr id="64" name="Text 62"/>
           <p:cNvSpPr txBox="1"/>
           <p:nvPr/>
         </p:nvSpPr>
@@ -39137,7 +39357,27 @@
       </p:sp>
       <p:sp>
         <p:nvSpPr>
-          <p:cNvPr id="62" name="Text 60"/>
+          <p:cNvPr id="65" name="Shape 63"/>
+          <p:cNvSpPr/>
+          <p:nvPr/>
+        </p:nvSpPr>
+        <p:spPr>
+          <a:xfrm>
+            <a:off x="11466576" y="4405579"/>
+            <a:ext cx="64008" cy="682142"/>
+          </a:xfrm>
+          <a:prstGeom prst="rect">
+            <a:avLst/>
+          </a:prstGeom>
+          <a:solidFill>
+            <a:srgbClr val="12A566"/>
+          </a:solidFill>
+          <a:ln/>
+        </p:spPr>
+      </p:sp>
+      <p:sp>
+        <p:nvSpPr>
+          <p:cNvPr id="66" name="Text 64"/>
           <p:cNvSpPr txBox="1"/>
           <p:nvPr/>
         </p:nvSpPr>
@@ -39176,7 +39416,7 @@
       </p:sp>
       <p:sp>
         <p:nvSpPr>
-          <p:cNvPr id="63" name="Text 61"/>
+          <p:cNvPr id="67" name="Text 65"/>
           <p:cNvSpPr txBox="1"/>
           <p:nvPr/>
         </p:nvSpPr>
@@ -39255,7 +39495,7 @@
       </p:sp>
       <p:sp>
         <p:nvSpPr>
-          <p:cNvPr id="64" name="Text 62"/>
+          <p:cNvPr id="68" name="Text 66"/>
           <p:cNvSpPr txBox="1"/>
           <p:nvPr/>
         </p:nvSpPr>
@@ -39294,7 +39534,7 @@
       </p:sp>
       <p:sp>
         <p:nvSpPr>
-          <p:cNvPr id="65" name="Shape 63"/>
+          <p:cNvPr id="69" name="Shape 67"/>
           <p:cNvSpPr/>
           <p:nvPr/>
         </p:nvSpPr>
@@ -39314,7 +39554,7 @@
       </p:sp>
       <p:sp>
         <p:nvSpPr>
-          <p:cNvPr id="66" name="Text 64"/>
+          <p:cNvPr id="70" name="Text 68"/>
           <p:cNvSpPr txBox="1"/>
           <p:nvPr/>
         </p:nvSpPr>
@@ -39353,7 +39593,7 @@
       </p:sp>
       <p:sp>
         <p:nvSpPr>
-          <p:cNvPr id="67" name="Text 65"/>
+          <p:cNvPr id="71" name="Text 69"/>
           <p:cNvSpPr txBox="1"/>
           <p:nvPr/>
         </p:nvSpPr>
@@ -39432,7 +39672,7 @@
       </p:sp>
       <p:sp>
         <p:nvSpPr>
-          <p:cNvPr id="68" name="Text 66"/>
+          <p:cNvPr id="72" name="Text 70"/>
           <p:cNvSpPr txBox="1"/>
           <p:nvPr/>
         </p:nvSpPr>
@@ -39471,7 +39711,7 @@
       </p:sp>
       <p:sp>
         <p:nvSpPr>
-          <p:cNvPr id="69" name="Shape 67"/>
+          <p:cNvPr id="73" name="Shape 71"/>
           <p:cNvSpPr/>
           <p:nvPr/>
         </p:nvSpPr>
@@ -39491,7 +39731,7 @@
       </p:sp>
       <p:sp>
         <p:nvSpPr>
-          <p:cNvPr id="70" name="Text 68"/>
+          <p:cNvPr id="74" name="Text 72"/>
           <p:cNvSpPr txBox="1"/>
           <p:nvPr/>
         </p:nvSpPr>

--- a/day2-deck/decks/Opcode Benchmarks - House Style.pptx
+++ b/day2-deck/decks/Opcode Benchmarks - House Style.pptx
@@ -9918,7 +9918,7 @@
                 <a:ea typeface="Inter" pitchFamily="34" charset="-122"/>
                 <a:cs typeface="Inter" pitchFamily="34" charset="-120"/>
               </a:rPr>
-              <a:t>Jan–Sep 2026 vs Jan–Sep 2025</a:t>
+              <a:t>Jan–Sep, this year vs last</a:t>
             </a:r>
             <a:endParaRPr lang="en-US" sz="1200" dirty="0"/>
           </a:p>
@@ -10861,7 +10861,7 @@
                 <a:ea typeface="Inter" pitchFamily="34" charset="-122"/>
                 <a:cs typeface="Inter" pitchFamily="34" charset="-120"/>
               </a:rPr>
-              <a:t>Jan–Sep 2026 vs Jan–Sep 2025</a:t>
+              <a:t>Jan–Sep, this year vs last</a:t>
             </a:r>
             <a:endParaRPr lang="en-US" sz="1200" dirty="0"/>
           </a:p>
@@ -11804,7 +11804,7 @@
                 <a:ea typeface="Inter" pitchFamily="34" charset="-122"/>
                 <a:cs typeface="Inter" pitchFamily="34" charset="-120"/>
               </a:rPr>
-              <a:t>Jul–Sep vs Jan–Mar 2026</a:t>
+              <a:t>Jul–Sep vs Jan–Mar this year</a:t>
             </a:r>
             <a:endParaRPr lang="en-US" sz="1200" dirty="0"/>
           </a:p>
@@ -18856,7 +18856,7 @@
                 <a:ea typeface="Inter" pitchFamily="34" charset="-122"/>
                 <a:cs typeface="Inter" pitchFamily="34" charset="-120"/>
               </a:rPr>
-              <a:t>Jan–Sep 2026 vs Jan–Sep 2025</a:t>
+              <a:t>Jan–Sep, this year vs last</a:t>
             </a:r>
             <a:endParaRPr lang="en-US" sz="1200" dirty="0"/>
           </a:p>
@@ -19819,7 +19819,7 @@
                 <a:ea typeface="Inter" pitchFamily="34" charset="-122"/>
                 <a:cs typeface="Inter" pitchFamily="34" charset="-120"/>
               </a:rPr>
-              <a:t>Jan–Sep 2026 vs Jan–Sep 2025</a:t>
+              <a:t>Jan–Sep, this year vs last</a:t>
             </a:r>
             <a:endParaRPr lang="en-US" sz="1200" dirty="0"/>
           </a:p>
@@ -20762,7 +20762,7 @@
                 <a:ea typeface="Inter" pitchFamily="34" charset="-122"/>
                 <a:cs typeface="Inter" pitchFamily="34" charset="-120"/>
               </a:rPr>
-              <a:t>Jul–Sep vs Jan–Mar 2026</a:t>
+              <a:t>Jul–Sep vs Jan–Mar this year</a:t>
             </a:r>
             <a:endParaRPr lang="en-US" sz="1200" dirty="0"/>
           </a:p>
@@ -27834,7 +27834,7 @@
                 <a:ea typeface="Inter" pitchFamily="34" charset="-122"/>
                 <a:cs typeface="Inter" pitchFamily="34" charset="-120"/>
               </a:rPr>
-              <a:t>Jan–Sep 2026 vs Jan–Sep 2025</a:t>
+              <a:t>Jan–Sep, this year vs last</a:t>
             </a:r>
             <a:endParaRPr lang="en-US" sz="1200" dirty="0"/>
           </a:p>
@@ -28837,7 +28837,7 @@
                 <a:ea typeface="Inter" pitchFamily="34" charset="-122"/>
                 <a:cs typeface="Inter" pitchFamily="34" charset="-120"/>
               </a:rPr>
-              <a:t>Jan–Sep 2026 vs Jan–Sep 2025</a:t>
+              <a:t>Jan–Sep, this year vs last</a:t>
             </a:r>
             <a:endParaRPr lang="en-US" sz="1200" dirty="0"/>
           </a:p>
@@ -29780,7 +29780,7 @@
                 <a:ea typeface="Inter" pitchFamily="34" charset="-122"/>
                 <a:cs typeface="Inter" pitchFamily="34" charset="-120"/>
               </a:rPr>
-              <a:t>Jul–Sep vs Jan–Mar 2026</a:t>
+              <a:t>Jul–Sep vs Jan–Mar this year</a:t>
             </a:r>
             <a:endParaRPr lang="en-US" sz="1200" dirty="0"/>
           </a:p>
@@ -36892,7 +36892,7 @@
                 <a:ea typeface="Inter" pitchFamily="34" charset="-122"/>
                 <a:cs typeface="Inter" pitchFamily="34" charset="-120"/>
               </a:rPr>
-              <a:t>Jan–Sep 2026 vs Jan–Sep 2025</a:t>
+              <a:t>Jan–Sep, this year vs last</a:t>
             </a:r>
             <a:endParaRPr lang="en-US" sz="1200" dirty="0"/>
           </a:p>
@@ -37875,7 +37875,7 @@
                 <a:ea typeface="Inter" pitchFamily="34" charset="-122"/>
                 <a:cs typeface="Inter" pitchFamily="34" charset="-120"/>
               </a:rPr>
-              <a:t>Jan–Sep 2026 vs Jan–Sep 2025</a:t>
+              <a:t>Jan–Sep, this year vs last</a:t>
             </a:r>
             <a:endParaRPr lang="en-US" sz="1200" dirty="0"/>
           </a:p>
@@ -38818,7 +38818,7 @@
                 <a:ea typeface="Inter" pitchFamily="34" charset="-122"/>
                 <a:cs typeface="Inter" pitchFamily="34" charset="-120"/>
               </a:rPr>
-              <a:t>Jul–Sep vs Jan–Mar 2026</a:t>
+              <a:t>Jul–Sep vs Jan–Mar this year</a:t>
             </a:r>
             <a:endParaRPr lang="en-US" sz="1200" dirty="0"/>
           </a:p>

--- a/day2-deck/decks/Opcode Benchmarks - House Style.pptx
+++ b/day2-deck/decks/Opcode Benchmarks - House Style.pptx
@@ -363,8 +363,8 @@
         <c:axId val="2094734552"/>
         <c:scaling>
           <c:orientation val="minMax"/>
-          <c:max val="18"/>
-          <c:min val="8"/>
+          <c:max val="16"/>
+          <c:min val="10"/>
         </c:scaling>
         <c:delete val="0"/>
         <c:axPos val="l"/>
@@ -676,8 +676,8 @@
         <c:axId val="2094734552"/>
         <c:scaling>
           <c:orientation val="minMax"/>
-          <c:max val="20"/>
-          <c:min val="0"/>
+          <c:max val="16"/>
+          <c:min val="4"/>
         </c:scaling>
         <c:delete val="0"/>
         <c:axPos val="l"/>
@@ -710,7 +710,7 @@
         <c:crossAx val="2094734554"/>
         <c:crosses val="autoZero"/>
         <c:crossBetween val="between"/>
-        <c:majorUnit val="5"/>
+        <c:majorUnit val="2"/>
       </c:valAx>
       <c:spPr>
         <a:solidFill>
@@ -988,8 +988,8 @@
         <c:axId val="2094734552"/>
         <c:scaling>
           <c:orientation val="minMax"/>
-          <c:max val="20"/>
-          <c:min val="0"/>
+          <c:max val="16"/>
+          <c:min val="4"/>
         </c:scaling>
         <c:delete val="0"/>
         <c:axPos val="l"/>
@@ -1022,7 +1022,7 @@
         <c:crossAx val="2094734554"/>
         <c:crosses val="autoZero"/>
         <c:crossBetween val="between"/>
-        <c:majorUnit val="5"/>
+        <c:majorUnit val="2"/>
       </c:valAx>
       <c:spPr>
         <a:solidFill>
@@ -1302,8 +1302,8 @@
         <c:axId val="2094734552"/>
         <c:scaling>
           <c:orientation val="minMax"/>
-          <c:max val="20"/>
-          <c:min val="0"/>
+          <c:max val="16"/>
+          <c:min val="4"/>
         </c:scaling>
         <c:delete val="0"/>
         <c:axPos val="l"/>
@@ -1336,7 +1336,7 @@
         <c:crossAx val="2094734554"/>
         <c:crosses val="autoZero"/>
         <c:crossBetween val="between"/>
-        <c:majorUnit val="5"/>
+        <c:majorUnit val="2"/>
       </c:valAx>
       <c:spPr>
         <a:solidFill>
@@ -3485,8 +3485,8 @@
         <c:axId val="2094734552"/>
         <c:scaling>
           <c:orientation val="minMax"/>
-          <c:max val="10"/>
-          <c:min val="2"/>
+          <c:max val="8"/>
+          <c:min val="3"/>
         </c:scaling>
         <c:delete val="0"/>
         <c:axPos val="l"/>
@@ -3530,7 +3530,7 @@
         <c:crossAx val="2094734554"/>
         <c:crosses val="autoZero"/>
         <c:crossBetween val="between"/>
-        <c:majorUnit val="2"/>
+        <c:majorUnit val="1"/>
       </c:valAx>
       <c:spPr>
         <a:noFill/>
@@ -3798,8 +3798,8 @@
         <c:axId val="2094734552"/>
         <c:scaling>
           <c:orientation val="minMax"/>
-          <c:max val="18"/>
-          <c:min val="8"/>
+          <c:max val="16"/>
+          <c:min val="10"/>
         </c:scaling>
         <c:delete val="0"/>
         <c:axPos val="l"/>
@@ -4108,8 +4108,8 @@
         <c:axId val="2094734552"/>
         <c:scaling>
           <c:orientation val="minMax"/>
-          <c:max val="10"/>
-          <c:min val="2"/>
+          <c:max val="8"/>
+          <c:min val="3"/>
         </c:scaling>
         <c:delete val="0"/>
         <c:axPos val="l"/>
@@ -4142,7 +4142,7 @@
         <c:crossAx val="2094734554"/>
         <c:crosses val="autoZero"/>
         <c:crossBetween val="between"/>
-        <c:majorUnit val="2"/>
+        <c:majorUnit val="1"/>
       </c:valAx>
       <c:spPr>
         <a:solidFill>
@@ -4418,8 +4418,8 @@
         <c:axId val="2094734552"/>
         <c:scaling>
           <c:orientation val="minMax"/>
-          <c:max val="10"/>
-          <c:min val="2"/>
+          <c:max val="8"/>
+          <c:min val="3"/>
         </c:scaling>
         <c:delete val="0"/>
         <c:axPos val="l"/>
@@ -4452,7 +4452,7 @@
         <c:crossAx val="2094734554"/>
         <c:crosses val="autoZero"/>
         <c:crossBetween val="between"/>
-        <c:majorUnit val="2"/>
+        <c:majorUnit val="1"/>
       </c:valAx>
       <c:spPr>
         <a:solidFill>
@@ -4728,8 +4728,8 @@
         <c:axId val="2094734552"/>
         <c:scaling>
           <c:orientation val="minMax"/>
-          <c:max val="10"/>
-          <c:min val="2"/>
+          <c:max val="8"/>
+          <c:min val="3"/>
         </c:scaling>
         <c:delete val="0"/>
         <c:axPos val="l"/>
@@ -4762,7 +4762,7 @@
         <c:crossAx val="2094734554"/>
         <c:crosses val="autoZero"/>
         <c:crossBetween val="between"/>
-        <c:majorUnit val="2"/>
+        <c:majorUnit val="1"/>
       </c:valAx>
       <c:spPr>
         <a:solidFill>
@@ -5040,8 +5040,8 @@
         <c:axId val="2094734552"/>
         <c:scaling>
           <c:orientation val="minMax"/>
-          <c:max val="10"/>
-          <c:min val="2"/>
+          <c:max val="8"/>
+          <c:min val="3"/>
         </c:scaling>
         <c:delete val="0"/>
         <c:axPos val="l"/>
@@ -5074,7 +5074,7 @@
         <c:crossAx val="2094734554"/>
         <c:crosses val="autoZero"/>
         <c:crossBetween val="between"/>
-        <c:majorUnit val="2"/>
+        <c:majorUnit val="1"/>
       </c:valAx>
       <c:spPr>
         <a:solidFill>
@@ -5354,8 +5354,8 @@
         <c:axId val="2094734552"/>
         <c:scaling>
           <c:orientation val="minMax"/>
-          <c:max val="10"/>
-          <c:min val="2"/>
+          <c:max val="8"/>
+          <c:min val="3"/>
         </c:scaling>
         <c:delete val="0"/>
         <c:axPos val="l"/>
@@ -5388,7 +5388,7 @@
         <c:crossAx val="2094734554"/>
         <c:crosses val="autoZero"/>
         <c:crossBetween val="between"/>
-        <c:majorUnit val="2"/>
+        <c:majorUnit val="1"/>
       </c:valAx>
       <c:spPr>
         <a:solidFill>
@@ -5664,8 +5664,8 @@
         <c:axId val="2094734552"/>
         <c:scaling>
           <c:orientation val="minMax"/>
-          <c:max val="18"/>
-          <c:min val="8"/>
+          <c:max val="16"/>
+          <c:min val="10"/>
         </c:scaling>
         <c:delete val="0"/>
         <c:axPos val="l"/>
@@ -5974,8 +5974,8 @@
         <c:axId val="2094734552"/>
         <c:scaling>
           <c:orientation val="minMax"/>
-          <c:max val="18"/>
-          <c:min val="8"/>
+          <c:max val="16"/>
+          <c:min val="10"/>
         </c:scaling>
         <c:delete val="0"/>
         <c:axPos val="l"/>
@@ -6286,8 +6286,8 @@
         <c:axId val="2094734552"/>
         <c:scaling>
           <c:orientation val="minMax"/>
-          <c:max val="18"/>
-          <c:min val="8"/>
+          <c:max val="16"/>
+          <c:min val="10"/>
         </c:scaling>
         <c:delete val="0"/>
         <c:axPos val="l"/>
@@ -6600,8 +6600,8 @@
         <c:axId val="2094734552"/>
         <c:scaling>
           <c:orientation val="minMax"/>
-          <c:max val="18"/>
-          <c:min val="8"/>
+          <c:max val="16"/>
+          <c:min val="10"/>
         </c:scaling>
         <c:delete val="0"/>
         <c:axPos val="l"/>
@@ -6912,8 +6912,8 @@
         <c:axId val="2094734552"/>
         <c:scaling>
           <c:orientation val="minMax"/>
-          <c:max val="20"/>
-          <c:min val="0"/>
+          <c:max val="16"/>
+          <c:min val="4"/>
         </c:scaling>
         <c:delete val="0"/>
         <c:axPos val="l"/>
@@ -6957,7 +6957,7 @@
         <c:crossAx val="2094734554"/>
         <c:crosses val="autoZero"/>
         <c:crossBetween val="between"/>
-        <c:majorUnit val="5"/>
+        <c:majorUnit val="2"/>
       </c:valAx>
       <c:spPr>
         <a:noFill/>
@@ -7225,8 +7225,8 @@
         <c:axId val="2094734552"/>
         <c:scaling>
           <c:orientation val="minMax"/>
-          <c:max val="20"/>
-          <c:min val="0"/>
+          <c:max val="16"/>
+          <c:min val="4"/>
         </c:scaling>
         <c:delete val="0"/>
         <c:axPos val="l"/>
@@ -7259,7 +7259,7 @@
         <c:crossAx val="2094734554"/>
         <c:crosses val="autoZero"/>
         <c:crossBetween val="between"/>
-        <c:majorUnit val="5"/>
+        <c:majorUnit val="2"/>
       </c:valAx>
       <c:spPr>
         <a:solidFill>
@@ -7535,8 +7535,8 @@
         <c:axId val="2094734552"/>
         <c:scaling>
           <c:orientation val="minMax"/>
-          <c:max val="20"/>
-          <c:min val="0"/>
+          <c:max val="16"/>
+          <c:min val="4"/>
         </c:scaling>
         <c:delete val="0"/>
         <c:axPos val="l"/>
@@ -7569,7 +7569,7 @@
         <c:crossAx val="2094734554"/>
         <c:crosses val="autoZero"/>
         <c:crossBetween val="between"/>
-        <c:majorUnit val="5"/>
+        <c:majorUnit val="2"/>
       </c:valAx>
       <c:spPr>
         <a:solidFill>

--- a/day2-deck/decks/Opcode Benchmarks - House Style.pptx
+++ b/day2-deck/decks/Opcode Benchmarks - House Style.pptx
@@ -8086,7 +8086,7 @@
           <a:p>
             <a:r>
               <a:rPr lang="en-US" dirty="0"/>
-              <a:t>Source: Qlik - Closed Repair Orders. Customer pay, Jan-Sep by close month. Same-store, INEOS excluded (opened 2026). GMC Prescott body shop labor excluded. Top and bottom five stores by change in Brake Fluid %, Jan-Sep 2026 vs 2025, in points. Moving now: Jul-Sep 2026 vs Jan-Mar 2026, each store against itself; the group moved +0.0 pts on the same basis, so part of every store's change is seasonal. Green bar at the right of a row: the store is on both the top five vs last year and the top five moving now.Conversation starter: each top store says one thing they started doing; each bottom store says what got in the way and what they would try. The room trades ideas. Moving now: ask the top three what they started this year.</a:t>
+              <a:t>Takeaway (off the slide): Ask Nissan, LR LV and LR Henderson what changed. Ask CDJR Post Falls, Honda North and Subaru St George what got in the way. Ask Mazda, Audi Reno and Kia St George what they started this year.Source: Qlik - Closed Repair Orders. Customer pay, Jan-Sep by close month. Same-store, INEOS excluded (opened 2026). GMC Prescott body shop labor excluded. Top and bottom five stores by change in Brake Fluid %, Jan-Sep 2026 vs 2025, in points. Moving now: Jul-Sep 2026 vs Jan-Mar 2026, each store against itself; the group moved +0.0 pts on the same basis, so part of every store's change is seasonal. Green bar at the right of a row: the store is on both the top five vs last year and the top five moving now.Conversation starter: each top store says one thing they started doing; each bottom store says what got in the way and what they would try. The room trades ideas. Moving now: ask the top three what they started this year.</a:t>
             </a:r>
             <a:endParaRPr lang="en-US" dirty="0"/>
           </a:p>
@@ -8262,7 +8262,7 @@
           <a:p>
             <a:r>
               <a:rPr lang="en-US" dirty="0"/>
-              <a:t>Source: Qlik - Closed Repair Orders. Customer pay, Jan-Sep by close month. Same-store, INEOS excluded (opened 2026). GMC Prescott body shop labor excluded. Jan-Sep 2026 YTD; green at or above the 7.5% benchmark, red below. CHECK OP-CODE MAPPING - under 0.5%: VW HENDERSON, AUDI HENDERSON, VOLVO. Near zero in 2025, so year-over-year gain may be mapping: HONDA SPOKANE, SUBARU ST GEORGE, LR LV, LR RENO.
+              <a:t>Takeaway (off the slide): 7 of 33 stores at or above 7.5%, led by Subaru St George at 13.8%. The group sits at 5.8%.Source: Qlik - Closed Repair Orders. Customer pay, Jan-Sep by close month. Same-store, INEOS excluded (opened 2026). GMC Prescott body shop labor excluded. Jan-Sep 2026 YTD; green at or above the 7.5% benchmark, red below. CHECK OP-CODE MAPPING - under 0.5%: VW HENDERSON, AUDI HENDERSON, VOLVO. Near zero in 2025, so year-over-year gain may be mapping: HONDA SPOKANE, SUBARU ST GEORGE, LR LV, LR RENO.
 SUBARU ST GEORGE: 13.8% (2025 0.0%)
 HONDA HENDERSON: 12.0% (2025 10.4%)
 SUBARU PRESCOTT: 9.8% (2025 5.9%)
@@ -8383,7 +8383,7 @@
           <a:p>
             <a:r>
               <a:rPr lang="en-US" dirty="0"/>
-              <a:t>Source: Qlik - Closed Repair Orders. Customer pay, Jan-Sep by close month. Same-store, INEOS excluded (opened 2026). GMC Prescott body shop labor excluded. Top and bottom five stores by change in Fuel Service %, Jan-Sep 2026 vs 2025, in points. Moving now: Jul-Sep 2026 vs Jan-Mar 2026, each store against itself; the group moved −0.3 pts on the same basis, so part of every store's change is seasonal. Green bar at the right of a row: the store is on both the top five vs last year and the top five moving now.Conversation starter: each top store says one thing they started doing; each bottom store says what got in the way and what they would try. The room trades ideas. Moving now: ask the top three what they started this year.</a:t>
+              <a:t>Takeaway (off the slide): Ask Subaru St George, Lincoln and LR LV what changed. Ask Subaru LV, CDJR Post Falls and Toyota Spokane what got in the way. Ask Mazda, Hyundai St George and Honda Spokane what they started this year.Source: Qlik - Closed Repair Orders. Customer pay, Jan-Sep by close month. Same-store, INEOS excluded (opened 2026). GMC Prescott body shop labor excluded. Top and bottom five stores by change in Fuel Service %, Jan-Sep 2026 vs 2025, in points. Moving now: Jul-Sep 2026 vs Jan-Mar 2026, each store against itself; the group moved −0.3 pts on the same basis, so part of every store's change is seasonal. Green bar at the right of a row: the store is on both the top five vs last year and the top five moving now.Conversation starter: each top store says one thing they started doing; each bottom store says what got in the way and what they would try. The room trades ideas. Moving now: ask the top three what they started this year.</a:t>
             </a:r>
             <a:endParaRPr lang="en-US" dirty="0"/>
           </a:p>
@@ -8559,7 +8559,7 @@
           <a:p>
             <a:r>
               <a:rPr lang="en-US" dirty="0"/>
-              <a:t>Source: Qlik - Closed Repair Orders. Customer pay, Jan-Sep by close month. Same-store, INEOS excluded (opened 2026). GMC Prescott body shop labor excluded. Jan-Sep 2026 YTD; green at or above the 15% benchmark, red below.
+              <a:t>Takeaway (off the slide): 8 of 33 stores at or above 15%, led by Audi Henderson at 27.5%. The group sits at 13.2%.Source: Qlik - Closed Repair Orders. Customer pay, Jan-Sep by close month. Same-store, INEOS excluded (opened 2026). GMC Prescott body shop labor excluded. Jan-Sep 2026 YTD; green at or above the 15% benchmark, red below.
 AUDI HENDERSON: 27.5% (2025 21.8%)
 LR HENDERSON: 24.4% (2025 19.4%)
 HYUNDAI PRESCOTT: 21.8% (2025 15.0%)
@@ -8680,7 +8680,7 @@
           <a:p>
             <a:r>
               <a:rPr lang="en-US" dirty="0"/>
-              <a:t>Source: Qlik - Closed Repair Orders. Customer pay, Jan-Sep by close month. Same-store, INEOS excluded (opened 2026). GMC Prescott body shop labor excluded. Top and bottom five stores by change in Alignment %, Jan-Sep 2026 vs 2025, in points. Moving now: Jul-Sep 2026 vs Jan-Mar 2026, each store against itself; the group moved +0.2 pts on the same basis, so part of every store's change is seasonal. Green bar at the right of a row: the store is on both the top five vs last year and the top five moving now.Conversation starter: each top store says one thing they started doing; each bottom store says what got in the way and what they would try. The room trades ideas. Moving now: ask the top three what they started this year.</a:t>
+              <a:t>Takeaway (off the slide): Ask Hyundai St George, Hyundai Prescott and GMC Prescott what changed. Ask LR Reno, Kia LV and Subaru LV what got in the way. Ask Audi Henderson, Mazda and Kia St George what they started this year.Source: Qlik - Closed Repair Orders. Customer pay, Jan-Sep by close month. Same-store, INEOS excluded (opened 2026). GMC Prescott body shop labor excluded. Top and bottom five stores by change in Alignment %, Jan-Sep 2026 vs 2025, in points. Moving now: Jul-Sep 2026 vs Jan-Mar 2026, each store against itself; the group moved +0.2 pts on the same basis, so part of every store's change is seasonal. Green bar at the right of a row: the store is on both the top five vs last year and the top five moving now.Conversation starter: each top store says one thing they started doing; each bottom store says what got in the way and what they would try. The room trades ideas. Moving now: ask the top three what they started this year.</a:t>
             </a:r>
             <a:endParaRPr lang="en-US" dirty="0"/>
           </a:p>
@@ -8856,7 +8856,7 @@
           <a:p>
             <a:r>
               <a:rPr lang="en-US" dirty="0"/>
-              <a:t>Source: Qlik - Closed Repair Orders. Customer pay, Jan-Sep by close month. Same-store, INEOS excluded (opened 2026). GMC Prescott body shop labor excluded. Jan-Sep 2026 YTD; green at or above the 15% benchmark, red below. CHECK OP-CODE MAPPING - under 0.5%: TOYOTA SPOKANE, LEXUS, AUDI RENO, AUDI HENDERSON, VW ST GEORGE. Near zero in 2025, so year-over-year gain may be mapping: HONDA SPOKANE, SUBARU PRESCOTT.
+              <a:t>Takeaway (off the slide): 4 of 33 stores at or above 15%, led by LR Henderson at 27.0%. The group sits at 8.3%.Source: Qlik - Closed Repair Orders. Customer pay, Jan-Sep by close month. Same-store, INEOS excluded (opened 2026). GMC Prescott body shop labor excluded. Jan-Sep 2026 YTD; green at or above the 15% benchmark, red below. CHECK OP-CODE MAPPING - under 0.5%: TOYOTA SPOKANE, LEXUS, AUDI RENO, AUDI HENDERSON, VW ST GEORGE. Near zero in 2025, so year-over-year gain may be mapping: HONDA SPOKANE, SUBARU PRESCOTT.
 LR HENDERSON: 27.0% (2025 22.9%)
 HONDA HENDERSON: 18.4% (2025 17.7%)
 LR LV: 17.0% (2025 3.4%)
@@ -8977,7 +8977,7 @@
           <a:p>
             <a:r>
               <a:rPr lang="en-US" dirty="0"/>
-              <a:t>Source: Qlik - Closed Repair Orders. Customer pay, Jan-Sep by close month. Same-store, INEOS excluded (opened 2026). GMC Prescott body shop labor excluded. Top and bottom five stores by change in Balance %, Jan-Sep 2026 vs 2025, in points. Moving now: Jul-Sep 2026 vs Jan-Mar 2026, each store against itself; the group moved +0.1 pts on the same basis, so part of every store's change is seasonal. Green bar at the right of a row: the store is on both the top five vs last year and the top five moving now.Conversation starter: each top store says one thing they started doing; each bottom store says what got in the way and what they would try. The room trades ideas. Moving now: ask the top three what they started this year.</a:t>
+              <a:t>Takeaway (off the slide): Ask Subaru Prescott, LR LV and Mazda what changed. Ask Subaru St George, Nissan and Kia LV what got in the way. Ask Mazda, Hyundai Prescott and Honda Spokane what they started this year.Source: Qlik - Closed Repair Orders. Customer pay, Jan-Sep by close month. Same-store, INEOS excluded (opened 2026). GMC Prescott body shop labor excluded. Top and bottom five stores by change in Balance %, Jan-Sep 2026 vs 2025, in points. Moving now: Jul-Sep 2026 vs Jan-Mar 2026, each store against itself; the group moved +0.1 pts on the same basis, so part of every store's change is seasonal. Green bar at the right of a row: the store is on both the top five vs last year and the top five moving now.Conversation starter: each top store says one thing they started doing; each bottom store says what got in the way and what they would try. The room trades ideas. Moving now: ask the top three what they started this year.</a:t>
             </a:r>
             <a:endParaRPr lang="en-US" dirty="0"/>
           </a:p>
@@ -9153,7 +9153,7 @@
           <a:p>
             <a:r>
               <a:rPr lang="en-US" dirty="0"/>
-              <a:t>Source: Qlik - Closed Repair Orders. Customer pay, Jan-Sep by close month. Same-store, INEOS excluded (opened 2026). GMC Prescott body shop labor excluded. Jan-Sep 2026 YTD; green at or above the 10% benchmark, red below.
+              <a:t>Takeaway (off the slide): 12 of 33 stores at or above 10%, led by LR LV at 20.6%. The group sits at 9.2%.Source: Qlik - Closed Repair Orders. Customer pay, Jan-Sep by close month. Same-store, INEOS excluded (opened 2026). GMC Prescott body shop labor excluded. Jan-Sep 2026 YTD; green at or above the 10% benchmark, red below.
 LR LV: 20.7% (2025 15.2%)
 HONDA HENDERSON: 15.6% (2025 12.9%)
 LR HENDERSON: 14.3% (2025 9.0%)
@@ -9815,7 +9815,7 @@
         <p:spPr>
           <a:xfrm>
             <a:off x="457200" y="1207008"/>
-            <a:ext cx="11274552" cy="4782312"/>
+            <a:ext cx="11274552" cy="5148072"/>
           </a:xfrm>
           <a:prstGeom prst="rect">
             <a:avLst/>
@@ -9933,7 +9933,7 @@
         <p:spPr>
           <a:xfrm>
             <a:off x="658368" y="2103120"/>
-            <a:ext cx="3489960" cy="755294"/>
+            <a:ext cx="3489960" cy="828446"/>
           </a:xfrm>
           <a:prstGeom prst="rect">
             <a:avLst/>
@@ -9953,7 +9953,7 @@
         <p:spPr>
           <a:xfrm>
             <a:off x="749808" y="2103120"/>
-            <a:ext cx="365760" cy="755294"/>
+            <a:ext cx="365760" cy="828446"/>
           </a:xfrm>
           <a:prstGeom prst="rect">
             <a:avLst/>
@@ -9992,7 +9992,7 @@
         <p:spPr>
           <a:xfrm>
             <a:off x="1097280" y="2103120"/>
-            <a:ext cx="1825752" cy="755294"/>
+            <a:ext cx="1825752" cy="828446"/>
           </a:xfrm>
           <a:prstGeom prst="rect">
             <a:avLst/>
@@ -10071,7 +10071,7 @@
         <p:spPr>
           <a:xfrm>
             <a:off x="2941320" y="2103120"/>
-            <a:ext cx="1115568" cy="755294"/>
+            <a:ext cx="1115568" cy="828446"/>
           </a:xfrm>
           <a:prstGeom prst="rect">
             <a:avLst/>
@@ -10109,8 +10109,8 @@
         </p:nvSpPr>
         <p:spPr>
           <a:xfrm>
-            <a:off x="749808" y="2858414"/>
-            <a:ext cx="365760" cy="755294"/>
+            <a:off x="749808" y="2931566"/>
+            <a:ext cx="365760" cy="828446"/>
           </a:xfrm>
           <a:prstGeom prst="rect">
             <a:avLst/>
@@ -10148,8 +10148,8 @@
         </p:nvSpPr>
         <p:spPr>
           <a:xfrm>
-            <a:off x="1097280" y="2858414"/>
-            <a:ext cx="1825752" cy="755294"/>
+            <a:off x="1097280" y="2931566"/>
+            <a:ext cx="1825752" cy="828446"/>
           </a:xfrm>
           <a:prstGeom prst="rect">
             <a:avLst/>
@@ -10227,8 +10227,8 @@
         </p:nvSpPr>
         <p:spPr>
           <a:xfrm>
-            <a:off x="2941320" y="2858414"/>
-            <a:ext cx="1115568" cy="755294"/>
+            <a:off x="2941320" y="2931566"/>
+            <a:ext cx="1115568" cy="828446"/>
           </a:xfrm>
           <a:prstGeom prst="rect">
             <a:avLst/>
@@ -10266,8 +10266,8 @@
         </p:nvSpPr>
         <p:spPr>
           <a:xfrm>
-            <a:off x="658368" y="3613709"/>
-            <a:ext cx="3489960" cy="755294"/>
+            <a:off x="658368" y="3760013"/>
+            <a:ext cx="3489960" cy="828446"/>
           </a:xfrm>
           <a:prstGeom prst="rect">
             <a:avLst/>
@@ -10286,8 +10286,8 @@
         </p:nvSpPr>
         <p:spPr>
           <a:xfrm>
-            <a:off x="749808" y="3613709"/>
-            <a:ext cx="365760" cy="755294"/>
+            <a:off x="749808" y="3760013"/>
+            <a:ext cx="365760" cy="828446"/>
           </a:xfrm>
           <a:prstGeom prst="rect">
             <a:avLst/>
@@ -10325,8 +10325,8 @@
         </p:nvSpPr>
         <p:spPr>
           <a:xfrm>
-            <a:off x="1097280" y="3613709"/>
-            <a:ext cx="1825752" cy="755294"/>
+            <a:off x="1097280" y="3760013"/>
+            <a:ext cx="1825752" cy="828446"/>
           </a:xfrm>
           <a:prstGeom prst="rect">
             <a:avLst/>
@@ -10404,8 +10404,8 @@
         </p:nvSpPr>
         <p:spPr>
           <a:xfrm>
-            <a:off x="2941320" y="3613709"/>
-            <a:ext cx="1115568" cy="755294"/>
+            <a:off x="2941320" y="3760013"/>
+            <a:ext cx="1115568" cy="828446"/>
           </a:xfrm>
           <a:prstGeom prst="rect">
             <a:avLst/>
@@ -10443,8 +10443,8 @@
         </p:nvSpPr>
         <p:spPr>
           <a:xfrm>
-            <a:off x="749808" y="4369003"/>
-            <a:ext cx="365760" cy="755294"/>
+            <a:off x="749808" y="4588459"/>
+            <a:ext cx="365760" cy="828446"/>
           </a:xfrm>
           <a:prstGeom prst="rect">
             <a:avLst/>
@@ -10482,8 +10482,8 @@
         </p:nvSpPr>
         <p:spPr>
           <a:xfrm>
-            <a:off x="1097280" y="4369003"/>
-            <a:ext cx="1825752" cy="755294"/>
+            <a:off x="1097280" y="4588459"/>
+            <a:ext cx="1825752" cy="828446"/>
           </a:xfrm>
           <a:prstGeom prst="rect">
             <a:avLst/>
@@ -10561,8 +10561,8 @@
         </p:nvSpPr>
         <p:spPr>
           <a:xfrm>
-            <a:off x="2941320" y="4369003"/>
-            <a:ext cx="1115568" cy="755294"/>
+            <a:off x="2941320" y="4588459"/>
+            <a:ext cx="1115568" cy="828446"/>
           </a:xfrm>
           <a:prstGeom prst="rect">
             <a:avLst/>
@@ -10600,8 +10600,8 @@
         </p:nvSpPr>
         <p:spPr>
           <a:xfrm>
-            <a:off x="658368" y="5124298"/>
-            <a:ext cx="3489960" cy="755294"/>
+            <a:off x="658368" y="5416906"/>
+            <a:ext cx="3489960" cy="828446"/>
           </a:xfrm>
           <a:prstGeom prst="rect">
             <a:avLst/>
@@ -10620,8 +10620,8 @@
         </p:nvSpPr>
         <p:spPr>
           <a:xfrm>
-            <a:off x="749808" y="5124298"/>
-            <a:ext cx="365760" cy="755294"/>
+            <a:off x="749808" y="5416906"/>
+            <a:ext cx="365760" cy="828446"/>
           </a:xfrm>
           <a:prstGeom prst="rect">
             <a:avLst/>
@@ -10659,8 +10659,8 @@
         </p:nvSpPr>
         <p:spPr>
           <a:xfrm>
-            <a:off x="1097280" y="5124298"/>
-            <a:ext cx="1825752" cy="755294"/>
+            <a:off x="1097280" y="5416906"/>
+            <a:ext cx="1825752" cy="828446"/>
           </a:xfrm>
           <a:prstGeom prst="rect">
             <a:avLst/>
@@ -10738,8 +10738,8 @@
         </p:nvSpPr>
         <p:spPr>
           <a:xfrm>
-            <a:off x="2941320" y="5124298"/>
-            <a:ext cx="1115568" cy="755294"/>
+            <a:off x="2941320" y="5416906"/>
+            <a:ext cx="1115568" cy="828446"/>
           </a:xfrm>
           <a:prstGeom prst="rect">
             <a:avLst/>
@@ -10876,7 +10876,7 @@
         <p:spPr>
           <a:xfrm>
             <a:off x="4349496" y="2103120"/>
-            <a:ext cx="3489960" cy="755294"/>
+            <a:ext cx="3489960" cy="828446"/>
           </a:xfrm>
           <a:prstGeom prst="rect">
             <a:avLst/>
@@ -10896,7 +10896,7 @@
         <p:spPr>
           <a:xfrm>
             <a:off x="4440936" y="2103120"/>
-            <a:ext cx="365760" cy="755294"/>
+            <a:ext cx="365760" cy="828446"/>
           </a:xfrm>
           <a:prstGeom prst="rect">
             <a:avLst/>
@@ -10935,7 +10935,7 @@
         <p:spPr>
           <a:xfrm>
             <a:off x="4788408" y="2103120"/>
-            <a:ext cx="1825752" cy="755294"/>
+            <a:ext cx="1825752" cy="828446"/>
           </a:xfrm>
           <a:prstGeom prst="rect">
             <a:avLst/>
@@ -11014,7 +11014,7 @@
         <p:spPr>
           <a:xfrm>
             <a:off x="6632448" y="2103120"/>
-            <a:ext cx="1115568" cy="755294"/>
+            <a:ext cx="1115568" cy="828446"/>
           </a:xfrm>
           <a:prstGeom prst="rect">
             <a:avLst/>
@@ -11052,8 +11052,8 @@
         </p:nvSpPr>
         <p:spPr>
           <a:xfrm>
-            <a:off x="4440936" y="2858414"/>
-            <a:ext cx="365760" cy="755294"/>
+            <a:off x="4440936" y="2931566"/>
+            <a:ext cx="365760" cy="828446"/>
           </a:xfrm>
           <a:prstGeom prst="rect">
             <a:avLst/>
@@ -11091,8 +11091,8 @@
         </p:nvSpPr>
         <p:spPr>
           <a:xfrm>
-            <a:off x="4788408" y="2858414"/>
-            <a:ext cx="1825752" cy="755294"/>
+            <a:off x="4788408" y="2931566"/>
+            <a:ext cx="1825752" cy="828446"/>
           </a:xfrm>
           <a:prstGeom prst="rect">
             <a:avLst/>
@@ -11170,8 +11170,8 @@
         </p:nvSpPr>
         <p:spPr>
           <a:xfrm>
-            <a:off x="6632448" y="2858414"/>
-            <a:ext cx="1115568" cy="755294"/>
+            <a:off x="6632448" y="2931566"/>
+            <a:ext cx="1115568" cy="828446"/>
           </a:xfrm>
           <a:prstGeom prst="rect">
             <a:avLst/>
@@ -11209,8 +11209,8 @@
         </p:nvSpPr>
         <p:spPr>
           <a:xfrm>
-            <a:off x="4349496" y="3613709"/>
-            <a:ext cx="3489960" cy="755294"/>
+            <a:off x="4349496" y="3760013"/>
+            <a:ext cx="3489960" cy="828446"/>
           </a:xfrm>
           <a:prstGeom prst="rect">
             <a:avLst/>
@@ -11229,8 +11229,8 @@
         </p:nvSpPr>
         <p:spPr>
           <a:xfrm>
-            <a:off x="4440936" y="3613709"/>
-            <a:ext cx="365760" cy="755294"/>
+            <a:off x="4440936" y="3760013"/>
+            <a:ext cx="365760" cy="828446"/>
           </a:xfrm>
           <a:prstGeom prst="rect">
             <a:avLst/>
@@ -11268,8 +11268,8 @@
         </p:nvSpPr>
         <p:spPr>
           <a:xfrm>
-            <a:off x="4788408" y="3613709"/>
-            <a:ext cx="1825752" cy="755294"/>
+            <a:off x="4788408" y="3760013"/>
+            <a:ext cx="1825752" cy="828446"/>
           </a:xfrm>
           <a:prstGeom prst="rect">
             <a:avLst/>
@@ -11347,8 +11347,8 @@
         </p:nvSpPr>
         <p:spPr>
           <a:xfrm>
-            <a:off x="6632448" y="3613709"/>
-            <a:ext cx="1115568" cy="755294"/>
+            <a:off x="6632448" y="3760013"/>
+            <a:ext cx="1115568" cy="828446"/>
           </a:xfrm>
           <a:prstGeom prst="rect">
             <a:avLst/>
@@ -11386,8 +11386,8 @@
         </p:nvSpPr>
         <p:spPr>
           <a:xfrm>
-            <a:off x="4440936" y="4369003"/>
-            <a:ext cx="365760" cy="755294"/>
+            <a:off x="4440936" y="4588459"/>
+            <a:ext cx="365760" cy="828446"/>
           </a:xfrm>
           <a:prstGeom prst="rect">
             <a:avLst/>
@@ -11425,8 +11425,8 @@
         </p:nvSpPr>
         <p:spPr>
           <a:xfrm>
-            <a:off x="4788408" y="4369003"/>
-            <a:ext cx="1825752" cy="755294"/>
+            <a:off x="4788408" y="4588459"/>
+            <a:ext cx="1825752" cy="828446"/>
           </a:xfrm>
           <a:prstGeom prst="rect">
             <a:avLst/>
@@ -11504,8 +11504,8 @@
         </p:nvSpPr>
         <p:spPr>
           <a:xfrm>
-            <a:off x="6632448" y="4369003"/>
-            <a:ext cx="1115568" cy="755294"/>
+            <a:off x="6632448" y="4588459"/>
+            <a:ext cx="1115568" cy="828446"/>
           </a:xfrm>
           <a:prstGeom prst="rect">
             <a:avLst/>
@@ -11543,8 +11543,8 @@
         </p:nvSpPr>
         <p:spPr>
           <a:xfrm>
-            <a:off x="4349496" y="5124298"/>
-            <a:ext cx="3489960" cy="755294"/>
+            <a:off x="4349496" y="5416906"/>
+            <a:ext cx="3489960" cy="828446"/>
           </a:xfrm>
           <a:prstGeom prst="rect">
             <a:avLst/>
@@ -11563,8 +11563,8 @@
         </p:nvSpPr>
         <p:spPr>
           <a:xfrm>
-            <a:off x="4440936" y="5124298"/>
-            <a:ext cx="365760" cy="755294"/>
+            <a:off x="4440936" y="5416906"/>
+            <a:ext cx="365760" cy="828446"/>
           </a:xfrm>
           <a:prstGeom prst="rect">
             <a:avLst/>
@@ -11602,8 +11602,8 @@
         </p:nvSpPr>
         <p:spPr>
           <a:xfrm>
-            <a:off x="4788408" y="5124298"/>
-            <a:ext cx="1825752" cy="755294"/>
+            <a:off x="4788408" y="5416906"/>
+            <a:ext cx="1825752" cy="828446"/>
           </a:xfrm>
           <a:prstGeom prst="rect">
             <a:avLst/>
@@ -11681,8 +11681,8 @@
         </p:nvSpPr>
         <p:spPr>
           <a:xfrm>
-            <a:off x="6632448" y="5124298"/>
-            <a:ext cx="1115568" cy="755294"/>
+            <a:off x="6632448" y="5416906"/>
+            <a:ext cx="1115568" cy="828446"/>
           </a:xfrm>
           <a:prstGeom prst="rect">
             <a:avLst/>
@@ -11819,7 +11819,7 @@
         <p:spPr>
           <a:xfrm>
             <a:off x="8040624" y="2103120"/>
-            <a:ext cx="3489960" cy="755294"/>
+            <a:ext cx="3489960" cy="828446"/>
           </a:xfrm>
           <a:prstGeom prst="rect">
             <a:avLst/>
@@ -11839,7 +11839,7 @@
         <p:spPr>
           <a:xfrm>
             <a:off x="8132064" y="2103120"/>
-            <a:ext cx="365760" cy="755294"/>
+            <a:ext cx="365760" cy="828446"/>
           </a:xfrm>
           <a:prstGeom prst="rect">
             <a:avLst/>
@@ -11878,7 +11878,7 @@
         <p:spPr>
           <a:xfrm>
             <a:off x="8479536" y="2103120"/>
-            <a:ext cx="1825752" cy="755294"/>
+            <a:ext cx="1825752" cy="828446"/>
           </a:xfrm>
           <a:prstGeom prst="rect">
             <a:avLst/>
@@ -11957,7 +11957,7 @@
         <p:spPr>
           <a:xfrm>
             <a:off x="10323576" y="2103120"/>
-            <a:ext cx="1115568" cy="755294"/>
+            <a:ext cx="1115568" cy="828446"/>
           </a:xfrm>
           <a:prstGeom prst="rect">
             <a:avLst/>
@@ -11995,8 +11995,8 @@
         </p:nvSpPr>
         <p:spPr>
           <a:xfrm>
-            <a:off x="8132064" y="2858414"/>
-            <a:ext cx="365760" cy="755294"/>
+            <a:off x="8132064" y="2931566"/>
+            <a:ext cx="365760" cy="828446"/>
           </a:xfrm>
           <a:prstGeom prst="rect">
             <a:avLst/>
@@ -12034,8 +12034,8 @@
         </p:nvSpPr>
         <p:spPr>
           <a:xfrm>
-            <a:off x="8479536" y="2858414"/>
-            <a:ext cx="1825752" cy="755294"/>
+            <a:off x="8479536" y="2931566"/>
+            <a:ext cx="1825752" cy="828446"/>
           </a:xfrm>
           <a:prstGeom prst="rect">
             <a:avLst/>
@@ -12113,8 +12113,8 @@
         </p:nvSpPr>
         <p:spPr>
           <a:xfrm>
-            <a:off x="10323576" y="2858414"/>
-            <a:ext cx="1115568" cy="755294"/>
+            <a:off x="10323576" y="2931566"/>
+            <a:ext cx="1115568" cy="828446"/>
           </a:xfrm>
           <a:prstGeom prst="rect">
             <a:avLst/>
@@ -12152,8 +12152,8 @@
         </p:nvSpPr>
         <p:spPr>
           <a:xfrm>
-            <a:off x="8040624" y="3613709"/>
-            <a:ext cx="3489960" cy="755294"/>
+            <a:off x="8040624" y="3760013"/>
+            <a:ext cx="3489960" cy="828446"/>
           </a:xfrm>
           <a:prstGeom prst="rect">
             <a:avLst/>
@@ -12172,8 +12172,8 @@
         </p:nvSpPr>
         <p:spPr>
           <a:xfrm>
-            <a:off x="8132064" y="3613709"/>
-            <a:ext cx="365760" cy="755294"/>
+            <a:off x="8132064" y="3760013"/>
+            <a:ext cx="365760" cy="828446"/>
           </a:xfrm>
           <a:prstGeom prst="rect">
             <a:avLst/>
@@ -12211,8 +12211,8 @@
         </p:nvSpPr>
         <p:spPr>
           <a:xfrm>
-            <a:off x="8479536" y="3613709"/>
-            <a:ext cx="1825752" cy="755294"/>
+            <a:off x="8479536" y="3760013"/>
+            <a:ext cx="1825752" cy="828446"/>
           </a:xfrm>
           <a:prstGeom prst="rect">
             <a:avLst/>
@@ -12290,8 +12290,8 @@
         </p:nvSpPr>
         <p:spPr>
           <a:xfrm>
-            <a:off x="10323576" y="3613709"/>
-            <a:ext cx="1115568" cy="755294"/>
+            <a:off x="10323576" y="3760013"/>
+            <a:ext cx="1115568" cy="828446"/>
           </a:xfrm>
           <a:prstGeom prst="rect">
             <a:avLst/>
@@ -12329,8 +12329,8 @@
         </p:nvSpPr>
         <p:spPr>
           <a:xfrm>
-            <a:off x="8132064" y="4369003"/>
-            <a:ext cx="365760" cy="755294"/>
+            <a:off x="8132064" y="4588459"/>
+            <a:ext cx="365760" cy="828446"/>
           </a:xfrm>
           <a:prstGeom prst="rect">
             <a:avLst/>
@@ -12368,8 +12368,8 @@
         </p:nvSpPr>
         <p:spPr>
           <a:xfrm>
-            <a:off x="8479536" y="4369003"/>
-            <a:ext cx="1825752" cy="755294"/>
+            <a:off x="8479536" y="4588459"/>
+            <a:ext cx="1825752" cy="828446"/>
           </a:xfrm>
           <a:prstGeom prst="rect">
             <a:avLst/>
@@ -12447,8 +12447,8 @@
         </p:nvSpPr>
         <p:spPr>
           <a:xfrm>
-            <a:off x="10323576" y="4369003"/>
-            <a:ext cx="1115568" cy="755294"/>
+            <a:off x="10323576" y="4588459"/>
+            <a:ext cx="1115568" cy="828446"/>
           </a:xfrm>
           <a:prstGeom prst="rect">
             <a:avLst/>
@@ -12486,8 +12486,8 @@
         </p:nvSpPr>
         <p:spPr>
           <a:xfrm>
-            <a:off x="8040624" y="5124298"/>
-            <a:ext cx="3489960" cy="755294"/>
+            <a:off x="8040624" y="5416906"/>
+            <a:ext cx="3489960" cy="828446"/>
           </a:xfrm>
           <a:prstGeom prst="rect">
             <a:avLst/>
@@ -12506,8 +12506,8 @@
         </p:nvSpPr>
         <p:spPr>
           <a:xfrm>
-            <a:off x="8132064" y="5124298"/>
-            <a:ext cx="365760" cy="755294"/>
+            <a:off x="8132064" y="5416906"/>
+            <a:ext cx="365760" cy="828446"/>
           </a:xfrm>
           <a:prstGeom prst="rect">
             <a:avLst/>
@@ -12545,8 +12545,8 @@
         </p:nvSpPr>
         <p:spPr>
           <a:xfrm>
-            <a:off x="8479536" y="5124298"/>
-            <a:ext cx="1825752" cy="755294"/>
+            <a:off x="8479536" y="5416906"/>
+            <a:ext cx="1825752" cy="828446"/>
           </a:xfrm>
           <a:prstGeom prst="rect">
             <a:avLst/>
@@ -12624,8 +12624,8 @@
         </p:nvSpPr>
         <p:spPr>
           <a:xfrm>
-            <a:off x="10323576" y="5124298"/>
-            <a:ext cx="1115568" cy="755294"/>
+            <a:off x="10323576" y="5416906"/>
+            <a:ext cx="1115568" cy="828446"/>
           </a:xfrm>
           <a:prstGeom prst="rect">
             <a:avLst/>
@@ -12650,65 +12650,6 @@
                 <a:cs typeface="Inter" pitchFamily="34" charset="-120"/>
               </a:rPr>
               <a:t>+2.2 pts</a:t>
-            </a:r>
-            <a:endParaRPr lang="en-US" sz="1600" dirty="0"/>
-          </a:p>
-        </p:txBody>
-      </p:sp>
-      <p:sp>
-        <p:nvSpPr>
-          <p:cNvPr id="69" name="Shape 67"/>
-          <p:cNvSpPr/>
-          <p:nvPr/>
-        </p:nvSpPr>
-        <p:spPr>
-          <a:xfrm>
-            <a:off x="457200" y="6126480"/>
-            <a:ext cx="11274552" cy="615696"/>
-          </a:xfrm>
-          <a:prstGeom prst="rect">
-            <a:avLst/>
-          </a:prstGeom>
-          <a:solidFill>
-            <a:srgbClr val="EDF4FA"/>
-          </a:solidFill>
-          <a:ln/>
-        </p:spPr>
-      </p:sp>
-      <p:sp>
-        <p:nvSpPr>
-          <p:cNvPr id="70" name="Text 68"/>
-          <p:cNvSpPr txBox="1"/>
-          <p:nvPr/>
-        </p:nvSpPr>
-        <p:spPr>
-          <a:xfrm>
-            <a:off x="658368" y="6144768"/>
-            <a:ext cx="10927080" cy="579120"/>
-          </a:xfrm>
-          <a:prstGeom prst="rect">
-            <a:avLst/>
-          </a:prstGeom>
-          <a:noFill/>
-          <a:ln/>
-        </p:spPr>
-        <p:txBody>
-          <a:bodyPr wrap="square" lIns="0" tIns="0" rIns="0" bIns="0" rtlCol="0" anchor="ctr"/>
-          <a:lstStyle/>
-          <a:p>
-            <a:pPr indent="0" marL="0">
-              <a:buNone/>
-            </a:pPr>
-            <a:r>
-              <a:rPr lang="en-US" sz="1600" b="1" dirty="0">
-                <a:solidFill>
-                  <a:srgbClr val="0B2C4A"/>
-                </a:solidFill>
-                <a:latin typeface="Inter" pitchFamily="34" charset="0"/>
-                <a:ea typeface="Inter" pitchFamily="34" charset="-122"/>
-                <a:cs typeface="Inter" pitchFamily="34" charset="-120"/>
-              </a:rPr>
-              <a:t>Ask Nissan, LR LV and LR Henderson what changed. Ask CDJR Post Falls, Honda North and Subaru St George what got in the way. Ask Mazda, Audi Reno and Kia St George what they started this year.</a:t>
             </a:r>
             <a:endParaRPr lang="en-US" sz="1600" dirty="0"/>
           </a:p>
@@ -13806,7 +13747,7 @@
         <p:spPr>
           <a:xfrm>
             <a:off x="457200" y="1207008"/>
-            <a:ext cx="11274552" cy="4782312"/>
+            <a:ext cx="11274552" cy="5148072"/>
           </a:xfrm>
           <a:prstGeom prst="rect">
             <a:avLst/>
@@ -13983,7 +13924,7 @@
         <p:spPr>
           <a:xfrm>
             <a:off x="658368" y="1847088"/>
-            <a:ext cx="310896" cy="239896"/>
+            <a:ext cx="310896" cy="261411"/>
           </a:xfrm>
           <a:prstGeom prst="rect">
             <a:avLst/>
@@ -14022,7 +13963,7 @@
         <p:spPr>
           <a:xfrm>
             <a:off x="1014984" y="1847088"/>
-            <a:ext cx="1920240" cy="239896"/>
+            <a:ext cx="1920240" cy="261411"/>
           </a:xfrm>
           <a:prstGeom prst="rect">
             <a:avLst/>
@@ -14060,8 +14001,8 @@
         </p:nvSpPr>
         <p:spPr>
           <a:xfrm>
-            <a:off x="3008376" y="1907062"/>
-            <a:ext cx="1691640" cy="119948"/>
+            <a:off x="3008376" y="1912441"/>
+            <a:ext cx="1691640" cy="130705"/>
           </a:xfrm>
           <a:prstGeom prst="rect">
             <a:avLst/>
@@ -14081,7 +14022,7 @@
         <p:spPr>
           <a:xfrm>
             <a:off x="4754880" y="1847088"/>
-            <a:ext cx="1143000" cy="239896"/>
+            <a:ext cx="1143000" cy="261411"/>
           </a:xfrm>
           <a:prstGeom prst="rect">
             <a:avLst/>
@@ -14119,8 +14060,8 @@
         </p:nvSpPr>
         <p:spPr>
           <a:xfrm>
-            <a:off x="658368" y="2086984"/>
-            <a:ext cx="310896" cy="239896"/>
+            <a:off x="658368" y="2108499"/>
+            <a:ext cx="310896" cy="261411"/>
           </a:xfrm>
           <a:prstGeom prst="rect">
             <a:avLst/>
@@ -14158,8 +14099,8 @@
         </p:nvSpPr>
         <p:spPr>
           <a:xfrm>
-            <a:off x="1014984" y="2086984"/>
-            <a:ext cx="1920240" cy="239896"/>
+            <a:off x="1014984" y="2108499"/>
+            <a:ext cx="1920240" cy="261411"/>
           </a:xfrm>
           <a:prstGeom prst="rect">
             <a:avLst/>
@@ -14197,8 +14138,8 @@
         </p:nvSpPr>
         <p:spPr>
           <a:xfrm>
-            <a:off x="3008376" y="2146957"/>
-            <a:ext cx="1471688" cy="119948"/>
+            <a:off x="3008376" y="2173852"/>
+            <a:ext cx="1471688" cy="130705"/>
           </a:xfrm>
           <a:prstGeom prst="rect">
             <a:avLst/>
@@ -14217,8 +14158,8 @@
         </p:nvSpPr>
         <p:spPr>
           <a:xfrm>
-            <a:off x="4754880" y="2086984"/>
-            <a:ext cx="1143000" cy="239896"/>
+            <a:off x="4754880" y="2108499"/>
+            <a:ext cx="1143000" cy="261411"/>
           </a:xfrm>
           <a:prstGeom prst="rect">
             <a:avLst/>
@@ -14256,8 +14197,8 @@
         </p:nvSpPr>
         <p:spPr>
           <a:xfrm>
-            <a:off x="658368" y="2326879"/>
-            <a:ext cx="310896" cy="239896"/>
+            <a:off x="658368" y="2369910"/>
+            <a:ext cx="310896" cy="261411"/>
           </a:xfrm>
           <a:prstGeom prst="rect">
             <a:avLst/>
@@ -14295,8 +14236,8 @@
         </p:nvSpPr>
         <p:spPr>
           <a:xfrm>
-            <a:off x="1014984" y="2326879"/>
-            <a:ext cx="1920240" cy="239896"/>
+            <a:off x="1014984" y="2369910"/>
+            <a:ext cx="1920240" cy="261411"/>
           </a:xfrm>
           <a:prstGeom prst="rect">
             <a:avLst/>
@@ -14334,8 +14275,8 @@
         </p:nvSpPr>
         <p:spPr>
           <a:xfrm>
-            <a:off x="3008376" y="2386853"/>
-            <a:ext cx="1196420" cy="119948"/>
+            <a:off x="3008376" y="2435262"/>
+            <a:ext cx="1196420" cy="130705"/>
           </a:xfrm>
           <a:prstGeom prst="rect">
             <a:avLst/>
@@ -14354,8 +14295,8 @@
         </p:nvSpPr>
         <p:spPr>
           <a:xfrm>
-            <a:off x="4754880" y="2326879"/>
-            <a:ext cx="1143000" cy="239896"/>
+            <a:off x="4754880" y="2369910"/>
+            <a:ext cx="1143000" cy="261411"/>
           </a:xfrm>
           <a:prstGeom prst="rect">
             <a:avLst/>
@@ -14393,8 +14334,8 @@
         </p:nvSpPr>
         <p:spPr>
           <a:xfrm>
-            <a:off x="658368" y="2566775"/>
-            <a:ext cx="310896" cy="239896"/>
+            <a:off x="658368" y="2631320"/>
+            <a:ext cx="310896" cy="261411"/>
           </a:xfrm>
           <a:prstGeom prst="rect">
             <a:avLst/>
@@ -14432,8 +14373,8 @@
         </p:nvSpPr>
         <p:spPr>
           <a:xfrm>
-            <a:off x="1014984" y="2566775"/>
-            <a:ext cx="1920240" cy="239896"/>
+            <a:off x="1014984" y="2631320"/>
+            <a:ext cx="1920240" cy="261411"/>
           </a:xfrm>
           <a:prstGeom prst="rect">
             <a:avLst/>
@@ -14471,8 +14412,8 @@
         </p:nvSpPr>
         <p:spPr>
           <a:xfrm>
-            <a:off x="3008376" y="2626748"/>
-            <a:ext cx="1144678" cy="119948"/>
+            <a:off x="3008376" y="2696673"/>
+            <a:ext cx="1144678" cy="130705"/>
           </a:xfrm>
           <a:prstGeom prst="rect">
             <a:avLst/>
@@ -14491,8 +14432,8 @@
         </p:nvSpPr>
         <p:spPr>
           <a:xfrm>
-            <a:off x="4754880" y="2566775"/>
-            <a:ext cx="1143000" cy="239896"/>
+            <a:off x="4754880" y="2631320"/>
+            <a:ext cx="1143000" cy="261411"/>
           </a:xfrm>
           <a:prstGeom prst="rect">
             <a:avLst/>
@@ -14530,8 +14471,8 @@
         </p:nvSpPr>
         <p:spPr>
           <a:xfrm>
-            <a:off x="658368" y="2806670"/>
-            <a:ext cx="310896" cy="239896"/>
+            <a:off x="658368" y="2892731"/>
+            <a:ext cx="310896" cy="261411"/>
           </a:xfrm>
           <a:prstGeom prst="rect">
             <a:avLst/>
@@ -14569,8 +14510,8 @@
         </p:nvSpPr>
         <p:spPr>
           <a:xfrm>
-            <a:off x="1014984" y="2806670"/>
-            <a:ext cx="1920240" cy="239896"/>
+            <a:off x="1014984" y="2892731"/>
+            <a:ext cx="1920240" cy="261411"/>
           </a:xfrm>
           <a:prstGeom prst="rect">
             <a:avLst/>
@@ -14608,8 +14549,8 @@
         </p:nvSpPr>
         <p:spPr>
           <a:xfrm>
-            <a:off x="3008376" y="2866644"/>
-            <a:ext cx="1092895" cy="119948"/>
+            <a:off x="3008376" y="2958084"/>
+            <a:ext cx="1092895" cy="130705"/>
           </a:xfrm>
           <a:prstGeom prst="rect">
             <a:avLst/>
@@ -14628,8 +14569,8 @@
         </p:nvSpPr>
         <p:spPr>
           <a:xfrm>
-            <a:off x="4754880" y="2806670"/>
-            <a:ext cx="1143000" cy="239896"/>
+            <a:off x="4754880" y="2892731"/>
+            <a:ext cx="1143000" cy="261411"/>
           </a:xfrm>
           <a:prstGeom prst="rect">
             <a:avLst/>
@@ -14667,8 +14608,8 @@
         </p:nvSpPr>
         <p:spPr>
           <a:xfrm>
-            <a:off x="658368" y="3046566"/>
-            <a:ext cx="310896" cy="239896"/>
+            <a:off x="658368" y="3154142"/>
+            <a:ext cx="310896" cy="261411"/>
           </a:xfrm>
           <a:prstGeom prst="rect">
             <a:avLst/>
@@ -14706,8 +14647,8 @@
         </p:nvSpPr>
         <p:spPr>
           <a:xfrm>
-            <a:off x="1014984" y="3046566"/>
-            <a:ext cx="1920240" cy="239896"/>
+            <a:off x="1014984" y="3154142"/>
+            <a:ext cx="1920240" cy="261411"/>
           </a:xfrm>
           <a:prstGeom prst="rect">
             <a:avLst/>
@@ -14745,8 +14686,8 @@
         </p:nvSpPr>
         <p:spPr>
           <a:xfrm>
-            <a:off x="3008376" y="3106540"/>
-            <a:ext cx="1003246" cy="119948"/>
+            <a:off x="3008376" y="3219495"/>
+            <a:ext cx="1003246" cy="130705"/>
           </a:xfrm>
           <a:prstGeom prst="rect">
             <a:avLst/>
@@ -14765,8 +14706,8 @@
         </p:nvSpPr>
         <p:spPr>
           <a:xfrm>
-            <a:off x="4754880" y="3046566"/>
-            <a:ext cx="1143000" cy="239896"/>
+            <a:off x="4754880" y="3154142"/>
+            <a:ext cx="1143000" cy="261411"/>
           </a:xfrm>
           <a:prstGeom prst="rect">
             <a:avLst/>
@@ -14804,8 +14745,8 @@
         </p:nvSpPr>
         <p:spPr>
           <a:xfrm>
-            <a:off x="658368" y="3286461"/>
-            <a:ext cx="310896" cy="239896"/>
+            <a:off x="658368" y="3415553"/>
+            <a:ext cx="310896" cy="261411"/>
           </a:xfrm>
           <a:prstGeom prst="rect">
             <a:avLst/>
@@ -14843,8 +14784,8 @@
         </p:nvSpPr>
         <p:spPr>
           <a:xfrm>
-            <a:off x="1014984" y="3286461"/>
-            <a:ext cx="1920240" cy="239896"/>
+            <a:off x="1014984" y="3415553"/>
+            <a:ext cx="1920240" cy="261411"/>
           </a:xfrm>
           <a:prstGeom prst="rect">
             <a:avLst/>
@@ -14882,8 +14823,8 @@
         </p:nvSpPr>
         <p:spPr>
           <a:xfrm>
-            <a:off x="3008376" y="3346435"/>
-            <a:ext cx="936777" cy="119948"/>
+            <a:off x="3008376" y="3480906"/>
+            <a:ext cx="936777" cy="130705"/>
           </a:xfrm>
           <a:prstGeom prst="rect">
             <a:avLst/>
@@ -14902,8 +14843,8 @@
         </p:nvSpPr>
         <p:spPr>
           <a:xfrm>
-            <a:off x="4754880" y="3286461"/>
-            <a:ext cx="1143000" cy="239896"/>
+            <a:off x="4754880" y="3415553"/>
+            <a:ext cx="1143000" cy="261411"/>
           </a:xfrm>
           <a:prstGeom prst="rect">
             <a:avLst/>
@@ -14941,8 +14882,8 @@
         </p:nvSpPr>
         <p:spPr>
           <a:xfrm>
-            <a:off x="658368" y="3526357"/>
-            <a:ext cx="310896" cy="239896"/>
+            <a:off x="658368" y="3676964"/>
+            <a:ext cx="310896" cy="261411"/>
           </a:xfrm>
           <a:prstGeom prst="rect">
             <a:avLst/>
@@ -14980,8 +14921,8 @@
         </p:nvSpPr>
         <p:spPr>
           <a:xfrm>
-            <a:off x="1014984" y="3526357"/>
-            <a:ext cx="1920240" cy="239896"/>
+            <a:off x="1014984" y="3676964"/>
+            <a:ext cx="1920240" cy="261411"/>
           </a:xfrm>
           <a:prstGeom prst="rect">
             <a:avLst/>
@@ -15019,8 +14960,8 @@
         </p:nvSpPr>
         <p:spPr>
           <a:xfrm>
-            <a:off x="3008376" y="3586331"/>
-            <a:ext cx="899446" cy="119948"/>
+            <a:off x="3008376" y="3742316"/>
+            <a:ext cx="899446" cy="130705"/>
           </a:xfrm>
           <a:prstGeom prst="rect">
             <a:avLst/>
@@ -15039,8 +14980,8 @@
         </p:nvSpPr>
         <p:spPr>
           <a:xfrm>
-            <a:off x="4754880" y="3526357"/>
-            <a:ext cx="1143000" cy="239896"/>
+            <a:off x="4754880" y="3676964"/>
+            <a:ext cx="1143000" cy="261411"/>
           </a:xfrm>
           <a:prstGeom prst="rect">
             <a:avLst/>
@@ -15078,8 +15019,8 @@
         </p:nvSpPr>
         <p:spPr>
           <a:xfrm>
-            <a:off x="658368" y="3766252"/>
-            <a:ext cx="310896" cy="239896"/>
+            <a:off x="658368" y="3938375"/>
+            <a:ext cx="310896" cy="261411"/>
           </a:xfrm>
           <a:prstGeom prst="rect">
             <a:avLst/>
@@ -15117,8 +15058,8 @@
         </p:nvSpPr>
         <p:spPr>
           <a:xfrm>
-            <a:off x="1014984" y="3766252"/>
-            <a:ext cx="1920240" cy="239896"/>
+            <a:off x="1014984" y="3938375"/>
+            <a:ext cx="1920240" cy="261411"/>
           </a:xfrm>
           <a:prstGeom prst="rect">
             <a:avLst/>
@@ -15156,8 +15097,8 @@
         </p:nvSpPr>
         <p:spPr>
           <a:xfrm>
-            <a:off x="3008376" y="3826226"/>
-            <a:ext cx="865796" cy="119948"/>
+            <a:off x="3008376" y="4003727"/>
+            <a:ext cx="865796" cy="130705"/>
           </a:xfrm>
           <a:prstGeom prst="rect">
             <a:avLst/>
@@ -15176,8 +15117,8 @@
         </p:nvSpPr>
         <p:spPr>
           <a:xfrm>
-            <a:off x="4754880" y="3766252"/>
-            <a:ext cx="1143000" cy="239896"/>
+            <a:off x="4754880" y="3938375"/>
+            <a:ext cx="1143000" cy="261411"/>
           </a:xfrm>
           <a:prstGeom prst="rect">
             <a:avLst/>
@@ -15215,8 +15156,8 @@
         </p:nvSpPr>
         <p:spPr>
           <a:xfrm>
-            <a:off x="658368" y="4006148"/>
-            <a:ext cx="310896" cy="239896"/>
+            <a:off x="658368" y="4199785"/>
+            <a:ext cx="310896" cy="261411"/>
           </a:xfrm>
           <a:prstGeom prst="rect">
             <a:avLst/>
@@ -15254,8 +15195,8 @@
         </p:nvSpPr>
         <p:spPr>
           <a:xfrm>
-            <a:off x="1014984" y="4006148"/>
-            <a:ext cx="1920240" cy="239896"/>
+            <a:off x="1014984" y="4199785"/>
+            <a:ext cx="1920240" cy="261411"/>
           </a:xfrm>
           <a:prstGeom prst="rect">
             <a:avLst/>
@@ -15293,8 +15234,8 @@
         </p:nvSpPr>
         <p:spPr>
           <a:xfrm>
-            <a:off x="3008376" y="4066122"/>
-            <a:ext cx="789612" cy="119948"/>
+            <a:off x="3008376" y="4265138"/>
+            <a:ext cx="789612" cy="130705"/>
           </a:xfrm>
           <a:prstGeom prst="rect">
             <a:avLst/>
@@ -15313,8 +15254,8 @@
         </p:nvSpPr>
         <p:spPr>
           <a:xfrm>
-            <a:off x="4754880" y="4006148"/>
-            <a:ext cx="1143000" cy="239896"/>
+            <a:off x="4754880" y="4199785"/>
+            <a:ext cx="1143000" cy="261411"/>
           </a:xfrm>
           <a:prstGeom prst="rect">
             <a:avLst/>
@@ -15352,8 +15293,8 @@
         </p:nvSpPr>
         <p:spPr>
           <a:xfrm>
-            <a:off x="658368" y="4246043"/>
-            <a:ext cx="310896" cy="239896"/>
+            <a:off x="658368" y="4461196"/>
+            <a:ext cx="310896" cy="261411"/>
           </a:xfrm>
           <a:prstGeom prst="rect">
             <a:avLst/>
@@ -15391,8 +15332,8 @@
         </p:nvSpPr>
         <p:spPr>
           <a:xfrm>
-            <a:off x="1014984" y="4246043"/>
-            <a:ext cx="1920240" cy="239896"/>
+            <a:off x="1014984" y="4461196"/>
+            <a:ext cx="1920240" cy="261411"/>
           </a:xfrm>
           <a:prstGeom prst="rect">
             <a:avLst/>
@@ -15430,8 +15371,8 @@
         </p:nvSpPr>
         <p:spPr>
           <a:xfrm>
-            <a:off x="3008376" y="4306017"/>
-            <a:ext cx="733838" cy="119948"/>
+            <a:off x="3008376" y="4526549"/>
+            <a:ext cx="733838" cy="130705"/>
           </a:xfrm>
           <a:prstGeom prst="rect">
             <a:avLst/>
@@ -15450,8 +15391,8 @@
         </p:nvSpPr>
         <p:spPr>
           <a:xfrm>
-            <a:off x="4754880" y="4246043"/>
-            <a:ext cx="1143000" cy="239896"/>
+            <a:off x="4754880" y="4461196"/>
+            <a:ext cx="1143000" cy="261411"/>
           </a:xfrm>
           <a:prstGeom prst="rect">
             <a:avLst/>
@@ -15489,8 +15430,8 @@
         </p:nvSpPr>
         <p:spPr>
           <a:xfrm>
-            <a:off x="658368" y="4485939"/>
-            <a:ext cx="310896" cy="239896"/>
+            <a:off x="658368" y="4722607"/>
+            <a:ext cx="310896" cy="261411"/>
           </a:xfrm>
           <a:prstGeom prst="rect">
             <a:avLst/>
@@ -15528,8 +15469,8 @@
         </p:nvSpPr>
         <p:spPr>
           <a:xfrm>
-            <a:off x="1014984" y="4485939"/>
-            <a:ext cx="1920240" cy="239896"/>
+            <a:off x="1014984" y="4722607"/>
+            <a:ext cx="1920240" cy="261411"/>
           </a:xfrm>
           <a:prstGeom prst="rect">
             <a:avLst/>
@@ -15567,8 +15508,8 @@
         </p:nvSpPr>
         <p:spPr>
           <a:xfrm>
-            <a:off x="3008376" y="4545913"/>
-            <a:ext cx="718556" cy="119948"/>
+            <a:off x="3008376" y="4787960"/>
+            <a:ext cx="718556" cy="130705"/>
           </a:xfrm>
           <a:prstGeom prst="rect">
             <a:avLst/>
@@ -15587,8 +15528,8 @@
         </p:nvSpPr>
         <p:spPr>
           <a:xfrm>
-            <a:off x="4754880" y="4485939"/>
-            <a:ext cx="1143000" cy="239896"/>
+            <a:off x="4754880" y="4722607"/>
+            <a:ext cx="1143000" cy="261411"/>
           </a:xfrm>
           <a:prstGeom prst="rect">
             <a:avLst/>
@@ -15626,8 +15567,8 @@
         </p:nvSpPr>
         <p:spPr>
           <a:xfrm>
-            <a:off x="658368" y="4725834"/>
-            <a:ext cx="310896" cy="239896"/>
+            <a:off x="658368" y="4984018"/>
+            <a:ext cx="310896" cy="261411"/>
           </a:xfrm>
           <a:prstGeom prst="rect">
             <a:avLst/>
@@ -15665,8 +15606,8 @@
         </p:nvSpPr>
         <p:spPr>
           <a:xfrm>
-            <a:off x="1014984" y="4725834"/>
-            <a:ext cx="1920240" cy="239896"/>
+            <a:off x="1014984" y="4984018"/>
+            <a:ext cx="1920240" cy="261411"/>
           </a:xfrm>
           <a:prstGeom prst="rect">
             <a:avLst/>
@@ -15704,8 +15645,8 @@
         </p:nvSpPr>
         <p:spPr>
           <a:xfrm>
-            <a:off x="3008376" y="4785808"/>
-            <a:ext cx="712146" cy="119948"/>
+            <a:off x="3008376" y="5049371"/>
+            <a:ext cx="712146" cy="130705"/>
           </a:xfrm>
           <a:prstGeom prst="rect">
             <a:avLst/>
@@ -15724,8 +15665,8 @@
         </p:nvSpPr>
         <p:spPr>
           <a:xfrm>
-            <a:off x="4754880" y="4725834"/>
-            <a:ext cx="1143000" cy="239896"/>
+            <a:off x="4754880" y="4984018"/>
+            <a:ext cx="1143000" cy="261411"/>
           </a:xfrm>
           <a:prstGeom prst="rect">
             <a:avLst/>
@@ -15763,8 +15704,8 @@
         </p:nvSpPr>
         <p:spPr>
           <a:xfrm>
-            <a:off x="658368" y="4965730"/>
-            <a:ext cx="310896" cy="239896"/>
+            <a:off x="658368" y="5245429"/>
+            <a:ext cx="310896" cy="261411"/>
           </a:xfrm>
           <a:prstGeom prst="rect">
             <a:avLst/>
@@ -15802,8 +15743,8 @@
         </p:nvSpPr>
         <p:spPr>
           <a:xfrm>
-            <a:off x="1014984" y="4965730"/>
-            <a:ext cx="1920240" cy="239896"/>
+            <a:off x="1014984" y="5245429"/>
+            <a:ext cx="1920240" cy="261411"/>
           </a:xfrm>
           <a:prstGeom prst="rect">
             <a:avLst/>
@@ -15841,8 +15782,8 @@
         </p:nvSpPr>
         <p:spPr>
           <a:xfrm>
-            <a:off x="3008376" y="5025704"/>
-            <a:ext cx="674365" cy="119948"/>
+            <a:off x="3008376" y="5310781"/>
+            <a:ext cx="674365" cy="130705"/>
           </a:xfrm>
           <a:prstGeom prst="rect">
             <a:avLst/>
@@ -15861,8 +15802,8 @@
         </p:nvSpPr>
         <p:spPr>
           <a:xfrm>
-            <a:off x="4754880" y="4965730"/>
-            <a:ext cx="1143000" cy="239896"/>
+            <a:off x="4754880" y="5245429"/>
+            <a:ext cx="1143000" cy="261411"/>
           </a:xfrm>
           <a:prstGeom prst="rect">
             <a:avLst/>
@@ -15900,8 +15841,8 @@
         </p:nvSpPr>
         <p:spPr>
           <a:xfrm>
-            <a:off x="658368" y="5205625"/>
-            <a:ext cx="310896" cy="239896"/>
+            <a:off x="658368" y="5506840"/>
+            <a:ext cx="310896" cy="261411"/>
           </a:xfrm>
           <a:prstGeom prst="rect">
             <a:avLst/>
@@ -15939,8 +15880,8 @@
         </p:nvSpPr>
         <p:spPr>
           <a:xfrm>
-            <a:off x="1014984" y="5205625"/>
-            <a:ext cx="1920240" cy="239896"/>
+            <a:off x="1014984" y="5506840"/>
+            <a:ext cx="1920240" cy="261411"/>
           </a:xfrm>
           <a:prstGeom prst="rect">
             <a:avLst/>
@@ -15978,8 +15919,8 @@
         </p:nvSpPr>
         <p:spPr>
           <a:xfrm>
-            <a:off x="3008376" y="5265599"/>
-            <a:ext cx="641436" cy="119948"/>
+            <a:off x="3008376" y="5572192"/>
+            <a:ext cx="641436" cy="130705"/>
           </a:xfrm>
           <a:prstGeom prst="rect">
             <a:avLst/>
@@ -15998,8 +15939,8 @@
         </p:nvSpPr>
         <p:spPr>
           <a:xfrm>
-            <a:off x="4754880" y="5205625"/>
-            <a:ext cx="1143000" cy="239896"/>
+            <a:off x="4754880" y="5506840"/>
+            <a:ext cx="1143000" cy="261411"/>
           </a:xfrm>
           <a:prstGeom prst="rect">
             <a:avLst/>
@@ -16037,8 +15978,8 @@
         </p:nvSpPr>
         <p:spPr>
           <a:xfrm>
-            <a:off x="658368" y="5445521"/>
-            <a:ext cx="310896" cy="239896"/>
+            <a:off x="658368" y="5768250"/>
+            <a:ext cx="310896" cy="261411"/>
           </a:xfrm>
           <a:prstGeom prst="rect">
             <a:avLst/>
@@ -16076,8 +16017,8 @@
         </p:nvSpPr>
         <p:spPr>
           <a:xfrm>
-            <a:off x="1014984" y="5445521"/>
-            <a:ext cx="1920240" cy="239896"/>
+            <a:off x="1014984" y="5768250"/>
+            <a:ext cx="1920240" cy="261411"/>
           </a:xfrm>
           <a:prstGeom prst="rect">
             <a:avLst/>
@@ -16115,8 +16056,8 @@
         </p:nvSpPr>
         <p:spPr>
           <a:xfrm>
-            <a:off x="3008376" y="5505495"/>
-            <a:ext cx="636377" cy="119948"/>
+            <a:off x="3008376" y="5833603"/>
+            <a:ext cx="636377" cy="130705"/>
           </a:xfrm>
           <a:prstGeom prst="rect">
             <a:avLst/>
@@ -16135,8 +16076,8 @@
         </p:nvSpPr>
         <p:spPr>
           <a:xfrm>
-            <a:off x="4754880" y="5445521"/>
-            <a:ext cx="1143000" cy="239896"/>
+            <a:off x="4754880" y="5768250"/>
+            <a:ext cx="1143000" cy="261411"/>
           </a:xfrm>
           <a:prstGeom prst="rect">
             <a:avLst/>
@@ -16174,8 +16115,8 @@
         </p:nvSpPr>
         <p:spPr>
           <a:xfrm>
-            <a:off x="658368" y="5685416"/>
-            <a:ext cx="310896" cy="239896"/>
+            <a:off x="658368" y="6029661"/>
+            <a:ext cx="310896" cy="261411"/>
           </a:xfrm>
           <a:prstGeom prst="rect">
             <a:avLst/>
@@ -16213,8 +16154,8 @@
         </p:nvSpPr>
         <p:spPr>
           <a:xfrm>
-            <a:off x="1014984" y="5685416"/>
-            <a:ext cx="1920240" cy="239896"/>
+            <a:off x="1014984" y="6029661"/>
+            <a:ext cx="1920240" cy="261411"/>
           </a:xfrm>
           <a:prstGeom prst="rect">
             <a:avLst/>
@@ -16252,8 +16193,8 @@
         </p:nvSpPr>
         <p:spPr>
           <a:xfrm>
-            <a:off x="3008376" y="5745390"/>
-            <a:ext cx="624030" cy="119948"/>
+            <a:off x="3008376" y="6095014"/>
+            <a:ext cx="624030" cy="130705"/>
           </a:xfrm>
           <a:prstGeom prst="rect">
             <a:avLst/>
@@ -16272,8 +16213,8 @@
         </p:nvSpPr>
         <p:spPr>
           <a:xfrm>
-            <a:off x="4754880" y="5685416"/>
-            <a:ext cx="1143000" cy="239896"/>
+            <a:off x="4754880" y="6029661"/>
+            <a:ext cx="1143000" cy="261411"/>
           </a:xfrm>
           <a:prstGeom prst="rect">
             <a:avLst/>
@@ -16312,7 +16253,7 @@
         <p:spPr>
           <a:xfrm>
             <a:off x="6208776" y="1847088"/>
-            <a:ext cx="310896" cy="239896"/>
+            <a:ext cx="310896" cy="261411"/>
           </a:xfrm>
           <a:prstGeom prst="rect">
             <a:avLst/>
@@ -16351,7 +16292,7 @@
         <p:spPr>
           <a:xfrm>
             <a:off x="6565392" y="1847088"/>
-            <a:ext cx="1920240" cy="239896"/>
+            <a:ext cx="1920240" cy="261411"/>
           </a:xfrm>
           <a:prstGeom prst="rect">
             <a:avLst/>
@@ -16389,8 +16330,8 @@
         </p:nvSpPr>
         <p:spPr>
           <a:xfrm>
-            <a:off x="8558784" y="1907062"/>
-            <a:ext cx="558764" cy="119948"/>
+            <a:off x="8558784" y="1912441"/>
+            <a:ext cx="558764" cy="130705"/>
           </a:xfrm>
           <a:prstGeom prst="rect">
             <a:avLst/>
@@ -16410,7 +16351,7 @@
         <p:spPr>
           <a:xfrm>
             <a:off x="10305288" y="1847088"/>
-            <a:ext cx="1143000" cy="239896"/>
+            <a:ext cx="1143000" cy="261411"/>
           </a:xfrm>
           <a:prstGeom prst="rect">
             <a:avLst/>
@@ -16448,8 +16389,8 @@
         </p:nvSpPr>
         <p:spPr>
           <a:xfrm>
-            <a:off x="6208776" y="2086984"/>
-            <a:ext cx="310896" cy="239896"/>
+            <a:off x="6208776" y="2108499"/>
+            <a:ext cx="310896" cy="261411"/>
           </a:xfrm>
           <a:prstGeom prst="rect">
             <a:avLst/>
@@ -16487,8 +16428,8 @@
         </p:nvSpPr>
         <p:spPr>
           <a:xfrm>
-            <a:off x="6565392" y="2086984"/>
-            <a:ext cx="1920240" cy="239896"/>
+            <a:off x="6565392" y="2108499"/>
+            <a:ext cx="1920240" cy="261411"/>
           </a:xfrm>
           <a:prstGeom prst="rect">
             <a:avLst/>
@@ -16526,8 +16467,8 @@
         </p:nvSpPr>
         <p:spPr>
           <a:xfrm>
-            <a:off x="8558784" y="2146957"/>
-            <a:ext cx="524245" cy="119948"/>
+            <a:off x="8558784" y="2173852"/>
+            <a:ext cx="524245" cy="130705"/>
           </a:xfrm>
           <a:prstGeom prst="rect">
             <a:avLst/>
@@ -16546,8 +16487,8 @@
         </p:nvSpPr>
         <p:spPr>
           <a:xfrm>
-            <a:off x="10305288" y="2086984"/>
-            <a:ext cx="1143000" cy="239896"/>
+            <a:off x="10305288" y="2108499"/>
+            <a:ext cx="1143000" cy="261411"/>
           </a:xfrm>
           <a:prstGeom prst="rect">
             <a:avLst/>
@@ -16585,8 +16526,8 @@
         </p:nvSpPr>
         <p:spPr>
           <a:xfrm>
-            <a:off x="6208776" y="2326879"/>
-            <a:ext cx="310896" cy="239896"/>
+            <a:off x="6208776" y="2369910"/>
+            <a:ext cx="310896" cy="261411"/>
           </a:xfrm>
           <a:prstGeom prst="rect">
             <a:avLst/>
@@ -16624,8 +16565,8 @@
         </p:nvSpPr>
         <p:spPr>
           <a:xfrm>
-            <a:off x="6565392" y="2326879"/>
-            <a:ext cx="1920240" cy="239896"/>
+            <a:off x="6565392" y="2369910"/>
+            <a:ext cx="1920240" cy="261411"/>
           </a:xfrm>
           <a:prstGeom prst="rect">
             <a:avLst/>
@@ -16663,8 +16604,8 @@
         </p:nvSpPr>
         <p:spPr>
           <a:xfrm>
-            <a:off x="8558784" y="2386853"/>
-            <a:ext cx="511532" cy="119948"/>
+            <a:off x="8558784" y="2435262"/>
+            <a:ext cx="511532" cy="130705"/>
           </a:xfrm>
           <a:prstGeom prst="rect">
             <a:avLst/>
@@ -16683,8 +16624,8 @@
         </p:nvSpPr>
         <p:spPr>
           <a:xfrm>
-            <a:off x="10305288" y="2326879"/>
-            <a:ext cx="1143000" cy="239896"/>
+            <a:off x="10305288" y="2369910"/>
+            <a:ext cx="1143000" cy="261411"/>
           </a:xfrm>
           <a:prstGeom prst="rect">
             <a:avLst/>
@@ -16722,8 +16663,8 @@
         </p:nvSpPr>
         <p:spPr>
           <a:xfrm>
-            <a:off x="6208776" y="2566775"/>
-            <a:ext cx="310896" cy="239896"/>
+            <a:off x="6208776" y="2631320"/>
+            <a:ext cx="310896" cy="261411"/>
           </a:xfrm>
           <a:prstGeom prst="rect">
             <a:avLst/>
@@ -16761,8 +16702,8 @@
         </p:nvSpPr>
         <p:spPr>
           <a:xfrm>
-            <a:off x="6565392" y="2566775"/>
-            <a:ext cx="1920240" cy="239896"/>
+            <a:off x="6565392" y="2631320"/>
+            <a:ext cx="1920240" cy="261411"/>
           </a:xfrm>
           <a:prstGeom prst="rect">
             <a:avLst/>
@@ -16800,8 +16741,8 @@
         </p:nvSpPr>
         <p:spPr>
           <a:xfrm>
-            <a:off x="8558784" y="2626748"/>
-            <a:ext cx="444269" cy="119948"/>
+            <a:off x="8558784" y="2696673"/>
+            <a:ext cx="444269" cy="130705"/>
           </a:xfrm>
           <a:prstGeom prst="rect">
             <a:avLst/>
@@ -16820,8 +16761,8 @@
         </p:nvSpPr>
         <p:spPr>
           <a:xfrm>
-            <a:off x="10305288" y="2566775"/>
-            <a:ext cx="1143000" cy="239896"/>
+            <a:off x="10305288" y="2631320"/>
+            <a:ext cx="1143000" cy="261411"/>
           </a:xfrm>
           <a:prstGeom prst="rect">
             <a:avLst/>
@@ -16859,8 +16800,8 @@
         </p:nvSpPr>
         <p:spPr>
           <a:xfrm>
-            <a:off x="6208776" y="2806670"/>
-            <a:ext cx="310896" cy="239896"/>
+            <a:off x="6208776" y="2892731"/>
+            <a:ext cx="310896" cy="261411"/>
           </a:xfrm>
           <a:prstGeom prst="rect">
             <a:avLst/>
@@ -16898,8 +16839,8 @@
         </p:nvSpPr>
         <p:spPr>
           <a:xfrm>
-            <a:off x="6565392" y="2806670"/>
-            <a:ext cx="1920240" cy="239896"/>
+            <a:off x="6565392" y="2892731"/>
+            <a:ext cx="1920240" cy="261411"/>
           </a:xfrm>
           <a:prstGeom prst="rect">
             <a:avLst/>
@@ -16937,8 +16878,8 @@
         </p:nvSpPr>
         <p:spPr>
           <a:xfrm>
-            <a:off x="8558784" y="2866644"/>
-            <a:ext cx="393958" cy="119948"/>
+            <a:off x="8558784" y="2958084"/>
+            <a:ext cx="393958" cy="130705"/>
           </a:xfrm>
           <a:prstGeom prst="rect">
             <a:avLst/>
@@ -16957,8 +16898,8 @@
         </p:nvSpPr>
         <p:spPr>
           <a:xfrm>
-            <a:off x="10305288" y="2806670"/>
-            <a:ext cx="1143000" cy="239896"/>
+            <a:off x="10305288" y="2892731"/>
+            <a:ext cx="1143000" cy="261411"/>
           </a:xfrm>
           <a:prstGeom prst="rect">
             <a:avLst/>
@@ -16996,8 +16937,8 @@
         </p:nvSpPr>
         <p:spPr>
           <a:xfrm>
-            <a:off x="6208776" y="3046566"/>
-            <a:ext cx="310896" cy="239896"/>
+            <a:off x="6208776" y="3154142"/>
+            <a:ext cx="310896" cy="261411"/>
           </a:xfrm>
           <a:prstGeom prst="rect">
             <a:avLst/>
@@ -17035,8 +16976,8 @@
         </p:nvSpPr>
         <p:spPr>
           <a:xfrm>
-            <a:off x="6565392" y="3046566"/>
-            <a:ext cx="1920240" cy="239896"/>
+            <a:off x="6565392" y="3154142"/>
+            <a:ext cx="1920240" cy="261411"/>
           </a:xfrm>
           <a:prstGeom prst="rect">
             <a:avLst/>
@@ -17074,8 +17015,8 @@
         </p:nvSpPr>
         <p:spPr>
           <a:xfrm>
-            <a:off x="8558784" y="3106540"/>
-            <a:ext cx="393514" cy="119948"/>
+            <a:off x="8558784" y="3219495"/>
+            <a:ext cx="393514" cy="130705"/>
           </a:xfrm>
           <a:prstGeom prst="rect">
             <a:avLst/>
@@ -17094,8 +17035,8 @@
         </p:nvSpPr>
         <p:spPr>
           <a:xfrm>
-            <a:off x="10305288" y="3046566"/>
-            <a:ext cx="1143000" cy="239896"/>
+            <a:off x="10305288" y="3154142"/>
+            <a:ext cx="1143000" cy="261411"/>
           </a:xfrm>
           <a:prstGeom prst="rect">
             <a:avLst/>
@@ -17133,8 +17074,8 @@
         </p:nvSpPr>
         <p:spPr>
           <a:xfrm>
-            <a:off x="6208776" y="3286461"/>
-            <a:ext cx="310896" cy="239896"/>
+            <a:off x="6208776" y="3415553"/>
+            <a:ext cx="310896" cy="261411"/>
           </a:xfrm>
           <a:prstGeom prst="rect">
             <a:avLst/>
@@ -17172,8 +17113,8 @@
         </p:nvSpPr>
         <p:spPr>
           <a:xfrm>
-            <a:off x="6565392" y="3286461"/>
-            <a:ext cx="1920240" cy="239896"/>
+            <a:off x="6565392" y="3415553"/>
+            <a:ext cx="1920240" cy="261411"/>
           </a:xfrm>
           <a:prstGeom prst="rect">
             <a:avLst/>
@@ -17211,8 +17152,8 @@
         </p:nvSpPr>
         <p:spPr>
           <a:xfrm>
-            <a:off x="8558784" y="3346435"/>
-            <a:ext cx="367056" cy="119948"/>
+            <a:off x="8558784" y="3480906"/>
+            <a:ext cx="367056" cy="130705"/>
           </a:xfrm>
           <a:prstGeom prst="rect">
             <a:avLst/>
@@ -17231,8 +17172,8 @@
         </p:nvSpPr>
         <p:spPr>
           <a:xfrm>
-            <a:off x="10305288" y="3286461"/>
-            <a:ext cx="1143000" cy="239896"/>
+            <a:off x="10305288" y="3415553"/>
+            <a:ext cx="1143000" cy="261411"/>
           </a:xfrm>
           <a:prstGeom prst="rect">
             <a:avLst/>
@@ -17270,8 +17211,8 @@
         </p:nvSpPr>
         <p:spPr>
           <a:xfrm>
-            <a:off x="6208776" y="3526357"/>
-            <a:ext cx="310896" cy="239896"/>
+            <a:off x="6208776" y="3676964"/>
+            <a:ext cx="310896" cy="261411"/>
           </a:xfrm>
           <a:prstGeom prst="rect">
             <a:avLst/>
@@ -17309,8 +17250,8 @@
         </p:nvSpPr>
         <p:spPr>
           <a:xfrm>
-            <a:off x="6565392" y="3526357"/>
-            <a:ext cx="1920240" cy="239896"/>
+            <a:off x="6565392" y="3676964"/>
+            <a:ext cx="1920240" cy="261411"/>
           </a:xfrm>
           <a:prstGeom prst="rect">
             <a:avLst/>
@@ -17348,8 +17289,8 @@
         </p:nvSpPr>
         <p:spPr>
           <a:xfrm>
-            <a:off x="8558784" y="3586331"/>
-            <a:ext cx="334961" cy="119948"/>
+            <a:off x="8558784" y="3742316"/>
+            <a:ext cx="334961" cy="130705"/>
           </a:xfrm>
           <a:prstGeom prst="rect">
             <a:avLst/>
@@ -17368,8 +17309,8 @@
         </p:nvSpPr>
         <p:spPr>
           <a:xfrm>
-            <a:off x="10305288" y="3526357"/>
-            <a:ext cx="1143000" cy="239896"/>
+            <a:off x="10305288" y="3676964"/>
+            <a:ext cx="1143000" cy="261411"/>
           </a:xfrm>
           <a:prstGeom prst="rect">
             <a:avLst/>
@@ -17407,8 +17348,8 @@
         </p:nvSpPr>
         <p:spPr>
           <a:xfrm>
-            <a:off x="6208776" y="3766252"/>
-            <a:ext cx="310896" cy="239896"/>
+            <a:off x="6208776" y="3938375"/>
+            <a:ext cx="310896" cy="261411"/>
           </a:xfrm>
           <a:prstGeom prst="rect">
             <a:avLst/>
@@ -17446,8 +17387,8 @@
         </p:nvSpPr>
         <p:spPr>
           <a:xfrm>
-            <a:off x="6565392" y="3766252"/>
-            <a:ext cx="1920240" cy="239896"/>
+            <a:off x="6565392" y="3938375"/>
+            <a:ext cx="1920240" cy="261411"/>
           </a:xfrm>
           <a:prstGeom prst="rect">
             <a:avLst/>
@@ -17485,8 +17426,8 @@
         </p:nvSpPr>
         <p:spPr>
           <a:xfrm>
-            <a:off x="8558784" y="3826226"/>
-            <a:ext cx="331007" cy="119948"/>
+            <a:off x="8558784" y="4003727"/>
+            <a:ext cx="331007" cy="130705"/>
           </a:xfrm>
           <a:prstGeom prst="rect">
             <a:avLst/>
@@ -17505,8 +17446,8 @@
         </p:nvSpPr>
         <p:spPr>
           <a:xfrm>
-            <a:off x="10305288" y="3766252"/>
-            <a:ext cx="1143000" cy="239896"/>
+            <a:off x="10305288" y="3938375"/>
+            <a:ext cx="1143000" cy="261411"/>
           </a:xfrm>
           <a:prstGeom prst="rect">
             <a:avLst/>
@@ -17544,8 +17485,8 @@
         </p:nvSpPr>
         <p:spPr>
           <a:xfrm>
-            <a:off x="6208776" y="4006148"/>
-            <a:ext cx="310896" cy="239896"/>
+            <a:off x="6208776" y="4199785"/>
+            <a:ext cx="310896" cy="261411"/>
           </a:xfrm>
           <a:prstGeom prst="rect">
             <a:avLst/>
@@ -17583,8 +17524,8 @@
         </p:nvSpPr>
         <p:spPr>
           <a:xfrm>
-            <a:off x="6565392" y="4006148"/>
-            <a:ext cx="1920240" cy="239896"/>
+            <a:off x="6565392" y="4199785"/>
+            <a:ext cx="1920240" cy="261411"/>
           </a:xfrm>
           <a:prstGeom prst="rect">
             <a:avLst/>
@@ -17622,8 +17563,8 @@
         </p:nvSpPr>
         <p:spPr>
           <a:xfrm>
-            <a:off x="8558784" y="4066122"/>
-            <a:ext cx="313417" cy="119948"/>
+            <a:off x="8558784" y="4265138"/>
+            <a:ext cx="313417" cy="130705"/>
           </a:xfrm>
           <a:prstGeom prst="rect">
             <a:avLst/>
@@ -17642,8 +17583,8 @@
         </p:nvSpPr>
         <p:spPr>
           <a:xfrm>
-            <a:off x="10305288" y="4006148"/>
-            <a:ext cx="1143000" cy="239896"/>
+            <a:off x="10305288" y="4199785"/>
+            <a:ext cx="1143000" cy="261411"/>
           </a:xfrm>
           <a:prstGeom prst="rect">
             <a:avLst/>
@@ -17681,8 +17622,8 @@
         </p:nvSpPr>
         <p:spPr>
           <a:xfrm>
-            <a:off x="6208776" y="4246043"/>
-            <a:ext cx="310896" cy="239896"/>
+            <a:off x="6208776" y="4461196"/>
+            <a:ext cx="310896" cy="261411"/>
           </a:xfrm>
           <a:prstGeom prst="rect">
             <a:avLst/>
@@ -17720,8 +17661,8 @@
         </p:nvSpPr>
         <p:spPr>
           <a:xfrm>
-            <a:off x="6565392" y="4246043"/>
-            <a:ext cx="1920240" cy="239896"/>
+            <a:off x="6565392" y="4461196"/>
+            <a:ext cx="1920240" cy="261411"/>
           </a:xfrm>
           <a:prstGeom prst="rect">
             <a:avLst/>
@@ -17759,8 +17700,8 @@
         </p:nvSpPr>
         <p:spPr>
           <a:xfrm>
-            <a:off x="8558784" y="4306017"/>
-            <a:ext cx="206535" cy="119948"/>
+            <a:off x="8558784" y="4526549"/>
+            <a:ext cx="206535" cy="130705"/>
           </a:xfrm>
           <a:prstGeom prst="rect">
             <a:avLst/>
@@ -17779,8 +17720,8 @@
         </p:nvSpPr>
         <p:spPr>
           <a:xfrm>
-            <a:off x="10305288" y="4246043"/>
-            <a:ext cx="1143000" cy="239896"/>
+            <a:off x="10305288" y="4461196"/>
+            <a:ext cx="1143000" cy="261411"/>
           </a:xfrm>
           <a:prstGeom prst="rect">
             <a:avLst/>
@@ -17818,8 +17759,8 @@
         </p:nvSpPr>
         <p:spPr>
           <a:xfrm>
-            <a:off x="6208776" y="4485939"/>
-            <a:ext cx="310896" cy="239896"/>
+            <a:off x="6208776" y="4722607"/>
+            <a:ext cx="310896" cy="261411"/>
           </a:xfrm>
           <a:prstGeom prst="rect">
             <a:avLst/>
@@ -17857,8 +17798,8 @@
         </p:nvSpPr>
         <p:spPr>
           <a:xfrm>
-            <a:off x="6565392" y="4485939"/>
-            <a:ext cx="1920240" cy="239896"/>
+            <a:off x="6565392" y="4722607"/>
+            <a:ext cx="1920240" cy="261411"/>
           </a:xfrm>
           <a:prstGeom prst="rect">
             <a:avLst/>
@@ -17896,8 +17837,8 @@
         </p:nvSpPr>
         <p:spPr>
           <a:xfrm>
-            <a:off x="8558784" y="4545913"/>
-            <a:ext cx="100839" cy="119948"/>
+            <a:off x="8558784" y="4787960"/>
+            <a:ext cx="100839" cy="130705"/>
           </a:xfrm>
           <a:prstGeom prst="rect">
             <a:avLst/>
@@ -17916,8 +17857,8 @@
         </p:nvSpPr>
         <p:spPr>
           <a:xfrm>
-            <a:off x="10305288" y="4485939"/>
-            <a:ext cx="1143000" cy="239896"/>
+            <a:off x="10305288" y="4722607"/>
+            <a:ext cx="1143000" cy="261411"/>
           </a:xfrm>
           <a:prstGeom prst="rect">
             <a:avLst/>
@@ -17955,8 +17896,8 @@
         </p:nvSpPr>
         <p:spPr>
           <a:xfrm>
-            <a:off x="6208776" y="4725834"/>
-            <a:ext cx="310896" cy="239896"/>
+            <a:off x="6208776" y="4984018"/>
+            <a:ext cx="310896" cy="261411"/>
           </a:xfrm>
           <a:prstGeom prst="rect">
             <a:avLst/>
@@ -17994,8 +17935,8 @@
         </p:nvSpPr>
         <p:spPr>
           <a:xfrm>
-            <a:off x="6565392" y="4725834"/>
-            <a:ext cx="1920240" cy="239896"/>
+            <a:off x="6565392" y="4984018"/>
+            <a:ext cx="1920240" cy="261411"/>
           </a:xfrm>
           <a:prstGeom prst="rect">
             <a:avLst/>
@@ -18033,8 +17974,8 @@
         </p:nvSpPr>
         <p:spPr>
           <a:xfrm>
-            <a:off x="8558784" y="4785808"/>
-            <a:ext cx="87903" cy="119948"/>
+            <a:off x="8558784" y="5049371"/>
+            <a:ext cx="87903" cy="130705"/>
           </a:xfrm>
           <a:prstGeom prst="rect">
             <a:avLst/>
@@ -18053,8 +17994,8 @@
         </p:nvSpPr>
         <p:spPr>
           <a:xfrm>
-            <a:off x="10305288" y="4725834"/>
-            <a:ext cx="1143000" cy="239896"/>
+            <a:off x="10305288" y="4984018"/>
+            <a:ext cx="1143000" cy="261411"/>
           </a:xfrm>
           <a:prstGeom prst="rect">
             <a:avLst/>
@@ -18092,8 +18033,8 @@
         </p:nvSpPr>
         <p:spPr>
           <a:xfrm>
-            <a:off x="6208776" y="4965730"/>
-            <a:ext cx="310896" cy="239896"/>
+            <a:off x="6208776" y="5245429"/>
+            <a:ext cx="310896" cy="261411"/>
           </a:xfrm>
           <a:prstGeom prst="rect">
             <a:avLst/>
@@ -18131,8 +18072,8 @@
         </p:nvSpPr>
         <p:spPr>
           <a:xfrm>
-            <a:off x="6565392" y="4965730"/>
-            <a:ext cx="1920240" cy="239896"/>
+            <a:off x="6565392" y="5245429"/>
+            <a:ext cx="1920240" cy="261411"/>
           </a:xfrm>
           <a:prstGeom prst="rect">
             <a:avLst/>
@@ -18170,8 +18111,8 @@
         </p:nvSpPr>
         <p:spPr>
           <a:xfrm>
-            <a:off x="8558784" y="5025704"/>
-            <a:ext cx="18288" cy="119948"/>
+            <a:off x="8558784" y="5310781"/>
+            <a:ext cx="18288" cy="130705"/>
           </a:xfrm>
           <a:prstGeom prst="rect">
             <a:avLst/>
@@ -18190,8 +18131,8 @@
         </p:nvSpPr>
         <p:spPr>
           <a:xfrm>
-            <a:off x="10305288" y="4965730"/>
-            <a:ext cx="1143000" cy="239896"/>
+            <a:off x="10305288" y="5245429"/>
+            <a:ext cx="1143000" cy="261411"/>
           </a:xfrm>
           <a:prstGeom prst="rect">
             <a:avLst/>
@@ -18229,8 +18170,8 @@
         </p:nvSpPr>
         <p:spPr>
           <a:xfrm>
-            <a:off x="6208776" y="5205625"/>
-            <a:ext cx="310896" cy="239896"/>
+            <a:off x="6208776" y="5506840"/>
+            <a:ext cx="310896" cy="261411"/>
           </a:xfrm>
           <a:prstGeom prst="rect">
             <a:avLst/>
@@ -18268,8 +18209,8 @@
         </p:nvSpPr>
         <p:spPr>
           <a:xfrm>
-            <a:off x="6565392" y="5205625"/>
-            <a:ext cx="1920240" cy="239896"/>
+            <a:off x="6565392" y="5506840"/>
+            <a:ext cx="1920240" cy="261411"/>
           </a:xfrm>
           <a:prstGeom prst="rect">
             <a:avLst/>
@@ -18307,8 +18248,8 @@
         </p:nvSpPr>
         <p:spPr>
           <a:xfrm>
-            <a:off x="8558784" y="5265599"/>
-            <a:ext cx="18288" cy="119948"/>
+            <a:off x="8558784" y="5572192"/>
+            <a:ext cx="18288" cy="130705"/>
           </a:xfrm>
           <a:prstGeom prst="rect">
             <a:avLst/>
@@ -18327,8 +18268,8 @@
         </p:nvSpPr>
         <p:spPr>
           <a:xfrm>
-            <a:off x="10305288" y="5205625"/>
-            <a:ext cx="1143000" cy="239896"/>
+            <a:off x="10305288" y="5506840"/>
+            <a:ext cx="1143000" cy="261411"/>
           </a:xfrm>
           <a:prstGeom prst="rect">
             <a:avLst/>
@@ -18366,8 +18307,8 @@
         </p:nvSpPr>
         <p:spPr>
           <a:xfrm>
-            <a:off x="6208776" y="5445521"/>
-            <a:ext cx="310896" cy="239896"/>
+            <a:off x="6208776" y="5768250"/>
+            <a:ext cx="310896" cy="261411"/>
           </a:xfrm>
           <a:prstGeom prst="rect">
             <a:avLst/>
@@ -18405,8 +18346,8 @@
         </p:nvSpPr>
         <p:spPr>
           <a:xfrm>
-            <a:off x="6565392" y="5445521"/>
-            <a:ext cx="1920240" cy="239896"/>
+            <a:off x="6565392" y="5768250"/>
+            <a:ext cx="1920240" cy="261411"/>
           </a:xfrm>
           <a:prstGeom prst="rect">
             <a:avLst/>
@@ -18444,8 +18385,8 @@
         </p:nvSpPr>
         <p:spPr>
           <a:xfrm>
-            <a:off x="8558784" y="5505495"/>
-            <a:ext cx="18288" cy="119948"/>
+            <a:off x="8558784" y="5833603"/>
+            <a:ext cx="18288" cy="130705"/>
           </a:xfrm>
           <a:prstGeom prst="rect">
             <a:avLst/>
@@ -18464,8 +18405,8 @@
         </p:nvSpPr>
         <p:spPr>
           <a:xfrm>
-            <a:off x="10305288" y="5445521"/>
-            <a:ext cx="1143000" cy="239896"/>
+            <a:off x="10305288" y="5768250"/>
+            <a:ext cx="1143000" cy="261411"/>
           </a:xfrm>
           <a:prstGeom prst="rect">
             <a:avLst/>
@@ -18504,7 +18445,7 @@
         <p:spPr>
           <a:xfrm>
             <a:off x="3917219" y="1847088"/>
-            <a:ext cx="14630" cy="4078224"/>
+            <a:ext cx="14630" cy="4443984"/>
           </a:xfrm>
           <a:prstGeom prst="rect">
             <a:avLst/>
@@ -18524,7 +18465,7 @@
         <p:spPr>
           <a:xfrm>
             <a:off x="9467627" y="1847088"/>
-            <a:ext cx="14630" cy="4078224"/>
+            <a:ext cx="14630" cy="4443984"/>
           </a:xfrm>
           <a:prstGeom prst="rect">
             <a:avLst/>
@@ -18544,7 +18485,7 @@
         <p:spPr>
           <a:xfrm>
             <a:off x="6085332" y="1847088"/>
-            <a:ext cx="10973" cy="4078224"/>
+            <a:ext cx="10973" cy="4443984"/>
           </a:xfrm>
           <a:prstGeom prst="rect">
             <a:avLst/>
@@ -18554,65 +18495,6 @@
           </a:solidFill>
           <a:ln/>
         </p:spPr>
-      </p:sp>
-      <p:sp>
-        <p:nvSpPr>
-          <p:cNvPr id="146" name="Shape 144"/>
-          <p:cNvSpPr/>
-          <p:nvPr/>
-        </p:nvSpPr>
-        <p:spPr>
-          <a:xfrm>
-            <a:off x="457200" y="6126480"/>
-            <a:ext cx="11274552" cy="371856"/>
-          </a:xfrm>
-          <a:prstGeom prst="rect">
-            <a:avLst/>
-          </a:prstGeom>
-          <a:solidFill>
-            <a:srgbClr val="EDF4FA"/>
-          </a:solidFill>
-          <a:ln/>
-        </p:spPr>
-      </p:sp>
-      <p:sp>
-        <p:nvSpPr>
-          <p:cNvPr id="147" name="Text 145"/>
-          <p:cNvSpPr txBox="1"/>
-          <p:nvPr/>
-        </p:nvSpPr>
-        <p:spPr>
-          <a:xfrm>
-            <a:off x="658368" y="6144768"/>
-            <a:ext cx="10927080" cy="335280"/>
-          </a:xfrm>
-          <a:prstGeom prst="rect">
-            <a:avLst/>
-          </a:prstGeom>
-          <a:noFill/>
-          <a:ln/>
-        </p:spPr>
-        <p:txBody>
-          <a:bodyPr wrap="square" lIns="0" tIns="0" rIns="0" bIns="0" rtlCol="0" anchor="ctr"/>
-          <a:lstStyle/>
-          <a:p>
-            <a:pPr indent="0" marL="0">
-              <a:buNone/>
-            </a:pPr>
-            <a:r>
-              <a:rPr lang="en-US" sz="1600" b="1" dirty="0">
-                <a:solidFill>
-                  <a:srgbClr val="0B2C4A"/>
-                </a:solidFill>
-                <a:latin typeface="Inter" pitchFamily="34" charset="0"/>
-                <a:ea typeface="Inter" pitchFamily="34" charset="-122"/>
-                <a:cs typeface="Inter" pitchFamily="34" charset="-120"/>
-              </a:rPr>
-              <a:t>7 of 33 stores at or above 7.5%, led by Subaru St George at 13.8%. The group sits at 5.8%.</a:t>
-            </a:r>
-            <a:endParaRPr lang="en-US" sz="1600" dirty="0"/>
-          </a:p>
-        </p:txBody>
       </p:sp>
     </p:spTree>
   </p:cSld>
@@ -18753,7 +18635,7 @@
         <p:spPr>
           <a:xfrm>
             <a:off x="457200" y="1207008"/>
-            <a:ext cx="11274552" cy="4782312"/>
+            <a:ext cx="11274552" cy="5148072"/>
           </a:xfrm>
           <a:prstGeom prst="rect">
             <a:avLst/>
@@ -18871,7 +18753,7 @@
         <p:spPr>
           <a:xfrm>
             <a:off x="658368" y="2103120"/>
-            <a:ext cx="3489960" cy="755294"/>
+            <a:ext cx="3489960" cy="828446"/>
           </a:xfrm>
           <a:prstGeom prst="rect">
             <a:avLst/>
@@ -18891,7 +18773,7 @@
         <p:spPr>
           <a:xfrm>
             <a:off x="749808" y="2103120"/>
-            <a:ext cx="365760" cy="755294"/>
+            <a:ext cx="365760" cy="828446"/>
           </a:xfrm>
           <a:prstGeom prst="rect">
             <a:avLst/>
@@ -18930,7 +18812,7 @@
         <p:spPr>
           <a:xfrm>
             <a:off x="1097280" y="2103120"/>
-            <a:ext cx="1825752" cy="755294"/>
+            <a:ext cx="1825752" cy="828446"/>
           </a:xfrm>
           <a:prstGeom prst="rect">
             <a:avLst/>
@@ -19009,7 +18891,7 @@
         <p:spPr>
           <a:xfrm>
             <a:off x="2941320" y="2103120"/>
-            <a:ext cx="1115568" cy="755294"/>
+            <a:ext cx="1115568" cy="828446"/>
           </a:xfrm>
           <a:prstGeom prst="rect">
             <a:avLst/>
@@ -19047,8 +18929,8 @@
         </p:nvSpPr>
         <p:spPr>
           <a:xfrm>
-            <a:off x="4084320" y="2894990"/>
-            <a:ext cx="64008" cy="682142"/>
+            <a:off x="4084320" y="2968142"/>
+            <a:ext cx="64008" cy="755294"/>
           </a:xfrm>
           <a:prstGeom prst="rect">
             <a:avLst/>
@@ -19067,8 +18949,8 @@
         </p:nvSpPr>
         <p:spPr>
           <a:xfrm>
-            <a:off x="749808" y="2858414"/>
-            <a:ext cx="365760" cy="755294"/>
+            <a:off x="749808" y="2931566"/>
+            <a:ext cx="365760" cy="828446"/>
           </a:xfrm>
           <a:prstGeom prst="rect">
             <a:avLst/>
@@ -19106,8 +18988,8 @@
         </p:nvSpPr>
         <p:spPr>
           <a:xfrm>
-            <a:off x="1097280" y="2858414"/>
-            <a:ext cx="1825752" cy="755294"/>
+            <a:off x="1097280" y="2931566"/>
+            <a:ext cx="1825752" cy="828446"/>
           </a:xfrm>
           <a:prstGeom prst="rect">
             <a:avLst/>
@@ -19185,8 +19067,8 @@
         </p:nvSpPr>
         <p:spPr>
           <a:xfrm>
-            <a:off x="2941320" y="2858414"/>
-            <a:ext cx="1115568" cy="755294"/>
+            <a:off x="2941320" y="2931566"/>
+            <a:ext cx="1115568" cy="828446"/>
           </a:xfrm>
           <a:prstGeom prst="rect">
             <a:avLst/>
@@ -19224,8 +19106,8 @@
         </p:nvSpPr>
         <p:spPr>
           <a:xfrm>
-            <a:off x="658368" y="3613709"/>
-            <a:ext cx="3489960" cy="755294"/>
+            <a:off x="658368" y="3760013"/>
+            <a:ext cx="3489960" cy="828446"/>
           </a:xfrm>
           <a:prstGeom prst="rect">
             <a:avLst/>
@@ -19244,8 +19126,8 @@
         </p:nvSpPr>
         <p:spPr>
           <a:xfrm>
-            <a:off x="749808" y="3613709"/>
-            <a:ext cx="365760" cy="755294"/>
+            <a:off x="749808" y="3760013"/>
+            <a:ext cx="365760" cy="828446"/>
           </a:xfrm>
           <a:prstGeom prst="rect">
             <a:avLst/>
@@ -19283,8 +19165,8 @@
         </p:nvSpPr>
         <p:spPr>
           <a:xfrm>
-            <a:off x="1097280" y="3613709"/>
-            <a:ext cx="1825752" cy="755294"/>
+            <a:off x="1097280" y="3760013"/>
+            <a:ext cx="1825752" cy="828446"/>
           </a:xfrm>
           <a:prstGeom prst="rect">
             <a:avLst/>
@@ -19362,8 +19244,8 @@
         </p:nvSpPr>
         <p:spPr>
           <a:xfrm>
-            <a:off x="2941320" y="3613709"/>
-            <a:ext cx="1115568" cy="755294"/>
+            <a:off x="2941320" y="3760013"/>
+            <a:ext cx="1115568" cy="828446"/>
           </a:xfrm>
           <a:prstGeom prst="rect">
             <a:avLst/>
@@ -19401,8 +19283,8 @@
         </p:nvSpPr>
         <p:spPr>
           <a:xfrm>
-            <a:off x="749808" y="4369003"/>
-            <a:ext cx="365760" cy="755294"/>
+            <a:off x="749808" y="4588459"/>
+            <a:ext cx="365760" cy="828446"/>
           </a:xfrm>
           <a:prstGeom prst="rect">
             <a:avLst/>
@@ -19440,8 +19322,8 @@
         </p:nvSpPr>
         <p:spPr>
           <a:xfrm>
-            <a:off x="1097280" y="4369003"/>
-            <a:ext cx="1825752" cy="755294"/>
+            <a:off x="1097280" y="4588459"/>
+            <a:ext cx="1825752" cy="828446"/>
           </a:xfrm>
           <a:prstGeom prst="rect">
             <a:avLst/>
@@ -19519,8 +19401,8 @@
         </p:nvSpPr>
         <p:spPr>
           <a:xfrm>
-            <a:off x="2941320" y="4369003"/>
-            <a:ext cx="1115568" cy="755294"/>
+            <a:off x="2941320" y="4588459"/>
+            <a:ext cx="1115568" cy="828446"/>
           </a:xfrm>
           <a:prstGeom prst="rect">
             <a:avLst/>
@@ -19558,8 +19440,8 @@
         </p:nvSpPr>
         <p:spPr>
           <a:xfrm>
-            <a:off x="658368" y="5124298"/>
-            <a:ext cx="3489960" cy="755294"/>
+            <a:off x="658368" y="5416906"/>
+            <a:ext cx="3489960" cy="828446"/>
           </a:xfrm>
           <a:prstGeom prst="rect">
             <a:avLst/>
@@ -19578,8 +19460,8 @@
         </p:nvSpPr>
         <p:spPr>
           <a:xfrm>
-            <a:off x="749808" y="5124298"/>
-            <a:ext cx="365760" cy="755294"/>
+            <a:off x="749808" y="5416906"/>
+            <a:ext cx="365760" cy="828446"/>
           </a:xfrm>
           <a:prstGeom prst="rect">
             <a:avLst/>
@@ -19617,8 +19499,8 @@
         </p:nvSpPr>
         <p:spPr>
           <a:xfrm>
-            <a:off x="1097280" y="5124298"/>
-            <a:ext cx="1825752" cy="755294"/>
+            <a:off x="1097280" y="5416906"/>
+            <a:ext cx="1825752" cy="828446"/>
           </a:xfrm>
           <a:prstGeom prst="rect">
             <a:avLst/>
@@ -19696,8 +19578,8 @@
         </p:nvSpPr>
         <p:spPr>
           <a:xfrm>
-            <a:off x="2941320" y="5124298"/>
-            <a:ext cx="1115568" cy="755294"/>
+            <a:off x="2941320" y="5416906"/>
+            <a:ext cx="1115568" cy="828446"/>
           </a:xfrm>
           <a:prstGeom prst="rect">
             <a:avLst/>
@@ -19834,7 +19716,7 @@
         <p:spPr>
           <a:xfrm>
             <a:off x="4349496" y="2103120"/>
-            <a:ext cx="3489960" cy="755294"/>
+            <a:ext cx="3489960" cy="828446"/>
           </a:xfrm>
           <a:prstGeom prst="rect">
             <a:avLst/>
@@ -19854,7 +19736,7 @@
         <p:spPr>
           <a:xfrm>
             <a:off x="4440936" y="2103120"/>
-            <a:ext cx="365760" cy="755294"/>
+            <a:ext cx="365760" cy="828446"/>
           </a:xfrm>
           <a:prstGeom prst="rect">
             <a:avLst/>
@@ -19893,7 +19775,7 @@
         <p:spPr>
           <a:xfrm>
             <a:off x="4788408" y="2103120"/>
-            <a:ext cx="1825752" cy="755294"/>
+            <a:ext cx="1825752" cy="828446"/>
           </a:xfrm>
           <a:prstGeom prst="rect">
             <a:avLst/>
@@ -19972,7 +19854,7 @@
         <p:spPr>
           <a:xfrm>
             <a:off x="6632448" y="2103120"/>
-            <a:ext cx="1115568" cy="755294"/>
+            <a:ext cx="1115568" cy="828446"/>
           </a:xfrm>
           <a:prstGeom prst="rect">
             <a:avLst/>
@@ -20010,8 +19892,8 @@
         </p:nvSpPr>
         <p:spPr>
           <a:xfrm>
-            <a:off x="4440936" y="2858414"/>
-            <a:ext cx="365760" cy="755294"/>
+            <a:off x="4440936" y="2931566"/>
+            <a:ext cx="365760" cy="828446"/>
           </a:xfrm>
           <a:prstGeom prst="rect">
             <a:avLst/>
@@ -20049,8 +19931,8 @@
         </p:nvSpPr>
         <p:spPr>
           <a:xfrm>
-            <a:off x="4788408" y="2858414"/>
-            <a:ext cx="1825752" cy="755294"/>
+            <a:off x="4788408" y="2931566"/>
+            <a:ext cx="1825752" cy="828446"/>
           </a:xfrm>
           <a:prstGeom prst="rect">
             <a:avLst/>
@@ -20128,8 +20010,8 @@
         </p:nvSpPr>
         <p:spPr>
           <a:xfrm>
-            <a:off x="6632448" y="2858414"/>
-            <a:ext cx="1115568" cy="755294"/>
+            <a:off x="6632448" y="2931566"/>
+            <a:ext cx="1115568" cy="828446"/>
           </a:xfrm>
           <a:prstGeom prst="rect">
             <a:avLst/>
@@ -20167,8 +20049,8 @@
         </p:nvSpPr>
         <p:spPr>
           <a:xfrm>
-            <a:off x="4349496" y="3613709"/>
-            <a:ext cx="3489960" cy="755294"/>
+            <a:off x="4349496" y="3760013"/>
+            <a:ext cx="3489960" cy="828446"/>
           </a:xfrm>
           <a:prstGeom prst="rect">
             <a:avLst/>
@@ -20187,8 +20069,8 @@
         </p:nvSpPr>
         <p:spPr>
           <a:xfrm>
-            <a:off x="4440936" y="3613709"/>
-            <a:ext cx="365760" cy="755294"/>
+            <a:off x="4440936" y="3760013"/>
+            <a:ext cx="365760" cy="828446"/>
           </a:xfrm>
           <a:prstGeom prst="rect">
             <a:avLst/>
@@ -20226,8 +20108,8 @@
         </p:nvSpPr>
         <p:spPr>
           <a:xfrm>
-            <a:off x="4788408" y="3613709"/>
-            <a:ext cx="1825752" cy="755294"/>
+            <a:off x="4788408" y="3760013"/>
+            <a:ext cx="1825752" cy="828446"/>
           </a:xfrm>
           <a:prstGeom prst="rect">
             <a:avLst/>
@@ -20305,8 +20187,8 @@
         </p:nvSpPr>
         <p:spPr>
           <a:xfrm>
-            <a:off x="6632448" y="3613709"/>
-            <a:ext cx="1115568" cy="755294"/>
+            <a:off x="6632448" y="3760013"/>
+            <a:ext cx="1115568" cy="828446"/>
           </a:xfrm>
           <a:prstGeom prst="rect">
             <a:avLst/>
@@ -20344,8 +20226,8 @@
         </p:nvSpPr>
         <p:spPr>
           <a:xfrm>
-            <a:off x="4440936" y="4369003"/>
-            <a:ext cx="365760" cy="755294"/>
+            <a:off x="4440936" y="4588459"/>
+            <a:ext cx="365760" cy="828446"/>
           </a:xfrm>
           <a:prstGeom prst="rect">
             <a:avLst/>
@@ -20383,8 +20265,8 @@
         </p:nvSpPr>
         <p:spPr>
           <a:xfrm>
-            <a:off x="4788408" y="4369003"/>
-            <a:ext cx="1825752" cy="755294"/>
+            <a:off x="4788408" y="4588459"/>
+            <a:ext cx="1825752" cy="828446"/>
           </a:xfrm>
           <a:prstGeom prst="rect">
             <a:avLst/>
@@ -20462,8 +20344,8 @@
         </p:nvSpPr>
         <p:spPr>
           <a:xfrm>
-            <a:off x="6632448" y="4369003"/>
-            <a:ext cx="1115568" cy="755294"/>
+            <a:off x="6632448" y="4588459"/>
+            <a:ext cx="1115568" cy="828446"/>
           </a:xfrm>
           <a:prstGeom prst="rect">
             <a:avLst/>
@@ -20501,8 +20383,8 @@
         </p:nvSpPr>
         <p:spPr>
           <a:xfrm>
-            <a:off x="4349496" y="5124298"/>
-            <a:ext cx="3489960" cy="755294"/>
+            <a:off x="4349496" y="5416906"/>
+            <a:ext cx="3489960" cy="828446"/>
           </a:xfrm>
           <a:prstGeom prst="rect">
             <a:avLst/>
@@ -20521,8 +20403,8 @@
         </p:nvSpPr>
         <p:spPr>
           <a:xfrm>
-            <a:off x="4440936" y="5124298"/>
-            <a:ext cx="365760" cy="755294"/>
+            <a:off x="4440936" y="5416906"/>
+            <a:ext cx="365760" cy="828446"/>
           </a:xfrm>
           <a:prstGeom prst="rect">
             <a:avLst/>
@@ -20560,8 +20442,8 @@
         </p:nvSpPr>
         <p:spPr>
           <a:xfrm>
-            <a:off x="4788408" y="5124298"/>
-            <a:ext cx="1825752" cy="755294"/>
+            <a:off x="4788408" y="5416906"/>
+            <a:ext cx="1825752" cy="828446"/>
           </a:xfrm>
           <a:prstGeom prst="rect">
             <a:avLst/>
@@ -20639,8 +20521,8 @@
         </p:nvSpPr>
         <p:spPr>
           <a:xfrm>
-            <a:off x="6632448" y="5124298"/>
-            <a:ext cx="1115568" cy="755294"/>
+            <a:off x="6632448" y="5416906"/>
+            <a:ext cx="1115568" cy="828446"/>
           </a:xfrm>
           <a:prstGeom prst="rect">
             <a:avLst/>
@@ -20777,7 +20659,7 @@
         <p:spPr>
           <a:xfrm>
             <a:off x="8040624" y="2103120"/>
-            <a:ext cx="3489960" cy="755294"/>
+            <a:ext cx="3489960" cy="828446"/>
           </a:xfrm>
           <a:prstGeom prst="rect">
             <a:avLst/>
@@ -20797,7 +20679,7 @@
         <p:spPr>
           <a:xfrm>
             <a:off x="8132064" y="2103120"/>
-            <a:ext cx="365760" cy="755294"/>
+            <a:ext cx="365760" cy="828446"/>
           </a:xfrm>
           <a:prstGeom prst="rect">
             <a:avLst/>
@@ -20836,7 +20718,7 @@
         <p:spPr>
           <a:xfrm>
             <a:off x="8479536" y="2103120"/>
-            <a:ext cx="1825752" cy="755294"/>
+            <a:ext cx="1825752" cy="828446"/>
           </a:xfrm>
           <a:prstGeom prst="rect">
             <a:avLst/>
@@ -20915,7 +20797,7 @@
         <p:spPr>
           <a:xfrm>
             <a:off x="10323576" y="2103120"/>
-            <a:ext cx="1115568" cy="755294"/>
+            <a:ext cx="1115568" cy="828446"/>
           </a:xfrm>
           <a:prstGeom prst="rect">
             <a:avLst/>
@@ -20953,8 +20835,8 @@
         </p:nvSpPr>
         <p:spPr>
           <a:xfrm>
-            <a:off x="8132064" y="2858414"/>
-            <a:ext cx="365760" cy="755294"/>
+            <a:off x="8132064" y="2931566"/>
+            <a:ext cx="365760" cy="828446"/>
           </a:xfrm>
           <a:prstGeom prst="rect">
             <a:avLst/>
@@ -20992,8 +20874,8 @@
         </p:nvSpPr>
         <p:spPr>
           <a:xfrm>
-            <a:off x="8479536" y="2858414"/>
-            <a:ext cx="1825752" cy="755294"/>
+            <a:off x="8479536" y="2931566"/>
+            <a:ext cx="1825752" cy="828446"/>
           </a:xfrm>
           <a:prstGeom prst="rect">
             <a:avLst/>
@@ -21071,8 +20953,8 @@
         </p:nvSpPr>
         <p:spPr>
           <a:xfrm>
-            <a:off x="10323576" y="2858414"/>
-            <a:ext cx="1115568" cy="755294"/>
+            <a:off x="10323576" y="2931566"/>
+            <a:ext cx="1115568" cy="828446"/>
           </a:xfrm>
           <a:prstGeom prst="rect">
             <a:avLst/>
@@ -21110,8 +20992,8 @@
         </p:nvSpPr>
         <p:spPr>
           <a:xfrm>
-            <a:off x="8040624" y="3613709"/>
-            <a:ext cx="3489960" cy="755294"/>
+            <a:off x="8040624" y="3760013"/>
+            <a:ext cx="3489960" cy="828446"/>
           </a:xfrm>
           <a:prstGeom prst="rect">
             <a:avLst/>
@@ -21130,8 +21012,8 @@
         </p:nvSpPr>
         <p:spPr>
           <a:xfrm>
-            <a:off x="8132064" y="3613709"/>
-            <a:ext cx="365760" cy="755294"/>
+            <a:off x="8132064" y="3760013"/>
+            <a:ext cx="365760" cy="828446"/>
           </a:xfrm>
           <a:prstGeom prst="rect">
             <a:avLst/>
@@ -21169,8 +21051,8 @@
         </p:nvSpPr>
         <p:spPr>
           <a:xfrm>
-            <a:off x="8479536" y="3613709"/>
-            <a:ext cx="1825752" cy="755294"/>
+            <a:off x="8479536" y="3760013"/>
+            <a:ext cx="1825752" cy="828446"/>
           </a:xfrm>
           <a:prstGeom prst="rect">
             <a:avLst/>
@@ -21248,8 +21130,8 @@
         </p:nvSpPr>
         <p:spPr>
           <a:xfrm>
-            <a:off x="10323576" y="3613709"/>
-            <a:ext cx="1115568" cy="755294"/>
+            <a:off x="10323576" y="3760013"/>
+            <a:ext cx="1115568" cy="828446"/>
           </a:xfrm>
           <a:prstGeom prst="rect">
             <a:avLst/>
@@ -21287,8 +21169,8 @@
         </p:nvSpPr>
         <p:spPr>
           <a:xfrm>
-            <a:off x="11466576" y="4405579"/>
-            <a:ext cx="64008" cy="682142"/>
+            <a:off x="11466576" y="4625035"/>
+            <a:ext cx="64008" cy="755294"/>
           </a:xfrm>
           <a:prstGeom prst="rect">
             <a:avLst/>
@@ -21307,8 +21189,8 @@
         </p:nvSpPr>
         <p:spPr>
           <a:xfrm>
-            <a:off x="8132064" y="4369003"/>
-            <a:ext cx="365760" cy="755294"/>
+            <a:off x="8132064" y="4588459"/>
+            <a:ext cx="365760" cy="828446"/>
           </a:xfrm>
           <a:prstGeom prst="rect">
             <a:avLst/>
@@ -21346,8 +21228,8 @@
         </p:nvSpPr>
         <p:spPr>
           <a:xfrm>
-            <a:off x="8479536" y="4369003"/>
-            <a:ext cx="1825752" cy="755294"/>
+            <a:off x="8479536" y="4588459"/>
+            <a:ext cx="1825752" cy="828446"/>
           </a:xfrm>
           <a:prstGeom prst="rect">
             <a:avLst/>
@@ -21425,8 +21307,8 @@
         </p:nvSpPr>
         <p:spPr>
           <a:xfrm>
-            <a:off x="10323576" y="4369003"/>
-            <a:ext cx="1115568" cy="755294"/>
+            <a:off x="10323576" y="4588459"/>
+            <a:ext cx="1115568" cy="828446"/>
           </a:xfrm>
           <a:prstGeom prst="rect">
             <a:avLst/>
@@ -21464,8 +21346,8 @@
         </p:nvSpPr>
         <p:spPr>
           <a:xfrm>
-            <a:off x="8040624" y="5124298"/>
-            <a:ext cx="3489960" cy="755294"/>
+            <a:off x="8040624" y="5416906"/>
+            <a:ext cx="3489960" cy="828446"/>
           </a:xfrm>
           <a:prstGeom prst="rect">
             <a:avLst/>
@@ -21484,8 +21366,8 @@
         </p:nvSpPr>
         <p:spPr>
           <a:xfrm>
-            <a:off x="8132064" y="5124298"/>
-            <a:ext cx="365760" cy="755294"/>
+            <a:off x="8132064" y="5416906"/>
+            <a:ext cx="365760" cy="828446"/>
           </a:xfrm>
           <a:prstGeom prst="rect">
             <a:avLst/>
@@ -21523,8 +21405,8 @@
         </p:nvSpPr>
         <p:spPr>
           <a:xfrm>
-            <a:off x="8479536" y="5124298"/>
-            <a:ext cx="1825752" cy="755294"/>
+            <a:off x="8479536" y="5416906"/>
+            <a:ext cx="1825752" cy="828446"/>
           </a:xfrm>
           <a:prstGeom prst="rect">
             <a:avLst/>
@@ -21602,8 +21484,8 @@
         </p:nvSpPr>
         <p:spPr>
           <a:xfrm>
-            <a:off x="10323576" y="5124298"/>
-            <a:ext cx="1115568" cy="755294"/>
+            <a:off x="10323576" y="5416906"/>
+            <a:ext cx="1115568" cy="828446"/>
           </a:xfrm>
           <a:prstGeom prst="rect">
             <a:avLst/>
@@ -21630,65 +21512,6 @@
               <a:t>+2.5 pts</a:t>
             </a:r>
             <a:endParaRPr lang="en-US" sz="1600" dirty="0"/>
-          </a:p>
-        </p:txBody>
-      </p:sp>
-      <p:sp>
-        <p:nvSpPr>
-          <p:cNvPr id="71" name="Shape 69"/>
-          <p:cNvSpPr/>
-          <p:nvPr/>
-        </p:nvSpPr>
-        <p:spPr>
-          <a:xfrm>
-            <a:off x="457200" y="6126480"/>
-            <a:ext cx="11274552" cy="600456"/>
-          </a:xfrm>
-          <a:prstGeom prst="rect">
-            <a:avLst/>
-          </a:prstGeom>
-          <a:solidFill>
-            <a:srgbClr val="EDF4FA"/>
-          </a:solidFill>
-          <a:ln/>
-        </p:spPr>
-      </p:sp>
-      <p:sp>
-        <p:nvSpPr>
-          <p:cNvPr id="72" name="Text 70"/>
-          <p:cNvSpPr txBox="1"/>
-          <p:nvPr/>
-        </p:nvSpPr>
-        <p:spPr>
-          <a:xfrm>
-            <a:off x="658368" y="6144768"/>
-            <a:ext cx="10927080" cy="563880"/>
-          </a:xfrm>
-          <a:prstGeom prst="rect">
-            <a:avLst/>
-          </a:prstGeom>
-          <a:noFill/>
-          <a:ln/>
-        </p:spPr>
-        <p:txBody>
-          <a:bodyPr wrap="square" lIns="0" tIns="0" rIns="0" bIns="0" rtlCol="0" anchor="ctr"/>
-          <a:lstStyle/>
-          <a:p>
-            <a:pPr indent="0" marL="0">
-              <a:buNone/>
-            </a:pPr>
-            <a:r>
-              <a:rPr lang="en-US" sz="1550" b="1" dirty="0">
-                <a:solidFill>
-                  <a:srgbClr val="0B2C4A"/>
-                </a:solidFill>
-                <a:latin typeface="Inter" pitchFamily="34" charset="0"/>
-                <a:ea typeface="Inter" pitchFamily="34" charset="-122"/>
-                <a:cs typeface="Inter" pitchFamily="34" charset="-120"/>
-              </a:rPr>
-              <a:t>Ask Subaru St George, Lincoln and LR LV what changed. Ask Subaru LV, CDJR Post Falls and Toyota Spokane what got in the way. Ask Mazda, Hyundai St George and Honda Spokane what they started this year.</a:t>
-            </a:r>
-            <a:endParaRPr lang="en-US" sz="1550" dirty="0"/>
           </a:p>
         </p:txBody>
       </p:sp>
@@ -22784,7 +22607,7 @@
         <p:spPr>
           <a:xfrm>
             <a:off x="457200" y="1207008"/>
-            <a:ext cx="11274552" cy="4782312"/>
+            <a:ext cx="11274552" cy="5148072"/>
           </a:xfrm>
           <a:prstGeom prst="rect">
             <a:avLst/>
@@ -22961,7 +22784,7 @@
         <p:spPr>
           <a:xfrm>
             <a:off x="658368" y="1847088"/>
-            <a:ext cx="310896" cy="239896"/>
+            <a:ext cx="310896" cy="261411"/>
           </a:xfrm>
           <a:prstGeom prst="rect">
             <a:avLst/>
@@ -23000,7 +22823,7 @@
         <p:spPr>
           <a:xfrm>
             <a:off x="1014984" y="1847088"/>
-            <a:ext cx="1920240" cy="239896"/>
+            <a:ext cx="1920240" cy="261411"/>
           </a:xfrm>
           <a:prstGeom prst="rect">
             <a:avLst/>
@@ -23038,8 +22861,8 @@
         </p:nvSpPr>
         <p:spPr>
           <a:xfrm>
-            <a:off x="3008376" y="1907062"/>
-            <a:ext cx="1691640" cy="119948"/>
+            <a:off x="3008376" y="1912441"/>
+            <a:ext cx="1691640" cy="130705"/>
           </a:xfrm>
           <a:prstGeom prst="rect">
             <a:avLst/>
@@ -23059,7 +22882,7 @@
         <p:spPr>
           <a:xfrm>
             <a:off x="4754880" y="1847088"/>
-            <a:ext cx="1143000" cy="239896"/>
+            <a:ext cx="1143000" cy="261411"/>
           </a:xfrm>
           <a:prstGeom prst="rect">
             <a:avLst/>
@@ -23097,8 +22920,8 @@
         </p:nvSpPr>
         <p:spPr>
           <a:xfrm>
-            <a:off x="658368" y="2086984"/>
-            <a:ext cx="310896" cy="239896"/>
+            <a:off x="658368" y="2108499"/>
+            <a:ext cx="310896" cy="261411"/>
           </a:xfrm>
           <a:prstGeom prst="rect">
             <a:avLst/>
@@ -23136,8 +22959,8 @@
         </p:nvSpPr>
         <p:spPr>
           <a:xfrm>
-            <a:off x="1014984" y="2086984"/>
-            <a:ext cx="1920240" cy="239896"/>
+            <a:off x="1014984" y="2108499"/>
+            <a:ext cx="1920240" cy="261411"/>
           </a:xfrm>
           <a:prstGeom prst="rect">
             <a:avLst/>
@@ -23175,8 +22998,8 @@
         </p:nvSpPr>
         <p:spPr>
           <a:xfrm>
-            <a:off x="3008376" y="2146957"/>
-            <a:ext cx="1502209" cy="119948"/>
+            <a:off x="3008376" y="2173852"/>
+            <a:ext cx="1502209" cy="130705"/>
           </a:xfrm>
           <a:prstGeom prst="rect">
             <a:avLst/>
@@ -23195,8 +23018,8 @@
         </p:nvSpPr>
         <p:spPr>
           <a:xfrm>
-            <a:off x="4754880" y="2086984"/>
-            <a:ext cx="1143000" cy="239896"/>
+            <a:off x="4754880" y="2108499"/>
+            <a:ext cx="1143000" cy="261411"/>
           </a:xfrm>
           <a:prstGeom prst="rect">
             <a:avLst/>
@@ -23234,8 +23057,8 @@
         </p:nvSpPr>
         <p:spPr>
           <a:xfrm>
-            <a:off x="658368" y="2326879"/>
-            <a:ext cx="310896" cy="239896"/>
+            <a:off x="658368" y="2369910"/>
+            <a:ext cx="310896" cy="261411"/>
           </a:xfrm>
           <a:prstGeom prst="rect">
             <a:avLst/>
@@ -23273,8 +23096,8 @@
         </p:nvSpPr>
         <p:spPr>
           <a:xfrm>
-            <a:off x="1014984" y="2326879"/>
-            <a:ext cx="1920240" cy="239896"/>
+            <a:off x="1014984" y="2369910"/>
+            <a:ext cx="1920240" cy="261411"/>
           </a:xfrm>
           <a:prstGeom prst="rect">
             <a:avLst/>
@@ -23312,8 +23135,8 @@
         </p:nvSpPr>
         <p:spPr>
           <a:xfrm>
-            <a:off x="3008376" y="2386853"/>
-            <a:ext cx="1339459" cy="119948"/>
+            <a:off x="3008376" y="2435262"/>
+            <a:ext cx="1339459" cy="130705"/>
           </a:xfrm>
           <a:prstGeom prst="rect">
             <a:avLst/>
@@ -23332,8 +23155,8 @@
         </p:nvSpPr>
         <p:spPr>
           <a:xfrm>
-            <a:off x="4754880" y="2326879"/>
-            <a:ext cx="1143000" cy="239896"/>
+            <a:off x="4754880" y="2369910"/>
+            <a:ext cx="1143000" cy="261411"/>
           </a:xfrm>
           <a:prstGeom prst="rect">
             <a:avLst/>
@@ -23371,8 +23194,8 @@
         </p:nvSpPr>
         <p:spPr>
           <a:xfrm>
-            <a:off x="658368" y="2566775"/>
-            <a:ext cx="310896" cy="239896"/>
+            <a:off x="658368" y="2631320"/>
+            <a:ext cx="310896" cy="261411"/>
           </a:xfrm>
           <a:prstGeom prst="rect">
             <a:avLst/>
@@ -23410,8 +23233,8 @@
         </p:nvSpPr>
         <p:spPr>
           <a:xfrm>
-            <a:off x="1014984" y="2566775"/>
-            <a:ext cx="1920240" cy="239896"/>
+            <a:off x="1014984" y="2631320"/>
+            <a:ext cx="1920240" cy="261411"/>
           </a:xfrm>
           <a:prstGeom prst="rect">
             <a:avLst/>
@@ -23449,8 +23272,8 @@
         </p:nvSpPr>
         <p:spPr>
           <a:xfrm>
-            <a:off x="3008376" y="2626748"/>
-            <a:ext cx="1310026" cy="119948"/>
+            <a:off x="3008376" y="2696673"/>
+            <a:ext cx="1310026" cy="130705"/>
           </a:xfrm>
           <a:prstGeom prst="rect">
             <a:avLst/>
@@ -23469,8 +23292,8 @@
         </p:nvSpPr>
         <p:spPr>
           <a:xfrm>
-            <a:off x="4754880" y="2566775"/>
-            <a:ext cx="1143000" cy="239896"/>
+            <a:off x="4754880" y="2631320"/>
+            <a:ext cx="1143000" cy="261411"/>
           </a:xfrm>
           <a:prstGeom prst="rect">
             <a:avLst/>
@@ -23508,8 +23331,8 @@
         </p:nvSpPr>
         <p:spPr>
           <a:xfrm>
-            <a:off x="658368" y="2806670"/>
-            <a:ext cx="310896" cy="239896"/>
+            <a:off x="658368" y="2892731"/>
+            <a:ext cx="310896" cy="261411"/>
           </a:xfrm>
           <a:prstGeom prst="rect">
             <a:avLst/>
@@ -23547,8 +23370,8 @@
         </p:nvSpPr>
         <p:spPr>
           <a:xfrm>
-            <a:off x="1014984" y="2806670"/>
-            <a:ext cx="1920240" cy="239896"/>
+            <a:off x="1014984" y="2892731"/>
+            <a:ext cx="1920240" cy="261411"/>
           </a:xfrm>
           <a:prstGeom prst="rect">
             <a:avLst/>
@@ -23586,8 +23409,8 @@
         </p:nvSpPr>
         <p:spPr>
           <a:xfrm>
-            <a:off x="3008376" y="2866644"/>
-            <a:ext cx="1076659" cy="119948"/>
+            <a:off x="3008376" y="2958084"/>
+            <a:ext cx="1076659" cy="130705"/>
           </a:xfrm>
           <a:prstGeom prst="rect">
             <a:avLst/>
@@ -23606,8 +23429,8 @@
         </p:nvSpPr>
         <p:spPr>
           <a:xfrm>
-            <a:off x="4754880" y="2806670"/>
-            <a:ext cx="1143000" cy="239896"/>
+            <a:off x="4754880" y="2892731"/>
+            <a:ext cx="1143000" cy="261411"/>
           </a:xfrm>
           <a:prstGeom prst="rect">
             <a:avLst/>
@@ -23645,8 +23468,8 @@
         </p:nvSpPr>
         <p:spPr>
           <a:xfrm>
-            <a:off x="658368" y="3046566"/>
-            <a:ext cx="310896" cy="239896"/>
+            <a:off x="658368" y="3154142"/>
+            <a:ext cx="310896" cy="261411"/>
           </a:xfrm>
           <a:prstGeom prst="rect">
             <a:avLst/>
@@ -23684,8 +23507,8 @@
         </p:nvSpPr>
         <p:spPr>
           <a:xfrm>
-            <a:off x="1014984" y="3046566"/>
-            <a:ext cx="1920240" cy="239896"/>
+            <a:off x="1014984" y="3154142"/>
+            <a:ext cx="1920240" cy="261411"/>
           </a:xfrm>
           <a:prstGeom prst="rect">
             <a:avLst/>
@@ -23723,8 +23546,8 @@
         </p:nvSpPr>
         <p:spPr>
           <a:xfrm>
-            <a:off x="3008376" y="3106540"/>
-            <a:ext cx="1069015" cy="119948"/>
+            <a:off x="3008376" y="3219495"/>
+            <a:ext cx="1069015" cy="130705"/>
           </a:xfrm>
           <a:prstGeom prst="rect">
             <a:avLst/>
@@ -23743,8 +23566,8 @@
         </p:nvSpPr>
         <p:spPr>
           <a:xfrm>
-            <a:off x="4754880" y="3046566"/>
-            <a:ext cx="1143000" cy="239896"/>
+            <a:off x="4754880" y="3154142"/>
+            <a:ext cx="1143000" cy="261411"/>
           </a:xfrm>
           <a:prstGeom prst="rect">
             <a:avLst/>
@@ -23782,8 +23605,8 @@
         </p:nvSpPr>
         <p:spPr>
           <a:xfrm>
-            <a:off x="658368" y="3286461"/>
-            <a:ext cx="310896" cy="239896"/>
+            <a:off x="658368" y="3415553"/>
+            <a:ext cx="310896" cy="261411"/>
           </a:xfrm>
           <a:prstGeom prst="rect">
             <a:avLst/>
@@ -23821,8 +23644,8 @@
         </p:nvSpPr>
         <p:spPr>
           <a:xfrm>
-            <a:off x="1014984" y="3286461"/>
-            <a:ext cx="1920240" cy="239896"/>
+            <a:off x="1014984" y="3415553"/>
+            <a:ext cx="1920240" cy="261411"/>
           </a:xfrm>
           <a:prstGeom prst="rect">
             <a:avLst/>
@@ -23860,8 +23683,8 @@
         </p:nvSpPr>
         <p:spPr>
           <a:xfrm>
-            <a:off x="3008376" y="3346435"/>
-            <a:ext cx="1026449" cy="119948"/>
+            <a:off x="3008376" y="3480906"/>
+            <a:ext cx="1026449" cy="130705"/>
           </a:xfrm>
           <a:prstGeom prst="rect">
             <a:avLst/>
@@ -23880,8 +23703,8 @@
         </p:nvSpPr>
         <p:spPr>
           <a:xfrm>
-            <a:off x="4754880" y="3286461"/>
-            <a:ext cx="1143000" cy="239896"/>
+            <a:off x="4754880" y="3415553"/>
+            <a:ext cx="1143000" cy="261411"/>
           </a:xfrm>
           <a:prstGeom prst="rect">
             <a:avLst/>
@@ -23919,8 +23742,8 @@
         </p:nvSpPr>
         <p:spPr>
           <a:xfrm>
-            <a:off x="658368" y="3526357"/>
-            <a:ext cx="310896" cy="239896"/>
+            <a:off x="658368" y="3676964"/>
+            <a:ext cx="310896" cy="261411"/>
           </a:xfrm>
           <a:prstGeom prst="rect">
             <a:avLst/>
@@ -23958,8 +23781,8 @@
         </p:nvSpPr>
         <p:spPr>
           <a:xfrm>
-            <a:off x="1014984" y="3526357"/>
-            <a:ext cx="1920240" cy="239896"/>
+            <a:off x="1014984" y="3676964"/>
+            <a:ext cx="1920240" cy="261411"/>
           </a:xfrm>
           <a:prstGeom prst="rect">
             <a:avLst/>
@@ -23997,8 +23820,8 @@
         </p:nvSpPr>
         <p:spPr>
           <a:xfrm>
-            <a:off x="3008376" y="3586331"/>
-            <a:ext cx="995062" cy="119948"/>
+            <a:off x="3008376" y="3742316"/>
+            <a:ext cx="995062" cy="130705"/>
           </a:xfrm>
           <a:prstGeom prst="rect">
             <a:avLst/>
@@ -24017,8 +23840,8 @@
         </p:nvSpPr>
         <p:spPr>
           <a:xfrm>
-            <a:off x="4754880" y="3526357"/>
-            <a:ext cx="1143000" cy="239896"/>
+            <a:off x="4754880" y="3676964"/>
+            <a:ext cx="1143000" cy="261411"/>
           </a:xfrm>
           <a:prstGeom prst="rect">
             <a:avLst/>
@@ -24056,8 +23879,8 @@
         </p:nvSpPr>
         <p:spPr>
           <a:xfrm>
-            <a:off x="658368" y="3766252"/>
-            <a:ext cx="310896" cy="239896"/>
+            <a:off x="658368" y="3938375"/>
+            <a:ext cx="310896" cy="261411"/>
           </a:xfrm>
           <a:prstGeom prst="rect">
             <a:avLst/>
@@ -24095,8 +23918,8 @@
         </p:nvSpPr>
         <p:spPr>
           <a:xfrm>
-            <a:off x="1014984" y="3766252"/>
-            <a:ext cx="1920240" cy="239896"/>
+            <a:off x="1014984" y="3938375"/>
+            <a:ext cx="1920240" cy="261411"/>
           </a:xfrm>
           <a:prstGeom prst="rect">
             <a:avLst/>
@@ -24134,8 +23957,8 @@
         </p:nvSpPr>
         <p:spPr>
           <a:xfrm>
-            <a:off x="3008376" y="3826226"/>
-            <a:ext cx="912206" cy="119948"/>
+            <a:off x="3008376" y="4003727"/>
+            <a:ext cx="912206" cy="130705"/>
           </a:xfrm>
           <a:prstGeom prst="rect">
             <a:avLst/>
@@ -24154,8 +23977,8 @@
         </p:nvSpPr>
         <p:spPr>
           <a:xfrm>
-            <a:off x="4754880" y="3766252"/>
-            <a:ext cx="1143000" cy="239896"/>
+            <a:off x="4754880" y="3938375"/>
+            <a:ext cx="1143000" cy="261411"/>
           </a:xfrm>
           <a:prstGeom prst="rect">
             <a:avLst/>
@@ -24193,8 +24016,8 @@
         </p:nvSpPr>
         <p:spPr>
           <a:xfrm>
-            <a:off x="658368" y="4006148"/>
-            <a:ext cx="310896" cy="239896"/>
+            <a:off x="658368" y="4199785"/>
+            <a:ext cx="310896" cy="261411"/>
           </a:xfrm>
           <a:prstGeom prst="rect">
             <a:avLst/>
@@ -24232,8 +24055,8 @@
         </p:nvSpPr>
         <p:spPr>
           <a:xfrm>
-            <a:off x="1014984" y="4006148"/>
-            <a:ext cx="1920240" cy="239896"/>
+            <a:off x="1014984" y="4199785"/>
+            <a:ext cx="1920240" cy="261411"/>
           </a:xfrm>
           <a:prstGeom prst="rect">
             <a:avLst/>
@@ -24271,8 +24094,8 @@
         </p:nvSpPr>
         <p:spPr>
           <a:xfrm>
-            <a:off x="3008376" y="4066122"/>
-            <a:ext cx="895065" cy="119948"/>
+            <a:off x="3008376" y="4265138"/>
+            <a:ext cx="895065" cy="130705"/>
           </a:xfrm>
           <a:prstGeom prst="rect">
             <a:avLst/>
@@ -24291,8 +24114,8 @@
         </p:nvSpPr>
         <p:spPr>
           <a:xfrm>
-            <a:off x="4754880" y="4006148"/>
-            <a:ext cx="1143000" cy="239896"/>
+            <a:off x="4754880" y="4199785"/>
+            <a:ext cx="1143000" cy="261411"/>
           </a:xfrm>
           <a:prstGeom prst="rect">
             <a:avLst/>
@@ -24330,8 +24153,8 @@
         </p:nvSpPr>
         <p:spPr>
           <a:xfrm>
-            <a:off x="658368" y="4246043"/>
-            <a:ext cx="310896" cy="239896"/>
+            <a:off x="658368" y="4461196"/>
+            <a:ext cx="310896" cy="261411"/>
           </a:xfrm>
           <a:prstGeom prst="rect">
             <a:avLst/>
@@ -24369,8 +24192,8 @@
         </p:nvSpPr>
         <p:spPr>
           <a:xfrm>
-            <a:off x="1014984" y="4246043"/>
-            <a:ext cx="1920240" cy="239896"/>
+            <a:off x="1014984" y="4461196"/>
+            <a:ext cx="1920240" cy="261411"/>
           </a:xfrm>
           <a:prstGeom prst="rect">
             <a:avLst/>
@@ -24408,8 +24231,8 @@
         </p:nvSpPr>
         <p:spPr>
           <a:xfrm>
-            <a:off x="3008376" y="4306017"/>
-            <a:ext cx="893702" cy="119948"/>
+            <a:off x="3008376" y="4526549"/>
+            <a:ext cx="893702" cy="130705"/>
           </a:xfrm>
           <a:prstGeom prst="rect">
             <a:avLst/>
@@ -24428,8 +24251,8 @@
         </p:nvSpPr>
         <p:spPr>
           <a:xfrm>
-            <a:off x="4754880" y="4246043"/>
-            <a:ext cx="1143000" cy="239896"/>
+            <a:off x="4754880" y="4461196"/>
+            <a:ext cx="1143000" cy="261411"/>
           </a:xfrm>
           <a:prstGeom prst="rect">
             <a:avLst/>
@@ -24467,8 +24290,8 @@
         </p:nvSpPr>
         <p:spPr>
           <a:xfrm>
-            <a:off x="658368" y="4485939"/>
-            <a:ext cx="310896" cy="239896"/>
+            <a:off x="658368" y="4722607"/>
+            <a:ext cx="310896" cy="261411"/>
           </a:xfrm>
           <a:prstGeom prst="rect">
             <a:avLst/>
@@ -24506,8 +24329,8 @@
         </p:nvSpPr>
         <p:spPr>
           <a:xfrm>
-            <a:off x="1014984" y="4485939"/>
-            <a:ext cx="1920240" cy="239896"/>
+            <a:off x="1014984" y="4722607"/>
+            <a:ext cx="1920240" cy="261411"/>
           </a:xfrm>
           <a:prstGeom prst="rect">
             <a:avLst/>
@@ -24545,8 +24368,8 @@
         </p:nvSpPr>
         <p:spPr>
           <a:xfrm>
-            <a:off x="3008376" y="4545913"/>
-            <a:ext cx="853471" cy="119948"/>
+            <a:off x="3008376" y="4787960"/>
+            <a:ext cx="853471" cy="130705"/>
           </a:xfrm>
           <a:prstGeom prst="rect">
             <a:avLst/>
@@ -24565,8 +24388,8 @@
         </p:nvSpPr>
         <p:spPr>
           <a:xfrm>
-            <a:off x="4754880" y="4485939"/>
-            <a:ext cx="1143000" cy="239896"/>
+            <a:off x="4754880" y="4722607"/>
+            <a:ext cx="1143000" cy="261411"/>
           </a:xfrm>
           <a:prstGeom prst="rect">
             <a:avLst/>
@@ -24604,8 +24427,8 @@
         </p:nvSpPr>
         <p:spPr>
           <a:xfrm>
-            <a:off x="658368" y="4725834"/>
-            <a:ext cx="310896" cy="239896"/>
+            <a:off x="658368" y="4984018"/>
+            <a:ext cx="310896" cy="261411"/>
           </a:xfrm>
           <a:prstGeom prst="rect">
             <a:avLst/>
@@ -24643,8 +24466,8 @@
         </p:nvSpPr>
         <p:spPr>
           <a:xfrm>
-            <a:off x="1014984" y="4725834"/>
-            <a:ext cx="1920240" cy="239896"/>
+            <a:off x="1014984" y="4984018"/>
+            <a:ext cx="1920240" cy="261411"/>
           </a:xfrm>
           <a:prstGeom prst="rect">
             <a:avLst/>
@@ -24682,8 +24505,8 @@
         </p:nvSpPr>
         <p:spPr>
           <a:xfrm>
-            <a:off x="3008376" y="4785808"/>
-            <a:ext cx="852824" cy="119948"/>
+            <a:off x="3008376" y="5049371"/>
+            <a:ext cx="852824" cy="130705"/>
           </a:xfrm>
           <a:prstGeom prst="rect">
             <a:avLst/>
@@ -24702,8 +24525,8 @@
         </p:nvSpPr>
         <p:spPr>
           <a:xfrm>
-            <a:off x="4754880" y="4725834"/>
-            <a:ext cx="1143000" cy="239896"/>
+            <a:off x="4754880" y="4984018"/>
+            <a:ext cx="1143000" cy="261411"/>
           </a:xfrm>
           <a:prstGeom prst="rect">
             <a:avLst/>
@@ -24741,8 +24564,8 @@
         </p:nvSpPr>
         <p:spPr>
           <a:xfrm>
-            <a:off x="658368" y="4965730"/>
-            <a:ext cx="310896" cy="239896"/>
+            <a:off x="658368" y="5245429"/>
+            <a:ext cx="310896" cy="261411"/>
           </a:xfrm>
           <a:prstGeom prst="rect">
             <a:avLst/>
@@ -24780,8 +24603,8 @@
         </p:nvSpPr>
         <p:spPr>
           <a:xfrm>
-            <a:off x="1014984" y="4965730"/>
-            <a:ext cx="1920240" cy="239896"/>
+            <a:off x="1014984" y="5245429"/>
+            <a:ext cx="1920240" cy="261411"/>
           </a:xfrm>
           <a:prstGeom prst="rect">
             <a:avLst/>
@@ -24819,8 +24642,8 @@
         </p:nvSpPr>
         <p:spPr>
           <a:xfrm>
-            <a:off x="3008376" y="5025704"/>
-            <a:ext cx="836304" cy="119948"/>
+            <a:off x="3008376" y="5310781"/>
+            <a:ext cx="836304" cy="130705"/>
           </a:xfrm>
           <a:prstGeom prst="rect">
             <a:avLst/>
@@ -24839,8 +24662,8 @@
         </p:nvSpPr>
         <p:spPr>
           <a:xfrm>
-            <a:off x="4754880" y="4965730"/>
-            <a:ext cx="1143000" cy="239896"/>
+            <a:off x="4754880" y="5245429"/>
+            <a:ext cx="1143000" cy="261411"/>
           </a:xfrm>
           <a:prstGeom prst="rect">
             <a:avLst/>
@@ -24878,8 +24701,8 @@
         </p:nvSpPr>
         <p:spPr>
           <a:xfrm>
-            <a:off x="658368" y="5205625"/>
-            <a:ext cx="310896" cy="239896"/>
+            <a:off x="658368" y="5506840"/>
+            <a:ext cx="310896" cy="261411"/>
           </a:xfrm>
           <a:prstGeom prst="rect">
             <a:avLst/>
@@ -24917,8 +24740,8 @@
         </p:nvSpPr>
         <p:spPr>
           <a:xfrm>
-            <a:off x="1014984" y="5205625"/>
-            <a:ext cx="1920240" cy="239896"/>
+            <a:off x="1014984" y="5506840"/>
+            <a:ext cx="1920240" cy="261411"/>
           </a:xfrm>
           <a:prstGeom prst="rect">
             <a:avLst/>
@@ -24956,8 +24779,8 @@
         </p:nvSpPr>
         <p:spPr>
           <a:xfrm>
-            <a:off x="3008376" y="5265599"/>
-            <a:ext cx="791605" cy="119948"/>
+            <a:off x="3008376" y="5572192"/>
+            <a:ext cx="791605" cy="130705"/>
           </a:xfrm>
           <a:prstGeom prst="rect">
             <a:avLst/>
@@ -24976,8 +24799,8 @@
         </p:nvSpPr>
         <p:spPr>
           <a:xfrm>
-            <a:off x="4754880" y="5205625"/>
-            <a:ext cx="1143000" cy="239896"/>
+            <a:off x="4754880" y="5506840"/>
+            <a:ext cx="1143000" cy="261411"/>
           </a:xfrm>
           <a:prstGeom prst="rect">
             <a:avLst/>
@@ -25015,8 +24838,8 @@
         </p:nvSpPr>
         <p:spPr>
           <a:xfrm>
-            <a:off x="658368" y="5445521"/>
-            <a:ext cx="310896" cy="239896"/>
+            <a:off x="658368" y="5768250"/>
+            <a:ext cx="310896" cy="261411"/>
           </a:xfrm>
           <a:prstGeom prst="rect">
             <a:avLst/>
@@ -25054,8 +24877,8 @@
         </p:nvSpPr>
         <p:spPr>
           <a:xfrm>
-            <a:off x="1014984" y="5445521"/>
-            <a:ext cx="1920240" cy="239896"/>
+            <a:off x="1014984" y="5768250"/>
+            <a:ext cx="1920240" cy="261411"/>
           </a:xfrm>
           <a:prstGeom prst="rect">
             <a:avLst/>
@@ -25093,8 +24916,8 @@
         </p:nvSpPr>
         <p:spPr>
           <a:xfrm>
-            <a:off x="3008376" y="5505495"/>
-            <a:ext cx="790712" cy="119948"/>
+            <a:off x="3008376" y="5833603"/>
+            <a:ext cx="790712" cy="130705"/>
           </a:xfrm>
           <a:prstGeom prst="rect">
             <a:avLst/>
@@ -25113,8 +24936,8 @@
         </p:nvSpPr>
         <p:spPr>
           <a:xfrm>
-            <a:off x="4754880" y="5445521"/>
-            <a:ext cx="1143000" cy="239896"/>
+            <a:off x="4754880" y="5768250"/>
+            <a:ext cx="1143000" cy="261411"/>
           </a:xfrm>
           <a:prstGeom prst="rect">
             <a:avLst/>
@@ -25152,8 +24975,8 @@
         </p:nvSpPr>
         <p:spPr>
           <a:xfrm>
-            <a:off x="658368" y="5685416"/>
-            <a:ext cx="310896" cy="239896"/>
+            <a:off x="658368" y="6029661"/>
+            <a:ext cx="310896" cy="261411"/>
           </a:xfrm>
           <a:prstGeom prst="rect">
             <a:avLst/>
@@ -25191,8 +25014,8 @@
         </p:nvSpPr>
         <p:spPr>
           <a:xfrm>
-            <a:off x="1014984" y="5685416"/>
-            <a:ext cx="1920240" cy="239896"/>
+            <a:off x="1014984" y="6029661"/>
+            <a:ext cx="1920240" cy="261411"/>
           </a:xfrm>
           <a:prstGeom prst="rect">
             <a:avLst/>
@@ -25230,8 +25053,8 @@
         </p:nvSpPr>
         <p:spPr>
           <a:xfrm>
-            <a:off x="3008376" y="5745390"/>
-            <a:ext cx="773020" cy="119948"/>
+            <a:off x="3008376" y="6095014"/>
+            <a:ext cx="773020" cy="130705"/>
           </a:xfrm>
           <a:prstGeom prst="rect">
             <a:avLst/>
@@ -25250,8 +25073,8 @@
         </p:nvSpPr>
         <p:spPr>
           <a:xfrm>
-            <a:off x="4754880" y="5685416"/>
-            <a:ext cx="1143000" cy="239896"/>
+            <a:off x="4754880" y="6029661"/>
+            <a:ext cx="1143000" cy="261411"/>
           </a:xfrm>
           <a:prstGeom prst="rect">
             <a:avLst/>
@@ -25290,7 +25113,7 @@
         <p:spPr>
           <a:xfrm>
             <a:off x="6208776" y="1847088"/>
-            <a:ext cx="310896" cy="239896"/>
+            <a:ext cx="310896" cy="261411"/>
           </a:xfrm>
           <a:prstGeom prst="rect">
             <a:avLst/>
@@ -25329,7 +25152,7 @@
         <p:spPr>
           <a:xfrm>
             <a:off x="6565392" y="1847088"/>
-            <a:ext cx="1920240" cy="239896"/>
+            <a:ext cx="1920240" cy="261411"/>
           </a:xfrm>
           <a:prstGeom prst="rect">
             <a:avLst/>
@@ -25367,8 +25190,8 @@
         </p:nvSpPr>
         <p:spPr>
           <a:xfrm>
-            <a:off x="8558784" y="1907062"/>
-            <a:ext cx="770247" cy="119948"/>
+            <a:off x="8558784" y="1912441"/>
+            <a:ext cx="770247" cy="130705"/>
           </a:xfrm>
           <a:prstGeom prst="rect">
             <a:avLst/>
@@ -25388,7 +25211,7 @@
         <p:spPr>
           <a:xfrm>
             <a:off x="10305288" y="1847088"/>
-            <a:ext cx="1143000" cy="239896"/>
+            <a:ext cx="1143000" cy="261411"/>
           </a:xfrm>
           <a:prstGeom prst="rect">
             <a:avLst/>
@@ -25426,8 +25249,8 @@
         </p:nvSpPr>
         <p:spPr>
           <a:xfrm>
-            <a:off x="6208776" y="2086984"/>
-            <a:ext cx="310896" cy="239896"/>
+            <a:off x="6208776" y="2108499"/>
+            <a:ext cx="310896" cy="261411"/>
           </a:xfrm>
           <a:prstGeom prst="rect">
             <a:avLst/>
@@ -25465,8 +25288,8 @@
         </p:nvSpPr>
         <p:spPr>
           <a:xfrm>
-            <a:off x="6565392" y="2086984"/>
-            <a:ext cx="1920240" cy="239896"/>
+            <a:off x="6565392" y="2108499"/>
+            <a:ext cx="1920240" cy="261411"/>
           </a:xfrm>
           <a:prstGeom prst="rect">
             <a:avLst/>
@@ -25504,8 +25327,8 @@
         </p:nvSpPr>
         <p:spPr>
           <a:xfrm>
-            <a:off x="8558784" y="2146957"/>
-            <a:ext cx="758672" cy="119948"/>
+            <a:off x="8558784" y="2173852"/>
+            <a:ext cx="758672" cy="130705"/>
           </a:xfrm>
           <a:prstGeom prst="rect">
             <a:avLst/>
@@ -25524,8 +25347,8 @@
         </p:nvSpPr>
         <p:spPr>
           <a:xfrm>
-            <a:off x="10305288" y="2086984"/>
-            <a:ext cx="1143000" cy="239896"/>
+            <a:off x="10305288" y="2108499"/>
+            <a:ext cx="1143000" cy="261411"/>
           </a:xfrm>
           <a:prstGeom prst="rect">
             <a:avLst/>
@@ -25563,8 +25386,8 @@
         </p:nvSpPr>
         <p:spPr>
           <a:xfrm>
-            <a:off x="6208776" y="2326879"/>
-            <a:ext cx="310896" cy="239896"/>
+            <a:off x="6208776" y="2369910"/>
+            <a:ext cx="310896" cy="261411"/>
           </a:xfrm>
           <a:prstGeom prst="rect">
             <a:avLst/>
@@ -25602,8 +25425,8 @@
         </p:nvSpPr>
         <p:spPr>
           <a:xfrm>
-            <a:off x="6565392" y="2326879"/>
-            <a:ext cx="1920240" cy="239896"/>
+            <a:off x="6565392" y="2369910"/>
+            <a:ext cx="1920240" cy="261411"/>
           </a:xfrm>
           <a:prstGeom prst="rect">
             <a:avLst/>
@@ -25641,8 +25464,8 @@
         </p:nvSpPr>
         <p:spPr>
           <a:xfrm>
-            <a:off x="8558784" y="2386853"/>
-            <a:ext cx="726142" cy="119948"/>
+            <a:off x="8558784" y="2435262"/>
+            <a:ext cx="726142" cy="130705"/>
           </a:xfrm>
           <a:prstGeom prst="rect">
             <a:avLst/>
@@ -25661,8 +25484,8 @@
         </p:nvSpPr>
         <p:spPr>
           <a:xfrm>
-            <a:off x="10305288" y="2326879"/>
-            <a:ext cx="1143000" cy="239896"/>
+            <a:off x="10305288" y="2369910"/>
+            <a:ext cx="1143000" cy="261411"/>
           </a:xfrm>
           <a:prstGeom prst="rect">
             <a:avLst/>
@@ -25700,8 +25523,8 @@
         </p:nvSpPr>
         <p:spPr>
           <a:xfrm>
-            <a:off x="6208776" y="2566775"/>
-            <a:ext cx="310896" cy="239896"/>
+            <a:off x="6208776" y="2631320"/>
+            <a:ext cx="310896" cy="261411"/>
           </a:xfrm>
           <a:prstGeom prst="rect">
             <a:avLst/>
@@ -25739,8 +25562,8 @@
         </p:nvSpPr>
         <p:spPr>
           <a:xfrm>
-            <a:off x="6565392" y="2566775"/>
-            <a:ext cx="1920240" cy="239896"/>
+            <a:off x="6565392" y="2631320"/>
+            <a:ext cx="1920240" cy="261411"/>
           </a:xfrm>
           <a:prstGeom prst="rect">
             <a:avLst/>
@@ -25778,8 +25601,8 @@
         </p:nvSpPr>
         <p:spPr>
           <a:xfrm>
-            <a:off x="8558784" y="2626748"/>
-            <a:ext cx="722110" cy="119948"/>
+            <a:off x="8558784" y="2696673"/>
+            <a:ext cx="722110" cy="130705"/>
           </a:xfrm>
           <a:prstGeom prst="rect">
             <a:avLst/>
@@ -25798,8 +25621,8 @@
         </p:nvSpPr>
         <p:spPr>
           <a:xfrm>
-            <a:off x="10305288" y="2566775"/>
-            <a:ext cx="1143000" cy="239896"/>
+            <a:off x="10305288" y="2631320"/>
+            <a:ext cx="1143000" cy="261411"/>
           </a:xfrm>
           <a:prstGeom prst="rect">
             <a:avLst/>
@@ -25837,8 +25660,8 @@
         </p:nvSpPr>
         <p:spPr>
           <a:xfrm>
-            <a:off x="6208776" y="2806670"/>
-            <a:ext cx="310896" cy="239896"/>
+            <a:off x="6208776" y="2892731"/>
+            <a:ext cx="310896" cy="261411"/>
           </a:xfrm>
           <a:prstGeom prst="rect">
             <a:avLst/>
@@ -25876,8 +25699,8 @@
         </p:nvSpPr>
         <p:spPr>
           <a:xfrm>
-            <a:off x="6565392" y="2806670"/>
-            <a:ext cx="1920240" cy="239896"/>
+            <a:off x="6565392" y="2892731"/>
+            <a:ext cx="1920240" cy="261411"/>
           </a:xfrm>
           <a:prstGeom prst="rect">
             <a:avLst/>
@@ -25915,8 +25738,8 @@
         </p:nvSpPr>
         <p:spPr>
           <a:xfrm>
-            <a:off x="8558784" y="2866644"/>
-            <a:ext cx="698534" cy="119948"/>
+            <a:off x="8558784" y="2958084"/>
+            <a:ext cx="698534" cy="130705"/>
           </a:xfrm>
           <a:prstGeom prst="rect">
             <a:avLst/>
@@ -25935,8 +25758,8 @@
         </p:nvSpPr>
         <p:spPr>
           <a:xfrm>
-            <a:off x="10305288" y="2806670"/>
-            <a:ext cx="1143000" cy="239896"/>
+            <a:off x="10305288" y="2892731"/>
+            <a:ext cx="1143000" cy="261411"/>
           </a:xfrm>
           <a:prstGeom prst="rect">
             <a:avLst/>
@@ -25974,8 +25797,8 @@
         </p:nvSpPr>
         <p:spPr>
           <a:xfrm>
-            <a:off x="6208776" y="3046566"/>
-            <a:ext cx="310896" cy="239896"/>
+            <a:off x="6208776" y="3154142"/>
+            <a:ext cx="310896" cy="261411"/>
           </a:xfrm>
           <a:prstGeom prst="rect">
             <a:avLst/>
@@ -26013,8 +25836,8 @@
         </p:nvSpPr>
         <p:spPr>
           <a:xfrm>
-            <a:off x="6565392" y="3046566"/>
-            <a:ext cx="1920240" cy="239896"/>
+            <a:off x="6565392" y="3154142"/>
+            <a:ext cx="1920240" cy="261411"/>
           </a:xfrm>
           <a:prstGeom prst="rect">
             <a:avLst/>
@@ -26052,8 +25875,8 @@
         </p:nvSpPr>
         <p:spPr>
           <a:xfrm>
-            <a:off x="8558784" y="3106540"/>
-            <a:ext cx="684930" cy="119948"/>
+            <a:off x="8558784" y="3219495"/>
+            <a:ext cx="684930" cy="130705"/>
           </a:xfrm>
           <a:prstGeom prst="rect">
             <a:avLst/>
@@ -26072,8 +25895,8 @@
         </p:nvSpPr>
         <p:spPr>
           <a:xfrm>
-            <a:off x="10305288" y="3046566"/>
-            <a:ext cx="1143000" cy="239896"/>
+            <a:off x="10305288" y="3154142"/>
+            <a:ext cx="1143000" cy="261411"/>
           </a:xfrm>
           <a:prstGeom prst="rect">
             <a:avLst/>
@@ -26111,8 +25934,8 @@
         </p:nvSpPr>
         <p:spPr>
           <a:xfrm>
-            <a:off x="6208776" y="3286461"/>
-            <a:ext cx="310896" cy="239896"/>
+            <a:off x="6208776" y="3415553"/>
+            <a:ext cx="310896" cy="261411"/>
           </a:xfrm>
           <a:prstGeom prst="rect">
             <a:avLst/>
@@ -26150,8 +25973,8 @@
         </p:nvSpPr>
         <p:spPr>
           <a:xfrm>
-            <a:off x="6565392" y="3286461"/>
-            <a:ext cx="1920240" cy="239896"/>
+            <a:off x="6565392" y="3415553"/>
+            <a:ext cx="1920240" cy="261411"/>
           </a:xfrm>
           <a:prstGeom prst="rect">
             <a:avLst/>
@@ -26189,8 +26012,8 @@
         </p:nvSpPr>
         <p:spPr>
           <a:xfrm>
-            <a:off x="8558784" y="3346435"/>
-            <a:ext cx="681795" cy="119948"/>
+            <a:off x="8558784" y="3480906"/>
+            <a:ext cx="681795" cy="130705"/>
           </a:xfrm>
           <a:prstGeom prst="rect">
             <a:avLst/>
@@ -26209,8 +26032,8 @@
         </p:nvSpPr>
         <p:spPr>
           <a:xfrm>
-            <a:off x="10305288" y="3286461"/>
-            <a:ext cx="1143000" cy="239896"/>
+            <a:off x="10305288" y="3415553"/>
+            <a:ext cx="1143000" cy="261411"/>
           </a:xfrm>
           <a:prstGeom prst="rect">
             <a:avLst/>
@@ -26248,8 +26071,8 @@
         </p:nvSpPr>
         <p:spPr>
           <a:xfrm>
-            <a:off x="6208776" y="3526357"/>
-            <a:ext cx="310896" cy="239896"/>
+            <a:off x="6208776" y="3676964"/>
+            <a:ext cx="310896" cy="261411"/>
           </a:xfrm>
           <a:prstGeom prst="rect">
             <a:avLst/>
@@ -26287,8 +26110,8 @@
         </p:nvSpPr>
         <p:spPr>
           <a:xfrm>
-            <a:off x="6565392" y="3526357"/>
-            <a:ext cx="1920240" cy="239896"/>
+            <a:off x="6565392" y="3676964"/>
+            <a:ext cx="1920240" cy="261411"/>
           </a:xfrm>
           <a:prstGeom prst="rect">
             <a:avLst/>
@@ -26326,8 +26149,8 @@
         </p:nvSpPr>
         <p:spPr>
           <a:xfrm>
-            <a:off x="8558784" y="3586331"/>
-            <a:ext cx="680768" cy="119948"/>
+            <a:off x="8558784" y="3742316"/>
+            <a:ext cx="680768" cy="130705"/>
           </a:xfrm>
           <a:prstGeom prst="rect">
             <a:avLst/>
@@ -26346,8 +26169,8 @@
         </p:nvSpPr>
         <p:spPr>
           <a:xfrm>
-            <a:off x="10305288" y="3526357"/>
-            <a:ext cx="1143000" cy="239896"/>
+            <a:off x="10305288" y="3676964"/>
+            <a:ext cx="1143000" cy="261411"/>
           </a:xfrm>
           <a:prstGeom prst="rect">
             <a:avLst/>
@@ -26385,8 +26208,8 @@
         </p:nvSpPr>
         <p:spPr>
           <a:xfrm>
-            <a:off x="6208776" y="3766252"/>
-            <a:ext cx="310896" cy="239896"/>
+            <a:off x="6208776" y="3938375"/>
+            <a:ext cx="310896" cy="261411"/>
           </a:xfrm>
           <a:prstGeom prst="rect">
             <a:avLst/>
@@ -26424,8 +26247,8 @@
         </p:nvSpPr>
         <p:spPr>
           <a:xfrm>
-            <a:off x="6565392" y="3766252"/>
-            <a:ext cx="1920240" cy="239896"/>
+            <a:off x="6565392" y="3938375"/>
+            <a:ext cx="1920240" cy="261411"/>
           </a:xfrm>
           <a:prstGeom prst="rect">
             <a:avLst/>
@@ -26463,8 +26286,8 @@
         </p:nvSpPr>
         <p:spPr>
           <a:xfrm>
-            <a:off x="8558784" y="3826226"/>
-            <a:ext cx="600097" cy="119948"/>
+            <a:off x="8558784" y="4003727"/>
+            <a:ext cx="600097" cy="130705"/>
           </a:xfrm>
           <a:prstGeom prst="rect">
             <a:avLst/>
@@ -26483,8 +26306,8 @@
         </p:nvSpPr>
         <p:spPr>
           <a:xfrm>
-            <a:off x="10305288" y="3766252"/>
-            <a:ext cx="1143000" cy="239896"/>
+            <a:off x="10305288" y="3938375"/>
+            <a:ext cx="1143000" cy="261411"/>
           </a:xfrm>
           <a:prstGeom prst="rect">
             <a:avLst/>
@@ -26522,8 +26345,8 @@
         </p:nvSpPr>
         <p:spPr>
           <a:xfrm>
-            <a:off x="6208776" y="4006148"/>
-            <a:ext cx="310896" cy="239896"/>
+            <a:off x="6208776" y="4199785"/>
+            <a:ext cx="310896" cy="261411"/>
           </a:xfrm>
           <a:prstGeom prst="rect">
             <a:avLst/>
@@ -26561,8 +26384,8 @@
         </p:nvSpPr>
         <p:spPr>
           <a:xfrm>
-            <a:off x="6565392" y="4006148"/>
-            <a:ext cx="1920240" cy="239896"/>
+            <a:off x="6565392" y="4199785"/>
+            <a:ext cx="1920240" cy="261411"/>
           </a:xfrm>
           <a:prstGeom prst="rect">
             <a:avLst/>
@@ -26600,8 +26423,8 @@
         </p:nvSpPr>
         <p:spPr>
           <a:xfrm>
-            <a:off x="8558784" y="4066122"/>
-            <a:ext cx="597592" cy="119948"/>
+            <a:off x="8558784" y="4265138"/>
+            <a:ext cx="597592" cy="130705"/>
           </a:xfrm>
           <a:prstGeom prst="rect">
             <a:avLst/>
@@ -26620,8 +26443,8 @@
         </p:nvSpPr>
         <p:spPr>
           <a:xfrm>
-            <a:off x="10305288" y="4006148"/>
-            <a:ext cx="1143000" cy="239896"/>
+            <a:off x="10305288" y="4199785"/>
+            <a:ext cx="1143000" cy="261411"/>
           </a:xfrm>
           <a:prstGeom prst="rect">
             <a:avLst/>
@@ -26659,8 +26482,8 @@
         </p:nvSpPr>
         <p:spPr>
           <a:xfrm>
-            <a:off x="6208776" y="4246043"/>
-            <a:ext cx="310896" cy="239896"/>
+            <a:off x="6208776" y="4461196"/>
+            <a:ext cx="310896" cy="261411"/>
           </a:xfrm>
           <a:prstGeom prst="rect">
             <a:avLst/>
@@ -26698,8 +26521,8 @@
         </p:nvSpPr>
         <p:spPr>
           <a:xfrm>
-            <a:off x="6565392" y="4246043"/>
-            <a:ext cx="1920240" cy="239896"/>
+            <a:off x="6565392" y="4461196"/>
+            <a:ext cx="1920240" cy="261411"/>
           </a:xfrm>
           <a:prstGeom prst="rect">
             <a:avLst/>
@@ -26737,8 +26560,8 @@
         </p:nvSpPr>
         <p:spPr>
           <a:xfrm>
-            <a:off x="8558784" y="4306017"/>
-            <a:ext cx="518858" cy="119948"/>
+            <a:off x="8558784" y="4526549"/>
+            <a:ext cx="518858" cy="130705"/>
           </a:xfrm>
           <a:prstGeom prst="rect">
             <a:avLst/>
@@ -26757,8 +26580,8 @@
         </p:nvSpPr>
         <p:spPr>
           <a:xfrm>
-            <a:off x="10305288" y="4246043"/>
-            <a:ext cx="1143000" cy="239896"/>
+            <a:off x="10305288" y="4461196"/>
+            <a:ext cx="1143000" cy="261411"/>
           </a:xfrm>
           <a:prstGeom prst="rect">
             <a:avLst/>
@@ -26796,8 +26619,8 @@
         </p:nvSpPr>
         <p:spPr>
           <a:xfrm>
-            <a:off x="6208776" y="4485939"/>
-            <a:ext cx="310896" cy="239896"/>
+            <a:off x="6208776" y="4722607"/>
+            <a:ext cx="310896" cy="261411"/>
           </a:xfrm>
           <a:prstGeom prst="rect">
             <a:avLst/>
@@ -26835,8 +26658,8 @@
         </p:nvSpPr>
         <p:spPr>
           <a:xfrm>
-            <a:off x="6565392" y="4485939"/>
-            <a:ext cx="1920240" cy="239896"/>
+            <a:off x="6565392" y="4722607"/>
+            <a:ext cx="1920240" cy="261411"/>
           </a:xfrm>
           <a:prstGeom prst="rect">
             <a:avLst/>
@@ -26874,8 +26697,8 @@
         </p:nvSpPr>
         <p:spPr>
           <a:xfrm>
-            <a:off x="8558784" y="4545913"/>
-            <a:ext cx="491810" cy="119948"/>
+            <a:off x="8558784" y="4787960"/>
+            <a:ext cx="491810" cy="130705"/>
           </a:xfrm>
           <a:prstGeom prst="rect">
             <a:avLst/>
@@ -26894,8 +26717,8 @@
         </p:nvSpPr>
         <p:spPr>
           <a:xfrm>
-            <a:off x="10305288" y="4485939"/>
-            <a:ext cx="1143000" cy="239896"/>
+            <a:off x="10305288" y="4722607"/>
+            <a:ext cx="1143000" cy="261411"/>
           </a:xfrm>
           <a:prstGeom prst="rect">
             <a:avLst/>
@@ -26933,8 +26756,8 @@
         </p:nvSpPr>
         <p:spPr>
           <a:xfrm>
-            <a:off x="6208776" y="4725834"/>
-            <a:ext cx="310896" cy="239896"/>
+            <a:off x="6208776" y="4984018"/>
+            <a:ext cx="310896" cy="261411"/>
           </a:xfrm>
           <a:prstGeom prst="rect">
             <a:avLst/>
@@ -26972,8 +26795,8 @@
         </p:nvSpPr>
         <p:spPr>
           <a:xfrm>
-            <a:off x="6565392" y="4725834"/>
-            <a:ext cx="1920240" cy="239896"/>
+            <a:off x="6565392" y="4984018"/>
+            <a:ext cx="1920240" cy="261411"/>
           </a:xfrm>
           <a:prstGeom prst="rect">
             <a:avLst/>
@@ -27011,8 +26834,8 @@
         </p:nvSpPr>
         <p:spPr>
           <a:xfrm>
-            <a:off x="8558784" y="4785808"/>
-            <a:ext cx="459272" cy="119948"/>
+            <a:off x="8558784" y="5049371"/>
+            <a:ext cx="459272" cy="130705"/>
           </a:xfrm>
           <a:prstGeom prst="rect">
             <a:avLst/>
@@ -27031,8 +26854,8 @@
         </p:nvSpPr>
         <p:spPr>
           <a:xfrm>
-            <a:off x="10305288" y="4725834"/>
-            <a:ext cx="1143000" cy="239896"/>
+            <a:off x="10305288" y="4984018"/>
+            <a:ext cx="1143000" cy="261411"/>
           </a:xfrm>
           <a:prstGeom prst="rect">
             <a:avLst/>
@@ -27070,8 +26893,8 @@
         </p:nvSpPr>
         <p:spPr>
           <a:xfrm>
-            <a:off x="6208776" y="4965730"/>
-            <a:ext cx="310896" cy="239896"/>
+            <a:off x="6208776" y="5245429"/>
+            <a:ext cx="310896" cy="261411"/>
           </a:xfrm>
           <a:prstGeom prst="rect">
             <a:avLst/>
@@ -27109,8 +26932,8 @@
         </p:nvSpPr>
         <p:spPr>
           <a:xfrm>
-            <a:off x="6565392" y="4965730"/>
-            <a:ext cx="1920240" cy="239896"/>
+            <a:off x="6565392" y="5245429"/>
+            <a:ext cx="1920240" cy="261411"/>
           </a:xfrm>
           <a:prstGeom prst="rect">
             <a:avLst/>
@@ -27148,8 +26971,8 @@
         </p:nvSpPr>
         <p:spPr>
           <a:xfrm>
-            <a:off x="8558784" y="5025704"/>
-            <a:ext cx="345940" cy="119948"/>
+            <a:off x="8558784" y="5310781"/>
+            <a:ext cx="345940" cy="130705"/>
           </a:xfrm>
           <a:prstGeom prst="rect">
             <a:avLst/>
@@ -27168,8 +26991,8 @@
         </p:nvSpPr>
         <p:spPr>
           <a:xfrm>
-            <a:off x="10305288" y="4965730"/>
-            <a:ext cx="1143000" cy="239896"/>
+            <a:off x="10305288" y="5245429"/>
+            <a:ext cx="1143000" cy="261411"/>
           </a:xfrm>
           <a:prstGeom prst="rect">
             <a:avLst/>
@@ -27207,8 +27030,8 @@
         </p:nvSpPr>
         <p:spPr>
           <a:xfrm>
-            <a:off x="6208776" y="5205625"/>
-            <a:ext cx="310896" cy="239896"/>
+            <a:off x="6208776" y="5506840"/>
+            <a:ext cx="310896" cy="261411"/>
           </a:xfrm>
           <a:prstGeom prst="rect">
             <a:avLst/>
@@ -27246,8 +27069,8 @@
         </p:nvSpPr>
         <p:spPr>
           <a:xfrm>
-            <a:off x="6565392" y="5205625"/>
-            <a:ext cx="1920240" cy="239896"/>
+            <a:off x="6565392" y="5506840"/>
+            <a:ext cx="1920240" cy="261411"/>
           </a:xfrm>
           <a:prstGeom prst="rect">
             <a:avLst/>
@@ -27285,8 +27108,8 @@
         </p:nvSpPr>
         <p:spPr>
           <a:xfrm>
-            <a:off x="8558784" y="5265599"/>
-            <a:ext cx="261424" cy="119948"/>
+            <a:off x="8558784" y="5572192"/>
+            <a:ext cx="261424" cy="130705"/>
           </a:xfrm>
           <a:prstGeom prst="rect">
             <a:avLst/>
@@ -27305,8 +27128,8 @@
         </p:nvSpPr>
         <p:spPr>
           <a:xfrm>
-            <a:off x="10305288" y="5205625"/>
-            <a:ext cx="1143000" cy="239896"/>
+            <a:off x="10305288" y="5506840"/>
+            <a:ext cx="1143000" cy="261411"/>
           </a:xfrm>
           <a:prstGeom prst="rect">
             <a:avLst/>
@@ -27344,8 +27167,8 @@
         </p:nvSpPr>
         <p:spPr>
           <a:xfrm>
-            <a:off x="6208776" y="5445521"/>
-            <a:ext cx="310896" cy="239896"/>
+            <a:off x="6208776" y="5768250"/>
+            <a:ext cx="310896" cy="261411"/>
           </a:xfrm>
           <a:prstGeom prst="rect">
             <a:avLst/>
@@ -27383,8 +27206,8 @@
         </p:nvSpPr>
         <p:spPr>
           <a:xfrm>
-            <a:off x="6565392" y="5445521"/>
-            <a:ext cx="1920240" cy="239896"/>
+            <a:off x="6565392" y="5768250"/>
+            <a:ext cx="1920240" cy="261411"/>
           </a:xfrm>
           <a:prstGeom prst="rect">
             <a:avLst/>
@@ -27422,8 +27245,8 @@
         </p:nvSpPr>
         <p:spPr>
           <a:xfrm>
-            <a:off x="8558784" y="5505495"/>
-            <a:ext cx="259273" cy="119948"/>
+            <a:off x="8558784" y="5833603"/>
+            <a:ext cx="259273" cy="130705"/>
           </a:xfrm>
           <a:prstGeom prst="rect">
             <a:avLst/>
@@ -27442,8 +27265,8 @@
         </p:nvSpPr>
         <p:spPr>
           <a:xfrm>
-            <a:off x="10305288" y="5445521"/>
-            <a:ext cx="1143000" cy="239896"/>
+            <a:off x="10305288" y="5768250"/>
+            <a:ext cx="1143000" cy="261411"/>
           </a:xfrm>
           <a:prstGeom prst="rect">
             <a:avLst/>
@@ -27482,7 +27305,7 @@
         <p:spPr>
           <a:xfrm>
             <a:off x="3923086" y="1847088"/>
-            <a:ext cx="14630" cy="4078224"/>
+            <a:ext cx="14630" cy="4443984"/>
           </a:xfrm>
           <a:prstGeom prst="rect">
             <a:avLst/>
@@ -27502,7 +27325,7 @@
         <p:spPr>
           <a:xfrm>
             <a:off x="9473494" y="1847088"/>
-            <a:ext cx="14630" cy="4078224"/>
+            <a:ext cx="14630" cy="4443984"/>
           </a:xfrm>
           <a:prstGeom prst="rect">
             <a:avLst/>
@@ -27522,7 +27345,7 @@
         <p:spPr>
           <a:xfrm>
             <a:off x="6085332" y="1847088"/>
-            <a:ext cx="10973" cy="4078224"/>
+            <a:ext cx="10973" cy="4443984"/>
           </a:xfrm>
           <a:prstGeom prst="rect">
             <a:avLst/>
@@ -27532,65 +27355,6 @@
           </a:solidFill>
           <a:ln/>
         </p:spPr>
-      </p:sp>
-      <p:sp>
-        <p:nvSpPr>
-          <p:cNvPr id="146" name="Shape 144"/>
-          <p:cNvSpPr/>
-          <p:nvPr/>
-        </p:nvSpPr>
-        <p:spPr>
-          <a:xfrm>
-            <a:off x="457200" y="6126480"/>
-            <a:ext cx="11274552" cy="371856"/>
-          </a:xfrm>
-          <a:prstGeom prst="rect">
-            <a:avLst/>
-          </a:prstGeom>
-          <a:solidFill>
-            <a:srgbClr val="EDF4FA"/>
-          </a:solidFill>
-          <a:ln/>
-        </p:spPr>
-      </p:sp>
-      <p:sp>
-        <p:nvSpPr>
-          <p:cNvPr id="147" name="Text 145"/>
-          <p:cNvSpPr txBox="1"/>
-          <p:nvPr/>
-        </p:nvSpPr>
-        <p:spPr>
-          <a:xfrm>
-            <a:off x="658368" y="6144768"/>
-            <a:ext cx="10927080" cy="335280"/>
-          </a:xfrm>
-          <a:prstGeom prst="rect">
-            <a:avLst/>
-          </a:prstGeom>
-          <a:noFill/>
-          <a:ln/>
-        </p:spPr>
-        <p:txBody>
-          <a:bodyPr wrap="square" lIns="0" tIns="0" rIns="0" bIns="0" rtlCol="0" anchor="ctr"/>
-          <a:lstStyle/>
-          <a:p>
-            <a:pPr indent="0" marL="0">
-              <a:buNone/>
-            </a:pPr>
-            <a:r>
-              <a:rPr lang="en-US" sz="1600" b="1" dirty="0">
-                <a:solidFill>
-                  <a:srgbClr val="0B2C4A"/>
-                </a:solidFill>
-                <a:latin typeface="Inter" pitchFamily="34" charset="0"/>
-                <a:ea typeface="Inter" pitchFamily="34" charset="-122"/>
-                <a:cs typeface="Inter" pitchFamily="34" charset="-120"/>
-              </a:rPr>
-              <a:t>8 of 33 stores at or above 15%, led by Audi Henderson at 27.5%. The group sits at 13.2%.</a:t>
-            </a:r>
-            <a:endParaRPr lang="en-US" sz="1600" dirty="0"/>
-          </a:p>
-        </p:txBody>
       </p:sp>
     </p:spTree>
   </p:cSld>
@@ -27731,7 +27495,7 @@
         <p:spPr>
           <a:xfrm>
             <a:off x="457200" y="1207008"/>
-            <a:ext cx="11274552" cy="4782312"/>
+            <a:ext cx="11274552" cy="5148072"/>
           </a:xfrm>
           <a:prstGeom prst="rect">
             <a:avLst/>
@@ -27849,7 +27613,7 @@
         <p:spPr>
           <a:xfrm>
             <a:off x="658368" y="2103120"/>
-            <a:ext cx="3489960" cy="755294"/>
+            <a:ext cx="3489960" cy="828446"/>
           </a:xfrm>
           <a:prstGeom prst="rect">
             <a:avLst/>
@@ -27869,7 +27633,7 @@
         <p:spPr>
           <a:xfrm>
             <a:off x="4084320" y="2139696"/>
-            <a:ext cx="64008" cy="682142"/>
+            <a:ext cx="64008" cy="755294"/>
           </a:xfrm>
           <a:prstGeom prst="rect">
             <a:avLst/>
@@ -27889,7 +27653,7 @@
         <p:spPr>
           <a:xfrm>
             <a:off x="749808" y="2103120"/>
-            <a:ext cx="365760" cy="755294"/>
+            <a:ext cx="365760" cy="828446"/>
           </a:xfrm>
           <a:prstGeom prst="rect">
             <a:avLst/>
@@ -27928,7 +27692,7 @@
         <p:spPr>
           <a:xfrm>
             <a:off x="1097280" y="2103120"/>
-            <a:ext cx="1825752" cy="755294"/>
+            <a:ext cx="1825752" cy="828446"/>
           </a:xfrm>
           <a:prstGeom prst="rect">
             <a:avLst/>
@@ -28007,7 +27771,7 @@
         <p:spPr>
           <a:xfrm>
             <a:off x="2941320" y="2103120"/>
-            <a:ext cx="1115568" cy="755294"/>
+            <a:ext cx="1115568" cy="828446"/>
           </a:xfrm>
           <a:prstGeom prst="rect">
             <a:avLst/>
@@ -28045,8 +27809,8 @@
         </p:nvSpPr>
         <p:spPr>
           <a:xfrm>
-            <a:off x="4084320" y="2894990"/>
-            <a:ext cx="64008" cy="682142"/>
+            <a:off x="4084320" y="2968142"/>
+            <a:ext cx="64008" cy="755294"/>
           </a:xfrm>
           <a:prstGeom prst="rect">
             <a:avLst/>
@@ -28065,8 +27829,8 @@
         </p:nvSpPr>
         <p:spPr>
           <a:xfrm>
-            <a:off x="749808" y="2858414"/>
-            <a:ext cx="365760" cy="755294"/>
+            <a:off x="749808" y="2931566"/>
+            <a:ext cx="365760" cy="828446"/>
           </a:xfrm>
           <a:prstGeom prst="rect">
             <a:avLst/>
@@ -28104,8 +27868,8 @@
         </p:nvSpPr>
         <p:spPr>
           <a:xfrm>
-            <a:off x="1097280" y="2858414"/>
-            <a:ext cx="1825752" cy="755294"/>
+            <a:off x="1097280" y="2931566"/>
+            <a:ext cx="1825752" cy="828446"/>
           </a:xfrm>
           <a:prstGeom prst="rect">
             <a:avLst/>
@@ -28183,8 +27947,8 @@
         </p:nvSpPr>
         <p:spPr>
           <a:xfrm>
-            <a:off x="2941320" y="2858414"/>
-            <a:ext cx="1115568" cy="755294"/>
+            <a:off x="2941320" y="2931566"/>
+            <a:ext cx="1115568" cy="828446"/>
           </a:xfrm>
           <a:prstGeom prst="rect">
             <a:avLst/>
@@ -28222,8 +27986,8 @@
         </p:nvSpPr>
         <p:spPr>
           <a:xfrm>
-            <a:off x="658368" y="3613709"/>
-            <a:ext cx="3489960" cy="755294"/>
+            <a:off x="658368" y="3760013"/>
+            <a:ext cx="3489960" cy="828446"/>
           </a:xfrm>
           <a:prstGeom prst="rect">
             <a:avLst/>
@@ -28242,8 +28006,8 @@
         </p:nvSpPr>
         <p:spPr>
           <a:xfrm>
-            <a:off x="749808" y="3613709"/>
-            <a:ext cx="365760" cy="755294"/>
+            <a:off x="749808" y="3760013"/>
+            <a:ext cx="365760" cy="828446"/>
           </a:xfrm>
           <a:prstGeom prst="rect">
             <a:avLst/>
@@ -28281,8 +28045,8 @@
         </p:nvSpPr>
         <p:spPr>
           <a:xfrm>
-            <a:off x="1097280" y="3613709"/>
-            <a:ext cx="1825752" cy="755294"/>
+            <a:off x="1097280" y="3760013"/>
+            <a:ext cx="1825752" cy="828446"/>
           </a:xfrm>
           <a:prstGeom prst="rect">
             <a:avLst/>
@@ -28360,8 +28124,8 @@
         </p:nvSpPr>
         <p:spPr>
           <a:xfrm>
-            <a:off x="2941320" y="3613709"/>
-            <a:ext cx="1115568" cy="755294"/>
+            <a:off x="2941320" y="3760013"/>
+            <a:ext cx="1115568" cy="828446"/>
           </a:xfrm>
           <a:prstGeom prst="rect">
             <a:avLst/>
@@ -28399,8 +28163,8 @@
         </p:nvSpPr>
         <p:spPr>
           <a:xfrm>
-            <a:off x="4084320" y="4405579"/>
-            <a:ext cx="64008" cy="682142"/>
+            <a:off x="4084320" y="4625035"/>
+            <a:ext cx="64008" cy="755294"/>
           </a:xfrm>
           <a:prstGeom prst="rect">
             <a:avLst/>
@@ -28419,8 +28183,8 @@
         </p:nvSpPr>
         <p:spPr>
           <a:xfrm>
-            <a:off x="749808" y="4369003"/>
-            <a:ext cx="365760" cy="755294"/>
+            <a:off x="749808" y="4588459"/>
+            <a:ext cx="365760" cy="828446"/>
           </a:xfrm>
           <a:prstGeom prst="rect">
             <a:avLst/>
@@ -28458,8 +28222,8 @@
         </p:nvSpPr>
         <p:spPr>
           <a:xfrm>
-            <a:off x="1097280" y="4369003"/>
-            <a:ext cx="1825752" cy="755294"/>
+            <a:off x="1097280" y="4588459"/>
+            <a:ext cx="1825752" cy="828446"/>
           </a:xfrm>
           <a:prstGeom prst="rect">
             <a:avLst/>
@@ -28537,8 +28301,8 @@
         </p:nvSpPr>
         <p:spPr>
           <a:xfrm>
-            <a:off x="2941320" y="4369003"/>
-            <a:ext cx="1115568" cy="755294"/>
+            <a:off x="2941320" y="4588459"/>
+            <a:ext cx="1115568" cy="828446"/>
           </a:xfrm>
           <a:prstGeom prst="rect">
             <a:avLst/>
@@ -28576,8 +28340,8 @@
         </p:nvSpPr>
         <p:spPr>
           <a:xfrm>
-            <a:off x="658368" y="5124298"/>
-            <a:ext cx="3489960" cy="755294"/>
+            <a:off x="658368" y="5416906"/>
+            <a:ext cx="3489960" cy="828446"/>
           </a:xfrm>
           <a:prstGeom prst="rect">
             <a:avLst/>
@@ -28596,8 +28360,8 @@
         </p:nvSpPr>
         <p:spPr>
           <a:xfrm>
-            <a:off x="749808" y="5124298"/>
-            <a:ext cx="365760" cy="755294"/>
+            <a:off x="749808" y="5416906"/>
+            <a:ext cx="365760" cy="828446"/>
           </a:xfrm>
           <a:prstGeom prst="rect">
             <a:avLst/>
@@ -28635,8 +28399,8 @@
         </p:nvSpPr>
         <p:spPr>
           <a:xfrm>
-            <a:off x="1097280" y="5124298"/>
-            <a:ext cx="1825752" cy="755294"/>
+            <a:off x="1097280" y="5416906"/>
+            <a:ext cx="1825752" cy="828446"/>
           </a:xfrm>
           <a:prstGeom prst="rect">
             <a:avLst/>
@@ -28714,8 +28478,8 @@
         </p:nvSpPr>
         <p:spPr>
           <a:xfrm>
-            <a:off x="2941320" y="5124298"/>
-            <a:ext cx="1115568" cy="755294"/>
+            <a:off x="2941320" y="5416906"/>
+            <a:ext cx="1115568" cy="828446"/>
           </a:xfrm>
           <a:prstGeom prst="rect">
             <a:avLst/>
@@ -28852,7 +28616,7 @@
         <p:spPr>
           <a:xfrm>
             <a:off x="4349496" y="2103120"/>
-            <a:ext cx="3489960" cy="755294"/>
+            <a:ext cx="3489960" cy="828446"/>
           </a:xfrm>
           <a:prstGeom prst="rect">
             <a:avLst/>
@@ -28872,7 +28636,7 @@
         <p:spPr>
           <a:xfrm>
             <a:off x="4440936" y="2103120"/>
-            <a:ext cx="365760" cy="755294"/>
+            <a:ext cx="365760" cy="828446"/>
           </a:xfrm>
           <a:prstGeom prst="rect">
             <a:avLst/>
@@ -28911,7 +28675,7 @@
         <p:spPr>
           <a:xfrm>
             <a:off x="4788408" y="2103120"/>
-            <a:ext cx="1825752" cy="755294"/>
+            <a:ext cx="1825752" cy="828446"/>
           </a:xfrm>
           <a:prstGeom prst="rect">
             <a:avLst/>
@@ -28990,7 +28754,7 @@
         <p:spPr>
           <a:xfrm>
             <a:off x="6632448" y="2103120"/>
-            <a:ext cx="1115568" cy="755294"/>
+            <a:ext cx="1115568" cy="828446"/>
           </a:xfrm>
           <a:prstGeom prst="rect">
             <a:avLst/>
@@ -29028,8 +28792,8 @@
         </p:nvSpPr>
         <p:spPr>
           <a:xfrm>
-            <a:off x="4440936" y="2858414"/>
-            <a:ext cx="365760" cy="755294"/>
+            <a:off x="4440936" y="2931566"/>
+            <a:ext cx="365760" cy="828446"/>
           </a:xfrm>
           <a:prstGeom prst="rect">
             <a:avLst/>
@@ -29067,8 +28831,8 @@
         </p:nvSpPr>
         <p:spPr>
           <a:xfrm>
-            <a:off x="4788408" y="2858414"/>
-            <a:ext cx="1825752" cy="755294"/>
+            <a:off x="4788408" y="2931566"/>
+            <a:ext cx="1825752" cy="828446"/>
           </a:xfrm>
           <a:prstGeom prst="rect">
             <a:avLst/>
@@ -29146,8 +28910,8 @@
         </p:nvSpPr>
         <p:spPr>
           <a:xfrm>
-            <a:off x="6632448" y="2858414"/>
-            <a:ext cx="1115568" cy="755294"/>
+            <a:off x="6632448" y="2931566"/>
+            <a:ext cx="1115568" cy="828446"/>
           </a:xfrm>
           <a:prstGeom prst="rect">
             <a:avLst/>
@@ -29185,8 +28949,8 @@
         </p:nvSpPr>
         <p:spPr>
           <a:xfrm>
-            <a:off x="4349496" y="3613709"/>
-            <a:ext cx="3489960" cy="755294"/>
+            <a:off x="4349496" y="3760013"/>
+            <a:ext cx="3489960" cy="828446"/>
           </a:xfrm>
           <a:prstGeom prst="rect">
             <a:avLst/>
@@ -29205,8 +28969,8 @@
         </p:nvSpPr>
         <p:spPr>
           <a:xfrm>
-            <a:off x="4440936" y="3613709"/>
-            <a:ext cx="365760" cy="755294"/>
+            <a:off x="4440936" y="3760013"/>
+            <a:ext cx="365760" cy="828446"/>
           </a:xfrm>
           <a:prstGeom prst="rect">
             <a:avLst/>
@@ -29244,8 +29008,8 @@
         </p:nvSpPr>
         <p:spPr>
           <a:xfrm>
-            <a:off x="4788408" y="3613709"/>
-            <a:ext cx="1825752" cy="755294"/>
+            <a:off x="4788408" y="3760013"/>
+            <a:ext cx="1825752" cy="828446"/>
           </a:xfrm>
           <a:prstGeom prst="rect">
             <a:avLst/>
@@ -29323,8 +29087,8 @@
         </p:nvSpPr>
         <p:spPr>
           <a:xfrm>
-            <a:off x="6632448" y="3613709"/>
-            <a:ext cx="1115568" cy="755294"/>
+            <a:off x="6632448" y="3760013"/>
+            <a:ext cx="1115568" cy="828446"/>
           </a:xfrm>
           <a:prstGeom prst="rect">
             <a:avLst/>
@@ -29362,8 +29126,8 @@
         </p:nvSpPr>
         <p:spPr>
           <a:xfrm>
-            <a:off x="4440936" y="4369003"/>
-            <a:ext cx="365760" cy="755294"/>
+            <a:off x="4440936" y="4588459"/>
+            <a:ext cx="365760" cy="828446"/>
           </a:xfrm>
           <a:prstGeom prst="rect">
             <a:avLst/>
@@ -29401,8 +29165,8 @@
         </p:nvSpPr>
         <p:spPr>
           <a:xfrm>
-            <a:off x="4788408" y="4369003"/>
-            <a:ext cx="1825752" cy="755294"/>
+            <a:off x="4788408" y="4588459"/>
+            <a:ext cx="1825752" cy="828446"/>
           </a:xfrm>
           <a:prstGeom prst="rect">
             <a:avLst/>
@@ -29480,8 +29244,8 @@
         </p:nvSpPr>
         <p:spPr>
           <a:xfrm>
-            <a:off x="6632448" y="4369003"/>
-            <a:ext cx="1115568" cy="755294"/>
+            <a:off x="6632448" y="4588459"/>
+            <a:ext cx="1115568" cy="828446"/>
           </a:xfrm>
           <a:prstGeom prst="rect">
             <a:avLst/>
@@ -29519,8 +29283,8 @@
         </p:nvSpPr>
         <p:spPr>
           <a:xfrm>
-            <a:off x="4349496" y="5124298"/>
-            <a:ext cx="3489960" cy="755294"/>
+            <a:off x="4349496" y="5416906"/>
+            <a:ext cx="3489960" cy="828446"/>
           </a:xfrm>
           <a:prstGeom prst="rect">
             <a:avLst/>
@@ -29539,8 +29303,8 @@
         </p:nvSpPr>
         <p:spPr>
           <a:xfrm>
-            <a:off x="4440936" y="5124298"/>
-            <a:ext cx="365760" cy="755294"/>
+            <a:off x="4440936" y="5416906"/>
+            <a:ext cx="365760" cy="828446"/>
           </a:xfrm>
           <a:prstGeom prst="rect">
             <a:avLst/>
@@ -29578,8 +29342,8 @@
         </p:nvSpPr>
         <p:spPr>
           <a:xfrm>
-            <a:off x="4788408" y="5124298"/>
-            <a:ext cx="1825752" cy="755294"/>
+            <a:off x="4788408" y="5416906"/>
+            <a:ext cx="1825752" cy="828446"/>
           </a:xfrm>
           <a:prstGeom prst="rect">
             <a:avLst/>
@@ -29657,8 +29421,8 @@
         </p:nvSpPr>
         <p:spPr>
           <a:xfrm>
-            <a:off x="6632448" y="5124298"/>
-            <a:ext cx="1115568" cy="755294"/>
+            <a:off x="6632448" y="5416906"/>
+            <a:ext cx="1115568" cy="828446"/>
           </a:xfrm>
           <a:prstGeom prst="rect">
             <a:avLst/>
@@ -29795,7 +29559,7 @@
         <p:spPr>
           <a:xfrm>
             <a:off x="8040624" y="2103120"/>
-            <a:ext cx="3489960" cy="755294"/>
+            <a:ext cx="3489960" cy="828446"/>
           </a:xfrm>
           <a:prstGeom prst="rect">
             <a:avLst/>
@@ -29815,7 +29579,7 @@
         <p:spPr>
           <a:xfrm>
             <a:off x="8132064" y="2103120"/>
-            <a:ext cx="365760" cy="755294"/>
+            <a:ext cx="365760" cy="828446"/>
           </a:xfrm>
           <a:prstGeom prst="rect">
             <a:avLst/>
@@ -29854,7 +29618,7 @@
         <p:spPr>
           <a:xfrm>
             <a:off x="8479536" y="2103120"/>
-            <a:ext cx="1825752" cy="755294"/>
+            <a:ext cx="1825752" cy="828446"/>
           </a:xfrm>
           <a:prstGeom prst="rect">
             <a:avLst/>
@@ -29933,7 +29697,7 @@
         <p:spPr>
           <a:xfrm>
             <a:off x="10323576" y="2103120"/>
-            <a:ext cx="1115568" cy="755294"/>
+            <a:ext cx="1115568" cy="828446"/>
           </a:xfrm>
           <a:prstGeom prst="rect">
             <a:avLst/>
@@ -29971,8 +29735,8 @@
         </p:nvSpPr>
         <p:spPr>
           <a:xfrm>
-            <a:off x="11466576" y="2894990"/>
-            <a:ext cx="64008" cy="682142"/>
+            <a:off x="11466576" y="2968142"/>
+            <a:ext cx="64008" cy="755294"/>
           </a:xfrm>
           <a:prstGeom prst="rect">
             <a:avLst/>
@@ -29991,8 +29755,8 @@
         </p:nvSpPr>
         <p:spPr>
           <a:xfrm>
-            <a:off x="8132064" y="2858414"/>
-            <a:ext cx="365760" cy="755294"/>
+            <a:off x="8132064" y="2931566"/>
+            <a:ext cx="365760" cy="828446"/>
           </a:xfrm>
           <a:prstGeom prst="rect">
             <a:avLst/>
@@ -30030,8 +29794,8 @@
         </p:nvSpPr>
         <p:spPr>
           <a:xfrm>
-            <a:off x="8479536" y="2858414"/>
-            <a:ext cx="1825752" cy="755294"/>
+            <a:off x="8479536" y="2931566"/>
+            <a:ext cx="1825752" cy="828446"/>
           </a:xfrm>
           <a:prstGeom prst="rect">
             <a:avLst/>
@@ -30109,8 +29873,8 @@
         </p:nvSpPr>
         <p:spPr>
           <a:xfrm>
-            <a:off x="10323576" y="2858414"/>
-            <a:ext cx="1115568" cy="755294"/>
+            <a:off x="10323576" y="2931566"/>
+            <a:ext cx="1115568" cy="828446"/>
           </a:xfrm>
           <a:prstGeom prst="rect">
             <a:avLst/>
@@ -30148,8 +29912,8 @@
         </p:nvSpPr>
         <p:spPr>
           <a:xfrm>
-            <a:off x="8040624" y="3613709"/>
-            <a:ext cx="3489960" cy="755294"/>
+            <a:off x="8040624" y="3760013"/>
+            <a:ext cx="3489960" cy="828446"/>
           </a:xfrm>
           <a:prstGeom prst="rect">
             <a:avLst/>
@@ -30168,8 +29932,8 @@
         </p:nvSpPr>
         <p:spPr>
           <a:xfrm>
-            <a:off x="8132064" y="3613709"/>
-            <a:ext cx="365760" cy="755294"/>
+            <a:off x="8132064" y="3760013"/>
+            <a:ext cx="365760" cy="828446"/>
           </a:xfrm>
           <a:prstGeom prst="rect">
             <a:avLst/>
@@ -30207,8 +29971,8 @@
         </p:nvSpPr>
         <p:spPr>
           <a:xfrm>
-            <a:off x="8479536" y="3613709"/>
-            <a:ext cx="1825752" cy="755294"/>
+            <a:off x="8479536" y="3760013"/>
+            <a:ext cx="1825752" cy="828446"/>
           </a:xfrm>
           <a:prstGeom prst="rect">
             <a:avLst/>
@@ -30286,8 +30050,8 @@
         </p:nvSpPr>
         <p:spPr>
           <a:xfrm>
-            <a:off x="10323576" y="3613709"/>
-            <a:ext cx="1115568" cy="755294"/>
+            <a:off x="10323576" y="3760013"/>
+            <a:ext cx="1115568" cy="828446"/>
           </a:xfrm>
           <a:prstGeom prst="rect">
             <a:avLst/>
@@ -30325,8 +30089,8 @@
         </p:nvSpPr>
         <p:spPr>
           <a:xfrm>
-            <a:off x="11466576" y="4405579"/>
-            <a:ext cx="64008" cy="682142"/>
+            <a:off x="11466576" y="4625035"/>
+            <a:ext cx="64008" cy="755294"/>
           </a:xfrm>
           <a:prstGeom prst="rect">
             <a:avLst/>
@@ -30345,8 +30109,8 @@
         </p:nvSpPr>
         <p:spPr>
           <a:xfrm>
-            <a:off x="8132064" y="4369003"/>
-            <a:ext cx="365760" cy="755294"/>
+            <a:off x="8132064" y="4588459"/>
+            <a:ext cx="365760" cy="828446"/>
           </a:xfrm>
           <a:prstGeom prst="rect">
             <a:avLst/>
@@ -30384,8 +30148,8 @@
         </p:nvSpPr>
         <p:spPr>
           <a:xfrm>
-            <a:off x="8479536" y="4369003"/>
-            <a:ext cx="1825752" cy="755294"/>
+            <a:off x="8479536" y="4588459"/>
+            <a:ext cx="1825752" cy="828446"/>
           </a:xfrm>
           <a:prstGeom prst="rect">
             <a:avLst/>
@@ -30463,8 +30227,8 @@
         </p:nvSpPr>
         <p:spPr>
           <a:xfrm>
-            <a:off x="10323576" y="4369003"/>
-            <a:ext cx="1115568" cy="755294"/>
+            <a:off x="10323576" y="4588459"/>
+            <a:ext cx="1115568" cy="828446"/>
           </a:xfrm>
           <a:prstGeom prst="rect">
             <a:avLst/>
@@ -30502,8 +30266,8 @@
         </p:nvSpPr>
         <p:spPr>
           <a:xfrm>
-            <a:off x="8040624" y="5124298"/>
-            <a:ext cx="3489960" cy="755294"/>
+            <a:off x="8040624" y="5416906"/>
+            <a:ext cx="3489960" cy="828446"/>
           </a:xfrm>
           <a:prstGeom prst="rect">
             <a:avLst/>
@@ -30522,8 +30286,8 @@
         </p:nvSpPr>
         <p:spPr>
           <a:xfrm>
-            <a:off x="11466576" y="5160874"/>
-            <a:ext cx="64008" cy="682142"/>
+            <a:off x="11466576" y="5453482"/>
+            <a:ext cx="64008" cy="755294"/>
           </a:xfrm>
           <a:prstGeom prst="rect">
             <a:avLst/>
@@ -30542,8 +30306,8 @@
         </p:nvSpPr>
         <p:spPr>
           <a:xfrm>
-            <a:off x="8132064" y="5124298"/>
-            <a:ext cx="365760" cy="755294"/>
+            <a:off x="8132064" y="5416906"/>
+            <a:ext cx="365760" cy="828446"/>
           </a:xfrm>
           <a:prstGeom prst="rect">
             <a:avLst/>
@@ -30581,8 +30345,8 @@
         </p:nvSpPr>
         <p:spPr>
           <a:xfrm>
-            <a:off x="8479536" y="5124298"/>
-            <a:ext cx="1825752" cy="755294"/>
+            <a:off x="8479536" y="5416906"/>
+            <a:ext cx="1825752" cy="828446"/>
           </a:xfrm>
           <a:prstGeom prst="rect">
             <a:avLst/>
@@ -30660,8 +30424,8 @@
         </p:nvSpPr>
         <p:spPr>
           <a:xfrm>
-            <a:off x="10323576" y="5124298"/>
-            <a:ext cx="1115568" cy="755294"/>
+            <a:off x="10323576" y="5416906"/>
+            <a:ext cx="1115568" cy="828446"/>
           </a:xfrm>
           <a:prstGeom prst="rect">
             <a:avLst/>
@@ -30686,65 +30450,6 @@
                 <a:cs typeface="Inter" pitchFamily="34" charset="-120"/>
               </a:rPr>
               <a:t>+6.5 pts</a:t>
-            </a:r>
-            <a:endParaRPr lang="en-US" sz="1600" dirty="0"/>
-          </a:p>
-        </p:txBody>
-      </p:sp>
-      <p:sp>
-        <p:nvSpPr>
-          <p:cNvPr id="75" name="Shape 73"/>
-          <p:cNvSpPr/>
-          <p:nvPr/>
-        </p:nvSpPr>
-        <p:spPr>
-          <a:xfrm>
-            <a:off x="457200" y="6126480"/>
-            <a:ext cx="11274552" cy="615696"/>
-          </a:xfrm>
-          <a:prstGeom prst="rect">
-            <a:avLst/>
-          </a:prstGeom>
-          <a:solidFill>
-            <a:srgbClr val="EDF4FA"/>
-          </a:solidFill>
-          <a:ln/>
-        </p:spPr>
-      </p:sp>
-      <p:sp>
-        <p:nvSpPr>
-          <p:cNvPr id="76" name="Text 74"/>
-          <p:cNvSpPr txBox="1"/>
-          <p:nvPr/>
-        </p:nvSpPr>
-        <p:spPr>
-          <a:xfrm>
-            <a:off x="658368" y="6144768"/>
-            <a:ext cx="10927080" cy="579120"/>
-          </a:xfrm>
-          <a:prstGeom prst="rect">
-            <a:avLst/>
-          </a:prstGeom>
-          <a:noFill/>
-          <a:ln/>
-        </p:spPr>
-        <p:txBody>
-          <a:bodyPr wrap="square" lIns="0" tIns="0" rIns="0" bIns="0" rtlCol="0" anchor="ctr"/>
-          <a:lstStyle/>
-          <a:p>
-            <a:pPr indent="0" marL="0">
-              <a:buNone/>
-            </a:pPr>
-            <a:r>
-              <a:rPr lang="en-US" sz="1600" b="1" dirty="0">
-                <a:solidFill>
-                  <a:srgbClr val="0B2C4A"/>
-                </a:solidFill>
-                <a:latin typeface="Inter" pitchFamily="34" charset="0"/>
-                <a:ea typeface="Inter" pitchFamily="34" charset="-122"/>
-                <a:cs typeface="Inter" pitchFamily="34" charset="-120"/>
-              </a:rPr>
-              <a:t>Ask Hyundai St George, Hyundai Prescott and GMC Prescott what changed. Ask LR Reno, Kia LV and Subaru LV what got in the way. Ask Audi Henderson, Mazda and Kia St George what they started this year.</a:t>
             </a:r>
             <a:endParaRPr lang="en-US" sz="1600" dirty="0"/>
           </a:p>
@@ -31842,7 +31547,7 @@
         <p:spPr>
           <a:xfrm>
             <a:off x="457200" y="1207008"/>
-            <a:ext cx="11274552" cy="4782312"/>
+            <a:ext cx="11274552" cy="5148072"/>
           </a:xfrm>
           <a:prstGeom prst="rect">
             <a:avLst/>
@@ -32019,7 +31724,7 @@
         <p:spPr>
           <a:xfrm>
             <a:off x="658368" y="1847088"/>
-            <a:ext cx="310896" cy="239896"/>
+            <a:ext cx="310896" cy="261411"/>
           </a:xfrm>
           <a:prstGeom prst="rect">
             <a:avLst/>
@@ -32058,7 +31763,7 @@
         <p:spPr>
           <a:xfrm>
             <a:off x="1014984" y="1847088"/>
-            <a:ext cx="1920240" cy="239896"/>
+            <a:ext cx="1920240" cy="261411"/>
           </a:xfrm>
           <a:prstGeom prst="rect">
             <a:avLst/>
@@ -32096,8 +31801,8 @@
         </p:nvSpPr>
         <p:spPr>
           <a:xfrm>
-            <a:off x="3008376" y="1907062"/>
-            <a:ext cx="1691640" cy="119948"/>
+            <a:off x="3008376" y="1912441"/>
+            <a:ext cx="1691640" cy="130705"/>
           </a:xfrm>
           <a:prstGeom prst="rect">
             <a:avLst/>
@@ -32117,7 +31822,7 @@
         <p:spPr>
           <a:xfrm>
             <a:off x="4754880" y="1847088"/>
-            <a:ext cx="1143000" cy="239896"/>
+            <a:ext cx="1143000" cy="261411"/>
           </a:xfrm>
           <a:prstGeom prst="rect">
             <a:avLst/>
@@ -32155,8 +31860,8 @@
         </p:nvSpPr>
         <p:spPr>
           <a:xfrm>
-            <a:off x="658368" y="2086984"/>
-            <a:ext cx="310896" cy="239896"/>
+            <a:off x="658368" y="2108499"/>
+            <a:ext cx="310896" cy="261411"/>
           </a:xfrm>
           <a:prstGeom prst="rect">
             <a:avLst/>
@@ -32194,8 +31899,8 @@
         </p:nvSpPr>
         <p:spPr>
           <a:xfrm>
-            <a:off x="1014984" y="2086984"/>
-            <a:ext cx="1920240" cy="239896"/>
+            <a:off x="1014984" y="2108499"/>
+            <a:ext cx="1920240" cy="261411"/>
           </a:xfrm>
           <a:prstGeom prst="rect">
             <a:avLst/>
@@ -32233,8 +31938,8 @@
         </p:nvSpPr>
         <p:spPr>
           <a:xfrm>
-            <a:off x="3008376" y="2146957"/>
-            <a:ext cx="1153473" cy="119948"/>
+            <a:off x="3008376" y="2173852"/>
+            <a:ext cx="1153473" cy="130705"/>
           </a:xfrm>
           <a:prstGeom prst="rect">
             <a:avLst/>
@@ -32253,8 +31958,8 @@
         </p:nvSpPr>
         <p:spPr>
           <a:xfrm>
-            <a:off x="4754880" y="2086984"/>
-            <a:ext cx="1143000" cy="239896"/>
+            <a:off x="4754880" y="2108499"/>
+            <a:ext cx="1143000" cy="261411"/>
           </a:xfrm>
           <a:prstGeom prst="rect">
             <a:avLst/>
@@ -32292,8 +31997,8 @@
         </p:nvSpPr>
         <p:spPr>
           <a:xfrm>
-            <a:off x="658368" y="2326879"/>
-            <a:ext cx="310896" cy="239896"/>
+            <a:off x="658368" y="2369910"/>
+            <a:ext cx="310896" cy="261411"/>
           </a:xfrm>
           <a:prstGeom prst="rect">
             <a:avLst/>
@@ -32331,8 +32036,8 @@
         </p:nvSpPr>
         <p:spPr>
           <a:xfrm>
-            <a:off x="1014984" y="2326879"/>
-            <a:ext cx="1920240" cy="239896"/>
+            <a:off x="1014984" y="2369910"/>
+            <a:ext cx="1920240" cy="261411"/>
           </a:xfrm>
           <a:prstGeom prst="rect">
             <a:avLst/>
@@ -32370,8 +32075,8 @@
         </p:nvSpPr>
         <p:spPr>
           <a:xfrm>
-            <a:off x="3008376" y="2386853"/>
-            <a:ext cx="1064356" cy="119948"/>
+            <a:off x="3008376" y="2435262"/>
+            <a:ext cx="1064356" cy="130705"/>
           </a:xfrm>
           <a:prstGeom prst="rect">
             <a:avLst/>
@@ -32390,8 +32095,8 @@
         </p:nvSpPr>
         <p:spPr>
           <a:xfrm>
-            <a:off x="4754880" y="2326879"/>
-            <a:ext cx="1143000" cy="239896"/>
+            <a:off x="4754880" y="2369910"/>
+            <a:ext cx="1143000" cy="261411"/>
           </a:xfrm>
           <a:prstGeom prst="rect">
             <a:avLst/>
@@ -32429,8 +32134,8 @@
         </p:nvSpPr>
         <p:spPr>
           <a:xfrm>
-            <a:off x="658368" y="2566775"/>
-            <a:ext cx="310896" cy="239896"/>
+            <a:off x="658368" y="2631320"/>
+            <a:ext cx="310896" cy="261411"/>
           </a:xfrm>
           <a:prstGeom prst="rect">
             <a:avLst/>
@@ -32468,8 +32173,8 @@
         </p:nvSpPr>
         <p:spPr>
           <a:xfrm>
-            <a:off x="1014984" y="2566775"/>
-            <a:ext cx="1920240" cy="239896"/>
+            <a:off x="1014984" y="2631320"/>
+            <a:ext cx="1920240" cy="261411"/>
           </a:xfrm>
           <a:prstGeom prst="rect">
             <a:avLst/>
@@ -32507,8 +32212,8 @@
         </p:nvSpPr>
         <p:spPr>
           <a:xfrm>
-            <a:off x="3008376" y="2626748"/>
-            <a:ext cx="1062417" cy="119948"/>
+            <a:off x="3008376" y="2696673"/>
+            <a:ext cx="1062417" cy="130705"/>
           </a:xfrm>
           <a:prstGeom prst="rect">
             <a:avLst/>
@@ -32527,8 +32232,8 @@
         </p:nvSpPr>
         <p:spPr>
           <a:xfrm>
-            <a:off x="4754880" y="2566775"/>
-            <a:ext cx="1143000" cy="239896"/>
+            <a:off x="4754880" y="2631320"/>
+            <a:ext cx="1143000" cy="261411"/>
           </a:xfrm>
           <a:prstGeom prst="rect">
             <a:avLst/>
@@ -32566,8 +32271,8 @@
         </p:nvSpPr>
         <p:spPr>
           <a:xfrm>
-            <a:off x="658368" y="2806670"/>
-            <a:ext cx="310896" cy="239896"/>
+            <a:off x="658368" y="2892731"/>
+            <a:ext cx="310896" cy="261411"/>
           </a:xfrm>
           <a:prstGeom prst="rect">
             <a:avLst/>
@@ -32605,8 +32310,8 @@
         </p:nvSpPr>
         <p:spPr>
           <a:xfrm>
-            <a:off x="1014984" y="2806670"/>
-            <a:ext cx="1920240" cy="239896"/>
+            <a:off x="1014984" y="2892731"/>
+            <a:ext cx="1920240" cy="261411"/>
           </a:xfrm>
           <a:prstGeom prst="rect">
             <a:avLst/>
@@ -32644,8 +32349,8 @@
         </p:nvSpPr>
         <p:spPr>
           <a:xfrm>
-            <a:off x="3008376" y="2866644"/>
-            <a:ext cx="938723" cy="119948"/>
+            <a:off x="3008376" y="2958084"/>
+            <a:ext cx="938723" cy="130705"/>
           </a:xfrm>
           <a:prstGeom prst="rect">
             <a:avLst/>
@@ -32664,8 +32369,8 @@
         </p:nvSpPr>
         <p:spPr>
           <a:xfrm>
-            <a:off x="4754880" y="2806670"/>
-            <a:ext cx="1143000" cy="239896"/>
+            <a:off x="4754880" y="2892731"/>
+            <a:ext cx="1143000" cy="261411"/>
           </a:xfrm>
           <a:prstGeom prst="rect">
             <a:avLst/>
@@ -32703,8 +32408,8 @@
         </p:nvSpPr>
         <p:spPr>
           <a:xfrm>
-            <a:off x="658368" y="3046566"/>
-            <a:ext cx="310896" cy="239896"/>
+            <a:off x="658368" y="3154142"/>
+            <a:ext cx="310896" cy="261411"/>
           </a:xfrm>
           <a:prstGeom prst="rect">
             <a:avLst/>
@@ -32742,8 +32447,8 @@
         </p:nvSpPr>
         <p:spPr>
           <a:xfrm>
-            <a:off x="1014984" y="3046566"/>
-            <a:ext cx="1920240" cy="239896"/>
+            <a:off x="1014984" y="3154142"/>
+            <a:ext cx="1920240" cy="261411"/>
           </a:xfrm>
           <a:prstGeom prst="rect">
             <a:avLst/>
@@ -32781,8 +32486,8 @@
         </p:nvSpPr>
         <p:spPr>
           <a:xfrm>
-            <a:off x="3008376" y="3106540"/>
-            <a:ext cx="883929" cy="119948"/>
+            <a:off x="3008376" y="3219495"/>
+            <a:ext cx="883929" cy="130705"/>
           </a:xfrm>
           <a:prstGeom prst="rect">
             <a:avLst/>
@@ -32801,8 +32506,8 @@
         </p:nvSpPr>
         <p:spPr>
           <a:xfrm>
-            <a:off x="4754880" y="3046566"/>
-            <a:ext cx="1143000" cy="239896"/>
+            <a:off x="4754880" y="3154142"/>
+            <a:ext cx="1143000" cy="261411"/>
           </a:xfrm>
           <a:prstGeom prst="rect">
             <a:avLst/>
@@ -32840,8 +32545,8 @@
         </p:nvSpPr>
         <p:spPr>
           <a:xfrm>
-            <a:off x="658368" y="3286461"/>
-            <a:ext cx="310896" cy="239896"/>
+            <a:off x="658368" y="3415553"/>
+            <a:ext cx="310896" cy="261411"/>
           </a:xfrm>
           <a:prstGeom prst="rect">
             <a:avLst/>
@@ -32879,8 +32584,8 @@
         </p:nvSpPr>
         <p:spPr>
           <a:xfrm>
-            <a:off x="1014984" y="3286461"/>
-            <a:ext cx="1920240" cy="239896"/>
+            <a:off x="1014984" y="3415553"/>
+            <a:ext cx="1920240" cy="261411"/>
           </a:xfrm>
           <a:prstGeom prst="rect">
             <a:avLst/>
@@ -32918,8 +32623,8 @@
         </p:nvSpPr>
         <p:spPr>
           <a:xfrm>
-            <a:off x="3008376" y="3346435"/>
-            <a:ext cx="847705" cy="119948"/>
+            <a:off x="3008376" y="3480906"/>
+            <a:ext cx="847705" cy="130705"/>
           </a:xfrm>
           <a:prstGeom prst="rect">
             <a:avLst/>
@@ -32938,8 +32643,8 @@
         </p:nvSpPr>
         <p:spPr>
           <a:xfrm>
-            <a:off x="4754880" y="3286461"/>
-            <a:ext cx="1143000" cy="239896"/>
+            <a:off x="4754880" y="3415553"/>
+            <a:ext cx="1143000" cy="261411"/>
           </a:xfrm>
           <a:prstGeom prst="rect">
             <a:avLst/>
@@ -32977,8 +32682,8 @@
         </p:nvSpPr>
         <p:spPr>
           <a:xfrm>
-            <a:off x="658368" y="3526357"/>
-            <a:ext cx="310896" cy="239896"/>
+            <a:off x="658368" y="3676964"/>
+            <a:ext cx="310896" cy="261411"/>
           </a:xfrm>
           <a:prstGeom prst="rect">
             <a:avLst/>
@@ -33016,8 +32721,8 @@
         </p:nvSpPr>
         <p:spPr>
           <a:xfrm>
-            <a:off x="1014984" y="3526357"/>
-            <a:ext cx="1920240" cy="239896"/>
+            <a:off x="1014984" y="3676964"/>
+            <a:ext cx="1920240" cy="261411"/>
           </a:xfrm>
           <a:prstGeom prst="rect">
             <a:avLst/>
@@ -33055,8 +32760,8 @@
         </p:nvSpPr>
         <p:spPr>
           <a:xfrm>
-            <a:off x="3008376" y="3586331"/>
-            <a:ext cx="826302" cy="119948"/>
+            <a:off x="3008376" y="3742316"/>
+            <a:ext cx="826302" cy="130705"/>
           </a:xfrm>
           <a:prstGeom prst="rect">
             <a:avLst/>
@@ -33075,8 +32780,8 @@
         </p:nvSpPr>
         <p:spPr>
           <a:xfrm>
-            <a:off x="4754880" y="3526357"/>
-            <a:ext cx="1143000" cy="239896"/>
+            <a:off x="4754880" y="3676964"/>
+            <a:ext cx="1143000" cy="261411"/>
           </a:xfrm>
           <a:prstGeom prst="rect">
             <a:avLst/>
@@ -33114,8 +32819,8 @@
         </p:nvSpPr>
         <p:spPr>
           <a:xfrm>
-            <a:off x="658368" y="3766252"/>
-            <a:ext cx="310896" cy="239896"/>
+            <a:off x="658368" y="3938375"/>
+            <a:ext cx="310896" cy="261411"/>
           </a:xfrm>
           <a:prstGeom prst="rect">
             <a:avLst/>
@@ -33153,8 +32858,8 @@
         </p:nvSpPr>
         <p:spPr>
           <a:xfrm>
-            <a:off x="1014984" y="3766252"/>
-            <a:ext cx="1920240" cy="239896"/>
+            <a:off x="1014984" y="3938375"/>
+            <a:ext cx="1920240" cy="261411"/>
           </a:xfrm>
           <a:prstGeom prst="rect">
             <a:avLst/>
@@ -33192,8 +32897,8 @@
         </p:nvSpPr>
         <p:spPr>
           <a:xfrm>
-            <a:off x="3008376" y="3826226"/>
-            <a:ext cx="752231" cy="119948"/>
+            <a:off x="3008376" y="4003727"/>
+            <a:ext cx="752231" cy="130705"/>
           </a:xfrm>
           <a:prstGeom prst="rect">
             <a:avLst/>
@@ -33212,8 +32917,8 @@
         </p:nvSpPr>
         <p:spPr>
           <a:xfrm>
-            <a:off x="4754880" y="3766252"/>
-            <a:ext cx="1143000" cy="239896"/>
+            <a:off x="4754880" y="3938375"/>
+            <a:ext cx="1143000" cy="261411"/>
           </a:xfrm>
           <a:prstGeom prst="rect">
             <a:avLst/>
@@ -33251,8 +32956,8 @@
         </p:nvSpPr>
         <p:spPr>
           <a:xfrm>
-            <a:off x="658368" y="4006148"/>
-            <a:ext cx="310896" cy="239896"/>
+            <a:off x="658368" y="4199785"/>
+            <a:ext cx="310896" cy="261411"/>
           </a:xfrm>
           <a:prstGeom prst="rect">
             <a:avLst/>
@@ -33290,8 +32995,8 @@
         </p:nvSpPr>
         <p:spPr>
           <a:xfrm>
-            <a:off x="1014984" y="4006148"/>
-            <a:ext cx="1920240" cy="239896"/>
+            <a:off x="1014984" y="4199785"/>
+            <a:ext cx="1920240" cy="261411"/>
           </a:xfrm>
           <a:prstGeom prst="rect">
             <a:avLst/>
@@ -33329,8 +33034,8 @@
         </p:nvSpPr>
         <p:spPr>
           <a:xfrm>
-            <a:off x="3008376" y="4066122"/>
-            <a:ext cx="734701" cy="119948"/>
+            <a:off x="3008376" y="4265138"/>
+            <a:ext cx="734701" cy="130705"/>
           </a:xfrm>
           <a:prstGeom prst="rect">
             <a:avLst/>
@@ -33349,8 +33054,8 @@
         </p:nvSpPr>
         <p:spPr>
           <a:xfrm>
-            <a:off x="4754880" y="4006148"/>
-            <a:ext cx="1143000" cy="239896"/>
+            <a:off x="4754880" y="4199785"/>
+            <a:ext cx="1143000" cy="261411"/>
           </a:xfrm>
           <a:prstGeom prst="rect">
             <a:avLst/>
@@ -33388,8 +33093,8 @@
         </p:nvSpPr>
         <p:spPr>
           <a:xfrm>
-            <a:off x="658368" y="4246043"/>
-            <a:ext cx="310896" cy="239896"/>
+            <a:off x="658368" y="4461196"/>
+            <a:ext cx="310896" cy="261411"/>
           </a:xfrm>
           <a:prstGeom prst="rect">
             <a:avLst/>
@@ -33427,8 +33132,8 @@
         </p:nvSpPr>
         <p:spPr>
           <a:xfrm>
-            <a:off x="1014984" y="4246043"/>
-            <a:ext cx="1920240" cy="239896"/>
+            <a:off x="1014984" y="4461196"/>
+            <a:ext cx="1920240" cy="261411"/>
           </a:xfrm>
           <a:prstGeom prst="rect">
             <a:avLst/>
@@ -33466,8 +33171,8 @@
         </p:nvSpPr>
         <p:spPr>
           <a:xfrm>
-            <a:off x="3008376" y="4306017"/>
-            <a:ext cx="703205" cy="119948"/>
+            <a:off x="3008376" y="4526549"/>
+            <a:ext cx="703205" cy="130705"/>
           </a:xfrm>
           <a:prstGeom prst="rect">
             <a:avLst/>
@@ -33486,8 +33191,8 @@
         </p:nvSpPr>
         <p:spPr>
           <a:xfrm>
-            <a:off x="4754880" y="4246043"/>
-            <a:ext cx="1143000" cy="239896"/>
+            <a:off x="4754880" y="4461196"/>
+            <a:ext cx="1143000" cy="261411"/>
           </a:xfrm>
           <a:prstGeom prst="rect">
             <a:avLst/>
@@ -33525,8 +33230,8 @@
         </p:nvSpPr>
         <p:spPr>
           <a:xfrm>
-            <a:off x="658368" y="4485939"/>
-            <a:ext cx="310896" cy="239896"/>
+            <a:off x="658368" y="4722607"/>
+            <a:ext cx="310896" cy="261411"/>
           </a:xfrm>
           <a:prstGeom prst="rect">
             <a:avLst/>
@@ -33564,8 +33269,8 @@
         </p:nvSpPr>
         <p:spPr>
           <a:xfrm>
-            <a:off x="1014984" y="4485939"/>
-            <a:ext cx="1920240" cy="239896"/>
+            <a:off x="1014984" y="4722607"/>
+            <a:ext cx="1920240" cy="261411"/>
           </a:xfrm>
           <a:prstGeom prst="rect">
             <a:avLst/>
@@ -33603,8 +33308,8 @@
         </p:nvSpPr>
         <p:spPr>
           <a:xfrm>
-            <a:off x="3008376" y="4545913"/>
-            <a:ext cx="640057" cy="119948"/>
+            <a:off x="3008376" y="4787960"/>
+            <a:ext cx="640057" cy="130705"/>
           </a:xfrm>
           <a:prstGeom prst="rect">
             <a:avLst/>
@@ -33623,8 +33328,8 @@
         </p:nvSpPr>
         <p:spPr>
           <a:xfrm>
-            <a:off x="4754880" y="4485939"/>
-            <a:ext cx="1143000" cy="239896"/>
+            <a:off x="4754880" y="4722607"/>
+            <a:ext cx="1143000" cy="261411"/>
           </a:xfrm>
           <a:prstGeom prst="rect">
             <a:avLst/>
@@ -33662,8 +33367,8 @@
         </p:nvSpPr>
         <p:spPr>
           <a:xfrm>
-            <a:off x="658368" y="4725834"/>
-            <a:ext cx="310896" cy="239896"/>
+            <a:off x="658368" y="4984018"/>
+            <a:ext cx="310896" cy="261411"/>
           </a:xfrm>
           <a:prstGeom prst="rect">
             <a:avLst/>
@@ -33701,8 +33406,8 @@
         </p:nvSpPr>
         <p:spPr>
           <a:xfrm>
-            <a:off x="1014984" y="4725834"/>
-            <a:ext cx="1920240" cy="239896"/>
+            <a:off x="1014984" y="4984018"/>
+            <a:ext cx="1920240" cy="261411"/>
           </a:xfrm>
           <a:prstGeom prst="rect">
             <a:avLst/>
@@ -33740,8 +33445,8 @@
         </p:nvSpPr>
         <p:spPr>
           <a:xfrm>
-            <a:off x="3008376" y="4785808"/>
-            <a:ext cx="569932" cy="119948"/>
+            <a:off x="3008376" y="5049371"/>
+            <a:ext cx="569932" cy="130705"/>
           </a:xfrm>
           <a:prstGeom prst="rect">
             <a:avLst/>
@@ -33760,8 +33465,8 @@
         </p:nvSpPr>
         <p:spPr>
           <a:xfrm>
-            <a:off x="4754880" y="4725834"/>
-            <a:ext cx="1143000" cy="239896"/>
+            <a:off x="4754880" y="4984018"/>
+            <a:ext cx="1143000" cy="261411"/>
           </a:xfrm>
           <a:prstGeom prst="rect">
             <a:avLst/>
@@ -33799,8 +33504,8 @@
         </p:nvSpPr>
         <p:spPr>
           <a:xfrm>
-            <a:off x="658368" y="4965730"/>
-            <a:ext cx="310896" cy="239896"/>
+            <a:off x="658368" y="5245429"/>
+            <a:ext cx="310896" cy="261411"/>
           </a:xfrm>
           <a:prstGeom prst="rect">
             <a:avLst/>
@@ -33838,8 +33543,8 @@
         </p:nvSpPr>
         <p:spPr>
           <a:xfrm>
-            <a:off x="1014984" y="4965730"/>
-            <a:ext cx="1920240" cy="239896"/>
+            <a:off x="1014984" y="5245429"/>
+            <a:ext cx="1920240" cy="261411"/>
           </a:xfrm>
           <a:prstGeom prst="rect">
             <a:avLst/>
@@ -33877,8 +33582,8 @@
         </p:nvSpPr>
         <p:spPr>
           <a:xfrm>
-            <a:off x="3008376" y="5025704"/>
-            <a:ext cx="519894" cy="119948"/>
+            <a:off x="3008376" y="5310781"/>
+            <a:ext cx="519894" cy="130705"/>
           </a:xfrm>
           <a:prstGeom prst="rect">
             <a:avLst/>
@@ -33897,8 +33602,8 @@
         </p:nvSpPr>
         <p:spPr>
           <a:xfrm>
-            <a:off x="4754880" y="4965730"/>
-            <a:ext cx="1143000" cy="239896"/>
+            <a:off x="4754880" y="5245429"/>
+            <a:ext cx="1143000" cy="261411"/>
           </a:xfrm>
           <a:prstGeom prst="rect">
             <a:avLst/>
@@ -33936,8 +33641,8 @@
         </p:nvSpPr>
         <p:spPr>
           <a:xfrm>
-            <a:off x="658368" y="5205625"/>
-            <a:ext cx="310896" cy="239896"/>
+            <a:off x="658368" y="5506840"/>
+            <a:ext cx="310896" cy="261411"/>
           </a:xfrm>
           <a:prstGeom prst="rect">
             <a:avLst/>
@@ -33975,8 +33680,8 @@
         </p:nvSpPr>
         <p:spPr>
           <a:xfrm>
-            <a:off x="1014984" y="5205625"/>
-            <a:ext cx="1920240" cy="239896"/>
+            <a:off x="1014984" y="5506840"/>
+            <a:ext cx="1920240" cy="261411"/>
           </a:xfrm>
           <a:prstGeom prst="rect">
             <a:avLst/>
@@ -34014,8 +33719,8 @@
         </p:nvSpPr>
         <p:spPr>
           <a:xfrm>
-            <a:off x="3008376" y="5265599"/>
-            <a:ext cx="485901" cy="119948"/>
+            <a:off x="3008376" y="5572192"/>
+            <a:ext cx="485901" cy="130705"/>
           </a:xfrm>
           <a:prstGeom prst="rect">
             <a:avLst/>
@@ -34034,8 +33739,8 @@
         </p:nvSpPr>
         <p:spPr>
           <a:xfrm>
-            <a:off x="4754880" y="5205625"/>
-            <a:ext cx="1143000" cy="239896"/>
+            <a:off x="4754880" y="5506840"/>
+            <a:ext cx="1143000" cy="261411"/>
           </a:xfrm>
           <a:prstGeom prst="rect">
             <a:avLst/>
@@ -34073,8 +33778,8 @@
         </p:nvSpPr>
         <p:spPr>
           <a:xfrm>
-            <a:off x="658368" y="5445521"/>
-            <a:ext cx="310896" cy="239896"/>
+            <a:off x="658368" y="5768250"/>
+            <a:ext cx="310896" cy="261411"/>
           </a:xfrm>
           <a:prstGeom prst="rect">
             <a:avLst/>
@@ -34112,8 +33817,8 @@
         </p:nvSpPr>
         <p:spPr>
           <a:xfrm>
-            <a:off x="1014984" y="5445521"/>
-            <a:ext cx="1920240" cy="239896"/>
+            <a:off x="1014984" y="5768250"/>
+            <a:ext cx="1920240" cy="261411"/>
           </a:xfrm>
           <a:prstGeom prst="rect">
             <a:avLst/>
@@ -34151,8 +33856,8 @@
         </p:nvSpPr>
         <p:spPr>
           <a:xfrm>
-            <a:off x="3008376" y="5505495"/>
-            <a:ext cx="483593" cy="119948"/>
+            <a:off x="3008376" y="5833603"/>
+            <a:ext cx="483593" cy="130705"/>
           </a:xfrm>
           <a:prstGeom prst="rect">
             <a:avLst/>
@@ -34171,8 +33876,8 @@
         </p:nvSpPr>
         <p:spPr>
           <a:xfrm>
-            <a:off x="4754880" y="5445521"/>
-            <a:ext cx="1143000" cy="239896"/>
+            <a:off x="4754880" y="5768250"/>
+            <a:ext cx="1143000" cy="261411"/>
           </a:xfrm>
           <a:prstGeom prst="rect">
             <a:avLst/>
@@ -34210,8 +33915,8 @@
         </p:nvSpPr>
         <p:spPr>
           <a:xfrm>
-            <a:off x="658368" y="5685416"/>
-            <a:ext cx="310896" cy="239896"/>
+            <a:off x="658368" y="6029661"/>
+            <a:ext cx="310896" cy="261411"/>
           </a:xfrm>
           <a:prstGeom prst="rect">
             <a:avLst/>
@@ -34249,8 +33954,8 @@
         </p:nvSpPr>
         <p:spPr>
           <a:xfrm>
-            <a:off x="1014984" y="5685416"/>
-            <a:ext cx="1920240" cy="239896"/>
+            <a:off x="1014984" y="6029661"/>
+            <a:ext cx="1920240" cy="261411"/>
           </a:xfrm>
           <a:prstGeom prst="rect">
             <a:avLst/>
@@ -34288,8 +33993,8 @@
         </p:nvSpPr>
         <p:spPr>
           <a:xfrm>
-            <a:off x="3008376" y="5745390"/>
-            <a:ext cx="457948" cy="119948"/>
+            <a:off x="3008376" y="6095014"/>
+            <a:ext cx="457948" cy="130705"/>
           </a:xfrm>
           <a:prstGeom prst="rect">
             <a:avLst/>
@@ -34308,8 +34013,8 @@
         </p:nvSpPr>
         <p:spPr>
           <a:xfrm>
-            <a:off x="4754880" y="5685416"/>
-            <a:ext cx="1143000" cy="239896"/>
+            <a:off x="4754880" y="6029661"/>
+            <a:ext cx="1143000" cy="261411"/>
           </a:xfrm>
           <a:prstGeom prst="rect">
             <a:avLst/>
@@ -34348,7 +34053,7 @@
         <p:spPr>
           <a:xfrm>
             <a:off x="6208776" y="1847088"/>
-            <a:ext cx="310896" cy="239896"/>
+            <a:ext cx="310896" cy="261411"/>
           </a:xfrm>
           <a:prstGeom prst="rect">
             <a:avLst/>
@@ -34387,7 +34092,7 @@
         <p:spPr>
           <a:xfrm>
             <a:off x="6565392" y="1847088"/>
-            <a:ext cx="1920240" cy="239896"/>
+            <a:ext cx="1920240" cy="261411"/>
           </a:xfrm>
           <a:prstGeom prst="rect">
             <a:avLst/>
@@ -34425,8 +34130,8 @@
         </p:nvSpPr>
         <p:spPr>
           <a:xfrm>
-            <a:off x="8558784" y="1907062"/>
-            <a:ext cx="385888" cy="119948"/>
+            <a:off x="8558784" y="1912441"/>
+            <a:ext cx="385888" cy="130705"/>
           </a:xfrm>
           <a:prstGeom prst="rect">
             <a:avLst/>
@@ -34446,7 +34151,7 @@
         <p:spPr>
           <a:xfrm>
             <a:off x="10305288" y="1847088"/>
-            <a:ext cx="1143000" cy="239896"/>
+            <a:ext cx="1143000" cy="261411"/>
           </a:xfrm>
           <a:prstGeom prst="rect">
             <a:avLst/>
@@ -34484,8 +34189,8 @@
         </p:nvSpPr>
         <p:spPr>
           <a:xfrm>
-            <a:off x="6208776" y="2086984"/>
-            <a:ext cx="310896" cy="239896"/>
+            <a:off x="6208776" y="2108499"/>
+            <a:ext cx="310896" cy="261411"/>
           </a:xfrm>
           <a:prstGeom prst="rect">
             <a:avLst/>
@@ -34523,8 +34228,8 @@
         </p:nvSpPr>
         <p:spPr>
           <a:xfrm>
-            <a:off x="6565392" y="2086984"/>
-            <a:ext cx="1920240" cy="239896"/>
+            <a:off x="6565392" y="2108499"/>
+            <a:ext cx="1920240" cy="261411"/>
           </a:xfrm>
           <a:prstGeom prst="rect">
             <a:avLst/>
@@ -34562,8 +34267,8 @@
         </p:nvSpPr>
         <p:spPr>
           <a:xfrm>
-            <a:off x="8558784" y="2146957"/>
-            <a:ext cx="373935" cy="119948"/>
+            <a:off x="8558784" y="2173852"/>
+            <a:ext cx="373935" cy="130705"/>
           </a:xfrm>
           <a:prstGeom prst="rect">
             <a:avLst/>
@@ -34582,8 +34287,8 @@
         </p:nvSpPr>
         <p:spPr>
           <a:xfrm>
-            <a:off x="10305288" y="2086984"/>
-            <a:ext cx="1143000" cy="239896"/>
+            <a:off x="10305288" y="2108499"/>
+            <a:ext cx="1143000" cy="261411"/>
           </a:xfrm>
           <a:prstGeom prst="rect">
             <a:avLst/>
@@ -34621,8 +34326,8 @@
         </p:nvSpPr>
         <p:spPr>
           <a:xfrm>
-            <a:off x="6208776" y="2326879"/>
-            <a:ext cx="310896" cy="239896"/>
+            <a:off x="6208776" y="2369910"/>
+            <a:ext cx="310896" cy="261411"/>
           </a:xfrm>
           <a:prstGeom prst="rect">
             <a:avLst/>
@@ -34660,8 +34365,8 @@
         </p:nvSpPr>
         <p:spPr>
           <a:xfrm>
-            <a:off x="6565392" y="2326879"/>
-            <a:ext cx="1920240" cy="239896"/>
+            <a:off x="6565392" y="2369910"/>
+            <a:ext cx="1920240" cy="261411"/>
           </a:xfrm>
           <a:prstGeom prst="rect">
             <a:avLst/>
@@ -34699,8 +34404,8 @@
         </p:nvSpPr>
         <p:spPr>
           <a:xfrm>
-            <a:off x="8558784" y="2386853"/>
-            <a:ext cx="328119" cy="119948"/>
+            <a:off x="8558784" y="2435262"/>
+            <a:ext cx="328119" cy="130705"/>
           </a:xfrm>
           <a:prstGeom prst="rect">
             <a:avLst/>
@@ -34719,8 +34424,8 @@
         </p:nvSpPr>
         <p:spPr>
           <a:xfrm>
-            <a:off x="10305288" y="2326879"/>
-            <a:ext cx="1143000" cy="239896"/>
+            <a:off x="10305288" y="2369910"/>
+            <a:ext cx="1143000" cy="261411"/>
           </a:xfrm>
           <a:prstGeom prst="rect">
             <a:avLst/>
@@ -34758,8 +34463,8 @@
         </p:nvSpPr>
         <p:spPr>
           <a:xfrm>
-            <a:off x="6208776" y="2566775"/>
-            <a:ext cx="310896" cy="239896"/>
+            <a:off x="6208776" y="2631320"/>
+            <a:ext cx="310896" cy="261411"/>
           </a:xfrm>
           <a:prstGeom prst="rect">
             <a:avLst/>
@@ -34797,8 +34502,8 @@
         </p:nvSpPr>
         <p:spPr>
           <a:xfrm>
-            <a:off x="6565392" y="2566775"/>
-            <a:ext cx="1920240" cy="239896"/>
+            <a:off x="6565392" y="2631320"/>
+            <a:ext cx="1920240" cy="261411"/>
           </a:xfrm>
           <a:prstGeom prst="rect">
             <a:avLst/>
@@ -34836,8 +34541,8 @@
         </p:nvSpPr>
         <p:spPr>
           <a:xfrm>
-            <a:off x="8558784" y="2626748"/>
-            <a:ext cx="309470" cy="119948"/>
+            <a:off x="8558784" y="2696673"/>
+            <a:ext cx="309470" cy="130705"/>
           </a:xfrm>
           <a:prstGeom prst="rect">
             <a:avLst/>
@@ -34856,8 +34561,8 @@
         </p:nvSpPr>
         <p:spPr>
           <a:xfrm>
-            <a:off x="10305288" y="2566775"/>
-            <a:ext cx="1143000" cy="239896"/>
+            <a:off x="10305288" y="2631320"/>
+            <a:ext cx="1143000" cy="261411"/>
           </a:xfrm>
           <a:prstGeom prst="rect">
             <a:avLst/>
@@ -34895,8 +34600,8 @@
         </p:nvSpPr>
         <p:spPr>
           <a:xfrm>
-            <a:off x="6208776" y="2806670"/>
-            <a:ext cx="310896" cy="239896"/>
+            <a:off x="6208776" y="2892731"/>
+            <a:ext cx="310896" cy="261411"/>
           </a:xfrm>
           <a:prstGeom prst="rect">
             <a:avLst/>
@@ -34934,8 +34639,8 @@
         </p:nvSpPr>
         <p:spPr>
           <a:xfrm>
-            <a:off x="6565392" y="2806670"/>
-            <a:ext cx="1920240" cy="239896"/>
+            <a:off x="6565392" y="2892731"/>
+            <a:ext cx="1920240" cy="261411"/>
           </a:xfrm>
           <a:prstGeom prst="rect">
             <a:avLst/>
@@ -34973,8 +34678,8 @@
         </p:nvSpPr>
         <p:spPr>
           <a:xfrm>
-            <a:off x="8558784" y="2866644"/>
-            <a:ext cx="231259" cy="119948"/>
+            <a:off x="8558784" y="2958084"/>
+            <a:ext cx="231259" cy="130705"/>
           </a:xfrm>
           <a:prstGeom prst="rect">
             <a:avLst/>
@@ -34993,8 +34698,8 @@
         </p:nvSpPr>
         <p:spPr>
           <a:xfrm>
-            <a:off x="10305288" y="2806670"/>
-            <a:ext cx="1143000" cy="239896"/>
+            <a:off x="10305288" y="2892731"/>
+            <a:ext cx="1143000" cy="261411"/>
           </a:xfrm>
           <a:prstGeom prst="rect">
             <a:avLst/>
@@ -35032,8 +34737,8 @@
         </p:nvSpPr>
         <p:spPr>
           <a:xfrm>
-            <a:off x="6208776" y="3046566"/>
-            <a:ext cx="310896" cy="239896"/>
+            <a:off x="6208776" y="3154142"/>
+            <a:ext cx="310896" cy="261411"/>
           </a:xfrm>
           <a:prstGeom prst="rect">
             <a:avLst/>
@@ -35071,8 +34776,8 @@
         </p:nvSpPr>
         <p:spPr>
           <a:xfrm>
-            <a:off x="6565392" y="3046566"/>
-            <a:ext cx="1920240" cy="239896"/>
+            <a:off x="6565392" y="3154142"/>
+            <a:ext cx="1920240" cy="261411"/>
           </a:xfrm>
           <a:prstGeom prst="rect">
             <a:avLst/>
@@ -35110,8 +34815,8 @@
         </p:nvSpPr>
         <p:spPr>
           <a:xfrm>
-            <a:off x="8558784" y="3106540"/>
-            <a:ext cx="136790" cy="119948"/>
+            <a:off x="8558784" y="3219495"/>
+            <a:ext cx="136790" cy="130705"/>
           </a:xfrm>
           <a:prstGeom prst="rect">
             <a:avLst/>
@@ -35130,8 +34835,8 @@
         </p:nvSpPr>
         <p:spPr>
           <a:xfrm>
-            <a:off x="10305288" y="3046566"/>
-            <a:ext cx="1143000" cy="239896"/>
+            <a:off x="10305288" y="3154142"/>
+            <a:ext cx="1143000" cy="261411"/>
           </a:xfrm>
           <a:prstGeom prst="rect">
             <a:avLst/>
@@ -35169,8 +34874,8 @@
         </p:nvSpPr>
         <p:spPr>
           <a:xfrm>
-            <a:off x="6208776" y="3286461"/>
-            <a:ext cx="310896" cy="239896"/>
+            <a:off x="6208776" y="3415553"/>
+            <a:ext cx="310896" cy="261411"/>
           </a:xfrm>
           <a:prstGeom prst="rect">
             <a:avLst/>
@@ -35208,8 +34913,8 @@
         </p:nvSpPr>
         <p:spPr>
           <a:xfrm>
-            <a:off x="6565392" y="3286461"/>
-            <a:ext cx="1920240" cy="239896"/>
+            <a:off x="6565392" y="3415553"/>
+            <a:ext cx="1920240" cy="261411"/>
           </a:xfrm>
           <a:prstGeom prst="rect">
             <a:avLst/>
@@ -35247,8 +34952,8 @@
         </p:nvSpPr>
         <p:spPr>
           <a:xfrm>
-            <a:off x="8558784" y="3346435"/>
-            <a:ext cx="104802" cy="119948"/>
+            <a:off x="8558784" y="3480906"/>
+            <a:ext cx="104802" cy="130705"/>
           </a:xfrm>
           <a:prstGeom prst="rect">
             <a:avLst/>
@@ -35267,8 +34972,8 @@
         </p:nvSpPr>
         <p:spPr>
           <a:xfrm>
-            <a:off x="10305288" y="3286461"/>
-            <a:ext cx="1143000" cy="239896"/>
+            <a:off x="10305288" y="3415553"/>
+            <a:ext cx="1143000" cy="261411"/>
           </a:xfrm>
           <a:prstGeom prst="rect">
             <a:avLst/>
@@ -35306,8 +35011,8 @@
         </p:nvSpPr>
         <p:spPr>
           <a:xfrm>
-            <a:off x="6208776" y="3526357"/>
-            <a:ext cx="310896" cy="239896"/>
+            <a:off x="6208776" y="3676964"/>
+            <a:ext cx="310896" cy="261411"/>
           </a:xfrm>
           <a:prstGeom prst="rect">
             <a:avLst/>
@@ -35345,8 +35050,8 @@
         </p:nvSpPr>
         <p:spPr>
           <a:xfrm>
-            <a:off x="6565392" y="3526357"/>
-            <a:ext cx="1920240" cy="239896"/>
+            <a:off x="6565392" y="3676964"/>
+            <a:ext cx="1920240" cy="261411"/>
           </a:xfrm>
           <a:prstGeom prst="rect">
             <a:avLst/>
@@ -35384,8 +35089,8 @@
         </p:nvSpPr>
         <p:spPr>
           <a:xfrm>
-            <a:off x="8558784" y="3586331"/>
-            <a:ext cx="82384" cy="119948"/>
+            <a:off x="8558784" y="3742316"/>
+            <a:ext cx="82384" cy="130705"/>
           </a:xfrm>
           <a:prstGeom prst="rect">
             <a:avLst/>
@@ -35404,8 +35109,8 @@
         </p:nvSpPr>
         <p:spPr>
           <a:xfrm>
-            <a:off x="10305288" y="3526357"/>
-            <a:ext cx="1143000" cy="239896"/>
+            <a:off x="10305288" y="3676964"/>
+            <a:ext cx="1143000" cy="261411"/>
           </a:xfrm>
           <a:prstGeom prst="rect">
             <a:avLst/>
@@ -35443,8 +35148,8 @@
         </p:nvSpPr>
         <p:spPr>
           <a:xfrm>
-            <a:off x="6208776" y="3766252"/>
-            <a:ext cx="310896" cy="239896"/>
+            <a:off x="6208776" y="3938375"/>
+            <a:ext cx="310896" cy="261411"/>
           </a:xfrm>
           <a:prstGeom prst="rect">
             <a:avLst/>
@@ -35482,8 +35187,8 @@
         </p:nvSpPr>
         <p:spPr>
           <a:xfrm>
-            <a:off x="6565392" y="3766252"/>
-            <a:ext cx="1920240" cy="239896"/>
+            <a:off x="6565392" y="3938375"/>
+            <a:ext cx="1920240" cy="261411"/>
           </a:xfrm>
           <a:prstGeom prst="rect">
             <a:avLst/>
@@ -35521,8 +35226,8 @@
         </p:nvSpPr>
         <p:spPr>
           <a:xfrm>
-            <a:off x="8558784" y="3826226"/>
-            <a:ext cx="79502" cy="119948"/>
+            <a:off x="8558784" y="4003727"/>
+            <a:ext cx="79502" cy="130705"/>
           </a:xfrm>
           <a:prstGeom prst="rect">
             <a:avLst/>
@@ -35541,8 +35246,8 @@
         </p:nvSpPr>
         <p:spPr>
           <a:xfrm>
-            <a:off x="10305288" y="3766252"/>
-            <a:ext cx="1143000" cy="239896"/>
+            <a:off x="10305288" y="3938375"/>
+            <a:ext cx="1143000" cy="261411"/>
           </a:xfrm>
           <a:prstGeom prst="rect">
             <a:avLst/>
@@ -35580,8 +35285,8 @@
         </p:nvSpPr>
         <p:spPr>
           <a:xfrm>
-            <a:off x="6208776" y="4006148"/>
-            <a:ext cx="310896" cy="239896"/>
+            <a:off x="6208776" y="4199785"/>
+            <a:ext cx="310896" cy="261411"/>
           </a:xfrm>
           <a:prstGeom prst="rect">
             <a:avLst/>
@@ -35619,8 +35324,8 @@
         </p:nvSpPr>
         <p:spPr>
           <a:xfrm>
-            <a:off x="6565392" y="4006148"/>
-            <a:ext cx="1920240" cy="239896"/>
+            <a:off x="6565392" y="4199785"/>
+            <a:ext cx="1920240" cy="261411"/>
           </a:xfrm>
           <a:prstGeom prst="rect">
             <a:avLst/>
@@ -35658,8 +35363,8 @@
         </p:nvSpPr>
         <p:spPr>
           <a:xfrm>
-            <a:off x="8558784" y="4066122"/>
-            <a:ext cx="76690" cy="119948"/>
+            <a:off x="8558784" y="4265138"/>
+            <a:ext cx="76690" cy="130705"/>
           </a:xfrm>
           <a:prstGeom prst="rect">
             <a:avLst/>
@@ -35678,8 +35383,8 @@
         </p:nvSpPr>
         <p:spPr>
           <a:xfrm>
-            <a:off x="10305288" y="4006148"/>
-            <a:ext cx="1143000" cy="239896"/>
+            <a:off x="10305288" y="4199785"/>
+            <a:ext cx="1143000" cy="261411"/>
           </a:xfrm>
           <a:prstGeom prst="rect">
             <a:avLst/>
@@ -35717,8 +35422,8 @@
         </p:nvSpPr>
         <p:spPr>
           <a:xfrm>
-            <a:off x="6208776" y="4246043"/>
-            <a:ext cx="310896" cy="239896"/>
+            <a:off x="6208776" y="4461196"/>
+            <a:ext cx="310896" cy="261411"/>
           </a:xfrm>
           <a:prstGeom prst="rect">
             <a:avLst/>
@@ -35756,8 +35461,8 @@
         </p:nvSpPr>
         <p:spPr>
           <a:xfrm>
-            <a:off x="6565392" y="4246043"/>
-            <a:ext cx="1920240" cy="239896"/>
+            <a:off x="6565392" y="4461196"/>
+            <a:ext cx="1920240" cy="261411"/>
           </a:xfrm>
           <a:prstGeom prst="rect">
             <a:avLst/>
@@ -35795,8 +35500,8 @@
         </p:nvSpPr>
         <p:spPr>
           <a:xfrm>
-            <a:off x="8558784" y="4306017"/>
-            <a:ext cx="66479" cy="119948"/>
+            <a:off x="8558784" y="4526549"/>
+            <a:ext cx="66479" cy="130705"/>
           </a:xfrm>
           <a:prstGeom prst="rect">
             <a:avLst/>
@@ -35815,8 +35520,8 @@
         </p:nvSpPr>
         <p:spPr>
           <a:xfrm>
-            <a:off x="10305288" y="4246043"/>
-            <a:ext cx="1143000" cy="239896"/>
+            <a:off x="10305288" y="4461196"/>
+            <a:ext cx="1143000" cy="261411"/>
           </a:xfrm>
           <a:prstGeom prst="rect">
             <a:avLst/>
@@ -35854,8 +35559,8 @@
         </p:nvSpPr>
         <p:spPr>
           <a:xfrm>
-            <a:off x="6208776" y="4485939"/>
-            <a:ext cx="310896" cy="239896"/>
+            <a:off x="6208776" y="4722607"/>
+            <a:ext cx="310896" cy="261411"/>
           </a:xfrm>
           <a:prstGeom prst="rect">
             <a:avLst/>
@@ -35893,8 +35598,8 @@
         </p:nvSpPr>
         <p:spPr>
           <a:xfrm>
-            <a:off x="6565392" y="4485939"/>
-            <a:ext cx="1920240" cy="239896"/>
+            <a:off x="6565392" y="4722607"/>
+            <a:ext cx="1920240" cy="261411"/>
           </a:xfrm>
           <a:prstGeom prst="rect">
             <a:avLst/>
@@ -35932,8 +35637,8 @@
         </p:nvSpPr>
         <p:spPr>
           <a:xfrm>
-            <a:off x="8558784" y="4545913"/>
-            <a:ext cx="31004" cy="119948"/>
+            <a:off x="8558784" y="4787960"/>
+            <a:ext cx="31004" cy="130705"/>
           </a:xfrm>
           <a:prstGeom prst="rect">
             <a:avLst/>
@@ -35952,8 +35657,8 @@
         </p:nvSpPr>
         <p:spPr>
           <a:xfrm>
-            <a:off x="10305288" y="4485939"/>
-            <a:ext cx="1143000" cy="239896"/>
+            <a:off x="10305288" y="4722607"/>
+            <a:ext cx="1143000" cy="261411"/>
           </a:xfrm>
           <a:prstGeom prst="rect">
             <a:avLst/>
@@ -35991,8 +35696,8 @@
         </p:nvSpPr>
         <p:spPr>
           <a:xfrm>
-            <a:off x="6208776" y="4725834"/>
-            <a:ext cx="310896" cy="239896"/>
+            <a:off x="6208776" y="4984018"/>
+            <a:ext cx="310896" cy="261411"/>
           </a:xfrm>
           <a:prstGeom prst="rect">
             <a:avLst/>
@@ -36030,8 +35735,8 @@
         </p:nvSpPr>
         <p:spPr>
           <a:xfrm>
-            <a:off x="6565392" y="4725834"/>
-            <a:ext cx="1920240" cy="239896"/>
+            <a:off x="6565392" y="4984018"/>
+            <a:ext cx="1920240" cy="261411"/>
           </a:xfrm>
           <a:prstGeom prst="rect">
             <a:avLst/>
@@ -36069,8 +35774,8 @@
         </p:nvSpPr>
         <p:spPr>
           <a:xfrm>
-            <a:off x="8558784" y="4785808"/>
-            <a:ext cx="26115" cy="119948"/>
+            <a:off x="8558784" y="5049371"/>
+            <a:ext cx="26115" cy="130705"/>
           </a:xfrm>
           <a:prstGeom prst="rect">
             <a:avLst/>
@@ -36089,8 +35794,8 @@
         </p:nvSpPr>
         <p:spPr>
           <a:xfrm>
-            <a:off x="10305288" y="4725834"/>
-            <a:ext cx="1143000" cy="239896"/>
+            <a:off x="10305288" y="4984018"/>
+            <a:ext cx="1143000" cy="261411"/>
           </a:xfrm>
           <a:prstGeom prst="rect">
             <a:avLst/>
@@ -36128,8 +35833,8 @@
         </p:nvSpPr>
         <p:spPr>
           <a:xfrm>
-            <a:off x="6208776" y="4965730"/>
-            <a:ext cx="310896" cy="239896"/>
+            <a:off x="6208776" y="5245429"/>
+            <a:ext cx="310896" cy="261411"/>
           </a:xfrm>
           <a:prstGeom prst="rect">
             <a:avLst/>
@@ -36167,8 +35872,8 @@
         </p:nvSpPr>
         <p:spPr>
           <a:xfrm>
-            <a:off x="6565392" y="4965730"/>
-            <a:ext cx="1920240" cy="239896"/>
+            <a:off x="6565392" y="5245429"/>
+            <a:ext cx="1920240" cy="261411"/>
           </a:xfrm>
           <a:prstGeom prst="rect">
             <a:avLst/>
@@ -36206,8 +35911,8 @@
         </p:nvSpPr>
         <p:spPr>
           <a:xfrm>
-            <a:off x="8558784" y="5025704"/>
-            <a:ext cx="18288" cy="119948"/>
+            <a:off x="8558784" y="5310781"/>
+            <a:ext cx="18288" cy="130705"/>
           </a:xfrm>
           <a:prstGeom prst="rect">
             <a:avLst/>
@@ -36226,8 +35931,8 @@
         </p:nvSpPr>
         <p:spPr>
           <a:xfrm>
-            <a:off x="10305288" y="4965730"/>
-            <a:ext cx="1143000" cy="239896"/>
+            <a:off x="10305288" y="5245429"/>
+            <a:ext cx="1143000" cy="261411"/>
           </a:xfrm>
           <a:prstGeom prst="rect">
             <a:avLst/>
@@ -36265,8 +35970,8 @@
         </p:nvSpPr>
         <p:spPr>
           <a:xfrm>
-            <a:off x="6208776" y="5205625"/>
-            <a:ext cx="310896" cy="239896"/>
+            <a:off x="6208776" y="5506840"/>
+            <a:ext cx="310896" cy="261411"/>
           </a:xfrm>
           <a:prstGeom prst="rect">
             <a:avLst/>
@@ -36304,8 +36009,8 @@
         </p:nvSpPr>
         <p:spPr>
           <a:xfrm>
-            <a:off x="6565392" y="5205625"/>
-            <a:ext cx="1920240" cy="239896"/>
+            <a:off x="6565392" y="5506840"/>
+            <a:ext cx="1920240" cy="261411"/>
           </a:xfrm>
           <a:prstGeom prst="rect">
             <a:avLst/>
@@ -36343,8 +36048,8 @@
         </p:nvSpPr>
         <p:spPr>
           <a:xfrm>
-            <a:off x="8558784" y="5265599"/>
-            <a:ext cx="18288" cy="119948"/>
+            <a:off x="8558784" y="5572192"/>
+            <a:ext cx="18288" cy="130705"/>
           </a:xfrm>
           <a:prstGeom prst="rect">
             <a:avLst/>
@@ -36363,8 +36068,8 @@
         </p:nvSpPr>
         <p:spPr>
           <a:xfrm>
-            <a:off x="10305288" y="5205625"/>
-            <a:ext cx="1143000" cy="239896"/>
+            <a:off x="10305288" y="5506840"/>
+            <a:ext cx="1143000" cy="261411"/>
           </a:xfrm>
           <a:prstGeom prst="rect">
             <a:avLst/>
@@ -36402,8 +36107,8 @@
         </p:nvSpPr>
         <p:spPr>
           <a:xfrm>
-            <a:off x="6208776" y="5445521"/>
-            <a:ext cx="310896" cy="239896"/>
+            <a:off x="6208776" y="5768250"/>
+            <a:ext cx="310896" cy="261411"/>
           </a:xfrm>
           <a:prstGeom prst="rect">
             <a:avLst/>
@@ -36441,8 +36146,8 @@
         </p:nvSpPr>
         <p:spPr>
           <a:xfrm>
-            <a:off x="6565392" y="5445521"/>
-            <a:ext cx="1920240" cy="239896"/>
+            <a:off x="6565392" y="5768250"/>
+            <a:ext cx="1920240" cy="261411"/>
           </a:xfrm>
           <a:prstGeom prst="rect">
             <a:avLst/>
@@ -36480,8 +36185,8 @@
         </p:nvSpPr>
         <p:spPr>
           <a:xfrm>
-            <a:off x="8558784" y="5505495"/>
-            <a:ext cx="18288" cy="119948"/>
+            <a:off x="8558784" y="5833603"/>
+            <a:ext cx="18288" cy="130705"/>
           </a:xfrm>
           <a:prstGeom prst="rect">
             <a:avLst/>
@@ -36500,8 +36205,8 @@
         </p:nvSpPr>
         <p:spPr>
           <a:xfrm>
-            <a:off x="10305288" y="5445521"/>
-            <a:ext cx="1143000" cy="239896"/>
+            <a:off x="10305288" y="5768250"/>
+            <a:ext cx="1143000" cy="261411"/>
           </a:xfrm>
           <a:prstGeom prst="rect">
             <a:avLst/>
@@ -36540,7 +36245,7 @@
         <p:spPr>
           <a:xfrm>
             <a:off x="3940705" y="1847088"/>
-            <a:ext cx="14630" cy="4078224"/>
+            <a:ext cx="14630" cy="4443984"/>
           </a:xfrm>
           <a:prstGeom prst="rect">
             <a:avLst/>
@@ -36560,7 +36265,7 @@
         <p:spPr>
           <a:xfrm>
             <a:off x="9491113" y="1847088"/>
-            <a:ext cx="14630" cy="4078224"/>
+            <a:ext cx="14630" cy="4443984"/>
           </a:xfrm>
           <a:prstGeom prst="rect">
             <a:avLst/>
@@ -36580,7 +36285,7 @@
         <p:spPr>
           <a:xfrm>
             <a:off x="6085332" y="1847088"/>
-            <a:ext cx="10973" cy="4078224"/>
+            <a:ext cx="10973" cy="4443984"/>
           </a:xfrm>
           <a:prstGeom prst="rect">
             <a:avLst/>
@@ -36590,65 +36295,6 @@
           </a:solidFill>
           <a:ln/>
         </p:spPr>
-      </p:sp>
-      <p:sp>
-        <p:nvSpPr>
-          <p:cNvPr id="146" name="Shape 144"/>
-          <p:cNvSpPr/>
-          <p:nvPr/>
-        </p:nvSpPr>
-        <p:spPr>
-          <a:xfrm>
-            <a:off x="457200" y="6126480"/>
-            <a:ext cx="11274552" cy="371856"/>
-          </a:xfrm>
-          <a:prstGeom prst="rect">
-            <a:avLst/>
-          </a:prstGeom>
-          <a:solidFill>
-            <a:srgbClr val="EDF4FA"/>
-          </a:solidFill>
-          <a:ln/>
-        </p:spPr>
-      </p:sp>
-      <p:sp>
-        <p:nvSpPr>
-          <p:cNvPr id="147" name="Text 145"/>
-          <p:cNvSpPr txBox="1"/>
-          <p:nvPr/>
-        </p:nvSpPr>
-        <p:spPr>
-          <a:xfrm>
-            <a:off x="658368" y="6144768"/>
-            <a:ext cx="10927080" cy="335280"/>
-          </a:xfrm>
-          <a:prstGeom prst="rect">
-            <a:avLst/>
-          </a:prstGeom>
-          <a:noFill/>
-          <a:ln/>
-        </p:spPr>
-        <p:txBody>
-          <a:bodyPr wrap="square" lIns="0" tIns="0" rIns="0" bIns="0" rtlCol="0" anchor="ctr"/>
-          <a:lstStyle/>
-          <a:p>
-            <a:pPr indent="0" marL="0">
-              <a:buNone/>
-            </a:pPr>
-            <a:r>
-              <a:rPr lang="en-US" sz="1600" b="1" dirty="0">
-                <a:solidFill>
-                  <a:srgbClr val="0B2C4A"/>
-                </a:solidFill>
-                <a:latin typeface="Inter" pitchFamily="34" charset="0"/>
-                <a:ea typeface="Inter" pitchFamily="34" charset="-122"/>
-                <a:cs typeface="Inter" pitchFamily="34" charset="-120"/>
-              </a:rPr>
-              <a:t>4 of 33 stores at or above 15%, led by LR Henderson at 27.0%. The group sits at 8.3%.</a:t>
-            </a:r>
-            <a:endParaRPr lang="en-US" sz="1600" dirty="0"/>
-          </a:p>
-        </p:txBody>
       </p:sp>
     </p:spTree>
   </p:cSld>
@@ -36789,7 +36435,7 @@
         <p:spPr>
           <a:xfrm>
             <a:off x="457200" y="1207008"/>
-            <a:ext cx="11274552" cy="4782312"/>
+            <a:ext cx="11274552" cy="5148072"/>
           </a:xfrm>
           <a:prstGeom prst="rect">
             <a:avLst/>
@@ -36907,7 +36553,7 @@
         <p:spPr>
           <a:xfrm>
             <a:off x="658368" y="2103120"/>
-            <a:ext cx="3489960" cy="755294"/>
+            <a:ext cx="3489960" cy="828446"/>
           </a:xfrm>
           <a:prstGeom prst="rect">
             <a:avLst/>
@@ -36927,7 +36573,7 @@
         <p:spPr>
           <a:xfrm>
             <a:off x="749808" y="2103120"/>
-            <a:ext cx="365760" cy="755294"/>
+            <a:ext cx="365760" cy="828446"/>
           </a:xfrm>
           <a:prstGeom prst="rect">
             <a:avLst/>
@@ -36966,7 +36612,7 @@
         <p:spPr>
           <a:xfrm>
             <a:off x="1097280" y="2103120"/>
-            <a:ext cx="1825752" cy="755294"/>
+            <a:ext cx="1825752" cy="828446"/>
           </a:xfrm>
           <a:prstGeom prst="rect">
             <a:avLst/>
@@ -37045,7 +36691,7 @@
         <p:spPr>
           <a:xfrm>
             <a:off x="2941320" y="2103120"/>
-            <a:ext cx="1115568" cy="755294"/>
+            <a:ext cx="1115568" cy="828446"/>
           </a:xfrm>
           <a:prstGeom prst="rect">
             <a:avLst/>
@@ -37083,8 +36729,8 @@
         </p:nvSpPr>
         <p:spPr>
           <a:xfrm>
-            <a:off x="749808" y="2858414"/>
-            <a:ext cx="365760" cy="755294"/>
+            <a:off x="749808" y="2931566"/>
+            <a:ext cx="365760" cy="828446"/>
           </a:xfrm>
           <a:prstGeom prst="rect">
             <a:avLst/>
@@ -37122,8 +36768,8 @@
         </p:nvSpPr>
         <p:spPr>
           <a:xfrm>
-            <a:off x="1097280" y="2858414"/>
-            <a:ext cx="1825752" cy="755294"/>
+            <a:off x="1097280" y="2931566"/>
+            <a:ext cx="1825752" cy="828446"/>
           </a:xfrm>
           <a:prstGeom prst="rect">
             <a:avLst/>
@@ -37201,8 +36847,8 @@
         </p:nvSpPr>
         <p:spPr>
           <a:xfrm>
-            <a:off x="2941320" y="2858414"/>
-            <a:ext cx="1115568" cy="755294"/>
+            <a:off x="2941320" y="2931566"/>
+            <a:ext cx="1115568" cy="828446"/>
           </a:xfrm>
           <a:prstGeom prst="rect">
             <a:avLst/>
@@ -37240,8 +36886,8 @@
         </p:nvSpPr>
         <p:spPr>
           <a:xfrm>
-            <a:off x="658368" y="3613709"/>
-            <a:ext cx="3489960" cy="755294"/>
+            <a:off x="658368" y="3760013"/>
+            <a:ext cx="3489960" cy="828446"/>
           </a:xfrm>
           <a:prstGeom prst="rect">
             <a:avLst/>
@@ -37260,8 +36906,8 @@
         </p:nvSpPr>
         <p:spPr>
           <a:xfrm>
-            <a:off x="4084320" y="3650285"/>
-            <a:ext cx="64008" cy="682142"/>
+            <a:off x="4084320" y="3796589"/>
+            <a:ext cx="64008" cy="755294"/>
           </a:xfrm>
           <a:prstGeom prst="rect">
             <a:avLst/>
@@ -37280,8 +36926,8 @@
         </p:nvSpPr>
         <p:spPr>
           <a:xfrm>
-            <a:off x="749808" y="3613709"/>
-            <a:ext cx="365760" cy="755294"/>
+            <a:off x="749808" y="3760013"/>
+            <a:ext cx="365760" cy="828446"/>
           </a:xfrm>
           <a:prstGeom prst="rect">
             <a:avLst/>
@@ -37319,8 +36965,8 @@
         </p:nvSpPr>
         <p:spPr>
           <a:xfrm>
-            <a:off x="1097280" y="3613709"/>
-            <a:ext cx="1825752" cy="755294"/>
+            <a:off x="1097280" y="3760013"/>
+            <a:ext cx="1825752" cy="828446"/>
           </a:xfrm>
           <a:prstGeom prst="rect">
             <a:avLst/>
@@ -37398,8 +37044,8 @@
         </p:nvSpPr>
         <p:spPr>
           <a:xfrm>
-            <a:off x="2941320" y="3613709"/>
-            <a:ext cx="1115568" cy="755294"/>
+            <a:off x="2941320" y="3760013"/>
+            <a:ext cx="1115568" cy="828446"/>
           </a:xfrm>
           <a:prstGeom prst="rect">
             <a:avLst/>
@@ -37437,8 +37083,8 @@
         </p:nvSpPr>
         <p:spPr>
           <a:xfrm>
-            <a:off x="4084320" y="4405579"/>
-            <a:ext cx="64008" cy="682142"/>
+            <a:off x="4084320" y="4625035"/>
+            <a:ext cx="64008" cy="755294"/>
           </a:xfrm>
           <a:prstGeom prst="rect">
             <a:avLst/>
@@ -37457,8 +37103,8 @@
         </p:nvSpPr>
         <p:spPr>
           <a:xfrm>
-            <a:off x="749808" y="4369003"/>
-            <a:ext cx="365760" cy="755294"/>
+            <a:off x="749808" y="4588459"/>
+            <a:ext cx="365760" cy="828446"/>
           </a:xfrm>
           <a:prstGeom prst="rect">
             <a:avLst/>
@@ -37496,8 +37142,8 @@
         </p:nvSpPr>
         <p:spPr>
           <a:xfrm>
-            <a:off x="1097280" y="4369003"/>
-            <a:ext cx="1825752" cy="755294"/>
+            <a:off x="1097280" y="4588459"/>
+            <a:ext cx="1825752" cy="828446"/>
           </a:xfrm>
           <a:prstGeom prst="rect">
             <a:avLst/>
@@ -37575,8 +37221,8 @@
         </p:nvSpPr>
         <p:spPr>
           <a:xfrm>
-            <a:off x="2941320" y="4369003"/>
-            <a:ext cx="1115568" cy="755294"/>
+            <a:off x="2941320" y="4588459"/>
+            <a:ext cx="1115568" cy="828446"/>
           </a:xfrm>
           <a:prstGeom prst="rect">
             <a:avLst/>
@@ -37614,8 +37260,8 @@
         </p:nvSpPr>
         <p:spPr>
           <a:xfrm>
-            <a:off x="658368" y="5124298"/>
-            <a:ext cx="3489960" cy="755294"/>
+            <a:off x="658368" y="5416906"/>
+            <a:ext cx="3489960" cy="828446"/>
           </a:xfrm>
           <a:prstGeom prst="rect">
             <a:avLst/>
@@ -37634,8 +37280,8 @@
         </p:nvSpPr>
         <p:spPr>
           <a:xfrm>
-            <a:off x="749808" y="5124298"/>
-            <a:ext cx="365760" cy="755294"/>
+            <a:off x="749808" y="5416906"/>
+            <a:ext cx="365760" cy="828446"/>
           </a:xfrm>
           <a:prstGeom prst="rect">
             <a:avLst/>
@@ -37673,8 +37319,8 @@
         </p:nvSpPr>
         <p:spPr>
           <a:xfrm>
-            <a:off x="1097280" y="5124298"/>
-            <a:ext cx="1825752" cy="755294"/>
+            <a:off x="1097280" y="5416906"/>
+            <a:ext cx="1825752" cy="828446"/>
           </a:xfrm>
           <a:prstGeom prst="rect">
             <a:avLst/>
@@ -37752,8 +37398,8 @@
         </p:nvSpPr>
         <p:spPr>
           <a:xfrm>
-            <a:off x="2941320" y="5124298"/>
-            <a:ext cx="1115568" cy="755294"/>
+            <a:off x="2941320" y="5416906"/>
+            <a:ext cx="1115568" cy="828446"/>
           </a:xfrm>
           <a:prstGeom prst="rect">
             <a:avLst/>
@@ -37890,7 +37536,7 @@
         <p:spPr>
           <a:xfrm>
             <a:off x="4349496" y="2103120"/>
-            <a:ext cx="3489960" cy="755294"/>
+            <a:ext cx="3489960" cy="828446"/>
           </a:xfrm>
           <a:prstGeom prst="rect">
             <a:avLst/>
@@ -37910,7 +37556,7 @@
         <p:spPr>
           <a:xfrm>
             <a:off x="4440936" y="2103120"/>
-            <a:ext cx="365760" cy="755294"/>
+            <a:ext cx="365760" cy="828446"/>
           </a:xfrm>
           <a:prstGeom prst="rect">
             <a:avLst/>
@@ -37949,7 +37595,7 @@
         <p:spPr>
           <a:xfrm>
             <a:off x="4788408" y="2103120"/>
-            <a:ext cx="1825752" cy="755294"/>
+            <a:ext cx="1825752" cy="828446"/>
           </a:xfrm>
           <a:prstGeom prst="rect">
             <a:avLst/>
@@ -38028,7 +37674,7 @@
         <p:spPr>
           <a:xfrm>
             <a:off x="6632448" y="2103120"/>
-            <a:ext cx="1115568" cy="755294"/>
+            <a:ext cx="1115568" cy="828446"/>
           </a:xfrm>
           <a:prstGeom prst="rect">
             <a:avLst/>
@@ -38066,8 +37712,8 @@
         </p:nvSpPr>
         <p:spPr>
           <a:xfrm>
-            <a:off x="4440936" y="2858414"/>
-            <a:ext cx="365760" cy="755294"/>
+            <a:off x="4440936" y="2931566"/>
+            <a:ext cx="365760" cy="828446"/>
           </a:xfrm>
           <a:prstGeom prst="rect">
             <a:avLst/>
@@ -38105,8 +37751,8 @@
         </p:nvSpPr>
         <p:spPr>
           <a:xfrm>
-            <a:off x="4788408" y="2858414"/>
-            <a:ext cx="1825752" cy="755294"/>
+            <a:off x="4788408" y="2931566"/>
+            <a:ext cx="1825752" cy="828446"/>
           </a:xfrm>
           <a:prstGeom prst="rect">
             <a:avLst/>
@@ -38184,8 +37830,8 @@
         </p:nvSpPr>
         <p:spPr>
           <a:xfrm>
-            <a:off x="6632448" y="2858414"/>
-            <a:ext cx="1115568" cy="755294"/>
+            <a:off x="6632448" y="2931566"/>
+            <a:ext cx="1115568" cy="828446"/>
           </a:xfrm>
           <a:prstGeom prst="rect">
             <a:avLst/>
@@ -38223,8 +37869,8 @@
         </p:nvSpPr>
         <p:spPr>
           <a:xfrm>
-            <a:off x="4349496" y="3613709"/>
-            <a:ext cx="3489960" cy="755294"/>
+            <a:off x="4349496" y="3760013"/>
+            <a:ext cx="3489960" cy="828446"/>
           </a:xfrm>
           <a:prstGeom prst="rect">
             <a:avLst/>
@@ -38243,8 +37889,8 @@
         </p:nvSpPr>
         <p:spPr>
           <a:xfrm>
-            <a:off x="4440936" y="3613709"/>
-            <a:ext cx="365760" cy="755294"/>
+            <a:off x="4440936" y="3760013"/>
+            <a:ext cx="365760" cy="828446"/>
           </a:xfrm>
           <a:prstGeom prst="rect">
             <a:avLst/>
@@ -38282,8 +37928,8 @@
         </p:nvSpPr>
         <p:spPr>
           <a:xfrm>
-            <a:off x="4788408" y="3613709"/>
-            <a:ext cx="1825752" cy="755294"/>
+            <a:off x="4788408" y="3760013"/>
+            <a:ext cx="1825752" cy="828446"/>
           </a:xfrm>
           <a:prstGeom prst="rect">
             <a:avLst/>
@@ -38361,8 +38007,8 @@
         </p:nvSpPr>
         <p:spPr>
           <a:xfrm>
-            <a:off x="6632448" y="3613709"/>
-            <a:ext cx="1115568" cy="755294"/>
+            <a:off x="6632448" y="3760013"/>
+            <a:ext cx="1115568" cy="828446"/>
           </a:xfrm>
           <a:prstGeom prst="rect">
             <a:avLst/>
@@ -38400,8 +38046,8 @@
         </p:nvSpPr>
         <p:spPr>
           <a:xfrm>
-            <a:off x="4440936" y="4369003"/>
-            <a:ext cx="365760" cy="755294"/>
+            <a:off x="4440936" y="4588459"/>
+            <a:ext cx="365760" cy="828446"/>
           </a:xfrm>
           <a:prstGeom prst="rect">
             <a:avLst/>
@@ -38439,8 +38085,8 @@
         </p:nvSpPr>
         <p:spPr>
           <a:xfrm>
-            <a:off x="4788408" y="4369003"/>
-            <a:ext cx="1825752" cy="755294"/>
+            <a:off x="4788408" y="4588459"/>
+            <a:ext cx="1825752" cy="828446"/>
           </a:xfrm>
           <a:prstGeom prst="rect">
             <a:avLst/>
@@ -38518,8 +38164,8 @@
         </p:nvSpPr>
         <p:spPr>
           <a:xfrm>
-            <a:off x="6632448" y="4369003"/>
-            <a:ext cx="1115568" cy="755294"/>
+            <a:off x="6632448" y="4588459"/>
+            <a:ext cx="1115568" cy="828446"/>
           </a:xfrm>
           <a:prstGeom prst="rect">
             <a:avLst/>
@@ -38557,8 +38203,8 @@
         </p:nvSpPr>
         <p:spPr>
           <a:xfrm>
-            <a:off x="4349496" y="5124298"/>
-            <a:ext cx="3489960" cy="755294"/>
+            <a:off x="4349496" y="5416906"/>
+            <a:ext cx="3489960" cy="828446"/>
           </a:xfrm>
           <a:prstGeom prst="rect">
             <a:avLst/>
@@ -38577,8 +38223,8 @@
         </p:nvSpPr>
         <p:spPr>
           <a:xfrm>
-            <a:off x="4440936" y="5124298"/>
-            <a:ext cx="365760" cy="755294"/>
+            <a:off x="4440936" y="5416906"/>
+            <a:ext cx="365760" cy="828446"/>
           </a:xfrm>
           <a:prstGeom prst="rect">
             <a:avLst/>
@@ -38616,8 +38262,8 @@
         </p:nvSpPr>
         <p:spPr>
           <a:xfrm>
-            <a:off x="4788408" y="5124298"/>
-            <a:ext cx="1825752" cy="755294"/>
+            <a:off x="4788408" y="5416906"/>
+            <a:ext cx="1825752" cy="828446"/>
           </a:xfrm>
           <a:prstGeom prst="rect">
             <a:avLst/>
@@ -38695,8 +38341,8 @@
         </p:nvSpPr>
         <p:spPr>
           <a:xfrm>
-            <a:off x="6632448" y="5124298"/>
-            <a:ext cx="1115568" cy="755294"/>
+            <a:off x="6632448" y="5416906"/>
+            <a:ext cx="1115568" cy="828446"/>
           </a:xfrm>
           <a:prstGeom prst="rect">
             <a:avLst/>
@@ -38833,7 +38479,7 @@
         <p:spPr>
           <a:xfrm>
             <a:off x="8040624" y="2103120"/>
-            <a:ext cx="3489960" cy="755294"/>
+            <a:ext cx="3489960" cy="828446"/>
           </a:xfrm>
           <a:prstGeom prst="rect">
             <a:avLst/>
@@ -38853,7 +38499,7 @@
         <p:spPr>
           <a:xfrm>
             <a:off x="11466576" y="2139696"/>
-            <a:ext cx="64008" cy="682142"/>
+            <a:ext cx="64008" cy="755294"/>
           </a:xfrm>
           <a:prstGeom prst="rect">
             <a:avLst/>
@@ -38873,7 +38519,7 @@
         <p:spPr>
           <a:xfrm>
             <a:off x="8132064" y="2103120"/>
-            <a:ext cx="365760" cy="755294"/>
+            <a:ext cx="365760" cy="828446"/>
           </a:xfrm>
           <a:prstGeom prst="rect">
             <a:avLst/>
@@ -38912,7 +38558,7 @@
         <p:spPr>
           <a:xfrm>
             <a:off x="8479536" y="2103120"/>
-            <a:ext cx="1825752" cy="755294"/>
+            <a:ext cx="1825752" cy="828446"/>
           </a:xfrm>
           <a:prstGeom prst="rect">
             <a:avLst/>
@@ -38991,7 +38637,7 @@
         <p:spPr>
           <a:xfrm>
             <a:off x="10323576" y="2103120"/>
-            <a:ext cx="1115568" cy="755294"/>
+            <a:ext cx="1115568" cy="828446"/>
           </a:xfrm>
           <a:prstGeom prst="rect">
             <a:avLst/>
@@ -39029,8 +38675,8 @@
         </p:nvSpPr>
         <p:spPr>
           <a:xfrm>
-            <a:off x="8132064" y="2858414"/>
-            <a:ext cx="365760" cy="755294"/>
+            <a:off x="8132064" y="2931566"/>
+            <a:ext cx="365760" cy="828446"/>
           </a:xfrm>
           <a:prstGeom prst="rect">
             <a:avLst/>
@@ -39068,8 +38714,8 @@
         </p:nvSpPr>
         <p:spPr>
           <a:xfrm>
-            <a:off x="8479536" y="2858414"/>
-            <a:ext cx="1825752" cy="755294"/>
+            <a:off x="8479536" y="2931566"/>
+            <a:ext cx="1825752" cy="828446"/>
           </a:xfrm>
           <a:prstGeom prst="rect">
             <a:avLst/>
@@ -39147,8 +38793,8 @@
         </p:nvSpPr>
         <p:spPr>
           <a:xfrm>
-            <a:off x="10323576" y="2858414"/>
-            <a:ext cx="1115568" cy="755294"/>
+            <a:off x="10323576" y="2931566"/>
+            <a:ext cx="1115568" cy="828446"/>
           </a:xfrm>
           <a:prstGeom prst="rect">
             <a:avLst/>
@@ -39186,8 +38832,8 @@
         </p:nvSpPr>
         <p:spPr>
           <a:xfrm>
-            <a:off x="8040624" y="3613709"/>
-            <a:ext cx="3489960" cy="755294"/>
+            <a:off x="8040624" y="3760013"/>
+            <a:ext cx="3489960" cy="828446"/>
           </a:xfrm>
           <a:prstGeom prst="rect">
             <a:avLst/>
@@ -39206,8 +38852,8 @@
         </p:nvSpPr>
         <p:spPr>
           <a:xfrm>
-            <a:off x="8132064" y="3613709"/>
-            <a:ext cx="365760" cy="755294"/>
+            <a:off x="8132064" y="3760013"/>
+            <a:ext cx="365760" cy="828446"/>
           </a:xfrm>
           <a:prstGeom prst="rect">
             <a:avLst/>
@@ -39245,8 +38891,8 @@
         </p:nvSpPr>
         <p:spPr>
           <a:xfrm>
-            <a:off x="8479536" y="3613709"/>
-            <a:ext cx="1825752" cy="755294"/>
+            <a:off x="8479536" y="3760013"/>
+            <a:ext cx="1825752" cy="828446"/>
           </a:xfrm>
           <a:prstGeom prst="rect">
             <a:avLst/>
@@ -39324,8 +38970,8 @@
         </p:nvSpPr>
         <p:spPr>
           <a:xfrm>
-            <a:off x="10323576" y="3613709"/>
-            <a:ext cx="1115568" cy="755294"/>
+            <a:off x="10323576" y="3760013"/>
+            <a:ext cx="1115568" cy="828446"/>
           </a:xfrm>
           <a:prstGeom prst="rect">
             <a:avLst/>
@@ -39363,8 +39009,8 @@
         </p:nvSpPr>
         <p:spPr>
           <a:xfrm>
-            <a:off x="11466576" y="4405579"/>
-            <a:ext cx="64008" cy="682142"/>
+            <a:off x="11466576" y="4625035"/>
+            <a:ext cx="64008" cy="755294"/>
           </a:xfrm>
           <a:prstGeom prst="rect">
             <a:avLst/>
@@ -39383,8 +39029,8 @@
         </p:nvSpPr>
         <p:spPr>
           <a:xfrm>
-            <a:off x="8132064" y="4369003"/>
-            <a:ext cx="365760" cy="755294"/>
+            <a:off x="8132064" y="4588459"/>
+            <a:ext cx="365760" cy="828446"/>
           </a:xfrm>
           <a:prstGeom prst="rect">
             <a:avLst/>
@@ -39422,8 +39068,8 @@
         </p:nvSpPr>
         <p:spPr>
           <a:xfrm>
-            <a:off x="8479536" y="4369003"/>
-            <a:ext cx="1825752" cy="755294"/>
+            <a:off x="8479536" y="4588459"/>
+            <a:ext cx="1825752" cy="828446"/>
           </a:xfrm>
           <a:prstGeom prst="rect">
             <a:avLst/>
@@ -39501,8 +39147,8 @@
         </p:nvSpPr>
         <p:spPr>
           <a:xfrm>
-            <a:off x="10323576" y="4369003"/>
-            <a:ext cx="1115568" cy="755294"/>
+            <a:off x="10323576" y="4588459"/>
+            <a:ext cx="1115568" cy="828446"/>
           </a:xfrm>
           <a:prstGeom prst="rect">
             <a:avLst/>
@@ -39540,8 +39186,8 @@
         </p:nvSpPr>
         <p:spPr>
           <a:xfrm>
-            <a:off x="8040624" y="5124298"/>
-            <a:ext cx="3489960" cy="755294"/>
+            <a:off x="8040624" y="5416906"/>
+            <a:ext cx="3489960" cy="828446"/>
           </a:xfrm>
           <a:prstGeom prst="rect">
             <a:avLst/>
@@ -39560,8 +39206,8 @@
         </p:nvSpPr>
         <p:spPr>
           <a:xfrm>
-            <a:off x="8132064" y="5124298"/>
-            <a:ext cx="365760" cy="755294"/>
+            <a:off x="8132064" y="5416906"/>
+            <a:ext cx="365760" cy="828446"/>
           </a:xfrm>
           <a:prstGeom prst="rect">
             <a:avLst/>
@@ -39599,8 +39245,8 @@
         </p:nvSpPr>
         <p:spPr>
           <a:xfrm>
-            <a:off x="8479536" y="5124298"/>
-            <a:ext cx="1825752" cy="755294"/>
+            <a:off x="8479536" y="5416906"/>
+            <a:ext cx="1825752" cy="828446"/>
           </a:xfrm>
           <a:prstGeom prst="rect">
             <a:avLst/>
@@ -39678,8 +39324,8 @@
         </p:nvSpPr>
         <p:spPr>
           <a:xfrm>
-            <a:off x="10323576" y="5124298"/>
-            <a:ext cx="1115568" cy="755294"/>
+            <a:off x="10323576" y="5416906"/>
+            <a:ext cx="1115568" cy="828446"/>
           </a:xfrm>
           <a:prstGeom prst="rect">
             <a:avLst/>
@@ -39704,65 +39350,6 @@
                 <a:cs typeface="Inter" pitchFamily="34" charset="-120"/>
               </a:rPr>
               <a:t>+2.5 pts</a:t>
-            </a:r>
-            <a:endParaRPr lang="en-US" sz="1600" dirty="0"/>
-          </a:p>
-        </p:txBody>
-      </p:sp>
-      <p:sp>
-        <p:nvSpPr>
-          <p:cNvPr id="73" name="Shape 71"/>
-          <p:cNvSpPr/>
-          <p:nvPr/>
-        </p:nvSpPr>
-        <p:spPr>
-          <a:xfrm>
-            <a:off x="457200" y="6126480"/>
-            <a:ext cx="11274552" cy="615696"/>
-          </a:xfrm>
-          <a:prstGeom prst="rect">
-            <a:avLst/>
-          </a:prstGeom>
-          <a:solidFill>
-            <a:srgbClr val="EDF4FA"/>
-          </a:solidFill>
-          <a:ln/>
-        </p:spPr>
-      </p:sp>
-      <p:sp>
-        <p:nvSpPr>
-          <p:cNvPr id="74" name="Text 72"/>
-          <p:cNvSpPr txBox="1"/>
-          <p:nvPr/>
-        </p:nvSpPr>
-        <p:spPr>
-          <a:xfrm>
-            <a:off x="658368" y="6144768"/>
-            <a:ext cx="10927080" cy="579120"/>
-          </a:xfrm>
-          <a:prstGeom prst="rect">
-            <a:avLst/>
-          </a:prstGeom>
-          <a:noFill/>
-          <a:ln/>
-        </p:spPr>
-        <p:txBody>
-          <a:bodyPr wrap="square" lIns="0" tIns="0" rIns="0" bIns="0" rtlCol="0" anchor="ctr"/>
-          <a:lstStyle/>
-          <a:p>
-            <a:pPr indent="0" marL="0">
-              <a:buNone/>
-            </a:pPr>
-            <a:r>
-              <a:rPr lang="en-US" sz="1600" b="1" dirty="0">
-                <a:solidFill>
-                  <a:srgbClr val="0B2C4A"/>
-                </a:solidFill>
-                <a:latin typeface="Inter" pitchFamily="34" charset="0"/>
-                <a:ea typeface="Inter" pitchFamily="34" charset="-122"/>
-                <a:cs typeface="Inter" pitchFamily="34" charset="-120"/>
-              </a:rPr>
-              <a:t>Ask Subaru Prescott, LR LV and Mazda what changed. Ask Subaru St George, Nissan and Kia LV what got in the way. Ask Mazda, Hyundai Prescott and Honda Spokane what they started this year.</a:t>
             </a:r>
             <a:endParaRPr lang="en-US" sz="1600" dirty="0"/>
           </a:p>
@@ -40860,7 +40447,7 @@
         <p:spPr>
           <a:xfrm>
             <a:off x="457200" y="1207008"/>
-            <a:ext cx="11274552" cy="4782312"/>
+            <a:ext cx="11274552" cy="5148072"/>
           </a:xfrm>
           <a:prstGeom prst="rect">
             <a:avLst/>
@@ -41037,7 +40624,7 @@
         <p:spPr>
           <a:xfrm>
             <a:off x="658368" y="1847088"/>
-            <a:ext cx="310896" cy="239896"/>
+            <a:ext cx="310896" cy="261411"/>
           </a:xfrm>
           <a:prstGeom prst="rect">
             <a:avLst/>
@@ -41076,7 +40663,7 @@
         <p:spPr>
           <a:xfrm>
             <a:off x="1014984" y="1847088"/>
-            <a:ext cx="1920240" cy="239896"/>
+            <a:ext cx="1920240" cy="261411"/>
           </a:xfrm>
           <a:prstGeom prst="rect">
             <a:avLst/>
@@ -41114,8 +40701,8 @@
         </p:nvSpPr>
         <p:spPr>
           <a:xfrm>
-            <a:off x="3008376" y="1907062"/>
-            <a:ext cx="1691640" cy="119948"/>
+            <a:off x="3008376" y="1912441"/>
+            <a:ext cx="1691640" cy="130705"/>
           </a:xfrm>
           <a:prstGeom prst="rect">
             <a:avLst/>
@@ -41135,7 +40722,7 @@
         <p:spPr>
           <a:xfrm>
             <a:off x="4754880" y="1847088"/>
-            <a:ext cx="1143000" cy="239896"/>
+            <a:ext cx="1143000" cy="261411"/>
           </a:xfrm>
           <a:prstGeom prst="rect">
             <a:avLst/>
@@ -41173,8 +40760,8 @@
         </p:nvSpPr>
         <p:spPr>
           <a:xfrm>
-            <a:off x="658368" y="2086984"/>
-            <a:ext cx="310896" cy="239896"/>
+            <a:off x="658368" y="2108499"/>
+            <a:ext cx="310896" cy="261411"/>
           </a:xfrm>
           <a:prstGeom prst="rect">
             <a:avLst/>
@@ -41212,8 +40799,8 @@
         </p:nvSpPr>
         <p:spPr>
           <a:xfrm>
-            <a:off x="1014984" y="2086984"/>
-            <a:ext cx="1920240" cy="239896"/>
+            <a:off x="1014984" y="2108499"/>
+            <a:ext cx="1920240" cy="261411"/>
           </a:xfrm>
           <a:prstGeom prst="rect">
             <a:avLst/>
@@ -41251,8 +40838,8 @@
         </p:nvSpPr>
         <p:spPr>
           <a:xfrm>
-            <a:off x="3008376" y="2146957"/>
-            <a:ext cx="1277371" cy="119948"/>
+            <a:off x="3008376" y="2173852"/>
+            <a:ext cx="1277371" cy="130705"/>
           </a:xfrm>
           <a:prstGeom prst="rect">
             <a:avLst/>
@@ -41271,8 +40858,8 @@
         </p:nvSpPr>
         <p:spPr>
           <a:xfrm>
-            <a:off x="4754880" y="2086984"/>
-            <a:ext cx="1143000" cy="239896"/>
+            <a:off x="4754880" y="2108499"/>
+            <a:ext cx="1143000" cy="261411"/>
           </a:xfrm>
           <a:prstGeom prst="rect">
             <a:avLst/>
@@ -41310,8 +40897,8 @@
         </p:nvSpPr>
         <p:spPr>
           <a:xfrm>
-            <a:off x="658368" y="2326879"/>
-            <a:ext cx="310896" cy="239896"/>
+            <a:off x="658368" y="2369910"/>
+            <a:ext cx="310896" cy="261411"/>
           </a:xfrm>
           <a:prstGeom prst="rect">
             <a:avLst/>
@@ -41349,8 +40936,8 @@
         </p:nvSpPr>
         <p:spPr>
           <a:xfrm>
-            <a:off x="1014984" y="2326879"/>
-            <a:ext cx="1920240" cy="239896"/>
+            <a:off x="1014984" y="2369910"/>
+            <a:ext cx="1920240" cy="261411"/>
           </a:xfrm>
           <a:prstGeom prst="rect">
             <a:avLst/>
@@ -41388,8 +40975,8 @@
         </p:nvSpPr>
         <p:spPr>
           <a:xfrm>
-            <a:off x="3008376" y="2386853"/>
-            <a:ext cx="1171658" cy="119948"/>
+            <a:off x="3008376" y="2435262"/>
+            <a:ext cx="1171658" cy="130705"/>
           </a:xfrm>
           <a:prstGeom prst="rect">
             <a:avLst/>
@@ -41408,8 +40995,8 @@
         </p:nvSpPr>
         <p:spPr>
           <a:xfrm>
-            <a:off x="4754880" y="2326879"/>
-            <a:ext cx="1143000" cy="239896"/>
+            <a:off x="4754880" y="2369910"/>
+            <a:ext cx="1143000" cy="261411"/>
           </a:xfrm>
           <a:prstGeom prst="rect">
             <a:avLst/>
@@ -41447,8 +41034,8 @@
         </p:nvSpPr>
         <p:spPr>
           <a:xfrm>
-            <a:off x="658368" y="2566775"/>
-            <a:ext cx="310896" cy="239896"/>
+            <a:off x="658368" y="2631320"/>
+            <a:ext cx="310896" cy="261411"/>
           </a:xfrm>
           <a:prstGeom prst="rect">
             <a:avLst/>
@@ -41486,8 +41073,8 @@
         </p:nvSpPr>
         <p:spPr>
           <a:xfrm>
-            <a:off x="1014984" y="2566775"/>
-            <a:ext cx="1920240" cy="239896"/>
+            <a:off x="1014984" y="2631320"/>
+            <a:ext cx="1920240" cy="261411"/>
           </a:xfrm>
           <a:prstGeom prst="rect">
             <a:avLst/>
@@ -41525,8 +41112,8 @@
         </p:nvSpPr>
         <p:spPr>
           <a:xfrm>
-            <a:off x="3008376" y="2626748"/>
-            <a:ext cx="1042017" cy="119948"/>
+            <a:off x="3008376" y="2696673"/>
+            <a:ext cx="1042017" cy="130705"/>
           </a:xfrm>
           <a:prstGeom prst="rect">
             <a:avLst/>
@@ -41545,8 +41132,8 @@
         </p:nvSpPr>
         <p:spPr>
           <a:xfrm>
-            <a:off x="4754880" y="2566775"/>
-            <a:ext cx="1143000" cy="239896"/>
+            <a:off x="4754880" y="2631320"/>
+            <a:ext cx="1143000" cy="261411"/>
           </a:xfrm>
           <a:prstGeom prst="rect">
             <a:avLst/>
@@ -41584,8 +41171,8 @@
         </p:nvSpPr>
         <p:spPr>
           <a:xfrm>
-            <a:off x="658368" y="2806670"/>
-            <a:ext cx="310896" cy="239896"/>
+            <a:off x="658368" y="2892731"/>
+            <a:ext cx="310896" cy="261411"/>
           </a:xfrm>
           <a:prstGeom prst="rect">
             <a:avLst/>
@@ -41623,8 +41210,8 @@
         </p:nvSpPr>
         <p:spPr>
           <a:xfrm>
-            <a:off x="1014984" y="2806670"/>
-            <a:ext cx="1920240" cy="239896"/>
+            <a:off x="1014984" y="2892731"/>
+            <a:ext cx="1920240" cy="261411"/>
           </a:xfrm>
           <a:prstGeom prst="rect">
             <a:avLst/>
@@ -41662,8 +41249,8 @@
         </p:nvSpPr>
         <p:spPr>
           <a:xfrm>
-            <a:off x="3008376" y="2866644"/>
-            <a:ext cx="991227" cy="119948"/>
+            <a:off x="3008376" y="2958084"/>
+            <a:ext cx="991227" cy="130705"/>
           </a:xfrm>
           <a:prstGeom prst="rect">
             <a:avLst/>
@@ -41682,8 +41269,8 @@
         </p:nvSpPr>
         <p:spPr>
           <a:xfrm>
-            <a:off x="4754880" y="2806670"/>
-            <a:ext cx="1143000" cy="239896"/>
+            <a:off x="4754880" y="2892731"/>
+            <a:ext cx="1143000" cy="261411"/>
           </a:xfrm>
           <a:prstGeom prst="rect">
             <a:avLst/>
@@ -41721,8 +41308,8 @@
         </p:nvSpPr>
         <p:spPr>
           <a:xfrm>
-            <a:off x="658368" y="3046566"/>
-            <a:ext cx="310896" cy="239896"/>
+            <a:off x="658368" y="3154142"/>
+            <a:ext cx="310896" cy="261411"/>
           </a:xfrm>
           <a:prstGeom prst="rect">
             <a:avLst/>
@@ -41760,8 +41347,8 @@
         </p:nvSpPr>
         <p:spPr>
           <a:xfrm>
-            <a:off x="1014984" y="3046566"/>
-            <a:ext cx="1920240" cy="239896"/>
+            <a:off x="1014984" y="3154142"/>
+            <a:ext cx="1920240" cy="261411"/>
           </a:xfrm>
           <a:prstGeom prst="rect">
             <a:avLst/>
@@ -41799,8 +41386,8 @@
         </p:nvSpPr>
         <p:spPr>
           <a:xfrm>
-            <a:off x="3008376" y="3106540"/>
-            <a:ext cx="975131" cy="119948"/>
+            <a:off x="3008376" y="3219495"/>
+            <a:ext cx="975131" cy="130705"/>
           </a:xfrm>
           <a:prstGeom prst="rect">
             <a:avLst/>
@@ -41819,8 +41406,8 @@
         </p:nvSpPr>
         <p:spPr>
           <a:xfrm>
-            <a:off x="4754880" y="3046566"/>
-            <a:ext cx="1143000" cy="239896"/>
+            <a:off x="4754880" y="3154142"/>
+            <a:ext cx="1143000" cy="261411"/>
           </a:xfrm>
           <a:prstGeom prst="rect">
             <a:avLst/>
@@ -41858,8 +41445,8 @@
         </p:nvSpPr>
         <p:spPr>
           <a:xfrm>
-            <a:off x="658368" y="3286461"/>
-            <a:ext cx="310896" cy="239896"/>
+            <a:off x="658368" y="3415553"/>
+            <a:ext cx="310896" cy="261411"/>
           </a:xfrm>
           <a:prstGeom prst="rect">
             <a:avLst/>
@@ -41897,8 +41484,8 @@
         </p:nvSpPr>
         <p:spPr>
           <a:xfrm>
-            <a:off x="1014984" y="3286461"/>
-            <a:ext cx="1920240" cy="239896"/>
+            <a:off x="1014984" y="3415553"/>
+            <a:ext cx="1920240" cy="261411"/>
           </a:xfrm>
           <a:prstGeom prst="rect">
             <a:avLst/>
@@ -41936,8 +41523,8 @@
         </p:nvSpPr>
         <p:spPr>
           <a:xfrm>
-            <a:off x="3008376" y="3346435"/>
-            <a:ext cx="953847" cy="119948"/>
+            <a:off x="3008376" y="3480906"/>
+            <a:ext cx="953847" cy="130705"/>
           </a:xfrm>
           <a:prstGeom prst="rect">
             <a:avLst/>
@@ -41956,8 +41543,8 @@
         </p:nvSpPr>
         <p:spPr>
           <a:xfrm>
-            <a:off x="4754880" y="3286461"/>
-            <a:ext cx="1143000" cy="239896"/>
+            <a:off x="4754880" y="3415553"/>
+            <a:ext cx="1143000" cy="261411"/>
           </a:xfrm>
           <a:prstGeom prst="rect">
             <a:avLst/>
@@ -41995,8 +41582,8 @@
         </p:nvSpPr>
         <p:spPr>
           <a:xfrm>
-            <a:off x="658368" y="3526357"/>
-            <a:ext cx="310896" cy="239896"/>
+            <a:off x="658368" y="3676964"/>
+            <a:ext cx="310896" cy="261411"/>
           </a:xfrm>
           <a:prstGeom prst="rect">
             <a:avLst/>
@@ -42034,8 +41621,8 @@
         </p:nvSpPr>
         <p:spPr>
           <a:xfrm>
-            <a:off x="1014984" y="3526357"/>
-            <a:ext cx="1920240" cy="239896"/>
+            <a:off x="1014984" y="3676964"/>
+            <a:ext cx="1920240" cy="261411"/>
           </a:xfrm>
           <a:prstGeom prst="rect">
             <a:avLst/>
@@ -42073,8 +41660,8 @@
         </p:nvSpPr>
         <p:spPr>
           <a:xfrm>
-            <a:off x="3008376" y="3586331"/>
-            <a:ext cx="880621" cy="119948"/>
+            <a:off x="3008376" y="3742316"/>
+            <a:ext cx="880621" cy="130705"/>
           </a:xfrm>
           <a:prstGeom prst="rect">
             <a:avLst/>
@@ -42093,8 +41680,8 @@
         </p:nvSpPr>
         <p:spPr>
           <a:xfrm>
-            <a:off x="4754880" y="3526357"/>
-            <a:ext cx="1143000" cy="239896"/>
+            <a:off x="4754880" y="3676964"/>
+            <a:ext cx="1143000" cy="261411"/>
           </a:xfrm>
           <a:prstGeom prst="rect">
             <a:avLst/>
@@ -42132,8 +41719,8 @@
         </p:nvSpPr>
         <p:spPr>
           <a:xfrm>
-            <a:off x="658368" y="3766252"/>
-            <a:ext cx="310896" cy="239896"/>
+            <a:off x="658368" y="3938375"/>
+            <a:ext cx="310896" cy="261411"/>
           </a:xfrm>
           <a:prstGeom prst="rect">
             <a:avLst/>
@@ -42171,8 +41758,8 @@
         </p:nvSpPr>
         <p:spPr>
           <a:xfrm>
-            <a:off x="1014984" y="3766252"/>
-            <a:ext cx="1920240" cy="239896"/>
+            <a:off x="1014984" y="3938375"/>
+            <a:ext cx="1920240" cy="261411"/>
           </a:xfrm>
           <a:prstGeom prst="rect">
             <a:avLst/>
@@ -42210,8 +41797,8 @@
         </p:nvSpPr>
         <p:spPr>
           <a:xfrm>
-            <a:off x="3008376" y="3826226"/>
-            <a:ext cx="869652" cy="119948"/>
+            <a:off x="3008376" y="4003727"/>
+            <a:ext cx="869652" cy="130705"/>
           </a:xfrm>
           <a:prstGeom prst="rect">
             <a:avLst/>
@@ -42230,8 +41817,8 @@
         </p:nvSpPr>
         <p:spPr>
           <a:xfrm>
-            <a:off x="4754880" y="3766252"/>
-            <a:ext cx="1143000" cy="239896"/>
+            <a:off x="4754880" y="3938375"/>
+            <a:ext cx="1143000" cy="261411"/>
           </a:xfrm>
           <a:prstGeom prst="rect">
             <a:avLst/>
@@ -42269,8 +41856,8 @@
         </p:nvSpPr>
         <p:spPr>
           <a:xfrm>
-            <a:off x="658368" y="4006148"/>
-            <a:ext cx="310896" cy="239896"/>
+            <a:off x="658368" y="4199785"/>
+            <a:ext cx="310896" cy="261411"/>
           </a:xfrm>
           <a:prstGeom prst="rect">
             <a:avLst/>
@@ -42308,8 +41895,8 @@
         </p:nvSpPr>
         <p:spPr>
           <a:xfrm>
-            <a:off x="1014984" y="4006148"/>
-            <a:ext cx="1920240" cy="239896"/>
+            <a:off x="1014984" y="4199785"/>
+            <a:ext cx="1920240" cy="261411"/>
           </a:xfrm>
           <a:prstGeom prst="rect">
             <a:avLst/>
@@ -42347,8 +41934,8 @@
         </p:nvSpPr>
         <p:spPr>
           <a:xfrm>
-            <a:off x="3008376" y="4066122"/>
-            <a:ext cx="846628" cy="119948"/>
+            <a:off x="3008376" y="4265138"/>
+            <a:ext cx="846628" cy="130705"/>
           </a:xfrm>
           <a:prstGeom prst="rect">
             <a:avLst/>
@@ -42367,8 +41954,8 @@
         </p:nvSpPr>
         <p:spPr>
           <a:xfrm>
-            <a:off x="4754880" y="4006148"/>
-            <a:ext cx="1143000" cy="239896"/>
+            <a:off x="4754880" y="4199785"/>
+            <a:ext cx="1143000" cy="261411"/>
           </a:xfrm>
           <a:prstGeom prst="rect">
             <a:avLst/>
@@ -42406,8 +41993,8 @@
         </p:nvSpPr>
         <p:spPr>
           <a:xfrm>
-            <a:off x="658368" y="4246043"/>
-            <a:ext cx="310896" cy="239896"/>
+            <a:off x="658368" y="4461196"/>
+            <a:ext cx="310896" cy="261411"/>
           </a:xfrm>
           <a:prstGeom prst="rect">
             <a:avLst/>
@@ -42445,8 +42032,8 @@
         </p:nvSpPr>
         <p:spPr>
           <a:xfrm>
-            <a:off x="1014984" y="4246043"/>
-            <a:ext cx="1920240" cy="239896"/>
+            <a:off x="1014984" y="4461196"/>
+            <a:ext cx="1920240" cy="261411"/>
           </a:xfrm>
           <a:prstGeom prst="rect">
             <a:avLst/>
@@ -42484,8 +42071,8 @@
         </p:nvSpPr>
         <p:spPr>
           <a:xfrm>
-            <a:off x="3008376" y="4306017"/>
-            <a:ext cx="830606" cy="119948"/>
+            <a:off x="3008376" y="4526549"/>
+            <a:ext cx="830606" cy="130705"/>
           </a:xfrm>
           <a:prstGeom prst="rect">
             <a:avLst/>
@@ -42504,8 +42091,8 @@
         </p:nvSpPr>
         <p:spPr>
           <a:xfrm>
-            <a:off x="4754880" y="4246043"/>
-            <a:ext cx="1143000" cy="239896"/>
+            <a:off x="4754880" y="4461196"/>
+            <a:ext cx="1143000" cy="261411"/>
           </a:xfrm>
           <a:prstGeom prst="rect">
             <a:avLst/>
@@ -42543,8 +42130,8 @@
         </p:nvSpPr>
         <p:spPr>
           <a:xfrm>
-            <a:off x="658368" y="4485939"/>
-            <a:ext cx="310896" cy="239896"/>
+            <a:off x="658368" y="4722607"/>
+            <a:ext cx="310896" cy="261411"/>
           </a:xfrm>
           <a:prstGeom prst="rect">
             <a:avLst/>
@@ -42582,8 +42169,8 @@
         </p:nvSpPr>
         <p:spPr>
           <a:xfrm>
-            <a:off x="1014984" y="4485939"/>
-            <a:ext cx="1920240" cy="239896"/>
+            <a:off x="1014984" y="4722607"/>
+            <a:ext cx="1920240" cy="261411"/>
           </a:xfrm>
           <a:prstGeom prst="rect">
             <a:avLst/>
@@ -42621,8 +42208,8 @@
         </p:nvSpPr>
         <p:spPr>
           <a:xfrm>
-            <a:off x="3008376" y="4545913"/>
-            <a:ext cx="824603" cy="119948"/>
+            <a:off x="3008376" y="4787960"/>
+            <a:ext cx="824603" cy="130705"/>
           </a:xfrm>
           <a:prstGeom prst="rect">
             <a:avLst/>
@@ -42641,8 +42228,8 @@
         </p:nvSpPr>
         <p:spPr>
           <a:xfrm>
-            <a:off x="4754880" y="4485939"/>
-            <a:ext cx="1143000" cy="239896"/>
+            <a:off x="4754880" y="4722607"/>
+            <a:ext cx="1143000" cy="261411"/>
           </a:xfrm>
           <a:prstGeom prst="rect">
             <a:avLst/>
@@ -42680,8 +42267,8 @@
         </p:nvSpPr>
         <p:spPr>
           <a:xfrm>
-            <a:off x="658368" y="4725834"/>
-            <a:ext cx="310896" cy="239896"/>
+            <a:off x="658368" y="4984018"/>
+            <a:ext cx="310896" cy="261411"/>
           </a:xfrm>
           <a:prstGeom prst="rect">
             <a:avLst/>
@@ -42719,8 +42306,8 @@
         </p:nvSpPr>
         <p:spPr>
           <a:xfrm>
-            <a:off x="1014984" y="4725834"/>
-            <a:ext cx="1920240" cy="239896"/>
+            <a:off x="1014984" y="4984018"/>
+            <a:ext cx="1920240" cy="261411"/>
           </a:xfrm>
           <a:prstGeom prst="rect">
             <a:avLst/>
@@ -42758,8 +42345,8 @@
         </p:nvSpPr>
         <p:spPr>
           <a:xfrm>
-            <a:off x="3008376" y="4785808"/>
-            <a:ext cx="790584" cy="119948"/>
+            <a:off x="3008376" y="5049371"/>
+            <a:ext cx="790584" cy="130705"/>
           </a:xfrm>
           <a:prstGeom prst="rect">
             <a:avLst/>
@@ -42778,8 +42365,8 @@
         </p:nvSpPr>
         <p:spPr>
           <a:xfrm>
-            <a:off x="4754880" y="4725834"/>
-            <a:ext cx="1143000" cy="239896"/>
+            <a:off x="4754880" y="4984018"/>
+            <a:ext cx="1143000" cy="261411"/>
           </a:xfrm>
           <a:prstGeom prst="rect">
             <a:avLst/>
@@ -42817,8 +42404,8 @@
         </p:nvSpPr>
         <p:spPr>
           <a:xfrm>
-            <a:off x="658368" y="4965730"/>
-            <a:ext cx="310896" cy="239896"/>
+            <a:off x="658368" y="5245429"/>
+            <a:ext cx="310896" cy="261411"/>
           </a:xfrm>
           <a:prstGeom prst="rect">
             <a:avLst/>
@@ -42856,8 +42443,8 @@
         </p:nvSpPr>
         <p:spPr>
           <a:xfrm>
-            <a:off x="1014984" y="4965730"/>
-            <a:ext cx="1920240" cy="239896"/>
+            <a:off x="1014984" y="5245429"/>
+            <a:ext cx="1920240" cy="261411"/>
           </a:xfrm>
           <a:prstGeom prst="rect">
             <a:avLst/>
@@ -42895,8 +42482,8 @@
         </p:nvSpPr>
         <p:spPr>
           <a:xfrm>
-            <a:off x="3008376" y="5025704"/>
-            <a:ext cx="780105" cy="119948"/>
+            <a:off x="3008376" y="5310781"/>
+            <a:ext cx="780105" cy="130705"/>
           </a:xfrm>
           <a:prstGeom prst="rect">
             <a:avLst/>
@@ -42915,8 +42502,8 @@
         </p:nvSpPr>
         <p:spPr>
           <a:xfrm>
-            <a:off x="4754880" y="4965730"/>
-            <a:ext cx="1143000" cy="239896"/>
+            <a:off x="4754880" y="5245429"/>
+            <a:ext cx="1143000" cy="261411"/>
           </a:xfrm>
           <a:prstGeom prst="rect">
             <a:avLst/>
@@ -42954,8 +42541,8 @@
         </p:nvSpPr>
         <p:spPr>
           <a:xfrm>
-            <a:off x="658368" y="5205625"/>
-            <a:ext cx="310896" cy="239896"/>
+            <a:off x="658368" y="5506840"/>
+            <a:ext cx="310896" cy="261411"/>
           </a:xfrm>
           <a:prstGeom prst="rect">
             <a:avLst/>
@@ -42993,8 +42580,8 @@
         </p:nvSpPr>
         <p:spPr>
           <a:xfrm>
-            <a:off x="1014984" y="5205625"/>
-            <a:ext cx="1920240" cy="239896"/>
+            <a:off x="1014984" y="5506840"/>
+            <a:ext cx="1920240" cy="261411"/>
           </a:xfrm>
           <a:prstGeom prst="rect">
             <a:avLst/>
@@ -43032,8 +42619,8 @@
         </p:nvSpPr>
         <p:spPr>
           <a:xfrm>
-            <a:off x="3008376" y="5265599"/>
-            <a:ext cx="695403" cy="119948"/>
+            <a:off x="3008376" y="5572192"/>
+            <a:ext cx="695403" cy="130705"/>
           </a:xfrm>
           <a:prstGeom prst="rect">
             <a:avLst/>
@@ -43052,8 +42639,8 @@
         </p:nvSpPr>
         <p:spPr>
           <a:xfrm>
-            <a:off x="4754880" y="5205625"/>
-            <a:ext cx="1143000" cy="239896"/>
+            <a:off x="4754880" y="5506840"/>
+            <a:ext cx="1143000" cy="261411"/>
           </a:xfrm>
           <a:prstGeom prst="rect">
             <a:avLst/>
@@ -43091,8 +42678,8 @@
         </p:nvSpPr>
         <p:spPr>
           <a:xfrm>
-            <a:off x="658368" y="5445521"/>
-            <a:ext cx="310896" cy="239896"/>
+            <a:off x="658368" y="5768250"/>
+            <a:ext cx="310896" cy="261411"/>
           </a:xfrm>
           <a:prstGeom prst="rect">
             <a:avLst/>
@@ -43130,8 +42717,8 @@
         </p:nvSpPr>
         <p:spPr>
           <a:xfrm>
-            <a:off x="1014984" y="5445521"/>
-            <a:ext cx="1920240" cy="239896"/>
+            <a:off x="1014984" y="5768250"/>
+            <a:ext cx="1920240" cy="261411"/>
           </a:xfrm>
           <a:prstGeom prst="rect">
             <a:avLst/>
@@ -43169,8 +42756,8 @@
         </p:nvSpPr>
         <p:spPr>
           <a:xfrm>
-            <a:off x="3008376" y="5505495"/>
-            <a:ext cx="688562" cy="119948"/>
+            <a:off x="3008376" y="5833603"/>
+            <a:ext cx="688562" cy="130705"/>
           </a:xfrm>
           <a:prstGeom prst="rect">
             <a:avLst/>
@@ -43189,8 +42776,8 @@
         </p:nvSpPr>
         <p:spPr>
           <a:xfrm>
-            <a:off x="4754880" y="5445521"/>
-            <a:ext cx="1143000" cy="239896"/>
+            <a:off x="4754880" y="5768250"/>
+            <a:ext cx="1143000" cy="261411"/>
           </a:xfrm>
           <a:prstGeom prst="rect">
             <a:avLst/>
@@ -43228,8 +42815,8 @@
         </p:nvSpPr>
         <p:spPr>
           <a:xfrm>
-            <a:off x="658368" y="5685416"/>
-            <a:ext cx="310896" cy="239896"/>
+            <a:off x="658368" y="6029661"/>
+            <a:ext cx="310896" cy="261411"/>
           </a:xfrm>
           <a:prstGeom prst="rect">
             <a:avLst/>
@@ -43267,8 +42854,8 @@
         </p:nvSpPr>
         <p:spPr>
           <a:xfrm>
-            <a:off x="1014984" y="5685416"/>
-            <a:ext cx="1920240" cy="239896"/>
+            <a:off x="1014984" y="6029661"/>
+            <a:ext cx="1920240" cy="261411"/>
           </a:xfrm>
           <a:prstGeom prst="rect">
             <a:avLst/>
@@ -43306,8 +42893,8 @@
         </p:nvSpPr>
         <p:spPr>
           <a:xfrm>
-            <a:off x="3008376" y="5745390"/>
-            <a:ext cx="686926" cy="119948"/>
+            <a:off x="3008376" y="6095014"/>
+            <a:ext cx="686926" cy="130705"/>
           </a:xfrm>
           <a:prstGeom prst="rect">
             <a:avLst/>
@@ -43326,8 +42913,8 @@
         </p:nvSpPr>
         <p:spPr>
           <a:xfrm>
-            <a:off x="4754880" y="5685416"/>
-            <a:ext cx="1143000" cy="239896"/>
+            <a:off x="4754880" y="6029661"/>
+            <a:ext cx="1143000" cy="261411"/>
           </a:xfrm>
           <a:prstGeom prst="rect">
             <a:avLst/>
@@ -43366,7 +42953,7 @@
         <p:spPr>
           <a:xfrm>
             <a:off x="6208776" y="1847088"/>
-            <a:ext cx="310896" cy="239896"/>
+            <a:ext cx="310896" cy="261411"/>
           </a:xfrm>
           <a:prstGeom prst="rect">
             <a:avLst/>
@@ -43405,7 +42992,7 @@
         <p:spPr>
           <a:xfrm>
             <a:off x="6565392" y="1847088"/>
-            <a:ext cx="1920240" cy="239896"/>
+            <a:ext cx="1920240" cy="261411"/>
           </a:xfrm>
           <a:prstGeom prst="rect">
             <a:avLst/>
@@ -43443,8 +43030,8 @@
         </p:nvSpPr>
         <p:spPr>
           <a:xfrm>
-            <a:off x="8558784" y="1907062"/>
-            <a:ext cx="677808" cy="119948"/>
+            <a:off x="8558784" y="1912441"/>
+            <a:ext cx="677808" cy="130705"/>
           </a:xfrm>
           <a:prstGeom prst="rect">
             <a:avLst/>
@@ -43464,7 +43051,7 @@
         <p:spPr>
           <a:xfrm>
             <a:off x="10305288" y="1847088"/>
-            <a:ext cx="1143000" cy="239896"/>
+            <a:ext cx="1143000" cy="261411"/>
           </a:xfrm>
           <a:prstGeom prst="rect">
             <a:avLst/>
@@ -43502,8 +43089,8 @@
         </p:nvSpPr>
         <p:spPr>
           <a:xfrm>
-            <a:off x="6208776" y="2086984"/>
-            <a:ext cx="310896" cy="239896"/>
+            <a:off x="6208776" y="2108499"/>
+            <a:ext cx="310896" cy="261411"/>
           </a:xfrm>
           <a:prstGeom prst="rect">
             <a:avLst/>
@@ -43541,8 +43128,8 @@
         </p:nvSpPr>
         <p:spPr>
           <a:xfrm>
-            <a:off x="6565392" y="2086984"/>
-            <a:ext cx="1920240" cy="239896"/>
+            <a:off x="6565392" y="2108499"/>
+            <a:ext cx="1920240" cy="261411"/>
           </a:xfrm>
           <a:prstGeom prst="rect">
             <a:avLst/>
@@ -43580,8 +43167,8 @@
         </p:nvSpPr>
         <p:spPr>
           <a:xfrm>
-            <a:off x="8558784" y="2146957"/>
-            <a:ext cx="661087" cy="119948"/>
+            <a:off x="8558784" y="2173852"/>
+            <a:ext cx="661087" cy="130705"/>
           </a:xfrm>
           <a:prstGeom prst="rect">
             <a:avLst/>
@@ -43600,8 +43187,8 @@
         </p:nvSpPr>
         <p:spPr>
           <a:xfrm>
-            <a:off x="10305288" y="2086984"/>
-            <a:ext cx="1143000" cy="239896"/>
+            <a:off x="10305288" y="2108499"/>
+            <a:ext cx="1143000" cy="261411"/>
           </a:xfrm>
           <a:prstGeom prst="rect">
             <a:avLst/>
@@ -43639,8 +43226,8 @@
         </p:nvSpPr>
         <p:spPr>
           <a:xfrm>
-            <a:off x="6208776" y="2326879"/>
-            <a:ext cx="310896" cy="239896"/>
+            <a:off x="6208776" y="2369910"/>
+            <a:ext cx="310896" cy="261411"/>
           </a:xfrm>
           <a:prstGeom prst="rect">
             <a:avLst/>
@@ -43678,8 +43265,8 @@
         </p:nvSpPr>
         <p:spPr>
           <a:xfrm>
-            <a:off x="6565392" y="2326879"/>
-            <a:ext cx="1920240" cy="239896"/>
+            <a:off x="6565392" y="2369910"/>
+            <a:ext cx="1920240" cy="261411"/>
           </a:xfrm>
           <a:prstGeom prst="rect">
             <a:avLst/>
@@ -43717,8 +43304,8 @@
         </p:nvSpPr>
         <p:spPr>
           <a:xfrm>
-            <a:off x="8558784" y="2386853"/>
-            <a:ext cx="616668" cy="119948"/>
+            <a:off x="8558784" y="2435262"/>
+            <a:ext cx="616668" cy="130705"/>
           </a:xfrm>
           <a:prstGeom prst="rect">
             <a:avLst/>
@@ -43737,8 +43324,8 @@
         </p:nvSpPr>
         <p:spPr>
           <a:xfrm>
-            <a:off x="10305288" y="2326879"/>
-            <a:ext cx="1143000" cy="239896"/>
+            <a:off x="10305288" y="2369910"/>
+            <a:ext cx="1143000" cy="261411"/>
           </a:xfrm>
           <a:prstGeom prst="rect">
             <a:avLst/>
@@ -43776,8 +43363,8 @@
         </p:nvSpPr>
         <p:spPr>
           <a:xfrm>
-            <a:off x="6208776" y="2566775"/>
-            <a:ext cx="310896" cy="239896"/>
+            <a:off x="6208776" y="2631320"/>
+            <a:ext cx="310896" cy="261411"/>
           </a:xfrm>
           <a:prstGeom prst="rect">
             <a:avLst/>
@@ -43815,8 +43402,8 @@
         </p:nvSpPr>
         <p:spPr>
           <a:xfrm>
-            <a:off x="6565392" y="2566775"/>
-            <a:ext cx="1920240" cy="239896"/>
+            <a:off x="6565392" y="2631320"/>
+            <a:ext cx="1920240" cy="261411"/>
           </a:xfrm>
           <a:prstGeom prst="rect">
             <a:avLst/>
@@ -43854,8 +43441,8 @@
         </p:nvSpPr>
         <p:spPr>
           <a:xfrm>
-            <a:off x="8558784" y="2626748"/>
-            <a:ext cx="593725" cy="119948"/>
+            <a:off x="8558784" y="2696673"/>
+            <a:ext cx="593725" cy="130705"/>
           </a:xfrm>
           <a:prstGeom prst="rect">
             <a:avLst/>
@@ -43874,8 +43461,8 @@
         </p:nvSpPr>
         <p:spPr>
           <a:xfrm>
-            <a:off x="10305288" y="2566775"/>
-            <a:ext cx="1143000" cy="239896"/>
+            <a:off x="10305288" y="2631320"/>
+            <a:ext cx="1143000" cy="261411"/>
           </a:xfrm>
           <a:prstGeom prst="rect">
             <a:avLst/>
@@ -43913,8 +43500,8 @@
         </p:nvSpPr>
         <p:spPr>
           <a:xfrm>
-            <a:off x="6208776" y="2806670"/>
-            <a:ext cx="310896" cy="239896"/>
+            <a:off x="6208776" y="2892731"/>
+            <a:ext cx="310896" cy="261411"/>
           </a:xfrm>
           <a:prstGeom prst="rect">
             <a:avLst/>
@@ -43952,8 +43539,8 @@
         </p:nvSpPr>
         <p:spPr>
           <a:xfrm>
-            <a:off x="6565392" y="2806670"/>
-            <a:ext cx="1920240" cy="239896"/>
+            <a:off x="6565392" y="2892731"/>
+            <a:ext cx="1920240" cy="261411"/>
           </a:xfrm>
           <a:prstGeom prst="rect">
             <a:avLst/>
@@ -43991,8 +43578,8 @@
         </p:nvSpPr>
         <p:spPr>
           <a:xfrm>
-            <a:off x="8558784" y="2866644"/>
-            <a:ext cx="580349" cy="119948"/>
+            <a:off x="8558784" y="2958084"/>
+            <a:ext cx="580349" cy="130705"/>
           </a:xfrm>
           <a:prstGeom prst="rect">
             <a:avLst/>
@@ -44011,8 +43598,8 @@
         </p:nvSpPr>
         <p:spPr>
           <a:xfrm>
-            <a:off x="10305288" y="2806670"/>
-            <a:ext cx="1143000" cy="239896"/>
+            <a:off x="10305288" y="2892731"/>
+            <a:ext cx="1143000" cy="261411"/>
           </a:xfrm>
           <a:prstGeom prst="rect">
             <a:avLst/>
@@ -44050,8 +43637,8 @@
         </p:nvSpPr>
         <p:spPr>
           <a:xfrm>
-            <a:off x="6208776" y="3046566"/>
-            <a:ext cx="310896" cy="239896"/>
+            <a:off x="6208776" y="3154142"/>
+            <a:ext cx="310896" cy="261411"/>
           </a:xfrm>
           <a:prstGeom prst="rect">
             <a:avLst/>
@@ -44089,8 +43676,8 @@
         </p:nvSpPr>
         <p:spPr>
           <a:xfrm>
-            <a:off x="6565392" y="3046566"/>
-            <a:ext cx="1920240" cy="239896"/>
+            <a:off x="6565392" y="3154142"/>
+            <a:ext cx="1920240" cy="261411"/>
           </a:xfrm>
           <a:prstGeom prst="rect">
             <a:avLst/>
@@ -44128,8 +43715,8 @@
         </p:nvSpPr>
         <p:spPr>
           <a:xfrm>
-            <a:off x="8558784" y="3106540"/>
-            <a:ext cx="577469" cy="119948"/>
+            <a:off x="8558784" y="3219495"/>
+            <a:ext cx="577469" cy="130705"/>
           </a:xfrm>
           <a:prstGeom prst="rect">
             <a:avLst/>
@@ -44148,8 +43735,8 @@
         </p:nvSpPr>
         <p:spPr>
           <a:xfrm>
-            <a:off x="10305288" y="3046566"/>
-            <a:ext cx="1143000" cy="239896"/>
+            <a:off x="10305288" y="3154142"/>
+            <a:ext cx="1143000" cy="261411"/>
           </a:xfrm>
           <a:prstGeom prst="rect">
             <a:avLst/>
@@ -44187,8 +43774,8 @@
         </p:nvSpPr>
         <p:spPr>
           <a:xfrm>
-            <a:off x="6208776" y="3286461"/>
-            <a:ext cx="310896" cy="239896"/>
+            <a:off x="6208776" y="3415553"/>
+            <a:ext cx="310896" cy="261411"/>
           </a:xfrm>
           <a:prstGeom prst="rect">
             <a:avLst/>
@@ -44226,8 +43813,8 @@
         </p:nvSpPr>
         <p:spPr>
           <a:xfrm>
-            <a:off x="6565392" y="3286461"/>
-            <a:ext cx="1920240" cy="239896"/>
+            <a:off x="6565392" y="3415553"/>
+            <a:ext cx="1920240" cy="261411"/>
           </a:xfrm>
           <a:prstGeom prst="rect">
             <a:avLst/>
@@ -44265,8 +43852,8 @@
         </p:nvSpPr>
         <p:spPr>
           <a:xfrm>
-            <a:off x="8558784" y="3346435"/>
-            <a:ext cx="498268" cy="119948"/>
+            <a:off x="8558784" y="3480906"/>
+            <a:ext cx="498268" cy="130705"/>
           </a:xfrm>
           <a:prstGeom prst="rect">
             <a:avLst/>
@@ -44285,8 +43872,8 @@
         </p:nvSpPr>
         <p:spPr>
           <a:xfrm>
-            <a:off x="10305288" y="3286461"/>
-            <a:ext cx="1143000" cy="239896"/>
+            <a:off x="10305288" y="3415553"/>
+            <a:ext cx="1143000" cy="261411"/>
           </a:xfrm>
           <a:prstGeom prst="rect">
             <a:avLst/>
@@ -44324,8 +43911,8 @@
         </p:nvSpPr>
         <p:spPr>
           <a:xfrm>
-            <a:off x="6208776" y="3526357"/>
-            <a:ext cx="310896" cy="239896"/>
+            <a:off x="6208776" y="3676964"/>
+            <a:ext cx="310896" cy="261411"/>
           </a:xfrm>
           <a:prstGeom prst="rect">
             <a:avLst/>
@@ -44363,8 +43950,8 @@
         </p:nvSpPr>
         <p:spPr>
           <a:xfrm>
-            <a:off x="6565392" y="3526357"/>
-            <a:ext cx="1920240" cy="239896"/>
+            <a:off x="6565392" y="3676964"/>
+            <a:ext cx="1920240" cy="261411"/>
           </a:xfrm>
           <a:prstGeom prst="rect">
             <a:avLst/>
@@ -44402,8 +43989,8 @@
         </p:nvSpPr>
         <p:spPr>
           <a:xfrm>
-            <a:off x="8558784" y="3586331"/>
-            <a:ext cx="487865" cy="119948"/>
+            <a:off x="8558784" y="3742316"/>
+            <a:ext cx="487865" cy="130705"/>
           </a:xfrm>
           <a:prstGeom prst="rect">
             <a:avLst/>
@@ -44422,8 +44009,8 @@
         </p:nvSpPr>
         <p:spPr>
           <a:xfrm>
-            <a:off x="10305288" y="3526357"/>
-            <a:ext cx="1143000" cy="239896"/>
+            <a:off x="10305288" y="3676964"/>
+            <a:ext cx="1143000" cy="261411"/>
           </a:xfrm>
           <a:prstGeom prst="rect">
             <a:avLst/>
@@ -44461,8 +44048,8 @@
         </p:nvSpPr>
         <p:spPr>
           <a:xfrm>
-            <a:off x="6208776" y="3766252"/>
-            <a:ext cx="310896" cy="239896"/>
+            <a:off x="6208776" y="3938375"/>
+            <a:ext cx="310896" cy="261411"/>
           </a:xfrm>
           <a:prstGeom prst="rect">
             <a:avLst/>
@@ -44500,8 +44087,8 @@
         </p:nvSpPr>
         <p:spPr>
           <a:xfrm>
-            <a:off x="6565392" y="3766252"/>
-            <a:ext cx="1920240" cy="239896"/>
+            <a:off x="6565392" y="3938375"/>
+            <a:ext cx="1920240" cy="261411"/>
           </a:xfrm>
           <a:prstGeom prst="rect">
             <a:avLst/>
@@ -44539,8 +44126,8 @@
         </p:nvSpPr>
         <p:spPr>
           <a:xfrm>
-            <a:off x="8558784" y="3826226"/>
-            <a:ext cx="475017" cy="119948"/>
+            <a:off x="8558784" y="4003727"/>
+            <a:ext cx="475017" cy="130705"/>
           </a:xfrm>
           <a:prstGeom prst="rect">
             <a:avLst/>
@@ -44559,8 +44146,8 @@
         </p:nvSpPr>
         <p:spPr>
           <a:xfrm>
-            <a:off x="10305288" y="3766252"/>
-            <a:ext cx="1143000" cy="239896"/>
+            <a:off x="10305288" y="3938375"/>
+            <a:ext cx="1143000" cy="261411"/>
           </a:xfrm>
           <a:prstGeom prst="rect">
             <a:avLst/>
@@ -44598,8 +44185,8 @@
         </p:nvSpPr>
         <p:spPr>
           <a:xfrm>
-            <a:off x="6208776" y="4006148"/>
-            <a:ext cx="310896" cy="239896"/>
+            <a:off x="6208776" y="4199785"/>
+            <a:ext cx="310896" cy="261411"/>
           </a:xfrm>
           <a:prstGeom prst="rect">
             <a:avLst/>
@@ -44637,8 +44224,8 @@
         </p:nvSpPr>
         <p:spPr>
           <a:xfrm>
-            <a:off x="6565392" y="4006148"/>
-            <a:ext cx="1920240" cy="239896"/>
+            <a:off x="6565392" y="4199785"/>
+            <a:ext cx="1920240" cy="261411"/>
           </a:xfrm>
           <a:prstGeom prst="rect">
             <a:avLst/>
@@ -44676,8 +44263,8 @@
         </p:nvSpPr>
         <p:spPr>
           <a:xfrm>
-            <a:off x="8558784" y="4066122"/>
-            <a:ext cx="443916" cy="119948"/>
+            <a:off x="8558784" y="4265138"/>
+            <a:ext cx="443916" cy="130705"/>
           </a:xfrm>
           <a:prstGeom prst="rect">
             <a:avLst/>
@@ -44696,8 +44283,8 @@
         </p:nvSpPr>
         <p:spPr>
           <a:xfrm>
-            <a:off x="10305288" y="4006148"/>
-            <a:ext cx="1143000" cy="239896"/>
+            <a:off x="10305288" y="4199785"/>
+            <a:ext cx="1143000" cy="261411"/>
           </a:xfrm>
           <a:prstGeom prst="rect">
             <a:avLst/>
@@ -44735,8 +44322,8 @@
         </p:nvSpPr>
         <p:spPr>
           <a:xfrm>
-            <a:off x="6208776" y="4246043"/>
-            <a:ext cx="310896" cy="239896"/>
+            <a:off x="6208776" y="4461196"/>
+            <a:ext cx="310896" cy="261411"/>
           </a:xfrm>
           <a:prstGeom prst="rect">
             <a:avLst/>
@@ -44774,8 +44361,8 @@
         </p:nvSpPr>
         <p:spPr>
           <a:xfrm>
-            <a:off x="6565392" y="4246043"/>
-            <a:ext cx="1920240" cy="239896"/>
+            <a:off x="6565392" y="4461196"/>
+            <a:ext cx="1920240" cy="261411"/>
           </a:xfrm>
           <a:prstGeom prst="rect">
             <a:avLst/>
@@ -44813,8 +44400,8 @@
         </p:nvSpPr>
         <p:spPr>
           <a:xfrm>
-            <a:off x="8558784" y="4306017"/>
-            <a:ext cx="388888" cy="119948"/>
+            <a:off x="8558784" y="4526549"/>
+            <a:ext cx="388888" cy="130705"/>
           </a:xfrm>
           <a:prstGeom prst="rect">
             <a:avLst/>
@@ -44833,8 +44420,8 @@
         </p:nvSpPr>
         <p:spPr>
           <a:xfrm>
-            <a:off x="10305288" y="4246043"/>
-            <a:ext cx="1143000" cy="239896"/>
+            <a:off x="10305288" y="4461196"/>
+            <a:ext cx="1143000" cy="261411"/>
           </a:xfrm>
           <a:prstGeom prst="rect">
             <a:avLst/>
@@ -44872,8 +44459,8 @@
         </p:nvSpPr>
         <p:spPr>
           <a:xfrm>
-            <a:off x="6208776" y="4485939"/>
-            <a:ext cx="310896" cy="239896"/>
+            <a:off x="6208776" y="4722607"/>
+            <a:ext cx="310896" cy="261411"/>
           </a:xfrm>
           <a:prstGeom prst="rect">
             <a:avLst/>
@@ -44911,8 +44498,8 @@
         </p:nvSpPr>
         <p:spPr>
           <a:xfrm>
-            <a:off x="6565392" y="4485939"/>
-            <a:ext cx="1920240" cy="239896"/>
+            <a:off x="6565392" y="4722607"/>
+            <a:ext cx="1920240" cy="261411"/>
           </a:xfrm>
           <a:prstGeom prst="rect">
             <a:avLst/>
@@ -44950,8 +44537,8 @@
         </p:nvSpPr>
         <p:spPr>
           <a:xfrm>
-            <a:off x="8558784" y="4545913"/>
-            <a:ext cx="383191" cy="119948"/>
+            <a:off x="8558784" y="4787960"/>
+            <a:ext cx="383191" cy="130705"/>
           </a:xfrm>
           <a:prstGeom prst="rect">
             <a:avLst/>
@@ -44970,8 +44557,8 @@
         </p:nvSpPr>
         <p:spPr>
           <a:xfrm>
-            <a:off x="10305288" y="4485939"/>
-            <a:ext cx="1143000" cy="239896"/>
+            <a:off x="10305288" y="4722607"/>
+            <a:ext cx="1143000" cy="261411"/>
           </a:xfrm>
           <a:prstGeom prst="rect">
             <a:avLst/>
@@ -45009,8 +44596,8 @@
         </p:nvSpPr>
         <p:spPr>
           <a:xfrm>
-            <a:off x="6208776" y="4725834"/>
-            <a:ext cx="310896" cy="239896"/>
+            <a:off x="6208776" y="4984018"/>
+            <a:ext cx="310896" cy="261411"/>
           </a:xfrm>
           <a:prstGeom prst="rect">
             <a:avLst/>
@@ -45048,8 +44635,8 @@
         </p:nvSpPr>
         <p:spPr>
           <a:xfrm>
-            <a:off x="6565392" y="4725834"/>
-            <a:ext cx="1920240" cy="239896"/>
+            <a:off x="6565392" y="4984018"/>
+            <a:ext cx="1920240" cy="261411"/>
           </a:xfrm>
           <a:prstGeom prst="rect">
             <a:avLst/>
@@ -45087,8 +44674,8 @@
         </p:nvSpPr>
         <p:spPr>
           <a:xfrm>
-            <a:off x="8558784" y="4785808"/>
-            <a:ext cx="347029" cy="119948"/>
+            <a:off x="8558784" y="5049371"/>
+            <a:ext cx="347029" cy="130705"/>
           </a:xfrm>
           <a:prstGeom prst="rect">
             <a:avLst/>
@@ -45107,8 +44694,8 @@
         </p:nvSpPr>
         <p:spPr>
           <a:xfrm>
-            <a:off x="10305288" y="4725834"/>
-            <a:ext cx="1143000" cy="239896"/>
+            <a:off x="10305288" y="4984018"/>
+            <a:ext cx="1143000" cy="261411"/>
           </a:xfrm>
           <a:prstGeom prst="rect">
             <a:avLst/>
@@ -45146,8 +44733,8 @@
         </p:nvSpPr>
         <p:spPr>
           <a:xfrm>
-            <a:off x="6208776" y="4965730"/>
-            <a:ext cx="310896" cy="239896"/>
+            <a:off x="6208776" y="5245429"/>
+            <a:ext cx="310896" cy="261411"/>
           </a:xfrm>
           <a:prstGeom prst="rect">
             <a:avLst/>
@@ -45185,8 +44772,8 @@
         </p:nvSpPr>
         <p:spPr>
           <a:xfrm>
-            <a:off x="6565392" y="4965730"/>
-            <a:ext cx="1920240" cy="239896"/>
+            <a:off x="6565392" y="5245429"/>
+            <a:ext cx="1920240" cy="261411"/>
           </a:xfrm>
           <a:prstGeom prst="rect">
             <a:avLst/>
@@ -45224,8 +44811,8 @@
         </p:nvSpPr>
         <p:spPr>
           <a:xfrm>
-            <a:off x="8558784" y="5025704"/>
-            <a:ext cx="260164" cy="119948"/>
+            <a:off x="8558784" y="5310781"/>
+            <a:ext cx="260164" cy="130705"/>
           </a:xfrm>
           <a:prstGeom prst="rect">
             <a:avLst/>
@@ -45244,8 +44831,8 @@
         </p:nvSpPr>
         <p:spPr>
           <a:xfrm>
-            <a:off x="10305288" y="4965730"/>
-            <a:ext cx="1143000" cy="239896"/>
+            <a:off x="10305288" y="5245429"/>
+            <a:ext cx="1143000" cy="261411"/>
           </a:xfrm>
           <a:prstGeom prst="rect">
             <a:avLst/>
@@ -45283,8 +44870,8 @@
         </p:nvSpPr>
         <p:spPr>
           <a:xfrm>
-            <a:off x="6208776" y="5205625"/>
-            <a:ext cx="310896" cy="239896"/>
+            <a:off x="6208776" y="5506840"/>
+            <a:ext cx="310896" cy="261411"/>
           </a:xfrm>
           <a:prstGeom prst="rect">
             <a:avLst/>
@@ -45322,8 +44909,8 @@
         </p:nvSpPr>
         <p:spPr>
           <a:xfrm>
-            <a:off x="6565392" y="5205625"/>
-            <a:ext cx="1920240" cy="239896"/>
+            <a:off x="6565392" y="5506840"/>
+            <a:ext cx="1920240" cy="261411"/>
           </a:xfrm>
           <a:prstGeom prst="rect">
             <a:avLst/>
@@ -45361,8 +44948,8 @@
         </p:nvSpPr>
         <p:spPr>
           <a:xfrm>
-            <a:off x="8558784" y="5265599"/>
-            <a:ext cx="201580" cy="119948"/>
+            <a:off x="8558784" y="5572192"/>
+            <a:ext cx="201580" cy="130705"/>
           </a:xfrm>
           <a:prstGeom prst="rect">
             <a:avLst/>
@@ -45381,8 +44968,8 @@
         </p:nvSpPr>
         <p:spPr>
           <a:xfrm>
-            <a:off x="10305288" y="5205625"/>
-            <a:ext cx="1143000" cy="239896"/>
+            <a:off x="10305288" y="5506840"/>
+            <a:ext cx="1143000" cy="261411"/>
           </a:xfrm>
           <a:prstGeom prst="rect">
             <a:avLst/>
@@ -45420,8 +45007,8 @@
         </p:nvSpPr>
         <p:spPr>
           <a:xfrm>
-            <a:off x="6208776" y="5445521"/>
-            <a:ext cx="310896" cy="239896"/>
+            <a:off x="6208776" y="5768250"/>
+            <a:ext cx="310896" cy="261411"/>
           </a:xfrm>
           <a:prstGeom prst="rect">
             <a:avLst/>
@@ -45459,8 +45046,8 @@
         </p:nvSpPr>
         <p:spPr>
           <a:xfrm>
-            <a:off x="6565392" y="5445521"/>
-            <a:ext cx="1920240" cy="239896"/>
+            <a:off x="6565392" y="5768250"/>
+            <a:ext cx="1920240" cy="261411"/>
           </a:xfrm>
           <a:prstGeom prst="rect">
             <a:avLst/>
@@ -45498,8 +45085,8 @@
         </p:nvSpPr>
         <p:spPr>
           <a:xfrm>
-            <a:off x="8558784" y="5505495"/>
-            <a:ext cx="158552" cy="119948"/>
+            <a:off x="8558784" y="5833603"/>
+            <a:ext cx="158552" cy="130705"/>
           </a:xfrm>
           <a:prstGeom prst="rect">
             <a:avLst/>
@@ -45518,8 +45105,8 @@
         </p:nvSpPr>
         <p:spPr>
           <a:xfrm>
-            <a:off x="10305288" y="5445521"/>
-            <a:ext cx="1143000" cy="239896"/>
+            <a:off x="10305288" y="5768250"/>
+            <a:ext cx="1143000" cy="261411"/>
           </a:xfrm>
           <a:prstGeom prst="rect">
             <a:avLst/>
@@ -45558,7 +45145,7 @@
         <p:spPr>
           <a:xfrm>
             <a:off x="3820171" y="1847088"/>
-            <a:ext cx="14630" cy="4078224"/>
+            <a:ext cx="14630" cy="4443984"/>
           </a:xfrm>
           <a:prstGeom prst="rect">
             <a:avLst/>
@@ -45578,7 +45165,7 @@
         <p:spPr>
           <a:xfrm>
             <a:off x="9370579" y="1847088"/>
-            <a:ext cx="14630" cy="4078224"/>
+            <a:ext cx="14630" cy="4443984"/>
           </a:xfrm>
           <a:prstGeom prst="rect">
             <a:avLst/>
@@ -45598,7 +45185,7 @@
         <p:spPr>
           <a:xfrm>
             <a:off x="6085332" y="1847088"/>
-            <a:ext cx="10973" cy="4078224"/>
+            <a:ext cx="10973" cy="4443984"/>
           </a:xfrm>
           <a:prstGeom prst="rect">
             <a:avLst/>
@@ -45608,65 +45195,6 @@
           </a:solidFill>
           <a:ln/>
         </p:spPr>
-      </p:sp>
-      <p:sp>
-        <p:nvSpPr>
-          <p:cNvPr id="146" name="Shape 144"/>
-          <p:cNvSpPr/>
-          <p:nvPr/>
-        </p:nvSpPr>
-        <p:spPr>
-          <a:xfrm>
-            <a:off x="457200" y="6126480"/>
-            <a:ext cx="11274552" cy="371856"/>
-          </a:xfrm>
-          <a:prstGeom prst="rect">
-            <a:avLst/>
-          </a:prstGeom>
-          <a:solidFill>
-            <a:srgbClr val="EDF4FA"/>
-          </a:solidFill>
-          <a:ln/>
-        </p:spPr>
-      </p:sp>
-      <p:sp>
-        <p:nvSpPr>
-          <p:cNvPr id="147" name="Text 145"/>
-          <p:cNvSpPr txBox="1"/>
-          <p:nvPr/>
-        </p:nvSpPr>
-        <p:spPr>
-          <a:xfrm>
-            <a:off x="658368" y="6144768"/>
-            <a:ext cx="10927080" cy="335280"/>
-          </a:xfrm>
-          <a:prstGeom prst="rect">
-            <a:avLst/>
-          </a:prstGeom>
-          <a:noFill/>
-          <a:ln/>
-        </p:spPr>
-        <p:txBody>
-          <a:bodyPr wrap="square" lIns="0" tIns="0" rIns="0" bIns="0" rtlCol="0" anchor="ctr"/>
-          <a:lstStyle/>
-          <a:p>
-            <a:pPr indent="0" marL="0">
-              <a:buNone/>
-            </a:pPr>
-            <a:r>
-              <a:rPr lang="en-US" sz="1600" b="1" dirty="0">
-                <a:solidFill>
-                  <a:srgbClr val="0B2C4A"/>
-                </a:solidFill>
-                <a:latin typeface="Inter" pitchFamily="34" charset="0"/>
-                <a:ea typeface="Inter" pitchFamily="34" charset="-122"/>
-                <a:cs typeface="Inter" pitchFamily="34" charset="-120"/>
-              </a:rPr>
-              <a:t>12 of 33 stores at or above 10%, led by LR LV at 20.6%. The group sits at 9.2%.</a:t>
-            </a:r>
-            <a:endParaRPr lang="en-US" sz="1600" dirty="0"/>
-          </a:p>
-        </p:txBody>
       </p:sp>
     </p:spTree>
   </p:cSld>

--- a/day2-deck/decks/Opcode Benchmarks - House Style.pptx
+++ b/day2-deck/decks/Opcode Benchmarks - House Style.pptx
@@ -8086,7 +8086,7 @@
           <a:p>
             <a:r>
               <a:rPr lang="en-US" dirty="0"/>
-              <a:t>Takeaway (off the slide): Ask Nissan, LR LV and LR Henderson what changed. Ask CDJR Post Falls, Honda North and Subaru St George what got in the way. Ask Mazda, Audi Reno and Kia St George what they started this year.Source: Qlik - Closed Repair Orders. Customer pay, Jan-Sep by close month. Same-store, INEOS excluded (opened 2026). GMC Prescott body shop labor excluded. Top and bottom five stores by change in Brake Fluid %, Jan-Sep 2026 vs 2025, in points. Moving now: Jul-Sep 2026 vs Jan-Mar 2026, each store against itself; the group moved +0.0 pts on the same basis, so part of every store's change is seasonal. Green bar at the right of a row: the store is on both the top five vs last year and the top five moving now.Conversation starter: each top store says one thing they started doing; each bottom store says what got in the way and what they would try. The room trades ideas. Moving now: ask the top three what they started this year.</a:t>
+              <a:t>Takeaway with the store call-outs (off the slide): Ask Nissan, LR LV and LR Henderson what changed. Ask CDJR Post Falls, Honda North and Subaru St George what got in the way. Ask Mazda, Audi Reno and Kia St George what they started this year.Source: Qlik - Closed Repair Orders. Customer pay, Jan-Sep by close month. Same-store, INEOS excluded (opened 2026). GMC Prescott body shop labor excluded. Top and bottom five stores by change in Brake Fluid %, Jan-Sep 2026 vs 2025, in points. Moving now: Jul-Sep 2026 vs Jan-Mar 2026, each store against itself; the group moved +0.0 pts on the same basis, so part of every store's change is seasonal. Green bar at the right of a row: the store is on both the top five vs last year and the top five moving now.Conversation starter: each top store says one thing they started doing; each bottom store says what got in the way and what they would try. The room trades ideas. Moving now: ask the top three what they started this year.</a:t>
             </a:r>
             <a:endParaRPr lang="en-US" dirty="0"/>
           </a:p>
@@ -8262,7 +8262,7 @@
           <a:p>
             <a:r>
               <a:rPr lang="en-US" dirty="0"/>
-              <a:t>Takeaway (off the slide): 7 of 33 stores at or above 7.5%, led by Subaru St George at 13.8%. The group sits at 5.8%.Source: Qlik - Closed Repair Orders. Customer pay, Jan-Sep by close month. Same-store, INEOS excluded (opened 2026). GMC Prescott body shop labor excluded. Jan-Sep 2026 YTD; green at or above the 7.5% benchmark, red below. CHECK OP-CODE MAPPING - under 0.5%: VW HENDERSON, AUDI HENDERSON, VOLVO. Near zero in 2025, so year-over-year gain may be mapping: HONDA SPOKANE, SUBARU ST GEORGE, LR LV, LR RENO.
+              <a:t>Takeaway with the store call-outs (off the slide): 7 of 33 stores at or above 7.5%, led by Subaru St George at 13.8%. The group sits at 5.8%.Source: Qlik - Closed Repair Orders. Customer pay, Jan-Sep by close month. Same-store, INEOS excluded (opened 2026). GMC Prescott body shop labor excluded. Jan-Sep 2026 YTD; green at or above the 7.5% benchmark, red below. CHECK OP-CODE MAPPING - under 0.5%: VW HENDERSON, AUDI HENDERSON, VOLVO. Near zero in 2025, so year-over-year gain may be mapping: HONDA SPOKANE, SUBARU ST GEORGE, LR LV, LR RENO.
 SUBARU ST GEORGE: 13.8% (2025 0.0%)
 HONDA HENDERSON: 12.0% (2025 10.4%)
 SUBARU PRESCOTT: 9.8% (2025 5.9%)
@@ -8383,7 +8383,7 @@
           <a:p>
             <a:r>
               <a:rPr lang="en-US" dirty="0"/>
-              <a:t>Takeaway (off the slide): Ask Subaru St George, Lincoln and LR LV what changed. Ask Subaru LV, CDJR Post Falls and Toyota Spokane what got in the way. Ask Mazda, Hyundai St George and Honda Spokane what they started this year.Source: Qlik - Closed Repair Orders. Customer pay, Jan-Sep by close month. Same-store, INEOS excluded (opened 2026). GMC Prescott body shop labor excluded. Top and bottom five stores by change in Fuel Service %, Jan-Sep 2026 vs 2025, in points. Moving now: Jul-Sep 2026 vs Jan-Mar 2026, each store against itself; the group moved −0.3 pts on the same basis, so part of every store's change is seasonal. Green bar at the right of a row: the store is on both the top five vs last year and the top five moving now.Conversation starter: each top store says one thing they started doing; each bottom store says what got in the way and what they would try. The room trades ideas. Moving now: ask the top three what they started this year.</a:t>
+              <a:t>Takeaway with the store call-outs (off the slide): Ask Subaru St George, Lincoln and LR LV what changed. Ask Subaru LV, CDJR Post Falls and Toyota Spokane what got in the way. Ask Mazda, Hyundai St George and Honda Spokane what they started this year.Source: Qlik - Closed Repair Orders. Customer pay, Jan-Sep by close month. Same-store, INEOS excluded (opened 2026). GMC Prescott body shop labor excluded. Top and bottom five stores by change in Fuel Service %, Jan-Sep 2026 vs 2025, in points. Moving now: Jul-Sep 2026 vs Jan-Mar 2026, each store against itself; the group moved −0.3 pts on the same basis, so part of every store's change is seasonal. Green bar at the right of a row: the store is on both the top five vs last year and the top five moving now.Conversation starter: each top store says one thing they started doing; each bottom store says what got in the way and what they would try. The room trades ideas. Moving now: ask the top three what they started this year.</a:t>
             </a:r>
             <a:endParaRPr lang="en-US" dirty="0"/>
           </a:p>
@@ -8559,7 +8559,7 @@
           <a:p>
             <a:r>
               <a:rPr lang="en-US" dirty="0"/>
-              <a:t>Takeaway (off the slide): 8 of 33 stores at or above 15%, led by Audi Henderson at 27.5%. The group sits at 13.2%.Source: Qlik - Closed Repair Orders. Customer pay, Jan-Sep by close month. Same-store, INEOS excluded (opened 2026). GMC Prescott body shop labor excluded. Jan-Sep 2026 YTD; green at or above the 15% benchmark, red below.
+              <a:t>Takeaway with the store call-outs (off the slide): 8 of 33 stores at or above 15%, led by Audi Henderson at 27.5%. The group sits at 13.2%.Source: Qlik - Closed Repair Orders. Customer pay, Jan-Sep by close month. Same-store, INEOS excluded (opened 2026). GMC Prescott body shop labor excluded. Jan-Sep 2026 YTD; green at or above the 15% benchmark, red below.
 AUDI HENDERSON: 27.5% (2025 21.8%)
 LR HENDERSON: 24.4% (2025 19.4%)
 HYUNDAI PRESCOTT: 21.8% (2025 15.0%)
@@ -8680,7 +8680,7 @@
           <a:p>
             <a:r>
               <a:rPr lang="en-US" dirty="0"/>
-              <a:t>Takeaway (off the slide): Ask Hyundai St George, Hyundai Prescott and GMC Prescott what changed. Ask LR Reno, Kia LV and Subaru LV what got in the way. Ask Audi Henderson, Mazda and Kia St George what they started this year.Source: Qlik - Closed Repair Orders. Customer pay, Jan-Sep by close month. Same-store, INEOS excluded (opened 2026). GMC Prescott body shop labor excluded. Top and bottom five stores by change in Alignment %, Jan-Sep 2026 vs 2025, in points. Moving now: Jul-Sep 2026 vs Jan-Mar 2026, each store against itself; the group moved +0.2 pts on the same basis, so part of every store's change is seasonal. Green bar at the right of a row: the store is on both the top five vs last year and the top five moving now.Conversation starter: each top store says one thing they started doing; each bottom store says what got in the way and what they would try. The room trades ideas. Moving now: ask the top three what they started this year.</a:t>
+              <a:t>Takeaway with the store call-outs (off the slide): Ask Hyundai St George, Hyundai Prescott and GMC Prescott what changed. Ask LR Reno, Kia LV and Subaru LV what got in the way. Ask Audi Henderson, Mazda and Kia St George what they started this year.Source: Qlik - Closed Repair Orders. Customer pay, Jan-Sep by close month. Same-store, INEOS excluded (opened 2026). GMC Prescott body shop labor excluded. Top and bottom five stores by change in Alignment %, Jan-Sep 2026 vs 2025, in points. Moving now: Jul-Sep 2026 vs Jan-Mar 2026, each store against itself; the group moved +0.2 pts on the same basis, so part of every store's change is seasonal. Green bar at the right of a row: the store is on both the top five vs last year and the top five moving now.Conversation starter: each top store says one thing they started doing; each bottom store says what got in the way and what they would try. The room trades ideas. Moving now: ask the top three what they started this year.</a:t>
             </a:r>
             <a:endParaRPr lang="en-US" dirty="0"/>
           </a:p>
@@ -8856,7 +8856,7 @@
           <a:p>
             <a:r>
               <a:rPr lang="en-US" dirty="0"/>
-              <a:t>Takeaway (off the slide): 4 of 33 stores at or above 15%, led by LR Henderson at 27.0%. The group sits at 8.3%.Source: Qlik - Closed Repair Orders. Customer pay, Jan-Sep by close month. Same-store, INEOS excluded (opened 2026). GMC Prescott body shop labor excluded. Jan-Sep 2026 YTD; green at or above the 15% benchmark, red below. CHECK OP-CODE MAPPING - under 0.5%: TOYOTA SPOKANE, LEXUS, AUDI RENO, AUDI HENDERSON, VW ST GEORGE. Near zero in 2025, so year-over-year gain may be mapping: HONDA SPOKANE, SUBARU PRESCOTT.
+              <a:t>Takeaway with the store call-outs (off the slide): 4 of 33 stores at or above 15%, led by LR Henderson at 27.0%. The group sits at 8.3%.Source: Qlik - Closed Repair Orders. Customer pay, Jan-Sep by close month. Same-store, INEOS excluded (opened 2026). GMC Prescott body shop labor excluded. Jan-Sep 2026 YTD; green at or above the 15% benchmark, red below. CHECK OP-CODE MAPPING - under 0.5%: TOYOTA SPOKANE, LEXUS, AUDI RENO, AUDI HENDERSON, VW ST GEORGE. Near zero in 2025, so year-over-year gain may be mapping: HONDA SPOKANE, SUBARU PRESCOTT.
 LR HENDERSON: 27.0% (2025 22.9%)
 HONDA HENDERSON: 18.4% (2025 17.7%)
 LR LV: 17.0% (2025 3.4%)
@@ -8977,7 +8977,7 @@
           <a:p>
             <a:r>
               <a:rPr lang="en-US" dirty="0"/>
-              <a:t>Takeaway (off the slide): Ask Subaru Prescott, LR LV and Mazda what changed. Ask Subaru St George, Nissan and Kia LV what got in the way. Ask Mazda, Hyundai Prescott and Honda Spokane what they started this year.Source: Qlik - Closed Repair Orders. Customer pay, Jan-Sep by close month. Same-store, INEOS excluded (opened 2026). GMC Prescott body shop labor excluded. Top and bottom five stores by change in Balance %, Jan-Sep 2026 vs 2025, in points. Moving now: Jul-Sep 2026 vs Jan-Mar 2026, each store against itself; the group moved +0.1 pts on the same basis, so part of every store's change is seasonal. Green bar at the right of a row: the store is on both the top five vs last year and the top five moving now.Conversation starter: each top store says one thing they started doing; each bottom store says what got in the way and what they would try. The room trades ideas. Moving now: ask the top three what they started this year.</a:t>
+              <a:t>Takeaway with the store call-outs (off the slide): Ask Subaru Prescott, LR LV and Mazda what changed. Ask Subaru St George, Nissan and Kia LV what got in the way. Ask Mazda, Hyundai Prescott and Honda Spokane what they started this year.Source: Qlik - Closed Repair Orders. Customer pay, Jan-Sep by close month. Same-store, INEOS excluded (opened 2026). GMC Prescott body shop labor excluded. Top and bottom five stores by change in Balance %, Jan-Sep 2026 vs 2025, in points. Moving now: Jul-Sep 2026 vs Jan-Mar 2026, each store against itself; the group moved +0.1 pts on the same basis, so part of every store's change is seasonal. Green bar at the right of a row: the store is on both the top five vs last year and the top five moving now.Conversation starter: each top store says one thing they started doing; each bottom store says what got in the way and what they would try. The room trades ideas. Moving now: ask the top three what they started this year.</a:t>
             </a:r>
             <a:endParaRPr lang="en-US" dirty="0"/>
           </a:p>
@@ -9153,7 +9153,7 @@
           <a:p>
             <a:r>
               <a:rPr lang="en-US" dirty="0"/>
-              <a:t>Takeaway (off the slide): 12 of 33 stores at or above 10%, led by LR LV at 20.6%. The group sits at 9.2%.Source: Qlik - Closed Repair Orders. Customer pay, Jan-Sep by close month. Same-store, INEOS excluded (opened 2026). GMC Prescott body shop labor excluded. Jan-Sep 2026 YTD; green at or above the 10% benchmark, red below.
+              <a:t>Takeaway with the store call-outs (off the slide): 12 of 33 stores at or above 10%, led by LR LV at 20.6%. The group sits at 9.2%.Source: Qlik - Closed Repair Orders. Customer pay, Jan-Sep by close month. Same-store, INEOS excluded (opened 2026). GMC Prescott body shop labor excluded. Jan-Sep 2026 YTD; green at or above the 10% benchmark, red below.
 LR LV: 20.7% (2025 15.2%)
 HONDA HENDERSON: 15.6% (2025 12.9%)
 LR HENDERSON: 14.3% (2025 9.0%)
@@ -13747,7 +13747,7 @@
         <p:spPr>
           <a:xfrm>
             <a:off x="457200" y="1207008"/>
-            <a:ext cx="11274552" cy="5148072"/>
+            <a:ext cx="11274552" cy="4782312"/>
           </a:xfrm>
           <a:prstGeom prst="rect">
             <a:avLst/>
@@ -13924,7 +13924,7 @@
         <p:spPr>
           <a:xfrm>
             <a:off x="658368" y="1847088"/>
-            <a:ext cx="310896" cy="261411"/>
+            <a:ext cx="310896" cy="239896"/>
           </a:xfrm>
           <a:prstGeom prst="rect">
             <a:avLst/>
@@ -13963,7 +13963,7 @@
         <p:spPr>
           <a:xfrm>
             <a:off x="1014984" y="1847088"/>
-            <a:ext cx="1920240" cy="261411"/>
+            <a:ext cx="1920240" cy="239896"/>
           </a:xfrm>
           <a:prstGeom prst="rect">
             <a:avLst/>
@@ -14001,8 +14001,8 @@
         </p:nvSpPr>
         <p:spPr>
           <a:xfrm>
-            <a:off x="3008376" y="1912441"/>
-            <a:ext cx="1691640" cy="130705"/>
+            <a:off x="3008376" y="1907062"/>
+            <a:ext cx="1691640" cy="119948"/>
           </a:xfrm>
           <a:prstGeom prst="rect">
             <a:avLst/>
@@ -14022,7 +14022,7 @@
         <p:spPr>
           <a:xfrm>
             <a:off x="4754880" y="1847088"/>
-            <a:ext cx="1143000" cy="261411"/>
+            <a:ext cx="1143000" cy="239896"/>
           </a:xfrm>
           <a:prstGeom prst="rect">
             <a:avLst/>
@@ -14060,8 +14060,8 @@
         </p:nvSpPr>
         <p:spPr>
           <a:xfrm>
-            <a:off x="658368" y="2108499"/>
-            <a:ext cx="310896" cy="261411"/>
+            <a:off x="658368" y="2086984"/>
+            <a:ext cx="310896" cy="239896"/>
           </a:xfrm>
           <a:prstGeom prst="rect">
             <a:avLst/>
@@ -14099,8 +14099,8 @@
         </p:nvSpPr>
         <p:spPr>
           <a:xfrm>
-            <a:off x="1014984" y="2108499"/>
-            <a:ext cx="1920240" cy="261411"/>
+            <a:off x="1014984" y="2086984"/>
+            <a:ext cx="1920240" cy="239896"/>
           </a:xfrm>
           <a:prstGeom prst="rect">
             <a:avLst/>
@@ -14138,8 +14138,8 @@
         </p:nvSpPr>
         <p:spPr>
           <a:xfrm>
-            <a:off x="3008376" y="2173852"/>
-            <a:ext cx="1471688" cy="130705"/>
+            <a:off x="3008376" y="2146957"/>
+            <a:ext cx="1471688" cy="119948"/>
           </a:xfrm>
           <a:prstGeom prst="rect">
             <a:avLst/>
@@ -14158,8 +14158,8 @@
         </p:nvSpPr>
         <p:spPr>
           <a:xfrm>
-            <a:off x="4754880" y="2108499"/>
-            <a:ext cx="1143000" cy="261411"/>
+            <a:off x="4754880" y="2086984"/>
+            <a:ext cx="1143000" cy="239896"/>
           </a:xfrm>
           <a:prstGeom prst="rect">
             <a:avLst/>
@@ -14197,8 +14197,8 @@
         </p:nvSpPr>
         <p:spPr>
           <a:xfrm>
-            <a:off x="658368" y="2369910"/>
-            <a:ext cx="310896" cy="261411"/>
+            <a:off x="658368" y="2326879"/>
+            <a:ext cx="310896" cy="239896"/>
           </a:xfrm>
           <a:prstGeom prst="rect">
             <a:avLst/>
@@ -14236,8 +14236,8 @@
         </p:nvSpPr>
         <p:spPr>
           <a:xfrm>
-            <a:off x="1014984" y="2369910"/>
-            <a:ext cx="1920240" cy="261411"/>
+            <a:off x="1014984" y="2326879"/>
+            <a:ext cx="1920240" cy="239896"/>
           </a:xfrm>
           <a:prstGeom prst="rect">
             <a:avLst/>
@@ -14275,8 +14275,8 @@
         </p:nvSpPr>
         <p:spPr>
           <a:xfrm>
-            <a:off x="3008376" y="2435262"/>
-            <a:ext cx="1196420" cy="130705"/>
+            <a:off x="3008376" y="2386853"/>
+            <a:ext cx="1196420" cy="119948"/>
           </a:xfrm>
           <a:prstGeom prst="rect">
             <a:avLst/>
@@ -14295,8 +14295,8 @@
         </p:nvSpPr>
         <p:spPr>
           <a:xfrm>
-            <a:off x="4754880" y="2369910"/>
-            <a:ext cx="1143000" cy="261411"/>
+            <a:off x="4754880" y="2326879"/>
+            <a:ext cx="1143000" cy="239896"/>
           </a:xfrm>
           <a:prstGeom prst="rect">
             <a:avLst/>
@@ -14334,8 +14334,8 @@
         </p:nvSpPr>
         <p:spPr>
           <a:xfrm>
-            <a:off x="658368" y="2631320"/>
-            <a:ext cx="310896" cy="261411"/>
+            <a:off x="658368" y="2566775"/>
+            <a:ext cx="310896" cy="239896"/>
           </a:xfrm>
           <a:prstGeom prst="rect">
             <a:avLst/>
@@ -14373,8 +14373,8 @@
         </p:nvSpPr>
         <p:spPr>
           <a:xfrm>
-            <a:off x="1014984" y="2631320"/>
-            <a:ext cx="1920240" cy="261411"/>
+            <a:off x="1014984" y="2566775"/>
+            <a:ext cx="1920240" cy="239896"/>
           </a:xfrm>
           <a:prstGeom prst="rect">
             <a:avLst/>
@@ -14412,8 +14412,8 @@
         </p:nvSpPr>
         <p:spPr>
           <a:xfrm>
-            <a:off x="3008376" y="2696673"/>
-            <a:ext cx="1144678" cy="130705"/>
+            <a:off x="3008376" y="2626748"/>
+            <a:ext cx="1144678" cy="119948"/>
           </a:xfrm>
           <a:prstGeom prst="rect">
             <a:avLst/>
@@ -14432,8 +14432,8 @@
         </p:nvSpPr>
         <p:spPr>
           <a:xfrm>
-            <a:off x="4754880" y="2631320"/>
-            <a:ext cx="1143000" cy="261411"/>
+            <a:off x="4754880" y="2566775"/>
+            <a:ext cx="1143000" cy="239896"/>
           </a:xfrm>
           <a:prstGeom prst="rect">
             <a:avLst/>
@@ -14471,8 +14471,8 @@
         </p:nvSpPr>
         <p:spPr>
           <a:xfrm>
-            <a:off x="658368" y="2892731"/>
-            <a:ext cx="310896" cy="261411"/>
+            <a:off x="658368" y="2806670"/>
+            <a:ext cx="310896" cy="239896"/>
           </a:xfrm>
           <a:prstGeom prst="rect">
             <a:avLst/>
@@ -14510,8 +14510,8 @@
         </p:nvSpPr>
         <p:spPr>
           <a:xfrm>
-            <a:off x="1014984" y="2892731"/>
-            <a:ext cx="1920240" cy="261411"/>
+            <a:off x="1014984" y="2806670"/>
+            <a:ext cx="1920240" cy="239896"/>
           </a:xfrm>
           <a:prstGeom prst="rect">
             <a:avLst/>
@@ -14549,8 +14549,8 @@
         </p:nvSpPr>
         <p:spPr>
           <a:xfrm>
-            <a:off x="3008376" y="2958084"/>
-            <a:ext cx="1092895" cy="130705"/>
+            <a:off x="3008376" y="2866644"/>
+            <a:ext cx="1092895" cy="119948"/>
           </a:xfrm>
           <a:prstGeom prst="rect">
             <a:avLst/>
@@ -14569,8 +14569,8 @@
         </p:nvSpPr>
         <p:spPr>
           <a:xfrm>
-            <a:off x="4754880" y="2892731"/>
-            <a:ext cx="1143000" cy="261411"/>
+            <a:off x="4754880" y="2806670"/>
+            <a:ext cx="1143000" cy="239896"/>
           </a:xfrm>
           <a:prstGeom prst="rect">
             <a:avLst/>
@@ -14608,8 +14608,8 @@
         </p:nvSpPr>
         <p:spPr>
           <a:xfrm>
-            <a:off x="658368" y="3154142"/>
-            <a:ext cx="310896" cy="261411"/>
+            <a:off x="658368" y="3046566"/>
+            <a:ext cx="310896" cy="239896"/>
           </a:xfrm>
           <a:prstGeom prst="rect">
             <a:avLst/>
@@ -14647,8 +14647,8 @@
         </p:nvSpPr>
         <p:spPr>
           <a:xfrm>
-            <a:off x="1014984" y="3154142"/>
-            <a:ext cx="1920240" cy="261411"/>
+            <a:off x="1014984" y="3046566"/>
+            <a:ext cx="1920240" cy="239896"/>
           </a:xfrm>
           <a:prstGeom prst="rect">
             <a:avLst/>
@@ -14686,8 +14686,8 @@
         </p:nvSpPr>
         <p:spPr>
           <a:xfrm>
-            <a:off x="3008376" y="3219495"/>
-            <a:ext cx="1003246" cy="130705"/>
+            <a:off x="3008376" y="3106540"/>
+            <a:ext cx="1003246" cy="119948"/>
           </a:xfrm>
           <a:prstGeom prst="rect">
             <a:avLst/>
@@ -14706,8 +14706,8 @@
         </p:nvSpPr>
         <p:spPr>
           <a:xfrm>
-            <a:off x="4754880" y="3154142"/>
-            <a:ext cx="1143000" cy="261411"/>
+            <a:off x="4754880" y="3046566"/>
+            <a:ext cx="1143000" cy="239896"/>
           </a:xfrm>
           <a:prstGeom prst="rect">
             <a:avLst/>
@@ -14745,8 +14745,8 @@
         </p:nvSpPr>
         <p:spPr>
           <a:xfrm>
-            <a:off x="658368" y="3415553"/>
-            <a:ext cx="310896" cy="261411"/>
+            <a:off x="658368" y="3286461"/>
+            <a:ext cx="310896" cy="239896"/>
           </a:xfrm>
           <a:prstGeom prst="rect">
             <a:avLst/>
@@ -14784,8 +14784,8 @@
         </p:nvSpPr>
         <p:spPr>
           <a:xfrm>
-            <a:off x="1014984" y="3415553"/>
-            <a:ext cx="1920240" cy="261411"/>
+            <a:off x="1014984" y="3286461"/>
+            <a:ext cx="1920240" cy="239896"/>
           </a:xfrm>
           <a:prstGeom prst="rect">
             <a:avLst/>
@@ -14823,8 +14823,8 @@
         </p:nvSpPr>
         <p:spPr>
           <a:xfrm>
-            <a:off x="3008376" y="3480906"/>
-            <a:ext cx="936777" cy="130705"/>
+            <a:off x="3008376" y="3346435"/>
+            <a:ext cx="936777" cy="119948"/>
           </a:xfrm>
           <a:prstGeom prst="rect">
             <a:avLst/>
@@ -14843,8 +14843,8 @@
         </p:nvSpPr>
         <p:spPr>
           <a:xfrm>
-            <a:off x="4754880" y="3415553"/>
-            <a:ext cx="1143000" cy="261411"/>
+            <a:off x="4754880" y="3286461"/>
+            <a:ext cx="1143000" cy="239896"/>
           </a:xfrm>
           <a:prstGeom prst="rect">
             <a:avLst/>
@@ -14882,8 +14882,8 @@
         </p:nvSpPr>
         <p:spPr>
           <a:xfrm>
-            <a:off x="658368" y="3676964"/>
-            <a:ext cx="310896" cy="261411"/>
+            <a:off x="658368" y="3526357"/>
+            <a:ext cx="310896" cy="239896"/>
           </a:xfrm>
           <a:prstGeom prst="rect">
             <a:avLst/>
@@ -14921,8 +14921,8 @@
         </p:nvSpPr>
         <p:spPr>
           <a:xfrm>
-            <a:off x="1014984" y="3676964"/>
-            <a:ext cx="1920240" cy="261411"/>
+            <a:off x="1014984" y="3526357"/>
+            <a:ext cx="1920240" cy="239896"/>
           </a:xfrm>
           <a:prstGeom prst="rect">
             <a:avLst/>
@@ -14960,8 +14960,8 @@
         </p:nvSpPr>
         <p:spPr>
           <a:xfrm>
-            <a:off x="3008376" y="3742316"/>
-            <a:ext cx="899446" cy="130705"/>
+            <a:off x="3008376" y="3586331"/>
+            <a:ext cx="899446" cy="119948"/>
           </a:xfrm>
           <a:prstGeom prst="rect">
             <a:avLst/>
@@ -14980,8 +14980,8 @@
         </p:nvSpPr>
         <p:spPr>
           <a:xfrm>
-            <a:off x="4754880" y="3676964"/>
-            <a:ext cx="1143000" cy="261411"/>
+            <a:off x="4754880" y="3526357"/>
+            <a:ext cx="1143000" cy="239896"/>
           </a:xfrm>
           <a:prstGeom prst="rect">
             <a:avLst/>
@@ -15019,8 +15019,8 @@
         </p:nvSpPr>
         <p:spPr>
           <a:xfrm>
-            <a:off x="658368" y="3938375"/>
-            <a:ext cx="310896" cy="261411"/>
+            <a:off x="658368" y="3766252"/>
+            <a:ext cx="310896" cy="239896"/>
           </a:xfrm>
           <a:prstGeom prst="rect">
             <a:avLst/>
@@ -15058,8 +15058,8 @@
         </p:nvSpPr>
         <p:spPr>
           <a:xfrm>
-            <a:off x="1014984" y="3938375"/>
-            <a:ext cx="1920240" cy="261411"/>
+            <a:off x="1014984" y="3766252"/>
+            <a:ext cx="1920240" cy="239896"/>
           </a:xfrm>
           <a:prstGeom prst="rect">
             <a:avLst/>
@@ -15097,8 +15097,8 @@
         </p:nvSpPr>
         <p:spPr>
           <a:xfrm>
-            <a:off x="3008376" y="4003727"/>
-            <a:ext cx="865796" cy="130705"/>
+            <a:off x="3008376" y="3826226"/>
+            <a:ext cx="865796" cy="119948"/>
           </a:xfrm>
           <a:prstGeom prst="rect">
             <a:avLst/>
@@ -15117,8 +15117,8 @@
         </p:nvSpPr>
         <p:spPr>
           <a:xfrm>
-            <a:off x="4754880" y="3938375"/>
-            <a:ext cx="1143000" cy="261411"/>
+            <a:off x="4754880" y="3766252"/>
+            <a:ext cx="1143000" cy="239896"/>
           </a:xfrm>
           <a:prstGeom prst="rect">
             <a:avLst/>
@@ -15156,8 +15156,8 @@
         </p:nvSpPr>
         <p:spPr>
           <a:xfrm>
-            <a:off x="658368" y="4199785"/>
-            <a:ext cx="310896" cy="261411"/>
+            <a:off x="658368" y="4006148"/>
+            <a:ext cx="310896" cy="239896"/>
           </a:xfrm>
           <a:prstGeom prst="rect">
             <a:avLst/>
@@ -15195,8 +15195,8 @@
         </p:nvSpPr>
         <p:spPr>
           <a:xfrm>
-            <a:off x="1014984" y="4199785"/>
-            <a:ext cx="1920240" cy="261411"/>
+            <a:off x="1014984" y="4006148"/>
+            <a:ext cx="1920240" cy="239896"/>
           </a:xfrm>
           <a:prstGeom prst="rect">
             <a:avLst/>
@@ -15234,8 +15234,8 @@
         </p:nvSpPr>
         <p:spPr>
           <a:xfrm>
-            <a:off x="3008376" y="4265138"/>
-            <a:ext cx="789612" cy="130705"/>
+            <a:off x="3008376" y="4066122"/>
+            <a:ext cx="789612" cy="119948"/>
           </a:xfrm>
           <a:prstGeom prst="rect">
             <a:avLst/>
@@ -15254,8 +15254,8 @@
         </p:nvSpPr>
         <p:spPr>
           <a:xfrm>
-            <a:off x="4754880" y="4199785"/>
-            <a:ext cx="1143000" cy="261411"/>
+            <a:off x="4754880" y="4006148"/>
+            <a:ext cx="1143000" cy="239896"/>
           </a:xfrm>
           <a:prstGeom prst="rect">
             <a:avLst/>
@@ -15293,8 +15293,8 @@
         </p:nvSpPr>
         <p:spPr>
           <a:xfrm>
-            <a:off x="658368" y="4461196"/>
-            <a:ext cx="310896" cy="261411"/>
+            <a:off x="658368" y="4246043"/>
+            <a:ext cx="310896" cy="239896"/>
           </a:xfrm>
           <a:prstGeom prst="rect">
             <a:avLst/>
@@ -15332,8 +15332,8 @@
         </p:nvSpPr>
         <p:spPr>
           <a:xfrm>
-            <a:off x="1014984" y="4461196"/>
-            <a:ext cx="1920240" cy="261411"/>
+            <a:off x="1014984" y="4246043"/>
+            <a:ext cx="1920240" cy="239896"/>
           </a:xfrm>
           <a:prstGeom prst="rect">
             <a:avLst/>
@@ -15371,8 +15371,8 @@
         </p:nvSpPr>
         <p:spPr>
           <a:xfrm>
-            <a:off x="3008376" y="4526549"/>
-            <a:ext cx="733838" cy="130705"/>
+            <a:off x="3008376" y="4306017"/>
+            <a:ext cx="733838" cy="119948"/>
           </a:xfrm>
           <a:prstGeom prst="rect">
             <a:avLst/>
@@ -15391,8 +15391,8 @@
         </p:nvSpPr>
         <p:spPr>
           <a:xfrm>
-            <a:off x="4754880" y="4461196"/>
-            <a:ext cx="1143000" cy="261411"/>
+            <a:off x="4754880" y="4246043"/>
+            <a:ext cx="1143000" cy="239896"/>
           </a:xfrm>
           <a:prstGeom prst="rect">
             <a:avLst/>
@@ -15430,8 +15430,8 @@
         </p:nvSpPr>
         <p:spPr>
           <a:xfrm>
-            <a:off x="658368" y="4722607"/>
-            <a:ext cx="310896" cy="261411"/>
+            <a:off x="658368" y="4485939"/>
+            <a:ext cx="310896" cy="239896"/>
           </a:xfrm>
           <a:prstGeom prst="rect">
             <a:avLst/>
@@ -15469,8 +15469,8 @@
         </p:nvSpPr>
         <p:spPr>
           <a:xfrm>
-            <a:off x="1014984" y="4722607"/>
-            <a:ext cx="1920240" cy="261411"/>
+            <a:off x="1014984" y="4485939"/>
+            <a:ext cx="1920240" cy="239896"/>
           </a:xfrm>
           <a:prstGeom prst="rect">
             <a:avLst/>
@@ -15508,8 +15508,8 @@
         </p:nvSpPr>
         <p:spPr>
           <a:xfrm>
-            <a:off x="3008376" y="4787960"/>
-            <a:ext cx="718556" cy="130705"/>
+            <a:off x="3008376" y="4545913"/>
+            <a:ext cx="718556" cy="119948"/>
           </a:xfrm>
           <a:prstGeom prst="rect">
             <a:avLst/>
@@ -15528,8 +15528,8 @@
         </p:nvSpPr>
         <p:spPr>
           <a:xfrm>
-            <a:off x="4754880" y="4722607"/>
-            <a:ext cx="1143000" cy="261411"/>
+            <a:off x="4754880" y="4485939"/>
+            <a:ext cx="1143000" cy="239896"/>
           </a:xfrm>
           <a:prstGeom prst="rect">
             <a:avLst/>
@@ -15567,8 +15567,8 @@
         </p:nvSpPr>
         <p:spPr>
           <a:xfrm>
-            <a:off x="658368" y="4984018"/>
-            <a:ext cx="310896" cy="261411"/>
+            <a:off x="658368" y="4725834"/>
+            <a:ext cx="310896" cy="239896"/>
           </a:xfrm>
           <a:prstGeom prst="rect">
             <a:avLst/>
@@ -15606,8 +15606,8 @@
         </p:nvSpPr>
         <p:spPr>
           <a:xfrm>
-            <a:off x="1014984" y="4984018"/>
-            <a:ext cx="1920240" cy="261411"/>
+            <a:off x="1014984" y="4725834"/>
+            <a:ext cx="1920240" cy="239896"/>
           </a:xfrm>
           <a:prstGeom prst="rect">
             <a:avLst/>
@@ -15645,8 +15645,8 @@
         </p:nvSpPr>
         <p:spPr>
           <a:xfrm>
-            <a:off x="3008376" y="5049371"/>
-            <a:ext cx="712146" cy="130705"/>
+            <a:off x="3008376" y="4785808"/>
+            <a:ext cx="712146" cy="119948"/>
           </a:xfrm>
           <a:prstGeom prst="rect">
             <a:avLst/>
@@ -15665,8 +15665,8 @@
         </p:nvSpPr>
         <p:spPr>
           <a:xfrm>
-            <a:off x="4754880" y="4984018"/>
-            <a:ext cx="1143000" cy="261411"/>
+            <a:off x="4754880" y="4725834"/>
+            <a:ext cx="1143000" cy="239896"/>
           </a:xfrm>
           <a:prstGeom prst="rect">
             <a:avLst/>
@@ -15704,8 +15704,8 @@
         </p:nvSpPr>
         <p:spPr>
           <a:xfrm>
-            <a:off x="658368" y="5245429"/>
-            <a:ext cx="310896" cy="261411"/>
+            <a:off x="658368" y="4965730"/>
+            <a:ext cx="310896" cy="239896"/>
           </a:xfrm>
           <a:prstGeom prst="rect">
             <a:avLst/>
@@ -15743,8 +15743,8 @@
         </p:nvSpPr>
         <p:spPr>
           <a:xfrm>
-            <a:off x="1014984" y="5245429"/>
-            <a:ext cx="1920240" cy="261411"/>
+            <a:off x="1014984" y="4965730"/>
+            <a:ext cx="1920240" cy="239896"/>
           </a:xfrm>
           <a:prstGeom prst="rect">
             <a:avLst/>
@@ -15782,8 +15782,8 @@
         </p:nvSpPr>
         <p:spPr>
           <a:xfrm>
-            <a:off x="3008376" y="5310781"/>
-            <a:ext cx="674365" cy="130705"/>
+            <a:off x="3008376" y="5025704"/>
+            <a:ext cx="674365" cy="119948"/>
           </a:xfrm>
           <a:prstGeom prst="rect">
             <a:avLst/>
@@ -15802,8 +15802,8 @@
         </p:nvSpPr>
         <p:spPr>
           <a:xfrm>
-            <a:off x="4754880" y="5245429"/>
-            <a:ext cx="1143000" cy="261411"/>
+            <a:off x="4754880" y="4965730"/>
+            <a:ext cx="1143000" cy="239896"/>
           </a:xfrm>
           <a:prstGeom prst="rect">
             <a:avLst/>
@@ -15841,8 +15841,8 @@
         </p:nvSpPr>
         <p:spPr>
           <a:xfrm>
-            <a:off x="658368" y="5506840"/>
-            <a:ext cx="310896" cy="261411"/>
+            <a:off x="658368" y="5205625"/>
+            <a:ext cx="310896" cy="239896"/>
           </a:xfrm>
           <a:prstGeom prst="rect">
             <a:avLst/>
@@ -15880,8 +15880,8 @@
         </p:nvSpPr>
         <p:spPr>
           <a:xfrm>
-            <a:off x="1014984" y="5506840"/>
-            <a:ext cx="1920240" cy="261411"/>
+            <a:off x="1014984" y="5205625"/>
+            <a:ext cx="1920240" cy="239896"/>
           </a:xfrm>
           <a:prstGeom prst="rect">
             <a:avLst/>
@@ -15919,8 +15919,8 @@
         </p:nvSpPr>
         <p:spPr>
           <a:xfrm>
-            <a:off x="3008376" y="5572192"/>
-            <a:ext cx="641436" cy="130705"/>
+            <a:off x="3008376" y="5265599"/>
+            <a:ext cx="641436" cy="119948"/>
           </a:xfrm>
           <a:prstGeom prst="rect">
             <a:avLst/>
@@ -15939,8 +15939,8 @@
         </p:nvSpPr>
         <p:spPr>
           <a:xfrm>
-            <a:off x="4754880" y="5506840"/>
-            <a:ext cx="1143000" cy="261411"/>
+            <a:off x="4754880" y="5205625"/>
+            <a:ext cx="1143000" cy="239896"/>
           </a:xfrm>
           <a:prstGeom prst="rect">
             <a:avLst/>
@@ -15978,8 +15978,8 @@
         </p:nvSpPr>
         <p:spPr>
           <a:xfrm>
-            <a:off x="658368" y="5768250"/>
-            <a:ext cx="310896" cy="261411"/>
+            <a:off x="658368" y="5445521"/>
+            <a:ext cx="310896" cy="239896"/>
           </a:xfrm>
           <a:prstGeom prst="rect">
             <a:avLst/>
@@ -16017,8 +16017,8 @@
         </p:nvSpPr>
         <p:spPr>
           <a:xfrm>
-            <a:off x="1014984" y="5768250"/>
-            <a:ext cx="1920240" cy="261411"/>
+            <a:off x="1014984" y="5445521"/>
+            <a:ext cx="1920240" cy="239896"/>
           </a:xfrm>
           <a:prstGeom prst="rect">
             <a:avLst/>
@@ -16056,8 +16056,8 @@
         </p:nvSpPr>
         <p:spPr>
           <a:xfrm>
-            <a:off x="3008376" y="5833603"/>
-            <a:ext cx="636377" cy="130705"/>
+            <a:off x="3008376" y="5505495"/>
+            <a:ext cx="636377" cy="119948"/>
           </a:xfrm>
           <a:prstGeom prst="rect">
             <a:avLst/>
@@ -16076,8 +16076,8 @@
         </p:nvSpPr>
         <p:spPr>
           <a:xfrm>
-            <a:off x="4754880" y="5768250"/>
-            <a:ext cx="1143000" cy="261411"/>
+            <a:off x="4754880" y="5445521"/>
+            <a:ext cx="1143000" cy="239896"/>
           </a:xfrm>
           <a:prstGeom prst="rect">
             <a:avLst/>
@@ -16115,8 +16115,8 @@
         </p:nvSpPr>
         <p:spPr>
           <a:xfrm>
-            <a:off x="658368" y="6029661"/>
-            <a:ext cx="310896" cy="261411"/>
+            <a:off x="658368" y="5685416"/>
+            <a:ext cx="310896" cy="239896"/>
           </a:xfrm>
           <a:prstGeom prst="rect">
             <a:avLst/>
@@ -16154,8 +16154,8 @@
         </p:nvSpPr>
         <p:spPr>
           <a:xfrm>
-            <a:off x="1014984" y="6029661"/>
-            <a:ext cx="1920240" cy="261411"/>
+            <a:off x="1014984" y="5685416"/>
+            <a:ext cx="1920240" cy="239896"/>
           </a:xfrm>
           <a:prstGeom prst="rect">
             <a:avLst/>
@@ -16193,8 +16193,8 @@
         </p:nvSpPr>
         <p:spPr>
           <a:xfrm>
-            <a:off x="3008376" y="6095014"/>
-            <a:ext cx="624030" cy="130705"/>
+            <a:off x="3008376" y="5745390"/>
+            <a:ext cx="624030" cy="119948"/>
           </a:xfrm>
           <a:prstGeom prst="rect">
             <a:avLst/>
@@ -16213,8 +16213,8 @@
         </p:nvSpPr>
         <p:spPr>
           <a:xfrm>
-            <a:off x="4754880" y="6029661"/>
-            <a:ext cx="1143000" cy="261411"/>
+            <a:off x="4754880" y="5685416"/>
+            <a:ext cx="1143000" cy="239896"/>
           </a:xfrm>
           <a:prstGeom prst="rect">
             <a:avLst/>
@@ -16253,7 +16253,7 @@
         <p:spPr>
           <a:xfrm>
             <a:off x="6208776" y="1847088"/>
-            <a:ext cx="310896" cy="261411"/>
+            <a:ext cx="310896" cy="239896"/>
           </a:xfrm>
           <a:prstGeom prst="rect">
             <a:avLst/>
@@ -16292,7 +16292,7 @@
         <p:spPr>
           <a:xfrm>
             <a:off x="6565392" y="1847088"/>
-            <a:ext cx="1920240" cy="261411"/>
+            <a:ext cx="1920240" cy="239896"/>
           </a:xfrm>
           <a:prstGeom prst="rect">
             <a:avLst/>
@@ -16330,8 +16330,8 @@
         </p:nvSpPr>
         <p:spPr>
           <a:xfrm>
-            <a:off x="8558784" y="1912441"/>
-            <a:ext cx="558764" cy="130705"/>
+            <a:off x="8558784" y="1907062"/>
+            <a:ext cx="558764" cy="119948"/>
           </a:xfrm>
           <a:prstGeom prst="rect">
             <a:avLst/>
@@ -16351,7 +16351,7 @@
         <p:spPr>
           <a:xfrm>
             <a:off x="10305288" y="1847088"/>
-            <a:ext cx="1143000" cy="261411"/>
+            <a:ext cx="1143000" cy="239896"/>
           </a:xfrm>
           <a:prstGeom prst="rect">
             <a:avLst/>
@@ -16389,8 +16389,8 @@
         </p:nvSpPr>
         <p:spPr>
           <a:xfrm>
-            <a:off x="6208776" y="2108499"/>
-            <a:ext cx="310896" cy="261411"/>
+            <a:off x="6208776" y="2086984"/>
+            <a:ext cx="310896" cy="239896"/>
           </a:xfrm>
           <a:prstGeom prst="rect">
             <a:avLst/>
@@ -16428,8 +16428,8 @@
         </p:nvSpPr>
         <p:spPr>
           <a:xfrm>
-            <a:off x="6565392" y="2108499"/>
-            <a:ext cx="1920240" cy="261411"/>
+            <a:off x="6565392" y="2086984"/>
+            <a:ext cx="1920240" cy="239896"/>
           </a:xfrm>
           <a:prstGeom prst="rect">
             <a:avLst/>
@@ -16467,8 +16467,8 @@
         </p:nvSpPr>
         <p:spPr>
           <a:xfrm>
-            <a:off x="8558784" y="2173852"/>
-            <a:ext cx="524245" cy="130705"/>
+            <a:off x="8558784" y="2146957"/>
+            <a:ext cx="524245" cy="119948"/>
           </a:xfrm>
           <a:prstGeom prst="rect">
             <a:avLst/>
@@ -16487,8 +16487,8 @@
         </p:nvSpPr>
         <p:spPr>
           <a:xfrm>
-            <a:off x="10305288" y="2108499"/>
-            <a:ext cx="1143000" cy="261411"/>
+            <a:off x="10305288" y="2086984"/>
+            <a:ext cx="1143000" cy="239896"/>
           </a:xfrm>
           <a:prstGeom prst="rect">
             <a:avLst/>
@@ -16526,8 +16526,8 @@
         </p:nvSpPr>
         <p:spPr>
           <a:xfrm>
-            <a:off x="6208776" y="2369910"/>
-            <a:ext cx="310896" cy="261411"/>
+            <a:off x="6208776" y="2326879"/>
+            <a:ext cx="310896" cy="239896"/>
           </a:xfrm>
           <a:prstGeom prst="rect">
             <a:avLst/>
@@ -16565,8 +16565,8 @@
         </p:nvSpPr>
         <p:spPr>
           <a:xfrm>
-            <a:off x="6565392" y="2369910"/>
-            <a:ext cx="1920240" cy="261411"/>
+            <a:off x="6565392" y="2326879"/>
+            <a:ext cx="1920240" cy="239896"/>
           </a:xfrm>
           <a:prstGeom prst="rect">
             <a:avLst/>
@@ -16604,8 +16604,8 @@
         </p:nvSpPr>
         <p:spPr>
           <a:xfrm>
-            <a:off x="8558784" y="2435262"/>
-            <a:ext cx="511532" cy="130705"/>
+            <a:off x="8558784" y="2386853"/>
+            <a:ext cx="511532" cy="119948"/>
           </a:xfrm>
           <a:prstGeom prst="rect">
             <a:avLst/>
@@ -16624,8 +16624,8 @@
         </p:nvSpPr>
         <p:spPr>
           <a:xfrm>
-            <a:off x="10305288" y="2369910"/>
-            <a:ext cx="1143000" cy="261411"/>
+            <a:off x="10305288" y="2326879"/>
+            <a:ext cx="1143000" cy="239896"/>
           </a:xfrm>
           <a:prstGeom prst="rect">
             <a:avLst/>
@@ -16663,8 +16663,8 @@
         </p:nvSpPr>
         <p:spPr>
           <a:xfrm>
-            <a:off x="6208776" y="2631320"/>
-            <a:ext cx="310896" cy="261411"/>
+            <a:off x="6208776" y="2566775"/>
+            <a:ext cx="310896" cy="239896"/>
           </a:xfrm>
           <a:prstGeom prst="rect">
             <a:avLst/>
@@ -16702,8 +16702,8 @@
         </p:nvSpPr>
         <p:spPr>
           <a:xfrm>
-            <a:off x="6565392" y="2631320"/>
-            <a:ext cx="1920240" cy="261411"/>
+            <a:off x="6565392" y="2566775"/>
+            <a:ext cx="1920240" cy="239896"/>
           </a:xfrm>
           <a:prstGeom prst="rect">
             <a:avLst/>
@@ -16741,8 +16741,8 @@
         </p:nvSpPr>
         <p:spPr>
           <a:xfrm>
-            <a:off x="8558784" y="2696673"/>
-            <a:ext cx="444269" cy="130705"/>
+            <a:off x="8558784" y="2626748"/>
+            <a:ext cx="444269" cy="119948"/>
           </a:xfrm>
           <a:prstGeom prst="rect">
             <a:avLst/>
@@ -16761,8 +16761,8 @@
         </p:nvSpPr>
         <p:spPr>
           <a:xfrm>
-            <a:off x="10305288" y="2631320"/>
-            <a:ext cx="1143000" cy="261411"/>
+            <a:off x="10305288" y="2566775"/>
+            <a:ext cx="1143000" cy="239896"/>
           </a:xfrm>
           <a:prstGeom prst="rect">
             <a:avLst/>
@@ -16800,8 +16800,8 @@
         </p:nvSpPr>
         <p:spPr>
           <a:xfrm>
-            <a:off x="6208776" y="2892731"/>
-            <a:ext cx="310896" cy="261411"/>
+            <a:off x="6208776" y="2806670"/>
+            <a:ext cx="310896" cy="239896"/>
           </a:xfrm>
           <a:prstGeom prst="rect">
             <a:avLst/>
@@ -16839,8 +16839,8 @@
         </p:nvSpPr>
         <p:spPr>
           <a:xfrm>
-            <a:off x="6565392" y="2892731"/>
-            <a:ext cx="1920240" cy="261411"/>
+            <a:off x="6565392" y="2806670"/>
+            <a:ext cx="1920240" cy="239896"/>
           </a:xfrm>
           <a:prstGeom prst="rect">
             <a:avLst/>
@@ -16878,8 +16878,8 @@
         </p:nvSpPr>
         <p:spPr>
           <a:xfrm>
-            <a:off x="8558784" y="2958084"/>
-            <a:ext cx="393958" cy="130705"/>
+            <a:off x="8558784" y="2866644"/>
+            <a:ext cx="393958" cy="119948"/>
           </a:xfrm>
           <a:prstGeom prst="rect">
             <a:avLst/>
@@ -16898,8 +16898,8 @@
         </p:nvSpPr>
         <p:spPr>
           <a:xfrm>
-            <a:off x="10305288" y="2892731"/>
-            <a:ext cx="1143000" cy="261411"/>
+            <a:off x="10305288" y="2806670"/>
+            <a:ext cx="1143000" cy="239896"/>
           </a:xfrm>
           <a:prstGeom prst="rect">
             <a:avLst/>
@@ -16937,8 +16937,8 @@
         </p:nvSpPr>
         <p:spPr>
           <a:xfrm>
-            <a:off x="6208776" y="3154142"/>
-            <a:ext cx="310896" cy="261411"/>
+            <a:off x="6208776" y="3046566"/>
+            <a:ext cx="310896" cy="239896"/>
           </a:xfrm>
           <a:prstGeom prst="rect">
             <a:avLst/>
@@ -16976,8 +16976,8 @@
         </p:nvSpPr>
         <p:spPr>
           <a:xfrm>
-            <a:off x="6565392" y="3154142"/>
-            <a:ext cx="1920240" cy="261411"/>
+            <a:off x="6565392" y="3046566"/>
+            <a:ext cx="1920240" cy="239896"/>
           </a:xfrm>
           <a:prstGeom prst="rect">
             <a:avLst/>
@@ -17015,8 +17015,8 @@
         </p:nvSpPr>
         <p:spPr>
           <a:xfrm>
-            <a:off x="8558784" y="3219495"/>
-            <a:ext cx="393514" cy="130705"/>
+            <a:off x="8558784" y="3106540"/>
+            <a:ext cx="393514" cy="119948"/>
           </a:xfrm>
           <a:prstGeom prst="rect">
             <a:avLst/>
@@ -17035,8 +17035,8 @@
         </p:nvSpPr>
         <p:spPr>
           <a:xfrm>
-            <a:off x="10305288" y="3154142"/>
-            <a:ext cx="1143000" cy="261411"/>
+            <a:off x="10305288" y="3046566"/>
+            <a:ext cx="1143000" cy="239896"/>
           </a:xfrm>
           <a:prstGeom prst="rect">
             <a:avLst/>
@@ -17074,8 +17074,8 @@
         </p:nvSpPr>
         <p:spPr>
           <a:xfrm>
-            <a:off x="6208776" y="3415553"/>
-            <a:ext cx="310896" cy="261411"/>
+            <a:off x="6208776" y="3286461"/>
+            <a:ext cx="310896" cy="239896"/>
           </a:xfrm>
           <a:prstGeom prst="rect">
             <a:avLst/>
@@ -17113,8 +17113,8 @@
         </p:nvSpPr>
         <p:spPr>
           <a:xfrm>
-            <a:off x="6565392" y="3415553"/>
-            <a:ext cx="1920240" cy="261411"/>
+            <a:off x="6565392" y="3286461"/>
+            <a:ext cx="1920240" cy="239896"/>
           </a:xfrm>
           <a:prstGeom prst="rect">
             <a:avLst/>
@@ -17152,8 +17152,8 @@
         </p:nvSpPr>
         <p:spPr>
           <a:xfrm>
-            <a:off x="8558784" y="3480906"/>
-            <a:ext cx="367056" cy="130705"/>
+            <a:off x="8558784" y="3346435"/>
+            <a:ext cx="367056" cy="119948"/>
           </a:xfrm>
           <a:prstGeom prst="rect">
             <a:avLst/>
@@ -17172,8 +17172,8 @@
         </p:nvSpPr>
         <p:spPr>
           <a:xfrm>
-            <a:off x="10305288" y="3415553"/>
-            <a:ext cx="1143000" cy="261411"/>
+            <a:off x="10305288" y="3286461"/>
+            <a:ext cx="1143000" cy="239896"/>
           </a:xfrm>
           <a:prstGeom prst="rect">
             <a:avLst/>
@@ -17211,8 +17211,8 @@
         </p:nvSpPr>
         <p:spPr>
           <a:xfrm>
-            <a:off x="6208776" y="3676964"/>
-            <a:ext cx="310896" cy="261411"/>
+            <a:off x="6208776" y="3526357"/>
+            <a:ext cx="310896" cy="239896"/>
           </a:xfrm>
           <a:prstGeom prst="rect">
             <a:avLst/>
@@ -17250,8 +17250,8 @@
         </p:nvSpPr>
         <p:spPr>
           <a:xfrm>
-            <a:off x="6565392" y="3676964"/>
-            <a:ext cx="1920240" cy="261411"/>
+            <a:off x="6565392" y="3526357"/>
+            <a:ext cx="1920240" cy="239896"/>
           </a:xfrm>
           <a:prstGeom prst="rect">
             <a:avLst/>
@@ -17289,8 +17289,8 @@
         </p:nvSpPr>
         <p:spPr>
           <a:xfrm>
-            <a:off x="8558784" y="3742316"/>
-            <a:ext cx="334961" cy="130705"/>
+            <a:off x="8558784" y="3586331"/>
+            <a:ext cx="334961" cy="119948"/>
           </a:xfrm>
           <a:prstGeom prst="rect">
             <a:avLst/>
@@ -17309,8 +17309,8 @@
         </p:nvSpPr>
         <p:spPr>
           <a:xfrm>
-            <a:off x="10305288" y="3676964"/>
-            <a:ext cx="1143000" cy="261411"/>
+            <a:off x="10305288" y="3526357"/>
+            <a:ext cx="1143000" cy="239896"/>
           </a:xfrm>
           <a:prstGeom prst="rect">
             <a:avLst/>
@@ -17348,8 +17348,8 @@
         </p:nvSpPr>
         <p:spPr>
           <a:xfrm>
-            <a:off x="6208776" y="3938375"/>
-            <a:ext cx="310896" cy="261411"/>
+            <a:off x="6208776" y="3766252"/>
+            <a:ext cx="310896" cy="239896"/>
           </a:xfrm>
           <a:prstGeom prst="rect">
             <a:avLst/>
@@ -17387,8 +17387,8 @@
         </p:nvSpPr>
         <p:spPr>
           <a:xfrm>
-            <a:off x="6565392" y="3938375"/>
-            <a:ext cx="1920240" cy="261411"/>
+            <a:off x="6565392" y="3766252"/>
+            <a:ext cx="1920240" cy="239896"/>
           </a:xfrm>
           <a:prstGeom prst="rect">
             <a:avLst/>
@@ -17426,8 +17426,8 @@
         </p:nvSpPr>
         <p:spPr>
           <a:xfrm>
-            <a:off x="8558784" y="4003727"/>
-            <a:ext cx="331007" cy="130705"/>
+            <a:off x="8558784" y="3826226"/>
+            <a:ext cx="331007" cy="119948"/>
           </a:xfrm>
           <a:prstGeom prst="rect">
             <a:avLst/>
@@ -17446,8 +17446,8 @@
         </p:nvSpPr>
         <p:spPr>
           <a:xfrm>
-            <a:off x="10305288" y="3938375"/>
-            <a:ext cx="1143000" cy="261411"/>
+            <a:off x="10305288" y="3766252"/>
+            <a:ext cx="1143000" cy="239896"/>
           </a:xfrm>
           <a:prstGeom prst="rect">
             <a:avLst/>
@@ -17485,8 +17485,8 @@
         </p:nvSpPr>
         <p:spPr>
           <a:xfrm>
-            <a:off x="6208776" y="4199785"/>
-            <a:ext cx="310896" cy="261411"/>
+            <a:off x="6208776" y="4006148"/>
+            <a:ext cx="310896" cy="239896"/>
           </a:xfrm>
           <a:prstGeom prst="rect">
             <a:avLst/>
@@ -17524,8 +17524,8 @@
         </p:nvSpPr>
         <p:spPr>
           <a:xfrm>
-            <a:off x="6565392" y="4199785"/>
-            <a:ext cx="1920240" cy="261411"/>
+            <a:off x="6565392" y="4006148"/>
+            <a:ext cx="1920240" cy="239896"/>
           </a:xfrm>
           <a:prstGeom prst="rect">
             <a:avLst/>
@@ -17563,8 +17563,8 @@
         </p:nvSpPr>
         <p:spPr>
           <a:xfrm>
-            <a:off x="8558784" y="4265138"/>
-            <a:ext cx="313417" cy="130705"/>
+            <a:off x="8558784" y="4066122"/>
+            <a:ext cx="313417" cy="119948"/>
           </a:xfrm>
           <a:prstGeom prst="rect">
             <a:avLst/>
@@ -17583,8 +17583,8 @@
         </p:nvSpPr>
         <p:spPr>
           <a:xfrm>
-            <a:off x="10305288" y="4199785"/>
-            <a:ext cx="1143000" cy="261411"/>
+            <a:off x="10305288" y="4006148"/>
+            <a:ext cx="1143000" cy="239896"/>
           </a:xfrm>
           <a:prstGeom prst="rect">
             <a:avLst/>
@@ -17622,8 +17622,8 @@
         </p:nvSpPr>
         <p:spPr>
           <a:xfrm>
-            <a:off x="6208776" y="4461196"/>
-            <a:ext cx="310896" cy="261411"/>
+            <a:off x="6208776" y="4246043"/>
+            <a:ext cx="310896" cy="239896"/>
           </a:xfrm>
           <a:prstGeom prst="rect">
             <a:avLst/>
@@ -17661,8 +17661,8 @@
         </p:nvSpPr>
         <p:spPr>
           <a:xfrm>
-            <a:off x="6565392" y="4461196"/>
-            <a:ext cx="1920240" cy="261411"/>
+            <a:off x="6565392" y="4246043"/>
+            <a:ext cx="1920240" cy="239896"/>
           </a:xfrm>
           <a:prstGeom prst="rect">
             <a:avLst/>
@@ -17700,8 +17700,8 @@
         </p:nvSpPr>
         <p:spPr>
           <a:xfrm>
-            <a:off x="8558784" y="4526549"/>
-            <a:ext cx="206535" cy="130705"/>
+            <a:off x="8558784" y="4306017"/>
+            <a:ext cx="206535" cy="119948"/>
           </a:xfrm>
           <a:prstGeom prst="rect">
             <a:avLst/>
@@ -17720,8 +17720,8 @@
         </p:nvSpPr>
         <p:spPr>
           <a:xfrm>
-            <a:off x="10305288" y="4461196"/>
-            <a:ext cx="1143000" cy="261411"/>
+            <a:off x="10305288" y="4246043"/>
+            <a:ext cx="1143000" cy="239896"/>
           </a:xfrm>
           <a:prstGeom prst="rect">
             <a:avLst/>
@@ -17759,8 +17759,8 @@
         </p:nvSpPr>
         <p:spPr>
           <a:xfrm>
-            <a:off x="6208776" y="4722607"/>
-            <a:ext cx="310896" cy="261411"/>
+            <a:off x="6208776" y="4485939"/>
+            <a:ext cx="310896" cy="239896"/>
           </a:xfrm>
           <a:prstGeom prst="rect">
             <a:avLst/>
@@ -17798,8 +17798,8 @@
         </p:nvSpPr>
         <p:spPr>
           <a:xfrm>
-            <a:off x="6565392" y="4722607"/>
-            <a:ext cx="1920240" cy="261411"/>
+            <a:off x="6565392" y="4485939"/>
+            <a:ext cx="1920240" cy="239896"/>
           </a:xfrm>
           <a:prstGeom prst="rect">
             <a:avLst/>
@@ -17837,8 +17837,8 @@
         </p:nvSpPr>
         <p:spPr>
           <a:xfrm>
-            <a:off x="8558784" y="4787960"/>
-            <a:ext cx="100839" cy="130705"/>
+            <a:off x="8558784" y="4545913"/>
+            <a:ext cx="100839" cy="119948"/>
           </a:xfrm>
           <a:prstGeom prst="rect">
             <a:avLst/>
@@ -17857,8 +17857,8 @@
         </p:nvSpPr>
         <p:spPr>
           <a:xfrm>
-            <a:off x="10305288" y="4722607"/>
-            <a:ext cx="1143000" cy="261411"/>
+            <a:off x="10305288" y="4485939"/>
+            <a:ext cx="1143000" cy="239896"/>
           </a:xfrm>
           <a:prstGeom prst="rect">
             <a:avLst/>
@@ -17896,8 +17896,8 @@
         </p:nvSpPr>
         <p:spPr>
           <a:xfrm>
-            <a:off x="6208776" y="4984018"/>
-            <a:ext cx="310896" cy="261411"/>
+            <a:off x="6208776" y="4725834"/>
+            <a:ext cx="310896" cy="239896"/>
           </a:xfrm>
           <a:prstGeom prst="rect">
             <a:avLst/>
@@ -17935,8 +17935,8 @@
         </p:nvSpPr>
         <p:spPr>
           <a:xfrm>
-            <a:off x="6565392" y="4984018"/>
-            <a:ext cx="1920240" cy="261411"/>
+            <a:off x="6565392" y="4725834"/>
+            <a:ext cx="1920240" cy="239896"/>
           </a:xfrm>
           <a:prstGeom prst="rect">
             <a:avLst/>
@@ -17974,8 +17974,8 @@
         </p:nvSpPr>
         <p:spPr>
           <a:xfrm>
-            <a:off x="8558784" y="5049371"/>
-            <a:ext cx="87903" cy="130705"/>
+            <a:off x="8558784" y="4785808"/>
+            <a:ext cx="87903" cy="119948"/>
           </a:xfrm>
           <a:prstGeom prst="rect">
             <a:avLst/>
@@ -17994,8 +17994,8 @@
         </p:nvSpPr>
         <p:spPr>
           <a:xfrm>
-            <a:off x="10305288" y="4984018"/>
-            <a:ext cx="1143000" cy="261411"/>
+            <a:off x="10305288" y="4725834"/>
+            <a:ext cx="1143000" cy="239896"/>
           </a:xfrm>
           <a:prstGeom prst="rect">
             <a:avLst/>
@@ -18033,8 +18033,8 @@
         </p:nvSpPr>
         <p:spPr>
           <a:xfrm>
-            <a:off x="6208776" y="5245429"/>
-            <a:ext cx="310896" cy="261411"/>
+            <a:off x="6208776" y="4965730"/>
+            <a:ext cx="310896" cy="239896"/>
           </a:xfrm>
           <a:prstGeom prst="rect">
             <a:avLst/>
@@ -18072,8 +18072,8 @@
         </p:nvSpPr>
         <p:spPr>
           <a:xfrm>
-            <a:off x="6565392" y="5245429"/>
-            <a:ext cx="1920240" cy="261411"/>
+            <a:off x="6565392" y="4965730"/>
+            <a:ext cx="1920240" cy="239896"/>
           </a:xfrm>
           <a:prstGeom prst="rect">
             <a:avLst/>
@@ -18111,8 +18111,8 @@
         </p:nvSpPr>
         <p:spPr>
           <a:xfrm>
-            <a:off x="8558784" y="5310781"/>
-            <a:ext cx="18288" cy="130705"/>
+            <a:off x="8558784" y="5025704"/>
+            <a:ext cx="18288" cy="119948"/>
           </a:xfrm>
           <a:prstGeom prst="rect">
             <a:avLst/>
@@ -18131,8 +18131,8 @@
         </p:nvSpPr>
         <p:spPr>
           <a:xfrm>
-            <a:off x="10305288" y="5245429"/>
-            <a:ext cx="1143000" cy="261411"/>
+            <a:off x="10305288" y="4965730"/>
+            <a:ext cx="1143000" cy="239896"/>
           </a:xfrm>
           <a:prstGeom prst="rect">
             <a:avLst/>
@@ -18170,8 +18170,8 @@
         </p:nvSpPr>
         <p:spPr>
           <a:xfrm>
-            <a:off x="6208776" y="5506840"/>
-            <a:ext cx="310896" cy="261411"/>
+            <a:off x="6208776" y="5205625"/>
+            <a:ext cx="310896" cy="239896"/>
           </a:xfrm>
           <a:prstGeom prst="rect">
             <a:avLst/>
@@ -18209,8 +18209,8 @@
         </p:nvSpPr>
         <p:spPr>
           <a:xfrm>
-            <a:off x="6565392" y="5506840"/>
-            <a:ext cx="1920240" cy="261411"/>
+            <a:off x="6565392" y="5205625"/>
+            <a:ext cx="1920240" cy="239896"/>
           </a:xfrm>
           <a:prstGeom prst="rect">
             <a:avLst/>
@@ -18248,8 +18248,8 @@
         </p:nvSpPr>
         <p:spPr>
           <a:xfrm>
-            <a:off x="8558784" y="5572192"/>
-            <a:ext cx="18288" cy="130705"/>
+            <a:off x="8558784" y="5265599"/>
+            <a:ext cx="18288" cy="119948"/>
           </a:xfrm>
           <a:prstGeom prst="rect">
             <a:avLst/>
@@ -18268,8 +18268,8 @@
         </p:nvSpPr>
         <p:spPr>
           <a:xfrm>
-            <a:off x="10305288" y="5506840"/>
-            <a:ext cx="1143000" cy="261411"/>
+            <a:off x="10305288" y="5205625"/>
+            <a:ext cx="1143000" cy="239896"/>
           </a:xfrm>
           <a:prstGeom prst="rect">
             <a:avLst/>
@@ -18307,8 +18307,8 @@
         </p:nvSpPr>
         <p:spPr>
           <a:xfrm>
-            <a:off x="6208776" y="5768250"/>
-            <a:ext cx="310896" cy="261411"/>
+            <a:off x="6208776" y="5445521"/>
+            <a:ext cx="310896" cy="239896"/>
           </a:xfrm>
           <a:prstGeom prst="rect">
             <a:avLst/>
@@ -18346,8 +18346,8 @@
         </p:nvSpPr>
         <p:spPr>
           <a:xfrm>
-            <a:off x="6565392" y="5768250"/>
-            <a:ext cx="1920240" cy="261411"/>
+            <a:off x="6565392" y="5445521"/>
+            <a:ext cx="1920240" cy="239896"/>
           </a:xfrm>
           <a:prstGeom prst="rect">
             <a:avLst/>
@@ -18385,8 +18385,8 @@
         </p:nvSpPr>
         <p:spPr>
           <a:xfrm>
-            <a:off x="8558784" y="5833603"/>
-            <a:ext cx="18288" cy="130705"/>
+            <a:off x="8558784" y="5505495"/>
+            <a:ext cx="18288" cy="119948"/>
           </a:xfrm>
           <a:prstGeom prst="rect">
             <a:avLst/>
@@ -18405,8 +18405,8 @@
         </p:nvSpPr>
         <p:spPr>
           <a:xfrm>
-            <a:off x="10305288" y="5768250"/>
-            <a:ext cx="1143000" cy="261411"/>
+            <a:off x="10305288" y="5445521"/>
+            <a:ext cx="1143000" cy="239896"/>
           </a:xfrm>
           <a:prstGeom prst="rect">
             <a:avLst/>
@@ -18445,7 +18445,7 @@
         <p:spPr>
           <a:xfrm>
             <a:off x="3917219" y="1847088"/>
-            <a:ext cx="14630" cy="4443984"/>
+            <a:ext cx="14630" cy="4078224"/>
           </a:xfrm>
           <a:prstGeom prst="rect">
             <a:avLst/>
@@ -18465,7 +18465,7 @@
         <p:spPr>
           <a:xfrm>
             <a:off x="9467627" y="1847088"/>
-            <a:ext cx="14630" cy="4443984"/>
+            <a:ext cx="14630" cy="4078224"/>
           </a:xfrm>
           <a:prstGeom prst="rect">
             <a:avLst/>
@@ -18485,7 +18485,7 @@
         <p:spPr>
           <a:xfrm>
             <a:off x="6085332" y="1847088"/>
-            <a:ext cx="10973" cy="4443984"/>
+            <a:ext cx="10973" cy="4078224"/>
           </a:xfrm>
           <a:prstGeom prst="rect">
             <a:avLst/>
@@ -18495,6 +18495,65 @@
           </a:solidFill>
           <a:ln/>
         </p:spPr>
+      </p:sp>
+      <p:sp>
+        <p:nvSpPr>
+          <p:cNvPr id="147" name="Shape 144"/>
+          <p:cNvSpPr/>
+          <p:nvPr/>
+        </p:nvSpPr>
+        <p:spPr>
+          <a:xfrm>
+            <a:off x="457200" y="6126480"/>
+            <a:ext cx="11274552" cy="371856"/>
+          </a:xfrm>
+          <a:prstGeom prst="rect">
+            <a:avLst/>
+          </a:prstGeom>
+          <a:solidFill>
+            <a:srgbClr val="EDF4FA"/>
+          </a:solidFill>
+          <a:ln/>
+        </p:spPr>
+      </p:sp>
+      <p:sp>
+        <p:nvSpPr>
+          <p:cNvPr id="148" name="Text 145"/>
+          <p:cNvSpPr txBox="1"/>
+          <p:nvPr/>
+        </p:nvSpPr>
+        <p:spPr>
+          <a:xfrm>
+            <a:off x="658368" y="6144768"/>
+            <a:ext cx="10927080" cy="335280"/>
+          </a:xfrm>
+          <a:prstGeom prst="rect">
+            <a:avLst/>
+          </a:prstGeom>
+          <a:noFill/>
+          <a:ln/>
+        </p:spPr>
+        <p:txBody>
+          <a:bodyPr wrap="square" lIns="0" tIns="0" rIns="0" bIns="0" rtlCol="0" anchor="ctr"/>
+          <a:lstStyle/>
+          <a:p>
+            <a:pPr indent="0" marL="0">
+              <a:buNone/>
+            </a:pPr>
+            <a:r>
+              <a:rPr lang="en-US" sz="1600" b="1" dirty="0">
+                <a:solidFill>
+                  <a:srgbClr val="0B2C4A"/>
+                </a:solidFill>
+                <a:latin typeface="Inter" pitchFamily="34" charset="0"/>
+                <a:ea typeface="Inter" pitchFamily="34" charset="-122"/>
+                <a:cs typeface="Inter" pitchFamily="34" charset="-120"/>
+              </a:rPr>
+              <a:t>7 of 33 stores at or above 7.5%. The group sits at 5.8%.</a:t>
+            </a:r>
+            <a:endParaRPr lang="en-US" sz="1600" dirty="0"/>
+          </a:p>
+        </p:txBody>
       </p:sp>
     </p:spTree>
   </p:cSld>
@@ -22607,7 +22666,7 @@
         <p:spPr>
           <a:xfrm>
             <a:off x="457200" y="1207008"/>
-            <a:ext cx="11274552" cy="5148072"/>
+            <a:ext cx="11274552" cy="4782312"/>
           </a:xfrm>
           <a:prstGeom prst="rect">
             <a:avLst/>
@@ -22784,7 +22843,7 @@
         <p:spPr>
           <a:xfrm>
             <a:off x="658368" y="1847088"/>
-            <a:ext cx="310896" cy="261411"/>
+            <a:ext cx="310896" cy="239896"/>
           </a:xfrm>
           <a:prstGeom prst="rect">
             <a:avLst/>
@@ -22823,7 +22882,7 @@
         <p:spPr>
           <a:xfrm>
             <a:off x="1014984" y="1847088"/>
-            <a:ext cx="1920240" cy="261411"/>
+            <a:ext cx="1920240" cy="239896"/>
           </a:xfrm>
           <a:prstGeom prst="rect">
             <a:avLst/>
@@ -22861,8 +22920,8 @@
         </p:nvSpPr>
         <p:spPr>
           <a:xfrm>
-            <a:off x="3008376" y="1912441"/>
-            <a:ext cx="1691640" cy="130705"/>
+            <a:off x="3008376" y="1907062"/>
+            <a:ext cx="1691640" cy="119948"/>
           </a:xfrm>
           <a:prstGeom prst="rect">
             <a:avLst/>
@@ -22882,7 +22941,7 @@
         <p:spPr>
           <a:xfrm>
             <a:off x="4754880" y="1847088"/>
-            <a:ext cx="1143000" cy="261411"/>
+            <a:ext cx="1143000" cy="239896"/>
           </a:xfrm>
           <a:prstGeom prst="rect">
             <a:avLst/>
@@ -22920,8 +22979,8 @@
         </p:nvSpPr>
         <p:spPr>
           <a:xfrm>
-            <a:off x="658368" y="2108499"/>
-            <a:ext cx="310896" cy="261411"/>
+            <a:off x="658368" y="2086984"/>
+            <a:ext cx="310896" cy="239896"/>
           </a:xfrm>
           <a:prstGeom prst="rect">
             <a:avLst/>
@@ -22959,8 +23018,8 @@
         </p:nvSpPr>
         <p:spPr>
           <a:xfrm>
-            <a:off x="1014984" y="2108499"/>
-            <a:ext cx="1920240" cy="261411"/>
+            <a:off x="1014984" y="2086984"/>
+            <a:ext cx="1920240" cy="239896"/>
           </a:xfrm>
           <a:prstGeom prst="rect">
             <a:avLst/>
@@ -22998,8 +23057,8 @@
         </p:nvSpPr>
         <p:spPr>
           <a:xfrm>
-            <a:off x="3008376" y="2173852"/>
-            <a:ext cx="1502209" cy="130705"/>
+            <a:off x="3008376" y="2146957"/>
+            <a:ext cx="1502209" cy="119948"/>
           </a:xfrm>
           <a:prstGeom prst="rect">
             <a:avLst/>
@@ -23018,8 +23077,8 @@
         </p:nvSpPr>
         <p:spPr>
           <a:xfrm>
-            <a:off x="4754880" y="2108499"/>
-            <a:ext cx="1143000" cy="261411"/>
+            <a:off x="4754880" y="2086984"/>
+            <a:ext cx="1143000" cy="239896"/>
           </a:xfrm>
           <a:prstGeom prst="rect">
             <a:avLst/>
@@ -23057,8 +23116,8 @@
         </p:nvSpPr>
         <p:spPr>
           <a:xfrm>
-            <a:off x="658368" y="2369910"/>
-            <a:ext cx="310896" cy="261411"/>
+            <a:off x="658368" y="2326879"/>
+            <a:ext cx="310896" cy="239896"/>
           </a:xfrm>
           <a:prstGeom prst="rect">
             <a:avLst/>
@@ -23096,8 +23155,8 @@
         </p:nvSpPr>
         <p:spPr>
           <a:xfrm>
-            <a:off x="1014984" y="2369910"/>
-            <a:ext cx="1920240" cy="261411"/>
+            <a:off x="1014984" y="2326879"/>
+            <a:ext cx="1920240" cy="239896"/>
           </a:xfrm>
           <a:prstGeom prst="rect">
             <a:avLst/>
@@ -23135,8 +23194,8 @@
         </p:nvSpPr>
         <p:spPr>
           <a:xfrm>
-            <a:off x="3008376" y="2435262"/>
-            <a:ext cx="1339459" cy="130705"/>
+            <a:off x="3008376" y="2386853"/>
+            <a:ext cx="1339459" cy="119948"/>
           </a:xfrm>
           <a:prstGeom prst="rect">
             <a:avLst/>
@@ -23155,8 +23214,8 @@
         </p:nvSpPr>
         <p:spPr>
           <a:xfrm>
-            <a:off x="4754880" y="2369910"/>
-            <a:ext cx="1143000" cy="261411"/>
+            <a:off x="4754880" y="2326879"/>
+            <a:ext cx="1143000" cy="239896"/>
           </a:xfrm>
           <a:prstGeom prst="rect">
             <a:avLst/>
@@ -23194,8 +23253,8 @@
         </p:nvSpPr>
         <p:spPr>
           <a:xfrm>
-            <a:off x="658368" y="2631320"/>
-            <a:ext cx="310896" cy="261411"/>
+            <a:off x="658368" y="2566775"/>
+            <a:ext cx="310896" cy="239896"/>
           </a:xfrm>
           <a:prstGeom prst="rect">
             <a:avLst/>
@@ -23233,8 +23292,8 @@
         </p:nvSpPr>
         <p:spPr>
           <a:xfrm>
-            <a:off x="1014984" y="2631320"/>
-            <a:ext cx="1920240" cy="261411"/>
+            <a:off x="1014984" y="2566775"/>
+            <a:ext cx="1920240" cy="239896"/>
           </a:xfrm>
           <a:prstGeom prst="rect">
             <a:avLst/>
@@ -23272,8 +23331,8 @@
         </p:nvSpPr>
         <p:spPr>
           <a:xfrm>
-            <a:off x="3008376" y="2696673"/>
-            <a:ext cx="1310026" cy="130705"/>
+            <a:off x="3008376" y="2626748"/>
+            <a:ext cx="1310026" cy="119948"/>
           </a:xfrm>
           <a:prstGeom prst="rect">
             <a:avLst/>
@@ -23292,8 +23351,8 @@
         </p:nvSpPr>
         <p:spPr>
           <a:xfrm>
-            <a:off x="4754880" y="2631320"/>
-            <a:ext cx="1143000" cy="261411"/>
+            <a:off x="4754880" y="2566775"/>
+            <a:ext cx="1143000" cy="239896"/>
           </a:xfrm>
           <a:prstGeom prst="rect">
             <a:avLst/>
@@ -23331,8 +23390,8 @@
         </p:nvSpPr>
         <p:spPr>
           <a:xfrm>
-            <a:off x="658368" y="2892731"/>
-            <a:ext cx="310896" cy="261411"/>
+            <a:off x="658368" y="2806670"/>
+            <a:ext cx="310896" cy="239896"/>
           </a:xfrm>
           <a:prstGeom prst="rect">
             <a:avLst/>
@@ -23370,8 +23429,8 @@
         </p:nvSpPr>
         <p:spPr>
           <a:xfrm>
-            <a:off x="1014984" y="2892731"/>
-            <a:ext cx="1920240" cy="261411"/>
+            <a:off x="1014984" y="2806670"/>
+            <a:ext cx="1920240" cy="239896"/>
           </a:xfrm>
           <a:prstGeom prst="rect">
             <a:avLst/>
@@ -23409,8 +23468,8 @@
         </p:nvSpPr>
         <p:spPr>
           <a:xfrm>
-            <a:off x="3008376" y="2958084"/>
-            <a:ext cx="1076659" cy="130705"/>
+            <a:off x="3008376" y="2866644"/>
+            <a:ext cx="1076659" cy="119948"/>
           </a:xfrm>
           <a:prstGeom prst="rect">
             <a:avLst/>
@@ -23429,8 +23488,8 @@
         </p:nvSpPr>
         <p:spPr>
           <a:xfrm>
-            <a:off x="4754880" y="2892731"/>
-            <a:ext cx="1143000" cy="261411"/>
+            <a:off x="4754880" y="2806670"/>
+            <a:ext cx="1143000" cy="239896"/>
           </a:xfrm>
           <a:prstGeom prst="rect">
             <a:avLst/>
@@ -23468,8 +23527,8 @@
         </p:nvSpPr>
         <p:spPr>
           <a:xfrm>
-            <a:off x="658368" y="3154142"/>
-            <a:ext cx="310896" cy="261411"/>
+            <a:off x="658368" y="3046566"/>
+            <a:ext cx="310896" cy="239896"/>
           </a:xfrm>
           <a:prstGeom prst="rect">
             <a:avLst/>
@@ -23507,8 +23566,8 @@
         </p:nvSpPr>
         <p:spPr>
           <a:xfrm>
-            <a:off x="1014984" y="3154142"/>
-            <a:ext cx="1920240" cy="261411"/>
+            <a:off x="1014984" y="3046566"/>
+            <a:ext cx="1920240" cy="239896"/>
           </a:xfrm>
           <a:prstGeom prst="rect">
             <a:avLst/>
@@ -23546,8 +23605,8 @@
         </p:nvSpPr>
         <p:spPr>
           <a:xfrm>
-            <a:off x="3008376" y="3219495"/>
-            <a:ext cx="1069015" cy="130705"/>
+            <a:off x="3008376" y="3106540"/>
+            <a:ext cx="1069015" cy="119948"/>
           </a:xfrm>
           <a:prstGeom prst="rect">
             <a:avLst/>
@@ -23566,8 +23625,8 @@
         </p:nvSpPr>
         <p:spPr>
           <a:xfrm>
-            <a:off x="4754880" y="3154142"/>
-            <a:ext cx="1143000" cy="261411"/>
+            <a:off x="4754880" y="3046566"/>
+            <a:ext cx="1143000" cy="239896"/>
           </a:xfrm>
           <a:prstGeom prst="rect">
             <a:avLst/>
@@ -23605,8 +23664,8 @@
         </p:nvSpPr>
         <p:spPr>
           <a:xfrm>
-            <a:off x="658368" y="3415553"/>
-            <a:ext cx="310896" cy="261411"/>
+            <a:off x="658368" y="3286461"/>
+            <a:ext cx="310896" cy="239896"/>
           </a:xfrm>
           <a:prstGeom prst="rect">
             <a:avLst/>
@@ -23644,8 +23703,8 @@
         </p:nvSpPr>
         <p:spPr>
           <a:xfrm>
-            <a:off x="1014984" y="3415553"/>
-            <a:ext cx="1920240" cy="261411"/>
+            <a:off x="1014984" y="3286461"/>
+            <a:ext cx="1920240" cy="239896"/>
           </a:xfrm>
           <a:prstGeom prst="rect">
             <a:avLst/>
@@ -23683,8 +23742,8 @@
         </p:nvSpPr>
         <p:spPr>
           <a:xfrm>
-            <a:off x="3008376" y="3480906"/>
-            <a:ext cx="1026449" cy="130705"/>
+            <a:off x="3008376" y="3346435"/>
+            <a:ext cx="1026449" cy="119948"/>
           </a:xfrm>
           <a:prstGeom prst="rect">
             <a:avLst/>
@@ -23703,8 +23762,8 @@
         </p:nvSpPr>
         <p:spPr>
           <a:xfrm>
-            <a:off x="4754880" y="3415553"/>
-            <a:ext cx="1143000" cy="261411"/>
+            <a:off x="4754880" y="3286461"/>
+            <a:ext cx="1143000" cy="239896"/>
           </a:xfrm>
           <a:prstGeom prst="rect">
             <a:avLst/>
@@ -23742,8 +23801,8 @@
         </p:nvSpPr>
         <p:spPr>
           <a:xfrm>
-            <a:off x="658368" y="3676964"/>
-            <a:ext cx="310896" cy="261411"/>
+            <a:off x="658368" y="3526357"/>
+            <a:ext cx="310896" cy="239896"/>
           </a:xfrm>
           <a:prstGeom prst="rect">
             <a:avLst/>
@@ -23781,8 +23840,8 @@
         </p:nvSpPr>
         <p:spPr>
           <a:xfrm>
-            <a:off x="1014984" y="3676964"/>
-            <a:ext cx="1920240" cy="261411"/>
+            <a:off x="1014984" y="3526357"/>
+            <a:ext cx="1920240" cy="239896"/>
           </a:xfrm>
           <a:prstGeom prst="rect">
             <a:avLst/>
@@ -23820,8 +23879,8 @@
         </p:nvSpPr>
         <p:spPr>
           <a:xfrm>
-            <a:off x="3008376" y="3742316"/>
-            <a:ext cx="995062" cy="130705"/>
+            <a:off x="3008376" y="3586331"/>
+            <a:ext cx="995062" cy="119948"/>
           </a:xfrm>
           <a:prstGeom prst="rect">
             <a:avLst/>
@@ -23840,8 +23899,8 @@
         </p:nvSpPr>
         <p:spPr>
           <a:xfrm>
-            <a:off x="4754880" y="3676964"/>
-            <a:ext cx="1143000" cy="261411"/>
+            <a:off x="4754880" y="3526357"/>
+            <a:ext cx="1143000" cy="239896"/>
           </a:xfrm>
           <a:prstGeom prst="rect">
             <a:avLst/>
@@ -23879,8 +23938,8 @@
         </p:nvSpPr>
         <p:spPr>
           <a:xfrm>
-            <a:off x="658368" y="3938375"/>
-            <a:ext cx="310896" cy="261411"/>
+            <a:off x="658368" y="3766252"/>
+            <a:ext cx="310896" cy="239896"/>
           </a:xfrm>
           <a:prstGeom prst="rect">
             <a:avLst/>
@@ -23918,8 +23977,8 @@
         </p:nvSpPr>
         <p:spPr>
           <a:xfrm>
-            <a:off x="1014984" y="3938375"/>
-            <a:ext cx="1920240" cy="261411"/>
+            <a:off x="1014984" y="3766252"/>
+            <a:ext cx="1920240" cy="239896"/>
           </a:xfrm>
           <a:prstGeom prst="rect">
             <a:avLst/>
@@ -23957,8 +24016,8 @@
         </p:nvSpPr>
         <p:spPr>
           <a:xfrm>
-            <a:off x="3008376" y="4003727"/>
-            <a:ext cx="912206" cy="130705"/>
+            <a:off x="3008376" y="3826226"/>
+            <a:ext cx="912206" cy="119948"/>
           </a:xfrm>
           <a:prstGeom prst="rect">
             <a:avLst/>
@@ -23977,8 +24036,8 @@
         </p:nvSpPr>
         <p:spPr>
           <a:xfrm>
-            <a:off x="4754880" y="3938375"/>
-            <a:ext cx="1143000" cy="261411"/>
+            <a:off x="4754880" y="3766252"/>
+            <a:ext cx="1143000" cy="239896"/>
           </a:xfrm>
           <a:prstGeom prst="rect">
             <a:avLst/>
@@ -24016,8 +24075,8 @@
         </p:nvSpPr>
         <p:spPr>
           <a:xfrm>
-            <a:off x="658368" y="4199785"/>
-            <a:ext cx="310896" cy="261411"/>
+            <a:off x="658368" y="4006148"/>
+            <a:ext cx="310896" cy="239896"/>
           </a:xfrm>
           <a:prstGeom prst="rect">
             <a:avLst/>
@@ -24055,8 +24114,8 @@
         </p:nvSpPr>
         <p:spPr>
           <a:xfrm>
-            <a:off x="1014984" y="4199785"/>
-            <a:ext cx="1920240" cy="261411"/>
+            <a:off x="1014984" y="4006148"/>
+            <a:ext cx="1920240" cy="239896"/>
           </a:xfrm>
           <a:prstGeom prst="rect">
             <a:avLst/>
@@ -24094,8 +24153,8 @@
         </p:nvSpPr>
         <p:spPr>
           <a:xfrm>
-            <a:off x="3008376" y="4265138"/>
-            <a:ext cx="895065" cy="130705"/>
+            <a:off x="3008376" y="4066122"/>
+            <a:ext cx="895065" cy="119948"/>
           </a:xfrm>
           <a:prstGeom prst="rect">
             <a:avLst/>
@@ -24114,8 +24173,8 @@
         </p:nvSpPr>
         <p:spPr>
           <a:xfrm>
-            <a:off x="4754880" y="4199785"/>
-            <a:ext cx="1143000" cy="261411"/>
+            <a:off x="4754880" y="4006148"/>
+            <a:ext cx="1143000" cy="239896"/>
           </a:xfrm>
           <a:prstGeom prst="rect">
             <a:avLst/>
@@ -24153,8 +24212,8 @@
         </p:nvSpPr>
         <p:spPr>
           <a:xfrm>
-            <a:off x="658368" y="4461196"/>
-            <a:ext cx="310896" cy="261411"/>
+            <a:off x="658368" y="4246043"/>
+            <a:ext cx="310896" cy="239896"/>
           </a:xfrm>
           <a:prstGeom prst="rect">
             <a:avLst/>
@@ -24192,8 +24251,8 @@
         </p:nvSpPr>
         <p:spPr>
           <a:xfrm>
-            <a:off x="1014984" y="4461196"/>
-            <a:ext cx="1920240" cy="261411"/>
+            <a:off x="1014984" y="4246043"/>
+            <a:ext cx="1920240" cy="239896"/>
           </a:xfrm>
           <a:prstGeom prst="rect">
             <a:avLst/>
@@ -24231,8 +24290,8 @@
         </p:nvSpPr>
         <p:spPr>
           <a:xfrm>
-            <a:off x="3008376" y="4526549"/>
-            <a:ext cx="893702" cy="130705"/>
+            <a:off x="3008376" y="4306017"/>
+            <a:ext cx="893702" cy="119948"/>
           </a:xfrm>
           <a:prstGeom prst="rect">
             <a:avLst/>
@@ -24251,8 +24310,8 @@
         </p:nvSpPr>
         <p:spPr>
           <a:xfrm>
-            <a:off x="4754880" y="4461196"/>
-            <a:ext cx="1143000" cy="261411"/>
+            <a:off x="4754880" y="4246043"/>
+            <a:ext cx="1143000" cy="239896"/>
           </a:xfrm>
           <a:prstGeom prst="rect">
             <a:avLst/>
@@ -24290,8 +24349,8 @@
         </p:nvSpPr>
         <p:spPr>
           <a:xfrm>
-            <a:off x="658368" y="4722607"/>
-            <a:ext cx="310896" cy="261411"/>
+            <a:off x="658368" y="4485939"/>
+            <a:ext cx="310896" cy="239896"/>
           </a:xfrm>
           <a:prstGeom prst="rect">
             <a:avLst/>
@@ -24329,8 +24388,8 @@
         </p:nvSpPr>
         <p:spPr>
           <a:xfrm>
-            <a:off x="1014984" y="4722607"/>
-            <a:ext cx="1920240" cy="261411"/>
+            <a:off x="1014984" y="4485939"/>
+            <a:ext cx="1920240" cy="239896"/>
           </a:xfrm>
           <a:prstGeom prst="rect">
             <a:avLst/>
@@ -24368,8 +24427,8 @@
         </p:nvSpPr>
         <p:spPr>
           <a:xfrm>
-            <a:off x="3008376" y="4787960"/>
-            <a:ext cx="853471" cy="130705"/>
+            <a:off x="3008376" y="4545913"/>
+            <a:ext cx="853471" cy="119948"/>
           </a:xfrm>
           <a:prstGeom prst="rect">
             <a:avLst/>
@@ -24388,8 +24447,8 @@
         </p:nvSpPr>
         <p:spPr>
           <a:xfrm>
-            <a:off x="4754880" y="4722607"/>
-            <a:ext cx="1143000" cy="261411"/>
+            <a:off x="4754880" y="4485939"/>
+            <a:ext cx="1143000" cy="239896"/>
           </a:xfrm>
           <a:prstGeom prst="rect">
             <a:avLst/>
@@ -24427,8 +24486,8 @@
         </p:nvSpPr>
         <p:spPr>
           <a:xfrm>
-            <a:off x="658368" y="4984018"/>
-            <a:ext cx="310896" cy="261411"/>
+            <a:off x="658368" y="4725834"/>
+            <a:ext cx="310896" cy="239896"/>
           </a:xfrm>
           <a:prstGeom prst="rect">
             <a:avLst/>
@@ -24466,8 +24525,8 @@
         </p:nvSpPr>
         <p:spPr>
           <a:xfrm>
-            <a:off x="1014984" y="4984018"/>
-            <a:ext cx="1920240" cy="261411"/>
+            <a:off x="1014984" y="4725834"/>
+            <a:ext cx="1920240" cy="239896"/>
           </a:xfrm>
           <a:prstGeom prst="rect">
             <a:avLst/>
@@ -24505,8 +24564,8 @@
         </p:nvSpPr>
         <p:spPr>
           <a:xfrm>
-            <a:off x="3008376" y="5049371"/>
-            <a:ext cx="852824" cy="130705"/>
+            <a:off x="3008376" y="4785808"/>
+            <a:ext cx="852824" cy="119948"/>
           </a:xfrm>
           <a:prstGeom prst="rect">
             <a:avLst/>
@@ -24525,8 +24584,8 @@
         </p:nvSpPr>
         <p:spPr>
           <a:xfrm>
-            <a:off x="4754880" y="4984018"/>
-            <a:ext cx="1143000" cy="261411"/>
+            <a:off x="4754880" y="4725834"/>
+            <a:ext cx="1143000" cy="239896"/>
           </a:xfrm>
           <a:prstGeom prst="rect">
             <a:avLst/>
@@ -24564,8 +24623,8 @@
         </p:nvSpPr>
         <p:spPr>
           <a:xfrm>
-            <a:off x="658368" y="5245429"/>
-            <a:ext cx="310896" cy="261411"/>
+            <a:off x="658368" y="4965730"/>
+            <a:ext cx="310896" cy="239896"/>
           </a:xfrm>
           <a:prstGeom prst="rect">
             <a:avLst/>
@@ -24603,8 +24662,8 @@
         </p:nvSpPr>
         <p:spPr>
           <a:xfrm>
-            <a:off x="1014984" y="5245429"/>
-            <a:ext cx="1920240" cy="261411"/>
+            <a:off x="1014984" y="4965730"/>
+            <a:ext cx="1920240" cy="239896"/>
           </a:xfrm>
           <a:prstGeom prst="rect">
             <a:avLst/>
@@ -24642,8 +24701,8 @@
         </p:nvSpPr>
         <p:spPr>
           <a:xfrm>
-            <a:off x="3008376" y="5310781"/>
-            <a:ext cx="836304" cy="130705"/>
+            <a:off x="3008376" y="5025704"/>
+            <a:ext cx="836304" cy="119948"/>
           </a:xfrm>
           <a:prstGeom prst="rect">
             <a:avLst/>
@@ -24662,8 +24721,8 @@
         </p:nvSpPr>
         <p:spPr>
           <a:xfrm>
-            <a:off x="4754880" y="5245429"/>
-            <a:ext cx="1143000" cy="261411"/>
+            <a:off x="4754880" y="4965730"/>
+            <a:ext cx="1143000" cy="239896"/>
           </a:xfrm>
           <a:prstGeom prst="rect">
             <a:avLst/>
@@ -24701,8 +24760,8 @@
         </p:nvSpPr>
         <p:spPr>
           <a:xfrm>
-            <a:off x="658368" y="5506840"/>
-            <a:ext cx="310896" cy="261411"/>
+            <a:off x="658368" y="5205625"/>
+            <a:ext cx="310896" cy="239896"/>
           </a:xfrm>
           <a:prstGeom prst="rect">
             <a:avLst/>
@@ -24740,8 +24799,8 @@
         </p:nvSpPr>
         <p:spPr>
           <a:xfrm>
-            <a:off x="1014984" y="5506840"/>
-            <a:ext cx="1920240" cy="261411"/>
+            <a:off x="1014984" y="5205625"/>
+            <a:ext cx="1920240" cy="239896"/>
           </a:xfrm>
           <a:prstGeom prst="rect">
             <a:avLst/>
@@ -24779,8 +24838,8 @@
         </p:nvSpPr>
         <p:spPr>
           <a:xfrm>
-            <a:off x="3008376" y="5572192"/>
-            <a:ext cx="791605" cy="130705"/>
+            <a:off x="3008376" y="5265599"/>
+            <a:ext cx="791605" cy="119948"/>
           </a:xfrm>
           <a:prstGeom prst="rect">
             <a:avLst/>
@@ -24799,8 +24858,8 @@
         </p:nvSpPr>
         <p:spPr>
           <a:xfrm>
-            <a:off x="4754880" y="5506840"/>
-            <a:ext cx="1143000" cy="261411"/>
+            <a:off x="4754880" y="5205625"/>
+            <a:ext cx="1143000" cy="239896"/>
           </a:xfrm>
           <a:prstGeom prst="rect">
             <a:avLst/>
@@ -24838,8 +24897,8 @@
         </p:nvSpPr>
         <p:spPr>
           <a:xfrm>
-            <a:off x="658368" y="5768250"/>
-            <a:ext cx="310896" cy="261411"/>
+            <a:off x="658368" y="5445521"/>
+            <a:ext cx="310896" cy="239896"/>
           </a:xfrm>
           <a:prstGeom prst="rect">
             <a:avLst/>
@@ -24877,8 +24936,8 @@
         </p:nvSpPr>
         <p:spPr>
           <a:xfrm>
-            <a:off x="1014984" y="5768250"/>
-            <a:ext cx="1920240" cy="261411"/>
+            <a:off x="1014984" y="5445521"/>
+            <a:ext cx="1920240" cy="239896"/>
           </a:xfrm>
           <a:prstGeom prst="rect">
             <a:avLst/>
@@ -24916,8 +24975,8 @@
         </p:nvSpPr>
         <p:spPr>
           <a:xfrm>
-            <a:off x="3008376" y="5833603"/>
-            <a:ext cx="790712" cy="130705"/>
+            <a:off x="3008376" y="5505495"/>
+            <a:ext cx="790712" cy="119948"/>
           </a:xfrm>
           <a:prstGeom prst="rect">
             <a:avLst/>
@@ -24936,8 +24995,8 @@
         </p:nvSpPr>
         <p:spPr>
           <a:xfrm>
-            <a:off x="4754880" y="5768250"/>
-            <a:ext cx="1143000" cy="261411"/>
+            <a:off x="4754880" y="5445521"/>
+            <a:ext cx="1143000" cy="239896"/>
           </a:xfrm>
           <a:prstGeom prst="rect">
             <a:avLst/>
@@ -24975,8 +25034,8 @@
         </p:nvSpPr>
         <p:spPr>
           <a:xfrm>
-            <a:off x="658368" y="6029661"/>
-            <a:ext cx="310896" cy="261411"/>
+            <a:off x="658368" y="5685416"/>
+            <a:ext cx="310896" cy="239896"/>
           </a:xfrm>
           <a:prstGeom prst="rect">
             <a:avLst/>
@@ -25014,8 +25073,8 @@
         </p:nvSpPr>
         <p:spPr>
           <a:xfrm>
-            <a:off x="1014984" y="6029661"/>
-            <a:ext cx="1920240" cy="261411"/>
+            <a:off x="1014984" y="5685416"/>
+            <a:ext cx="1920240" cy="239896"/>
           </a:xfrm>
           <a:prstGeom prst="rect">
             <a:avLst/>
@@ -25053,8 +25112,8 @@
         </p:nvSpPr>
         <p:spPr>
           <a:xfrm>
-            <a:off x="3008376" y="6095014"/>
-            <a:ext cx="773020" cy="130705"/>
+            <a:off x="3008376" y="5745390"/>
+            <a:ext cx="773020" cy="119948"/>
           </a:xfrm>
           <a:prstGeom prst="rect">
             <a:avLst/>
@@ -25073,8 +25132,8 @@
         </p:nvSpPr>
         <p:spPr>
           <a:xfrm>
-            <a:off x="4754880" y="6029661"/>
-            <a:ext cx="1143000" cy="261411"/>
+            <a:off x="4754880" y="5685416"/>
+            <a:ext cx="1143000" cy="239896"/>
           </a:xfrm>
           <a:prstGeom prst="rect">
             <a:avLst/>
@@ -25113,7 +25172,7 @@
         <p:spPr>
           <a:xfrm>
             <a:off x="6208776" y="1847088"/>
-            <a:ext cx="310896" cy="261411"/>
+            <a:ext cx="310896" cy="239896"/>
           </a:xfrm>
           <a:prstGeom prst="rect">
             <a:avLst/>
@@ -25152,7 +25211,7 @@
         <p:spPr>
           <a:xfrm>
             <a:off x="6565392" y="1847088"/>
-            <a:ext cx="1920240" cy="261411"/>
+            <a:ext cx="1920240" cy="239896"/>
           </a:xfrm>
           <a:prstGeom prst="rect">
             <a:avLst/>
@@ -25190,8 +25249,8 @@
         </p:nvSpPr>
         <p:spPr>
           <a:xfrm>
-            <a:off x="8558784" y="1912441"/>
-            <a:ext cx="770247" cy="130705"/>
+            <a:off x="8558784" y="1907062"/>
+            <a:ext cx="770247" cy="119948"/>
           </a:xfrm>
           <a:prstGeom prst="rect">
             <a:avLst/>
@@ -25211,7 +25270,7 @@
         <p:spPr>
           <a:xfrm>
             <a:off x="10305288" y="1847088"/>
-            <a:ext cx="1143000" cy="261411"/>
+            <a:ext cx="1143000" cy="239896"/>
           </a:xfrm>
           <a:prstGeom prst="rect">
             <a:avLst/>
@@ -25249,8 +25308,8 @@
         </p:nvSpPr>
         <p:spPr>
           <a:xfrm>
-            <a:off x="6208776" y="2108499"/>
-            <a:ext cx="310896" cy="261411"/>
+            <a:off x="6208776" y="2086984"/>
+            <a:ext cx="310896" cy="239896"/>
           </a:xfrm>
           <a:prstGeom prst="rect">
             <a:avLst/>
@@ -25288,8 +25347,8 @@
         </p:nvSpPr>
         <p:spPr>
           <a:xfrm>
-            <a:off x="6565392" y="2108499"/>
-            <a:ext cx="1920240" cy="261411"/>
+            <a:off x="6565392" y="2086984"/>
+            <a:ext cx="1920240" cy="239896"/>
           </a:xfrm>
           <a:prstGeom prst="rect">
             <a:avLst/>
@@ -25327,8 +25386,8 @@
         </p:nvSpPr>
         <p:spPr>
           <a:xfrm>
-            <a:off x="8558784" y="2173852"/>
-            <a:ext cx="758672" cy="130705"/>
+            <a:off x="8558784" y="2146957"/>
+            <a:ext cx="758672" cy="119948"/>
           </a:xfrm>
           <a:prstGeom prst="rect">
             <a:avLst/>
@@ -25347,8 +25406,8 @@
         </p:nvSpPr>
         <p:spPr>
           <a:xfrm>
-            <a:off x="10305288" y="2108499"/>
-            <a:ext cx="1143000" cy="261411"/>
+            <a:off x="10305288" y="2086984"/>
+            <a:ext cx="1143000" cy="239896"/>
           </a:xfrm>
           <a:prstGeom prst="rect">
             <a:avLst/>
@@ -25386,8 +25445,8 @@
         </p:nvSpPr>
         <p:spPr>
           <a:xfrm>
-            <a:off x="6208776" y="2369910"/>
-            <a:ext cx="310896" cy="261411"/>
+            <a:off x="6208776" y="2326879"/>
+            <a:ext cx="310896" cy="239896"/>
           </a:xfrm>
           <a:prstGeom prst="rect">
             <a:avLst/>
@@ -25425,8 +25484,8 @@
         </p:nvSpPr>
         <p:spPr>
           <a:xfrm>
-            <a:off x="6565392" y="2369910"/>
-            <a:ext cx="1920240" cy="261411"/>
+            <a:off x="6565392" y="2326879"/>
+            <a:ext cx="1920240" cy="239896"/>
           </a:xfrm>
           <a:prstGeom prst="rect">
             <a:avLst/>
@@ -25464,8 +25523,8 @@
         </p:nvSpPr>
         <p:spPr>
           <a:xfrm>
-            <a:off x="8558784" y="2435262"/>
-            <a:ext cx="726142" cy="130705"/>
+            <a:off x="8558784" y="2386853"/>
+            <a:ext cx="726142" cy="119948"/>
           </a:xfrm>
           <a:prstGeom prst="rect">
             <a:avLst/>
@@ -25484,8 +25543,8 @@
         </p:nvSpPr>
         <p:spPr>
           <a:xfrm>
-            <a:off x="10305288" y="2369910"/>
-            <a:ext cx="1143000" cy="261411"/>
+            <a:off x="10305288" y="2326879"/>
+            <a:ext cx="1143000" cy="239896"/>
           </a:xfrm>
           <a:prstGeom prst="rect">
             <a:avLst/>
@@ -25523,8 +25582,8 @@
         </p:nvSpPr>
         <p:spPr>
           <a:xfrm>
-            <a:off x="6208776" y="2631320"/>
-            <a:ext cx="310896" cy="261411"/>
+            <a:off x="6208776" y="2566775"/>
+            <a:ext cx="310896" cy="239896"/>
           </a:xfrm>
           <a:prstGeom prst="rect">
             <a:avLst/>
@@ -25562,8 +25621,8 @@
         </p:nvSpPr>
         <p:spPr>
           <a:xfrm>
-            <a:off x="6565392" y="2631320"/>
-            <a:ext cx="1920240" cy="261411"/>
+            <a:off x="6565392" y="2566775"/>
+            <a:ext cx="1920240" cy="239896"/>
           </a:xfrm>
           <a:prstGeom prst="rect">
             <a:avLst/>
@@ -25601,8 +25660,8 @@
         </p:nvSpPr>
         <p:spPr>
           <a:xfrm>
-            <a:off x="8558784" y="2696673"/>
-            <a:ext cx="722110" cy="130705"/>
+            <a:off x="8558784" y="2626748"/>
+            <a:ext cx="722110" cy="119948"/>
           </a:xfrm>
           <a:prstGeom prst="rect">
             <a:avLst/>
@@ -25621,8 +25680,8 @@
         </p:nvSpPr>
         <p:spPr>
           <a:xfrm>
-            <a:off x="10305288" y="2631320"/>
-            <a:ext cx="1143000" cy="261411"/>
+            <a:off x="10305288" y="2566775"/>
+            <a:ext cx="1143000" cy="239896"/>
           </a:xfrm>
           <a:prstGeom prst="rect">
             <a:avLst/>
@@ -25660,8 +25719,8 @@
         </p:nvSpPr>
         <p:spPr>
           <a:xfrm>
-            <a:off x="6208776" y="2892731"/>
-            <a:ext cx="310896" cy="261411"/>
+            <a:off x="6208776" y="2806670"/>
+            <a:ext cx="310896" cy="239896"/>
           </a:xfrm>
           <a:prstGeom prst="rect">
             <a:avLst/>
@@ -25699,8 +25758,8 @@
         </p:nvSpPr>
         <p:spPr>
           <a:xfrm>
-            <a:off x="6565392" y="2892731"/>
-            <a:ext cx="1920240" cy="261411"/>
+            <a:off x="6565392" y="2806670"/>
+            <a:ext cx="1920240" cy="239896"/>
           </a:xfrm>
           <a:prstGeom prst="rect">
             <a:avLst/>
@@ -25738,8 +25797,8 @@
         </p:nvSpPr>
         <p:spPr>
           <a:xfrm>
-            <a:off x="8558784" y="2958084"/>
-            <a:ext cx="698534" cy="130705"/>
+            <a:off x="8558784" y="2866644"/>
+            <a:ext cx="698534" cy="119948"/>
           </a:xfrm>
           <a:prstGeom prst="rect">
             <a:avLst/>
@@ -25758,8 +25817,8 @@
         </p:nvSpPr>
         <p:spPr>
           <a:xfrm>
-            <a:off x="10305288" y="2892731"/>
-            <a:ext cx="1143000" cy="261411"/>
+            <a:off x="10305288" y="2806670"/>
+            <a:ext cx="1143000" cy="239896"/>
           </a:xfrm>
           <a:prstGeom prst="rect">
             <a:avLst/>
@@ -25797,8 +25856,8 @@
         </p:nvSpPr>
         <p:spPr>
           <a:xfrm>
-            <a:off x="6208776" y="3154142"/>
-            <a:ext cx="310896" cy="261411"/>
+            <a:off x="6208776" y="3046566"/>
+            <a:ext cx="310896" cy="239896"/>
           </a:xfrm>
           <a:prstGeom prst="rect">
             <a:avLst/>
@@ -25836,8 +25895,8 @@
         </p:nvSpPr>
         <p:spPr>
           <a:xfrm>
-            <a:off x="6565392" y="3154142"/>
-            <a:ext cx="1920240" cy="261411"/>
+            <a:off x="6565392" y="3046566"/>
+            <a:ext cx="1920240" cy="239896"/>
           </a:xfrm>
           <a:prstGeom prst="rect">
             <a:avLst/>
@@ -25875,8 +25934,8 @@
         </p:nvSpPr>
         <p:spPr>
           <a:xfrm>
-            <a:off x="8558784" y="3219495"/>
-            <a:ext cx="684930" cy="130705"/>
+            <a:off x="8558784" y="3106540"/>
+            <a:ext cx="684930" cy="119948"/>
           </a:xfrm>
           <a:prstGeom prst="rect">
             <a:avLst/>
@@ -25895,8 +25954,8 @@
         </p:nvSpPr>
         <p:spPr>
           <a:xfrm>
-            <a:off x="10305288" y="3154142"/>
-            <a:ext cx="1143000" cy="261411"/>
+            <a:off x="10305288" y="3046566"/>
+            <a:ext cx="1143000" cy="239896"/>
           </a:xfrm>
           <a:prstGeom prst="rect">
             <a:avLst/>
@@ -25934,8 +25993,8 @@
         </p:nvSpPr>
         <p:spPr>
           <a:xfrm>
-            <a:off x="6208776" y="3415553"/>
-            <a:ext cx="310896" cy="261411"/>
+            <a:off x="6208776" y="3286461"/>
+            <a:ext cx="310896" cy="239896"/>
           </a:xfrm>
           <a:prstGeom prst="rect">
             <a:avLst/>
@@ -25973,8 +26032,8 @@
         </p:nvSpPr>
         <p:spPr>
           <a:xfrm>
-            <a:off x="6565392" y="3415553"/>
-            <a:ext cx="1920240" cy="261411"/>
+            <a:off x="6565392" y="3286461"/>
+            <a:ext cx="1920240" cy="239896"/>
           </a:xfrm>
           <a:prstGeom prst="rect">
             <a:avLst/>
@@ -26012,8 +26071,8 @@
         </p:nvSpPr>
         <p:spPr>
           <a:xfrm>
-            <a:off x="8558784" y="3480906"/>
-            <a:ext cx="681795" cy="130705"/>
+            <a:off x="8558784" y="3346435"/>
+            <a:ext cx="681795" cy="119948"/>
           </a:xfrm>
           <a:prstGeom prst="rect">
             <a:avLst/>
@@ -26032,8 +26091,8 @@
         </p:nvSpPr>
         <p:spPr>
           <a:xfrm>
-            <a:off x="10305288" y="3415553"/>
-            <a:ext cx="1143000" cy="261411"/>
+            <a:off x="10305288" y="3286461"/>
+            <a:ext cx="1143000" cy="239896"/>
           </a:xfrm>
           <a:prstGeom prst="rect">
             <a:avLst/>
@@ -26071,8 +26130,8 @@
         </p:nvSpPr>
         <p:spPr>
           <a:xfrm>
-            <a:off x="6208776" y="3676964"/>
-            <a:ext cx="310896" cy="261411"/>
+            <a:off x="6208776" y="3526357"/>
+            <a:ext cx="310896" cy="239896"/>
           </a:xfrm>
           <a:prstGeom prst="rect">
             <a:avLst/>
@@ -26110,8 +26169,8 @@
         </p:nvSpPr>
         <p:spPr>
           <a:xfrm>
-            <a:off x="6565392" y="3676964"/>
-            <a:ext cx="1920240" cy="261411"/>
+            <a:off x="6565392" y="3526357"/>
+            <a:ext cx="1920240" cy="239896"/>
           </a:xfrm>
           <a:prstGeom prst="rect">
             <a:avLst/>
@@ -26149,8 +26208,8 @@
         </p:nvSpPr>
         <p:spPr>
           <a:xfrm>
-            <a:off x="8558784" y="3742316"/>
-            <a:ext cx="680768" cy="130705"/>
+            <a:off x="8558784" y="3586331"/>
+            <a:ext cx="680768" cy="119948"/>
           </a:xfrm>
           <a:prstGeom prst="rect">
             <a:avLst/>
@@ -26169,8 +26228,8 @@
         </p:nvSpPr>
         <p:spPr>
           <a:xfrm>
-            <a:off x="10305288" y="3676964"/>
-            <a:ext cx="1143000" cy="261411"/>
+            <a:off x="10305288" y="3526357"/>
+            <a:ext cx="1143000" cy="239896"/>
           </a:xfrm>
           <a:prstGeom prst="rect">
             <a:avLst/>
@@ -26208,8 +26267,8 @@
         </p:nvSpPr>
         <p:spPr>
           <a:xfrm>
-            <a:off x="6208776" y="3938375"/>
-            <a:ext cx="310896" cy="261411"/>
+            <a:off x="6208776" y="3766252"/>
+            <a:ext cx="310896" cy="239896"/>
           </a:xfrm>
           <a:prstGeom prst="rect">
             <a:avLst/>
@@ -26247,8 +26306,8 @@
         </p:nvSpPr>
         <p:spPr>
           <a:xfrm>
-            <a:off x="6565392" y="3938375"/>
-            <a:ext cx="1920240" cy="261411"/>
+            <a:off x="6565392" y="3766252"/>
+            <a:ext cx="1920240" cy="239896"/>
           </a:xfrm>
           <a:prstGeom prst="rect">
             <a:avLst/>
@@ -26286,8 +26345,8 @@
         </p:nvSpPr>
         <p:spPr>
           <a:xfrm>
-            <a:off x="8558784" y="4003727"/>
-            <a:ext cx="600097" cy="130705"/>
+            <a:off x="8558784" y="3826226"/>
+            <a:ext cx="600097" cy="119948"/>
           </a:xfrm>
           <a:prstGeom prst="rect">
             <a:avLst/>
@@ -26306,8 +26365,8 @@
         </p:nvSpPr>
         <p:spPr>
           <a:xfrm>
-            <a:off x="10305288" y="3938375"/>
-            <a:ext cx="1143000" cy="261411"/>
+            <a:off x="10305288" y="3766252"/>
+            <a:ext cx="1143000" cy="239896"/>
           </a:xfrm>
           <a:prstGeom prst="rect">
             <a:avLst/>
@@ -26345,8 +26404,8 @@
         </p:nvSpPr>
         <p:spPr>
           <a:xfrm>
-            <a:off x="6208776" y="4199785"/>
-            <a:ext cx="310896" cy="261411"/>
+            <a:off x="6208776" y="4006148"/>
+            <a:ext cx="310896" cy="239896"/>
           </a:xfrm>
           <a:prstGeom prst="rect">
             <a:avLst/>
@@ -26384,8 +26443,8 @@
         </p:nvSpPr>
         <p:spPr>
           <a:xfrm>
-            <a:off x="6565392" y="4199785"/>
-            <a:ext cx="1920240" cy="261411"/>
+            <a:off x="6565392" y="4006148"/>
+            <a:ext cx="1920240" cy="239896"/>
           </a:xfrm>
           <a:prstGeom prst="rect">
             <a:avLst/>
@@ -26423,8 +26482,8 @@
         </p:nvSpPr>
         <p:spPr>
           <a:xfrm>
-            <a:off x="8558784" y="4265138"/>
-            <a:ext cx="597592" cy="130705"/>
+            <a:off x="8558784" y="4066122"/>
+            <a:ext cx="597592" cy="119948"/>
           </a:xfrm>
           <a:prstGeom prst="rect">
             <a:avLst/>
@@ -26443,8 +26502,8 @@
         </p:nvSpPr>
         <p:spPr>
           <a:xfrm>
-            <a:off x="10305288" y="4199785"/>
-            <a:ext cx="1143000" cy="261411"/>
+            <a:off x="10305288" y="4006148"/>
+            <a:ext cx="1143000" cy="239896"/>
           </a:xfrm>
           <a:prstGeom prst="rect">
             <a:avLst/>
@@ -26482,8 +26541,8 @@
         </p:nvSpPr>
         <p:spPr>
           <a:xfrm>
-            <a:off x="6208776" y="4461196"/>
-            <a:ext cx="310896" cy="261411"/>
+            <a:off x="6208776" y="4246043"/>
+            <a:ext cx="310896" cy="239896"/>
           </a:xfrm>
           <a:prstGeom prst="rect">
             <a:avLst/>
@@ -26521,8 +26580,8 @@
         </p:nvSpPr>
         <p:spPr>
           <a:xfrm>
-            <a:off x="6565392" y="4461196"/>
-            <a:ext cx="1920240" cy="261411"/>
+            <a:off x="6565392" y="4246043"/>
+            <a:ext cx="1920240" cy="239896"/>
           </a:xfrm>
           <a:prstGeom prst="rect">
             <a:avLst/>
@@ -26560,8 +26619,8 @@
         </p:nvSpPr>
         <p:spPr>
           <a:xfrm>
-            <a:off x="8558784" y="4526549"/>
-            <a:ext cx="518858" cy="130705"/>
+            <a:off x="8558784" y="4306017"/>
+            <a:ext cx="518858" cy="119948"/>
           </a:xfrm>
           <a:prstGeom prst="rect">
             <a:avLst/>
@@ -26580,8 +26639,8 @@
         </p:nvSpPr>
         <p:spPr>
           <a:xfrm>
-            <a:off x="10305288" y="4461196"/>
-            <a:ext cx="1143000" cy="261411"/>
+            <a:off x="10305288" y="4246043"/>
+            <a:ext cx="1143000" cy="239896"/>
           </a:xfrm>
           <a:prstGeom prst="rect">
             <a:avLst/>
@@ -26619,8 +26678,8 @@
         </p:nvSpPr>
         <p:spPr>
           <a:xfrm>
-            <a:off x="6208776" y="4722607"/>
-            <a:ext cx="310896" cy="261411"/>
+            <a:off x="6208776" y="4485939"/>
+            <a:ext cx="310896" cy="239896"/>
           </a:xfrm>
           <a:prstGeom prst="rect">
             <a:avLst/>
@@ -26658,8 +26717,8 @@
         </p:nvSpPr>
         <p:spPr>
           <a:xfrm>
-            <a:off x="6565392" y="4722607"/>
-            <a:ext cx="1920240" cy="261411"/>
+            <a:off x="6565392" y="4485939"/>
+            <a:ext cx="1920240" cy="239896"/>
           </a:xfrm>
           <a:prstGeom prst="rect">
             <a:avLst/>
@@ -26697,8 +26756,8 @@
         </p:nvSpPr>
         <p:spPr>
           <a:xfrm>
-            <a:off x="8558784" y="4787960"/>
-            <a:ext cx="491810" cy="130705"/>
+            <a:off x="8558784" y="4545913"/>
+            <a:ext cx="491810" cy="119948"/>
           </a:xfrm>
           <a:prstGeom prst="rect">
             <a:avLst/>
@@ -26717,8 +26776,8 @@
         </p:nvSpPr>
         <p:spPr>
           <a:xfrm>
-            <a:off x="10305288" y="4722607"/>
-            <a:ext cx="1143000" cy="261411"/>
+            <a:off x="10305288" y="4485939"/>
+            <a:ext cx="1143000" cy="239896"/>
           </a:xfrm>
           <a:prstGeom prst="rect">
             <a:avLst/>
@@ -26756,8 +26815,8 @@
         </p:nvSpPr>
         <p:spPr>
           <a:xfrm>
-            <a:off x="6208776" y="4984018"/>
-            <a:ext cx="310896" cy="261411"/>
+            <a:off x="6208776" y="4725834"/>
+            <a:ext cx="310896" cy="239896"/>
           </a:xfrm>
           <a:prstGeom prst="rect">
             <a:avLst/>
@@ -26795,8 +26854,8 @@
         </p:nvSpPr>
         <p:spPr>
           <a:xfrm>
-            <a:off x="6565392" y="4984018"/>
-            <a:ext cx="1920240" cy="261411"/>
+            <a:off x="6565392" y="4725834"/>
+            <a:ext cx="1920240" cy="239896"/>
           </a:xfrm>
           <a:prstGeom prst="rect">
             <a:avLst/>
@@ -26834,8 +26893,8 @@
         </p:nvSpPr>
         <p:spPr>
           <a:xfrm>
-            <a:off x="8558784" y="5049371"/>
-            <a:ext cx="459272" cy="130705"/>
+            <a:off x="8558784" y="4785808"/>
+            <a:ext cx="459272" cy="119948"/>
           </a:xfrm>
           <a:prstGeom prst="rect">
             <a:avLst/>
@@ -26854,8 +26913,8 @@
         </p:nvSpPr>
         <p:spPr>
           <a:xfrm>
-            <a:off x="10305288" y="4984018"/>
-            <a:ext cx="1143000" cy="261411"/>
+            <a:off x="10305288" y="4725834"/>
+            <a:ext cx="1143000" cy="239896"/>
           </a:xfrm>
           <a:prstGeom prst="rect">
             <a:avLst/>
@@ -26893,8 +26952,8 @@
         </p:nvSpPr>
         <p:spPr>
           <a:xfrm>
-            <a:off x="6208776" y="5245429"/>
-            <a:ext cx="310896" cy="261411"/>
+            <a:off x="6208776" y="4965730"/>
+            <a:ext cx="310896" cy="239896"/>
           </a:xfrm>
           <a:prstGeom prst="rect">
             <a:avLst/>
@@ -26932,8 +26991,8 @@
         </p:nvSpPr>
         <p:spPr>
           <a:xfrm>
-            <a:off x="6565392" y="5245429"/>
-            <a:ext cx="1920240" cy="261411"/>
+            <a:off x="6565392" y="4965730"/>
+            <a:ext cx="1920240" cy="239896"/>
           </a:xfrm>
           <a:prstGeom prst="rect">
             <a:avLst/>
@@ -26971,8 +27030,8 @@
         </p:nvSpPr>
         <p:spPr>
           <a:xfrm>
-            <a:off x="8558784" y="5310781"/>
-            <a:ext cx="345940" cy="130705"/>
+            <a:off x="8558784" y="5025704"/>
+            <a:ext cx="345940" cy="119948"/>
           </a:xfrm>
           <a:prstGeom prst="rect">
             <a:avLst/>
@@ -26991,8 +27050,8 @@
         </p:nvSpPr>
         <p:spPr>
           <a:xfrm>
-            <a:off x="10305288" y="5245429"/>
-            <a:ext cx="1143000" cy="261411"/>
+            <a:off x="10305288" y="4965730"/>
+            <a:ext cx="1143000" cy="239896"/>
           </a:xfrm>
           <a:prstGeom prst="rect">
             <a:avLst/>
@@ -27030,8 +27089,8 @@
         </p:nvSpPr>
         <p:spPr>
           <a:xfrm>
-            <a:off x="6208776" y="5506840"/>
-            <a:ext cx="310896" cy="261411"/>
+            <a:off x="6208776" y="5205625"/>
+            <a:ext cx="310896" cy="239896"/>
           </a:xfrm>
           <a:prstGeom prst="rect">
             <a:avLst/>
@@ -27069,8 +27128,8 @@
         </p:nvSpPr>
         <p:spPr>
           <a:xfrm>
-            <a:off x="6565392" y="5506840"/>
-            <a:ext cx="1920240" cy="261411"/>
+            <a:off x="6565392" y="5205625"/>
+            <a:ext cx="1920240" cy="239896"/>
           </a:xfrm>
           <a:prstGeom prst="rect">
             <a:avLst/>
@@ -27108,8 +27167,8 @@
         </p:nvSpPr>
         <p:spPr>
           <a:xfrm>
-            <a:off x="8558784" y="5572192"/>
-            <a:ext cx="261424" cy="130705"/>
+            <a:off x="8558784" y="5265599"/>
+            <a:ext cx="261424" cy="119948"/>
           </a:xfrm>
           <a:prstGeom prst="rect">
             <a:avLst/>
@@ -27128,8 +27187,8 @@
         </p:nvSpPr>
         <p:spPr>
           <a:xfrm>
-            <a:off x="10305288" y="5506840"/>
-            <a:ext cx="1143000" cy="261411"/>
+            <a:off x="10305288" y="5205625"/>
+            <a:ext cx="1143000" cy="239896"/>
           </a:xfrm>
           <a:prstGeom prst="rect">
             <a:avLst/>
@@ -27167,8 +27226,8 @@
         </p:nvSpPr>
         <p:spPr>
           <a:xfrm>
-            <a:off x="6208776" y="5768250"/>
-            <a:ext cx="310896" cy="261411"/>
+            <a:off x="6208776" y="5445521"/>
+            <a:ext cx="310896" cy="239896"/>
           </a:xfrm>
           <a:prstGeom prst="rect">
             <a:avLst/>
@@ -27206,8 +27265,8 @@
         </p:nvSpPr>
         <p:spPr>
           <a:xfrm>
-            <a:off x="6565392" y="5768250"/>
-            <a:ext cx="1920240" cy="261411"/>
+            <a:off x="6565392" y="5445521"/>
+            <a:ext cx="1920240" cy="239896"/>
           </a:xfrm>
           <a:prstGeom prst="rect">
             <a:avLst/>
@@ -27245,8 +27304,8 @@
         </p:nvSpPr>
         <p:spPr>
           <a:xfrm>
-            <a:off x="8558784" y="5833603"/>
-            <a:ext cx="259273" cy="130705"/>
+            <a:off x="8558784" y="5505495"/>
+            <a:ext cx="259273" cy="119948"/>
           </a:xfrm>
           <a:prstGeom prst="rect">
             <a:avLst/>
@@ -27265,8 +27324,8 @@
         </p:nvSpPr>
         <p:spPr>
           <a:xfrm>
-            <a:off x="10305288" y="5768250"/>
-            <a:ext cx="1143000" cy="261411"/>
+            <a:off x="10305288" y="5445521"/>
+            <a:ext cx="1143000" cy="239896"/>
           </a:xfrm>
           <a:prstGeom prst="rect">
             <a:avLst/>
@@ -27305,7 +27364,7 @@
         <p:spPr>
           <a:xfrm>
             <a:off x="3923086" y="1847088"/>
-            <a:ext cx="14630" cy="4443984"/>
+            <a:ext cx="14630" cy="4078224"/>
           </a:xfrm>
           <a:prstGeom prst="rect">
             <a:avLst/>
@@ -27325,7 +27384,7 @@
         <p:spPr>
           <a:xfrm>
             <a:off x="9473494" y="1847088"/>
-            <a:ext cx="14630" cy="4443984"/>
+            <a:ext cx="14630" cy="4078224"/>
           </a:xfrm>
           <a:prstGeom prst="rect">
             <a:avLst/>
@@ -27345,7 +27404,7 @@
         <p:spPr>
           <a:xfrm>
             <a:off x="6085332" y="1847088"/>
-            <a:ext cx="10973" cy="4443984"/>
+            <a:ext cx="10973" cy="4078224"/>
           </a:xfrm>
           <a:prstGeom prst="rect">
             <a:avLst/>
@@ -27355,6 +27414,65 @@
           </a:solidFill>
           <a:ln/>
         </p:spPr>
+      </p:sp>
+      <p:sp>
+        <p:nvSpPr>
+          <p:cNvPr id="147" name="Shape 144"/>
+          <p:cNvSpPr/>
+          <p:nvPr/>
+        </p:nvSpPr>
+        <p:spPr>
+          <a:xfrm>
+            <a:off x="457200" y="6126480"/>
+            <a:ext cx="11274552" cy="371856"/>
+          </a:xfrm>
+          <a:prstGeom prst="rect">
+            <a:avLst/>
+          </a:prstGeom>
+          <a:solidFill>
+            <a:srgbClr val="EDF4FA"/>
+          </a:solidFill>
+          <a:ln/>
+        </p:spPr>
+      </p:sp>
+      <p:sp>
+        <p:nvSpPr>
+          <p:cNvPr id="148" name="Text 145"/>
+          <p:cNvSpPr txBox="1"/>
+          <p:nvPr/>
+        </p:nvSpPr>
+        <p:spPr>
+          <a:xfrm>
+            <a:off x="658368" y="6144768"/>
+            <a:ext cx="10927080" cy="335280"/>
+          </a:xfrm>
+          <a:prstGeom prst="rect">
+            <a:avLst/>
+          </a:prstGeom>
+          <a:noFill/>
+          <a:ln/>
+        </p:spPr>
+        <p:txBody>
+          <a:bodyPr wrap="square" lIns="0" tIns="0" rIns="0" bIns="0" rtlCol="0" anchor="ctr"/>
+          <a:lstStyle/>
+          <a:p>
+            <a:pPr indent="0" marL="0">
+              <a:buNone/>
+            </a:pPr>
+            <a:r>
+              <a:rPr lang="en-US" sz="1600" b="1" dirty="0">
+                <a:solidFill>
+                  <a:srgbClr val="0B2C4A"/>
+                </a:solidFill>
+                <a:latin typeface="Inter" pitchFamily="34" charset="0"/>
+                <a:ea typeface="Inter" pitchFamily="34" charset="-122"/>
+                <a:cs typeface="Inter" pitchFamily="34" charset="-120"/>
+              </a:rPr>
+              <a:t>8 of 33 stores at or above 15%. The group sits at 13.2%.</a:t>
+            </a:r>
+            <a:endParaRPr lang="en-US" sz="1600" dirty="0"/>
+          </a:p>
+        </p:txBody>
       </p:sp>
     </p:spTree>
   </p:cSld>
@@ -31547,7 +31665,7 @@
         <p:spPr>
           <a:xfrm>
             <a:off x="457200" y="1207008"/>
-            <a:ext cx="11274552" cy="5148072"/>
+            <a:ext cx="11274552" cy="4782312"/>
           </a:xfrm>
           <a:prstGeom prst="rect">
             <a:avLst/>
@@ -31724,7 +31842,7 @@
         <p:spPr>
           <a:xfrm>
             <a:off x="658368" y="1847088"/>
-            <a:ext cx="310896" cy="261411"/>
+            <a:ext cx="310896" cy="239896"/>
           </a:xfrm>
           <a:prstGeom prst="rect">
             <a:avLst/>
@@ -31763,7 +31881,7 @@
         <p:spPr>
           <a:xfrm>
             <a:off x="1014984" y="1847088"/>
-            <a:ext cx="1920240" cy="261411"/>
+            <a:ext cx="1920240" cy="239896"/>
           </a:xfrm>
           <a:prstGeom prst="rect">
             <a:avLst/>
@@ -31801,8 +31919,8 @@
         </p:nvSpPr>
         <p:spPr>
           <a:xfrm>
-            <a:off x="3008376" y="1912441"/>
-            <a:ext cx="1691640" cy="130705"/>
+            <a:off x="3008376" y="1907062"/>
+            <a:ext cx="1691640" cy="119948"/>
           </a:xfrm>
           <a:prstGeom prst="rect">
             <a:avLst/>
@@ -31822,7 +31940,7 @@
         <p:spPr>
           <a:xfrm>
             <a:off x="4754880" y="1847088"/>
-            <a:ext cx="1143000" cy="261411"/>
+            <a:ext cx="1143000" cy="239896"/>
           </a:xfrm>
           <a:prstGeom prst="rect">
             <a:avLst/>
@@ -31860,8 +31978,8 @@
         </p:nvSpPr>
         <p:spPr>
           <a:xfrm>
-            <a:off x="658368" y="2108499"/>
-            <a:ext cx="310896" cy="261411"/>
+            <a:off x="658368" y="2086984"/>
+            <a:ext cx="310896" cy="239896"/>
           </a:xfrm>
           <a:prstGeom prst="rect">
             <a:avLst/>
@@ -31899,8 +32017,8 @@
         </p:nvSpPr>
         <p:spPr>
           <a:xfrm>
-            <a:off x="1014984" y="2108499"/>
-            <a:ext cx="1920240" cy="261411"/>
+            <a:off x="1014984" y="2086984"/>
+            <a:ext cx="1920240" cy="239896"/>
           </a:xfrm>
           <a:prstGeom prst="rect">
             <a:avLst/>
@@ -31938,8 +32056,8 @@
         </p:nvSpPr>
         <p:spPr>
           <a:xfrm>
-            <a:off x="3008376" y="2173852"/>
-            <a:ext cx="1153473" cy="130705"/>
+            <a:off x="3008376" y="2146957"/>
+            <a:ext cx="1153473" cy="119948"/>
           </a:xfrm>
           <a:prstGeom prst="rect">
             <a:avLst/>
@@ -31958,8 +32076,8 @@
         </p:nvSpPr>
         <p:spPr>
           <a:xfrm>
-            <a:off x="4754880" y="2108499"/>
-            <a:ext cx="1143000" cy="261411"/>
+            <a:off x="4754880" y="2086984"/>
+            <a:ext cx="1143000" cy="239896"/>
           </a:xfrm>
           <a:prstGeom prst="rect">
             <a:avLst/>
@@ -31997,8 +32115,8 @@
         </p:nvSpPr>
         <p:spPr>
           <a:xfrm>
-            <a:off x="658368" y="2369910"/>
-            <a:ext cx="310896" cy="261411"/>
+            <a:off x="658368" y="2326879"/>
+            <a:ext cx="310896" cy="239896"/>
           </a:xfrm>
           <a:prstGeom prst="rect">
             <a:avLst/>
@@ -32036,8 +32154,8 @@
         </p:nvSpPr>
         <p:spPr>
           <a:xfrm>
-            <a:off x="1014984" y="2369910"/>
-            <a:ext cx="1920240" cy="261411"/>
+            <a:off x="1014984" y="2326879"/>
+            <a:ext cx="1920240" cy="239896"/>
           </a:xfrm>
           <a:prstGeom prst="rect">
             <a:avLst/>
@@ -32075,8 +32193,8 @@
         </p:nvSpPr>
         <p:spPr>
           <a:xfrm>
-            <a:off x="3008376" y="2435262"/>
-            <a:ext cx="1064356" cy="130705"/>
+            <a:off x="3008376" y="2386853"/>
+            <a:ext cx="1064356" cy="119948"/>
           </a:xfrm>
           <a:prstGeom prst="rect">
             <a:avLst/>
@@ -32095,8 +32213,8 @@
         </p:nvSpPr>
         <p:spPr>
           <a:xfrm>
-            <a:off x="4754880" y="2369910"/>
-            <a:ext cx="1143000" cy="261411"/>
+            <a:off x="4754880" y="2326879"/>
+            <a:ext cx="1143000" cy="239896"/>
           </a:xfrm>
           <a:prstGeom prst="rect">
             <a:avLst/>
@@ -32134,8 +32252,8 @@
         </p:nvSpPr>
         <p:spPr>
           <a:xfrm>
-            <a:off x="658368" y="2631320"/>
-            <a:ext cx="310896" cy="261411"/>
+            <a:off x="658368" y="2566775"/>
+            <a:ext cx="310896" cy="239896"/>
           </a:xfrm>
           <a:prstGeom prst="rect">
             <a:avLst/>
@@ -32173,8 +32291,8 @@
         </p:nvSpPr>
         <p:spPr>
           <a:xfrm>
-            <a:off x="1014984" y="2631320"/>
-            <a:ext cx="1920240" cy="261411"/>
+            <a:off x="1014984" y="2566775"/>
+            <a:ext cx="1920240" cy="239896"/>
           </a:xfrm>
           <a:prstGeom prst="rect">
             <a:avLst/>
@@ -32212,8 +32330,8 @@
         </p:nvSpPr>
         <p:spPr>
           <a:xfrm>
-            <a:off x="3008376" y="2696673"/>
-            <a:ext cx="1062417" cy="130705"/>
+            <a:off x="3008376" y="2626748"/>
+            <a:ext cx="1062417" cy="119948"/>
           </a:xfrm>
           <a:prstGeom prst="rect">
             <a:avLst/>
@@ -32232,8 +32350,8 @@
         </p:nvSpPr>
         <p:spPr>
           <a:xfrm>
-            <a:off x="4754880" y="2631320"/>
-            <a:ext cx="1143000" cy="261411"/>
+            <a:off x="4754880" y="2566775"/>
+            <a:ext cx="1143000" cy="239896"/>
           </a:xfrm>
           <a:prstGeom prst="rect">
             <a:avLst/>
@@ -32271,8 +32389,8 @@
         </p:nvSpPr>
         <p:spPr>
           <a:xfrm>
-            <a:off x="658368" y="2892731"/>
-            <a:ext cx="310896" cy="261411"/>
+            <a:off x="658368" y="2806670"/>
+            <a:ext cx="310896" cy="239896"/>
           </a:xfrm>
           <a:prstGeom prst="rect">
             <a:avLst/>
@@ -32310,8 +32428,8 @@
         </p:nvSpPr>
         <p:spPr>
           <a:xfrm>
-            <a:off x="1014984" y="2892731"/>
-            <a:ext cx="1920240" cy="261411"/>
+            <a:off x="1014984" y="2806670"/>
+            <a:ext cx="1920240" cy="239896"/>
           </a:xfrm>
           <a:prstGeom prst="rect">
             <a:avLst/>
@@ -32349,8 +32467,8 @@
         </p:nvSpPr>
         <p:spPr>
           <a:xfrm>
-            <a:off x="3008376" y="2958084"/>
-            <a:ext cx="938723" cy="130705"/>
+            <a:off x="3008376" y="2866644"/>
+            <a:ext cx="938723" cy="119948"/>
           </a:xfrm>
           <a:prstGeom prst="rect">
             <a:avLst/>
@@ -32369,8 +32487,8 @@
         </p:nvSpPr>
         <p:spPr>
           <a:xfrm>
-            <a:off x="4754880" y="2892731"/>
-            <a:ext cx="1143000" cy="261411"/>
+            <a:off x="4754880" y="2806670"/>
+            <a:ext cx="1143000" cy="239896"/>
           </a:xfrm>
           <a:prstGeom prst="rect">
             <a:avLst/>
@@ -32408,8 +32526,8 @@
         </p:nvSpPr>
         <p:spPr>
           <a:xfrm>
-            <a:off x="658368" y="3154142"/>
-            <a:ext cx="310896" cy="261411"/>
+            <a:off x="658368" y="3046566"/>
+            <a:ext cx="310896" cy="239896"/>
           </a:xfrm>
           <a:prstGeom prst="rect">
             <a:avLst/>
@@ -32447,8 +32565,8 @@
         </p:nvSpPr>
         <p:spPr>
           <a:xfrm>
-            <a:off x="1014984" y="3154142"/>
-            <a:ext cx="1920240" cy="261411"/>
+            <a:off x="1014984" y="3046566"/>
+            <a:ext cx="1920240" cy="239896"/>
           </a:xfrm>
           <a:prstGeom prst="rect">
             <a:avLst/>
@@ -32486,8 +32604,8 @@
         </p:nvSpPr>
         <p:spPr>
           <a:xfrm>
-            <a:off x="3008376" y="3219495"/>
-            <a:ext cx="883929" cy="130705"/>
+            <a:off x="3008376" y="3106540"/>
+            <a:ext cx="883929" cy="119948"/>
           </a:xfrm>
           <a:prstGeom prst="rect">
             <a:avLst/>
@@ -32506,8 +32624,8 @@
         </p:nvSpPr>
         <p:spPr>
           <a:xfrm>
-            <a:off x="4754880" y="3154142"/>
-            <a:ext cx="1143000" cy="261411"/>
+            <a:off x="4754880" y="3046566"/>
+            <a:ext cx="1143000" cy="239896"/>
           </a:xfrm>
           <a:prstGeom prst="rect">
             <a:avLst/>
@@ -32545,8 +32663,8 @@
         </p:nvSpPr>
         <p:spPr>
           <a:xfrm>
-            <a:off x="658368" y="3415553"/>
-            <a:ext cx="310896" cy="261411"/>
+            <a:off x="658368" y="3286461"/>
+            <a:ext cx="310896" cy="239896"/>
           </a:xfrm>
           <a:prstGeom prst="rect">
             <a:avLst/>
@@ -32584,8 +32702,8 @@
         </p:nvSpPr>
         <p:spPr>
           <a:xfrm>
-            <a:off x="1014984" y="3415553"/>
-            <a:ext cx="1920240" cy="261411"/>
+            <a:off x="1014984" y="3286461"/>
+            <a:ext cx="1920240" cy="239896"/>
           </a:xfrm>
           <a:prstGeom prst="rect">
             <a:avLst/>
@@ -32623,8 +32741,8 @@
         </p:nvSpPr>
         <p:spPr>
           <a:xfrm>
-            <a:off x="3008376" y="3480906"/>
-            <a:ext cx="847705" cy="130705"/>
+            <a:off x="3008376" y="3346435"/>
+            <a:ext cx="847705" cy="119948"/>
           </a:xfrm>
           <a:prstGeom prst="rect">
             <a:avLst/>
@@ -32643,8 +32761,8 @@
         </p:nvSpPr>
         <p:spPr>
           <a:xfrm>
-            <a:off x="4754880" y="3415553"/>
-            <a:ext cx="1143000" cy="261411"/>
+            <a:off x="4754880" y="3286461"/>
+            <a:ext cx="1143000" cy="239896"/>
           </a:xfrm>
           <a:prstGeom prst="rect">
             <a:avLst/>
@@ -32682,8 +32800,8 @@
         </p:nvSpPr>
         <p:spPr>
           <a:xfrm>
-            <a:off x="658368" y="3676964"/>
-            <a:ext cx="310896" cy="261411"/>
+            <a:off x="658368" y="3526357"/>
+            <a:ext cx="310896" cy="239896"/>
           </a:xfrm>
           <a:prstGeom prst="rect">
             <a:avLst/>
@@ -32721,8 +32839,8 @@
         </p:nvSpPr>
         <p:spPr>
           <a:xfrm>
-            <a:off x="1014984" y="3676964"/>
-            <a:ext cx="1920240" cy="261411"/>
+            <a:off x="1014984" y="3526357"/>
+            <a:ext cx="1920240" cy="239896"/>
           </a:xfrm>
           <a:prstGeom prst="rect">
             <a:avLst/>
@@ -32760,8 +32878,8 @@
         </p:nvSpPr>
         <p:spPr>
           <a:xfrm>
-            <a:off x="3008376" y="3742316"/>
-            <a:ext cx="826302" cy="130705"/>
+            <a:off x="3008376" y="3586331"/>
+            <a:ext cx="826302" cy="119948"/>
           </a:xfrm>
           <a:prstGeom prst="rect">
             <a:avLst/>
@@ -32780,8 +32898,8 @@
         </p:nvSpPr>
         <p:spPr>
           <a:xfrm>
-            <a:off x="4754880" y="3676964"/>
-            <a:ext cx="1143000" cy="261411"/>
+            <a:off x="4754880" y="3526357"/>
+            <a:ext cx="1143000" cy="239896"/>
           </a:xfrm>
           <a:prstGeom prst="rect">
             <a:avLst/>
@@ -32819,8 +32937,8 @@
         </p:nvSpPr>
         <p:spPr>
           <a:xfrm>
-            <a:off x="658368" y="3938375"/>
-            <a:ext cx="310896" cy="261411"/>
+            <a:off x="658368" y="3766252"/>
+            <a:ext cx="310896" cy="239896"/>
           </a:xfrm>
           <a:prstGeom prst="rect">
             <a:avLst/>
@@ -32858,8 +32976,8 @@
         </p:nvSpPr>
         <p:spPr>
           <a:xfrm>
-            <a:off x="1014984" y="3938375"/>
-            <a:ext cx="1920240" cy="261411"/>
+            <a:off x="1014984" y="3766252"/>
+            <a:ext cx="1920240" cy="239896"/>
           </a:xfrm>
           <a:prstGeom prst="rect">
             <a:avLst/>
@@ -32897,8 +33015,8 @@
         </p:nvSpPr>
         <p:spPr>
           <a:xfrm>
-            <a:off x="3008376" y="4003727"/>
-            <a:ext cx="752231" cy="130705"/>
+            <a:off x="3008376" y="3826226"/>
+            <a:ext cx="752231" cy="119948"/>
           </a:xfrm>
           <a:prstGeom prst="rect">
             <a:avLst/>
@@ -32917,8 +33035,8 @@
         </p:nvSpPr>
         <p:spPr>
           <a:xfrm>
-            <a:off x="4754880" y="3938375"/>
-            <a:ext cx="1143000" cy="261411"/>
+            <a:off x="4754880" y="3766252"/>
+            <a:ext cx="1143000" cy="239896"/>
           </a:xfrm>
           <a:prstGeom prst="rect">
             <a:avLst/>
@@ -32956,8 +33074,8 @@
         </p:nvSpPr>
         <p:spPr>
           <a:xfrm>
-            <a:off x="658368" y="4199785"/>
-            <a:ext cx="310896" cy="261411"/>
+            <a:off x="658368" y="4006148"/>
+            <a:ext cx="310896" cy="239896"/>
           </a:xfrm>
           <a:prstGeom prst="rect">
             <a:avLst/>
@@ -32995,8 +33113,8 @@
         </p:nvSpPr>
         <p:spPr>
           <a:xfrm>
-            <a:off x="1014984" y="4199785"/>
-            <a:ext cx="1920240" cy="261411"/>
+            <a:off x="1014984" y="4006148"/>
+            <a:ext cx="1920240" cy="239896"/>
           </a:xfrm>
           <a:prstGeom prst="rect">
             <a:avLst/>
@@ -33034,8 +33152,8 @@
         </p:nvSpPr>
         <p:spPr>
           <a:xfrm>
-            <a:off x="3008376" y="4265138"/>
-            <a:ext cx="734701" cy="130705"/>
+            <a:off x="3008376" y="4066122"/>
+            <a:ext cx="734701" cy="119948"/>
           </a:xfrm>
           <a:prstGeom prst="rect">
             <a:avLst/>
@@ -33054,8 +33172,8 @@
         </p:nvSpPr>
         <p:spPr>
           <a:xfrm>
-            <a:off x="4754880" y="4199785"/>
-            <a:ext cx="1143000" cy="261411"/>
+            <a:off x="4754880" y="4006148"/>
+            <a:ext cx="1143000" cy="239896"/>
           </a:xfrm>
           <a:prstGeom prst="rect">
             <a:avLst/>
@@ -33093,8 +33211,8 @@
         </p:nvSpPr>
         <p:spPr>
           <a:xfrm>
-            <a:off x="658368" y="4461196"/>
-            <a:ext cx="310896" cy="261411"/>
+            <a:off x="658368" y="4246043"/>
+            <a:ext cx="310896" cy="239896"/>
           </a:xfrm>
           <a:prstGeom prst="rect">
             <a:avLst/>
@@ -33132,8 +33250,8 @@
         </p:nvSpPr>
         <p:spPr>
           <a:xfrm>
-            <a:off x="1014984" y="4461196"/>
-            <a:ext cx="1920240" cy="261411"/>
+            <a:off x="1014984" y="4246043"/>
+            <a:ext cx="1920240" cy="239896"/>
           </a:xfrm>
           <a:prstGeom prst="rect">
             <a:avLst/>
@@ -33171,8 +33289,8 @@
         </p:nvSpPr>
         <p:spPr>
           <a:xfrm>
-            <a:off x="3008376" y="4526549"/>
-            <a:ext cx="703205" cy="130705"/>
+            <a:off x="3008376" y="4306017"/>
+            <a:ext cx="703205" cy="119948"/>
           </a:xfrm>
           <a:prstGeom prst="rect">
             <a:avLst/>
@@ -33191,8 +33309,8 @@
         </p:nvSpPr>
         <p:spPr>
           <a:xfrm>
-            <a:off x="4754880" y="4461196"/>
-            <a:ext cx="1143000" cy="261411"/>
+            <a:off x="4754880" y="4246043"/>
+            <a:ext cx="1143000" cy="239896"/>
           </a:xfrm>
           <a:prstGeom prst="rect">
             <a:avLst/>
@@ -33230,8 +33348,8 @@
         </p:nvSpPr>
         <p:spPr>
           <a:xfrm>
-            <a:off x="658368" y="4722607"/>
-            <a:ext cx="310896" cy="261411"/>
+            <a:off x="658368" y="4485939"/>
+            <a:ext cx="310896" cy="239896"/>
           </a:xfrm>
           <a:prstGeom prst="rect">
             <a:avLst/>
@@ -33269,8 +33387,8 @@
         </p:nvSpPr>
         <p:spPr>
           <a:xfrm>
-            <a:off x="1014984" y="4722607"/>
-            <a:ext cx="1920240" cy="261411"/>
+            <a:off x="1014984" y="4485939"/>
+            <a:ext cx="1920240" cy="239896"/>
           </a:xfrm>
           <a:prstGeom prst="rect">
             <a:avLst/>
@@ -33308,8 +33426,8 @@
         </p:nvSpPr>
         <p:spPr>
           <a:xfrm>
-            <a:off x="3008376" y="4787960"/>
-            <a:ext cx="640057" cy="130705"/>
+            <a:off x="3008376" y="4545913"/>
+            <a:ext cx="640057" cy="119948"/>
           </a:xfrm>
           <a:prstGeom prst="rect">
             <a:avLst/>
@@ -33328,8 +33446,8 @@
         </p:nvSpPr>
         <p:spPr>
           <a:xfrm>
-            <a:off x="4754880" y="4722607"/>
-            <a:ext cx="1143000" cy="261411"/>
+            <a:off x="4754880" y="4485939"/>
+            <a:ext cx="1143000" cy="239896"/>
           </a:xfrm>
           <a:prstGeom prst="rect">
             <a:avLst/>
@@ -33367,8 +33485,8 @@
         </p:nvSpPr>
         <p:spPr>
           <a:xfrm>
-            <a:off x="658368" y="4984018"/>
-            <a:ext cx="310896" cy="261411"/>
+            <a:off x="658368" y="4725834"/>
+            <a:ext cx="310896" cy="239896"/>
           </a:xfrm>
           <a:prstGeom prst="rect">
             <a:avLst/>
@@ -33406,8 +33524,8 @@
         </p:nvSpPr>
         <p:spPr>
           <a:xfrm>
-            <a:off x="1014984" y="4984018"/>
-            <a:ext cx="1920240" cy="261411"/>
+            <a:off x="1014984" y="4725834"/>
+            <a:ext cx="1920240" cy="239896"/>
           </a:xfrm>
           <a:prstGeom prst="rect">
             <a:avLst/>
@@ -33445,8 +33563,8 @@
         </p:nvSpPr>
         <p:spPr>
           <a:xfrm>
-            <a:off x="3008376" y="5049371"/>
-            <a:ext cx="569932" cy="130705"/>
+            <a:off x="3008376" y="4785808"/>
+            <a:ext cx="569932" cy="119948"/>
           </a:xfrm>
           <a:prstGeom prst="rect">
             <a:avLst/>
@@ -33465,8 +33583,8 @@
         </p:nvSpPr>
         <p:spPr>
           <a:xfrm>
-            <a:off x="4754880" y="4984018"/>
-            <a:ext cx="1143000" cy="261411"/>
+            <a:off x="4754880" y="4725834"/>
+            <a:ext cx="1143000" cy="239896"/>
           </a:xfrm>
           <a:prstGeom prst="rect">
             <a:avLst/>
@@ -33504,8 +33622,8 @@
         </p:nvSpPr>
         <p:spPr>
           <a:xfrm>
-            <a:off x="658368" y="5245429"/>
-            <a:ext cx="310896" cy="261411"/>
+            <a:off x="658368" y="4965730"/>
+            <a:ext cx="310896" cy="239896"/>
           </a:xfrm>
           <a:prstGeom prst="rect">
             <a:avLst/>
@@ -33543,8 +33661,8 @@
         </p:nvSpPr>
         <p:spPr>
           <a:xfrm>
-            <a:off x="1014984" y="5245429"/>
-            <a:ext cx="1920240" cy="261411"/>
+            <a:off x="1014984" y="4965730"/>
+            <a:ext cx="1920240" cy="239896"/>
           </a:xfrm>
           <a:prstGeom prst="rect">
             <a:avLst/>
@@ -33582,8 +33700,8 @@
         </p:nvSpPr>
         <p:spPr>
           <a:xfrm>
-            <a:off x="3008376" y="5310781"/>
-            <a:ext cx="519894" cy="130705"/>
+            <a:off x="3008376" y="5025704"/>
+            <a:ext cx="519894" cy="119948"/>
           </a:xfrm>
           <a:prstGeom prst="rect">
             <a:avLst/>
@@ -33602,8 +33720,8 @@
         </p:nvSpPr>
         <p:spPr>
           <a:xfrm>
-            <a:off x="4754880" y="5245429"/>
-            <a:ext cx="1143000" cy="261411"/>
+            <a:off x="4754880" y="4965730"/>
+            <a:ext cx="1143000" cy="239896"/>
           </a:xfrm>
           <a:prstGeom prst="rect">
             <a:avLst/>
@@ -33641,8 +33759,8 @@
         </p:nvSpPr>
         <p:spPr>
           <a:xfrm>
-            <a:off x="658368" y="5506840"/>
-            <a:ext cx="310896" cy="261411"/>
+            <a:off x="658368" y="5205625"/>
+            <a:ext cx="310896" cy="239896"/>
           </a:xfrm>
           <a:prstGeom prst="rect">
             <a:avLst/>
@@ -33680,8 +33798,8 @@
         </p:nvSpPr>
         <p:spPr>
           <a:xfrm>
-            <a:off x="1014984" y="5506840"/>
-            <a:ext cx="1920240" cy="261411"/>
+            <a:off x="1014984" y="5205625"/>
+            <a:ext cx="1920240" cy="239896"/>
           </a:xfrm>
           <a:prstGeom prst="rect">
             <a:avLst/>
@@ -33719,8 +33837,8 @@
         </p:nvSpPr>
         <p:spPr>
           <a:xfrm>
-            <a:off x="3008376" y="5572192"/>
-            <a:ext cx="485901" cy="130705"/>
+            <a:off x="3008376" y="5265599"/>
+            <a:ext cx="485901" cy="119948"/>
           </a:xfrm>
           <a:prstGeom prst="rect">
             <a:avLst/>
@@ -33739,8 +33857,8 @@
         </p:nvSpPr>
         <p:spPr>
           <a:xfrm>
-            <a:off x="4754880" y="5506840"/>
-            <a:ext cx="1143000" cy="261411"/>
+            <a:off x="4754880" y="5205625"/>
+            <a:ext cx="1143000" cy="239896"/>
           </a:xfrm>
           <a:prstGeom prst="rect">
             <a:avLst/>
@@ -33778,8 +33896,8 @@
         </p:nvSpPr>
         <p:spPr>
           <a:xfrm>
-            <a:off x="658368" y="5768250"/>
-            <a:ext cx="310896" cy="261411"/>
+            <a:off x="658368" y="5445521"/>
+            <a:ext cx="310896" cy="239896"/>
           </a:xfrm>
           <a:prstGeom prst="rect">
             <a:avLst/>
@@ -33817,8 +33935,8 @@
         </p:nvSpPr>
         <p:spPr>
           <a:xfrm>
-            <a:off x="1014984" y="5768250"/>
-            <a:ext cx="1920240" cy="261411"/>
+            <a:off x="1014984" y="5445521"/>
+            <a:ext cx="1920240" cy="239896"/>
           </a:xfrm>
           <a:prstGeom prst="rect">
             <a:avLst/>
@@ -33856,8 +33974,8 @@
         </p:nvSpPr>
         <p:spPr>
           <a:xfrm>
-            <a:off x="3008376" y="5833603"/>
-            <a:ext cx="483593" cy="130705"/>
+            <a:off x="3008376" y="5505495"/>
+            <a:ext cx="483593" cy="119948"/>
           </a:xfrm>
           <a:prstGeom prst="rect">
             <a:avLst/>
@@ -33876,8 +33994,8 @@
         </p:nvSpPr>
         <p:spPr>
           <a:xfrm>
-            <a:off x="4754880" y="5768250"/>
-            <a:ext cx="1143000" cy="261411"/>
+            <a:off x="4754880" y="5445521"/>
+            <a:ext cx="1143000" cy="239896"/>
           </a:xfrm>
           <a:prstGeom prst="rect">
             <a:avLst/>
@@ -33915,8 +34033,8 @@
         </p:nvSpPr>
         <p:spPr>
           <a:xfrm>
-            <a:off x="658368" y="6029661"/>
-            <a:ext cx="310896" cy="261411"/>
+            <a:off x="658368" y="5685416"/>
+            <a:ext cx="310896" cy="239896"/>
           </a:xfrm>
           <a:prstGeom prst="rect">
             <a:avLst/>
@@ -33954,8 +34072,8 @@
         </p:nvSpPr>
         <p:spPr>
           <a:xfrm>
-            <a:off x="1014984" y="6029661"/>
-            <a:ext cx="1920240" cy="261411"/>
+            <a:off x="1014984" y="5685416"/>
+            <a:ext cx="1920240" cy="239896"/>
           </a:xfrm>
           <a:prstGeom prst="rect">
             <a:avLst/>
@@ -33993,8 +34111,8 @@
         </p:nvSpPr>
         <p:spPr>
           <a:xfrm>
-            <a:off x="3008376" y="6095014"/>
-            <a:ext cx="457948" cy="130705"/>
+            <a:off x="3008376" y="5745390"/>
+            <a:ext cx="457948" cy="119948"/>
           </a:xfrm>
           <a:prstGeom prst="rect">
             <a:avLst/>
@@ -34013,8 +34131,8 @@
         </p:nvSpPr>
         <p:spPr>
           <a:xfrm>
-            <a:off x="4754880" y="6029661"/>
-            <a:ext cx="1143000" cy="261411"/>
+            <a:off x="4754880" y="5685416"/>
+            <a:ext cx="1143000" cy="239896"/>
           </a:xfrm>
           <a:prstGeom prst="rect">
             <a:avLst/>
@@ -34053,7 +34171,7 @@
         <p:spPr>
           <a:xfrm>
             <a:off x="6208776" y="1847088"/>
-            <a:ext cx="310896" cy="261411"/>
+            <a:ext cx="310896" cy="239896"/>
           </a:xfrm>
           <a:prstGeom prst="rect">
             <a:avLst/>
@@ -34092,7 +34210,7 @@
         <p:spPr>
           <a:xfrm>
             <a:off x="6565392" y="1847088"/>
-            <a:ext cx="1920240" cy="261411"/>
+            <a:ext cx="1920240" cy="239896"/>
           </a:xfrm>
           <a:prstGeom prst="rect">
             <a:avLst/>
@@ -34130,8 +34248,8 @@
         </p:nvSpPr>
         <p:spPr>
           <a:xfrm>
-            <a:off x="8558784" y="1912441"/>
-            <a:ext cx="385888" cy="130705"/>
+            <a:off x="8558784" y="1907062"/>
+            <a:ext cx="385888" cy="119948"/>
           </a:xfrm>
           <a:prstGeom prst="rect">
             <a:avLst/>
@@ -34151,7 +34269,7 @@
         <p:spPr>
           <a:xfrm>
             <a:off x="10305288" y="1847088"/>
-            <a:ext cx="1143000" cy="261411"/>
+            <a:ext cx="1143000" cy="239896"/>
           </a:xfrm>
           <a:prstGeom prst="rect">
             <a:avLst/>
@@ -34189,8 +34307,8 @@
         </p:nvSpPr>
         <p:spPr>
           <a:xfrm>
-            <a:off x="6208776" y="2108499"/>
-            <a:ext cx="310896" cy="261411"/>
+            <a:off x="6208776" y="2086984"/>
+            <a:ext cx="310896" cy="239896"/>
           </a:xfrm>
           <a:prstGeom prst="rect">
             <a:avLst/>
@@ -34228,8 +34346,8 @@
         </p:nvSpPr>
         <p:spPr>
           <a:xfrm>
-            <a:off x="6565392" y="2108499"/>
-            <a:ext cx="1920240" cy="261411"/>
+            <a:off x="6565392" y="2086984"/>
+            <a:ext cx="1920240" cy="239896"/>
           </a:xfrm>
           <a:prstGeom prst="rect">
             <a:avLst/>
@@ -34267,8 +34385,8 @@
         </p:nvSpPr>
         <p:spPr>
           <a:xfrm>
-            <a:off x="8558784" y="2173852"/>
-            <a:ext cx="373935" cy="130705"/>
+            <a:off x="8558784" y="2146957"/>
+            <a:ext cx="373935" cy="119948"/>
           </a:xfrm>
           <a:prstGeom prst="rect">
             <a:avLst/>
@@ -34287,8 +34405,8 @@
         </p:nvSpPr>
         <p:spPr>
           <a:xfrm>
-            <a:off x="10305288" y="2108499"/>
-            <a:ext cx="1143000" cy="261411"/>
+            <a:off x="10305288" y="2086984"/>
+            <a:ext cx="1143000" cy="239896"/>
           </a:xfrm>
           <a:prstGeom prst="rect">
             <a:avLst/>
@@ -34326,8 +34444,8 @@
         </p:nvSpPr>
         <p:spPr>
           <a:xfrm>
-            <a:off x="6208776" y="2369910"/>
-            <a:ext cx="310896" cy="261411"/>
+            <a:off x="6208776" y="2326879"/>
+            <a:ext cx="310896" cy="239896"/>
           </a:xfrm>
           <a:prstGeom prst="rect">
             <a:avLst/>
@@ -34365,8 +34483,8 @@
         </p:nvSpPr>
         <p:spPr>
           <a:xfrm>
-            <a:off x="6565392" y="2369910"/>
-            <a:ext cx="1920240" cy="261411"/>
+            <a:off x="6565392" y="2326879"/>
+            <a:ext cx="1920240" cy="239896"/>
           </a:xfrm>
           <a:prstGeom prst="rect">
             <a:avLst/>
@@ -34404,8 +34522,8 @@
         </p:nvSpPr>
         <p:spPr>
           <a:xfrm>
-            <a:off x="8558784" y="2435262"/>
-            <a:ext cx="328119" cy="130705"/>
+            <a:off x="8558784" y="2386853"/>
+            <a:ext cx="328119" cy="119948"/>
           </a:xfrm>
           <a:prstGeom prst="rect">
             <a:avLst/>
@@ -34424,8 +34542,8 @@
         </p:nvSpPr>
         <p:spPr>
           <a:xfrm>
-            <a:off x="10305288" y="2369910"/>
-            <a:ext cx="1143000" cy="261411"/>
+            <a:off x="10305288" y="2326879"/>
+            <a:ext cx="1143000" cy="239896"/>
           </a:xfrm>
           <a:prstGeom prst="rect">
             <a:avLst/>
@@ -34463,8 +34581,8 @@
         </p:nvSpPr>
         <p:spPr>
           <a:xfrm>
-            <a:off x="6208776" y="2631320"/>
-            <a:ext cx="310896" cy="261411"/>
+            <a:off x="6208776" y="2566775"/>
+            <a:ext cx="310896" cy="239896"/>
           </a:xfrm>
           <a:prstGeom prst="rect">
             <a:avLst/>
@@ -34502,8 +34620,8 @@
         </p:nvSpPr>
         <p:spPr>
           <a:xfrm>
-            <a:off x="6565392" y="2631320"/>
-            <a:ext cx="1920240" cy="261411"/>
+            <a:off x="6565392" y="2566775"/>
+            <a:ext cx="1920240" cy="239896"/>
           </a:xfrm>
           <a:prstGeom prst="rect">
             <a:avLst/>
@@ -34541,8 +34659,8 @@
         </p:nvSpPr>
         <p:spPr>
           <a:xfrm>
-            <a:off x="8558784" y="2696673"/>
-            <a:ext cx="309470" cy="130705"/>
+            <a:off x="8558784" y="2626748"/>
+            <a:ext cx="309470" cy="119948"/>
           </a:xfrm>
           <a:prstGeom prst="rect">
             <a:avLst/>
@@ -34561,8 +34679,8 @@
         </p:nvSpPr>
         <p:spPr>
           <a:xfrm>
-            <a:off x="10305288" y="2631320"/>
-            <a:ext cx="1143000" cy="261411"/>
+            <a:off x="10305288" y="2566775"/>
+            <a:ext cx="1143000" cy="239896"/>
           </a:xfrm>
           <a:prstGeom prst="rect">
             <a:avLst/>
@@ -34600,8 +34718,8 @@
         </p:nvSpPr>
         <p:spPr>
           <a:xfrm>
-            <a:off x="6208776" y="2892731"/>
-            <a:ext cx="310896" cy="261411"/>
+            <a:off x="6208776" y="2806670"/>
+            <a:ext cx="310896" cy="239896"/>
           </a:xfrm>
           <a:prstGeom prst="rect">
             <a:avLst/>
@@ -34639,8 +34757,8 @@
         </p:nvSpPr>
         <p:spPr>
           <a:xfrm>
-            <a:off x="6565392" y="2892731"/>
-            <a:ext cx="1920240" cy="261411"/>
+            <a:off x="6565392" y="2806670"/>
+            <a:ext cx="1920240" cy="239896"/>
           </a:xfrm>
           <a:prstGeom prst="rect">
             <a:avLst/>
@@ -34678,8 +34796,8 @@
         </p:nvSpPr>
         <p:spPr>
           <a:xfrm>
-            <a:off x="8558784" y="2958084"/>
-            <a:ext cx="231259" cy="130705"/>
+            <a:off x="8558784" y="2866644"/>
+            <a:ext cx="231259" cy="119948"/>
           </a:xfrm>
           <a:prstGeom prst="rect">
             <a:avLst/>
@@ -34698,8 +34816,8 @@
         </p:nvSpPr>
         <p:spPr>
           <a:xfrm>
-            <a:off x="10305288" y="2892731"/>
-            <a:ext cx="1143000" cy="261411"/>
+            <a:off x="10305288" y="2806670"/>
+            <a:ext cx="1143000" cy="239896"/>
           </a:xfrm>
           <a:prstGeom prst="rect">
             <a:avLst/>
@@ -34737,8 +34855,8 @@
         </p:nvSpPr>
         <p:spPr>
           <a:xfrm>
-            <a:off x="6208776" y="3154142"/>
-            <a:ext cx="310896" cy="261411"/>
+            <a:off x="6208776" y="3046566"/>
+            <a:ext cx="310896" cy="239896"/>
           </a:xfrm>
           <a:prstGeom prst="rect">
             <a:avLst/>
@@ -34776,8 +34894,8 @@
         </p:nvSpPr>
         <p:spPr>
           <a:xfrm>
-            <a:off x="6565392" y="3154142"/>
-            <a:ext cx="1920240" cy="261411"/>
+            <a:off x="6565392" y="3046566"/>
+            <a:ext cx="1920240" cy="239896"/>
           </a:xfrm>
           <a:prstGeom prst="rect">
             <a:avLst/>
@@ -34815,8 +34933,8 @@
         </p:nvSpPr>
         <p:spPr>
           <a:xfrm>
-            <a:off x="8558784" y="3219495"/>
-            <a:ext cx="136790" cy="130705"/>
+            <a:off x="8558784" y="3106540"/>
+            <a:ext cx="136790" cy="119948"/>
           </a:xfrm>
           <a:prstGeom prst="rect">
             <a:avLst/>
@@ -34835,8 +34953,8 @@
         </p:nvSpPr>
         <p:spPr>
           <a:xfrm>
-            <a:off x="10305288" y="3154142"/>
-            <a:ext cx="1143000" cy="261411"/>
+            <a:off x="10305288" y="3046566"/>
+            <a:ext cx="1143000" cy="239896"/>
           </a:xfrm>
           <a:prstGeom prst="rect">
             <a:avLst/>
@@ -34874,8 +34992,8 @@
         </p:nvSpPr>
         <p:spPr>
           <a:xfrm>
-            <a:off x="6208776" y="3415553"/>
-            <a:ext cx="310896" cy="261411"/>
+            <a:off x="6208776" y="3286461"/>
+            <a:ext cx="310896" cy="239896"/>
           </a:xfrm>
           <a:prstGeom prst="rect">
             <a:avLst/>
@@ -34913,8 +35031,8 @@
         </p:nvSpPr>
         <p:spPr>
           <a:xfrm>
-            <a:off x="6565392" y="3415553"/>
-            <a:ext cx="1920240" cy="261411"/>
+            <a:off x="6565392" y="3286461"/>
+            <a:ext cx="1920240" cy="239896"/>
           </a:xfrm>
           <a:prstGeom prst="rect">
             <a:avLst/>
@@ -34952,8 +35070,8 @@
         </p:nvSpPr>
         <p:spPr>
           <a:xfrm>
-            <a:off x="8558784" y="3480906"/>
-            <a:ext cx="104802" cy="130705"/>
+            <a:off x="8558784" y="3346435"/>
+            <a:ext cx="104802" cy="119948"/>
           </a:xfrm>
           <a:prstGeom prst="rect">
             <a:avLst/>
@@ -34972,8 +35090,8 @@
         </p:nvSpPr>
         <p:spPr>
           <a:xfrm>
-            <a:off x="10305288" y="3415553"/>
-            <a:ext cx="1143000" cy="261411"/>
+            <a:off x="10305288" y="3286461"/>
+            <a:ext cx="1143000" cy="239896"/>
           </a:xfrm>
           <a:prstGeom prst="rect">
             <a:avLst/>
@@ -35011,8 +35129,8 @@
         </p:nvSpPr>
         <p:spPr>
           <a:xfrm>
-            <a:off x="6208776" y="3676964"/>
-            <a:ext cx="310896" cy="261411"/>
+            <a:off x="6208776" y="3526357"/>
+            <a:ext cx="310896" cy="239896"/>
           </a:xfrm>
           <a:prstGeom prst="rect">
             <a:avLst/>
@@ -35050,8 +35168,8 @@
         </p:nvSpPr>
         <p:spPr>
           <a:xfrm>
-            <a:off x="6565392" y="3676964"/>
-            <a:ext cx="1920240" cy="261411"/>
+            <a:off x="6565392" y="3526357"/>
+            <a:ext cx="1920240" cy="239896"/>
           </a:xfrm>
           <a:prstGeom prst="rect">
             <a:avLst/>
@@ -35089,8 +35207,8 @@
         </p:nvSpPr>
         <p:spPr>
           <a:xfrm>
-            <a:off x="8558784" y="3742316"/>
-            <a:ext cx="82384" cy="130705"/>
+            <a:off x="8558784" y="3586331"/>
+            <a:ext cx="82384" cy="119948"/>
           </a:xfrm>
           <a:prstGeom prst="rect">
             <a:avLst/>
@@ -35109,8 +35227,8 @@
         </p:nvSpPr>
         <p:spPr>
           <a:xfrm>
-            <a:off x="10305288" y="3676964"/>
-            <a:ext cx="1143000" cy="261411"/>
+            <a:off x="10305288" y="3526357"/>
+            <a:ext cx="1143000" cy="239896"/>
           </a:xfrm>
           <a:prstGeom prst="rect">
             <a:avLst/>
@@ -35148,8 +35266,8 @@
         </p:nvSpPr>
         <p:spPr>
           <a:xfrm>
-            <a:off x="6208776" y="3938375"/>
-            <a:ext cx="310896" cy="261411"/>
+            <a:off x="6208776" y="3766252"/>
+            <a:ext cx="310896" cy="239896"/>
           </a:xfrm>
           <a:prstGeom prst="rect">
             <a:avLst/>
@@ -35187,8 +35305,8 @@
         </p:nvSpPr>
         <p:spPr>
           <a:xfrm>
-            <a:off x="6565392" y="3938375"/>
-            <a:ext cx="1920240" cy="261411"/>
+            <a:off x="6565392" y="3766252"/>
+            <a:ext cx="1920240" cy="239896"/>
           </a:xfrm>
           <a:prstGeom prst="rect">
             <a:avLst/>
@@ -35226,8 +35344,8 @@
         </p:nvSpPr>
         <p:spPr>
           <a:xfrm>
-            <a:off x="8558784" y="4003727"/>
-            <a:ext cx="79502" cy="130705"/>
+            <a:off x="8558784" y="3826226"/>
+            <a:ext cx="79502" cy="119948"/>
           </a:xfrm>
           <a:prstGeom prst="rect">
             <a:avLst/>
@@ -35246,8 +35364,8 @@
         </p:nvSpPr>
         <p:spPr>
           <a:xfrm>
-            <a:off x="10305288" y="3938375"/>
-            <a:ext cx="1143000" cy="261411"/>
+            <a:off x="10305288" y="3766252"/>
+            <a:ext cx="1143000" cy="239896"/>
           </a:xfrm>
           <a:prstGeom prst="rect">
             <a:avLst/>
@@ -35285,8 +35403,8 @@
         </p:nvSpPr>
         <p:spPr>
           <a:xfrm>
-            <a:off x="6208776" y="4199785"/>
-            <a:ext cx="310896" cy="261411"/>
+            <a:off x="6208776" y="4006148"/>
+            <a:ext cx="310896" cy="239896"/>
           </a:xfrm>
           <a:prstGeom prst="rect">
             <a:avLst/>
@@ -35324,8 +35442,8 @@
         </p:nvSpPr>
         <p:spPr>
           <a:xfrm>
-            <a:off x="6565392" y="4199785"/>
-            <a:ext cx="1920240" cy="261411"/>
+            <a:off x="6565392" y="4006148"/>
+            <a:ext cx="1920240" cy="239896"/>
           </a:xfrm>
           <a:prstGeom prst="rect">
             <a:avLst/>
@@ -35363,8 +35481,8 @@
         </p:nvSpPr>
         <p:spPr>
           <a:xfrm>
-            <a:off x="8558784" y="4265138"/>
-            <a:ext cx="76690" cy="130705"/>
+            <a:off x="8558784" y="4066122"/>
+            <a:ext cx="76690" cy="119948"/>
           </a:xfrm>
           <a:prstGeom prst="rect">
             <a:avLst/>
@@ -35383,8 +35501,8 @@
         </p:nvSpPr>
         <p:spPr>
           <a:xfrm>
-            <a:off x="10305288" y="4199785"/>
-            <a:ext cx="1143000" cy="261411"/>
+            <a:off x="10305288" y="4006148"/>
+            <a:ext cx="1143000" cy="239896"/>
           </a:xfrm>
           <a:prstGeom prst="rect">
             <a:avLst/>
@@ -35422,8 +35540,8 @@
         </p:nvSpPr>
         <p:spPr>
           <a:xfrm>
-            <a:off x="6208776" y="4461196"/>
-            <a:ext cx="310896" cy="261411"/>
+            <a:off x="6208776" y="4246043"/>
+            <a:ext cx="310896" cy="239896"/>
           </a:xfrm>
           <a:prstGeom prst="rect">
             <a:avLst/>
@@ -35461,8 +35579,8 @@
         </p:nvSpPr>
         <p:spPr>
           <a:xfrm>
-            <a:off x="6565392" y="4461196"/>
-            <a:ext cx="1920240" cy="261411"/>
+            <a:off x="6565392" y="4246043"/>
+            <a:ext cx="1920240" cy="239896"/>
           </a:xfrm>
           <a:prstGeom prst="rect">
             <a:avLst/>
@@ -35500,8 +35618,8 @@
         </p:nvSpPr>
         <p:spPr>
           <a:xfrm>
-            <a:off x="8558784" y="4526549"/>
-            <a:ext cx="66479" cy="130705"/>
+            <a:off x="8558784" y="4306017"/>
+            <a:ext cx="66479" cy="119948"/>
           </a:xfrm>
           <a:prstGeom prst="rect">
             <a:avLst/>
@@ -35520,8 +35638,8 @@
         </p:nvSpPr>
         <p:spPr>
           <a:xfrm>
-            <a:off x="10305288" y="4461196"/>
-            <a:ext cx="1143000" cy="261411"/>
+            <a:off x="10305288" y="4246043"/>
+            <a:ext cx="1143000" cy="239896"/>
           </a:xfrm>
           <a:prstGeom prst="rect">
             <a:avLst/>
@@ -35559,8 +35677,8 @@
         </p:nvSpPr>
         <p:spPr>
           <a:xfrm>
-            <a:off x="6208776" y="4722607"/>
-            <a:ext cx="310896" cy="261411"/>
+            <a:off x="6208776" y="4485939"/>
+            <a:ext cx="310896" cy="239896"/>
           </a:xfrm>
           <a:prstGeom prst="rect">
             <a:avLst/>
@@ -35598,8 +35716,8 @@
         </p:nvSpPr>
         <p:spPr>
           <a:xfrm>
-            <a:off x="6565392" y="4722607"/>
-            <a:ext cx="1920240" cy="261411"/>
+            <a:off x="6565392" y="4485939"/>
+            <a:ext cx="1920240" cy="239896"/>
           </a:xfrm>
           <a:prstGeom prst="rect">
             <a:avLst/>
@@ -35637,8 +35755,8 @@
         </p:nvSpPr>
         <p:spPr>
           <a:xfrm>
-            <a:off x="8558784" y="4787960"/>
-            <a:ext cx="31004" cy="130705"/>
+            <a:off x="8558784" y="4545913"/>
+            <a:ext cx="31004" cy="119948"/>
           </a:xfrm>
           <a:prstGeom prst="rect">
             <a:avLst/>
@@ -35657,8 +35775,8 @@
         </p:nvSpPr>
         <p:spPr>
           <a:xfrm>
-            <a:off x="10305288" y="4722607"/>
-            <a:ext cx="1143000" cy="261411"/>
+            <a:off x="10305288" y="4485939"/>
+            <a:ext cx="1143000" cy="239896"/>
           </a:xfrm>
           <a:prstGeom prst="rect">
             <a:avLst/>
@@ -35696,8 +35814,8 @@
         </p:nvSpPr>
         <p:spPr>
           <a:xfrm>
-            <a:off x="6208776" y="4984018"/>
-            <a:ext cx="310896" cy="261411"/>
+            <a:off x="6208776" y="4725834"/>
+            <a:ext cx="310896" cy="239896"/>
           </a:xfrm>
           <a:prstGeom prst="rect">
             <a:avLst/>
@@ -35735,8 +35853,8 @@
         </p:nvSpPr>
         <p:spPr>
           <a:xfrm>
-            <a:off x="6565392" y="4984018"/>
-            <a:ext cx="1920240" cy="261411"/>
+            <a:off x="6565392" y="4725834"/>
+            <a:ext cx="1920240" cy="239896"/>
           </a:xfrm>
           <a:prstGeom prst="rect">
             <a:avLst/>
@@ -35774,8 +35892,8 @@
         </p:nvSpPr>
         <p:spPr>
           <a:xfrm>
-            <a:off x="8558784" y="5049371"/>
-            <a:ext cx="26115" cy="130705"/>
+            <a:off x="8558784" y="4785808"/>
+            <a:ext cx="26115" cy="119948"/>
           </a:xfrm>
           <a:prstGeom prst="rect">
             <a:avLst/>
@@ -35794,8 +35912,8 @@
         </p:nvSpPr>
         <p:spPr>
           <a:xfrm>
-            <a:off x="10305288" y="4984018"/>
-            <a:ext cx="1143000" cy="261411"/>
+            <a:off x="10305288" y="4725834"/>
+            <a:ext cx="1143000" cy="239896"/>
           </a:xfrm>
           <a:prstGeom prst="rect">
             <a:avLst/>
@@ -35833,8 +35951,8 @@
         </p:nvSpPr>
         <p:spPr>
           <a:xfrm>
-            <a:off x="6208776" y="5245429"/>
-            <a:ext cx="310896" cy="261411"/>
+            <a:off x="6208776" y="4965730"/>
+            <a:ext cx="310896" cy="239896"/>
           </a:xfrm>
           <a:prstGeom prst="rect">
             <a:avLst/>
@@ -35872,8 +35990,8 @@
         </p:nvSpPr>
         <p:spPr>
           <a:xfrm>
-            <a:off x="6565392" y="5245429"/>
-            <a:ext cx="1920240" cy="261411"/>
+            <a:off x="6565392" y="4965730"/>
+            <a:ext cx="1920240" cy="239896"/>
           </a:xfrm>
           <a:prstGeom prst="rect">
             <a:avLst/>
@@ -35911,8 +36029,8 @@
         </p:nvSpPr>
         <p:spPr>
           <a:xfrm>
-            <a:off x="8558784" y="5310781"/>
-            <a:ext cx="18288" cy="130705"/>
+            <a:off x="8558784" y="5025704"/>
+            <a:ext cx="18288" cy="119948"/>
           </a:xfrm>
           <a:prstGeom prst="rect">
             <a:avLst/>
@@ -35931,8 +36049,8 @@
         </p:nvSpPr>
         <p:spPr>
           <a:xfrm>
-            <a:off x="10305288" y="5245429"/>
-            <a:ext cx="1143000" cy="261411"/>
+            <a:off x="10305288" y="4965730"/>
+            <a:ext cx="1143000" cy="239896"/>
           </a:xfrm>
           <a:prstGeom prst="rect">
             <a:avLst/>
@@ -35970,8 +36088,8 @@
         </p:nvSpPr>
         <p:spPr>
           <a:xfrm>
-            <a:off x="6208776" y="5506840"/>
-            <a:ext cx="310896" cy="261411"/>
+            <a:off x="6208776" y="5205625"/>
+            <a:ext cx="310896" cy="239896"/>
           </a:xfrm>
           <a:prstGeom prst="rect">
             <a:avLst/>
@@ -36009,8 +36127,8 @@
         </p:nvSpPr>
         <p:spPr>
           <a:xfrm>
-            <a:off x="6565392" y="5506840"/>
-            <a:ext cx="1920240" cy="261411"/>
+            <a:off x="6565392" y="5205625"/>
+            <a:ext cx="1920240" cy="239896"/>
           </a:xfrm>
           <a:prstGeom prst="rect">
             <a:avLst/>
@@ -36048,8 +36166,8 @@
         </p:nvSpPr>
         <p:spPr>
           <a:xfrm>
-            <a:off x="8558784" y="5572192"/>
-            <a:ext cx="18288" cy="130705"/>
+            <a:off x="8558784" y="5265599"/>
+            <a:ext cx="18288" cy="119948"/>
           </a:xfrm>
           <a:prstGeom prst="rect">
             <a:avLst/>
@@ -36068,8 +36186,8 @@
         </p:nvSpPr>
         <p:spPr>
           <a:xfrm>
-            <a:off x="10305288" y="5506840"/>
-            <a:ext cx="1143000" cy="261411"/>
+            <a:off x="10305288" y="5205625"/>
+            <a:ext cx="1143000" cy="239896"/>
           </a:xfrm>
           <a:prstGeom prst="rect">
             <a:avLst/>
@@ -36107,8 +36225,8 @@
         </p:nvSpPr>
         <p:spPr>
           <a:xfrm>
-            <a:off x="6208776" y="5768250"/>
-            <a:ext cx="310896" cy="261411"/>
+            <a:off x="6208776" y="5445521"/>
+            <a:ext cx="310896" cy="239896"/>
           </a:xfrm>
           <a:prstGeom prst="rect">
             <a:avLst/>
@@ -36146,8 +36264,8 @@
         </p:nvSpPr>
         <p:spPr>
           <a:xfrm>
-            <a:off x="6565392" y="5768250"/>
-            <a:ext cx="1920240" cy="261411"/>
+            <a:off x="6565392" y="5445521"/>
+            <a:ext cx="1920240" cy="239896"/>
           </a:xfrm>
           <a:prstGeom prst="rect">
             <a:avLst/>
@@ -36185,8 +36303,8 @@
         </p:nvSpPr>
         <p:spPr>
           <a:xfrm>
-            <a:off x="8558784" y="5833603"/>
-            <a:ext cx="18288" cy="130705"/>
+            <a:off x="8558784" y="5505495"/>
+            <a:ext cx="18288" cy="119948"/>
           </a:xfrm>
           <a:prstGeom prst="rect">
             <a:avLst/>
@@ -36205,8 +36323,8 @@
         </p:nvSpPr>
         <p:spPr>
           <a:xfrm>
-            <a:off x="10305288" y="5768250"/>
-            <a:ext cx="1143000" cy="261411"/>
+            <a:off x="10305288" y="5445521"/>
+            <a:ext cx="1143000" cy="239896"/>
           </a:xfrm>
           <a:prstGeom prst="rect">
             <a:avLst/>
@@ -36245,7 +36363,7 @@
         <p:spPr>
           <a:xfrm>
             <a:off x="3940705" y="1847088"/>
-            <a:ext cx="14630" cy="4443984"/>
+            <a:ext cx="14630" cy="4078224"/>
           </a:xfrm>
           <a:prstGeom prst="rect">
             <a:avLst/>
@@ -36265,7 +36383,7 @@
         <p:spPr>
           <a:xfrm>
             <a:off x="9491113" y="1847088"/>
-            <a:ext cx="14630" cy="4443984"/>
+            <a:ext cx="14630" cy="4078224"/>
           </a:xfrm>
           <a:prstGeom prst="rect">
             <a:avLst/>
@@ -36285,7 +36403,7 @@
         <p:spPr>
           <a:xfrm>
             <a:off x="6085332" y="1847088"/>
-            <a:ext cx="10973" cy="4443984"/>
+            <a:ext cx="10973" cy="4078224"/>
           </a:xfrm>
           <a:prstGeom prst="rect">
             <a:avLst/>
@@ -36295,6 +36413,65 @@
           </a:solidFill>
           <a:ln/>
         </p:spPr>
+      </p:sp>
+      <p:sp>
+        <p:nvSpPr>
+          <p:cNvPr id="147" name="Shape 144"/>
+          <p:cNvSpPr/>
+          <p:nvPr/>
+        </p:nvSpPr>
+        <p:spPr>
+          <a:xfrm>
+            <a:off x="457200" y="6126480"/>
+            <a:ext cx="11274552" cy="371856"/>
+          </a:xfrm>
+          <a:prstGeom prst="rect">
+            <a:avLst/>
+          </a:prstGeom>
+          <a:solidFill>
+            <a:srgbClr val="EDF4FA"/>
+          </a:solidFill>
+          <a:ln/>
+        </p:spPr>
+      </p:sp>
+      <p:sp>
+        <p:nvSpPr>
+          <p:cNvPr id="148" name="Text 145"/>
+          <p:cNvSpPr txBox="1"/>
+          <p:nvPr/>
+        </p:nvSpPr>
+        <p:spPr>
+          <a:xfrm>
+            <a:off x="658368" y="6144768"/>
+            <a:ext cx="10927080" cy="335280"/>
+          </a:xfrm>
+          <a:prstGeom prst="rect">
+            <a:avLst/>
+          </a:prstGeom>
+          <a:noFill/>
+          <a:ln/>
+        </p:spPr>
+        <p:txBody>
+          <a:bodyPr wrap="square" lIns="0" tIns="0" rIns="0" bIns="0" rtlCol="0" anchor="ctr"/>
+          <a:lstStyle/>
+          <a:p>
+            <a:pPr indent="0" marL="0">
+              <a:buNone/>
+            </a:pPr>
+            <a:r>
+              <a:rPr lang="en-US" sz="1600" b="1" dirty="0">
+                <a:solidFill>
+                  <a:srgbClr val="0B2C4A"/>
+                </a:solidFill>
+                <a:latin typeface="Inter" pitchFamily="34" charset="0"/>
+                <a:ea typeface="Inter" pitchFamily="34" charset="-122"/>
+                <a:cs typeface="Inter" pitchFamily="34" charset="-120"/>
+              </a:rPr>
+              <a:t>4 of 33 stores at or above 15%. The group sits at 8.3%.</a:t>
+            </a:r>
+            <a:endParaRPr lang="en-US" sz="1600" dirty="0"/>
+          </a:p>
+        </p:txBody>
       </p:sp>
     </p:spTree>
   </p:cSld>
@@ -40447,7 +40624,7 @@
         <p:spPr>
           <a:xfrm>
             <a:off x="457200" y="1207008"/>
-            <a:ext cx="11274552" cy="5148072"/>
+            <a:ext cx="11274552" cy="4782312"/>
           </a:xfrm>
           <a:prstGeom prst="rect">
             <a:avLst/>
@@ -40624,7 +40801,7 @@
         <p:spPr>
           <a:xfrm>
             <a:off x="658368" y="1847088"/>
-            <a:ext cx="310896" cy="261411"/>
+            <a:ext cx="310896" cy="239896"/>
           </a:xfrm>
           <a:prstGeom prst="rect">
             <a:avLst/>
@@ -40663,7 +40840,7 @@
         <p:spPr>
           <a:xfrm>
             <a:off x="1014984" y="1847088"/>
-            <a:ext cx="1920240" cy="261411"/>
+            <a:ext cx="1920240" cy="239896"/>
           </a:xfrm>
           <a:prstGeom prst="rect">
             <a:avLst/>
@@ -40701,8 +40878,8 @@
         </p:nvSpPr>
         <p:spPr>
           <a:xfrm>
-            <a:off x="3008376" y="1912441"/>
-            <a:ext cx="1691640" cy="130705"/>
+            <a:off x="3008376" y="1907062"/>
+            <a:ext cx="1691640" cy="119948"/>
           </a:xfrm>
           <a:prstGeom prst="rect">
             <a:avLst/>
@@ -40722,7 +40899,7 @@
         <p:spPr>
           <a:xfrm>
             <a:off x="4754880" y="1847088"/>
-            <a:ext cx="1143000" cy="261411"/>
+            <a:ext cx="1143000" cy="239896"/>
           </a:xfrm>
           <a:prstGeom prst="rect">
             <a:avLst/>
@@ -40760,8 +40937,8 @@
         </p:nvSpPr>
         <p:spPr>
           <a:xfrm>
-            <a:off x="658368" y="2108499"/>
-            <a:ext cx="310896" cy="261411"/>
+            <a:off x="658368" y="2086984"/>
+            <a:ext cx="310896" cy="239896"/>
           </a:xfrm>
           <a:prstGeom prst="rect">
             <a:avLst/>
@@ -40799,8 +40976,8 @@
         </p:nvSpPr>
         <p:spPr>
           <a:xfrm>
-            <a:off x="1014984" y="2108499"/>
-            <a:ext cx="1920240" cy="261411"/>
+            <a:off x="1014984" y="2086984"/>
+            <a:ext cx="1920240" cy="239896"/>
           </a:xfrm>
           <a:prstGeom prst="rect">
             <a:avLst/>
@@ -40838,8 +41015,8 @@
         </p:nvSpPr>
         <p:spPr>
           <a:xfrm>
-            <a:off x="3008376" y="2173852"/>
-            <a:ext cx="1277371" cy="130705"/>
+            <a:off x="3008376" y="2146957"/>
+            <a:ext cx="1277371" cy="119948"/>
           </a:xfrm>
           <a:prstGeom prst="rect">
             <a:avLst/>
@@ -40858,8 +41035,8 @@
         </p:nvSpPr>
         <p:spPr>
           <a:xfrm>
-            <a:off x="4754880" y="2108499"/>
-            <a:ext cx="1143000" cy="261411"/>
+            <a:off x="4754880" y="2086984"/>
+            <a:ext cx="1143000" cy="239896"/>
           </a:xfrm>
           <a:prstGeom prst="rect">
             <a:avLst/>
@@ -40897,8 +41074,8 @@
         </p:nvSpPr>
         <p:spPr>
           <a:xfrm>
-            <a:off x="658368" y="2369910"/>
-            <a:ext cx="310896" cy="261411"/>
+            <a:off x="658368" y="2326879"/>
+            <a:ext cx="310896" cy="239896"/>
           </a:xfrm>
           <a:prstGeom prst="rect">
             <a:avLst/>
@@ -40936,8 +41113,8 @@
         </p:nvSpPr>
         <p:spPr>
           <a:xfrm>
-            <a:off x="1014984" y="2369910"/>
-            <a:ext cx="1920240" cy="261411"/>
+            <a:off x="1014984" y="2326879"/>
+            <a:ext cx="1920240" cy="239896"/>
           </a:xfrm>
           <a:prstGeom prst="rect">
             <a:avLst/>
@@ -40975,8 +41152,8 @@
         </p:nvSpPr>
         <p:spPr>
           <a:xfrm>
-            <a:off x="3008376" y="2435262"/>
-            <a:ext cx="1171658" cy="130705"/>
+            <a:off x="3008376" y="2386853"/>
+            <a:ext cx="1171658" cy="119948"/>
           </a:xfrm>
           <a:prstGeom prst="rect">
             <a:avLst/>
@@ -40995,8 +41172,8 @@
         </p:nvSpPr>
         <p:spPr>
           <a:xfrm>
-            <a:off x="4754880" y="2369910"/>
-            <a:ext cx="1143000" cy="261411"/>
+            <a:off x="4754880" y="2326879"/>
+            <a:ext cx="1143000" cy="239896"/>
           </a:xfrm>
           <a:prstGeom prst="rect">
             <a:avLst/>
@@ -41034,8 +41211,8 @@
         </p:nvSpPr>
         <p:spPr>
           <a:xfrm>
-            <a:off x="658368" y="2631320"/>
-            <a:ext cx="310896" cy="261411"/>
+            <a:off x="658368" y="2566775"/>
+            <a:ext cx="310896" cy="239896"/>
           </a:xfrm>
           <a:prstGeom prst="rect">
             <a:avLst/>
@@ -41073,8 +41250,8 @@
         </p:nvSpPr>
         <p:spPr>
           <a:xfrm>
-            <a:off x="1014984" y="2631320"/>
-            <a:ext cx="1920240" cy="261411"/>
+            <a:off x="1014984" y="2566775"/>
+            <a:ext cx="1920240" cy="239896"/>
           </a:xfrm>
           <a:prstGeom prst="rect">
             <a:avLst/>
@@ -41112,8 +41289,8 @@
         </p:nvSpPr>
         <p:spPr>
           <a:xfrm>
-            <a:off x="3008376" y="2696673"/>
-            <a:ext cx="1042017" cy="130705"/>
+            <a:off x="3008376" y="2626748"/>
+            <a:ext cx="1042017" cy="119948"/>
           </a:xfrm>
           <a:prstGeom prst="rect">
             <a:avLst/>
@@ -41132,8 +41309,8 @@
         </p:nvSpPr>
         <p:spPr>
           <a:xfrm>
-            <a:off x="4754880" y="2631320"/>
-            <a:ext cx="1143000" cy="261411"/>
+            <a:off x="4754880" y="2566775"/>
+            <a:ext cx="1143000" cy="239896"/>
           </a:xfrm>
           <a:prstGeom prst="rect">
             <a:avLst/>
@@ -41171,8 +41348,8 @@
         </p:nvSpPr>
         <p:spPr>
           <a:xfrm>
-            <a:off x="658368" y="2892731"/>
-            <a:ext cx="310896" cy="261411"/>
+            <a:off x="658368" y="2806670"/>
+            <a:ext cx="310896" cy="239896"/>
           </a:xfrm>
           <a:prstGeom prst="rect">
             <a:avLst/>
@@ -41210,8 +41387,8 @@
         </p:nvSpPr>
         <p:spPr>
           <a:xfrm>
-            <a:off x="1014984" y="2892731"/>
-            <a:ext cx="1920240" cy="261411"/>
+            <a:off x="1014984" y="2806670"/>
+            <a:ext cx="1920240" cy="239896"/>
           </a:xfrm>
           <a:prstGeom prst="rect">
             <a:avLst/>
@@ -41249,8 +41426,8 @@
         </p:nvSpPr>
         <p:spPr>
           <a:xfrm>
-            <a:off x="3008376" y="2958084"/>
-            <a:ext cx="991227" cy="130705"/>
+            <a:off x="3008376" y="2866644"/>
+            <a:ext cx="991227" cy="119948"/>
           </a:xfrm>
           <a:prstGeom prst="rect">
             <a:avLst/>
@@ -41269,8 +41446,8 @@
         </p:nvSpPr>
         <p:spPr>
           <a:xfrm>
-            <a:off x="4754880" y="2892731"/>
-            <a:ext cx="1143000" cy="261411"/>
+            <a:off x="4754880" y="2806670"/>
+            <a:ext cx="1143000" cy="239896"/>
           </a:xfrm>
           <a:prstGeom prst="rect">
             <a:avLst/>
@@ -41308,8 +41485,8 @@
         </p:nvSpPr>
         <p:spPr>
           <a:xfrm>
-            <a:off x="658368" y="3154142"/>
-            <a:ext cx="310896" cy="261411"/>
+            <a:off x="658368" y="3046566"/>
+            <a:ext cx="310896" cy="239896"/>
           </a:xfrm>
           <a:prstGeom prst="rect">
             <a:avLst/>
@@ -41347,8 +41524,8 @@
         </p:nvSpPr>
         <p:spPr>
           <a:xfrm>
-            <a:off x="1014984" y="3154142"/>
-            <a:ext cx="1920240" cy="261411"/>
+            <a:off x="1014984" y="3046566"/>
+            <a:ext cx="1920240" cy="239896"/>
           </a:xfrm>
           <a:prstGeom prst="rect">
             <a:avLst/>
@@ -41386,8 +41563,8 @@
         </p:nvSpPr>
         <p:spPr>
           <a:xfrm>
-            <a:off x="3008376" y="3219495"/>
-            <a:ext cx="975131" cy="130705"/>
+            <a:off x="3008376" y="3106540"/>
+            <a:ext cx="975131" cy="119948"/>
           </a:xfrm>
           <a:prstGeom prst="rect">
             <a:avLst/>
@@ -41406,8 +41583,8 @@
         </p:nvSpPr>
         <p:spPr>
           <a:xfrm>
-            <a:off x="4754880" y="3154142"/>
-            <a:ext cx="1143000" cy="261411"/>
+            <a:off x="4754880" y="3046566"/>
+            <a:ext cx="1143000" cy="239896"/>
           </a:xfrm>
           <a:prstGeom prst="rect">
             <a:avLst/>
@@ -41445,8 +41622,8 @@
         </p:nvSpPr>
         <p:spPr>
           <a:xfrm>
-            <a:off x="658368" y="3415553"/>
-            <a:ext cx="310896" cy="261411"/>
+            <a:off x="658368" y="3286461"/>
+            <a:ext cx="310896" cy="239896"/>
           </a:xfrm>
           <a:prstGeom prst="rect">
             <a:avLst/>
@@ -41484,8 +41661,8 @@
         </p:nvSpPr>
         <p:spPr>
           <a:xfrm>
-            <a:off x="1014984" y="3415553"/>
-            <a:ext cx="1920240" cy="261411"/>
+            <a:off x="1014984" y="3286461"/>
+            <a:ext cx="1920240" cy="239896"/>
           </a:xfrm>
           <a:prstGeom prst="rect">
             <a:avLst/>
@@ -41523,8 +41700,8 @@
         </p:nvSpPr>
         <p:spPr>
           <a:xfrm>
-            <a:off x="3008376" y="3480906"/>
-            <a:ext cx="953847" cy="130705"/>
+            <a:off x="3008376" y="3346435"/>
+            <a:ext cx="953847" cy="119948"/>
           </a:xfrm>
           <a:prstGeom prst="rect">
             <a:avLst/>
@@ -41543,8 +41720,8 @@
         </p:nvSpPr>
         <p:spPr>
           <a:xfrm>
-            <a:off x="4754880" y="3415553"/>
-            <a:ext cx="1143000" cy="261411"/>
+            <a:off x="4754880" y="3286461"/>
+            <a:ext cx="1143000" cy="239896"/>
           </a:xfrm>
           <a:prstGeom prst="rect">
             <a:avLst/>
@@ -41582,8 +41759,8 @@
         </p:nvSpPr>
         <p:spPr>
           <a:xfrm>
-            <a:off x="658368" y="3676964"/>
-            <a:ext cx="310896" cy="261411"/>
+            <a:off x="658368" y="3526357"/>
+            <a:ext cx="310896" cy="239896"/>
           </a:xfrm>
           <a:prstGeom prst="rect">
             <a:avLst/>
@@ -41621,8 +41798,8 @@
         </p:nvSpPr>
         <p:spPr>
           <a:xfrm>
-            <a:off x="1014984" y="3676964"/>
-            <a:ext cx="1920240" cy="261411"/>
+            <a:off x="1014984" y="3526357"/>
+            <a:ext cx="1920240" cy="239896"/>
           </a:xfrm>
           <a:prstGeom prst="rect">
             <a:avLst/>
@@ -41660,8 +41837,8 @@
         </p:nvSpPr>
         <p:spPr>
           <a:xfrm>
-            <a:off x="3008376" y="3742316"/>
-            <a:ext cx="880621" cy="130705"/>
+            <a:off x="3008376" y="3586331"/>
+            <a:ext cx="880621" cy="119948"/>
           </a:xfrm>
           <a:prstGeom prst="rect">
             <a:avLst/>
@@ -41680,8 +41857,8 @@
         </p:nvSpPr>
         <p:spPr>
           <a:xfrm>
-            <a:off x="4754880" y="3676964"/>
-            <a:ext cx="1143000" cy="261411"/>
+            <a:off x="4754880" y="3526357"/>
+            <a:ext cx="1143000" cy="239896"/>
           </a:xfrm>
           <a:prstGeom prst="rect">
             <a:avLst/>
@@ -41719,8 +41896,8 @@
         </p:nvSpPr>
         <p:spPr>
           <a:xfrm>
-            <a:off x="658368" y="3938375"/>
-            <a:ext cx="310896" cy="261411"/>
+            <a:off x="658368" y="3766252"/>
+            <a:ext cx="310896" cy="239896"/>
           </a:xfrm>
           <a:prstGeom prst="rect">
             <a:avLst/>
@@ -41758,8 +41935,8 @@
         </p:nvSpPr>
         <p:spPr>
           <a:xfrm>
-            <a:off x="1014984" y="3938375"/>
-            <a:ext cx="1920240" cy="261411"/>
+            <a:off x="1014984" y="3766252"/>
+            <a:ext cx="1920240" cy="239896"/>
           </a:xfrm>
           <a:prstGeom prst="rect">
             <a:avLst/>
@@ -41797,8 +41974,8 @@
         </p:nvSpPr>
         <p:spPr>
           <a:xfrm>
-            <a:off x="3008376" y="4003727"/>
-            <a:ext cx="869652" cy="130705"/>
+            <a:off x="3008376" y="3826226"/>
+            <a:ext cx="869652" cy="119948"/>
           </a:xfrm>
           <a:prstGeom prst="rect">
             <a:avLst/>
@@ -41817,8 +41994,8 @@
         </p:nvSpPr>
         <p:spPr>
           <a:xfrm>
-            <a:off x="4754880" y="3938375"/>
-            <a:ext cx="1143000" cy="261411"/>
+            <a:off x="4754880" y="3766252"/>
+            <a:ext cx="1143000" cy="239896"/>
           </a:xfrm>
           <a:prstGeom prst="rect">
             <a:avLst/>
@@ -41856,8 +42033,8 @@
         </p:nvSpPr>
         <p:spPr>
           <a:xfrm>
-            <a:off x="658368" y="4199785"/>
-            <a:ext cx="310896" cy="261411"/>
+            <a:off x="658368" y="4006148"/>
+            <a:ext cx="310896" cy="239896"/>
           </a:xfrm>
           <a:prstGeom prst="rect">
             <a:avLst/>
@@ -41895,8 +42072,8 @@
         </p:nvSpPr>
         <p:spPr>
           <a:xfrm>
-            <a:off x="1014984" y="4199785"/>
-            <a:ext cx="1920240" cy="261411"/>
+            <a:off x="1014984" y="4006148"/>
+            <a:ext cx="1920240" cy="239896"/>
           </a:xfrm>
           <a:prstGeom prst="rect">
             <a:avLst/>
@@ -41934,8 +42111,8 @@
         </p:nvSpPr>
         <p:spPr>
           <a:xfrm>
-            <a:off x="3008376" y="4265138"/>
-            <a:ext cx="846628" cy="130705"/>
+            <a:off x="3008376" y="4066122"/>
+            <a:ext cx="846628" cy="119948"/>
           </a:xfrm>
           <a:prstGeom prst="rect">
             <a:avLst/>
@@ -41954,8 +42131,8 @@
         </p:nvSpPr>
         <p:spPr>
           <a:xfrm>
-            <a:off x="4754880" y="4199785"/>
-            <a:ext cx="1143000" cy="261411"/>
+            <a:off x="4754880" y="4006148"/>
+            <a:ext cx="1143000" cy="239896"/>
           </a:xfrm>
           <a:prstGeom prst="rect">
             <a:avLst/>
@@ -41993,8 +42170,8 @@
         </p:nvSpPr>
         <p:spPr>
           <a:xfrm>
-            <a:off x="658368" y="4461196"/>
-            <a:ext cx="310896" cy="261411"/>
+            <a:off x="658368" y="4246043"/>
+            <a:ext cx="310896" cy="239896"/>
           </a:xfrm>
           <a:prstGeom prst="rect">
             <a:avLst/>
@@ -42032,8 +42209,8 @@
         </p:nvSpPr>
         <p:spPr>
           <a:xfrm>
-            <a:off x="1014984" y="4461196"/>
-            <a:ext cx="1920240" cy="261411"/>
+            <a:off x="1014984" y="4246043"/>
+            <a:ext cx="1920240" cy="239896"/>
           </a:xfrm>
           <a:prstGeom prst="rect">
             <a:avLst/>
@@ -42071,8 +42248,8 @@
         </p:nvSpPr>
         <p:spPr>
           <a:xfrm>
-            <a:off x="3008376" y="4526549"/>
-            <a:ext cx="830606" cy="130705"/>
+            <a:off x="3008376" y="4306017"/>
+            <a:ext cx="830606" cy="119948"/>
           </a:xfrm>
           <a:prstGeom prst="rect">
             <a:avLst/>
@@ -42091,8 +42268,8 @@
         </p:nvSpPr>
         <p:spPr>
           <a:xfrm>
-            <a:off x="4754880" y="4461196"/>
-            <a:ext cx="1143000" cy="261411"/>
+            <a:off x="4754880" y="4246043"/>
+            <a:ext cx="1143000" cy="239896"/>
           </a:xfrm>
           <a:prstGeom prst="rect">
             <a:avLst/>
@@ -42130,8 +42307,8 @@
         </p:nvSpPr>
         <p:spPr>
           <a:xfrm>
-            <a:off x="658368" y="4722607"/>
-            <a:ext cx="310896" cy="261411"/>
+            <a:off x="658368" y="4485939"/>
+            <a:ext cx="310896" cy="239896"/>
           </a:xfrm>
           <a:prstGeom prst="rect">
             <a:avLst/>
@@ -42169,8 +42346,8 @@
         </p:nvSpPr>
         <p:spPr>
           <a:xfrm>
-            <a:off x="1014984" y="4722607"/>
-            <a:ext cx="1920240" cy="261411"/>
+            <a:off x="1014984" y="4485939"/>
+            <a:ext cx="1920240" cy="239896"/>
           </a:xfrm>
           <a:prstGeom prst="rect">
             <a:avLst/>
@@ -42208,8 +42385,8 @@
         </p:nvSpPr>
         <p:spPr>
           <a:xfrm>
-            <a:off x="3008376" y="4787960"/>
-            <a:ext cx="824603" cy="130705"/>
+            <a:off x="3008376" y="4545913"/>
+            <a:ext cx="824603" cy="119948"/>
           </a:xfrm>
           <a:prstGeom prst="rect">
             <a:avLst/>
@@ -42228,8 +42405,8 @@
         </p:nvSpPr>
         <p:spPr>
           <a:xfrm>
-            <a:off x="4754880" y="4722607"/>
-            <a:ext cx="1143000" cy="261411"/>
+            <a:off x="4754880" y="4485939"/>
+            <a:ext cx="1143000" cy="239896"/>
           </a:xfrm>
           <a:prstGeom prst="rect">
             <a:avLst/>
@@ -42267,8 +42444,8 @@
         </p:nvSpPr>
         <p:spPr>
           <a:xfrm>
-            <a:off x="658368" y="4984018"/>
-            <a:ext cx="310896" cy="261411"/>
+            <a:off x="658368" y="4725834"/>
+            <a:ext cx="310896" cy="239896"/>
           </a:xfrm>
           <a:prstGeom prst="rect">
             <a:avLst/>
@@ -42306,8 +42483,8 @@
         </p:nvSpPr>
         <p:spPr>
           <a:xfrm>
-            <a:off x="1014984" y="4984018"/>
-            <a:ext cx="1920240" cy="261411"/>
+            <a:off x="1014984" y="4725834"/>
+            <a:ext cx="1920240" cy="239896"/>
           </a:xfrm>
           <a:prstGeom prst="rect">
             <a:avLst/>
@@ -42345,8 +42522,8 @@
         </p:nvSpPr>
         <p:spPr>
           <a:xfrm>
-            <a:off x="3008376" y="5049371"/>
-            <a:ext cx="790584" cy="130705"/>
+            <a:off x="3008376" y="4785808"/>
+            <a:ext cx="790584" cy="119948"/>
           </a:xfrm>
           <a:prstGeom prst="rect">
             <a:avLst/>
@@ -42365,8 +42542,8 @@
         </p:nvSpPr>
         <p:spPr>
           <a:xfrm>
-            <a:off x="4754880" y="4984018"/>
-            <a:ext cx="1143000" cy="261411"/>
+            <a:off x="4754880" y="4725834"/>
+            <a:ext cx="1143000" cy="239896"/>
           </a:xfrm>
           <a:prstGeom prst="rect">
             <a:avLst/>
@@ -42404,8 +42581,8 @@
         </p:nvSpPr>
         <p:spPr>
           <a:xfrm>
-            <a:off x="658368" y="5245429"/>
-            <a:ext cx="310896" cy="261411"/>
+            <a:off x="658368" y="4965730"/>
+            <a:ext cx="310896" cy="239896"/>
           </a:xfrm>
           <a:prstGeom prst="rect">
             <a:avLst/>
@@ -42443,8 +42620,8 @@
         </p:nvSpPr>
         <p:spPr>
           <a:xfrm>
-            <a:off x="1014984" y="5245429"/>
-            <a:ext cx="1920240" cy="261411"/>
+            <a:off x="1014984" y="4965730"/>
+            <a:ext cx="1920240" cy="239896"/>
           </a:xfrm>
           <a:prstGeom prst="rect">
             <a:avLst/>
@@ -42482,8 +42659,8 @@
         </p:nvSpPr>
         <p:spPr>
           <a:xfrm>
-            <a:off x="3008376" y="5310781"/>
-            <a:ext cx="780105" cy="130705"/>
+            <a:off x="3008376" y="5025704"/>
+            <a:ext cx="780105" cy="119948"/>
           </a:xfrm>
           <a:prstGeom prst="rect">
             <a:avLst/>
@@ -42502,8 +42679,8 @@
         </p:nvSpPr>
         <p:spPr>
           <a:xfrm>
-            <a:off x="4754880" y="5245429"/>
-            <a:ext cx="1143000" cy="261411"/>
+            <a:off x="4754880" y="4965730"/>
+            <a:ext cx="1143000" cy="239896"/>
           </a:xfrm>
           <a:prstGeom prst="rect">
             <a:avLst/>
@@ -42541,8 +42718,8 @@
         </p:nvSpPr>
         <p:spPr>
           <a:xfrm>
-            <a:off x="658368" y="5506840"/>
-            <a:ext cx="310896" cy="261411"/>
+            <a:off x="658368" y="5205625"/>
+            <a:ext cx="310896" cy="239896"/>
           </a:xfrm>
           <a:prstGeom prst="rect">
             <a:avLst/>
@@ -42580,8 +42757,8 @@
         </p:nvSpPr>
         <p:spPr>
           <a:xfrm>
-            <a:off x="1014984" y="5506840"/>
-            <a:ext cx="1920240" cy="261411"/>
+            <a:off x="1014984" y="5205625"/>
+            <a:ext cx="1920240" cy="239896"/>
           </a:xfrm>
           <a:prstGeom prst="rect">
             <a:avLst/>
@@ -42619,8 +42796,8 @@
         </p:nvSpPr>
         <p:spPr>
           <a:xfrm>
-            <a:off x="3008376" y="5572192"/>
-            <a:ext cx="695403" cy="130705"/>
+            <a:off x="3008376" y="5265599"/>
+            <a:ext cx="695403" cy="119948"/>
           </a:xfrm>
           <a:prstGeom prst="rect">
             <a:avLst/>
@@ -42639,8 +42816,8 @@
         </p:nvSpPr>
         <p:spPr>
           <a:xfrm>
-            <a:off x="4754880" y="5506840"/>
-            <a:ext cx="1143000" cy="261411"/>
+            <a:off x="4754880" y="5205625"/>
+            <a:ext cx="1143000" cy="239896"/>
           </a:xfrm>
           <a:prstGeom prst="rect">
             <a:avLst/>
@@ -42678,8 +42855,8 @@
         </p:nvSpPr>
         <p:spPr>
           <a:xfrm>
-            <a:off x="658368" y="5768250"/>
-            <a:ext cx="310896" cy="261411"/>
+            <a:off x="658368" y="5445521"/>
+            <a:ext cx="310896" cy="239896"/>
           </a:xfrm>
           <a:prstGeom prst="rect">
             <a:avLst/>
@@ -42717,8 +42894,8 @@
         </p:nvSpPr>
         <p:spPr>
           <a:xfrm>
-            <a:off x="1014984" y="5768250"/>
-            <a:ext cx="1920240" cy="261411"/>
+            <a:off x="1014984" y="5445521"/>
+            <a:ext cx="1920240" cy="239896"/>
           </a:xfrm>
           <a:prstGeom prst="rect">
             <a:avLst/>
@@ -42756,8 +42933,8 @@
         </p:nvSpPr>
         <p:spPr>
           <a:xfrm>
-            <a:off x="3008376" y="5833603"/>
-            <a:ext cx="688562" cy="130705"/>
+            <a:off x="3008376" y="5505495"/>
+            <a:ext cx="688562" cy="119948"/>
           </a:xfrm>
           <a:prstGeom prst="rect">
             <a:avLst/>
@@ -42776,8 +42953,8 @@
         </p:nvSpPr>
         <p:spPr>
           <a:xfrm>
-            <a:off x="4754880" y="5768250"/>
-            <a:ext cx="1143000" cy="261411"/>
+            <a:off x="4754880" y="5445521"/>
+            <a:ext cx="1143000" cy="239896"/>
           </a:xfrm>
           <a:prstGeom prst="rect">
             <a:avLst/>
@@ -42815,8 +42992,8 @@
         </p:nvSpPr>
         <p:spPr>
           <a:xfrm>
-            <a:off x="658368" y="6029661"/>
-            <a:ext cx="310896" cy="261411"/>
+            <a:off x="658368" y="5685416"/>
+            <a:ext cx="310896" cy="239896"/>
           </a:xfrm>
           <a:prstGeom prst="rect">
             <a:avLst/>
@@ -42854,8 +43031,8 @@
         </p:nvSpPr>
         <p:spPr>
           <a:xfrm>
-            <a:off x="1014984" y="6029661"/>
-            <a:ext cx="1920240" cy="261411"/>
+            <a:off x="1014984" y="5685416"/>
+            <a:ext cx="1920240" cy="239896"/>
           </a:xfrm>
           <a:prstGeom prst="rect">
             <a:avLst/>
@@ -42893,8 +43070,8 @@
         </p:nvSpPr>
         <p:spPr>
           <a:xfrm>
-            <a:off x="3008376" y="6095014"/>
-            <a:ext cx="686926" cy="130705"/>
+            <a:off x="3008376" y="5745390"/>
+            <a:ext cx="686926" cy="119948"/>
           </a:xfrm>
           <a:prstGeom prst="rect">
             <a:avLst/>
@@ -42913,8 +43090,8 @@
         </p:nvSpPr>
         <p:spPr>
           <a:xfrm>
-            <a:off x="4754880" y="6029661"/>
-            <a:ext cx="1143000" cy="261411"/>
+            <a:off x="4754880" y="5685416"/>
+            <a:ext cx="1143000" cy="239896"/>
           </a:xfrm>
           <a:prstGeom prst="rect">
             <a:avLst/>
@@ -42953,7 +43130,7 @@
         <p:spPr>
           <a:xfrm>
             <a:off x="6208776" y="1847088"/>
-            <a:ext cx="310896" cy="261411"/>
+            <a:ext cx="310896" cy="239896"/>
           </a:xfrm>
           <a:prstGeom prst="rect">
             <a:avLst/>
@@ -42992,7 +43169,7 @@
         <p:spPr>
           <a:xfrm>
             <a:off x="6565392" y="1847088"/>
-            <a:ext cx="1920240" cy="261411"/>
+            <a:ext cx="1920240" cy="239896"/>
           </a:xfrm>
           <a:prstGeom prst="rect">
             <a:avLst/>
@@ -43030,8 +43207,8 @@
         </p:nvSpPr>
         <p:spPr>
           <a:xfrm>
-            <a:off x="8558784" y="1912441"/>
-            <a:ext cx="677808" cy="130705"/>
+            <a:off x="8558784" y="1907062"/>
+            <a:ext cx="677808" cy="119948"/>
           </a:xfrm>
           <a:prstGeom prst="rect">
             <a:avLst/>
@@ -43051,7 +43228,7 @@
         <p:spPr>
           <a:xfrm>
             <a:off x="10305288" y="1847088"/>
-            <a:ext cx="1143000" cy="261411"/>
+            <a:ext cx="1143000" cy="239896"/>
           </a:xfrm>
           <a:prstGeom prst="rect">
             <a:avLst/>
@@ -43089,8 +43266,8 @@
         </p:nvSpPr>
         <p:spPr>
           <a:xfrm>
-            <a:off x="6208776" y="2108499"/>
-            <a:ext cx="310896" cy="261411"/>
+            <a:off x="6208776" y="2086984"/>
+            <a:ext cx="310896" cy="239896"/>
           </a:xfrm>
           <a:prstGeom prst="rect">
             <a:avLst/>
@@ -43128,8 +43305,8 @@
         </p:nvSpPr>
         <p:spPr>
           <a:xfrm>
-            <a:off x="6565392" y="2108499"/>
-            <a:ext cx="1920240" cy="261411"/>
+            <a:off x="6565392" y="2086984"/>
+            <a:ext cx="1920240" cy="239896"/>
           </a:xfrm>
           <a:prstGeom prst="rect">
             <a:avLst/>
@@ -43167,8 +43344,8 @@
         </p:nvSpPr>
         <p:spPr>
           <a:xfrm>
-            <a:off x="8558784" y="2173852"/>
-            <a:ext cx="661087" cy="130705"/>
+            <a:off x="8558784" y="2146957"/>
+            <a:ext cx="661087" cy="119948"/>
           </a:xfrm>
           <a:prstGeom prst="rect">
             <a:avLst/>
@@ -43187,8 +43364,8 @@
         </p:nvSpPr>
         <p:spPr>
           <a:xfrm>
-            <a:off x="10305288" y="2108499"/>
-            <a:ext cx="1143000" cy="261411"/>
+            <a:off x="10305288" y="2086984"/>
+            <a:ext cx="1143000" cy="239896"/>
           </a:xfrm>
           <a:prstGeom prst="rect">
             <a:avLst/>
@@ -43226,8 +43403,8 @@
         </p:nvSpPr>
         <p:spPr>
           <a:xfrm>
-            <a:off x="6208776" y="2369910"/>
-            <a:ext cx="310896" cy="261411"/>
+            <a:off x="6208776" y="2326879"/>
+            <a:ext cx="310896" cy="239896"/>
           </a:xfrm>
           <a:prstGeom prst="rect">
             <a:avLst/>
@@ -43265,8 +43442,8 @@
         </p:nvSpPr>
         <p:spPr>
           <a:xfrm>
-            <a:off x="6565392" y="2369910"/>
-            <a:ext cx="1920240" cy="261411"/>
+            <a:off x="6565392" y="2326879"/>
+            <a:ext cx="1920240" cy="239896"/>
           </a:xfrm>
           <a:prstGeom prst="rect">
             <a:avLst/>
@@ -43304,8 +43481,8 @@
         </p:nvSpPr>
         <p:spPr>
           <a:xfrm>
-            <a:off x="8558784" y="2435262"/>
-            <a:ext cx="616668" cy="130705"/>
+            <a:off x="8558784" y="2386853"/>
+            <a:ext cx="616668" cy="119948"/>
           </a:xfrm>
           <a:prstGeom prst="rect">
             <a:avLst/>
@@ -43324,8 +43501,8 @@
         </p:nvSpPr>
         <p:spPr>
           <a:xfrm>
-            <a:off x="10305288" y="2369910"/>
-            <a:ext cx="1143000" cy="261411"/>
+            <a:off x="10305288" y="2326879"/>
+            <a:ext cx="1143000" cy="239896"/>
           </a:xfrm>
           <a:prstGeom prst="rect">
             <a:avLst/>
@@ -43363,8 +43540,8 @@
         </p:nvSpPr>
         <p:spPr>
           <a:xfrm>
-            <a:off x="6208776" y="2631320"/>
-            <a:ext cx="310896" cy="261411"/>
+            <a:off x="6208776" y="2566775"/>
+            <a:ext cx="310896" cy="239896"/>
           </a:xfrm>
           <a:prstGeom prst="rect">
             <a:avLst/>
@@ -43402,8 +43579,8 @@
         </p:nvSpPr>
         <p:spPr>
           <a:xfrm>
-            <a:off x="6565392" y="2631320"/>
-            <a:ext cx="1920240" cy="261411"/>
+            <a:off x="6565392" y="2566775"/>
+            <a:ext cx="1920240" cy="239896"/>
           </a:xfrm>
           <a:prstGeom prst="rect">
             <a:avLst/>
@@ -43441,8 +43618,8 @@
         </p:nvSpPr>
         <p:spPr>
           <a:xfrm>
-            <a:off x="8558784" y="2696673"/>
-            <a:ext cx="593725" cy="130705"/>
+            <a:off x="8558784" y="2626748"/>
+            <a:ext cx="593725" cy="119948"/>
           </a:xfrm>
           <a:prstGeom prst="rect">
             <a:avLst/>
@@ -43461,8 +43638,8 @@
         </p:nvSpPr>
         <p:spPr>
           <a:xfrm>
-            <a:off x="10305288" y="2631320"/>
-            <a:ext cx="1143000" cy="261411"/>
+            <a:off x="10305288" y="2566775"/>
+            <a:ext cx="1143000" cy="239896"/>
           </a:xfrm>
           <a:prstGeom prst="rect">
             <a:avLst/>
@@ -43500,8 +43677,8 @@
         </p:nvSpPr>
         <p:spPr>
           <a:xfrm>
-            <a:off x="6208776" y="2892731"/>
-            <a:ext cx="310896" cy="261411"/>
+            <a:off x="6208776" y="2806670"/>
+            <a:ext cx="310896" cy="239896"/>
           </a:xfrm>
           <a:prstGeom prst="rect">
             <a:avLst/>
@@ -43539,8 +43716,8 @@
         </p:nvSpPr>
         <p:spPr>
           <a:xfrm>
-            <a:off x="6565392" y="2892731"/>
-            <a:ext cx="1920240" cy="261411"/>
+            <a:off x="6565392" y="2806670"/>
+            <a:ext cx="1920240" cy="239896"/>
           </a:xfrm>
           <a:prstGeom prst="rect">
             <a:avLst/>
@@ -43578,8 +43755,8 @@
         </p:nvSpPr>
         <p:spPr>
           <a:xfrm>
-            <a:off x="8558784" y="2958084"/>
-            <a:ext cx="580349" cy="130705"/>
+            <a:off x="8558784" y="2866644"/>
+            <a:ext cx="580349" cy="119948"/>
           </a:xfrm>
           <a:prstGeom prst="rect">
             <a:avLst/>
@@ -43598,8 +43775,8 @@
         </p:nvSpPr>
         <p:spPr>
           <a:xfrm>
-            <a:off x="10305288" y="2892731"/>
-            <a:ext cx="1143000" cy="261411"/>
+            <a:off x="10305288" y="2806670"/>
+            <a:ext cx="1143000" cy="239896"/>
           </a:xfrm>
           <a:prstGeom prst="rect">
             <a:avLst/>
@@ -43637,8 +43814,8 @@
         </p:nvSpPr>
         <p:spPr>
           <a:xfrm>
-            <a:off x="6208776" y="3154142"/>
-            <a:ext cx="310896" cy="261411"/>
+            <a:off x="6208776" y="3046566"/>
+            <a:ext cx="310896" cy="239896"/>
           </a:xfrm>
           <a:prstGeom prst="rect">
             <a:avLst/>
@@ -43676,8 +43853,8 @@
         </p:nvSpPr>
         <p:spPr>
           <a:xfrm>
-            <a:off x="6565392" y="3154142"/>
-            <a:ext cx="1920240" cy="261411"/>
+            <a:off x="6565392" y="3046566"/>
+            <a:ext cx="1920240" cy="239896"/>
           </a:xfrm>
           <a:prstGeom prst="rect">
             <a:avLst/>
@@ -43715,8 +43892,8 @@
         </p:nvSpPr>
         <p:spPr>
           <a:xfrm>
-            <a:off x="8558784" y="3219495"/>
-            <a:ext cx="577469" cy="130705"/>
+            <a:off x="8558784" y="3106540"/>
+            <a:ext cx="577469" cy="119948"/>
           </a:xfrm>
           <a:prstGeom prst="rect">
             <a:avLst/>
@@ -43735,8 +43912,8 @@
         </p:nvSpPr>
         <p:spPr>
           <a:xfrm>
-            <a:off x="10305288" y="3154142"/>
-            <a:ext cx="1143000" cy="261411"/>
+            <a:off x="10305288" y="3046566"/>
+            <a:ext cx="1143000" cy="239896"/>
           </a:xfrm>
           <a:prstGeom prst="rect">
             <a:avLst/>
@@ -43774,8 +43951,8 @@
         </p:nvSpPr>
         <p:spPr>
           <a:xfrm>
-            <a:off x="6208776" y="3415553"/>
-            <a:ext cx="310896" cy="261411"/>
+            <a:off x="6208776" y="3286461"/>
+            <a:ext cx="310896" cy="239896"/>
           </a:xfrm>
           <a:prstGeom prst="rect">
             <a:avLst/>
@@ -43813,8 +43990,8 @@
         </p:nvSpPr>
         <p:spPr>
           <a:xfrm>
-            <a:off x="6565392" y="3415553"/>
-            <a:ext cx="1920240" cy="261411"/>
+            <a:off x="6565392" y="3286461"/>
+            <a:ext cx="1920240" cy="239896"/>
           </a:xfrm>
           <a:prstGeom prst="rect">
             <a:avLst/>
@@ -43852,8 +44029,8 @@
         </p:nvSpPr>
         <p:spPr>
           <a:xfrm>
-            <a:off x="8558784" y="3480906"/>
-            <a:ext cx="498268" cy="130705"/>
+            <a:off x="8558784" y="3346435"/>
+            <a:ext cx="498268" cy="119948"/>
           </a:xfrm>
           <a:prstGeom prst="rect">
             <a:avLst/>
@@ -43872,8 +44049,8 @@
         </p:nvSpPr>
         <p:spPr>
           <a:xfrm>
-            <a:off x="10305288" y="3415553"/>
-            <a:ext cx="1143000" cy="261411"/>
+            <a:off x="10305288" y="3286461"/>
+            <a:ext cx="1143000" cy="239896"/>
           </a:xfrm>
           <a:prstGeom prst="rect">
             <a:avLst/>
@@ -43911,8 +44088,8 @@
         </p:nvSpPr>
         <p:spPr>
           <a:xfrm>
-            <a:off x="6208776" y="3676964"/>
-            <a:ext cx="310896" cy="261411"/>
+            <a:off x="6208776" y="3526357"/>
+            <a:ext cx="310896" cy="239896"/>
           </a:xfrm>
           <a:prstGeom prst="rect">
             <a:avLst/>
@@ -43950,8 +44127,8 @@
         </p:nvSpPr>
         <p:spPr>
           <a:xfrm>
-            <a:off x="6565392" y="3676964"/>
-            <a:ext cx="1920240" cy="261411"/>
+            <a:off x="6565392" y="3526357"/>
+            <a:ext cx="1920240" cy="239896"/>
           </a:xfrm>
           <a:prstGeom prst="rect">
             <a:avLst/>
@@ -43989,8 +44166,8 @@
         </p:nvSpPr>
         <p:spPr>
           <a:xfrm>
-            <a:off x="8558784" y="3742316"/>
-            <a:ext cx="487865" cy="130705"/>
+            <a:off x="8558784" y="3586331"/>
+            <a:ext cx="487865" cy="119948"/>
           </a:xfrm>
           <a:prstGeom prst="rect">
             <a:avLst/>
@@ -44009,8 +44186,8 @@
         </p:nvSpPr>
         <p:spPr>
           <a:xfrm>
-            <a:off x="10305288" y="3676964"/>
-            <a:ext cx="1143000" cy="261411"/>
+            <a:off x="10305288" y="3526357"/>
+            <a:ext cx="1143000" cy="239896"/>
           </a:xfrm>
           <a:prstGeom prst="rect">
             <a:avLst/>
@@ -44048,8 +44225,8 @@
         </p:nvSpPr>
         <p:spPr>
           <a:xfrm>
-            <a:off x="6208776" y="3938375"/>
-            <a:ext cx="310896" cy="261411"/>
+            <a:off x="6208776" y="3766252"/>
+            <a:ext cx="310896" cy="239896"/>
           </a:xfrm>
           <a:prstGeom prst="rect">
             <a:avLst/>
@@ -44087,8 +44264,8 @@
         </p:nvSpPr>
         <p:spPr>
           <a:xfrm>
-            <a:off x="6565392" y="3938375"/>
-            <a:ext cx="1920240" cy="261411"/>
+            <a:off x="6565392" y="3766252"/>
+            <a:ext cx="1920240" cy="239896"/>
           </a:xfrm>
           <a:prstGeom prst="rect">
             <a:avLst/>
@@ -44126,8 +44303,8 @@
         </p:nvSpPr>
         <p:spPr>
           <a:xfrm>
-            <a:off x="8558784" y="4003727"/>
-            <a:ext cx="475017" cy="130705"/>
+            <a:off x="8558784" y="3826226"/>
+            <a:ext cx="475017" cy="119948"/>
           </a:xfrm>
           <a:prstGeom prst="rect">
             <a:avLst/>
@@ -44146,8 +44323,8 @@
         </p:nvSpPr>
         <p:spPr>
           <a:xfrm>
-            <a:off x="10305288" y="3938375"/>
-            <a:ext cx="1143000" cy="261411"/>
+            <a:off x="10305288" y="3766252"/>
+            <a:ext cx="1143000" cy="239896"/>
           </a:xfrm>
           <a:prstGeom prst="rect">
             <a:avLst/>
@@ -44185,8 +44362,8 @@
         </p:nvSpPr>
         <p:spPr>
           <a:xfrm>
-            <a:off x="6208776" y="4199785"/>
-            <a:ext cx="310896" cy="261411"/>
+            <a:off x="6208776" y="4006148"/>
+            <a:ext cx="310896" cy="239896"/>
           </a:xfrm>
           <a:prstGeom prst="rect">
             <a:avLst/>
@@ -44224,8 +44401,8 @@
         </p:nvSpPr>
         <p:spPr>
           <a:xfrm>
-            <a:off x="6565392" y="4199785"/>
-            <a:ext cx="1920240" cy="261411"/>
+            <a:off x="6565392" y="4006148"/>
+            <a:ext cx="1920240" cy="239896"/>
           </a:xfrm>
           <a:prstGeom prst="rect">
             <a:avLst/>
@@ -44263,8 +44440,8 @@
         </p:nvSpPr>
         <p:spPr>
           <a:xfrm>
-            <a:off x="8558784" y="4265138"/>
-            <a:ext cx="443916" cy="130705"/>
+            <a:off x="8558784" y="4066122"/>
+            <a:ext cx="443916" cy="119948"/>
           </a:xfrm>
           <a:prstGeom prst="rect">
             <a:avLst/>
@@ -44283,8 +44460,8 @@
         </p:nvSpPr>
         <p:spPr>
           <a:xfrm>
-            <a:off x="10305288" y="4199785"/>
-            <a:ext cx="1143000" cy="261411"/>
+            <a:off x="10305288" y="4006148"/>
+            <a:ext cx="1143000" cy="239896"/>
           </a:xfrm>
           <a:prstGeom prst="rect">
             <a:avLst/>
@@ -44322,8 +44499,8 @@
         </p:nvSpPr>
         <p:spPr>
           <a:xfrm>
-            <a:off x="6208776" y="4461196"/>
-            <a:ext cx="310896" cy="261411"/>
+            <a:off x="6208776" y="4246043"/>
+            <a:ext cx="310896" cy="239896"/>
           </a:xfrm>
           <a:prstGeom prst="rect">
             <a:avLst/>
@@ -44361,8 +44538,8 @@
         </p:nvSpPr>
         <p:spPr>
           <a:xfrm>
-            <a:off x="6565392" y="4461196"/>
-            <a:ext cx="1920240" cy="261411"/>
+            <a:off x="6565392" y="4246043"/>
+            <a:ext cx="1920240" cy="239896"/>
           </a:xfrm>
           <a:prstGeom prst="rect">
             <a:avLst/>
@@ -44400,8 +44577,8 @@
         </p:nvSpPr>
         <p:spPr>
           <a:xfrm>
-            <a:off x="8558784" y="4526549"/>
-            <a:ext cx="388888" cy="130705"/>
+            <a:off x="8558784" y="4306017"/>
+            <a:ext cx="388888" cy="119948"/>
           </a:xfrm>
           <a:prstGeom prst="rect">
             <a:avLst/>
@@ -44420,8 +44597,8 @@
         </p:nvSpPr>
         <p:spPr>
           <a:xfrm>
-            <a:off x="10305288" y="4461196"/>
-            <a:ext cx="1143000" cy="261411"/>
+            <a:off x="10305288" y="4246043"/>
+            <a:ext cx="1143000" cy="239896"/>
           </a:xfrm>
           <a:prstGeom prst="rect">
             <a:avLst/>
@@ -44459,8 +44636,8 @@
         </p:nvSpPr>
         <p:spPr>
           <a:xfrm>
-            <a:off x="6208776" y="4722607"/>
-            <a:ext cx="310896" cy="261411"/>
+            <a:off x="6208776" y="4485939"/>
+            <a:ext cx="310896" cy="239896"/>
           </a:xfrm>
           <a:prstGeom prst="rect">
             <a:avLst/>
@@ -44498,8 +44675,8 @@
         </p:nvSpPr>
         <p:spPr>
           <a:xfrm>
-            <a:off x="6565392" y="4722607"/>
-            <a:ext cx="1920240" cy="261411"/>
+            <a:off x="6565392" y="4485939"/>
+            <a:ext cx="1920240" cy="239896"/>
           </a:xfrm>
           <a:prstGeom prst="rect">
             <a:avLst/>
@@ -44537,8 +44714,8 @@
         </p:nvSpPr>
         <p:spPr>
           <a:xfrm>
-            <a:off x="8558784" y="4787960"/>
-            <a:ext cx="383191" cy="130705"/>
+            <a:off x="8558784" y="4545913"/>
+            <a:ext cx="383191" cy="119948"/>
           </a:xfrm>
           <a:prstGeom prst="rect">
             <a:avLst/>
@@ -44557,8 +44734,8 @@
         </p:nvSpPr>
         <p:spPr>
           <a:xfrm>
-            <a:off x="10305288" y="4722607"/>
-            <a:ext cx="1143000" cy="261411"/>
+            <a:off x="10305288" y="4485939"/>
+            <a:ext cx="1143000" cy="239896"/>
           </a:xfrm>
           <a:prstGeom prst="rect">
             <a:avLst/>
@@ -44596,8 +44773,8 @@
         </p:nvSpPr>
         <p:spPr>
           <a:xfrm>
-            <a:off x="6208776" y="4984018"/>
-            <a:ext cx="310896" cy="261411"/>
+            <a:off x="6208776" y="4725834"/>
+            <a:ext cx="310896" cy="239896"/>
           </a:xfrm>
           <a:prstGeom prst="rect">
             <a:avLst/>
@@ -44635,8 +44812,8 @@
         </p:nvSpPr>
         <p:spPr>
           <a:xfrm>
-            <a:off x="6565392" y="4984018"/>
-            <a:ext cx="1920240" cy="261411"/>
+            <a:off x="6565392" y="4725834"/>
+            <a:ext cx="1920240" cy="239896"/>
           </a:xfrm>
           <a:prstGeom prst="rect">
             <a:avLst/>
@@ -44674,8 +44851,8 @@
         </p:nvSpPr>
         <p:spPr>
           <a:xfrm>
-            <a:off x="8558784" y="5049371"/>
-            <a:ext cx="347029" cy="130705"/>
+            <a:off x="8558784" y="4785808"/>
+            <a:ext cx="347029" cy="119948"/>
           </a:xfrm>
           <a:prstGeom prst="rect">
             <a:avLst/>
@@ -44694,8 +44871,8 @@
         </p:nvSpPr>
         <p:spPr>
           <a:xfrm>
-            <a:off x="10305288" y="4984018"/>
-            <a:ext cx="1143000" cy="261411"/>
+            <a:off x="10305288" y="4725834"/>
+            <a:ext cx="1143000" cy="239896"/>
           </a:xfrm>
           <a:prstGeom prst="rect">
             <a:avLst/>
@@ -44733,8 +44910,8 @@
         </p:nvSpPr>
         <p:spPr>
           <a:xfrm>
-            <a:off x="6208776" y="5245429"/>
-            <a:ext cx="310896" cy="261411"/>
+            <a:off x="6208776" y="4965730"/>
+            <a:ext cx="310896" cy="239896"/>
           </a:xfrm>
           <a:prstGeom prst="rect">
             <a:avLst/>
@@ -44772,8 +44949,8 @@
         </p:nvSpPr>
         <p:spPr>
           <a:xfrm>
-            <a:off x="6565392" y="5245429"/>
-            <a:ext cx="1920240" cy="261411"/>
+            <a:off x="6565392" y="4965730"/>
+            <a:ext cx="1920240" cy="239896"/>
           </a:xfrm>
           <a:prstGeom prst="rect">
             <a:avLst/>
@@ -44811,8 +44988,8 @@
         </p:nvSpPr>
         <p:spPr>
           <a:xfrm>
-            <a:off x="8558784" y="5310781"/>
-            <a:ext cx="260164" cy="130705"/>
+            <a:off x="8558784" y="5025704"/>
+            <a:ext cx="260164" cy="119948"/>
           </a:xfrm>
           <a:prstGeom prst="rect">
             <a:avLst/>
@@ -44831,8 +45008,8 @@
         </p:nvSpPr>
         <p:spPr>
           <a:xfrm>
-            <a:off x="10305288" y="5245429"/>
-            <a:ext cx="1143000" cy="261411"/>
+            <a:off x="10305288" y="4965730"/>
+            <a:ext cx="1143000" cy="239896"/>
           </a:xfrm>
           <a:prstGeom prst="rect">
             <a:avLst/>
@@ -44870,8 +45047,8 @@
         </p:nvSpPr>
         <p:spPr>
           <a:xfrm>
-            <a:off x="6208776" y="5506840"/>
-            <a:ext cx="310896" cy="261411"/>
+            <a:off x="6208776" y="5205625"/>
+            <a:ext cx="310896" cy="239896"/>
           </a:xfrm>
           <a:prstGeom prst="rect">
             <a:avLst/>
@@ -44909,8 +45086,8 @@
         </p:nvSpPr>
         <p:spPr>
           <a:xfrm>
-            <a:off x="6565392" y="5506840"/>
-            <a:ext cx="1920240" cy="261411"/>
+            <a:off x="6565392" y="5205625"/>
+            <a:ext cx="1920240" cy="239896"/>
           </a:xfrm>
           <a:prstGeom prst="rect">
             <a:avLst/>
@@ -44948,8 +45125,8 @@
         </p:nvSpPr>
         <p:spPr>
           <a:xfrm>
-            <a:off x="8558784" y="5572192"/>
-            <a:ext cx="201580" cy="130705"/>
+            <a:off x="8558784" y="5265599"/>
+            <a:ext cx="201580" cy="119948"/>
           </a:xfrm>
           <a:prstGeom prst="rect">
             <a:avLst/>
@@ -44968,8 +45145,8 @@
         </p:nvSpPr>
         <p:spPr>
           <a:xfrm>
-            <a:off x="10305288" y="5506840"/>
-            <a:ext cx="1143000" cy="261411"/>
+            <a:off x="10305288" y="5205625"/>
+            <a:ext cx="1143000" cy="239896"/>
           </a:xfrm>
           <a:prstGeom prst="rect">
             <a:avLst/>
@@ -45007,8 +45184,8 @@
         </p:nvSpPr>
         <p:spPr>
           <a:xfrm>
-            <a:off x="6208776" y="5768250"/>
-            <a:ext cx="310896" cy="261411"/>
+            <a:off x="6208776" y="5445521"/>
+            <a:ext cx="310896" cy="239896"/>
           </a:xfrm>
           <a:prstGeom prst="rect">
             <a:avLst/>
@@ -45046,8 +45223,8 @@
         </p:nvSpPr>
         <p:spPr>
           <a:xfrm>
-            <a:off x="6565392" y="5768250"/>
-            <a:ext cx="1920240" cy="261411"/>
+            <a:off x="6565392" y="5445521"/>
+            <a:ext cx="1920240" cy="239896"/>
           </a:xfrm>
           <a:prstGeom prst="rect">
             <a:avLst/>
@@ -45085,8 +45262,8 @@
         </p:nvSpPr>
         <p:spPr>
           <a:xfrm>
-            <a:off x="8558784" y="5833603"/>
-            <a:ext cx="158552" cy="130705"/>
+            <a:off x="8558784" y="5505495"/>
+            <a:ext cx="158552" cy="119948"/>
           </a:xfrm>
           <a:prstGeom prst="rect">
             <a:avLst/>
@@ -45105,8 +45282,8 @@
         </p:nvSpPr>
         <p:spPr>
           <a:xfrm>
-            <a:off x="10305288" y="5768250"/>
-            <a:ext cx="1143000" cy="261411"/>
+            <a:off x="10305288" y="5445521"/>
+            <a:ext cx="1143000" cy="239896"/>
           </a:xfrm>
           <a:prstGeom prst="rect">
             <a:avLst/>
@@ -45145,7 +45322,7 @@
         <p:spPr>
           <a:xfrm>
             <a:off x="3820171" y="1847088"/>
-            <a:ext cx="14630" cy="4443984"/>
+            <a:ext cx="14630" cy="4078224"/>
           </a:xfrm>
           <a:prstGeom prst="rect">
             <a:avLst/>
@@ -45165,7 +45342,7 @@
         <p:spPr>
           <a:xfrm>
             <a:off x="9370579" y="1847088"/>
-            <a:ext cx="14630" cy="4443984"/>
+            <a:ext cx="14630" cy="4078224"/>
           </a:xfrm>
           <a:prstGeom prst="rect">
             <a:avLst/>
@@ -45185,7 +45362,7 @@
         <p:spPr>
           <a:xfrm>
             <a:off x="6085332" y="1847088"/>
-            <a:ext cx="10973" cy="4443984"/>
+            <a:ext cx="10973" cy="4078224"/>
           </a:xfrm>
           <a:prstGeom prst="rect">
             <a:avLst/>
@@ -45195,6 +45372,65 @@
           </a:solidFill>
           <a:ln/>
         </p:spPr>
+      </p:sp>
+      <p:sp>
+        <p:nvSpPr>
+          <p:cNvPr id="147" name="Shape 144"/>
+          <p:cNvSpPr/>
+          <p:nvPr/>
+        </p:nvSpPr>
+        <p:spPr>
+          <a:xfrm>
+            <a:off x="457200" y="6126480"/>
+            <a:ext cx="11274552" cy="371856"/>
+          </a:xfrm>
+          <a:prstGeom prst="rect">
+            <a:avLst/>
+          </a:prstGeom>
+          <a:solidFill>
+            <a:srgbClr val="EDF4FA"/>
+          </a:solidFill>
+          <a:ln/>
+        </p:spPr>
+      </p:sp>
+      <p:sp>
+        <p:nvSpPr>
+          <p:cNvPr id="148" name="Text 145"/>
+          <p:cNvSpPr txBox="1"/>
+          <p:nvPr/>
+        </p:nvSpPr>
+        <p:spPr>
+          <a:xfrm>
+            <a:off x="658368" y="6144768"/>
+            <a:ext cx="10927080" cy="335280"/>
+          </a:xfrm>
+          <a:prstGeom prst="rect">
+            <a:avLst/>
+          </a:prstGeom>
+          <a:noFill/>
+          <a:ln/>
+        </p:spPr>
+        <p:txBody>
+          <a:bodyPr wrap="square" lIns="0" tIns="0" rIns="0" bIns="0" rtlCol="0" anchor="ctr"/>
+          <a:lstStyle/>
+          <a:p>
+            <a:pPr indent="0" marL="0">
+              <a:buNone/>
+            </a:pPr>
+            <a:r>
+              <a:rPr lang="en-US" sz="1600" b="1" dirty="0">
+                <a:solidFill>
+                  <a:srgbClr val="0B2C4A"/>
+                </a:solidFill>
+                <a:latin typeface="Inter" pitchFamily="34" charset="0"/>
+                <a:ea typeface="Inter" pitchFamily="34" charset="-122"/>
+                <a:cs typeface="Inter" pitchFamily="34" charset="-120"/>
+              </a:rPr>
+              <a:t>12 of 33 stores at or above 10%. The group sits at 9.2%.</a:t>
+            </a:r>
+            <a:endParaRPr lang="en-US" sz="1600" dirty="0"/>
+          </a:p>
+        </p:txBody>
       </p:sp>
     </p:spTree>
   </p:cSld>

--- a/day2-deck/decks/Opcode Benchmarks - House Style.pptx
+++ b/day2-deck/decks/Opcode Benchmarks - House Style.pptx
@@ -11804,7 +11804,7 @@
                 <a:ea typeface="Inter" pitchFamily="34" charset="-122"/>
                 <a:cs typeface="Inter" pitchFamily="34" charset="-120"/>
               </a:rPr>
-              <a:t>Jul–Sep vs Jan–Mar this year</a:t>
+              <a:t>Q3 vs Q1, this year</a:t>
             </a:r>
             <a:endParaRPr lang="en-US" sz="1200" dirty="0"/>
           </a:p>
@@ -20703,7 +20703,7 @@
                 <a:ea typeface="Inter" pitchFamily="34" charset="-122"/>
                 <a:cs typeface="Inter" pitchFamily="34" charset="-120"/>
               </a:rPr>
-              <a:t>Jul–Sep vs Jan–Mar this year</a:t>
+              <a:t>Q3 vs Q1, this year</a:t>
             </a:r>
             <a:endParaRPr lang="en-US" sz="1200" dirty="0"/>
           </a:p>
@@ -29662,7 +29662,7 @@
                 <a:ea typeface="Inter" pitchFamily="34" charset="-122"/>
                 <a:cs typeface="Inter" pitchFamily="34" charset="-120"/>
               </a:rPr>
-              <a:t>Jul–Sep vs Jan–Mar this year</a:t>
+              <a:t>Q3 vs Q1, this year</a:t>
             </a:r>
             <a:endParaRPr lang="en-US" sz="1200" dirty="0"/>
           </a:p>
@@ -38641,7 +38641,7 @@
                 <a:ea typeface="Inter" pitchFamily="34" charset="-122"/>
                 <a:cs typeface="Inter" pitchFamily="34" charset="-120"/>
               </a:rPr>
-              <a:t>Jul–Sep vs Jan–Mar this year</a:t>
+              <a:t>Q3 vs Q1, this year</a:t>
             </a:r>
             <a:endParaRPr lang="en-US" sz="1200" dirty="0"/>
           </a:p>

--- a/day2-deck/decks/Opcode Benchmarks - House Style.pptx
+++ b/day2-deck/decks/Opcode Benchmarks - House Style.pptx
@@ -8262,37 +8262,37 @@
           <a:p>
             <a:r>
               <a:rPr lang="en-US" dirty="0"/>
-              <a:t>Takeaway with the store call-outs (off the slide): 7 of 33 stores at or above 7.5%, led by Subaru St George at 13.8%. The group sits at 5.8%.Source: Qlik - Closed Repair Orders. Customer pay, Jan-Sep by close month. Same-store, INEOS excluded (opened 2026). GMC Prescott body shop labor excluded. Jan-Sep 2026 YTD; green at or above the 7.5% benchmark, red below. CHECK OP-CODE MAPPING - under 0.5%: VW HENDERSON, AUDI HENDERSON, VOLVO. Near zero in 2025, so year-over-year gain may be mapping: HONDA SPOKANE, SUBARU ST GEORGE, LR LV, LR RENO.
+              <a:t>Takeaway with the store call-outs (off the slide): 7 of 33 stores at or above 7.5%, led by Subaru St George at 13.8%. The group sits at 5.8%.Source: Qlik - Closed Repair Orders. Customer pay, Jan-Sep by close month. Same-store, INEOS excluded (opened 2026). GMC Prescott body shop labor excluded. Jan-Sep 2026 YTD; green at or above the 7.5% benchmark, red below. Near zero in 2025, so year-over-year gain may be mapping: HONDA SPOKANE, SUBARU ST GEORGE, LR LV, LR RENO.
 SUBARU ST GEORGE: 13.8% (2025 0.0%)
 HONDA HENDERSON: 12.0% (2025 10.4%)
-SUBARU PRESCOTT: 9.8% (2025 5.9%)
-ACURA: 9.4% (2025 5.4%)
+SUBARU PRESCOTT: 9.7% (2025 5.9%)
+ACURA: 9.3% (2025 5.3%)
 KIA ST GEORGE: 8.9% (2025 5.6%)
 LINCOLN: 8.2% (2025 2.1%)
-HONDA NORTH: 7.7% (2025 5.3%)
-HYUNDAI PRESCOTT: 7.4% (2025 6.7%)
-SUBARU LV: 7.1% (2025 8.2%)
-TOYOTA PRESCOTT: 6.5% (2025 5.0%)
-TOYOTA HENDERSON: 6.0% (2025 6.1%)
-HYUNDAI ST GEORGE: 5.9% (2025 2.4%)
-TOYOTA SPOKANE: 5.8% (2025 6.1%)
+HONDA NORTH: 7.6% (2025 5.3%)
+HYUNDAI PRESCOTT: 7.3% (2025 6.6%)
+SUBARU LV: 7.0% (2025 8.2%)
+TOYOTA PRESCOTT: 6.4% (2025 5.0%)
+TOYOTA HENDERSON: 6.0% (2025 6.0%)
+HYUNDAI ST GEORGE: 5.8% (2025 2.3%)
+TOYOTA SPOKANE: 5.8% (2025 6.0%)
 LR LV: 5.5% (2025 0.2%)
-CHEVY LV: 5.3% (2025 4.8%)
+CHEVY LV: 5.2% (2025 4.8%)
 MAZDA: 5.2% (2025 1.4%)
-CADILLAC: 5.1% (2025 4.4%)
-LR RENO: 4.6% (2025 0.0%)
-LEXUS: 4.3% (2025 1.9%)
-NISSAN: 4.2% (2025 0.8%)
-GMC PRESCOTT: 3.6% (2025 3.0%)
+CADILLAC: 5.1% (2025 4.3%)
+LR RENO: 4.5% (2025 0.0%)
+LEXUS: 4.2% (2025 1.9%)
+NISSAN: 4.1% (2025 0.8%)
+GMC PRESCOTT: 3.6% (2025 2.9%)
 HONDA SPOKANE: 3.2% (2025 0.0%)
 KIA LV: 3.2% (2025 2.9%)
-CDJR POST FALLS: 3.0% (2025 4.0%)
+CDJR POST FALLS: 3.0% (2025 3.9%)
 CHEVY GMC BULLHEAD: 2.7% (2025 1.8%)
-VW ST GEORGE: 2.7% (2025 2.4%)
-LR HENDERSON: 2.6% (2025 2.4%)
-TOYOTA FLAGSTAFF: 1.7% (2025 1.7%)
+VW ST GEORGE: 2.7% (2025 2.3%)
+LR HENDERSON: 2.5% (2025 2.4%)
+TOYOTA FLAGSTAFF: 1.6% (2025 1.6%)
 AUDI RENO: 0.8% (2025 0.0%)
-HONDA FLAGSTAFF: 0.7% (2025 0.7%)
+HONDA FLAGSTAFF: 0.7% (2025 0.6%)
 VW HENDERSON: 0.0% (2025 0.0%)
 AUDI HENDERSON: 0.0% (2025 0.0%)
 VOLVO: 0.0% (2025 0.0%)</a:t>
@@ -8562,36 +8562,36 @@
               <a:t>Takeaway with the store call-outs (off the slide): 8 of 33 stores at or above 15%, led by Audi Henderson at 27.5%. The group sits at 13.2%.Source: Qlik - Closed Repair Orders. Customer pay, Jan-Sep by close month. Same-store, INEOS excluded (opened 2026). GMC Prescott body shop labor excluded. Jan-Sep 2026 YTD; green at or above the 15% benchmark, red below.
 AUDI HENDERSON: 27.5% (2025 21.8%)
 LR HENDERSON: 24.4% (2025 19.4%)
-HYUNDAI PRESCOTT: 21.8% (2025 15.0%)
+HYUNDAI PRESCOTT: 21.7% (2025 14.9%)
 HONDA HENDERSON: 21.3% (2025 20.7%)
-ACURA: 17.5% (2025 14.2%)
-LR LV: 17.4% (2025 11.4%)
-MAZDA: 16.7% (2025 10.0%)
-HONDA NORTH: 16.2% (2025 15.0%)
-HYUNDAI ST GEORGE: 14.8% (2025 5.2%)
-SUBARU LV: 14.6% (2025 16.1%)
-TOYOTA HENDERSON: 14.5% (2025 15.1%)
-CADILLAC: 13.9% (2025 9.7%)
-VOLVO: 13.9% (2025 13.5%)
-VW HENDERSON: 13.6% (2025 13.5%)
-LR RENO: 12.9% (2025 17.7%)
-CHEVY LV: 12.9% (2025 13.4%)
-SUBARU PRESCOTT: 12.6% (2025 7.1%)
-HONDA SPOKANE: 12.5% (2025 10.8%)
-TOYOTA PRESCOTT: 12.3% (2025 9.5%)
+ACURA: 17.5% (2025 14.1%)
+LR LV: 17.3% (2025 11.4%)
+MAZDA: 16.6% (2025 9.9%)
+HONDA NORTH: 16.1% (2025 14.9%)
+HYUNDAI ST GEORGE: 14.8% (2025 5.1%)
+SUBARU LV: 14.5% (2025 16.0%)
+TOYOTA HENDERSON: 14.5% (2025 15.0%)
+CADILLAC: 13.8% (2025 9.7%)
+VOLVO: 13.8% (2025 13.4%)
+VW HENDERSON: 13.6% (2025 13.4%)
+LR RENO: 12.8% (2025 17.7%)
+CHEVY LV: 12.8% (2025 13.3%)
+SUBARU PRESCOTT: 12.5% (2025 7.0%)
+HONDA SPOKANE: 12.5% (2025 10.7%)
+TOYOTA PRESCOTT: 12.3% (2025 9.4%)
 AUDI RENO: 11.8% (2025 11.7%)
-GMC PRESCOTT: 11.7% (2025 5.0%)
-LEXUS: 11.4% (2025 8.3%)
-CHEVY GMC BULLHEAD: 11.1% (2025 11.2%)
-HONDA FLAGSTAFF: 11.1% (2025 5.6%)
-SUBARU ST GEORGE: 11.1% (2025 11.9%)
-KIA LV: 9.8% (2025 13.3%)
+GMC PRESCOTT: 11.7% (2025 4.9%)
+LEXUS: 11.3% (2025 8.2%)
+CHEVY GMC BULLHEAD: 11.1% (2025 11.1%)
+HONDA FLAGSTAFF: 11.0% (2025 5.5%)
+SUBARU ST GEORGE: 11.0% (2025 11.9%)
+KIA LV: 9.7% (2025 13.3%)
 TOYOTA FLAGSTAFF: 9.7% (2025 6.3%)
 LINCOLN: 8.4% (2025 2.7%)
-KIA ST GEORGE: 8.0% (2025 2.5%)
-NISSAN: 7.5% (2025 5.3%)
+KIA ST GEORGE: 8.0% (2025 2.4%)
+NISSAN: 7.4% (2025 5.2%)
 VW ST GEORGE: 5.6% (2025 3.9%)
-TOYOTA SPOKANE: 4.3% (2025 2.6%)
+TOYOTA SPOKANE: 4.2% (2025 2.6%)
 CDJR POST FALLS: 4.2% (2025 1.8%)</a:t>
             </a:r>
             <a:endParaRPr lang="en-US" dirty="0"/>
@@ -8856,39 +8856,39 @@
           <a:p>
             <a:r>
               <a:rPr lang="en-US" dirty="0"/>
-              <a:t>Takeaway with the store call-outs (off the slide): 4 of 33 stores at or above 15%, led by LR Henderson at 27.0%. The group sits at 8.3%.Source: Qlik - Closed Repair Orders. Customer pay, Jan-Sep by close month. Same-store, INEOS excluded (opened 2026). GMC Prescott body shop labor excluded. Jan-Sep 2026 YTD; green at or above the 15% benchmark, red below. CHECK OP-CODE MAPPING - under 0.5%: TOYOTA SPOKANE, LEXUS, AUDI RENO, AUDI HENDERSON, VW ST GEORGE. Near zero in 2025, so year-over-year gain may be mapping: HONDA SPOKANE, SUBARU PRESCOTT.
-LR HENDERSON: 27.0% (2025 22.9%)
-HONDA HENDERSON: 18.4% (2025 17.7%)
-LR LV: 17.0% (2025 3.4%)
-LR RENO: 17.0% (2025 16.3%)
-SUBARU PRESCOTT: 15.0% (2025 0.1%)
-ACURA: 14.1% (2025 10.3%)
-HYUNDAI PRESCOTT: 13.5% (2025 8.9%)
-MAZDA: 13.2% (2025 6.5%)
+              <a:t>Takeaway with the store call-outs (off the slide): 4 of 33 stores at or above 15%, led by LR Henderson at 27.0%. The group sits at 8.3%.Source: Qlik - Closed Repair Orders. Customer pay, Jan-Sep by close month. Same-store, INEOS excluded (opened 2026). GMC Prescott body shop labor excluded. Jan-Sep 2026 YTD; green at or above the 15% benchmark, red below. Near zero in 2025, so year-over-year gain may be mapping: HONDA SPOKANE, SUBARU PRESCOTT.
+LR HENDERSON: 27.0% (2025 22.8%)
+HONDA HENDERSON: 18.4% (2025 17.6%)
+LR LV: 16.9% (2025 3.4%)
+LR RENO: 16.9% (2025 16.3%)
+SUBARU PRESCOTT: 14.9% (2025 0.1%)
+ACURA: 14.1% (2025 10.2%)
+HYUNDAI PRESCOTT: 13.5% (2025 8.8%)
+MAZDA: 13.1% (2025 6.5%)
 HONDA NORTH: 12.0% (2025 11.3%)
 VOLVO: 11.7% (2025 10.9%)
 TOYOTA HENDERSON: 11.2% (2025 11.7%)
 SUBARU LV: 10.2% (2025 11.3%)
-CHEVY GMC BULLHEAD: 9.1% (2025 6.5%)
-VW HENDERSON: 8.3% (2025 7.0%)
-GMC PRESCOTT: 7.8% (2025 2.0%)
+CHEVY GMC BULLHEAD: 9.0% (2025 6.5%)
+VW HENDERSON: 8.2% (2025 7.0%)
+GMC PRESCOTT: 7.7% (2025 2.0%)
 KIA ST GEORGE: 7.7% (2025 1.1%)
 CHEVY LV: 7.3% (2025 4.2%)
-TOYOTA PRESCOTT: 6.2% (2025 3.3%)
-CADILLAC: 6.0% (2025 2.6%)
-KIA LV: 5.2% (2025 6.6%)
-TOYOTA FLAGSTAFF: 4.9% (2025 3.7%)
-SUBARU ST GEORGE: 3.7% (2025 5.3%)
-HONDA SPOKANE: 2.2% (2025 0.1%)
-LINCOLN: 1.7% (2025 0.0%)
-HONDA FLAGSTAFF: 1.3% (2025 0.2%)
-CDJR POST FALLS: 1.3% (2025 0.2%)
+TOYOTA PRESCOTT: 6.1% (2025 3.3%)
+CADILLAC: 5.9% (2025 2.6%)
+KIA LV: 5.2% (2025 6.5%)
+TOYOTA FLAGSTAFF: 4.9% (2025 3.6%)
+SUBARU ST GEORGE: 3.6% (2025 5.3%)
+HONDA SPOKANE: 2.1% (2025 0.1%)
+LINCOLN: 1.6% (2025 0.0%)
+HONDA FLAGSTAFF: 1.3% (2025 0.1%)
+CDJR POST FALLS: 1.2% (2025 0.2%)
 HYUNDAI ST GEORGE: 1.2% (2025 0.4%)
-NISSAN: 1.1% (2025 2.6%)
-TOYOTA SPOKANE: 0.5% (2025 0.3%)
+NISSAN: 1.0% (2025 2.6%)
+TOYOTA SPOKANE: 0.4% (2025 0.2%)
 VW ST GEORGE: 0.4% (2025 0.7%)
-AUDI RENO: 0.1% (2025 0.2%)
-LEXUS: 0.1% (2025 0.1%)
+AUDI RENO: 0.1% (2025 0.1%)
+LEXUS: 0.0% (2025 0.0%)
 AUDI HENDERSON: 0.0% (2025 0.0%)</a:t>
             </a:r>
             <a:endParaRPr lang="en-US" dirty="0"/>
@@ -9154,39 +9154,39 @@
             <a:r>
               <a:rPr lang="en-US" dirty="0"/>
               <a:t>Takeaway with the store call-outs (off the slide): 12 of 33 stores at or above 10%, led by LR LV at 20.6%. The group sits at 9.2%.Source: Qlik - Closed Repair Orders. Customer pay, Jan-Sep by close month. Same-store, INEOS excluded (opened 2026). GMC Prescott body shop labor excluded. Jan-Sep 2026 YTD; green at or above the 10% benchmark, red below.
-LR LV: 20.7% (2025 15.2%)
-HONDA HENDERSON: 15.6% (2025 12.9%)
+LR LV: 20.6% (2025 15.1%)
+HONDA HENDERSON: 15.5% (2025 12.9%)
 LR HENDERSON: 14.3% (2025 9.0%)
-ACURA: 12.7% (2025 8.6%)
+ACURA: 12.7% (2025 8.5%)
 HONDA NORTH: 12.1% (2025 13.1%)
-VOLVO: 11.9% (2025 12.1%)
-NISSAN: 11.6% (2025 3.8%)
-SUBARU ST GEORGE: 10.8% (2025 11.0%)
+VOLVO: 11.9% (2025 12.0%)
+NISSAN: 11.6% (2025 3.7%)
+SUBARU ST GEORGE: 10.7% (2025 11.0%)
 SUBARU PRESCOTT: 10.6% (2025 6.4%)
-HONDA SPOKANE: 10.3% (2025 9.8%)
-SUBARU LV: 10.1% (2025 9.3%)
-TOYOTA HENDERSON: 10.1% (2025 9.7%)
-HYUNDAI PRESCOTT: 9.7% (2025 8.1%)
+HONDA SPOKANE: 10.3% (2025 9.7%)
+SUBARU LV: 10.1% (2025 9.2%)
+TOYOTA HENDERSON: 10.0% (2025 9.7%)
+HYUNDAI PRESCOTT: 9.6% (2025 8.1%)
 VW HENDERSON: 9.5% (2025 7.8%)
-MAZDA: 8.5% (2025 4.6%)
-TOYOTA PRESCOTT: 8.4% (2025 6.1%)
-LEXUS: 8.4% (2025 4.9%)
-KIA LV: 8.3% (2025 7.2%)
-TOYOTA FLAGSTAFF: 8.1% (2025 7.3%)
+MAZDA: 8.4% (2025 4.5%)
+TOYOTA PRESCOTT: 8.4% (2025 6.0%)
+LEXUS: 8.3% (2025 4.9%)
+KIA LV: 8.2% (2025 7.2%)
+TOYOTA FLAGSTAFF: 8.0% (2025 7.3%)
 LINCOLN: 7.5% (2025 2.4%)
-LR RENO: 7.2% (2025 2.5%)
-CHEVY GMC BULLHEAD: 7.1% (2025 3.8%)
+LR RENO: 7.2% (2025 2.4%)
+CHEVY GMC BULLHEAD: 7.0% (2025 3.7%)
 TOYOTA SPOKANE: 7.0% (2025 6.8%)
-GMC PRESCOTT: 6.1% (2025 4.6%)
-KIA ST GEORGE: 6.0% (2025 3.8%)
-CHEVY LV: 5.8% (2025 5.3%)
-VW ST GEORGE: 5.4% (2025 4.0%)
+GMC PRESCOTT: 6.0% (2025 4.5%)
+KIA ST GEORGE: 5.9% (2025 3.7%)
+CHEVY LV: 5.7% (2025 5.3%)
+VW ST GEORGE: 5.4% (2025 3.9%)
 HYUNDAI ST GEORGE: 4.7% (2025 1.6%)
-CADILLAC: 4.7% (2025 4.1%)
-CDJR POST FALLS: 4.2% (2025 6.0%)
-HONDA FLAGSTAFF: 3.2% (2025 2.4%)
-AUDI HENDERSON: 2.5% (2025 1.8%)
-AUDI RENO: 1.9% (2025 0.5%)</a:t>
+CADILLAC: 4.6% (2025 4.1%)
+CDJR POST FALLS: 4.2% (2025 5.9%)
+HONDA FLAGSTAFF: 3.1% (2025 2.3%)
+AUDI HENDERSON: 2.4% (2025 1.8%)
+AUDI RENO: 1.9% (2025 0.4%)</a:t>
             </a:r>
             <a:endParaRPr lang="en-US" dirty="0"/>
           </a:p>
@@ -11038,7 +11038,7 @@
                 <a:ea typeface="Inter" pitchFamily="34" charset="-122"/>
                 <a:cs typeface="Inter" pitchFamily="34" charset="-120"/>
               </a:rPr>
-              <a:t>−1.8 pts</a:t>
+              <a:t>−1.7 pts</a:t>
             </a:r>
             <a:endParaRPr lang="en-US" sz="1600" dirty="0"/>
           </a:p>
@@ -11529,7 +11529,7 @@
                 <a:ea typeface="Inter" pitchFamily="34" charset="-122"/>
                 <a:cs typeface="Inter" pitchFamily="34" charset="-120"/>
               </a:rPr>
-              <a:t>−0.2 pts</a:t>
+              <a:t>−0.1 pts</a:t>
             </a:r>
             <a:endParaRPr lang="en-US" sz="1600" dirty="0"/>
           </a:p>
@@ -12315,7 +12315,7 @@
                 <a:ea typeface="Inter" pitchFamily="34" charset="-122"/>
                 <a:cs typeface="Inter" pitchFamily="34" charset="-120"/>
               </a:rPr>
-              <a:t>+4.0 pts</a:t>
+              <a:t>+3.9 pts</a:t>
             </a:r>
             <a:endParaRPr lang="en-US" sz="1600" dirty="0"/>
           </a:p>
@@ -12472,7 +12472,7 @@
                 <a:ea typeface="Inter" pitchFamily="34" charset="-122"/>
                 <a:cs typeface="Inter" pitchFamily="34" charset="-120"/>
               </a:rPr>
-              <a:t>+3.4 pts</a:t>
+              <a:t>+3.5 pts</a:t>
             </a:r>
             <a:endParaRPr lang="en-US" sz="1600" dirty="0"/>
           </a:p>
@@ -13033,7 +13033,7 @@
                 <a:ea typeface="Inter" pitchFamily="34" charset="-122"/>
                 <a:cs typeface="Inter" pitchFamily="34" charset="-120"/>
               </a:rPr>
-              <a:t>+1.2 pts</a:t>
+              <a:t>+1.3 pts</a:t>
             </a:r>
             <a:endParaRPr lang="en-US" sz="3000" dirty="0"/>
           </a:p>
@@ -13602,7 +13602,7 @@
                 <a:ea typeface="Inter" pitchFamily="34" charset="-122"/>
                 <a:cs typeface="Inter" pitchFamily="34" charset="-120"/>
               </a:rPr>
-              <a:t>Up 1.2 pts to 5.8%, ahead of 2025 in all nine months, but 1.7 pts under the 7.5% benchmark — 4,731 fuel services short.</a:t>
+              <a:t>Up 1.3 pts to 5.8%, ahead of 2025 in all nine months, but 1.7 pts under the 7.5% benchmark — 4,731 fuel services short.</a:t>
             </a:r>
             <a:endParaRPr lang="en-US" sz="1600" dirty="0"/>
           </a:p>
@@ -19485,7 +19485,7 @@
                 <a:ea typeface="Inter" pitchFamily="34" charset="-122"/>
                 <a:cs typeface="Inter" pitchFamily="34" charset="-120"/>
               </a:rPr>
-              <a:t>+4.6 pts</a:t>
+              <a:t>+4.5 pts</a:t>
             </a:r>
             <a:endParaRPr lang="en-US" sz="1600" dirty="0"/>
           </a:p>
@@ -19937,7 +19937,7 @@
                 <a:ea typeface="Inter" pitchFamily="34" charset="-122"/>
                 <a:cs typeface="Inter" pitchFamily="34" charset="-120"/>
               </a:rPr>
-              <a:t>−1.1 pts</a:t>
+              <a:t>−1.2 pts</a:t>
             </a:r>
             <a:endParaRPr lang="en-US" sz="1600" dirty="0"/>
           </a:p>
@@ -20094,7 +20094,7 @@
                 <a:ea typeface="Inter" pitchFamily="34" charset="-122"/>
                 <a:cs typeface="Inter" pitchFamily="34" charset="-120"/>
               </a:rPr>
-              <a:t>−1.0 pts</a:t>
+              <a:t>−0.9 pts</a:t>
             </a:r>
             <a:endParaRPr lang="en-US" sz="1600" dirty="0"/>
           </a:p>
@@ -20352,7 +20352,7 @@
                 <a:ea typeface="Inter" pitchFamily="34" charset="-122"/>
                 <a:cs typeface="Inter" pitchFamily="34" charset="-120"/>
               </a:rPr>
-              <a:t>Toyota Henderson</a:t>
+              <a:t>Volvo</a:t>
             </a:r>
             <a:endParaRPr lang="en-US" sz="1400" dirty="0"/>
           </a:p>
@@ -20372,7 +20372,7 @@
                 <a:ea typeface="Inter" pitchFamily="34" charset="-122"/>
                 <a:cs typeface="Inter" pitchFamily="34" charset="-120"/>
               </a:rPr>
-              <a:t>6.0%  →  </a:t>
+              <a:t>0.0%  →  </a:t>
             </a:r>
             <a:pPr indent="0" marL="0">
               <a:spcAft>
@@ -20383,13 +20383,13 @@
             <a:r>
               <a:rPr lang="en-US" sz="1200" b="1" dirty="0">
                 <a:solidFill>
-                  <a:srgbClr val="A82B26"/>
-                </a:solidFill>
-                <a:latin typeface="Inter" pitchFamily="34" charset="0"/>
-                <a:ea typeface="Inter" pitchFamily="34" charset="-122"/>
-                <a:cs typeface="Inter" pitchFamily="34" charset="-120"/>
-              </a:rPr>
-              <a:t>6.0%</a:t>
+                  <a:srgbClr val="0B7A4A"/>
+                </a:solidFill>
+                <a:latin typeface="Inter" pitchFamily="34" charset="0"/>
+                <a:ea typeface="Inter" pitchFamily="34" charset="-122"/>
+                <a:cs typeface="Inter" pitchFamily="34" charset="-120"/>
+              </a:rPr>
+              <a:t>0.0%</a:t>
             </a:r>
             <a:endParaRPr lang="en-US" sz="1400" dirty="0"/>
           </a:p>
@@ -20422,13 +20422,13 @@
             <a:r>
               <a:rPr lang="en-US" sz="1600" b="1" dirty="0">
                 <a:solidFill>
-                  <a:srgbClr val="A82B26"/>
-                </a:solidFill>
-                <a:latin typeface="Inter" pitchFamily="34" charset="0"/>
-                <a:ea typeface="Inter" pitchFamily="34" charset="-122"/>
-                <a:cs typeface="Inter" pitchFamily="34" charset="-120"/>
-              </a:rPr>
-              <a:t>−0.1 pts</a:t>
+                  <a:srgbClr val="0B7A4A"/>
+                </a:solidFill>
+                <a:latin typeface="Inter" pitchFamily="34" charset="0"/>
+                <a:ea typeface="Inter" pitchFamily="34" charset="-122"/>
+                <a:cs typeface="Inter" pitchFamily="34" charset="-120"/>
+              </a:rPr>
+              <a:t>+0.0 pts</a:t>
             </a:r>
             <a:endParaRPr lang="en-US" sz="1600" dirty="0"/>
           </a:p>
@@ -20529,7 +20529,7 @@
                 <a:ea typeface="Inter" pitchFamily="34" charset="-122"/>
                 <a:cs typeface="Inter" pitchFamily="34" charset="-120"/>
               </a:rPr>
-              <a:t>VW Henderson</a:t>
+              <a:t>Audi Henderson</a:t>
             </a:r>
             <a:endParaRPr lang="en-US" sz="1400" dirty="0"/>
           </a:p>
@@ -20560,7 +20560,7 @@
             <a:r>
               <a:rPr lang="en-US" sz="1200" b="1" dirty="0">
                 <a:solidFill>
-                  <a:srgbClr val="A82B26"/>
+                  <a:srgbClr val="0B7A4A"/>
                 </a:solidFill>
                 <a:latin typeface="Inter" pitchFamily="34" charset="0"/>
                 <a:ea typeface="Inter" pitchFamily="34" charset="-122"/>
@@ -20599,13 +20599,13 @@
             <a:r>
               <a:rPr lang="en-US" sz="1600" b="1" dirty="0">
                 <a:solidFill>
-                  <a:srgbClr val="A82B26"/>
-                </a:solidFill>
-                <a:latin typeface="Inter" pitchFamily="34" charset="0"/>
-                <a:ea typeface="Inter" pitchFamily="34" charset="-122"/>
-                <a:cs typeface="Inter" pitchFamily="34" charset="-120"/>
-              </a:rPr>
-              <a:t>−0.0 pts</a:t>
+                  <a:srgbClr val="0B7A4A"/>
+                </a:solidFill>
+                <a:latin typeface="Inter" pitchFamily="34" charset="0"/>
+                <a:ea typeface="Inter" pitchFamily="34" charset="-122"/>
+                <a:cs typeface="Inter" pitchFamily="34" charset="-120"/>
+              </a:rPr>
+              <a:t>+0.0 pts</a:t>
             </a:r>
             <a:endParaRPr lang="en-US" sz="1600" dirty="0"/>
           </a:p>
@@ -21492,7 +21492,7 @@
                 <a:ea typeface="Inter" pitchFamily="34" charset="-122"/>
                 <a:cs typeface="Inter" pitchFamily="34" charset="-120"/>
               </a:rPr>
-              <a:t>Audi Reno</a:t>
+              <a:t>Hyundai Prescott</a:t>
             </a:r>
             <a:endParaRPr lang="en-US" sz="1400" dirty="0"/>
           </a:p>
@@ -21512,7 +21512,7 @@
                 <a:ea typeface="Inter" pitchFamily="34" charset="-122"/>
                 <a:cs typeface="Inter" pitchFamily="34" charset="-120"/>
               </a:rPr>
-              <a:t>0.0%  →  </a:t>
+              <a:t>6.3%  →  </a:t>
             </a:r>
             <a:pPr indent="0" marL="0">
               <a:spcAft>
@@ -21529,7 +21529,7 @@
                 <a:ea typeface="Inter" pitchFamily="34" charset="-122"/>
                 <a:cs typeface="Inter" pitchFamily="34" charset="-120"/>
               </a:rPr>
-              <a:t>2.4%</a:t>
+              <a:t>8.8%</a:t>
             </a:r>
             <a:endParaRPr lang="en-US" sz="1400" dirty="0"/>
           </a:p>
@@ -21952,7 +21952,7 @@
                 <a:ea typeface="Inter" pitchFamily="34" charset="-122"/>
                 <a:cs typeface="Inter" pitchFamily="34" charset="-120"/>
               </a:rPr>
-              <a:t>+1.4 pts</a:t>
+              <a:t>+1.3 pts</a:t>
             </a:r>
             <a:endParaRPr lang="en-US" sz="3000" dirty="0"/>
           </a:p>
@@ -22521,7 +22521,7 @@
                 <a:ea typeface="Inter" pitchFamily="34" charset="-122"/>
                 <a:cs typeface="Inter" pitchFamily="34" charset="-120"/>
               </a:rPr>
-              <a:t>Up 1.4 pts to 13.2%, ahead of 2025 in all nine months, but 1.7 pts under the 15% benchmark — 4,821 alignments short.</a:t>
+              <a:t>Up 1.3 pts to 13.2%, ahead of 2025 in all nine months, but 1.8 pts under the 15% benchmark — 4,821 alignments short.</a:t>
             </a:r>
             <a:endParaRPr lang="en-US" sz="1600" dirty="0"/>
           </a:p>
@@ -29053,7 +29053,7 @@
                 <a:ea typeface="Inter" pitchFamily="34" charset="-122"/>
                 <a:cs typeface="Inter" pitchFamily="34" charset="-120"/>
               </a:rPr>
-              <a:t>−3.5 pts</a:t>
+              <a:t>−3.6 pts</a:t>
             </a:r>
             <a:endParaRPr lang="en-US" sz="1600" dirty="0"/>
           </a:p>
@@ -29387,7 +29387,7 @@
                 <a:ea typeface="Inter" pitchFamily="34" charset="-122"/>
                 <a:cs typeface="Inter" pitchFamily="34" charset="-120"/>
               </a:rPr>
-              <a:t>−0.8 pts</a:t>
+              <a:t>−0.9 pts</a:t>
             </a:r>
             <a:endParaRPr lang="en-US" sz="1600" dirty="0"/>
           </a:p>
@@ -29488,7 +29488,7 @@
                 <a:ea typeface="Inter" pitchFamily="34" charset="-122"/>
                 <a:cs typeface="Inter" pitchFamily="34" charset="-120"/>
               </a:rPr>
-              <a:t>Toyota Henderson</a:t>
+              <a:t>Chevy LV</a:t>
             </a:r>
             <a:endParaRPr lang="en-US" sz="1400" dirty="0"/>
           </a:p>
@@ -29508,7 +29508,7 @@
                 <a:ea typeface="Inter" pitchFamily="34" charset="-122"/>
                 <a:cs typeface="Inter" pitchFamily="34" charset="-120"/>
               </a:rPr>
-              <a:t>15.0%  →  </a:t>
+              <a:t>13.3%  →  </a:t>
             </a:r>
             <a:pPr indent="0" marL="0">
               <a:spcAft>
@@ -29525,7 +29525,7 @@
                 <a:ea typeface="Inter" pitchFamily="34" charset="-122"/>
                 <a:cs typeface="Inter" pitchFamily="34" charset="-120"/>
               </a:rPr>
-              <a:t>14.5%</a:t>
+              <a:t>12.8%</a:t>
             </a:r>
             <a:endParaRPr lang="en-US" sz="1400" dirty="0"/>
           </a:p>
@@ -31520,7 +31520,7 @@
                 <a:ea typeface="Inter" pitchFamily="34" charset="-122"/>
                 <a:cs typeface="Inter" pitchFamily="34" charset="-120"/>
               </a:rPr>
-              <a:t>Up 1.4 pts to 8.3%, ahead of 2025 in all nine months, but 6.6 pts under the 15% benchmark — 18,493 balances short.</a:t>
+              <a:t>Up 1.4 pts to 8.3%, ahead of 2025 in all nine months, but 6.7 pts under the 15% benchmark — 18,493 balances short.</a:t>
             </a:r>
             <a:endParaRPr lang="en-US" sz="1600" dirty="0"/>
           </a:p>
@@ -36892,7 +36892,7 @@
                 <a:ea typeface="Inter" pitchFamily="34" charset="-122"/>
                 <a:cs typeface="Inter" pitchFamily="34" charset="-120"/>
               </a:rPr>
-              <a:t>+14.9 pts</a:t>
+              <a:t>+14.8 pts</a:t>
             </a:r>
             <a:endParaRPr lang="en-US" sz="1600" dirty="0"/>
           </a:p>
@@ -37049,7 +37049,7 @@
                 <a:ea typeface="Inter" pitchFamily="34" charset="-122"/>
                 <a:cs typeface="Inter" pitchFamily="34" charset="-120"/>
               </a:rPr>
-              <a:t>+13.6 pts</a:t>
+              <a:t>+13.5 pts</a:t>
             </a:r>
             <a:endParaRPr lang="en-US" sz="1600" dirty="0"/>
           </a:p>
@@ -37246,7 +37246,7 @@
                 <a:ea typeface="Inter" pitchFamily="34" charset="-122"/>
                 <a:cs typeface="Inter" pitchFamily="34" charset="-120"/>
               </a:rPr>
-              <a:t>+6.7 pts</a:t>
+              <a:t>+6.6 pts</a:t>
             </a:r>
             <a:endParaRPr lang="en-US" sz="1600" dirty="0"/>
           </a:p>
@@ -37875,7 +37875,7 @@
                 <a:ea typeface="Inter" pitchFamily="34" charset="-122"/>
                 <a:cs typeface="Inter" pitchFamily="34" charset="-120"/>
               </a:rPr>
-              <a:t>−1.6 pts</a:t>
+              <a:t>−1.7 pts</a:t>
             </a:r>
             <a:endParaRPr lang="en-US" sz="1600" dirty="0"/>
           </a:p>
@@ -38032,7 +38032,7 @@
                 <a:ea typeface="Inter" pitchFamily="34" charset="-122"/>
                 <a:cs typeface="Inter" pitchFamily="34" charset="-120"/>
               </a:rPr>
-              <a:t>−1.5 pts</a:t>
+              <a:t>−1.6 pts</a:t>
             </a:r>
             <a:endParaRPr lang="en-US" sz="1600" dirty="0"/>
           </a:p>
@@ -38209,7 +38209,7 @@
                 <a:ea typeface="Inter" pitchFamily="34" charset="-122"/>
                 <a:cs typeface="Inter" pitchFamily="34" charset="-120"/>
               </a:rPr>
-              <a:t>−1.4 pts</a:t>
+              <a:t>−1.3 pts</a:t>
             </a:r>
             <a:endParaRPr lang="en-US" sz="1600" dirty="0"/>
           </a:p>
@@ -39526,7 +39526,7 @@
                 <a:ea typeface="Inter" pitchFamily="34" charset="-122"/>
                 <a:cs typeface="Inter" pitchFamily="34" charset="-120"/>
               </a:rPr>
-              <a:t>+2.5 pts</a:t>
+              <a:t>+2.6 pts</a:t>
             </a:r>
             <a:endParaRPr lang="en-US" sz="1600" dirty="0"/>
           </a:p>
@@ -39910,7 +39910,7 @@
                 <a:ea typeface="Inter" pitchFamily="34" charset="-122"/>
                 <a:cs typeface="Inter" pitchFamily="34" charset="-120"/>
               </a:rPr>
-              <a:t>+1.4 pts</a:t>
+              <a:t>+1.3 pts</a:t>
             </a:r>
             <a:endParaRPr lang="en-US" sz="3000" dirty="0"/>
           </a:p>
@@ -40479,7 +40479,7 @@
                 <a:ea typeface="Inter" pitchFamily="34" charset="-122"/>
                 <a:cs typeface="Inter" pitchFamily="34" charset="-120"/>
               </a:rPr>
-              <a:t>Up 1.4 pts to 9.2%, ahead of 2025 in all nine months, but 0.7 pts under the 10% benchmark — 1,985 brake fluid services short.</a:t>
+              <a:t>Up 1.3 pts to 9.2%, ahead of 2025 in all nine months, but 0.8 pts under the 10% benchmark — 1,985 brake fluid services short.</a:t>
             </a:r>
             <a:endParaRPr lang="en-US" sz="1600" dirty="0"/>
           </a:p>

--- a/day2-deck/decks/Opcode Benchmarks - House Style.pptx
+++ b/day2-deck/decks/Opcode Benchmarks - House Style.pptx
@@ -8086,7 +8086,7 @@
           <a:p>
             <a:r>
               <a:rPr lang="en-US" dirty="0"/>
-              <a:t>Takeaway with the store call-outs (off the slide): Ask Nissan, LR LV and LR Henderson what changed. Ask CDJR Post Falls, Honda North and Subaru St George what got in the way. Ask Mazda, Audi Reno and Kia St George what they started this year.Source: Qlik - Closed Repair Orders. Customer pay, Jan-Sep by close month. Same-store, INEOS excluded (opened 2026). GMC Prescott body shop labor excluded. Top and bottom five stores by change in Brake Fluid %, Jan-Sep 2026 vs 2025, in points. Moving now: Jul-Sep 2026 vs Jan-Mar 2026, each store against itself; the group moved +0.0 pts on the same basis, so part of every store's change is seasonal. Green bar at the right of a row: the store is on both the top five vs last year and the top five moving now.Conversation starter: each top store says one thing they started doing; each bottom store says what got in the way and what they would try. The room trades ideas. Moving now: ask the top three what they started this year.</a:t>
+              <a:t>Takeaway with the store call-outs (off the slide): Ask Nissan, LR LV and LR Henderson what changed. Ask CDJR Post Falls, Honda North and Subaru St George what got in the way. Ask Mazda, Audi Reno and Kia St George what they started this year.Source: Qlik - Closed Repair Orders. Customer pay, Jan-Sep by close month. Same-store, INEOS excluded (opened 2026). GMC Prescott body shop labor excluded. Top and bottom five stores by change in Brake Fluid %, Jan-Sep 2026 vs 2025, in points. Moving now: Jul-Sep 2026 vs Jan-Mar 2026, each store against itself; the group moved +0.0 pts on the same basis, so part of every store's change is seasonal. Green bar at the right of a row: the store is on both the top five vs last year and the top five moving now. Blue bar: a turnaround, on the bottom five vs last year and the top five moving now.Conversation starter: each top store says one thing they started doing; each bottom store says what got in the way and what they would try. The room trades ideas. Moving now: ask the top three what they started this year.</a:t>
             </a:r>
             <a:endParaRPr lang="en-US" dirty="0"/>
           </a:p>
@@ -8262,7 +8262,7 @@
           <a:p>
             <a:r>
               <a:rPr lang="en-US" dirty="0"/>
-              <a:t>Takeaway with the store call-outs (off the slide): 7 of 33 stores at or above 7.5%, led by Subaru St George at 13.8%. The group sits at 5.8%.Source: Qlik - Closed Repair Orders. Customer pay, Jan-Sep by close month. Same-store, INEOS excluded (opened 2026). GMC Prescott body shop labor excluded. Jan-Sep 2026 YTD; green at or above the 7.5% benchmark, red below. Near zero in 2025, so year-over-year gain may be mapping: HONDA SPOKANE, SUBARU ST GEORGE, LR LV, LR RENO.
+              <a:t>Takeaway with the store call-outs (off the slide): 7 of 33 stores at or above 7.5%, led by Subaru St George at 13.8%. The group sits at 5.8%.Source: Qlik - Closed Repair Orders. Customer pay, Jan-Sep by close month. Same-store, INEOS excluded (opened 2026). GMC Prescott body shop labor excluded. Jan-Sep 2026 YTD; green at or above the 7.5% benchmark, red below.
 SUBARU ST GEORGE: 13.8% (2025 0.0%)
 HONDA HENDERSON: 12.0% (2025 10.4%)
 SUBARU PRESCOTT: 9.7% (2025 5.9%)
@@ -8383,7 +8383,7 @@
           <a:p>
             <a:r>
               <a:rPr lang="en-US" dirty="0"/>
-              <a:t>Takeaway with the store call-outs (off the slide): Ask Subaru St George, Lincoln and LR LV what changed. Ask Subaru LV, CDJR Post Falls and Toyota Spokane what got in the way. Ask Mazda, Hyundai St George and Honda Spokane what they started this year.Source: Qlik - Closed Repair Orders. Customer pay, Jan-Sep by close month. Same-store, INEOS excluded (opened 2026). GMC Prescott body shop labor excluded. Top and bottom five stores by change in Fuel Service %, Jan-Sep 2026 vs 2025, in points. Moving now: Jul-Sep 2026 vs Jan-Mar 2026, each store against itself; the group moved −0.3 pts on the same basis, so part of every store's change is seasonal. Green bar at the right of a row: the store is on both the top five vs last year and the top five moving now.Conversation starter: each top store says one thing they started doing; each bottom store says what got in the way and what they would try. The room trades ideas. Moving now: ask the top three what they started this year.</a:t>
+              <a:t>Takeaway with the store call-outs (off the slide): Ask Subaru St George, Lincoln and LR LV what changed. Ask Subaru LV, CDJR Post Falls and Toyota Spokane what got in the way. Ask Mazda, Hyundai St George and Honda Spokane what they started this year.Source: Qlik - Closed Repair Orders. Customer pay, Jan-Sep by close month. Same-store, INEOS excluded (opened 2026). GMC Prescott body shop labor excluded. Top and bottom five stores by change in Fuel Service %, Jan-Sep 2026 vs 2025, in points. Moving now: Jul-Sep 2026 vs Jan-Mar 2026, each store against itself; the group moved −0.3 pts on the same basis, so part of every store's change is seasonal. Green bar at the right of a row: the store is on both the top five vs last year and the top five moving now. Blue bar: a turnaround, on the bottom five vs last year and the top five moving now.Conversation starter: each top store says one thing they started doing; each bottom store says what got in the way and what they would try. The room trades ideas. Moving now: ask the top three what they started this year.</a:t>
             </a:r>
             <a:endParaRPr lang="en-US" dirty="0"/>
           </a:p>
@@ -8680,7 +8680,7 @@
           <a:p>
             <a:r>
               <a:rPr lang="en-US" dirty="0"/>
-              <a:t>Takeaway with the store call-outs (off the slide): Ask Hyundai St George, Hyundai Prescott and GMC Prescott what changed. Ask LR Reno, Kia LV and Subaru LV what got in the way. Ask Audi Henderson, Mazda and Kia St George what they started this year.Source: Qlik - Closed Repair Orders. Customer pay, Jan-Sep by close month. Same-store, INEOS excluded (opened 2026). GMC Prescott body shop labor excluded. Top and bottom five stores by change in Alignment %, Jan-Sep 2026 vs 2025, in points. Moving now: Jul-Sep 2026 vs Jan-Mar 2026, each store against itself; the group moved +0.2 pts on the same basis, so part of every store's change is seasonal. Green bar at the right of a row: the store is on both the top five vs last year and the top five moving now.Conversation starter: each top store says one thing they started doing; each bottom store says what got in the way and what they would try. The room trades ideas. Moving now: ask the top three what they started this year.</a:t>
+              <a:t>Takeaway with the store call-outs (off the slide): Ask Hyundai St George, Hyundai Prescott and GMC Prescott what changed. Ask LR Reno, Kia LV and Subaru LV what got in the way. Ask Audi Henderson, Mazda and Kia St George what they started this year.Source: Qlik - Closed Repair Orders. Customer pay, Jan-Sep by close month. Same-store, INEOS excluded (opened 2026). GMC Prescott body shop labor excluded. Top and bottom five stores by change in Alignment %, Jan-Sep 2026 vs 2025, in points. Moving now: Jul-Sep 2026 vs Jan-Mar 2026, each store against itself; the group moved +0.2 pts on the same basis, so part of every store's change is seasonal. Green bar at the right of a row: the store is on both the top five vs last year and the top five moving now. Blue bar: a turnaround, on the bottom five vs last year and the top five moving now.Conversation starter: each top store says one thing they started doing; each bottom store says what got in the way and what they would try. The room trades ideas. Moving now: ask the top three what they started this year.</a:t>
             </a:r>
             <a:endParaRPr lang="en-US" dirty="0"/>
           </a:p>
@@ -8856,7 +8856,7 @@
           <a:p>
             <a:r>
               <a:rPr lang="en-US" dirty="0"/>
-              <a:t>Takeaway with the store call-outs (off the slide): 4 of 33 stores at or above 15%, led by LR Henderson at 27.0%. The group sits at 8.3%.Source: Qlik - Closed Repair Orders. Customer pay, Jan-Sep by close month. Same-store, INEOS excluded (opened 2026). GMC Prescott body shop labor excluded. Jan-Sep 2026 YTD; green at or above the 15% benchmark, red below. Near zero in 2025, so year-over-year gain may be mapping: HONDA SPOKANE, SUBARU PRESCOTT.
+              <a:t>Takeaway with the store call-outs (off the slide): 4 of 33 stores at or above 15%, led by LR Henderson at 27.0%. The group sits at 8.3%.Source: Qlik - Closed Repair Orders. Customer pay, Jan-Sep by close month. Same-store, INEOS excluded (opened 2026). GMC Prescott body shop labor excluded. Jan-Sep 2026 YTD; green at or above the 15% benchmark, red below.
 LR HENDERSON: 27.0% (2025 22.8%)
 HONDA HENDERSON: 18.4% (2025 17.6%)
 LR LV: 16.9% (2025 3.4%)
@@ -8977,7 +8977,7 @@
           <a:p>
             <a:r>
               <a:rPr lang="en-US" dirty="0"/>
-              <a:t>Takeaway with the store call-outs (off the slide): Ask Subaru Prescott, LR LV and Mazda what changed. Ask Subaru St George, Nissan and Kia LV what got in the way. Ask Mazda, Hyundai Prescott and Honda Spokane what they started this year.Source: Qlik - Closed Repair Orders. Customer pay, Jan-Sep by close month. Same-store, INEOS excluded (opened 2026). GMC Prescott body shop labor excluded. Top and bottom five stores by change in Balance %, Jan-Sep 2026 vs 2025, in points. Moving now: Jul-Sep 2026 vs Jan-Mar 2026, each store against itself; the group moved +0.1 pts on the same basis, so part of every store's change is seasonal. Green bar at the right of a row: the store is on both the top five vs last year and the top five moving now.Conversation starter: each top store says one thing they started doing; each bottom store says what got in the way and what they would try. The room trades ideas. Moving now: ask the top three what they started this year.</a:t>
+              <a:t>Takeaway with the store call-outs (off the slide): Ask Subaru Prescott, LR LV and Mazda what changed. Ask Subaru St George, Nissan and Kia LV what got in the way. Ask Mazda, Hyundai Prescott and Honda Spokane what they started this year.Source: Qlik - Closed Repair Orders. Customer pay, Jan-Sep by close month. Same-store, INEOS excluded (opened 2026). GMC Prescott body shop labor excluded. Top and bottom five stores by change in Balance %, Jan-Sep 2026 vs 2025, in points. Moving now: Jul-Sep 2026 vs Jan-Mar 2026, each store against itself; the group moved +0.1 pts on the same basis, so part of every store's change is seasonal. Green bar at the right of a row: the store is on both the top five vs last year and the top five moving now. Blue bar: a turnaround, on the bottom five vs last year and the top five moving now.Conversation starter: each top store says one thing they started doing; each bottom store says what got in the way and what they would try. The room trades ideas. Moving now: ask the top three what they started this year.</a:t>
             </a:r>
             <a:endParaRPr lang="en-US" dirty="0"/>
           </a:p>

--- a/day2-deck/decks/Opcode Benchmarks - House Style.pptx
+++ b/day2-deck/decks/Opcode Benchmarks - House Style.pptx
@@ -8383,7 +8383,7 @@
           <a:p>
             <a:r>
               <a:rPr lang="en-US" dirty="0"/>
-              <a:t>Takeaway with the store call-outs (off the slide): Ask Subaru St George, Lincoln and LR LV what changed. Ask Subaru LV, CDJR Post Falls and Toyota Spokane what got in the way. Ask Mazda, Hyundai St George and Honda Spokane what they started this year.Source: Qlik - Closed Repair Orders. Customer pay, Jan-Sep by close month. Same-store, INEOS excluded (opened 2026). GMC Prescott body shop labor excluded. Top and bottom five stores by change in Fuel Service %, Jan-Sep 2026 vs 2025, in points. Moving now: Jul-Sep 2026 vs Jan-Mar 2026, each store against itself; the group moved −0.3 pts on the same basis, so part of every store's change is seasonal. Green bar at the right of a row: the store is on both the top five vs last year and the top five moving now. Blue bar: a turnaround, on the bottom five vs last year and the top five moving now.Conversation starter: each top store says one thing they started doing; each bottom store says what got in the way and what they would try. The room trades ideas. Moving now: ask the top three what they started this year.</a:t>
+              <a:t>Takeaway with the store call-outs (off the slide): Ask Subaru St George, Lincoln and LR LV what changed. Ask Subaru LV, CDJR Post Falls and Toyota Spokane what got in the way. Ask Mazda, Hyundai St George and Honda Spokane what they started this year.Source: Qlik - Closed Repair Orders. Customer pay, Jan-Sep by close month. Same-store, INEOS excluded (opened 2026). GMC Prescott body shop labor excluded. Top and bottom five stores by change in Fuel Service %, Jan-Sep 2026 vs 2025, in points. Not ranked: Volvo, Audi Henderson, VW Henderson, Audi Reno (the manufacturer doesn't call for fuel service); ranks out of 29. Moving now: Jul-Sep 2026 vs Jan-Mar 2026, each store against itself; the group moved −0.3 pts on the same basis, so part of every store's change is seasonal. Green bar at the right of a row: the store is on both the top five vs last year and the top five moving now. Blue bar: a turnaround, on the bottom five vs last year and the top five moving now.Conversation starter: each top store says one thing they started doing; each bottom store says what got in the way and what they would try. The room trades ideas. Moving now: ask the top three what they started this year.</a:t>
             </a:r>
             <a:endParaRPr lang="en-US" dirty="0"/>
           </a:p>
@@ -8977,7 +8977,7 @@
           <a:p>
             <a:r>
               <a:rPr lang="en-US" dirty="0"/>
-              <a:t>Takeaway with the store call-outs (off the slide): Ask Subaru Prescott, LR LV and Mazda what changed. Ask Subaru St George, Nissan and Kia LV what got in the way. Ask Mazda, Hyundai Prescott and Honda Spokane what they started this year.Source: Qlik - Closed Repair Orders. Customer pay, Jan-Sep by close month. Same-store, INEOS excluded (opened 2026). GMC Prescott body shop labor excluded. Top and bottom five stores by change in Balance %, Jan-Sep 2026 vs 2025, in points. Moving now: Jul-Sep 2026 vs Jan-Mar 2026, each store against itself; the group moved +0.1 pts on the same basis, so part of every store's change is seasonal. Green bar at the right of a row: the store is on both the top five vs last year and the top five moving now. Blue bar: a turnaround, on the bottom five vs last year and the top five moving now.Conversation starter: each top store says one thing they started doing; each bottom store says what got in the way and what they would try. The room trades ideas. Moving now: ask the top three what they started this year.</a:t>
+              <a:t>Takeaway with the store call-outs (off the slide): Ask Subaru Prescott, LR LV and Mazda what changed. Ask Subaru St George, Nissan and Kia LV what got in the way. Ask Mazda, Hyundai Prescott and Honda Spokane what they started this year.Source: Qlik - Closed Repair Orders. Customer pay, Jan-Sep by close month. Same-store, INEOS excluded (opened 2026). GMC Prescott body shop labor excluded. Top and bottom five stores by change in Balance %, Jan-Sep 2026 vs 2025, in points. Not ranked: Audi Henderson, Audi Reno (the manufacturer doesn't call for balance); ranks out of 31. Moving now: Jul-Sep 2026 vs Jan-Mar 2026, each store against itself; the group moved +0.1 pts on the same basis, so part of every store's change is seasonal. Green bar at the right of a row: the store is on both the top five vs last year and the top five moving now. Blue bar: a turnaround, on the bottom five vs last year and the top five moving now.Conversation starter: each top store says one thing they started doing; each bottom store says what got in the way and what they would try. The room trades ideas. Moving now: ask the top three what they started this year.</a:t>
             </a:r>
             <a:endParaRPr lang="en-US" dirty="0"/>
           </a:p>
@@ -19819,7 +19819,7 @@
                 <a:ea typeface="Inter" pitchFamily="34" charset="-122"/>
                 <a:cs typeface="Inter" pitchFamily="34" charset="-120"/>
               </a:rPr>
-              <a:t>33</a:t>
+              <a:t>29</a:t>
             </a:r>
             <a:endParaRPr lang="en-US" sz="1500" dirty="0"/>
           </a:p>
@@ -19976,7 +19976,7 @@
                 <a:ea typeface="Inter" pitchFamily="34" charset="-122"/>
                 <a:cs typeface="Inter" pitchFamily="34" charset="-120"/>
               </a:rPr>
-              <a:t>32</a:t>
+              <a:t>28</a:t>
             </a:r>
             <a:endParaRPr lang="en-US" sz="1500" dirty="0"/>
           </a:p>
@@ -20153,7 +20153,7 @@
                 <a:ea typeface="Inter" pitchFamily="34" charset="-122"/>
                 <a:cs typeface="Inter" pitchFamily="34" charset="-120"/>
               </a:rPr>
-              <a:t>31</a:t>
+              <a:t>27</a:t>
             </a:r>
             <a:endParaRPr lang="en-US" sz="1500" dirty="0"/>
           </a:p>
@@ -20310,7 +20310,7 @@
                 <a:ea typeface="Inter" pitchFamily="34" charset="-122"/>
                 <a:cs typeface="Inter" pitchFamily="34" charset="-120"/>
               </a:rPr>
-              <a:t>30</a:t>
+              <a:t>26</a:t>
             </a:r>
             <a:endParaRPr lang="en-US" sz="1500" dirty="0"/>
           </a:p>
@@ -20352,7 +20352,7 @@
                 <a:ea typeface="Inter" pitchFamily="34" charset="-122"/>
                 <a:cs typeface="Inter" pitchFamily="34" charset="-120"/>
               </a:rPr>
-              <a:t>Volvo</a:t>
+              <a:t>Toyota Flagstaff</a:t>
             </a:r>
             <a:endParaRPr lang="en-US" sz="1400" dirty="0"/>
           </a:p>
@@ -20372,7 +20372,7 @@
                 <a:ea typeface="Inter" pitchFamily="34" charset="-122"/>
                 <a:cs typeface="Inter" pitchFamily="34" charset="-120"/>
               </a:rPr>
-              <a:t>0.0%  →  </a:t>
+              <a:t>1.6%  →  </a:t>
             </a:r>
             <a:pPr indent="0" marL="0">
               <a:spcAft>
@@ -20389,7 +20389,7 @@
                 <a:ea typeface="Inter" pitchFamily="34" charset="-122"/>
                 <a:cs typeface="Inter" pitchFamily="34" charset="-120"/>
               </a:rPr>
-              <a:t>0.0%</a:t>
+              <a:t>1.6%</a:t>
             </a:r>
             <a:endParaRPr lang="en-US" sz="1400" dirty="0"/>
           </a:p>
@@ -20487,7 +20487,7 @@
                 <a:ea typeface="Inter" pitchFamily="34" charset="-122"/>
                 <a:cs typeface="Inter" pitchFamily="34" charset="-120"/>
               </a:rPr>
-              <a:t>29</a:t>
+              <a:t>25</a:t>
             </a:r>
             <a:endParaRPr lang="en-US" sz="1500" dirty="0"/>
           </a:p>
@@ -20529,7 +20529,7 @@
                 <a:ea typeface="Inter" pitchFamily="34" charset="-122"/>
                 <a:cs typeface="Inter" pitchFamily="34" charset="-120"/>
               </a:rPr>
-              <a:t>Audi Henderson</a:t>
+              <a:t>Toyota Henderson</a:t>
             </a:r>
             <a:endParaRPr lang="en-US" sz="1400" dirty="0"/>
           </a:p>
@@ -20549,7 +20549,7 @@
                 <a:ea typeface="Inter" pitchFamily="34" charset="-122"/>
                 <a:cs typeface="Inter" pitchFamily="34" charset="-120"/>
               </a:rPr>
-              <a:t>0.0%  →  </a:t>
+              <a:t>6.0%  →  </a:t>
             </a:r>
             <a:pPr indent="0" marL="0">
               <a:spcAft>
@@ -20566,7 +20566,7 @@
                 <a:ea typeface="Inter" pitchFamily="34" charset="-122"/>
                 <a:cs typeface="Inter" pitchFamily="34" charset="-120"/>
               </a:rPr>
-              <a:t>0.0%</a:t>
+              <a:t>6.0%</a:t>
             </a:r>
             <a:endParaRPr lang="en-US" sz="1400" dirty="0"/>
           </a:p>
@@ -37757,7 +37757,7 @@
                 <a:ea typeface="Inter" pitchFamily="34" charset="-122"/>
                 <a:cs typeface="Inter" pitchFamily="34" charset="-120"/>
               </a:rPr>
-              <a:t>33</a:t>
+              <a:t>31</a:t>
             </a:r>
             <a:endParaRPr lang="en-US" sz="1500" dirty="0"/>
           </a:p>
@@ -37914,7 +37914,7 @@
                 <a:ea typeface="Inter" pitchFamily="34" charset="-122"/>
                 <a:cs typeface="Inter" pitchFamily="34" charset="-120"/>
               </a:rPr>
-              <a:t>32</a:t>
+              <a:t>30</a:t>
             </a:r>
             <a:endParaRPr lang="en-US" sz="1500" dirty="0"/>
           </a:p>
@@ -38091,7 +38091,7 @@
                 <a:ea typeface="Inter" pitchFamily="34" charset="-122"/>
                 <a:cs typeface="Inter" pitchFamily="34" charset="-120"/>
               </a:rPr>
-              <a:t>31</a:t>
+              <a:t>29</a:t>
             </a:r>
             <a:endParaRPr lang="en-US" sz="1500" dirty="0"/>
           </a:p>
@@ -38248,7 +38248,7 @@
                 <a:ea typeface="Inter" pitchFamily="34" charset="-122"/>
                 <a:cs typeface="Inter" pitchFamily="34" charset="-120"/>
               </a:rPr>
-              <a:t>30</a:t>
+              <a:t>28</a:t>
             </a:r>
             <a:endParaRPr lang="en-US" sz="1500" dirty="0"/>
           </a:p>
@@ -38425,7 +38425,7 @@
                 <a:ea typeface="Inter" pitchFamily="34" charset="-122"/>
                 <a:cs typeface="Inter" pitchFamily="34" charset="-120"/>
               </a:rPr>
-              <a:t>29</a:t>
+              <a:t>27</a:t>
             </a:r>
             <a:endParaRPr lang="en-US" sz="1500" dirty="0"/>
           </a:p>
